--- a/presentation/Systematic-Factor-Income-Fund.pptx
+++ b/presentation/Systematic-Factor-Income-Fund.pptx
@@ -3255,7 +3255,7 @@
                 <a:solidFill>
                   <a:srgbClr val="14B8A6"/>
                 </a:solidFill>
-                <a:latin typeface="Arial"/>
+                <a:latin typeface="Avenir Next"/>
               </a:rPr>
               <a:t>PROPRIETARY INVESTMENT STRATEGY</a:t>
             </a:r>
@@ -3294,7 +3294,7 @@
                 <a:solidFill>
                   <a:srgbClr val="FFFFFF"/>
                 </a:solidFill>
-                <a:latin typeface="Arial"/>
+                <a:latin typeface="Avenir Next"/>
               </a:rPr>
               <a:t>Systematic Factor
 Income Fund</a:t>
@@ -3378,7 +3378,7 @@
                 <a:solidFill>
                   <a:srgbClr val="C7D2DD"/>
                 </a:solidFill>
-                <a:latin typeface="Arial"/>
+                <a:latin typeface="Avenir Next"/>
               </a:rPr>
               <a:t>A rules-based equity portfolio with an options income overlay</a:t>
             </a:r>
@@ -3417,7 +3417,7 @@
                 <a:solidFill>
                   <a:srgbClr val="FFFFFF"/>
                 </a:solidFill>
-                <a:latin typeface="Arial"/>
+                <a:latin typeface="Avenir Next"/>
               </a:rPr>
               <a:t>Strategy overview</a:t>
             </a:r>
@@ -3426,7 +3426,7 @@
                 <a:solidFill>
                   <a:srgbClr val="8B99A8"/>
                 </a:solidFill>
-                <a:latin typeface="Arial"/>
+                <a:latin typeface="Avenir Next"/>
               </a:rPr>
               <a:t>        Confidential, for internal review</a:t>
             </a:r>
@@ -3527,7 +3527,7 @@
                 <a:solidFill>
                   <a:srgbClr val="2A4760"/>
                 </a:solidFill>
-                <a:latin typeface="Arial"/>
+                <a:latin typeface="Avenir Next"/>
               </a:rPr>
               <a:t>03</a:t>
             </a:r>
@@ -3610,7 +3610,7 @@
                 <a:solidFill>
                   <a:srgbClr val="FFFFFF"/>
                 </a:solidFill>
-                <a:latin typeface="Arial"/>
+                <a:latin typeface="Avenir Next"/>
               </a:rPr>
               <a:t>The factor strategy</a:t>
             </a:r>
@@ -3649,7 +3649,7 @@
                 <a:solidFill>
                   <a:srgbClr val="C7D2DD"/>
                 </a:solidFill>
-                <a:latin typeface="Arial"/>
+                <a:latin typeface="Avenir Next"/>
               </a:rPr>
               <a:t>Four traits, measured the same way, combined into one score</a:t>
             </a:r>
@@ -3794,7 +3794,7 @@
                 <a:solidFill>
                   <a:srgbClr val="0E8C7E"/>
                 </a:solidFill>
-                <a:latin typeface="Arial"/>
+                <a:latin typeface="Avenir Next"/>
               </a:rPr>
               <a:t>3 · THE FACTOR STRATEGY</a:t>
             </a:r>
@@ -3833,7 +3833,7 @@
                 <a:solidFill>
                   <a:srgbClr val="0E1B2A"/>
                 </a:solidFill>
-                <a:latin typeface="Arial"/>
+                <a:latin typeface="Avenir Next"/>
               </a:rPr>
               <a:t>What we mean by a factor</a:t>
             </a:r>
@@ -3872,7 +3872,7 @@
                 <a:solidFill>
                   <a:srgbClr val="6B7787"/>
                 </a:solidFill>
-                <a:latin typeface="Arial"/>
+                <a:latin typeface="Avenir Next"/>
               </a:rPr>
               <a:t>A factor is a company trait that has historically earned higher long-run returns</a:t>
             </a:r>
@@ -3955,7 +3955,7 @@
                 <a:solidFill>
                   <a:srgbClr val="1F2A37"/>
                 </a:solidFill>
-                <a:latin typeface="Arial"/>
+                <a:latin typeface="Avenir Next"/>
               </a:rPr>
               <a:t>We score every stock on four such traits, combine the four scores into one, and hold the highest-ranked names. Each trait below is supported by decades of research.</a:t>
             </a:r>
@@ -4086,7 +4086,7 @@
                 <a:solidFill>
                   <a:srgbClr val="0E1B2A"/>
                 </a:solidFill>
-                <a:latin typeface="Arial"/>
+                <a:latin typeface="Avenir Next"/>
               </a:rPr>
               <a:t>Quality</a:t>
             </a:r>
@@ -4125,7 +4125,7 @@
                 <a:solidFill>
                   <a:srgbClr val="6B7787"/>
                 </a:solidFill>
-                <a:latin typeface="Arial"/>
+                <a:latin typeface="Avenir Next"/>
               </a:rPr>
               <a:t>profitable, efficient companies</a:t>
             </a:r>
@@ -4256,7 +4256,7 @@
                 <a:solidFill>
                   <a:srgbClr val="0E1B2A"/>
                 </a:solidFill>
-                <a:latin typeface="Arial"/>
+                <a:latin typeface="Avenir Next"/>
               </a:rPr>
               <a:t>Value</a:t>
             </a:r>
@@ -4295,7 +4295,7 @@
                 <a:solidFill>
                   <a:srgbClr val="6B7787"/>
                 </a:solidFill>
-                <a:latin typeface="Arial"/>
+                <a:latin typeface="Avenir Next"/>
               </a:rPr>
               <a:t>inexpensive vs. fundamentals</a:t>
             </a:r>
@@ -4426,7 +4426,7 @@
                 <a:solidFill>
                   <a:srgbClr val="0E1B2A"/>
                 </a:solidFill>
-                <a:latin typeface="Arial"/>
+                <a:latin typeface="Avenir Next"/>
               </a:rPr>
               <a:t>Momentum</a:t>
             </a:r>
@@ -4465,7 +4465,7 @@
                 <a:solidFill>
                   <a:srgbClr val="6B7787"/>
                 </a:solidFill>
-                <a:latin typeface="Arial"/>
+                <a:latin typeface="Avenir Next"/>
               </a:rPr>
               <a:t>sustained recent strength</a:t>
             </a:r>
@@ -4596,7 +4596,7 @@
                 <a:solidFill>
                   <a:srgbClr val="0E1B2A"/>
                 </a:solidFill>
-                <a:latin typeface="Arial"/>
+                <a:latin typeface="Avenir Next"/>
               </a:rPr>
               <a:t>Low volatility</a:t>
             </a:r>
@@ -4635,7 +4635,7 @@
                 <a:solidFill>
                   <a:srgbClr val="6B7787"/>
                 </a:solidFill>
-                <a:latin typeface="Arial"/>
+                <a:latin typeface="Avenir Next"/>
               </a:rPr>
               <a:t>steadier price behaviour</a:t>
             </a:r>
@@ -4767,7 +4767,7 @@
                 <a:solidFill>
                   <a:srgbClr val="FFFFFF"/>
                 </a:solidFill>
-                <a:latin typeface="Arial"/>
+                <a:latin typeface="Avenir Next"/>
               </a:rPr>
               <a:t>Combined
 score</a:t>
@@ -4900,7 +4900,7 @@
                 <a:solidFill>
                   <a:srgbClr val="FFFFFF"/>
                 </a:solidFill>
-                <a:latin typeface="Arial"/>
+                <a:latin typeface="Avenir Next"/>
               </a:rPr>
               <a:t>Hold the
 best ~20</a:t>
@@ -4940,7 +4940,7 @@
                 <a:solidFill>
                   <a:srgbClr val="6B7787"/>
                 </a:solidFill>
-                <a:latin typeface="Arial"/>
+                <a:latin typeface="Avenir Next"/>
               </a:rPr>
               <a:t>Systematic Factor Income Fund    ·    confidential</a:t>
             </a:r>
@@ -4979,7 +4979,7 @@
                 <a:solidFill>
                   <a:srgbClr val="6B7787"/>
                 </a:solidFill>
-                <a:latin typeface="Arial"/>
+                <a:latin typeface="Avenir Next"/>
               </a:rPr>
               <a:t>07</a:t>
             </a:r>
@@ -5124,7 +5124,7 @@
                 <a:solidFill>
                   <a:srgbClr val="0E8C7E"/>
                 </a:solidFill>
-                <a:latin typeface="Arial"/>
+                <a:latin typeface="Avenir Next"/>
               </a:rPr>
               <a:t>3 · THE FACTOR STRATEGY</a:t>
             </a:r>
@@ -5163,7 +5163,7 @@
                 <a:solidFill>
                   <a:srgbClr val="0E1B2A"/>
                 </a:solidFill>
-                <a:latin typeface="Arial"/>
+                <a:latin typeface="Avenir Next"/>
               </a:rPr>
               <a:t>Putting every company on the same scale</a:t>
             </a:r>
@@ -5202,7 +5202,7 @@
                 <a:solidFill>
                   <a:srgbClr val="6B7787"/>
                 </a:solidFill>
-                <a:latin typeface="Arial"/>
+                <a:latin typeface="Avenir Next"/>
               </a:rPr>
               <a:t>Each trait becomes a score showing how far a company sits from the average</a:t>
             </a:r>
@@ -5285,7 +5285,7 @@
                 <a:solidFill>
                   <a:srgbClr val="1F2A37"/>
                 </a:solidFill>
-                <a:latin typeface="Arial"/>
+                <a:latin typeface="Avenir Next"/>
               </a:rPr>
               <a:t>A score (a z-score) measures how far a company sits above or below the average, counted in standard deviations. A standard deviation is the usual gauge of how spread out a set of numbers is.
 </a:t>
@@ -5295,7 +5295,7 @@
                 <a:solidFill>
                   <a:srgbClr val="1F2A37"/>
                 </a:solidFill>
-                <a:latin typeface="Arial"/>
+                <a:latin typeface="Avenir Next"/>
               </a:rPr>
               <a:t>A score of +1 means one standard deviation better than average. Zero is exactly average.</a:t>
             </a:r>
@@ -5382,7 +5382,7 @@
                 <a:solidFill>
                   <a:srgbClr val="0E8C7E"/>
                 </a:solidFill>
-                <a:latin typeface="Arial"/>
+                <a:latin typeface="Avenir Next"/>
               </a:rPr>
               <a:t>HOW A SCORE IS CALCULATED</a:t>
             </a:r>
@@ -5445,7 +5445,7 @@
                 <a:solidFill>
                   <a:srgbClr val="0E1B2A"/>
                 </a:solidFill>
-                <a:latin typeface="Arial"/>
+                <a:latin typeface="Avenir Next"/>
               </a:rPr>
               <a:t>x</a:t>
             </a:r>
@@ -5454,7 +5454,7 @@
                 <a:solidFill>
                   <a:srgbClr val="6B7787"/>
                 </a:solidFill>
-                <a:latin typeface="Arial"/>
+                <a:latin typeface="Avenir Next"/>
               </a:rPr>
               <a:t> the company's value    </a:t>
             </a:r>
@@ -5463,7 +5463,7 @@
                 <a:solidFill>
                   <a:srgbClr val="0E1B2A"/>
                 </a:solidFill>
-                <a:latin typeface="Arial"/>
+                <a:latin typeface="Avenir Next"/>
               </a:rPr>
               <a:t>μ</a:t>
             </a:r>
@@ -5472,7 +5472,7 @@
                 <a:solidFill>
                   <a:srgbClr val="6B7787"/>
                 </a:solidFill>
-                <a:latin typeface="Arial"/>
+                <a:latin typeface="Avenir Next"/>
               </a:rPr>
               <a:t> the average    </a:t>
             </a:r>
@@ -5481,7 +5481,7 @@
                 <a:solidFill>
                   <a:srgbClr val="0E1B2A"/>
                 </a:solidFill>
-                <a:latin typeface="Arial"/>
+                <a:latin typeface="Avenir Next"/>
               </a:rPr>
               <a:t>σ</a:t>
             </a:r>
@@ -5490,7 +5490,7 @@
                 <a:solidFill>
                   <a:srgbClr val="6B7787"/>
                 </a:solidFill>
-                <a:latin typeface="Arial"/>
+                <a:latin typeface="Avenir Next"/>
               </a:rPr>
               <a:t> standard deviation</a:t>
             </a:r>
@@ -5553,7 +5553,7 @@
                 <a:solidFill>
                   <a:srgbClr val="6B7787"/>
                 </a:solidFill>
-                <a:latin typeface="Arial"/>
+                <a:latin typeface="Avenir Next"/>
               </a:rPr>
               <a:t>Systematic Factor Income Fund    ·    confidential</a:t>
             </a:r>
@@ -5592,7 +5592,7 @@
                 <a:solidFill>
                   <a:srgbClr val="6B7787"/>
                 </a:solidFill>
-                <a:latin typeface="Arial"/>
+                <a:latin typeface="Avenir Next"/>
               </a:rPr>
               <a:t>08</a:t>
             </a:r>
@@ -5737,7 +5737,7 @@
                 <a:solidFill>
                   <a:srgbClr val="0E8C7E"/>
                 </a:solidFill>
-                <a:latin typeface="Arial"/>
+                <a:latin typeface="Avenir Next"/>
               </a:rPr>
               <a:t>3 · THE FOUR FACTORS</a:t>
             </a:r>
@@ -5776,7 +5776,7 @@
                 <a:solidFill>
                   <a:srgbClr val="0E1B2A"/>
                 </a:solidFill>
-                <a:latin typeface="Arial"/>
+                <a:latin typeface="Avenir Next"/>
               </a:rPr>
               <a:t>Value: paying less for what you get</a:t>
             </a:r>
@@ -5859,7 +5859,7 @@
                 <a:solidFill>
                   <a:srgbClr val="1F2A37"/>
                 </a:solidFill>
-                <a:latin typeface="Arial"/>
+                <a:latin typeface="Avenir Next"/>
               </a:rPr>
               <a:t>Cheaper stocks, judged against company fundamentals, have historically out-returned expensive ones.</a:t>
             </a:r>
@@ -5901,7 +5901,7 @@
                 <a:solidFill>
                   <a:srgbClr val="14B8A6"/>
                 </a:solidFill>
-                <a:latin typeface="Arial"/>
+                <a:latin typeface="Avenir Next"/>
               </a:rPr>
               <a:t>▪  </a:t>
             </a:r>
@@ -5910,7 +5910,7 @@
                 <a:solidFill>
                   <a:srgbClr val="1F2A37"/>
                 </a:solidFill>
-                <a:latin typeface="Arial"/>
+                <a:latin typeface="Avenir Next"/>
               </a:rPr>
               <a:t>Price-to-earnings (P/E): </a:t>
             </a:r>
@@ -5919,7 +5919,7 @@
                 <a:solidFill>
                   <a:srgbClr val="1F2A37"/>
                 </a:solidFill>
-                <a:latin typeface="Arial"/>
+                <a:latin typeface="Avenir Next"/>
               </a:rPr>
               <a:t>share price divided by yearly earnings per share. It shows how many dollars you pay for one dollar of profit. Lower is cheaper.</a:t>
             </a:r>
@@ -5938,7 +5938,7 @@
                 <a:solidFill>
                   <a:srgbClr val="14B8A6"/>
                 </a:solidFill>
-                <a:latin typeface="Arial"/>
+                <a:latin typeface="Avenir Next"/>
               </a:rPr>
               <a:t>▪  </a:t>
             </a:r>
@@ -5947,7 +5947,7 @@
                 <a:solidFill>
                   <a:srgbClr val="1F2A37"/>
                 </a:solidFill>
-                <a:latin typeface="Arial"/>
+                <a:latin typeface="Avenir Next"/>
               </a:rPr>
               <a:t>Price-to-book (P/B): </a:t>
             </a:r>
@@ -5956,7 +5956,7 @@
                 <a:solidFill>
                   <a:srgbClr val="1F2A37"/>
                 </a:solidFill>
-                <a:latin typeface="Arial"/>
+                <a:latin typeface="Avenir Next"/>
               </a:rPr>
               <a:t>share price divided by net asset value per share. Lower is cheaper.</a:t>
             </a:r>
@@ -5975,7 +5975,7 @@
                 <a:solidFill>
                   <a:srgbClr val="14B8A6"/>
                 </a:solidFill>
-                <a:latin typeface="Arial"/>
+                <a:latin typeface="Avenir Next"/>
               </a:rPr>
               <a:t>▪  </a:t>
             </a:r>
@@ -5984,7 +5984,7 @@
                 <a:solidFill>
                   <a:srgbClr val="1F2A37"/>
                 </a:solidFill>
-                <a:latin typeface="Arial"/>
+                <a:latin typeface="Avenir Next"/>
               </a:rPr>
               <a:t>We score the inverse (the yield), </a:t>
             </a:r>
@@ -5993,7 +5993,7 @@
                 <a:solidFill>
                   <a:srgbClr val="1F2A37"/>
                 </a:solidFill>
-                <a:latin typeface="Arial"/>
+                <a:latin typeface="Avenir Next"/>
               </a:rPr>
               <a:t>so a lower price produces a higher Value score.</a:t>
             </a:r>
@@ -6080,7 +6080,7 @@
                 <a:solidFill>
                   <a:srgbClr val="0E8C7E"/>
                 </a:solidFill>
-                <a:latin typeface="Arial"/>
+                <a:latin typeface="Avenir Next"/>
               </a:rPr>
               <a:t>HOW IT IS MEASURED</a:t>
             </a:r>
@@ -6103,8 +6103,8 @@
         </p:blipFill>
         <p:spPr>
           <a:xfrm>
-            <a:off x="3789342" y="5029200"/>
-            <a:ext cx="4610267" cy="457199"/>
+            <a:off x="4292281" y="5029200"/>
+            <a:ext cx="3604390" cy="457199"/>
           </a:xfrm>
           <a:prstGeom prst="rect">
             <a:avLst/>
@@ -6167,7 +6167,7 @@
                 <a:solidFill>
                   <a:srgbClr val="6B7787"/>
                 </a:solidFill>
-                <a:latin typeface="Arial"/>
+                <a:latin typeface="Avenir Next"/>
               </a:rPr>
               <a:t>Foundational research:  </a:t>
             </a:r>
@@ -6176,7 +6176,7 @@
                 <a:solidFill>
                   <a:srgbClr val="6B7787"/>
                 </a:solidFill>
-                <a:latin typeface="Arial"/>
+                <a:latin typeface="Avenir Next"/>
               </a:rPr>
               <a:t>Fama &amp; French (1992, 1993); Basu (1977).</a:t>
             </a:r>
@@ -6215,7 +6215,7 @@
                 <a:solidFill>
                   <a:srgbClr val="6B7787"/>
                 </a:solidFill>
-                <a:latin typeface="Arial"/>
+                <a:latin typeface="Avenir Next"/>
               </a:rPr>
               <a:t>Systematic Factor Income Fund    ·    confidential</a:t>
             </a:r>
@@ -6254,7 +6254,7 @@
                 <a:solidFill>
                   <a:srgbClr val="6B7787"/>
                 </a:solidFill>
-                <a:latin typeface="Arial"/>
+                <a:latin typeface="Avenir Next"/>
               </a:rPr>
               <a:t>09</a:t>
             </a:r>
@@ -6399,7 +6399,7 @@
                 <a:solidFill>
                   <a:srgbClr val="0E8C7E"/>
                 </a:solidFill>
-                <a:latin typeface="Arial"/>
+                <a:latin typeface="Avenir Next"/>
               </a:rPr>
               <a:t>3 · THE FOUR FACTORS</a:t>
             </a:r>
@@ -6438,7 +6438,7 @@
                 <a:solidFill>
                   <a:srgbClr val="0E1B2A"/>
                 </a:solidFill>
-                <a:latin typeface="Arial"/>
+                <a:latin typeface="Avenir Next"/>
               </a:rPr>
               <a:t>Momentum: recent strength tends to continue</a:t>
             </a:r>
@@ -6521,7 +6521,7 @@
                 <a:solidFill>
                   <a:srgbClr val="1F2A37"/>
                 </a:solidFill>
-                <a:latin typeface="Arial"/>
+                <a:latin typeface="Avenir Next"/>
               </a:rPr>
               <a:t>Stocks that have outperformed over the past year have tended to keep outperforming over the next months.</a:t>
             </a:r>
@@ -6563,7 +6563,7 @@
                 <a:solidFill>
                   <a:srgbClr val="14B8A6"/>
                 </a:solidFill>
-                <a:latin typeface="Arial"/>
+                <a:latin typeface="Avenir Next"/>
               </a:rPr>
               <a:t>▪  </a:t>
             </a:r>
@@ -6572,7 +6572,7 @@
                 <a:solidFill>
                   <a:srgbClr val="1F2A37"/>
                 </a:solidFill>
-                <a:latin typeface="Arial"/>
+                <a:latin typeface="Avenir Next"/>
               </a:rPr>
               <a:t>We measure the price change over the past year, </a:t>
             </a:r>
@@ -6581,7 +6581,7 @@
                 <a:solidFill>
                   <a:srgbClr val="1F2A37"/>
                 </a:solidFill>
-                <a:latin typeface="Arial"/>
+                <a:latin typeface="Avenir Next"/>
               </a:rPr>
               <a:t>skipping the most recent month, which tends to reverse.</a:t>
             </a:r>
@@ -6600,7 +6600,7 @@
                 <a:solidFill>
                   <a:srgbClr val="14B8A6"/>
                 </a:solidFill>
-                <a:latin typeface="Arial"/>
+                <a:latin typeface="Avenir Next"/>
               </a:rPr>
               <a:t>▪  </a:t>
             </a:r>
@@ -6609,7 +6609,7 @@
                 <a:solidFill>
                   <a:srgbClr val="1F2A37"/>
                 </a:solidFill>
-                <a:latin typeface="Arial"/>
+                <a:latin typeface="Avenir Next"/>
               </a:rPr>
               <a:t>P is the share price; </a:t>
             </a:r>
@@ -6618,7 +6618,7 @@
                 <a:solidFill>
                   <a:srgbClr val="1F2A37"/>
                 </a:solidFill>
-                <a:latin typeface="Arial"/>
+                <a:latin typeface="Avenir Next"/>
               </a:rPr>
               <a:t>the subscripts count trading days back from today (252 days is about one year, 21 is about one month).</a:t>
             </a:r>
@@ -6637,7 +6637,7 @@
                 <a:solidFill>
                   <a:srgbClr val="14B8A6"/>
                 </a:solidFill>
-                <a:latin typeface="Arial"/>
+                <a:latin typeface="Avenir Next"/>
               </a:rPr>
               <a:t>▪  </a:t>
             </a:r>
@@ -6646,7 +6646,7 @@
                 <a:solidFill>
                   <a:srgbClr val="1F2A37"/>
                 </a:solidFill>
-                <a:latin typeface="Arial"/>
+                <a:latin typeface="Avenir Next"/>
               </a:rPr>
               <a:t>The result is then put on the same 0-centred scale </a:t>
             </a:r>
@@ -6655,7 +6655,7 @@
                 <a:solidFill>
                   <a:srgbClr val="1F2A37"/>
                 </a:solidFill>
-                <a:latin typeface="Arial"/>
+                <a:latin typeface="Avenir Next"/>
               </a:rPr>
               <a:t>as the other factors.</a:t>
             </a:r>
@@ -6742,7 +6742,7 @@
                 <a:solidFill>
                   <a:srgbClr val="0E8C7E"/>
                 </a:solidFill>
-                <a:latin typeface="Arial"/>
+                <a:latin typeface="Avenir Next"/>
               </a:rPr>
               <a:t>HOW IT IS MEASURED</a:t>
             </a:r>
@@ -6805,7 +6805,7 @@
                 <a:solidFill>
                   <a:srgbClr val="6B7787"/>
                 </a:solidFill>
-                <a:latin typeface="Arial"/>
+                <a:latin typeface="Avenir Next"/>
               </a:rPr>
               <a:t>Foundational research:  </a:t>
             </a:r>
@@ -6814,7 +6814,7 @@
                 <a:solidFill>
                   <a:srgbClr val="6B7787"/>
                 </a:solidFill>
-                <a:latin typeface="Arial"/>
+                <a:latin typeface="Avenir Next"/>
               </a:rPr>
               <a:t>Jegadeesh &amp; Titman (1993); Asness, Moskowitz &amp; Pedersen (2013).</a:t>
             </a:r>
@@ -6853,7 +6853,7 @@
                 <a:solidFill>
                   <a:srgbClr val="6B7787"/>
                 </a:solidFill>
-                <a:latin typeface="Arial"/>
+                <a:latin typeface="Avenir Next"/>
               </a:rPr>
               <a:t>Systematic Factor Income Fund    ·    confidential</a:t>
             </a:r>
@@ -6892,7 +6892,7 @@
                 <a:solidFill>
                   <a:srgbClr val="6B7787"/>
                 </a:solidFill>
-                <a:latin typeface="Arial"/>
+                <a:latin typeface="Avenir Next"/>
               </a:rPr>
               <a:t>10</a:t>
             </a:r>
@@ -7037,7 +7037,7 @@
                 <a:solidFill>
                   <a:srgbClr val="0E8C7E"/>
                 </a:solidFill>
-                <a:latin typeface="Arial"/>
+                <a:latin typeface="Avenir Next"/>
               </a:rPr>
               <a:t>3 · THE FOUR FACTORS</a:t>
             </a:r>
@@ -7076,7 +7076,7 @@
                 <a:solidFill>
                   <a:srgbClr val="0E1B2A"/>
                 </a:solidFill>
-                <a:latin typeface="Arial"/>
+                <a:latin typeface="Avenir Next"/>
               </a:rPr>
               <a:t>Quality: profitable, well-run businesses</a:t>
             </a:r>
@@ -7159,7 +7159,7 @@
                 <a:solidFill>
                   <a:srgbClr val="1F2A37"/>
                 </a:solidFill>
-                <a:latin typeface="Arial"/>
+                <a:latin typeface="Avenir Next"/>
               </a:rPr>
               <a:t>Highly profitable, efficient companies have delivered better risk-adjusted returns over time.</a:t>
             </a:r>
@@ -7201,7 +7201,7 @@
                 <a:solidFill>
                   <a:srgbClr val="14B8A6"/>
                 </a:solidFill>
-                <a:latin typeface="Arial"/>
+                <a:latin typeface="Avenir Next"/>
               </a:rPr>
               <a:t>▪  </a:t>
             </a:r>
@@ -7210,7 +7210,7 @@
                 <a:solidFill>
                   <a:srgbClr val="1F2A37"/>
                 </a:solidFill>
-                <a:latin typeface="Arial"/>
+                <a:latin typeface="Avenir Next"/>
               </a:rPr>
               <a:t>Return on equity (ROE): </a:t>
             </a:r>
@@ -7219,7 +7219,7 @@
                 <a:solidFill>
                   <a:srgbClr val="1F2A37"/>
                 </a:solidFill>
-                <a:latin typeface="Arial"/>
+                <a:latin typeface="Avenir Next"/>
               </a:rPr>
               <a:t>annual profit as a percentage of shareholders' money. Higher is better.</a:t>
             </a:r>
@@ -7238,7 +7238,7 @@
                 <a:solidFill>
                   <a:srgbClr val="14B8A6"/>
                 </a:solidFill>
-                <a:latin typeface="Arial"/>
+                <a:latin typeface="Avenir Next"/>
               </a:rPr>
               <a:t>▪  </a:t>
             </a:r>
@@ -7247,7 +7247,7 @@
                 <a:solidFill>
                   <a:srgbClr val="1F2A37"/>
                 </a:solidFill>
-                <a:latin typeface="Arial"/>
+                <a:latin typeface="Avenir Next"/>
               </a:rPr>
               <a:t>Margin (gross margin): </a:t>
             </a:r>
@@ -7256,7 +7256,7 @@
                 <a:solidFill>
                   <a:srgbClr val="1F2A37"/>
                 </a:solidFill>
-                <a:latin typeface="Arial"/>
+                <a:latin typeface="Avenir Next"/>
               </a:rPr>
               <a:t>the share of revenue left after the direct cost of goods. Higher means more pricing power.</a:t>
             </a:r>
@@ -7275,7 +7275,7 @@
                 <a:solidFill>
                   <a:srgbClr val="14B8A6"/>
                 </a:solidFill>
-                <a:latin typeface="Arial"/>
+                <a:latin typeface="Avenir Next"/>
               </a:rPr>
               <a:t>▪  </a:t>
             </a:r>
@@ -7284,7 +7284,7 @@
                 <a:solidFill>
                   <a:srgbClr val="1F2A37"/>
                 </a:solidFill>
-                <a:latin typeface="Arial"/>
+                <a:latin typeface="Avenir Next"/>
               </a:rPr>
               <a:t>Quality companies also tend to hold up better in downturns, </a:t>
             </a:r>
@@ -7293,7 +7293,7 @@
                 <a:solidFill>
                   <a:srgbClr val="1F2A37"/>
                 </a:solidFill>
-                <a:latin typeface="Arial"/>
+                <a:latin typeface="Avenir Next"/>
               </a:rPr>
               <a:t>which adds a defensive tilt without any market timing.</a:t>
             </a:r>
@@ -7380,7 +7380,7 @@
                 <a:solidFill>
                   <a:srgbClr val="0E8C7E"/>
                 </a:solidFill>
-                <a:latin typeface="Arial"/>
+                <a:latin typeface="Avenir Next"/>
               </a:rPr>
               <a:t>HOW IT IS MEASURED</a:t>
             </a:r>
@@ -7403,8 +7403,8 @@
         </p:blipFill>
         <p:spPr>
           <a:xfrm>
-            <a:off x="1229443" y="5166360"/>
-            <a:ext cx="9730066" cy="822960"/>
+            <a:off x="2290905" y="5166360"/>
+            <a:ext cx="7607142" cy="822960"/>
           </a:xfrm>
           <a:prstGeom prst="rect">
             <a:avLst/>
@@ -7443,7 +7443,7 @@
                 <a:solidFill>
                   <a:srgbClr val="6B7787"/>
                 </a:solidFill>
-                <a:latin typeface="Arial"/>
+                <a:latin typeface="Avenir Next"/>
               </a:rPr>
               <a:t>Foundational research:  </a:t>
             </a:r>
@@ -7452,7 +7452,7 @@
                 <a:solidFill>
                   <a:srgbClr val="6B7787"/>
                 </a:solidFill>
-                <a:latin typeface="Arial"/>
+                <a:latin typeface="Avenir Next"/>
               </a:rPr>
               <a:t>Novy-Marx (2013); Asness, Frazzini &amp; Pedersen (2019); Piotroski (2000).</a:t>
             </a:r>
@@ -7491,7 +7491,7 @@
                 <a:solidFill>
                   <a:srgbClr val="6B7787"/>
                 </a:solidFill>
-                <a:latin typeface="Arial"/>
+                <a:latin typeface="Avenir Next"/>
               </a:rPr>
               <a:t>Systematic Factor Income Fund    ·    confidential</a:t>
             </a:r>
@@ -7530,7 +7530,7 @@
                 <a:solidFill>
                   <a:srgbClr val="6B7787"/>
                 </a:solidFill>
-                <a:latin typeface="Arial"/>
+                <a:latin typeface="Avenir Next"/>
               </a:rPr>
               <a:t>11</a:t>
             </a:r>
@@ -7675,7 +7675,7 @@
                 <a:solidFill>
                   <a:srgbClr val="0E8C7E"/>
                 </a:solidFill>
-                <a:latin typeface="Arial"/>
+                <a:latin typeface="Avenir Next"/>
               </a:rPr>
               <a:t>3 · THE FOUR FACTORS</a:t>
             </a:r>
@@ -7714,7 +7714,7 @@
                 <a:solidFill>
                   <a:srgbClr val="0E1B2A"/>
                 </a:solidFill>
-                <a:latin typeface="Arial"/>
+                <a:latin typeface="Avenir Next"/>
               </a:rPr>
               <a:t>Low volatility: steadier stocks, better risk-adjusted returns</a:t>
             </a:r>
@@ -7797,7 +7797,7 @@
                 <a:solidFill>
                   <a:srgbClr val="1F2A37"/>
                 </a:solidFill>
-                <a:latin typeface="Arial"/>
+                <a:latin typeface="Avenir Next"/>
               </a:rPr>
               <a:t>Calmer stocks have historically delivered stronger returns per unit of risk than the most volatile ones.</a:t>
             </a:r>
@@ -7839,7 +7839,7 @@
                 <a:solidFill>
                   <a:srgbClr val="14B8A6"/>
                 </a:solidFill>
-                <a:latin typeface="Arial"/>
+                <a:latin typeface="Avenir Next"/>
               </a:rPr>
               <a:t>▪  </a:t>
             </a:r>
@@ -7848,7 +7848,7 @@
                 <a:solidFill>
                   <a:srgbClr val="1F2A37"/>
                 </a:solidFill>
-                <a:latin typeface="Arial"/>
+                <a:latin typeface="Avenir Next"/>
               </a:rPr>
               <a:t>Volatility (σ): </a:t>
             </a:r>
@@ -7857,7 +7857,7 @@
                 <a:solidFill>
                   <a:srgbClr val="1F2A37"/>
                 </a:solidFill>
-                <a:latin typeface="Arial"/>
+                <a:latin typeface="Avenir Next"/>
               </a:rPr>
               <a:t>how much a stock's daily price bounces around, measured over the past year. Higher means a wilder ride.</a:t>
             </a:r>
@@ -7876,7 +7876,7 @@
                 <a:solidFill>
                   <a:srgbClr val="14B8A6"/>
                 </a:solidFill>
-                <a:latin typeface="Arial"/>
+                <a:latin typeface="Avenir Next"/>
               </a:rPr>
               <a:t>▪  </a:t>
             </a:r>
@@ -7885,7 +7885,7 @@
                 <a:solidFill>
                   <a:srgbClr val="1F2A37"/>
                 </a:solidFill>
-                <a:latin typeface="Arial"/>
+                <a:latin typeface="Avenir Next"/>
               </a:rPr>
               <a:t>We score the negative of volatility, </a:t>
             </a:r>
@@ -7894,7 +7894,7 @@
                 <a:solidFill>
                   <a:srgbClr val="1F2A37"/>
                 </a:solidFill>
-                <a:latin typeface="Arial"/>
+                <a:latin typeface="Avenir Next"/>
               </a:rPr>
               <a:t>so a calmer stock receives a higher score.</a:t>
             </a:r>
@@ -7913,7 +7913,7 @@
                 <a:solidFill>
                   <a:srgbClr val="14B8A6"/>
                 </a:solidFill>
-                <a:latin typeface="Arial"/>
+                <a:latin typeface="Avenir Next"/>
               </a:rPr>
               <a:t>▪  </a:t>
             </a:r>
@@ -7922,7 +7922,7 @@
                 <a:solidFill>
                   <a:srgbClr val="1F2A37"/>
                 </a:solidFill>
-                <a:latin typeface="Arial"/>
+                <a:latin typeface="Avenir Next"/>
               </a:rPr>
               <a:t>Together with Quality, </a:t>
             </a:r>
@@ -7931,7 +7931,7 @@
                 <a:solidFill>
                   <a:srgbClr val="1F2A37"/>
                 </a:solidFill>
-                <a:latin typeface="Arial"/>
+                <a:latin typeface="Avenir Next"/>
               </a:rPr>
               <a:t>this is what makes the portfolio defensive on its own, without a separate risk-off switch.</a:t>
             </a:r>
@@ -8018,7 +8018,7 @@
                 <a:solidFill>
                   <a:srgbClr val="0E8C7E"/>
                 </a:solidFill>
-                <a:latin typeface="Arial"/>
+                <a:latin typeface="Avenir Next"/>
               </a:rPr>
               <a:t>HOW IT IS MEASURED</a:t>
             </a:r>
@@ -8041,8 +8041,8 @@
         </p:blipFill>
         <p:spPr>
           <a:xfrm>
-            <a:off x="2764312" y="5166360"/>
-            <a:ext cx="6660328" cy="822960"/>
+            <a:off x="3624100" y="5166360"/>
+            <a:ext cx="4940752" cy="822960"/>
           </a:xfrm>
           <a:prstGeom prst="rect">
             <a:avLst/>
@@ -8081,7 +8081,7 @@
                 <a:solidFill>
                   <a:srgbClr val="6B7787"/>
                 </a:solidFill>
-                <a:latin typeface="Arial"/>
+                <a:latin typeface="Avenir Next"/>
               </a:rPr>
               <a:t>Foundational research:  </a:t>
             </a:r>
@@ -8090,7 +8090,7 @@
                 <a:solidFill>
                   <a:srgbClr val="6B7787"/>
                 </a:solidFill>
-                <a:latin typeface="Arial"/>
+                <a:latin typeface="Avenir Next"/>
               </a:rPr>
               <a:t>Ang, Hodrick, Xing &amp; Zhang (2006); Frazzini &amp; Pedersen (2014); Baker, Bradley &amp; Wurgler (2011).</a:t>
             </a:r>
@@ -8129,7 +8129,7 @@
                 <a:solidFill>
                   <a:srgbClr val="6B7787"/>
                 </a:solidFill>
-                <a:latin typeface="Arial"/>
+                <a:latin typeface="Avenir Next"/>
               </a:rPr>
               <a:t>Systematic Factor Income Fund    ·    confidential</a:t>
             </a:r>
@@ -8168,7 +8168,7 @@
                 <a:solidFill>
                   <a:srgbClr val="6B7787"/>
                 </a:solidFill>
-                <a:latin typeface="Arial"/>
+                <a:latin typeface="Avenir Next"/>
               </a:rPr>
               <a:t>12</a:t>
             </a:r>
@@ -8313,7 +8313,7 @@
                 <a:solidFill>
                   <a:srgbClr val="0E8C7E"/>
                 </a:solidFill>
-                <a:latin typeface="Arial"/>
+                <a:latin typeface="Avenir Next"/>
               </a:rPr>
               <a:t>3 · THE FACTOR STRATEGY</a:t>
             </a:r>
@@ -8352,7 +8352,7 @@
                 <a:solidFill>
                   <a:srgbClr val="0E1B2A"/>
                 </a:solidFill>
-                <a:latin typeface="Arial"/>
+                <a:latin typeface="Avenir Next"/>
               </a:rPr>
               <a:t>Combining the four into one score</a:t>
             </a:r>
@@ -8391,7 +8391,7 @@
                 <a:solidFill>
                   <a:srgbClr val="6B7787"/>
                 </a:solidFill>
-                <a:latin typeface="Arial"/>
+                <a:latin typeface="Avenir Next"/>
               </a:rPr>
               <a:t>Equal weight, with safeguards that keep the comparison fair and honest</a:t>
             </a:r>
@@ -8477,7 +8477,7 @@
                 <a:solidFill>
                   <a:srgbClr val="14B8A6"/>
                 </a:solidFill>
-                <a:latin typeface="Arial"/>
+                <a:latin typeface="Avenir Next"/>
               </a:rPr>
               <a:t>▪  </a:t>
             </a:r>
@@ -8486,7 +8486,7 @@
                 <a:solidFill>
                   <a:srgbClr val="1F2A37"/>
                 </a:solidFill>
-                <a:latin typeface="Arial"/>
+                <a:latin typeface="Avenir Next"/>
               </a:rPr>
               <a:t>Equal weight to start. </a:t>
             </a:r>
@@ -8495,7 +8495,7 @@
                 <a:solidFill>
                   <a:srgbClr val="1F2A37"/>
                 </a:solidFill>
-                <a:latin typeface="Arial"/>
+                <a:latin typeface="Avenir Next"/>
               </a:rPr>
               <a:t>Each factor counts for one quarter of the score. With no strong reason to favour one, equal weighting is the most defensible starting point.</a:t>
             </a:r>
@@ -8514,7 +8514,7 @@
                 <a:solidFill>
                   <a:srgbClr val="14B8A6"/>
                 </a:solidFill>
-                <a:latin typeface="Arial"/>
+                <a:latin typeface="Avenir Next"/>
               </a:rPr>
               <a:t>▪  </a:t>
             </a:r>
@@ -8523,7 +8523,7 @@
                 <a:solidFill>
                   <a:srgbClr val="1F2A37"/>
                 </a:solidFill>
-                <a:latin typeface="Arial"/>
+                <a:latin typeface="Avenir Next"/>
               </a:rPr>
               <a:t>Extreme values are trimmed before scoring. </a:t>
             </a:r>
@@ -8532,7 +8532,7 @@
                 <a:solidFill>
                   <a:srgbClr val="1F2A37"/>
                 </a:solidFill>
-                <a:latin typeface="Arial"/>
+                <a:latin typeface="Avenir Next"/>
               </a:rPr>
               <a:t>A handful of outliers cannot distort the scale, so all four factors genuinely count equally.</a:t>
             </a:r>
@@ -8551,7 +8551,7 @@
                 <a:solidFill>
                   <a:srgbClr val="14B8A6"/>
                 </a:solidFill>
-                <a:latin typeface="Arial"/>
+                <a:latin typeface="Avenir Next"/>
               </a:rPr>
               <a:t>▪  </a:t>
             </a:r>
@@ -8560,7 +8560,7 @@
                 <a:solidFill>
                   <a:srgbClr val="1F2A37"/>
                 </a:solidFill>
-                <a:latin typeface="Arial"/>
+                <a:latin typeface="Avenir Next"/>
               </a:rPr>
               <a:t>Only public information is used. </a:t>
             </a:r>
@@ -8569,7 +8569,7 @@
                 <a:solidFill>
                   <a:srgbClr val="1F2A37"/>
                 </a:solidFill>
-                <a:latin typeface="Arial"/>
+                <a:latin typeface="Avenir Next"/>
               </a:rPr>
               <a:t>A company's financials enter the score only once they have actually been filed, so the historical test never sees the future.</a:t>
             </a:r>
@@ -8656,7 +8656,7 @@
                 <a:solidFill>
                   <a:srgbClr val="0E8C7E"/>
                 </a:solidFill>
-                <a:latin typeface="Arial"/>
+                <a:latin typeface="Avenir Next"/>
               </a:rPr>
               <a:t>THE COMBINED SCORE</a:t>
             </a:r>
@@ -8719,7 +8719,7 @@
                 <a:solidFill>
                   <a:srgbClr val="6B7787"/>
                 </a:solidFill>
-                <a:latin typeface="Arial"/>
+                <a:latin typeface="Avenir Next"/>
               </a:rPr>
               <a:t>Q, V, M, L are the four factor scores. The highest combined scores become the portfolio.</a:t>
             </a:r>
@@ -8758,7 +8758,7 @@
                 <a:solidFill>
                   <a:srgbClr val="6B7787"/>
                 </a:solidFill>
-                <a:latin typeface="Arial"/>
+                <a:latin typeface="Avenir Next"/>
               </a:rPr>
               <a:t>Systematic Factor Income Fund    ·    confidential</a:t>
             </a:r>
@@ -8797,7 +8797,7 @@
                 <a:solidFill>
                   <a:srgbClr val="6B7787"/>
                 </a:solidFill>
-                <a:latin typeface="Arial"/>
+                <a:latin typeface="Avenir Next"/>
               </a:rPr>
               <a:t>13</a:t>
             </a:r>
@@ -8898,7 +8898,7 @@
                 <a:solidFill>
                   <a:srgbClr val="2A4760"/>
                 </a:solidFill>
-                <a:latin typeface="Arial"/>
+                <a:latin typeface="Avenir Next"/>
               </a:rPr>
               <a:t>04</a:t>
             </a:r>
@@ -8981,7 +8981,7 @@
                 <a:solidFill>
                   <a:srgbClr val="FFFFFF"/>
                 </a:solidFill>
-                <a:latin typeface="Arial"/>
+                <a:latin typeface="Avenir Next"/>
               </a:rPr>
               <a:t>Building the portfolio</a:t>
             </a:r>
@@ -9020,7 +9020,7 @@
                 <a:solidFill>
                   <a:srgbClr val="C7D2DD"/>
                 </a:solidFill>
-                <a:latin typeface="Arial"/>
+                <a:latin typeface="Avenir Next"/>
               </a:rPr>
               <a:t>Turning scores into holdings, inside strict risk limits</a:t>
             </a:r>
@@ -9165,7 +9165,7 @@
                 <a:solidFill>
                   <a:srgbClr val="0E8C7E"/>
                 </a:solidFill>
-                <a:latin typeface="Arial"/>
+                <a:latin typeface="Avenir Next"/>
               </a:rPr>
               <a:t>4 · BUILDING THE PORTFOLIO</a:t>
             </a:r>
@@ -9204,7 +9204,7 @@
                 <a:solidFill>
                   <a:srgbClr val="0E1B2A"/>
                 </a:solidFill>
-                <a:latin typeface="Arial"/>
+                <a:latin typeface="Avenir Next"/>
               </a:rPr>
               <a:t>From scores to holdings</a:t>
             </a:r>
@@ -9243,7 +9243,7 @@
                 <a:solidFill>
                   <a:srgbClr val="6B7787"/>
                 </a:solidFill>
-                <a:latin typeface="Arial"/>
+                <a:latin typeface="Avenir Next"/>
               </a:rPr>
               <a:t>The scores choose the names. Hard limits keep the portfolio diversified.</a:t>
             </a:r>
@@ -9329,7 +9329,7 @@
                 <a:solidFill>
                   <a:srgbClr val="14B8A6"/>
                 </a:solidFill>
-                <a:latin typeface="Arial"/>
+                <a:latin typeface="Avenir Next"/>
               </a:rPr>
               <a:t>▪  </a:t>
             </a:r>
@@ -9338,7 +9338,7 @@
                 <a:solidFill>
                   <a:srgbClr val="1F2A37"/>
                 </a:solidFill>
-                <a:latin typeface="Arial"/>
+                <a:latin typeface="Avenir Next"/>
               </a:rPr>
               <a:t>Rank by combined score. </a:t>
             </a:r>
@@ -9347,7 +9347,7 @@
                 <a:solidFill>
                   <a:srgbClr val="1F2A37"/>
                 </a:solidFill>
-                <a:latin typeface="Arial"/>
+                <a:latin typeface="Avenir Next"/>
               </a:rPr>
               <a:t>The top-scoring names are the candidates to hold.</a:t>
             </a:r>
@@ -9366,7 +9366,7 @@
                 <a:solidFill>
                   <a:srgbClr val="14B8A6"/>
                 </a:solidFill>
-                <a:latin typeface="Arial"/>
+                <a:latin typeface="Avenir Next"/>
               </a:rPr>
               <a:t>▪  </a:t>
             </a:r>
@@ -9375,7 +9375,7 @@
                 <a:solidFill>
                   <a:srgbClr val="1F2A37"/>
                 </a:solidFill>
-                <a:latin typeface="Arial"/>
+                <a:latin typeface="Avenir Next"/>
               </a:rPr>
               <a:t>Maximise total score, subject to limits. </a:t>
             </a:r>
@@ -9384,7 +9384,7 @@
                 <a:solidFill>
                   <a:srgbClr val="1F2A37"/>
                 </a:solidFill>
-                <a:latin typeface="Arial"/>
+                <a:latin typeface="Avenir Next"/>
               </a:rPr>
               <a:t>A standard optimiser sets the weights to favour the best-scoring names while respecting every limit below.</a:t>
             </a:r>
@@ -9403,7 +9403,7 @@
                 <a:solidFill>
                   <a:srgbClr val="14B8A6"/>
                 </a:solidFill>
-                <a:latin typeface="Arial"/>
+                <a:latin typeface="Avenir Next"/>
               </a:rPr>
               <a:t>▪  </a:t>
             </a:r>
@@ -9412,7 +9412,7 @@
                 <a:solidFill>
                   <a:srgbClr val="1F2A37"/>
                 </a:solidFill>
-                <a:latin typeface="Arial"/>
+                <a:latin typeface="Avenir Next"/>
               </a:rPr>
               <a:t>The result is roughly equal-weight across about 20 stocks. </a:t>
             </a:r>
@@ -9421,7 +9421,7 @@
                 <a:solidFill>
                   <a:srgbClr val="1F2A37"/>
                 </a:solidFill>
-                <a:latin typeface="Arial"/>
+                <a:latin typeface="Avenir Next"/>
               </a:rPr>
               <a:t>Equal-weight factor portfolios have travelled well in out-of-sample testing.</a:t>
             </a:r>
@@ -9508,7 +9508,7 @@
                 <a:solidFill>
                   <a:srgbClr val="0E8C7E"/>
                 </a:solidFill>
-                <a:latin typeface="Arial"/>
+                <a:latin typeface="Avenir Next"/>
               </a:rPr>
               <a:t>WHAT THE OPTIMISER SOLVES</a:t>
             </a:r>
@@ -9571,7 +9571,7 @@
                 <a:solidFill>
                   <a:srgbClr val="6B7787"/>
                 </a:solidFill>
-                <a:latin typeface="Arial"/>
+                <a:latin typeface="Avenir Next"/>
               </a:rPr>
               <a:t>w is each stock's weight; score is its combined factor score. Read: choose weights that put the most money in the best-scoring names.</a:t>
             </a:r>
@@ -9610,7 +9610,7 @@
                 <a:solidFill>
                   <a:srgbClr val="6B7787"/>
                 </a:solidFill>
-                <a:latin typeface="Arial"/>
+                <a:latin typeface="Avenir Next"/>
               </a:rPr>
               <a:t>Systematic Factor Income Fund    ·    confidential</a:t>
             </a:r>
@@ -9649,7 +9649,7 @@
                 <a:solidFill>
                   <a:srgbClr val="6B7787"/>
                 </a:solidFill>
-                <a:latin typeface="Arial"/>
+                <a:latin typeface="Avenir Next"/>
               </a:rPr>
               <a:t>14</a:t>
             </a:r>
@@ -9794,7 +9794,7 @@
                 <a:solidFill>
                   <a:srgbClr val="0E8C7E"/>
                 </a:solidFill>
-                <a:latin typeface="Arial"/>
+                <a:latin typeface="Avenir Next"/>
               </a:rPr>
               <a:t>CONTENTS</a:t>
             </a:r>
@@ -9833,7 +9833,7 @@
                 <a:solidFill>
                   <a:srgbClr val="0E1B2A"/>
                 </a:solidFill>
-                <a:latin typeface="Arial"/>
+                <a:latin typeface="Avenir Next"/>
               </a:rPr>
               <a:t>What this overview covers</a:t>
             </a:r>
@@ -9916,7 +9916,7 @@
                 <a:solidFill>
                   <a:srgbClr val="0E8C7E"/>
                 </a:solidFill>
-                <a:latin typeface="Arial"/>
+                <a:latin typeface="Avenir Next"/>
               </a:rPr>
               <a:t>1</a:t>
             </a:r>
@@ -9955,7 +9955,7 @@
                 <a:solidFill>
                   <a:srgbClr val="0E1B2A"/>
                 </a:solidFill>
-                <a:latin typeface="Arial"/>
+                <a:latin typeface="Avenir Next"/>
               </a:rPr>
               <a:t>The objective</a:t>
             </a:r>
@@ -9994,7 +9994,7 @@
                 <a:solidFill>
                   <a:srgbClr val="6B7787"/>
                 </a:solidFill>
-                <a:latin typeface="Arial"/>
+                <a:latin typeface="Avenir Next"/>
               </a:rPr>
               <a:t>What the fund is built to do</a:t>
             </a:r>
@@ -10033,7 +10033,7 @@
                 <a:solidFill>
                   <a:srgbClr val="0E8C7E"/>
                 </a:solidFill>
-                <a:latin typeface="Arial"/>
+                <a:latin typeface="Avenir Next"/>
               </a:rPr>
               <a:t>2</a:t>
             </a:r>
@@ -10072,7 +10072,7 @@
                 <a:solidFill>
                   <a:srgbClr val="0E1B2A"/>
                 </a:solidFill>
-                <a:latin typeface="Arial"/>
+                <a:latin typeface="Avenir Next"/>
               </a:rPr>
               <a:t>Why this approach</a:t>
             </a:r>
@@ -10111,7 +10111,7 @@
                 <a:solidFill>
                   <a:srgbClr val="6B7787"/>
                 </a:solidFill>
-                <a:latin typeface="Arial"/>
+                <a:latin typeface="Avenir Next"/>
               </a:rPr>
               <a:t>Proven return drivers, plus an income layer</a:t>
             </a:r>
@@ -10150,7 +10150,7 @@
                 <a:solidFill>
                   <a:srgbClr val="0E8C7E"/>
                 </a:solidFill>
-                <a:latin typeface="Arial"/>
+                <a:latin typeface="Avenir Next"/>
               </a:rPr>
               <a:t>3</a:t>
             </a:r>
@@ -10189,7 +10189,7 @@
                 <a:solidFill>
                   <a:srgbClr val="0E1B2A"/>
                 </a:solidFill>
-                <a:latin typeface="Arial"/>
+                <a:latin typeface="Avenir Next"/>
               </a:rPr>
               <a:t>The factor strategy</a:t>
             </a:r>
@@ -10228,7 +10228,7 @@
                 <a:solidFill>
                   <a:srgbClr val="6B7787"/>
                 </a:solidFill>
-                <a:latin typeface="Arial"/>
+                <a:latin typeface="Avenir Next"/>
               </a:rPr>
               <a:t>The four traits we select stocks on</a:t>
             </a:r>
@@ -10267,7 +10267,7 @@
                 <a:solidFill>
                   <a:srgbClr val="0E8C7E"/>
                 </a:solidFill>
-                <a:latin typeface="Arial"/>
+                <a:latin typeface="Avenir Next"/>
               </a:rPr>
               <a:t>4</a:t>
             </a:r>
@@ -10306,7 +10306,7 @@
                 <a:solidFill>
                   <a:srgbClr val="0E1B2A"/>
                 </a:solidFill>
-                <a:latin typeface="Arial"/>
+                <a:latin typeface="Avenir Next"/>
               </a:rPr>
               <a:t>Building the portfolio</a:t>
             </a:r>
@@ -10345,7 +10345,7 @@
                 <a:solidFill>
                   <a:srgbClr val="6B7787"/>
                 </a:solidFill>
-                <a:latin typeface="Arial"/>
+                <a:latin typeface="Avenir Next"/>
               </a:rPr>
               <a:t>Turning scores into holdings, within strict limits</a:t>
             </a:r>
@@ -10384,7 +10384,7 @@
                 <a:solidFill>
                   <a:srgbClr val="0E8C7E"/>
                 </a:solidFill>
-                <a:latin typeface="Arial"/>
+                <a:latin typeface="Avenir Next"/>
               </a:rPr>
               <a:t>5</a:t>
             </a:r>
@@ -10423,7 +10423,7 @@
                 <a:solidFill>
                   <a:srgbClr val="0E1B2A"/>
                 </a:solidFill>
-                <a:latin typeface="Arial"/>
+                <a:latin typeface="Avenir Next"/>
               </a:rPr>
               <a:t>The income overlay</a:t>
             </a:r>
@@ -10462,7 +10462,7 @@
                 <a:solidFill>
                   <a:srgbClr val="6B7787"/>
                 </a:solidFill>
-                <a:latin typeface="Arial"/>
+                <a:latin typeface="Avenir Next"/>
               </a:rPr>
               <a:t>Earning option premium on what we own</a:t>
             </a:r>
@@ -10501,7 +10501,7 @@
                 <a:solidFill>
                   <a:srgbClr val="0E8C7E"/>
                 </a:solidFill>
-                <a:latin typeface="Arial"/>
+                <a:latin typeface="Avenir Next"/>
               </a:rPr>
               <a:t>6</a:t>
             </a:r>
@@ -10540,7 +10540,7 @@
                 <a:solidFill>
                   <a:srgbClr val="0E1B2A"/>
                 </a:solidFill>
-                <a:latin typeface="Arial"/>
+                <a:latin typeface="Avenir Next"/>
               </a:rPr>
               <a:t>The data pipeline</a:t>
             </a:r>
@@ -10579,7 +10579,7 @@
                 <a:solidFill>
                   <a:srgbClr val="6B7787"/>
                 </a:solidFill>
-                <a:latin typeface="Arial"/>
+                <a:latin typeface="Avenir Next"/>
               </a:rPr>
               <a:t>Where the numbers come from</a:t>
             </a:r>
@@ -10618,7 +10618,7 @@
                 <a:solidFill>
                   <a:srgbClr val="0E8C7E"/>
                 </a:solidFill>
-                <a:latin typeface="Arial"/>
+                <a:latin typeface="Avenir Next"/>
               </a:rPr>
               <a:t>7</a:t>
             </a:r>
@@ -10657,7 +10657,7 @@
                 <a:solidFill>
                   <a:srgbClr val="0E1B2A"/>
                 </a:solidFill>
-                <a:latin typeface="Arial"/>
+                <a:latin typeface="Avenir Next"/>
               </a:rPr>
               <a:t>Execution, risk and results</a:t>
             </a:r>
@@ -10696,7 +10696,7 @@
                 <a:solidFill>
                   <a:srgbClr val="6B7787"/>
                 </a:solidFill>
-                <a:latin typeface="Arial"/>
+                <a:latin typeface="Avenir Next"/>
               </a:rPr>
               <a:t>How we trade, how we control risk, how it tested</a:t>
             </a:r>
@@ -10735,7 +10735,7 @@
                 <a:solidFill>
                   <a:srgbClr val="0E8C7E"/>
                 </a:solidFill>
-                <a:latin typeface="Arial"/>
+                <a:latin typeface="Avenir Next"/>
               </a:rPr>
               <a:t>8</a:t>
             </a:r>
@@ -10774,7 +10774,7 @@
                 <a:solidFill>
                   <a:srgbClr val="0E1B2A"/>
                 </a:solidFill>
-                <a:latin typeface="Arial"/>
+                <a:latin typeface="Avenir Next"/>
               </a:rPr>
               <a:t>Operations</a:t>
             </a:r>
@@ -10813,7 +10813,7 @@
                 <a:solidFill>
                   <a:srgbClr val="6B7787"/>
                 </a:solidFill>
-                <a:latin typeface="Arial"/>
+                <a:latin typeface="Avenir Next"/>
               </a:rPr>
               <a:t>Monitoring and infrastructure</a:t>
             </a:r>
@@ -10852,7 +10852,7 @@
                 <a:solidFill>
                   <a:srgbClr val="0E8C7E"/>
                 </a:solidFill>
-                <a:latin typeface="Arial"/>
+                <a:latin typeface="Avenir Next"/>
               </a:rPr>
               <a:t>9</a:t>
             </a:r>
@@ -10891,7 +10891,7 @@
                 <a:solidFill>
                   <a:srgbClr val="0E1B2A"/>
                 </a:solidFill>
-                <a:latin typeface="Arial"/>
+                <a:latin typeface="Avenir Next"/>
               </a:rPr>
               <a:t>Status and outlook</a:t>
             </a:r>
@@ -10930,7 +10930,7 @@
                 <a:solidFill>
                   <a:srgbClr val="6B7787"/>
                 </a:solidFill>
-                <a:latin typeface="Arial"/>
+                <a:latin typeface="Avenir Next"/>
               </a:rPr>
               <a:t>Where the build stands today</a:t>
             </a:r>
@@ -10969,7 +10969,7 @@
                 <a:solidFill>
                   <a:srgbClr val="0E8C7E"/>
                 </a:solidFill>
-                <a:latin typeface="Arial"/>
+                <a:latin typeface="Avenir Next"/>
               </a:rPr>
               <a:t>·</a:t>
             </a:r>
@@ -11008,7 +11008,7 @@
                 <a:solidFill>
                   <a:srgbClr val="0E1B2A"/>
                 </a:solidFill>
-                <a:latin typeface="Arial"/>
+                <a:latin typeface="Avenir Next"/>
               </a:rPr>
               <a:t>Appendix</a:t>
             </a:r>
@@ -11047,7 +11047,7 @@
                 <a:solidFill>
                   <a:srgbClr val="6B7787"/>
                 </a:solidFill>
-                <a:latin typeface="Arial"/>
+                <a:latin typeface="Avenir Next"/>
               </a:rPr>
               <a:t>Formulas, sources, detailed results, glossary</a:t>
             </a:r>
@@ -11086,7 +11086,7 @@
                 <a:solidFill>
                   <a:srgbClr val="6B7787"/>
                 </a:solidFill>
-                <a:latin typeface="Arial"/>
+                <a:latin typeface="Avenir Next"/>
               </a:rPr>
               <a:t>Systematic Factor Income Fund    ·    confidential</a:t>
             </a:r>
@@ -11125,7 +11125,7 @@
                 <a:solidFill>
                   <a:srgbClr val="6B7787"/>
                 </a:solidFill>
-                <a:latin typeface="Arial"/>
+                <a:latin typeface="Avenir Next"/>
               </a:rPr>
               <a:t>01</a:t>
             </a:r>
@@ -11270,7 +11270,7 @@
                 <a:solidFill>
                   <a:srgbClr val="0E8C7E"/>
                 </a:solidFill>
-                <a:latin typeface="Arial"/>
+                <a:latin typeface="Avenir Next"/>
               </a:rPr>
               <a:t>4 · BUILDING THE PORTFOLIO</a:t>
             </a:r>
@@ -11309,7 +11309,7 @@
                 <a:solidFill>
                   <a:srgbClr val="0E1B2A"/>
                 </a:solidFill>
-                <a:latin typeface="Arial"/>
+                <a:latin typeface="Avenir Next"/>
               </a:rPr>
               <a:t>The limits are the risk controls</a:t>
             </a:r>
@@ -11348,7 +11348,7 @@
                 <a:solidFill>
                   <a:srgbClr val="6B7787"/>
                 </a:solidFill>
-                <a:latin typeface="Arial"/>
+                <a:latin typeface="Avenir Next"/>
               </a:rPr>
               <a:t>Diversification is enforced by rule, not left to chance</a:t>
             </a:r>
@@ -11523,7 +11523,7 @@
                 <a:solidFill>
                   <a:srgbClr val="0E1B2A"/>
                 </a:solidFill>
-                <a:latin typeface="Arial"/>
+                <a:latin typeface="Avenir Next"/>
               </a:rPr>
               <a:t>5% maximum per stock</a:t>
             </a:r>
@@ -11562,7 +11562,7 @@
                 <a:solidFill>
                   <a:srgbClr val="6B7787"/>
                 </a:solidFill>
-                <a:latin typeface="Arial"/>
+                <a:latin typeface="Avenir Next"/>
               </a:rPr>
               <a:t>No single name can dominate. This is what sets the holding count near 20.</a:t>
             </a:r>
@@ -11693,7 +11693,7 @@
                 <a:solidFill>
                   <a:srgbClr val="0E1B2A"/>
                 </a:solidFill>
-                <a:latin typeface="Arial"/>
+                <a:latin typeface="Avenir Next"/>
               </a:rPr>
               <a:t>30% maximum per sector</a:t>
             </a:r>
@@ -11732,7 +11732,7 @@
                 <a:solidFill>
                   <a:srgbClr val="6B7787"/>
                 </a:solidFill>
-                <a:latin typeface="Arial"/>
+                <a:latin typeface="Avenir Next"/>
               </a:rPr>
               <a:t>No single industry can take over the book.</a:t>
             </a:r>
@@ -11863,7 +11863,7 @@
                 <a:solidFill>
                   <a:srgbClr val="0E1B2A"/>
                 </a:solidFill>
-                <a:latin typeface="Arial"/>
+                <a:latin typeface="Avenir Next"/>
               </a:rPr>
               <a:t>~20 holdings, near equal weight</a:t>
             </a:r>
@@ -11902,7 +11902,7 @@
                 <a:solidFill>
                   <a:srgbClr val="6B7787"/>
                 </a:solidFill>
-                <a:latin typeface="Arial"/>
+                <a:latin typeface="Avenir Next"/>
               </a:rPr>
               <a:t>Broad enough to diversify, focused enough to matter.</a:t>
             </a:r>
@@ -12033,7 +12033,7 @@
                 <a:solidFill>
                   <a:srgbClr val="0E1B2A"/>
                 </a:solidFill>
-                <a:latin typeface="Arial"/>
+                <a:latin typeface="Avenir Next"/>
               </a:rPr>
               <a:t>95% invested, 5% cash</a:t>
             </a:r>
@@ -12072,7 +12072,7 @@
                 <a:solidFill>
                   <a:srgbClr val="6B7787"/>
                 </a:solidFill>
-                <a:latin typeface="Arial"/>
+                <a:latin typeface="Avenir Next"/>
               </a:rPr>
               <a:t>A stable allocation at all times, with a small cash buffer.</a:t>
             </a:r>
@@ -12111,7 +12111,7 @@
                 <a:solidFill>
                   <a:srgbClr val="6B7787"/>
                 </a:solidFill>
-                <a:latin typeface="Arial"/>
+                <a:latin typeface="Avenir Next"/>
               </a:rPr>
               <a:t>Systematic Factor Income Fund    ·    confidential</a:t>
             </a:r>
@@ -12150,7 +12150,7 @@
                 <a:solidFill>
                   <a:srgbClr val="6B7787"/>
                 </a:solidFill>
-                <a:latin typeface="Arial"/>
+                <a:latin typeface="Avenir Next"/>
               </a:rPr>
               <a:t>15</a:t>
             </a:r>
@@ -12251,7 +12251,7 @@
                 <a:solidFill>
                   <a:srgbClr val="2A4760"/>
                 </a:solidFill>
-                <a:latin typeface="Arial"/>
+                <a:latin typeface="Avenir Next"/>
               </a:rPr>
               <a:t>05</a:t>
             </a:r>
@@ -12334,7 +12334,7 @@
                 <a:solidFill>
                   <a:srgbClr val="FFFFFF"/>
                 </a:solidFill>
-                <a:latin typeface="Arial"/>
+                <a:latin typeface="Avenir Next"/>
               </a:rPr>
               <a:t>The income overlay</a:t>
             </a:r>
@@ -12373,7 +12373,7 @@
                 <a:solidFill>
                   <a:srgbClr val="C7D2DD"/>
                 </a:solidFill>
-                <a:latin typeface="Arial"/>
+                <a:latin typeface="Avenir Next"/>
               </a:rPr>
               <a:t>Earning option premium on the stocks we already own</a:t>
             </a:r>
@@ -12518,7 +12518,7 @@
                 <a:solidFill>
                   <a:srgbClr val="0E8C7E"/>
                 </a:solidFill>
-                <a:latin typeface="Arial"/>
+                <a:latin typeface="Avenir Next"/>
               </a:rPr>
               <a:t>5 · THE INCOME OVERLAY</a:t>
             </a:r>
@@ -12557,7 +12557,7 @@
                 <a:solidFill>
                   <a:srgbClr val="0E1B2A"/>
                 </a:solidFill>
-                <a:latin typeface="Arial"/>
+                <a:latin typeface="Avenir Next"/>
               </a:rPr>
               <a:t>Selling covered calls</a:t>
             </a:r>
@@ -12596,7 +12596,7 @@
                 <a:solidFill>
                   <a:srgbClr val="6B7787"/>
                 </a:solidFill>
-                <a:latin typeface="Arial"/>
+                <a:latin typeface="Avenir Next"/>
               </a:rPr>
               <a:t>We sell call options on our holdings and keep the cash premium</a:t>
             </a:r>
@@ -12682,7 +12682,7 @@
                 <a:solidFill>
                   <a:srgbClr val="14B8A6"/>
                 </a:solidFill>
-                <a:latin typeface="Arial"/>
+                <a:latin typeface="Avenir Next"/>
               </a:rPr>
               <a:t>▪  </a:t>
             </a:r>
@@ -12691,7 +12691,7 @@
                 <a:solidFill>
                   <a:srgbClr val="1F2A37"/>
                 </a:solidFill>
-                <a:latin typeface="Arial"/>
+                <a:latin typeface="Avenir Next"/>
               </a:rPr>
               <a:t>Call option: </a:t>
             </a:r>
@@ -12700,7 +12700,7 @@
                 <a:solidFill>
                   <a:srgbClr val="1F2A37"/>
                 </a:solidFill>
-                <a:latin typeface="Arial"/>
+                <a:latin typeface="Avenir Next"/>
               </a:rPr>
               <a:t>a contract that lets its buyer purchase our stock at a fixed “strike” price before a set date. We sell that right.</a:t>
             </a:r>
@@ -12719,7 +12719,7 @@
                 <a:solidFill>
                   <a:srgbClr val="14B8A6"/>
                 </a:solidFill>
-                <a:latin typeface="Arial"/>
+                <a:latin typeface="Avenir Next"/>
               </a:rPr>
               <a:t>▪  </a:t>
             </a:r>
@@ -12728,7 +12728,7 @@
                 <a:solidFill>
                   <a:srgbClr val="1F2A37"/>
                 </a:solidFill>
-                <a:latin typeface="Arial"/>
+                <a:latin typeface="Avenir Next"/>
               </a:rPr>
               <a:t>Premium: </a:t>
             </a:r>
@@ -12737,7 +12737,7 @@
                 <a:solidFill>
                   <a:srgbClr val="1F2A37"/>
                 </a:solidFill>
-                <a:latin typeface="Arial"/>
+                <a:latin typeface="Avenir Next"/>
               </a:rPr>
               <a:t>the cash the buyer pays us up front. We keep it in every outcome.</a:t>
             </a:r>
@@ -12756,7 +12756,7 @@
                 <a:solidFill>
                   <a:srgbClr val="14B8A6"/>
                 </a:solidFill>
-                <a:latin typeface="Arial"/>
+                <a:latin typeface="Avenir Next"/>
               </a:rPr>
               <a:t>▪  </a:t>
             </a:r>
@@ -12765,7 +12765,7 @@
                 <a:solidFill>
                   <a:srgbClr val="1F2A37"/>
                 </a:solidFill>
-                <a:latin typeface="Arial"/>
+                <a:latin typeface="Avenir Next"/>
               </a:rPr>
               <a:t>If the stock stays below the strike, </a:t>
             </a:r>
@@ -12774,7 +12774,7 @@
                 <a:solidFill>
                   <a:srgbClr val="1F2A37"/>
                 </a:solidFill>
-                <a:latin typeface="Arial"/>
+                <a:latin typeface="Avenir Next"/>
               </a:rPr>
               <a:t>the option expires worthless and we simply keep the premium and the stock.</a:t>
             </a:r>
@@ -12793,7 +12793,7 @@
                 <a:solidFill>
                   <a:srgbClr val="14B8A6"/>
                 </a:solidFill>
-                <a:latin typeface="Arial"/>
+                <a:latin typeface="Avenir Next"/>
               </a:rPr>
               <a:t>▪  </a:t>
             </a:r>
@@ -12802,7 +12802,7 @@
                 <a:solidFill>
                   <a:srgbClr val="1F2A37"/>
                 </a:solidFill>
-                <a:latin typeface="Arial"/>
+                <a:latin typeface="Avenir Next"/>
               </a:rPr>
               <a:t>If it rises above the strike, </a:t>
             </a:r>
@@ -12811,7 +12811,7 @@
                 <a:solidFill>
                   <a:srgbClr val="1F2A37"/>
                 </a:solidFill>
-                <a:latin typeface="Arial"/>
+                <a:latin typeface="Avenir Next"/>
               </a:rPr>
               <a:t>the stock is sold at the strike. We keep the premium and the gain up to that point, but give up the gain beyond it.</a:t>
             </a:r>
@@ -12835,7 +12835,7 @@
         <p:spPr>
           <a:xfrm>
             <a:off x="6355080" y="2121408"/>
-            <a:ext cx="5257800" cy="2591061"/>
+            <a:ext cx="5257800" cy="2594664"/>
           </a:xfrm>
           <a:prstGeom prst="rect">
             <a:avLst/>
@@ -12874,7 +12874,7 @@
                 <a:solidFill>
                   <a:srgbClr val="6B7787"/>
                 </a:solidFill>
-                <a:latin typeface="Arial"/>
+                <a:latin typeface="Avenir Next"/>
               </a:rPr>
               <a:t>Systematic Factor Income Fund    ·    confidential</a:t>
             </a:r>
@@ -12913,7 +12913,7 @@
                 <a:solidFill>
                   <a:srgbClr val="6B7787"/>
                 </a:solidFill>
-                <a:latin typeface="Arial"/>
+                <a:latin typeface="Avenir Next"/>
               </a:rPr>
               <a:t>16</a:t>
             </a:r>
@@ -13058,7 +13058,7 @@
                 <a:solidFill>
                   <a:srgbClr val="0E8C7E"/>
                 </a:solidFill>
-                <a:latin typeface="Arial"/>
+                <a:latin typeface="Avenir Next"/>
               </a:rPr>
               <a:t>5 · THE INCOME OVERLAY</a:t>
             </a:r>
@@ -13097,7 +13097,7 @@
                 <a:solidFill>
                   <a:srgbClr val="0E1B2A"/>
                 </a:solidFill>
-                <a:latin typeface="Arial"/>
+                <a:latin typeface="Avenir Next"/>
               </a:rPr>
               <a:t>Choosing which call to sell</a:t>
             </a:r>
@@ -13136,7 +13136,7 @@
                 <a:solidFill>
                   <a:srgbClr val="6B7787"/>
                 </a:solidFill>
-                <a:latin typeface="Arial"/>
+                <a:latin typeface="Avenir Next"/>
               </a:rPr>
               <a:t>The rule is consistent across every stock, with no discretion</a:t>
             </a:r>
@@ -13222,7 +13222,7 @@
                 <a:solidFill>
                   <a:srgbClr val="14B8A6"/>
                 </a:solidFill>
-                <a:latin typeface="Arial"/>
+                <a:latin typeface="Avenir Next"/>
               </a:rPr>
               <a:t>▪  </a:t>
             </a:r>
@@ -13231,7 +13231,7 @@
                 <a:solidFill>
                   <a:srgbClr val="1F2A37"/>
                 </a:solidFill>
-                <a:latin typeface="Arial"/>
+                <a:latin typeface="Avenir Next"/>
               </a:rPr>
               <a:t>Delta, about 0.30. </a:t>
             </a:r>
@@ -13240,7 +13240,7 @@
                 <a:solidFill>
                   <a:srgbClr val="1F2A37"/>
                 </a:solidFill>
-                <a:latin typeface="Arial"/>
+                <a:latin typeface="Avenir Next"/>
               </a:rPr>
               <a:t>Delta estimates the chance the option ends up being exercised. Targeting 0.30 means roughly a 30% chance the stock is sold at the strike. Low enough to keep most of the upside, high enough to collect meaningful premium.</a:t>
             </a:r>
@@ -13259,7 +13259,7 @@
                 <a:solidFill>
                   <a:srgbClr val="14B8A6"/>
                 </a:solidFill>
-                <a:latin typeface="Arial"/>
+                <a:latin typeface="Avenir Next"/>
               </a:rPr>
               <a:t>▪  </a:t>
             </a:r>
@@ -13268,7 +13268,7 @@
                 <a:solidFill>
                   <a:srgbClr val="1F2A37"/>
                 </a:solidFill>
-                <a:latin typeface="Arial"/>
+                <a:latin typeface="Avenir Next"/>
               </a:rPr>
               <a:t>Strikes set by probability, not a fixed percentage. </a:t>
             </a:r>
@@ -13277,7 +13277,7 @@
                 <a:solidFill>
                   <a:srgbClr val="1F2A37"/>
                 </a:solidFill>
-                <a:latin typeface="Arial"/>
+                <a:latin typeface="Avenir Next"/>
               </a:rPr>
               <a:t>Using delta adapts the strike to each stock automatically. A calm stock and a volatile one get the same ~30% odds.</a:t>
             </a:r>
@@ -13296,7 +13296,7 @@
                 <a:solidFill>
                   <a:srgbClr val="14B8A6"/>
                 </a:solidFill>
-                <a:latin typeface="Arial"/>
+                <a:latin typeface="Avenir Next"/>
               </a:rPr>
               <a:t>▪  </a:t>
             </a:r>
@@ -13305,7 +13305,7 @@
                 <a:solidFill>
                   <a:srgbClr val="1F2A37"/>
                 </a:solidFill>
-                <a:latin typeface="Arial"/>
+                <a:latin typeface="Avenir Next"/>
               </a:rPr>
               <a:t>Expiring in 30 to 45 days. </a:t>
             </a:r>
@@ -13314,7 +13314,7 @@
                 <a:solidFill>
                   <a:srgbClr val="1F2A37"/>
                 </a:solidFill>
-                <a:latin typeface="Arial"/>
+                <a:latin typeface="Avenir Next"/>
               </a:rPr>
               <a:t>Long enough to collect a worthwhile premium, short enough to refresh monthly with the rest of the portfolio.</a:t>
             </a:r>
@@ -13333,7 +13333,7 @@
                 <a:solidFill>
                   <a:srgbClr val="14B8A6"/>
                 </a:solidFill>
-                <a:latin typeface="Arial"/>
+                <a:latin typeface="Avenir Next"/>
               </a:rPr>
               <a:t>▪  </a:t>
             </a:r>
@@ -13342,7 +13342,7 @@
                 <a:solidFill>
                   <a:srgbClr val="1F2A37"/>
                 </a:solidFill>
-                <a:latin typeface="Arial"/>
+                <a:latin typeface="Avenir Next"/>
               </a:rPr>
               <a:t>Sold at the quoted middle price. </a:t>
             </a:r>
@@ -13351,7 +13351,7 @@
                 <a:solidFill>
                   <a:srgbClr val="1F2A37"/>
                 </a:solidFill>
-                <a:latin typeface="Arial"/>
+                <a:latin typeface="Avenir Next"/>
               </a:rPr>
               <a:t>We take a fair price from the live option market rather than chasing.</a:t>
             </a:r>
@@ -13390,7 +13390,7 @@
                 <a:solidFill>
                   <a:srgbClr val="6B7787"/>
                 </a:solidFill>
-                <a:latin typeface="Arial"/>
+                <a:latin typeface="Avenir Next"/>
               </a:rPr>
               <a:t>Systematic Factor Income Fund    ·    confidential</a:t>
             </a:r>
@@ -13429,7 +13429,7 @@
                 <a:solidFill>
                   <a:srgbClr val="6B7787"/>
                 </a:solidFill>
-                <a:latin typeface="Arial"/>
+                <a:latin typeface="Avenir Next"/>
               </a:rPr>
               <a:t>17</a:t>
             </a:r>
@@ -13574,7 +13574,7 @@
                 <a:solidFill>
                   <a:srgbClr val="0E8C7E"/>
                 </a:solidFill>
-                <a:latin typeface="Arial"/>
+                <a:latin typeface="Avenir Next"/>
               </a:rPr>
               <a:t>5 · THE INCOME OVERLAY</a:t>
             </a:r>
@@ -13613,7 +13613,7 @@
                 <a:solidFill>
                   <a:srgbClr val="0E1B2A"/>
                 </a:solidFill>
-                <a:latin typeface="Arial"/>
+                <a:latin typeface="Avenir Next"/>
               </a:rPr>
               <a:t>Managing the options through the month</a:t>
             </a:r>
@@ -13652,7 +13652,7 @@
                 <a:solidFill>
                   <a:srgbClr val="6B7787"/>
                 </a:solidFill>
-                <a:latin typeface="Arial"/>
+                <a:latin typeface="Avenir Next"/>
               </a:rPr>
               <a:t>A small set of clear, automatic rules govern the whole overlay</a:t>
             </a:r>
@@ -13738,7 +13738,7 @@
                 <a:solidFill>
                   <a:srgbClr val="14B8A6"/>
                 </a:solidFill>
-                <a:latin typeface="Arial"/>
+                <a:latin typeface="Avenir Next"/>
               </a:rPr>
               <a:t>▪  </a:t>
             </a:r>
@@ -13747,7 +13747,7 @@
                 <a:solidFill>
                   <a:srgbClr val="1F2A37"/>
                 </a:solidFill>
-                <a:latin typeface="Arial"/>
+                <a:latin typeface="Avenir Next"/>
               </a:rPr>
               <a:t>One monthly cycle. </a:t>
             </a:r>
@@ -13756,7 +13756,7 @@
                 <a:solidFill>
                   <a:srgbClr val="1F2A37"/>
                 </a:solidFill>
-                <a:latin typeface="Arial"/>
+                <a:latin typeface="Avenir Next"/>
               </a:rPr>
               <a:t>At each monthly rebalance we close every existing call and write fresh ones against the new holdings. Simple, and always aligned to current positions.</a:t>
             </a:r>
@@ -13775,7 +13775,7 @@
                 <a:solidFill>
                   <a:srgbClr val="14B8A6"/>
                 </a:solidFill>
-                <a:latin typeface="Arial"/>
+                <a:latin typeface="Avenir Next"/>
               </a:rPr>
               <a:t>▪  </a:t>
             </a:r>
@@ -13784,7 +13784,7 @@
                 <a:solidFill>
                   <a:srgbClr val="1F2A37"/>
                 </a:solidFill>
-                <a:latin typeface="Arial"/>
+                <a:latin typeface="Avenir Next"/>
               </a:rPr>
               <a:t>Closed before earnings. </a:t>
             </a:r>
@@ -13793,7 +13793,7 @@
                 <a:solidFill>
                   <a:srgbClr val="1F2A37"/>
                 </a:solidFill>
-                <a:latin typeface="Arial"/>
+                <a:latin typeface="Avenir Next"/>
               </a:rPr>
               <a:t>A company's earnings announcement can cause a large jump. We close any call facing one beforehand, then rewrite afterward.</a:t>
             </a:r>
@@ -13812,7 +13812,7 @@
                 <a:solidFill>
                   <a:srgbClr val="14B8A6"/>
                 </a:solidFill>
-                <a:latin typeface="Arial"/>
+                <a:latin typeface="Avenir Next"/>
               </a:rPr>
               <a:t>▪  </a:t>
             </a:r>
@@ -13821,7 +13821,7 @@
                 <a:solidFill>
                   <a:srgbClr val="1F2A37"/>
                 </a:solidFill>
-                <a:latin typeface="Arial"/>
+                <a:latin typeface="Avenir Next"/>
               </a:rPr>
               <a:t>Closed before expiry. </a:t>
             </a:r>
@@ -13830,7 +13830,7 @@
                 <a:solidFill>
                   <a:srgbClr val="1F2A37"/>
                 </a:solidFill>
-                <a:latin typeface="Arial"/>
+                <a:latin typeface="Avenir Next"/>
               </a:rPr>
               <a:t>No option is ever left to settle on its own.</a:t>
             </a:r>
@@ -13849,7 +13849,7 @@
                 <a:solidFill>
                   <a:srgbClr val="14B8A6"/>
                 </a:solidFill>
-                <a:latin typeface="Arial"/>
+                <a:latin typeface="Avenir Next"/>
               </a:rPr>
               <a:t>▪  </a:t>
             </a:r>
@@ -13858,7 +13858,7 @@
                 <a:solidFill>
                   <a:srgbClr val="1F2A37"/>
                 </a:solidFill>
-                <a:latin typeface="Arial"/>
+                <a:latin typeface="Avenir Next"/>
               </a:rPr>
               <a:t>Re-entered only if still wanted. </a:t>
             </a:r>
@@ -13867,7 +13867,7 @@
                 <a:solidFill>
                   <a:srgbClr val="1F2A37"/>
                 </a:solidFill>
-                <a:latin typeface="Arial"/>
+                <a:latin typeface="Avenir Next"/>
               </a:rPr>
               <a:t>If a stock is sold via an option, we buy it back only when it still ranks well. We do not chase a stock that has run past the strike.</a:t>
             </a:r>
@@ -13906,7 +13906,7 @@
                 <a:solidFill>
                   <a:srgbClr val="6B7787"/>
                 </a:solidFill>
-                <a:latin typeface="Arial"/>
+                <a:latin typeface="Avenir Next"/>
               </a:rPr>
               <a:t>Systematic Factor Income Fund    ·    confidential</a:t>
             </a:r>
@@ -13945,7 +13945,7 @@
                 <a:solidFill>
                   <a:srgbClr val="6B7787"/>
                 </a:solidFill>
-                <a:latin typeface="Arial"/>
+                <a:latin typeface="Avenir Next"/>
               </a:rPr>
               <a:t>18</a:t>
             </a:r>
@@ -14090,7 +14090,7 @@
                 <a:solidFill>
                   <a:srgbClr val="0E8C7E"/>
                 </a:solidFill>
-                <a:latin typeface="Arial"/>
+                <a:latin typeface="Avenir Next"/>
               </a:rPr>
               <a:t>5 · THE INCOME OVERLAY</a:t>
             </a:r>
@@ -14129,7 +14129,7 @@
                 <a:solidFill>
                   <a:srgbClr val="0E1B2A"/>
                 </a:solidFill>
-                <a:latin typeface="Arial"/>
+                <a:latin typeface="Avenir Next"/>
               </a:rPr>
               <a:t>An honest limit on coverage</a:t>
             </a:r>
@@ -14168,7 +14168,7 @@
                 <a:solidFill>
                   <a:srgbClr val="6B7787"/>
                 </a:solidFill>
-                <a:latin typeface="Arial"/>
+                <a:latin typeface="Avenir Next"/>
               </a:rPr>
               <a:t>The overlay covers most, but not all, of the portfolio</a:t>
             </a:r>
@@ -14254,7 +14254,7 @@
                 <a:solidFill>
                   <a:srgbClr val="14B8A6"/>
                 </a:solidFill>
-                <a:latin typeface="Arial"/>
+                <a:latin typeface="Avenir Next"/>
               </a:rPr>
               <a:t>▪  </a:t>
             </a:r>
@@ -14263,7 +14263,7 @@
                 <a:solidFill>
                   <a:srgbClr val="1F2A37"/>
                 </a:solidFill>
-                <a:latin typeface="Arial"/>
+                <a:latin typeface="Avenir Next"/>
               </a:rPr>
               <a:t>Options trade in blocks of 100 shares. </a:t>
             </a:r>
@@ -14272,7 +14272,7 @@
                 <a:solidFill>
                   <a:srgbClr val="1F2A37"/>
                 </a:solidFill>
-                <a:latin typeface="Arial"/>
+                <a:latin typeface="Avenir Next"/>
               </a:rPr>
               <a:t>A stock position must be at least 100 shares before we can sell a call against it.</a:t>
             </a:r>
@@ -14291,7 +14291,7 @@
                 <a:solidFill>
                   <a:srgbClr val="14B8A6"/>
                 </a:solidFill>
-                <a:latin typeface="Arial"/>
+                <a:latin typeface="Avenir Next"/>
               </a:rPr>
               <a:t>▪  </a:t>
             </a:r>
@@ -14300,7 +14300,7 @@
                 <a:solidFill>
                   <a:srgbClr val="1F2A37"/>
                 </a:solidFill>
-                <a:latin typeface="Arial"/>
+                <a:latin typeface="Avenir Next"/>
               </a:rPr>
               <a:t>Some positions are too small to cover. </a:t>
             </a:r>
@@ -14309,7 +14309,7 @@
                 <a:solidFill>
                   <a:srgbClr val="1F2A37"/>
                 </a:solidFill>
-                <a:latin typeface="Arial"/>
+                <a:latin typeface="Avenir Next"/>
               </a:rPr>
               <a:t>On higher-priced stocks, a normal position can fall short of 100 shares, so part of the book earns no premium.</a:t>
             </a:r>
@@ -14328,7 +14328,7 @@
                 <a:solidFill>
                   <a:srgbClr val="14B8A6"/>
                 </a:solidFill>
-                <a:latin typeface="Arial"/>
+                <a:latin typeface="Avenir Next"/>
               </a:rPr>
               <a:t>▪  </a:t>
             </a:r>
@@ -14337,7 +14337,7 @@
                 <a:solidFill>
                   <a:srgbClr val="1F2A37"/>
                 </a:solidFill>
-                <a:latin typeface="Arial"/>
+                <a:latin typeface="Avenir Next"/>
               </a:rPr>
               <a:t>This is a known constraint, not a flaw in the idea. </a:t>
             </a:r>
@@ -14346,7 +14346,7 @@
                 <a:solidFill>
                   <a:srgbClr val="1F2A37"/>
                 </a:solidFill>
-                <a:latin typeface="Arial"/>
+                <a:latin typeface="Avenir Next"/>
               </a:rPr>
               <a:t>Position sizing and the investable amount determine how much of the book the overlay can reach, and that is managed deliberately.</a:t>
             </a:r>
@@ -14385,7 +14385,7 @@
                 <a:solidFill>
                   <a:srgbClr val="6B7787"/>
                 </a:solidFill>
-                <a:latin typeface="Arial"/>
+                <a:latin typeface="Avenir Next"/>
               </a:rPr>
               <a:t>Systematic Factor Income Fund    ·    confidential</a:t>
             </a:r>
@@ -14424,7 +14424,7 @@
                 <a:solidFill>
                   <a:srgbClr val="6B7787"/>
                 </a:solidFill>
-                <a:latin typeface="Arial"/>
+                <a:latin typeface="Avenir Next"/>
               </a:rPr>
               <a:t>19</a:t>
             </a:r>
@@ -14525,7 +14525,7 @@
                 <a:solidFill>
                   <a:srgbClr val="2A4760"/>
                 </a:solidFill>
-                <a:latin typeface="Arial"/>
+                <a:latin typeface="Avenir Next"/>
               </a:rPr>
               <a:t>06</a:t>
             </a:r>
@@ -14608,7 +14608,7 @@
                 <a:solidFill>
                   <a:srgbClr val="FFFFFF"/>
                 </a:solidFill>
-                <a:latin typeface="Arial"/>
+                <a:latin typeface="Avenir Next"/>
               </a:rPr>
               <a:t>The data pipeline</a:t>
             </a:r>
@@ -14647,7 +14647,7 @@
                 <a:solidFill>
                   <a:srgbClr val="C7D2DD"/>
                 </a:solidFill>
-                <a:latin typeface="Arial"/>
+                <a:latin typeface="Avenir Next"/>
               </a:rPr>
               <a:t>Where the numbers come from, and how they stay trustworthy</a:t>
             </a:r>
@@ -14792,7 +14792,7 @@
                 <a:solidFill>
                   <a:srgbClr val="0E8C7E"/>
                 </a:solidFill>
-                <a:latin typeface="Arial"/>
+                <a:latin typeface="Avenir Next"/>
               </a:rPr>
               <a:t>6 · THE DATA PIPELINE</a:t>
             </a:r>
@@ -14831,7 +14831,7 @@
                 <a:solidFill>
                   <a:srgbClr val="0E1B2A"/>
                 </a:solidFill>
-                <a:latin typeface="Arial"/>
+                <a:latin typeface="Avenir Next"/>
               </a:rPr>
               <a:t>The same sequence runs every trading day</a:t>
             </a:r>
@@ -14870,7 +14870,7 @@
                 <a:solidFill>
                   <a:srgbClr val="6B7787"/>
                 </a:solidFill>
-                <a:latin typeface="Arial"/>
+                <a:latin typeface="Avenir Next"/>
               </a:rPr>
               <a:t>Fully automated, and checked against the broker before any order is placed</a:t>
             </a:r>
@@ -14999,7 +14999,7 @@
                 <a:solidFill>
                   <a:srgbClr val="FFFFFF"/>
                 </a:solidFill>
-                <a:latin typeface="Arial"/>
+                <a:latin typeface="Avenir Next"/>
               </a:rPr>
               <a:t>Gather data</a:t>
             </a:r>
@@ -15038,7 +15038,7 @@
                 <a:solidFill>
                   <a:srgbClr val="B4C2CE"/>
                 </a:solidFill>
-                <a:latin typeface="Arial"/>
+                <a:latin typeface="Avenir Next"/>
               </a:rPr>
               <a:t>prices and
 financials</a:t>
@@ -15171,7 +15171,7 @@
                 <a:solidFill>
                   <a:srgbClr val="FFFFFF"/>
                 </a:solidFill>
-                <a:latin typeface="Arial"/>
+                <a:latin typeface="Avenir Next"/>
               </a:rPr>
               <a:t>Score stocks</a:t>
             </a:r>
@@ -15210,7 +15210,7 @@
                 <a:solidFill>
                   <a:srgbClr val="B4C2CE"/>
                 </a:solidFill>
-                <a:latin typeface="Arial"/>
+                <a:latin typeface="Avenir Next"/>
               </a:rPr>
               <a:t>the four
 factors</a:t>
@@ -15343,7 +15343,7 @@
                 <a:solidFill>
                   <a:srgbClr val="FFFFFF"/>
                 </a:solidFill>
-                <a:latin typeface="Arial"/>
+                <a:latin typeface="Avenir Next"/>
               </a:rPr>
               <a:t>Build portfolio</a:t>
             </a:r>
@@ -15382,7 +15382,7 @@
                 <a:solidFill>
                   <a:srgbClr val="B4C2CE"/>
                 </a:solidFill>
-                <a:latin typeface="Arial"/>
+                <a:latin typeface="Avenir Next"/>
               </a:rPr>
               <a:t>weights and
 limits</a:t>
@@ -15515,7 +15515,7 @@
                 <a:solidFill>
                   <a:srgbClr val="FFFFFF"/>
                 </a:solidFill>
-                <a:latin typeface="Arial"/>
+                <a:latin typeface="Avenir Next"/>
               </a:rPr>
               <a:t>Add overlay</a:t>
             </a:r>
@@ -15554,7 +15554,7 @@
                 <a:solidFill>
                   <a:srgbClr val="B4C2CE"/>
                 </a:solidFill>
-                <a:latin typeface="Arial"/>
+                <a:latin typeface="Avenir Next"/>
               </a:rPr>
               <a:t>covered
 calls</a:t>
@@ -15687,7 +15687,7 @@
                 <a:solidFill>
                   <a:srgbClr val="FFFFFF"/>
                 </a:solidFill>
-                <a:latin typeface="Arial"/>
+                <a:latin typeface="Avenir Next"/>
               </a:rPr>
               <a:t>Risk checks</a:t>
             </a:r>
@@ -15726,7 +15726,7 @@
                 <a:solidFill>
                   <a:srgbClr val="B4C2CE"/>
                 </a:solidFill>
-                <a:latin typeface="Arial"/>
+                <a:latin typeface="Avenir Next"/>
               </a:rPr>
               <a:t>pre-trade
 review</a:t>
@@ -15859,7 +15859,7 @@
                 <a:solidFill>
                   <a:srgbClr val="FFFFFF"/>
                 </a:solidFill>
-                <a:latin typeface="Arial"/>
+                <a:latin typeface="Avenir Next"/>
               </a:rPr>
               <a:t>Place orders</a:t>
             </a:r>
@@ -15898,7 +15898,7 @@
                 <a:solidFill>
                   <a:srgbClr val="B4C2CE"/>
                 </a:solidFill>
-                <a:latin typeface="Arial"/>
+                <a:latin typeface="Avenir Next"/>
               </a:rPr>
               <a:t>send to
 broker</a:t>
@@ -15938,7 +15938,7 @@
                 <a:solidFill>
                   <a:srgbClr val="1F2A37"/>
                 </a:solidFill>
-                <a:latin typeface="Arial"/>
+                <a:latin typeface="Avenir Next"/>
               </a:rPr>
               <a:t>The portfolio is rebalanced once a month. The rest of the time the system monitors positions, manages the options, and keeps its records aligned with the broker.</a:t>
             </a:r>
@@ -15977,7 +15977,7 @@
                 <a:solidFill>
                   <a:srgbClr val="6B7787"/>
                 </a:solidFill>
-                <a:latin typeface="Arial"/>
+                <a:latin typeface="Avenir Next"/>
               </a:rPr>
               <a:t>Systematic Factor Income Fund    ·    confidential</a:t>
             </a:r>
@@ -16016,7 +16016,7 @@
                 <a:solidFill>
                   <a:srgbClr val="6B7787"/>
                 </a:solidFill>
-                <a:latin typeface="Arial"/>
+                <a:latin typeface="Avenir Next"/>
               </a:rPr>
               <a:t>20</a:t>
             </a:r>
@@ -16161,7 +16161,7 @@
                 <a:solidFill>
                   <a:srgbClr val="0E8C7E"/>
                 </a:solidFill>
-                <a:latin typeface="Arial"/>
+                <a:latin typeface="Avenir Next"/>
               </a:rPr>
               <a:t>6 · THE DATA PIPELINE</a:t>
             </a:r>
@@ -16200,7 +16200,7 @@
                 <a:solidFill>
                   <a:srgbClr val="0E1B2A"/>
                 </a:solidFill>
-                <a:latin typeface="Arial"/>
+                <a:latin typeface="Avenir Next"/>
               </a:rPr>
               <a:t>Three data sources, each with a clear job</a:t>
             </a:r>
@@ -16239,7 +16239,7 @@
                 <a:solidFill>
                   <a:srgbClr val="6B7787"/>
                 </a:solidFill>
-                <a:latin typeface="Arial"/>
+                <a:latin typeface="Avenir Next"/>
               </a:rPr>
               <a:t>A small, low-cost, auditable set of sources</a:t>
             </a:r>
@@ -16325,7 +16325,7 @@
                 <a:solidFill>
                   <a:srgbClr val="14B8A6"/>
                 </a:solidFill>
-                <a:latin typeface="Arial"/>
+                <a:latin typeface="Avenir Next"/>
               </a:rPr>
               <a:t>▪  </a:t>
             </a:r>
@@ -16334,7 +16334,7 @@
                 <a:solidFill>
                   <a:srgbClr val="1F2A37"/>
                 </a:solidFill>
-                <a:latin typeface="Arial"/>
+                <a:latin typeface="Avenir Next"/>
               </a:rPr>
               <a:t>Alpaca: market data and trading. </a:t>
             </a:r>
@@ -16343,7 +16343,7 @@
                 <a:solidFill>
                   <a:srgbClr val="1F2A37"/>
                 </a:solidFill>
-                <a:latin typeface="Arial"/>
+                <a:latin typeface="Avenir Next"/>
               </a:rPr>
               <a:t>Daily stock prices, live option quotes, and the brokerage account where orders are placed. Prices are adjusted for splits and dividends.</a:t>
             </a:r>
@@ -16362,7 +16362,7 @@
                 <a:solidFill>
                   <a:srgbClr val="14B8A6"/>
                 </a:solidFill>
-                <a:latin typeface="Arial"/>
+                <a:latin typeface="Avenir Next"/>
               </a:rPr>
               <a:t>▪  </a:t>
             </a:r>
@@ -16371,7 +16371,7 @@
                 <a:solidFill>
                   <a:srgbClr val="1F2A37"/>
                 </a:solidFill>
-                <a:latin typeface="Arial"/>
+                <a:latin typeface="Avenir Next"/>
               </a:rPr>
               <a:t>SEC filings (EDGAR): company financials. </a:t>
             </a:r>
@@ -16380,7 +16380,7 @@
                 <a:solidFill>
                   <a:srgbClr val="1F2A37"/>
                 </a:solidFill>
-                <a:latin typeface="Arial"/>
+                <a:latin typeface="Avenir Next"/>
               </a:rPr>
               <a:t>Official quarterly filings, used for the Value and Quality factors. Free, authoritative, and stamped with the real filing date.</a:t>
             </a:r>
@@ -16399,7 +16399,7 @@
                 <a:solidFill>
                   <a:srgbClr val="14B8A6"/>
                 </a:solidFill>
-                <a:latin typeface="Arial"/>
+                <a:latin typeface="Avenir Next"/>
               </a:rPr>
               <a:t>▪  </a:t>
             </a:r>
@@ -16408,7 +16408,7 @@
                 <a:solidFill>
                   <a:srgbClr val="1F2A37"/>
                 </a:solidFill>
-                <a:latin typeface="Arial"/>
+                <a:latin typeface="Avenir Next"/>
               </a:rPr>
               <a:t>Public factor data: risk modelling. </a:t>
             </a:r>
@@ -16417,7 +16417,7 @@
                 <a:solidFill>
                   <a:srgbClr val="1F2A37"/>
                 </a:solidFill>
-                <a:latin typeface="Arial"/>
+                <a:latin typeface="Avenir Next"/>
               </a:rPr>
               <a:t>Standard published factor returns, used to model how the holdings move together.</a:t>
             </a:r>
@@ -16436,7 +16436,7 @@
                 <a:solidFill>
                   <a:srgbClr val="14B8A6"/>
                 </a:solidFill>
-                <a:latin typeface="Arial"/>
+                <a:latin typeface="Avenir Next"/>
               </a:rPr>
               <a:t>▪  </a:t>
             </a:r>
@@ -16445,7 +16445,7 @@
                 <a:solidFill>
                   <a:srgbClr val="1F2A37"/>
                 </a:solidFill>
-                <a:latin typeface="Arial"/>
+                <a:latin typeface="Avenir Next"/>
               </a:rPr>
               <a:t>Stored in two layers. </a:t>
             </a:r>
@@ -16454,7 +16454,7 @@
                 <a:solidFill>
                   <a:srgbClr val="1F2A37"/>
                 </a:solidFill>
-                <a:latin typeface="Arial"/>
+                <a:latin typeface="Avenir Next"/>
               </a:rPr>
               <a:t>A historical archive for research, and an operational database for live orders, positions, and an audit trail.</a:t>
             </a:r>
@@ -16493,7 +16493,7 @@
                 <a:solidFill>
                   <a:srgbClr val="6B7787"/>
                 </a:solidFill>
-                <a:latin typeface="Arial"/>
+                <a:latin typeface="Avenir Next"/>
               </a:rPr>
               <a:t>Systematic Factor Income Fund    ·    confidential</a:t>
             </a:r>
@@ -16532,7 +16532,7 @@
                 <a:solidFill>
                   <a:srgbClr val="6B7787"/>
                 </a:solidFill>
-                <a:latin typeface="Arial"/>
+                <a:latin typeface="Avenir Next"/>
               </a:rPr>
               <a:t>21</a:t>
             </a:r>
@@ -16677,7 +16677,7 @@
                 <a:solidFill>
                   <a:srgbClr val="0E8C7E"/>
                 </a:solidFill>
-                <a:latin typeface="Arial"/>
+                <a:latin typeface="Avenir Next"/>
               </a:rPr>
               <a:t>6 · THE DATA PIPELINE</a:t>
             </a:r>
@@ -16716,7 +16716,7 @@
                 <a:solidFill>
                   <a:srgbClr val="0E1B2A"/>
                 </a:solidFill>
-                <a:latin typeface="Arial"/>
+                <a:latin typeface="Avenir Next"/>
               </a:rPr>
               <a:t>Keeping the data trustworthy</a:t>
             </a:r>
@@ -16755,7 +16755,7 @@
                 <a:solidFill>
                   <a:srgbClr val="6B7787"/>
                 </a:solidFill>
-                <a:latin typeface="Arial"/>
+                <a:latin typeface="Avenir Next"/>
               </a:rPr>
               <a:t>The unglamorous half of the work, and where many strategies quietly fail</a:t>
             </a:r>
@@ -16841,7 +16841,7 @@
                 <a:solidFill>
                   <a:srgbClr val="14B8A6"/>
                 </a:solidFill>
-                <a:latin typeface="Arial"/>
+                <a:latin typeface="Avenir Next"/>
               </a:rPr>
               <a:t>▪  </a:t>
             </a:r>
@@ -16850,7 +16850,7 @@
                 <a:solidFill>
                   <a:srgbClr val="1F2A37"/>
                 </a:solidFill>
-                <a:latin typeface="Arial"/>
+                <a:latin typeface="Avenir Next"/>
               </a:rPr>
               <a:t>Adjusted for corporate actions. </a:t>
             </a:r>
@@ -16859,7 +16859,7 @@
                 <a:solidFill>
                   <a:srgbClr val="1F2A37"/>
                 </a:solidFill>
-                <a:latin typeface="Arial"/>
+                <a:latin typeface="Avenir Next"/>
               </a:rPr>
               <a:t>Stock splits and dividends never masquerade as returns.</a:t>
             </a:r>
@@ -16878,7 +16878,7 @@
                 <a:solidFill>
                   <a:srgbClr val="14B8A6"/>
                 </a:solidFill>
-                <a:latin typeface="Arial"/>
+                <a:latin typeface="Avenir Next"/>
               </a:rPr>
               <a:t>▪  </a:t>
             </a:r>
@@ -16887,7 +16887,7 @@
                 <a:solidFill>
                   <a:srgbClr val="1F2A37"/>
                 </a:solidFill>
-                <a:latin typeface="Arial"/>
+                <a:latin typeface="Avenir Next"/>
               </a:rPr>
               <a:t>Point-in-time. </a:t>
             </a:r>
@@ -16896,7 +16896,7 @@
                 <a:solidFill>
                   <a:srgbClr val="1F2A37"/>
                 </a:solidFill>
-                <a:latin typeface="Arial"/>
+                <a:latin typeface="Avenir Next"/>
               </a:rPr>
               <a:t>Historical tests use only what was public on each date, so results are not flattered by hindsight.</a:t>
             </a:r>
@@ -16915,7 +16915,7 @@
                 <a:solidFill>
                   <a:srgbClr val="14B8A6"/>
                 </a:solidFill>
-                <a:latin typeface="Arial"/>
+                <a:latin typeface="Avenir Next"/>
               </a:rPr>
               <a:t>▪  </a:t>
             </a:r>
@@ -16924,7 +16924,7 @@
                 <a:solidFill>
                   <a:srgbClr val="1F2A37"/>
                 </a:solidFill>
-                <a:latin typeface="Arial"/>
+                <a:latin typeface="Avenir Next"/>
               </a:rPr>
               <a:t>Reconciled with the broker every run. </a:t>
             </a:r>
@@ -16933,7 +16933,7 @@
                 <a:solidFill>
                   <a:srgbClr val="1F2A37"/>
                 </a:solidFill>
-                <a:latin typeface="Arial"/>
+                <a:latin typeface="Avenir Next"/>
               </a:rPr>
               <a:t>The system squares its own records against the actual account before trading, and stops if the broker cannot be reached.</a:t>
             </a:r>
@@ -16952,7 +16952,7 @@
                 <a:solidFill>
                   <a:srgbClr val="14B8A6"/>
                 </a:solidFill>
-                <a:latin typeface="Arial"/>
+                <a:latin typeface="Avenir Next"/>
               </a:rPr>
               <a:t>▪  </a:t>
             </a:r>
@@ -16961,7 +16961,7 @@
                 <a:solidFill>
                   <a:srgbClr val="1F2A37"/>
                 </a:solidFill>
-                <a:latin typeface="Arial"/>
+                <a:latin typeface="Avenir Next"/>
               </a:rPr>
               <a:t>A clean, traded universe. </a:t>
             </a:r>
@@ -16970,7 +16970,7 @@
                 <a:solidFill>
                   <a:srgbClr val="1F2A37"/>
                 </a:solidFill>
-                <a:latin typeface="Arial"/>
+                <a:latin typeface="Avenir Next"/>
               </a:rPr>
               <a:t>Only liquid stocks with reliable filings are eligible, which keeps both the data and the options market dependable.</a:t>
             </a:r>
@@ -17009,7 +17009,7 @@
                 <a:solidFill>
                   <a:srgbClr val="6B7787"/>
                 </a:solidFill>
-                <a:latin typeface="Arial"/>
+                <a:latin typeface="Avenir Next"/>
               </a:rPr>
               <a:t>Systematic Factor Income Fund    ·    confidential</a:t>
             </a:r>
@@ -17048,7 +17048,7 @@
                 <a:solidFill>
                   <a:srgbClr val="6B7787"/>
                 </a:solidFill>
-                <a:latin typeface="Arial"/>
+                <a:latin typeface="Avenir Next"/>
               </a:rPr>
               <a:t>22</a:t>
             </a:r>
@@ -17149,7 +17149,7 @@
                 <a:solidFill>
                   <a:srgbClr val="2A4760"/>
                 </a:solidFill>
-                <a:latin typeface="Arial"/>
+                <a:latin typeface="Avenir Next"/>
               </a:rPr>
               <a:t>01</a:t>
             </a:r>
@@ -17232,7 +17232,7 @@
                 <a:solidFill>
                   <a:srgbClr val="FFFFFF"/>
                 </a:solidFill>
-                <a:latin typeface="Arial"/>
+                <a:latin typeface="Avenir Next"/>
               </a:rPr>
               <a:t>The objective</a:t>
             </a:r>
@@ -17271,7 +17271,7 @@
                 <a:solidFill>
                   <a:srgbClr val="C7D2DD"/>
                 </a:solidFill>
-                <a:latin typeface="Arial"/>
+                <a:latin typeface="Avenir Next"/>
               </a:rPr>
               <a:t>A book built to diversify the firm with steady, risk-adjusted returns</a:t>
             </a:r>
@@ -17372,7 +17372,7 @@
                 <a:solidFill>
                   <a:srgbClr val="2A4760"/>
                 </a:solidFill>
-                <a:latin typeface="Arial"/>
+                <a:latin typeface="Avenir Next"/>
               </a:rPr>
               <a:t>07</a:t>
             </a:r>
@@ -17455,7 +17455,7 @@
                 <a:solidFill>
                   <a:srgbClr val="FFFFFF"/>
                 </a:solidFill>
-                <a:latin typeface="Arial"/>
+                <a:latin typeface="Avenir Next"/>
               </a:rPr>
               <a:t>Execution, risk and results</a:t>
             </a:r>
@@ -17494,7 +17494,7 @@
                 <a:solidFill>
                   <a:srgbClr val="C7D2DD"/>
                 </a:solidFill>
-                <a:latin typeface="Arial"/>
+                <a:latin typeface="Avenir Next"/>
               </a:rPr>
               <a:t>How orders are placed, how risk is controlled, and how it tested</a:t>
             </a:r>
@@ -17639,7 +17639,7 @@
                 <a:solidFill>
                   <a:srgbClr val="0E8C7E"/>
                 </a:solidFill>
-                <a:latin typeface="Arial"/>
+                <a:latin typeface="Avenir Next"/>
               </a:rPr>
               <a:t>7 · EXECUTION AND RISK</a:t>
             </a:r>
@@ -17678,7 +17678,7 @@
                 <a:solidFill>
                   <a:srgbClr val="0E1B2A"/>
                 </a:solidFill>
-                <a:latin typeface="Arial"/>
+                <a:latin typeface="Avenir Next"/>
               </a:rPr>
               <a:t>How orders reach the market</a:t>
             </a:r>
@@ -17717,7 +17717,7 @@
                 <a:solidFill>
                   <a:srgbClr val="6B7787"/>
                 </a:solidFill>
-                <a:latin typeface="Arial"/>
+                <a:latin typeface="Avenir Next"/>
               </a:rPr>
               <a:t>Order type is chosen to balance certainty of filling against control of price</a:t>
             </a:r>
@@ -17803,7 +17803,7 @@
                           <a:solidFill>
                             <a:srgbClr val="FFFFFF"/>
                           </a:solidFill>
-                          <a:latin typeface="Arial"/>
+                          <a:latin typeface="Avenir Next"/>
                         </a:rPr>
                         <a:t>Situation</a:t>
                       </a:r>
@@ -17826,7 +17826,7 @@
                           <a:solidFill>
                             <a:srgbClr val="FFFFFF"/>
                           </a:solidFill>
-                          <a:latin typeface="Arial"/>
+                          <a:latin typeface="Avenir Next"/>
                         </a:rPr>
                         <a:t>Order type</a:t>
                       </a:r>
@@ -17849,7 +17849,7 @@
                           <a:solidFill>
                             <a:srgbClr val="FFFFFF"/>
                           </a:solidFill>
-                          <a:latin typeface="Arial"/>
+                          <a:latin typeface="Avenir Next"/>
                         </a:rPr>
                         <a:t>Why</a:t>
                       </a:r>
@@ -17874,7 +17874,7 @@
                           <a:solidFill>
                             <a:srgbClr val="0E1B2A"/>
                           </a:solidFill>
-                          <a:latin typeface="Arial"/>
+                          <a:latin typeface="Avenir Next"/>
                         </a:rPr>
                         <a:t>Large, highly liquid stock</a:t>
                       </a:r>
@@ -17897,7 +17897,7 @@
                           <a:solidFill>
                             <a:srgbClr val="0E1B2A"/>
                           </a:solidFill>
-                          <a:latin typeface="Arial"/>
+                          <a:latin typeface="Avenir Next"/>
                         </a:rPr>
                         <a:t>Market order</a:t>
                       </a:r>
@@ -17920,7 +17920,7 @@
                           <a:solidFill>
                             <a:srgbClr val="1F2A37"/>
                           </a:solidFill>
-                          <a:latin typeface="Arial"/>
+                          <a:latin typeface="Avenir Next"/>
                         </a:rPr>
                         <a:t>Fills immediately, with negligible price impact</a:t>
                       </a:r>
@@ -17945,7 +17945,7 @@
                           <a:solidFill>
                             <a:srgbClr val="0E1B2A"/>
                           </a:solidFill>
-                          <a:latin typeface="Arial"/>
+                          <a:latin typeface="Avenir Next"/>
                         </a:rPr>
                         <a:t>Less liquid stock</a:t>
                       </a:r>
@@ -17968,7 +17968,7 @@
                           <a:solidFill>
                             <a:srgbClr val="0E1B2A"/>
                           </a:solidFill>
-                          <a:latin typeface="Arial"/>
+                          <a:latin typeface="Avenir Next"/>
                         </a:rPr>
                         <a:t>Marketable limit</a:t>
                       </a:r>
@@ -17991,7 +17991,7 @@
                           <a:solidFill>
                             <a:srgbClr val="1F2A37"/>
                           </a:solidFill>
-                          <a:latin typeface="Arial"/>
+                          <a:latin typeface="Avenir Next"/>
                         </a:rPr>
                         <a:t>Fills the same session while bounding the price paid</a:t>
                       </a:r>
@@ -18016,7 +18016,7 @@
                           <a:solidFill>
                             <a:srgbClr val="0E1B2A"/>
                           </a:solidFill>
-                          <a:latin typeface="Arial"/>
+                          <a:latin typeface="Avenir Next"/>
                         </a:rPr>
                         <a:t>Selling a covered call</a:t>
                       </a:r>
@@ -18039,7 +18039,7 @@
                           <a:solidFill>
                             <a:srgbClr val="0E1B2A"/>
                           </a:solidFill>
-                          <a:latin typeface="Arial"/>
+                          <a:latin typeface="Avenir Next"/>
                         </a:rPr>
                         <a:t>Limit at mid-price</a:t>
                       </a:r>
@@ -18062,7 +18062,7 @@
                           <a:solidFill>
                             <a:srgbClr val="1F2A37"/>
                           </a:solidFill>
-                          <a:latin typeface="Arial"/>
+                          <a:latin typeface="Avenir Next"/>
                         </a:rPr>
                         <a:t>Takes a fair premium without chasing the market</a:t>
                       </a:r>
@@ -18087,7 +18087,7 @@
                           <a:solidFill>
                             <a:srgbClr val="0E1B2A"/>
                           </a:solidFill>
-                          <a:latin typeface="Arial"/>
+                          <a:latin typeface="Avenir Next"/>
                         </a:rPr>
                         <a:t>Closing a call near expiry</a:t>
                       </a:r>
@@ -18110,7 +18110,7 @@
                           <a:solidFill>
                             <a:srgbClr val="0E1B2A"/>
                           </a:solidFill>
-                          <a:latin typeface="Arial"/>
+                          <a:latin typeface="Avenir Next"/>
                         </a:rPr>
                         <a:t>Market order</a:t>
                       </a:r>
@@ -18133,7 +18133,7 @@
                           <a:solidFill>
                             <a:srgbClr val="1F2A37"/>
                           </a:solidFill>
-                          <a:latin typeface="Arial"/>
+                          <a:latin typeface="Avenir Next"/>
                         </a:rPr>
                         <a:t>Prioritises certainty of closing the position</a:t>
                       </a:r>
@@ -18185,7 +18185,7 @@
                 <a:solidFill>
                   <a:srgbClr val="14B8A6"/>
                 </a:solidFill>
-                <a:latin typeface="Arial"/>
+                <a:latin typeface="Avenir Next"/>
               </a:rPr>
               <a:t>▪  </a:t>
             </a:r>
@@ -18194,7 +18194,7 @@
                 <a:solidFill>
                   <a:srgbClr val="1F2A37"/>
                 </a:solidFill>
-                <a:latin typeface="Arial"/>
+                <a:latin typeface="Avenir Next"/>
               </a:rPr>
               <a:t>Timing. </a:t>
             </a:r>
@@ -18203,7 +18203,7 @@
                 <a:solidFill>
                   <a:srgbClr val="1F2A37"/>
                 </a:solidFill>
-                <a:latin typeface="Arial"/>
+                <a:latin typeface="Avenir Next"/>
               </a:rPr>
               <a:t>The monthly rebalance runs mid-session, leaving a liquid window before the close for orders to fill.</a:t>
             </a:r>
@@ -18222,7 +18222,7 @@
                 <a:solidFill>
                   <a:srgbClr val="14B8A6"/>
                 </a:solidFill>
-                <a:latin typeface="Arial"/>
+                <a:latin typeface="Avenir Next"/>
               </a:rPr>
               <a:t>▪  </a:t>
             </a:r>
@@ -18231,7 +18231,7 @@
                 <a:solidFill>
                   <a:srgbClr val="1F2A37"/>
                 </a:solidFill>
-                <a:latin typeface="Arial"/>
+                <a:latin typeface="Avenir Next"/>
               </a:rPr>
               <a:t>Unfilled orders. </a:t>
             </a:r>
@@ -18240,7 +18240,7 @@
                 <a:solidFill>
                   <a:srgbClr val="1F2A37"/>
                 </a:solidFill>
-                <a:latin typeface="Arial"/>
+                <a:latin typeface="Avenir Next"/>
               </a:rPr>
               <a:t>Cancelled after a short window and completed at the next run. Nothing is left resting overnight.</a:t>
             </a:r>
@@ -18279,7 +18279,7 @@
                 <a:solidFill>
                   <a:srgbClr val="6B7787"/>
                 </a:solidFill>
-                <a:latin typeface="Arial"/>
+                <a:latin typeface="Avenir Next"/>
               </a:rPr>
               <a:t>Systematic Factor Income Fund    ·    confidential</a:t>
             </a:r>
@@ -18318,7 +18318,7 @@
                 <a:solidFill>
                   <a:srgbClr val="6B7787"/>
                 </a:solidFill>
-                <a:latin typeface="Arial"/>
+                <a:latin typeface="Avenir Next"/>
               </a:rPr>
               <a:t>23</a:t>
             </a:r>
@@ -18463,7 +18463,7 @@
                 <a:solidFill>
                   <a:srgbClr val="0E8C7E"/>
                 </a:solidFill>
-                <a:latin typeface="Arial"/>
+                <a:latin typeface="Avenir Next"/>
               </a:rPr>
               <a:t>7 · EXECUTION AND RISK</a:t>
             </a:r>
@@ -18502,7 +18502,7 @@
                 <a:solidFill>
                   <a:srgbClr val="0E1B2A"/>
                 </a:solidFill>
-                <a:latin typeface="Arial"/>
+                <a:latin typeface="Avenir Next"/>
               </a:rPr>
               <a:t>Controlling risk</a:t>
             </a:r>
@@ -18541,7 +18541,7 @@
                 <a:solidFill>
                   <a:srgbClr val="6B7787"/>
                 </a:solidFill>
-                <a:latin typeface="Arial"/>
+                <a:latin typeface="Avenir Next"/>
               </a:rPr>
               <a:t>For a capital-preservation mandate, this is the most important section</a:t>
             </a:r>
@@ -18627,7 +18627,7 @@
                 <a:solidFill>
                   <a:srgbClr val="14B8A6"/>
                 </a:solidFill>
-                <a:latin typeface="Arial"/>
+                <a:latin typeface="Avenir Next"/>
               </a:rPr>
               <a:t>▪  </a:t>
             </a:r>
@@ -18636,7 +18636,7 @@
                 <a:solidFill>
                   <a:srgbClr val="1F2A37"/>
                 </a:solidFill>
-                <a:latin typeface="Arial"/>
+                <a:latin typeface="Avenir Next"/>
               </a:rPr>
               <a:t>A pre-trade review on every cycle. </a:t>
             </a:r>
@@ -18645,7 +18645,7 @@
                 <a:solidFill>
                   <a:srgbClr val="1F2A37"/>
                 </a:solidFill>
-                <a:latin typeface="Arial"/>
+                <a:latin typeface="Avenir Next"/>
               </a:rPr>
               <a:t>No order is sent if it would breach a limit, and the overlay can never sell a call the portfolio cannot cover.</a:t>
             </a:r>
@@ -18664,7 +18664,7 @@
                 <a:solidFill>
                   <a:srgbClr val="14B8A6"/>
                 </a:solidFill>
-                <a:latin typeface="Arial"/>
+                <a:latin typeface="Avenir Next"/>
               </a:rPr>
               <a:t>▪  </a:t>
             </a:r>
@@ -18673,7 +18673,7 @@
                 <a:solidFill>
                   <a:srgbClr val="1F2A37"/>
                 </a:solidFill>
-                <a:latin typeface="Arial"/>
+                <a:latin typeface="Avenir Next"/>
               </a:rPr>
               <a:t>Safe to interrupt and re-run. </a:t>
             </a:r>
@@ -18682,7 +18682,7 @@
                 <a:solidFill>
                   <a:srgbClr val="1F2A37"/>
                 </a:solidFill>
-                <a:latin typeface="Arial"/>
+                <a:latin typeface="Avenir Next"/>
               </a:rPr>
               <a:t>The system can stop and restart mid-rebalance without double-trading, and finishes an interrupted rebalance on the next run.</a:t>
             </a:r>
@@ -18701,7 +18701,7 @@
                 <a:solidFill>
                   <a:srgbClr val="14B8A6"/>
                 </a:solidFill>
-                <a:latin typeface="Arial"/>
+                <a:latin typeface="Avenir Next"/>
               </a:rPr>
               <a:t>▪  </a:t>
             </a:r>
@@ -18710,7 +18710,7 @@
                 <a:solidFill>
                   <a:srgbClr val="1F2A37"/>
                 </a:solidFill>
-                <a:latin typeface="Arial"/>
+                <a:latin typeface="Avenir Next"/>
               </a:rPr>
               <a:t>An emergency stop. </a:t>
             </a:r>
@@ -18719,7 +18719,7 @@
                 <a:solidFill>
                   <a:srgbClr val="1F2A37"/>
                 </a:solidFill>
-                <a:latin typeface="Arial"/>
+                <a:latin typeface="Avenir Next"/>
               </a:rPr>
               <a:t>A single command halts trading and cancels open orders, or sells the entire book to cash.</a:t>
             </a:r>
@@ -18738,7 +18738,7 @@
                 <a:solidFill>
                   <a:srgbClr val="14B8A6"/>
                 </a:solidFill>
-                <a:latin typeface="Arial"/>
+                <a:latin typeface="Avenir Next"/>
               </a:rPr>
               <a:t>▪  </a:t>
             </a:r>
@@ -18747,7 +18747,7 @@
                 <a:solidFill>
                   <a:srgbClr val="1F2A37"/>
                 </a:solidFill>
-                <a:latin typeface="Arial"/>
+                <a:latin typeface="Avenir Next"/>
               </a:rPr>
               <a:t>Everything is recorded. </a:t>
             </a:r>
@@ -18756,7 +18756,7 @@
                 <a:solidFill>
                   <a:srgbClr val="1F2A37"/>
                 </a:solidFill>
-                <a:latin typeface="Arial"/>
+                <a:latin typeface="Avenir Next"/>
               </a:rPr>
               <a:t>Every score, order, and fill is logged, giving a complete audit trail.</a:t>
             </a:r>
@@ -18795,7 +18795,7 @@
                 <a:solidFill>
                   <a:srgbClr val="6B7787"/>
                 </a:solidFill>
-                <a:latin typeface="Arial"/>
+                <a:latin typeface="Avenir Next"/>
               </a:rPr>
               <a:t>Systematic Factor Income Fund    ·    confidential</a:t>
             </a:r>
@@ -18834,7 +18834,7 @@
                 <a:solidFill>
                   <a:srgbClr val="6B7787"/>
                 </a:solidFill>
-                <a:latin typeface="Arial"/>
+                <a:latin typeface="Avenir Next"/>
               </a:rPr>
               <a:t>24</a:t>
             </a:r>
@@ -18979,7 +18979,7 @@
                 <a:solidFill>
                   <a:srgbClr val="0E8C7E"/>
                 </a:solidFill>
-                <a:latin typeface="Arial"/>
+                <a:latin typeface="Avenir Next"/>
               </a:rPr>
               <a:t>7 · EXECUTION AND RISK</a:t>
             </a:r>
@@ -19018,7 +19018,7 @@
                 <a:solidFill>
                   <a:srgbClr val="0E1B2A"/>
                 </a:solidFill>
-                <a:latin typeface="Arial"/>
+                <a:latin typeface="Avenir Next"/>
               </a:rPr>
               <a:t>How the strategy was tested</a:t>
             </a:r>
@@ -19057,7 +19057,7 @@
                 <a:solidFill>
                   <a:srgbClr val="6B7787"/>
                 </a:solidFill>
-                <a:latin typeface="Arial"/>
+                <a:latin typeface="Avenir Next"/>
               </a:rPr>
               <a:t>The test is designed to resist the usual criticism of over-fitting</a:t>
             </a:r>
@@ -19143,7 +19143,7 @@
                 <a:solidFill>
                   <a:srgbClr val="14B8A6"/>
                 </a:solidFill>
-                <a:latin typeface="Arial"/>
+                <a:latin typeface="Avenir Next"/>
               </a:rPr>
               <a:t>▪  </a:t>
             </a:r>
@@ -19152,7 +19152,7 @@
                 <a:solidFill>
                   <a:srgbClr val="1F2A37"/>
                 </a:solidFill>
-                <a:latin typeface="Arial"/>
+                <a:latin typeface="Avenir Next"/>
               </a:rPr>
               <a:t>A walk-forward simulation, 2021 to 2026. </a:t>
             </a:r>
@@ -19161,7 +19161,7 @@
                 <a:solidFill>
                   <a:srgbClr val="1F2A37"/>
                 </a:solidFill>
-                <a:latin typeface="Arial"/>
+                <a:latin typeface="Avenir Next"/>
               </a:rPr>
               <a:t>Each month, the strategy is run on only the information available at the time, exactly as it would run live.</a:t>
             </a:r>
@@ -19180,7 +19180,7 @@
                 <a:solidFill>
                   <a:srgbClr val="14B8A6"/>
                 </a:solidFill>
-                <a:latin typeface="Arial"/>
+                <a:latin typeface="Avenir Next"/>
               </a:rPr>
               <a:t>▪  </a:t>
             </a:r>
@@ -19189,7 +19189,7 @@
                 <a:solidFill>
                   <a:srgbClr val="1F2A37"/>
                 </a:solidFill>
-                <a:latin typeface="Arial"/>
+                <a:latin typeface="Avenir Next"/>
               </a:rPr>
               <a:t>Realistic trading costs. </a:t>
             </a:r>
@@ -19198,7 +19198,7 @@
                 <a:solidFill>
                   <a:srgbClr val="1F2A37"/>
                 </a:solidFill>
-                <a:latin typeface="Arial"/>
+                <a:latin typeface="Avenir Next"/>
               </a:rPr>
               <a:t>Every simulated trade is charged a spread cost scaled to how liquid the stock is.</a:t>
             </a:r>
@@ -19217,7 +19217,7 @@
                 <a:solidFill>
                   <a:srgbClr val="14B8A6"/>
                 </a:solidFill>
-                <a:latin typeface="Arial"/>
+                <a:latin typeface="Avenir Next"/>
               </a:rPr>
               <a:t>▪  </a:t>
             </a:r>
@@ -19226,7 +19226,7 @@
                 <a:solidFill>
                   <a:srgbClr val="1F2A37"/>
                 </a:solidFill>
-                <a:latin typeface="Arial"/>
+                <a:latin typeface="Avenir Next"/>
               </a:rPr>
               <a:t>Real option prices where available. </a:t>
             </a:r>
@@ -19235,7 +19235,7 @@
                 <a:solidFill>
                   <a:srgbClr val="1F2A37"/>
                 </a:solidFill>
-                <a:latin typeface="Arial"/>
+                <a:latin typeface="Avenir Next"/>
               </a:rPr>
               <a:t>Covered-call premiums use actual historical option prices, not just a model.</a:t>
             </a:r>
@@ -19254,7 +19254,7 @@
                 <a:solidFill>
                   <a:srgbClr val="14B8A6"/>
                 </a:solidFill>
-                <a:latin typeface="Arial"/>
+                <a:latin typeface="Avenir Next"/>
               </a:rPr>
               <a:t>▪  </a:t>
             </a:r>
@@ -19263,7 +19263,7 @@
                 <a:solidFill>
                   <a:srgbClr val="1F2A37"/>
                 </a:solidFill>
-                <a:latin typeface="Arial"/>
+                <a:latin typeface="Avenir Next"/>
               </a:rPr>
               <a:t>Checked against a public index. </a:t>
             </a:r>
@@ -19272,7 +19272,7 @@
                 <a:solidFill>
                   <a:srgbClr val="1F2A37"/>
                 </a:solidFill>
-                <a:latin typeface="Arial"/>
+                <a:latin typeface="Avenir Next"/>
               </a:rPr>
               <a:t>The option model reproduces the published CBOE BuyWrite index closely, which validates the mechanics.</a:t>
             </a:r>
@@ -19311,7 +19311,7 @@
                 <a:solidFill>
                   <a:srgbClr val="6B7787"/>
                 </a:solidFill>
-                <a:latin typeface="Arial"/>
+                <a:latin typeface="Avenir Next"/>
               </a:rPr>
               <a:t>Systematic Factor Income Fund    ·    confidential</a:t>
             </a:r>
@@ -19350,7 +19350,7 @@
                 <a:solidFill>
                   <a:srgbClr val="6B7787"/>
                 </a:solidFill>
-                <a:latin typeface="Arial"/>
+                <a:latin typeface="Avenir Next"/>
               </a:rPr>
               <a:t>25</a:t>
             </a:r>
@@ -19495,7 +19495,7 @@
                 <a:solidFill>
                   <a:srgbClr val="0E8C7E"/>
                 </a:solidFill>
-                <a:latin typeface="Arial"/>
+                <a:latin typeface="Avenir Next"/>
               </a:rPr>
               <a:t>7 · RESULTS</a:t>
             </a:r>
@@ -19534,7 +19534,7 @@
                 <a:solidFill>
                   <a:srgbClr val="0E1B2A"/>
                 </a:solidFill>
-                <a:latin typeface="Arial"/>
+                <a:latin typeface="Avenir Next"/>
               </a:rPr>
               <a:t>How the strategy performed in testing</a:t>
             </a:r>
@@ -19573,7 +19573,7 @@
                 <a:solidFill>
                   <a:srgbClr val="6B7787"/>
                 </a:solidFill>
-                <a:latin typeface="Arial"/>
+                <a:latin typeface="Avenir Next"/>
               </a:rPr>
               <a:t>Higher risk-adjusted return than the market, with lower volatility and drawdown</a:t>
             </a:r>
@@ -19772,7 +19772,7 @@
                 <a:solidFill>
                   <a:srgbClr val="0E8C7E"/>
                 </a:solidFill>
-                <a:latin typeface="Arial"/>
+                <a:latin typeface="Avenir Next"/>
               </a:rPr>
               <a:t>1.24</a:t>
             </a:r>
@@ -19811,7 +19811,7 @@
                 <a:solidFill>
                   <a:srgbClr val="6B7787"/>
                 </a:solidFill>
-                <a:latin typeface="Arial"/>
+                <a:latin typeface="Avenir Next"/>
               </a:rPr>
               <a:t>Risk-adjusted return (Sharpe),
 vs. 0.87 for the S&amp;P 500</a:t>
@@ -19943,7 +19943,7 @@
                 <a:solidFill>
                   <a:srgbClr val="0E1B2A"/>
                 </a:solidFill>
-                <a:latin typeface="Arial"/>
+                <a:latin typeface="Avenir Next"/>
               </a:rPr>
               <a:t>−16.7%</a:t>
             </a:r>
@@ -19982,7 +19982,7 @@
                 <a:solidFill>
                   <a:srgbClr val="6B7787"/>
                 </a:solidFill>
-                <a:latin typeface="Arial"/>
+                <a:latin typeface="Avenir Next"/>
               </a:rPr>
               <a:t>Worst peak-to-trough fall,
 vs. −24% for the S&amp;P 500</a:t>
@@ -20114,7 +20114,7 @@
                 <a:solidFill>
                   <a:srgbClr val="0E1B2A"/>
                 </a:solidFill>
-                <a:latin typeface="Arial"/>
+                <a:latin typeface="Avenir Next"/>
               </a:rPr>
               <a:t>~25% / yr</a:t>
             </a:r>
@@ -20153,7 +20153,7 @@
                 <a:solidFill>
                   <a:srgbClr val="6B7787"/>
                 </a:solidFill>
-                <a:latin typeface="Arial"/>
+                <a:latin typeface="Avenir Next"/>
               </a:rPr>
               <a:t>Option premium collected
 as income</a:t>
@@ -20193,7 +20193,7 @@
                 <a:solidFill>
                   <a:srgbClr val="1F2A37"/>
                 </a:solidFill>
-                <a:latin typeface="Arial"/>
+                <a:latin typeface="Avenir Next"/>
               </a:rPr>
               <a:t>Sharpe ratio</a:t>
             </a:r>
@@ -20202,7 +20202,7 @@
                 <a:solidFill>
                   <a:srgbClr val="6B7787"/>
                 </a:solidFill>
-                <a:latin typeface="Arial"/>
+                <a:latin typeface="Avenir Next"/>
               </a:rPr>
               <a:t> is return per unit of risk; </a:t>
             </a:r>
@@ -20211,7 +20211,7 @@
                 <a:solidFill>
                   <a:srgbClr val="1F2A37"/>
                 </a:solidFill>
-                <a:latin typeface="Arial"/>
+                <a:latin typeface="Avenir Next"/>
               </a:rPr>
               <a:t>drawdown</a:t>
             </a:r>
@@ -20220,7 +20220,7 @@
                 <a:solidFill>
                   <a:srgbClr val="6B7787"/>
                 </a:solidFill>
-                <a:latin typeface="Arial"/>
+                <a:latin typeface="Avenir Next"/>
               </a:rPr>
               <a:t> is the largest peak-to-trough loss. Strategy figures are from the simulation; benchmarks from index history over the same period. Results are simulated and from paper trading, not live capital.</a:t>
             </a:r>
@@ -20259,7 +20259,7 @@
                 <a:solidFill>
                   <a:srgbClr val="6B7787"/>
                 </a:solidFill>
-                <a:latin typeface="Arial"/>
+                <a:latin typeface="Avenir Next"/>
               </a:rPr>
               <a:t>Systematic Factor Income Fund    ·    confidential</a:t>
             </a:r>
@@ -20298,7 +20298,7 @@
                 <a:solidFill>
                   <a:srgbClr val="6B7787"/>
                 </a:solidFill>
-                <a:latin typeface="Arial"/>
+                <a:latin typeface="Avenir Next"/>
               </a:rPr>
               <a:t>26</a:t>
             </a:r>
@@ -20399,7 +20399,7 @@
                 <a:solidFill>
                   <a:srgbClr val="2A4760"/>
                 </a:solidFill>
-                <a:latin typeface="Arial"/>
+                <a:latin typeface="Avenir Next"/>
               </a:rPr>
               <a:t>08</a:t>
             </a:r>
@@ -20482,7 +20482,7 @@
                 <a:solidFill>
                   <a:srgbClr val="FFFFFF"/>
                 </a:solidFill>
-                <a:latin typeface="Arial"/>
+                <a:latin typeface="Avenir Next"/>
               </a:rPr>
               <a:t>Operations</a:t>
             </a:r>
@@ -20521,7 +20521,7 @@
                 <a:solidFill>
                   <a:srgbClr val="C7D2DD"/>
                 </a:solidFill>
-                <a:latin typeface="Arial"/>
+                <a:latin typeface="Avenir Next"/>
               </a:rPr>
               <a:t>A live, monitored system, running on its own</a:t>
             </a:r>
@@ -20666,7 +20666,7 @@
                 <a:solidFill>
                   <a:srgbClr val="0E8C7E"/>
                 </a:solidFill>
-                <a:latin typeface="Arial"/>
+                <a:latin typeface="Avenir Next"/>
               </a:rPr>
               <a:t>8 · OPERATIONS</a:t>
             </a:r>
@@ -20705,7 +20705,7 @@
                 <a:solidFill>
                   <a:srgbClr val="0E1B2A"/>
                 </a:solidFill>
-                <a:latin typeface="Arial"/>
+                <a:latin typeface="Avenir Next"/>
               </a:rPr>
               <a:t>Monitoring: a live dashboard</a:t>
             </a:r>
@@ -20744,7 +20744,7 @@
                 <a:solidFill>
                   <a:srgbClr val="6B7787"/>
                 </a:solidFill>
-                <a:latin typeface="Arial"/>
+                <a:latin typeface="Avenir Next"/>
               </a:rPr>
               <a:t>A single page gives the full picture at a glance</a:t>
             </a:r>
@@ -20830,7 +20830,7 @@
                 <a:solidFill>
                   <a:srgbClr val="14B8A6"/>
                 </a:solidFill>
-                <a:latin typeface="Arial"/>
+                <a:latin typeface="Avenir Next"/>
               </a:rPr>
               <a:t>▪  </a:t>
             </a:r>
@@ -20839,7 +20839,7 @@
                 <a:solidFill>
                   <a:srgbClr val="1F2A37"/>
                 </a:solidFill>
-                <a:latin typeface="Arial"/>
+                <a:latin typeface="Avenir Next"/>
               </a:rPr>
               <a:t>Overview. </a:t>
             </a:r>
@@ -20848,7 +20848,7 @@
                 <a:solidFill>
                   <a:srgbClr val="1F2A37"/>
                 </a:solidFill>
-                <a:latin typeface="Arial"/>
+                <a:latin typeface="Avenir Next"/>
               </a:rPr>
               <a:t>Account value and cash to the cent, daily profit, and a single health bar covering the engine, the market clock, the next rebalance, and any alerts.</a:t>
             </a:r>
@@ -20867,7 +20867,7 @@
                 <a:solidFill>
                   <a:srgbClr val="14B8A6"/>
                 </a:solidFill>
-                <a:latin typeface="Arial"/>
+                <a:latin typeface="Avenir Next"/>
               </a:rPr>
               <a:t>▪  </a:t>
             </a:r>
@@ -20876,7 +20876,7 @@
                 <a:solidFill>
                   <a:srgbClr val="1F2A37"/>
                 </a:solidFill>
-                <a:latin typeface="Arial"/>
+                <a:latin typeface="Avenir Next"/>
               </a:rPr>
               <a:t>Portfolio. </a:t>
             </a:r>
@@ -20885,7 +20885,7 @@
                 <a:solidFill>
                   <a:srgbClr val="1F2A37"/>
                 </a:solidFill>
-                <a:latin typeface="Arial"/>
+                <a:latin typeface="Avenir Next"/>
               </a:rPr>
               <a:t>Holdings against target, sector and concentration breakdowns, the portfolio's factor tilt, the covered calls, and recent activity.</a:t>
             </a:r>
@@ -20904,7 +20904,7 @@
                 <a:solidFill>
                   <a:srgbClr val="14B8A6"/>
                 </a:solidFill>
-                <a:latin typeface="Arial"/>
+                <a:latin typeface="Avenir Next"/>
               </a:rPr>
               <a:t>▪  </a:t>
             </a:r>
@@ -20913,7 +20913,7 @@
                 <a:solidFill>
                   <a:srgbClr val="1F2A37"/>
                 </a:solidFill>
-                <a:latin typeface="Arial"/>
+                <a:latin typeface="Avenir Next"/>
               </a:rPr>
               <a:t>Performance. </a:t>
             </a:r>
@@ -20922,7 +20922,7 @@
                 <a:solidFill>
                   <a:srgbClr val="1F2A37"/>
                 </a:solidFill>
-                <a:latin typeface="Arial"/>
+                <a:latin typeface="Avenir Next"/>
               </a:rPr>
               <a:t>Growth against the S&amp;P 500 and the BuyWrite index, risk measures, and a breakdown of trading costs and option premium.</a:t>
             </a:r>
@@ -20941,7 +20941,7 @@
                 <a:solidFill>
                   <a:srgbClr val="14B8A6"/>
                 </a:solidFill>
-                <a:latin typeface="Arial"/>
+                <a:latin typeface="Avenir Next"/>
               </a:rPr>
               <a:t>▪  </a:t>
             </a:r>
@@ -20950,7 +20950,7 @@
                 <a:solidFill>
                   <a:srgbClr val="1F2A37"/>
                 </a:solidFill>
-                <a:latin typeface="Arial"/>
+                <a:latin typeface="Avenir Next"/>
               </a:rPr>
               <a:t>Always current. </a:t>
             </a:r>
@@ -20959,7 +20959,7 @@
                 <a:solidFill>
                   <a:srgbClr val="1F2A37"/>
                 </a:solidFill>
-                <a:latin typeface="Arial"/>
+                <a:latin typeface="Avenir Next"/>
               </a:rPr>
               <a:t>The dashboard updates itself from the live account, so it reflects the real state rather than a stale snapshot.</a:t>
             </a:r>
@@ -20998,7 +20998,7 @@
                 <a:solidFill>
                   <a:srgbClr val="6B7787"/>
                 </a:solidFill>
-                <a:latin typeface="Arial"/>
+                <a:latin typeface="Avenir Next"/>
               </a:rPr>
               <a:t>Systematic Factor Income Fund    ·    confidential</a:t>
             </a:r>
@@ -21037,7 +21037,7 @@
                 <a:solidFill>
                   <a:srgbClr val="6B7787"/>
                 </a:solidFill>
-                <a:latin typeface="Arial"/>
+                <a:latin typeface="Avenir Next"/>
               </a:rPr>
               <a:t>27</a:t>
             </a:r>
@@ -21182,7 +21182,7 @@
                 <a:solidFill>
                   <a:srgbClr val="0E8C7E"/>
                 </a:solidFill>
-                <a:latin typeface="Arial"/>
+                <a:latin typeface="Avenir Next"/>
               </a:rPr>
               <a:t>8 · OPERATIONS</a:t>
             </a:r>
@@ -21221,7 +21221,7 @@
                 <a:solidFill>
                   <a:srgbClr val="0E1B2A"/>
                 </a:solidFill>
-                <a:latin typeface="Arial"/>
+                <a:latin typeface="Avenir Next"/>
               </a:rPr>
               <a:t>Infrastructure and safeguards</a:t>
             </a:r>
@@ -21260,7 +21260,7 @@
                 <a:solidFill>
                   <a:srgbClr val="6B7787"/>
                 </a:solidFill>
-                <a:latin typeface="Arial"/>
+                <a:latin typeface="Avenir Next"/>
               </a:rPr>
               <a:t>Reliable, low-maintenance plumbing</a:t>
             </a:r>
@@ -21346,7 +21346,7 @@
                 <a:solidFill>
                   <a:srgbClr val="14B8A6"/>
                 </a:solidFill>
-                <a:latin typeface="Arial"/>
+                <a:latin typeface="Avenir Next"/>
               </a:rPr>
               <a:t>▪  </a:t>
             </a:r>
@@ -21355,7 +21355,7 @@
                 <a:solidFill>
                   <a:srgbClr val="1F2A37"/>
                 </a:solidFill>
-                <a:latin typeface="Arial"/>
+                <a:latin typeface="Avenir Next"/>
               </a:rPr>
               <a:t>Runs unattended in the cloud. </a:t>
             </a:r>
@@ -21364,7 +21364,7 @@
                 <a:solidFill>
                   <a:srgbClr val="1F2A37"/>
                 </a:solidFill>
-                <a:latin typeface="Arial"/>
+                <a:latin typeface="Avenir Next"/>
               </a:rPr>
               <a:t>Hosted on a dedicated server that runs the daily process and the dashboard on a fixed schedule.</a:t>
             </a:r>
@@ -21383,7 +21383,7 @@
                 <a:solidFill>
                   <a:srgbClr val="14B8A6"/>
                 </a:solidFill>
-                <a:latin typeface="Arial"/>
+                <a:latin typeface="Avenir Next"/>
               </a:rPr>
               <a:t>▪  </a:t>
             </a:r>
@@ -21392,7 +21392,7 @@
                 <a:solidFill>
                   <a:srgbClr val="1F2A37"/>
                 </a:solidFill>
-                <a:latin typeface="Arial"/>
+                <a:latin typeface="Avenir Next"/>
               </a:rPr>
               <a:t>Restart-safe. </a:t>
             </a:r>
@@ -21401,7 +21401,7 @@
                 <a:solidFill>
                   <a:srgbClr val="1F2A37"/>
                 </a:solidFill>
-                <a:latin typeface="Arial"/>
+                <a:latin typeface="Avenir Next"/>
               </a:rPr>
               <a:t>Every component restarts automatically, with a watchdog that checks the system is alive.</a:t>
             </a:r>
@@ -21420,7 +21420,7 @@
                 <a:solidFill>
                   <a:srgbClr val="14B8A6"/>
                 </a:solidFill>
-                <a:latin typeface="Arial"/>
+                <a:latin typeface="Avenir Next"/>
               </a:rPr>
               <a:t>▪  </a:t>
             </a:r>
@@ -21429,7 +21429,7 @@
                 <a:solidFill>
                   <a:srgbClr val="1F2A37"/>
                 </a:solidFill>
-                <a:latin typeface="Arial"/>
+                <a:latin typeface="Avenir Next"/>
               </a:rPr>
               <a:t>Backed up nightly. </a:t>
             </a:r>
@@ -21438,7 +21438,7 @@
                 <a:solidFill>
                   <a:srgbClr val="1F2A37"/>
                 </a:solidFill>
-                <a:latin typeface="Arial"/>
+                <a:latin typeface="Avenir Next"/>
               </a:rPr>
               <a:t>The operational database is copied to cloud storage each night, with a retention policy.</a:t>
             </a:r>
@@ -21457,7 +21457,7 @@
                 <a:solidFill>
                   <a:srgbClr val="14B8A6"/>
                 </a:solidFill>
-                <a:latin typeface="Arial"/>
+                <a:latin typeface="Avenir Next"/>
               </a:rPr>
               <a:t>▪  </a:t>
             </a:r>
@@ -21466,7 +21466,7 @@
                 <a:solidFill>
                   <a:srgbClr val="1F2A37"/>
                 </a:solidFill>
-                <a:latin typeface="Arial"/>
+                <a:latin typeface="Avenir Next"/>
               </a:rPr>
               <a:t>Alerts by email. </a:t>
             </a:r>
@@ -21475,7 +21475,7 @@
                 <a:solidFill>
                   <a:srgbClr val="1F2A37"/>
                 </a:solidFill>
-                <a:latin typeface="Arial"/>
+                <a:latin typeface="Avenir Next"/>
               </a:rPr>
               <a:t>The system emails on the events that matter, such as a failed run or a risk check that blocks a trade.</a:t>
             </a:r>
@@ -21494,7 +21494,7 @@
                 <a:solidFill>
                   <a:srgbClr val="14B8A6"/>
                 </a:solidFill>
-                <a:latin typeface="Arial"/>
+                <a:latin typeface="Avenir Next"/>
               </a:rPr>
               <a:t>▪  </a:t>
             </a:r>
@@ -21503,7 +21503,7 @@
                 <a:solidFill>
                   <a:srgbClr val="1F2A37"/>
                 </a:solidFill>
-                <a:latin typeface="Arial"/>
+                <a:latin typeface="Avenir Next"/>
               </a:rPr>
               <a:t>Shared securely. </a:t>
             </a:r>
@@ -21512,7 +21512,7 @@
                 <a:solidFill>
                   <a:srgbClr val="1F2A37"/>
                 </a:solidFill>
-                <a:latin typeface="Arial"/>
+                <a:latin typeface="Avenir Next"/>
               </a:rPr>
               <a:t>The dashboard is viewable read-only behind a password.</a:t>
             </a:r>
@@ -21551,7 +21551,7 @@
                 <a:solidFill>
                   <a:srgbClr val="6B7787"/>
                 </a:solidFill>
-                <a:latin typeface="Arial"/>
+                <a:latin typeface="Avenir Next"/>
               </a:rPr>
               <a:t>Systematic Factor Income Fund    ·    confidential</a:t>
             </a:r>
@@ -21590,7 +21590,7 @@
                 <a:solidFill>
                   <a:srgbClr val="6B7787"/>
                 </a:solidFill>
-                <a:latin typeface="Arial"/>
+                <a:latin typeface="Avenir Next"/>
               </a:rPr>
               <a:t>28</a:t>
             </a:r>
@@ -21691,7 +21691,7 @@
                 <a:solidFill>
                   <a:srgbClr val="2A4760"/>
                 </a:solidFill>
-                <a:latin typeface="Arial"/>
+                <a:latin typeface="Avenir Next"/>
               </a:rPr>
               <a:t>09</a:t>
             </a:r>
@@ -21774,7 +21774,7 @@
                 <a:solidFill>
                   <a:srgbClr val="FFFFFF"/>
                 </a:solidFill>
-                <a:latin typeface="Arial"/>
+                <a:latin typeface="Avenir Next"/>
               </a:rPr>
               <a:t>Status and outlook</a:t>
             </a:r>
@@ -21813,7 +21813,7 @@
                 <a:solidFill>
                   <a:srgbClr val="C7D2DD"/>
                 </a:solidFill>
-                <a:latin typeface="Arial"/>
+                <a:latin typeface="Avenir Next"/>
               </a:rPr>
               <a:t>Where the build stands, and what remains before live capital</a:t>
             </a:r>
@@ -21958,7 +21958,7 @@
                 <a:solidFill>
                   <a:srgbClr val="0E8C7E"/>
                 </a:solidFill>
-                <a:latin typeface="Arial"/>
+                <a:latin typeface="Avenir Next"/>
               </a:rPr>
               <a:t>9 · STATUS AND OUTLOOK</a:t>
             </a:r>
@@ -21997,7 +21997,7 @@
                 <a:solidFill>
                   <a:srgbClr val="0E1B2A"/>
                 </a:solidFill>
-                <a:latin typeface="Arial"/>
+                <a:latin typeface="Avenir Next"/>
               </a:rPr>
               <a:t>Where the build stands today</a:t>
             </a:r>
@@ -22036,7 +22036,7 @@
                 <a:solidFill>
                   <a:srgbClr val="6B7787"/>
                 </a:solidFill>
-                <a:latin typeface="Arial"/>
+                <a:latin typeface="Avenir Next"/>
               </a:rPr>
               <a:t>Built, tested, and paper-trading, with one verification step ahead</a:t>
             </a:r>
@@ -22122,7 +22122,7 @@
                 <a:solidFill>
                   <a:srgbClr val="14B8A6"/>
                 </a:solidFill>
-                <a:latin typeface="Arial"/>
+                <a:latin typeface="Avenir Next"/>
               </a:rPr>
               <a:t>▪  </a:t>
             </a:r>
@@ -22131,7 +22131,7 @@
                 <a:solidFill>
                   <a:srgbClr val="1F2A37"/>
                 </a:solidFill>
-                <a:latin typeface="Arial"/>
+                <a:latin typeface="Avenir Next"/>
               </a:rPr>
               <a:t>The full strategy is built and tested. </a:t>
             </a:r>
@@ -22140,7 +22140,7 @@
                 <a:solidFill>
                   <a:srgbClr val="1F2A37"/>
                 </a:solidFill>
-                <a:latin typeface="Arial"/>
+                <a:latin typeface="Avenir Next"/>
               </a:rPr>
               <a:t>Data, factor scoring, portfolio construction, the options overlay, execution, and risk controls are all in place.</a:t>
             </a:r>
@@ -22159,7 +22159,7 @@
                 <a:solidFill>
                   <a:srgbClr val="14B8A6"/>
                 </a:solidFill>
-                <a:latin typeface="Arial"/>
+                <a:latin typeface="Avenir Next"/>
               </a:rPr>
               <a:t>▪  </a:t>
             </a:r>
@@ -22168,7 +22168,7 @@
                 <a:solidFill>
                   <a:srgbClr val="1F2A37"/>
                 </a:solidFill>
-                <a:latin typeface="Arial"/>
+                <a:latin typeface="Avenir Next"/>
               </a:rPr>
               <a:t>It is running on a paper account. </a:t>
             </a:r>
@@ -22177,7 +22177,7 @@
                 <a:solidFill>
                   <a:srgbClr val="1F2A37"/>
                 </a:solidFill>
-                <a:latin typeface="Arial"/>
+                <a:latin typeface="Avenir Next"/>
               </a:rPr>
               <a:t>The system trades a simulated account with live market data, monitored by the dashboard.</a:t>
             </a:r>
@@ -22196,7 +22196,7 @@
                 <a:solidFill>
                   <a:srgbClr val="14B8A6"/>
                 </a:solidFill>
-                <a:latin typeface="Arial"/>
+                <a:latin typeface="Avenir Next"/>
               </a:rPr>
               <a:t>▪  </a:t>
             </a:r>
@@ -22205,7 +22205,7 @@
                 <a:solidFill>
                   <a:srgbClr val="0E8C7E"/>
                 </a:solidFill>
-                <a:latin typeface="Arial"/>
+                <a:latin typeface="Avenir Next"/>
               </a:rPr>
               <a:t>The remaining step is live-paper verification. </a:t>
             </a:r>
@@ -22214,7 +22214,7 @@
                 <a:solidFill>
                   <a:srgbClr val="0E1B2A"/>
                 </a:solidFill>
-                <a:latin typeface="Arial"/>
+                <a:latin typeface="Avenir Next"/>
               </a:rPr>
               <a:t>Confirm the full strategy fills, prices, and behaves correctly on the real account before any discussion of live capital.</a:t>
             </a:r>
@@ -22253,7 +22253,7 @@
                 <a:solidFill>
                   <a:srgbClr val="6B7787"/>
                 </a:solidFill>
-                <a:latin typeface="Arial"/>
+                <a:latin typeface="Avenir Next"/>
               </a:rPr>
               <a:t>Systematic Factor Income Fund    ·    confidential</a:t>
             </a:r>
@@ -22292,7 +22292,7 @@
                 <a:solidFill>
                   <a:srgbClr val="6B7787"/>
                 </a:solidFill>
-                <a:latin typeface="Arial"/>
+                <a:latin typeface="Avenir Next"/>
               </a:rPr>
               <a:t>29</a:t>
             </a:r>
@@ -22437,7 +22437,7 @@
                 <a:solidFill>
                   <a:srgbClr val="0E8C7E"/>
                 </a:solidFill>
-                <a:latin typeface="Arial"/>
+                <a:latin typeface="Avenir Next"/>
               </a:rPr>
               <a:t>1 · THE OBJECTIVE</a:t>
             </a:r>
@@ -22476,7 +22476,7 @@
                 <a:solidFill>
                   <a:srgbClr val="0E1B2A"/>
                 </a:solidFill>
-                <a:latin typeface="Arial"/>
+                <a:latin typeface="Avenir Next"/>
               </a:rPr>
               <a:t>What the fund is built to do</a:t>
             </a:r>
@@ -22515,7 +22515,7 @@
                 <a:solidFill>
                   <a:srgbClr val="6B7787"/>
                 </a:solidFill>
-                <a:latin typeface="Arial"/>
+                <a:latin typeface="Avenir Next"/>
               </a:rPr>
               <a:t>The mandate is risk-adjusted income and capital preservation, not maximum return</a:t>
             </a:r>
@@ -22601,7 +22601,7 @@
                 <a:solidFill>
                   <a:srgbClr val="14B8A6"/>
                 </a:solidFill>
-                <a:latin typeface="Arial"/>
+                <a:latin typeface="Avenir Next"/>
               </a:rPr>
               <a:t>▪  </a:t>
             </a:r>
@@ -22610,7 +22610,7 @@
                 <a:solidFill>
                   <a:srgbClr val="1F2A37"/>
                 </a:solidFill>
-                <a:latin typeface="Arial"/>
+                <a:latin typeface="Avenir Next"/>
               </a:rPr>
               <a:t>Preserve capital first. </a:t>
             </a:r>
@@ -22619,7 +22619,7 @@
                 <a:solidFill>
                   <a:srgbClr val="1F2A37"/>
                 </a:solidFill>
-                <a:latin typeface="Arial"/>
+                <a:latin typeface="Avenir Next"/>
               </a:rPr>
               <a:t>Every design choice favours protecting the book over maximising return. Shallow drawdowns matter more than big years.</a:t>
             </a:r>
@@ -22638,7 +22638,7 @@
                 <a:solidFill>
                   <a:srgbClr val="14B8A6"/>
                 </a:solidFill>
-                <a:latin typeface="Arial"/>
+                <a:latin typeface="Avenir Next"/>
               </a:rPr>
               <a:t>▪  </a:t>
             </a:r>
@@ -22647,7 +22647,7 @@
                 <a:solidFill>
                   <a:srgbClr val="1F2A37"/>
                 </a:solidFill>
-                <a:latin typeface="Arial"/>
+                <a:latin typeface="Avenir Next"/>
               </a:rPr>
               <a:t>Produce uncorrelated returns. </a:t>
             </a:r>
@@ -22656,7 +22656,7 @@
                 <a:solidFill>
                   <a:srgbClr val="1F2A37"/>
                 </a:solidFill>
-                <a:latin typeface="Arial"/>
+                <a:latin typeface="Avenir Next"/>
               </a:rPr>
               <a:t>A return stream that diversifies the firm's core business rather than echoing it.</a:t>
             </a:r>
@@ -22675,7 +22675,7 @@
                 <a:solidFill>
                   <a:srgbClr val="14B8A6"/>
                 </a:solidFill>
-                <a:latin typeface="Arial"/>
+                <a:latin typeface="Avenir Next"/>
               </a:rPr>
               <a:t>▪  </a:t>
             </a:r>
@@ -22684,7 +22684,7 @@
                 <a:solidFill>
                   <a:srgbClr val="1F2A37"/>
                 </a:solidFill>
-                <a:latin typeface="Arial"/>
+                <a:latin typeface="Avenir Next"/>
               </a:rPr>
               <a:t>Stay explainable. </a:t>
             </a:r>
@@ -22693,7 +22693,7 @@
                 <a:solidFill>
                   <a:srgbClr val="1F2A37"/>
                 </a:solidFill>
-                <a:latin typeface="Arial"/>
+                <a:latin typeface="Avenir Next"/>
               </a:rPr>
               <a:t>A transparent, rules-based strategy with a long research record. Anyone can audit why a position is held.</a:t>
             </a:r>
@@ -22712,7 +22712,7 @@
                 <a:solidFill>
                   <a:srgbClr val="14B8A6"/>
                 </a:solidFill>
-                <a:latin typeface="Arial"/>
+                <a:latin typeface="Avenir Next"/>
               </a:rPr>
               <a:t>▪  </a:t>
             </a:r>
@@ -22721,7 +22721,7 @@
                 <a:solidFill>
                   <a:srgbClr val="1F2A37"/>
                 </a:solidFill>
-                <a:latin typeface="Arial"/>
+                <a:latin typeface="Avenir Next"/>
               </a:rPr>
               <a:t>Earn income steadily. </a:t>
             </a:r>
@@ -22730,7 +22730,7 @@
                 <a:solidFill>
                   <a:srgbClr val="1F2A37"/>
                 </a:solidFill>
-                <a:latin typeface="Arial"/>
+                <a:latin typeface="Avenir Next"/>
               </a:rPr>
               <a:t>Option premium provides a recurring return that does not depend on the market rising.</a:t>
             </a:r>
@@ -22769,7 +22769,7 @@
                 <a:solidFill>
                   <a:srgbClr val="6B7787"/>
                 </a:solidFill>
-                <a:latin typeface="Arial"/>
+                <a:latin typeface="Avenir Next"/>
               </a:rPr>
               <a:t>Systematic Factor Income Fund    ·    confidential</a:t>
             </a:r>
@@ -22808,7 +22808,7 @@
                 <a:solidFill>
                   <a:srgbClr val="6B7787"/>
                 </a:solidFill>
-                <a:latin typeface="Arial"/>
+                <a:latin typeface="Avenir Next"/>
               </a:rPr>
               <a:t>02</a:t>
             </a:r>
@@ -22953,7 +22953,7 @@
                 <a:solidFill>
                   <a:srgbClr val="0E8C7E"/>
                 </a:solidFill>
-                <a:latin typeface="Arial"/>
+                <a:latin typeface="Avenir Next"/>
               </a:rPr>
               <a:t>9 · STATUS AND OUTLOOK</a:t>
             </a:r>
@@ -22992,7 +22992,7 @@
                 <a:solidFill>
                   <a:srgbClr val="0E1B2A"/>
                 </a:solidFill>
-                <a:latin typeface="Arial"/>
+                <a:latin typeface="Avenir Next"/>
               </a:rPr>
               <a:t>Risks and what comes next</a:t>
             </a:r>
@@ -23075,7 +23075,7 @@
                 <a:solidFill>
                   <a:srgbClr val="0E1B2A"/>
                 </a:solidFill>
-                <a:latin typeface="Arial"/>
+                <a:latin typeface="Avenir Next"/>
               </a:rPr>
               <a:t>Risks we monitor</a:t>
             </a:r>
@@ -23117,7 +23117,7 @@
                 <a:solidFill>
                   <a:srgbClr val="14B8A6"/>
                 </a:solidFill>
-                <a:latin typeface="Arial"/>
+                <a:latin typeface="Avenir Next"/>
               </a:rPr>
               <a:t>▪  </a:t>
             </a:r>
@@ -23126,7 +23126,7 @@
                 <a:solidFill>
                   <a:srgbClr val="1F2A37"/>
                 </a:solidFill>
-                <a:latin typeface="Arial"/>
+                <a:latin typeface="Avenir Next"/>
               </a:rPr>
               <a:t>Crowding in factors</a:t>
             </a:r>
@@ -23145,7 +23145,7 @@
                 <a:solidFill>
                   <a:srgbClr val="6B7787"/>
                 </a:solidFill>
-                <a:latin typeface="Arial"/>
+                <a:latin typeface="Avenir Next"/>
               </a:rPr>
               <a:t>        ·  </a:t>
             </a:r>
@@ -23154,7 +23154,7 @@
                 <a:solidFill>
                   <a:srgbClr val="6B7787"/>
                 </a:solidFill>
-                <a:latin typeface="Arial"/>
+                <a:latin typeface="Avenir Next"/>
               </a:rPr>
               <a:t>tracked by per-factor performance</a:t>
             </a:r>
@@ -23173,7 +23173,7 @@
                 <a:solidFill>
                   <a:srgbClr val="14B8A6"/>
                 </a:solidFill>
-                <a:latin typeface="Arial"/>
+                <a:latin typeface="Avenir Next"/>
               </a:rPr>
               <a:t>▪  </a:t>
             </a:r>
@@ -23182,7 +23182,7 @@
                 <a:solidFill>
                   <a:srgbClr val="1F2A37"/>
                 </a:solidFill>
-                <a:latin typeface="Arial"/>
+                <a:latin typeface="Avenir Next"/>
               </a:rPr>
               <a:t>Capped upside in strong rallies</a:t>
             </a:r>
@@ -23201,7 +23201,7 @@
                 <a:solidFill>
                   <a:srgbClr val="6B7787"/>
                 </a:solidFill>
-                <a:latin typeface="Arial"/>
+                <a:latin typeface="Avenir Next"/>
               </a:rPr>
               <a:t>        ·  </a:t>
             </a:r>
@@ -23210,7 +23210,7 @@
                 <a:solidFill>
                   <a:srgbClr val="6B7787"/>
                 </a:solidFill>
-                <a:latin typeface="Arial"/>
+                <a:latin typeface="Avenir Next"/>
               </a:rPr>
               <a:t>the deliberate cost of the overlay</a:t>
             </a:r>
@@ -23229,7 +23229,7 @@
                 <a:solidFill>
                   <a:srgbClr val="14B8A6"/>
                 </a:solidFill>
-                <a:latin typeface="Arial"/>
+                <a:latin typeface="Avenir Next"/>
               </a:rPr>
               <a:t>▪  </a:t>
             </a:r>
@@ -23238,7 +23238,7 @@
                 <a:solidFill>
                   <a:srgbClr val="1F2A37"/>
                 </a:solidFill>
-                <a:latin typeface="Arial"/>
+                <a:latin typeface="Avenir Next"/>
               </a:rPr>
               <a:t>Data-source reliability</a:t>
             </a:r>
@@ -23257,7 +23257,7 @@
                 <a:solidFill>
                   <a:srgbClr val="6B7787"/>
                 </a:solidFill>
-                <a:latin typeface="Arial"/>
+                <a:latin typeface="Avenir Next"/>
               </a:rPr>
               <a:t>        ·  </a:t>
             </a:r>
@@ -23266,7 +23266,7 @@
                 <a:solidFill>
                   <a:srgbClr val="6B7787"/>
                 </a:solidFill>
-                <a:latin typeface="Arial"/>
+                <a:latin typeface="Avenir Next"/>
               </a:rPr>
               <a:t>clean universe, reconciled each run</a:t>
             </a:r>
@@ -23285,7 +23285,7 @@
                 <a:solidFill>
                   <a:srgbClr val="14B8A6"/>
                 </a:solidFill>
-                <a:latin typeface="Arial"/>
+                <a:latin typeface="Avenir Next"/>
               </a:rPr>
               <a:t>▪  </a:t>
             </a:r>
@@ -23294,7 +23294,7 @@
                 <a:solidFill>
                   <a:srgbClr val="1F2A37"/>
                 </a:solidFill>
-                <a:latin typeface="Arial"/>
+                <a:latin typeface="Avenir Next"/>
               </a:rPr>
               <a:t>The gap from test to live</a:t>
             </a:r>
@@ -23313,7 +23313,7 @@
                 <a:solidFill>
                   <a:srgbClr val="6B7787"/>
                 </a:solidFill>
-                <a:latin typeface="Arial"/>
+                <a:latin typeface="Avenir Next"/>
               </a:rPr>
               <a:t>        ·  </a:t>
             </a:r>
@@ -23322,7 +23322,7 @@
                 <a:solidFill>
                   <a:srgbClr val="6B7787"/>
                 </a:solidFill>
-                <a:latin typeface="Arial"/>
+                <a:latin typeface="Avenir Next"/>
               </a:rPr>
               <a:t>what paper trading is there to close</a:t>
             </a:r>
@@ -23405,7 +23405,7 @@
                 <a:solidFill>
                   <a:srgbClr val="0E1B2A"/>
                 </a:solidFill>
-                <a:latin typeface="Arial"/>
+                <a:latin typeface="Avenir Next"/>
               </a:rPr>
               <a:t>What comes next</a:t>
             </a:r>
@@ -23447,7 +23447,7 @@
                 <a:solidFill>
                   <a:srgbClr val="14B8A6"/>
                 </a:solidFill>
-                <a:latin typeface="Arial"/>
+                <a:latin typeface="Avenir Next"/>
               </a:rPr>
               <a:t>▪  </a:t>
             </a:r>
@@ -23456,7 +23456,7 @@
                 <a:solidFill>
                   <a:srgbClr val="1F2A37"/>
                 </a:solidFill>
-                <a:latin typeface="Arial"/>
+                <a:latin typeface="Avenir Next"/>
               </a:rPr>
               <a:t>Live-paper verification</a:t>
             </a:r>
@@ -23475,7 +23475,7 @@
                 <a:solidFill>
                   <a:srgbClr val="6B7787"/>
                 </a:solidFill>
-                <a:latin typeface="Arial"/>
+                <a:latin typeface="Avenir Next"/>
               </a:rPr>
               <a:t>        ·  </a:t>
             </a:r>
@@ -23484,7 +23484,7 @@
                 <a:solidFill>
                   <a:srgbClr val="6B7787"/>
                 </a:solidFill>
-                <a:latin typeface="Arial"/>
+                <a:latin typeface="Avenir Next"/>
               </a:rPr>
               <a:t>the immediate milestone</a:t>
             </a:r>
@@ -23503,7 +23503,7 @@
                 <a:solidFill>
                   <a:srgbClr val="14B8A6"/>
                 </a:solidFill>
-                <a:latin typeface="Arial"/>
+                <a:latin typeface="Avenir Next"/>
               </a:rPr>
               <a:t>▪  </a:t>
             </a:r>
@@ -23512,7 +23512,7 @@
                 <a:solidFill>
                   <a:srgbClr val="1F2A37"/>
                 </a:solidFill>
-                <a:latin typeface="Arial"/>
+                <a:latin typeface="Avenir Next"/>
               </a:rPr>
               <a:t>Refine factor weights</a:t>
             </a:r>
@@ -23531,7 +23531,7 @@
                 <a:solidFill>
                   <a:srgbClr val="6B7787"/>
                 </a:solidFill>
-                <a:latin typeface="Arial"/>
+                <a:latin typeface="Avenir Next"/>
               </a:rPr>
               <a:t>        ·  </a:t>
             </a:r>
@@ -23540,7 +23540,7 @@
                 <a:solidFill>
                   <a:srgbClr val="6B7787"/>
                 </a:solidFill>
-                <a:latin typeface="Arial"/>
+                <a:latin typeface="Avenir Next"/>
               </a:rPr>
               <a:t>after more live evidence</a:t>
             </a:r>
@@ -23559,7 +23559,7 @@
                 <a:solidFill>
                   <a:srgbClr val="14B8A6"/>
                 </a:solidFill>
-                <a:latin typeface="Arial"/>
+                <a:latin typeface="Avenir Next"/>
               </a:rPr>
               <a:t>▪  </a:t>
             </a:r>
@@ -23568,7 +23568,7 @@
                 <a:solidFill>
                   <a:srgbClr val="1F2A37"/>
                 </a:solidFill>
-                <a:latin typeface="Arial"/>
+                <a:latin typeface="Avenir Next"/>
               </a:rPr>
               <a:t>Broaden the income overlay</a:t>
             </a:r>
@@ -23587,7 +23587,7 @@
                 <a:solidFill>
                   <a:srgbClr val="6B7787"/>
                 </a:solidFill>
-                <a:latin typeface="Arial"/>
+                <a:latin typeface="Avenir Next"/>
               </a:rPr>
               <a:t>        ·  </a:t>
             </a:r>
@@ -23596,7 +23596,7 @@
                 <a:solidFill>
                   <a:srgbClr val="6B7787"/>
                 </a:solidFill>
-                <a:latin typeface="Arial"/>
+                <a:latin typeface="Avenir Next"/>
               </a:rPr>
               <a:t>more coverage, additional option strategies</a:t>
             </a:r>
@@ -23615,7 +23615,7 @@
                 <a:solidFill>
                   <a:srgbClr val="14B8A6"/>
                 </a:solidFill>
-                <a:latin typeface="Arial"/>
+                <a:latin typeface="Avenir Next"/>
               </a:rPr>
               <a:t>▪  </a:t>
             </a:r>
@@ -23624,7 +23624,7 @@
                 <a:solidFill>
                   <a:srgbClr val="1F2A37"/>
                 </a:solidFill>
-                <a:latin typeface="Arial"/>
+                <a:latin typeface="Avenir Next"/>
               </a:rPr>
               <a:t>Define the go-live criteria</a:t>
             </a:r>
@@ -23643,7 +23643,7 @@
                 <a:solidFill>
                   <a:srgbClr val="6B7787"/>
                 </a:solidFill>
-                <a:latin typeface="Arial"/>
+                <a:latin typeface="Avenir Next"/>
               </a:rPr>
               <a:t>        ·  </a:t>
             </a:r>
@@ -23652,7 +23652,7 @@
                 <a:solidFill>
                   <a:srgbClr val="6B7787"/>
                 </a:solidFill>
-                <a:latin typeface="Arial"/>
+                <a:latin typeface="Avenir Next"/>
               </a:rPr>
               <a:t>before any real capital is committed</a:t>
             </a:r>
@@ -23691,7 +23691,7 @@
                 <a:solidFill>
                   <a:srgbClr val="6B7787"/>
                 </a:solidFill>
-                <a:latin typeface="Arial"/>
+                <a:latin typeface="Avenir Next"/>
               </a:rPr>
               <a:t>Systematic Factor Income Fund    ·    confidential</a:t>
             </a:r>
@@ -23730,7 +23730,7 @@
                 <a:solidFill>
                   <a:srgbClr val="6B7787"/>
                 </a:solidFill>
-                <a:latin typeface="Arial"/>
+                <a:latin typeface="Avenir Next"/>
               </a:rPr>
               <a:t>30</a:t>
             </a:r>
@@ -23875,7 +23875,7 @@
                 <a:solidFill>
                   <a:srgbClr val="14B8A6"/>
                 </a:solidFill>
-                <a:latin typeface="Arial"/>
+                <a:latin typeface="Avenir Next"/>
               </a:rPr>
               <a:t>IN SUMMARY</a:t>
             </a:r>
@@ -23958,7 +23958,7 @@
                 <a:solidFill>
                   <a:srgbClr val="FFFFFF"/>
                 </a:solidFill>
-                <a:latin typeface="Arial"/>
+                <a:latin typeface="Avenir Next"/>
               </a:rPr>
               <a:t>A disciplined factor portfolio</a:t>
             </a:r>
@@ -23997,7 +23997,7 @@
                 <a:solidFill>
                   <a:srgbClr val="A9B7C4"/>
                 </a:solidFill>
-                <a:latin typeface="Arial"/>
+                <a:latin typeface="Avenir Next"/>
               </a:rPr>
               <a:t>Four proven traits, computed transparently and weighted equally.</a:t>
             </a:r>
@@ -24080,7 +24080,7 @@
                 <a:solidFill>
                   <a:srgbClr val="FFFFFF"/>
                 </a:solidFill>
-                <a:latin typeface="Arial"/>
+                <a:latin typeface="Avenir Next"/>
               </a:rPr>
               <a:t>An income overlay that lowers risk</a:t>
             </a:r>
@@ -24119,7 +24119,7 @@
                 <a:solidFill>
                   <a:srgbClr val="A9B7C4"/>
                 </a:solidFill>
-                <a:latin typeface="Arial"/>
+                <a:latin typeface="Avenir Next"/>
               </a:rPr>
               <a:t>Covered calls harvest a persistent premium and smooth the ride.</a:t>
             </a:r>
@@ -24202,7 +24202,7 @@
                 <a:solidFill>
                   <a:srgbClr val="FFFFFF"/>
                 </a:solidFill>
-                <a:latin typeface="Arial"/>
+                <a:latin typeface="Avenir Next"/>
               </a:rPr>
               <a:t>Built for capital preservation</a:t>
             </a:r>
@@ -24241,7 +24241,7 @@
                 <a:solidFill>
                   <a:srgbClr val="A9B7C4"/>
                 </a:solidFill>
-                <a:latin typeface="Arial"/>
+                <a:latin typeface="Avenir Next"/>
               </a:rPr>
               <a:t>Firm diversification limits, a pre-trade risk check, and an emergency stop.</a:t>
             </a:r>
@@ -24324,7 +24324,7 @@
                 <a:solidFill>
                   <a:srgbClr val="FFFFFF"/>
                 </a:solidFill>
-                <a:latin typeface="Arial"/>
+                <a:latin typeface="Avenir Next"/>
               </a:rPr>
               <a:t>Tested, and honest about its limits</a:t>
             </a:r>
@@ -24363,7 +24363,7 @@
                 <a:solidFill>
                   <a:srgbClr val="A9B7C4"/>
                 </a:solidFill>
-                <a:latin typeface="Arial"/>
+                <a:latin typeface="Avenir Next"/>
               </a:rPr>
               <a:t>Strong risk-adjusted returns in a rigorous simulation, with the assumptions stated.</a:t>
             </a:r>
@@ -24446,7 +24446,7 @@
                 <a:solidFill>
                   <a:srgbClr val="FFFFFF"/>
                 </a:solidFill>
-                <a:latin typeface="Arial"/>
+                <a:latin typeface="Avenir Next"/>
               </a:rPr>
               <a:t>Live and monitored</a:t>
             </a:r>
@@ -24485,7 +24485,7 @@
                 <a:solidFill>
                   <a:srgbClr val="A9B7C4"/>
                 </a:solidFill>
-                <a:latin typeface="Arial"/>
+                <a:latin typeface="Avenir Next"/>
               </a:rPr>
               <a:t>Running on a paper account, one verification step from the go-live discussion.</a:t>
             </a:r>
@@ -24524,7 +24524,7 @@
                 <a:solidFill>
                   <a:srgbClr val="6B7787"/>
                 </a:solidFill>
-                <a:latin typeface="Arial"/>
+                <a:latin typeface="Avenir Next"/>
               </a:rPr>
               <a:t>Systematic Factor Income Fund    ·    confidential</a:t>
             </a:r>
@@ -24563,7 +24563,7 @@
                 <a:solidFill>
                   <a:srgbClr val="6B7787"/>
                 </a:solidFill>
-                <a:latin typeface="Arial"/>
+                <a:latin typeface="Avenir Next"/>
               </a:rPr>
               <a:t>31</a:t>
             </a:r>
@@ -24664,7 +24664,7 @@
                 <a:solidFill>
                   <a:srgbClr val="2A4760"/>
                 </a:solidFill>
-                <a:latin typeface="Arial"/>
+                <a:latin typeface="Avenir Next"/>
               </a:rPr>
               <a:t>10</a:t>
             </a:r>
@@ -24747,7 +24747,7 @@
                 <a:solidFill>
                   <a:srgbClr val="FFFFFF"/>
                 </a:solidFill>
-                <a:latin typeface="Arial"/>
+                <a:latin typeface="Avenir Next"/>
               </a:rPr>
               <a:t>Appendix</a:t>
             </a:r>
@@ -24786,7 +24786,7 @@
                 <a:solidFill>
                   <a:srgbClr val="C7D2DD"/>
                 </a:solidFill>
-                <a:latin typeface="Arial"/>
+                <a:latin typeface="Avenir Next"/>
               </a:rPr>
               <a:t>Formulas, sources, detailed results, and a glossary</a:t>
             </a:r>
@@ -24931,7 +24931,7 @@
                 <a:solidFill>
                   <a:srgbClr val="0E8C7E"/>
                 </a:solidFill>
-                <a:latin typeface="Arial"/>
+                <a:latin typeface="Avenir Next"/>
               </a:rPr>
               <a:t>APPENDIX · A1</a:t>
             </a:r>
@@ -24970,7 +24970,7 @@
                 <a:solidFill>
                   <a:srgbClr val="0E1B2A"/>
                 </a:solidFill>
-                <a:latin typeface="Arial"/>
+                <a:latin typeface="Avenir Next"/>
               </a:rPr>
               <a:t>Factor formulas</a:t>
             </a:r>
@@ -25101,7 +25101,7 @@
                 <a:solidFill>
                   <a:srgbClr val="0E8C7E"/>
                 </a:solidFill>
-                <a:latin typeface="Arial"/>
+                <a:latin typeface="Avenir Next"/>
               </a:rPr>
               <a:t>VALUE</a:t>
             </a:r>
@@ -25124,8 +25124,8 @@
         </p:blipFill>
         <p:spPr>
           <a:xfrm>
-            <a:off x="914400" y="2557683"/>
-            <a:ext cx="4663440" cy="462472"/>
+            <a:off x="914400" y="2493152"/>
+            <a:ext cx="4663440" cy="591534"/>
           </a:xfrm>
           <a:prstGeom prst="rect">
             <a:avLst/>
@@ -25212,7 +25212,7 @@
                 <a:solidFill>
                   <a:srgbClr val="0E8C7E"/>
                 </a:solidFill>
-                <a:latin typeface="Arial"/>
+                <a:latin typeface="Avenir Next"/>
               </a:rPr>
               <a:t>MOMENTUM</a:t>
             </a:r>
@@ -25323,7 +25323,7 @@
                 <a:solidFill>
                   <a:srgbClr val="0E8C7E"/>
                 </a:solidFill>
-                <a:latin typeface="Arial"/>
+                <a:latin typeface="Avenir Next"/>
               </a:rPr>
               <a:t>QUALITY</a:t>
             </a:r>
@@ -25346,8 +25346,8 @@
         </p:blipFill>
         <p:spPr>
           <a:xfrm>
-            <a:off x="914400" y="4374785"/>
-            <a:ext cx="4663440" cy="394429"/>
+            <a:off x="914400" y="4319748"/>
+            <a:ext cx="4663440" cy="504502"/>
           </a:xfrm>
           <a:prstGeom prst="rect">
             <a:avLst/>
@@ -25434,7 +25434,7 @@
                 <a:solidFill>
                   <a:srgbClr val="0E8C7E"/>
                 </a:solidFill>
-                <a:latin typeface="Arial"/>
+                <a:latin typeface="Avenir Next"/>
               </a:rPr>
               <a:t>LOW VOLATILITY</a:t>
             </a:r>
@@ -25457,8 +25457,8 @@
         </p:blipFill>
         <p:spPr>
           <a:xfrm>
-            <a:off x="6519672" y="4283889"/>
-            <a:ext cx="4663440" cy="576221"/>
+            <a:off x="6519672" y="4183615"/>
+            <a:ext cx="4663440" cy="776769"/>
           </a:xfrm>
           <a:prstGeom prst="rect">
             <a:avLst/>
@@ -25497,7 +25497,7 @@
                 <a:solidFill>
                   <a:srgbClr val="0E1B2A"/>
                 </a:solidFill>
-                <a:latin typeface="Arial"/>
+                <a:latin typeface="Avenir Next"/>
               </a:rPr>
               <a:t>z(·)</a:t>
             </a:r>
@@ -25506,7 +25506,7 @@
                 <a:solidFill>
                   <a:srgbClr val="6B7787"/>
                 </a:solidFill>
-                <a:latin typeface="Arial"/>
+                <a:latin typeface="Avenir Next"/>
               </a:rPr>
               <a:t> is the standardising score from slide 8; each factor is combined equally into the final score.</a:t>
             </a:r>
@@ -25545,7 +25545,7 @@
                 <a:solidFill>
                   <a:srgbClr val="6B7787"/>
                 </a:solidFill>
-                <a:latin typeface="Arial"/>
+                <a:latin typeface="Avenir Next"/>
               </a:rPr>
               <a:t>Systematic Factor Income Fund    ·    confidential</a:t>
             </a:r>
@@ -25584,7 +25584,7 @@
                 <a:solidFill>
                   <a:srgbClr val="6B7787"/>
                 </a:solidFill>
-                <a:latin typeface="Arial"/>
+                <a:latin typeface="Avenir Next"/>
               </a:rPr>
               <a:t>32</a:t>
             </a:r>
@@ -25729,7 +25729,7 @@
                 <a:solidFill>
                   <a:srgbClr val="0E8C7E"/>
                 </a:solidFill>
-                <a:latin typeface="Arial"/>
+                <a:latin typeface="Avenir Next"/>
               </a:rPr>
               <a:t>APPENDIX · A2</a:t>
             </a:r>
@@ -25768,7 +25768,7 @@
                 <a:solidFill>
                   <a:srgbClr val="0E1B2A"/>
                 </a:solidFill>
-                <a:latin typeface="Arial"/>
+                <a:latin typeface="Avenir Next"/>
               </a:rPr>
               <a:t>Selected research</a:t>
             </a:r>
@@ -25851,7 +25851,7 @@
                 <a:solidFill>
                   <a:srgbClr val="0E8C7E"/>
                 </a:solidFill>
-                <a:latin typeface="Arial"/>
+                <a:latin typeface="Avenir Next"/>
               </a:rPr>
               <a:t>Value</a:t>
             </a:r>
@@ -25890,7 +25890,7 @@
                 <a:solidFill>
                   <a:srgbClr val="1F2A37"/>
                 </a:solidFill>
-                <a:latin typeface="Arial"/>
+                <a:latin typeface="Avenir Next"/>
               </a:rPr>
               <a:t>·  Fama &amp; French (1992), The Cross-Section of Expected Stock Returns</a:t>
             </a:r>
@@ -25929,7 +25929,7 @@
                 <a:solidFill>
                   <a:srgbClr val="1F2A37"/>
                 </a:solidFill>
-                <a:latin typeface="Arial"/>
+                <a:latin typeface="Avenir Next"/>
               </a:rPr>
               <a:t>·  Fama &amp; French (1993), Common Risk Factors in Stocks and Bonds</a:t>
             </a:r>
@@ -25968,7 +25968,7 @@
                 <a:solidFill>
                   <a:srgbClr val="1F2A37"/>
                 </a:solidFill>
-                <a:latin typeface="Arial"/>
+                <a:latin typeface="Avenir Next"/>
               </a:rPr>
               <a:t>·  Basu (1977), Investment Performance in Relation to P/E Ratios</a:t>
             </a:r>
@@ -26007,7 +26007,7 @@
                 <a:solidFill>
                   <a:srgbClr val="0E8C7E"/>
                 </a:solidFill>
-                <a:latin typeface="Arial"/>
+                <a:latin typeface="Avenir Next"/>
               </a:rPr>
               <a:t>Momentum</a:t>
             </a:r>
@@ -26046,7 +26046,7 @@
                 <a:solidFill>
                   <a:srgbClr val="1F2A37"/>
                 </a:solidFill>
-                <a:latin typeface="Arial"/>
+                <a:latin typeface="Avenir Next"/>
               </a:rPr>
               <a:t>·  Jegadeesh &amp; Titman (1993), Returns to Buying Winners and Selling Losers</a:t>
             </a:r>
@@ -26085,7 +26085,7 @@
                 <a:solidFill>
                   <a:srgbClr val="1F2A37"/>
                 </a:solidFill>
-                <a:latin typeface="Arial"/>
+                <a:latin typeface="Avenir Next"/>
               </a:rPr>
               <a:t>·  Carhart (1997), On Persistence in Mutual Fund Performance</a:t>
             </a:r>
@@ -26124,7 +26124,7 @@
                 <a:solidFill>
                   <a:srgbClr val="1F2A37"/>
                 </a:solidFill>
-                <a:latin typeface="Arial"/>
+                <a:latin typeface="Avenir Next"/>
               </a:rPr>
               <a:t>·  Asness, Moskowitz &amp; Pedersen (2013), Value and Momentum Everywhere</a:t>
             </a:r>
@@ -26163,7 +26163,7 @@
                 <a:solidFill>
                   <a:srgbClr val="0E8C7E"/>
                 </a:solidFill>
-                <a:latin typeface="Arial"/>
+                <a:latin typeface="Avenir Next"/>
               </a:rPr>
               <a:t>Quality</a:t>
             </a:r>
@@ -26202,7 +26202,7 @@
                 <a:solidFill>
                   <a:srgbClr val="1F2A37"/>
                 </a:solidFill>
-                <a:latin typeface="Arial"/>
+                <a:latin typeface="Avenir Next"/>
               </a:rPr>
               <a:t>·  Novy-Marx (2013), The Gross Profitability Premium</a:t>
             </a:r>
@@ -26241,7 +26241,7 @@
                 <a:solidFill>
                   <a:srgbClr val="1F2A37"/>
                 </a:solidFill>
-                <a:latin typeface="Arial"/>
+                <a:latin typeface="Avenir Next"/>
               </a:rPr>
               <a:t>·  Asness, Frazzini &amp; Pedersen (2019), Quality Minus Junk</a:t>
             </a:r>
@@ -26280,7 +26280,7 @@
                 <a:solidFill>
                   <a:srgbClr val="1F2A37"/>
                 </a:solidFill>
-                <a:latin typeface="Arial"/>
+                <a:latin typeface="Avenir Next"/>
               </a:rPr>
               <a:t>·  Piotroski (2000), Value Investing and the F-Score</a:t>
             </a:r>
@@ -26319,7 +26319,7 @@
                 <a:solidFill>
                   <a:srgbClr val="0E8C7E"/>
                 </a:solidFill>
-                <a:latin typeface="Arial"/>
+                <a:latin typeface="Avenir Next"/>
               </a:rPr>
               <a:t>Low volatility</a:t>
             </a:r>
@@ -26358,7 +26358,7 @@
                 <a:solidFill>
                   <a:srgbClr val="1F2A37"/>
                 </a:solidFill>
-                <a:latin typeface="Arial"/>
+                <a:latin typeface="Avenir Next"/>
               </a:rPr>
               <a:t>·  Ang, Hodrick, Xing &amp; Zhang (2006), The Cross-Section of Volatility</a:t>
             </a:r>
@@ -26397,7 +26397,7 @@
                 <a:solidFill>
                   <a:srgbClr val="1F2A37"/>
                 </a:solidFill>
-                <a:latin typeface="Arial"/>
+                <a:latin typeface="Avenir Next"/>
               </a:rPr>
               <a:t>·  Frazzini &amp; Pedersen (2014), Betting Against Beta</a:t>
             </a:r>
@@ -26436,7 +26436,7 @@
                 <a:solidFill>
                   <a:srgbClr val="1F2A37"/>
                 </a:solidFill>
-                <a:latin typeface="Arial"/>
+                <a:latin typeface="Avenir Next"/>
               </a:rPr>
               <a:t>·  Baker, Bradley &amp; Wurgler (2011), Benchmarks as Limits to Arbitrage</a:t>
             </a:r>
@@ -26475,7 +26475,7 @@
                 <a:solidFill>
                   <a:srgbClr val="0E8C7E"/>
                 </a:solidFill>
-                <a:latin typeface="Arial"/>
+                <a:latin typeface="Avenir Next"/>
               </a:rPr>
               <a:t>Options premium</a:t>
             </a:r>
@@ -26514,7 +26514,7 @@
                 <a:solidFill>
                   <a:srgbClr val="1F2A37"/>
                 </a:solidFill>
-                <a:latin typeface="Arial"/>
+                <a:latin typeface="Avenir Next"/>
               </a:rPr>
               <a:t>·  Whaley (2002), Return and Risk of the CBOE BuyWrite Index</a:t>
             </a:r>
@@ -26553,7 +26553,7 @@
                 <a:solidFill>
                   <a:srgbClr val="1F2A37"/>
                 </a:solidFill>
-                <a:latin typeface="Arial"/>
+                <a:latin typeface="Avenir Next"/>
               </a:rPr>
               <a:t>·  Carr &amp; Wu (2009), Variance Risk Premiums</a:t>
             </a:r>
@@ -26592,7 +26592,7 @@
                 <a:solidFill>
                   <a:srgbClr val="1F2A37"/>
                 </a:solidFill>
-                <a:latin typeface="Arial"/>
+                <a:latin typeface="Avenir Next"/>
               </a:rPr>
               <a:t>·  Bakshi &amp; Kapadia (2003), Delta-Hedged Gains and the Volatility Premium</a:t>
             </a:r>
@@ -26631,7 +26631,7 @@
                 <a:solidFill>
                   <a:srgbClr val="6B7787"/>
                 </a:solidFill>
-                <a:latin typeface="Arial"/>
+                <a:latin typeface="Avenir Next"/>
               </a:rPr>
               <a:t>Systematic Factor Income Fund    ·    confidential</a:t>
             </a:r>
@@ -26670,7 +26670,7 @@
                 <a:solidFill>
                   <a:srgbClr val="6B7787"/>
                 </a:solidFill>
-                <a:latin typeface="Arial"/>
+                <a:latin typeface="Avenir Next"/>
               </a:rPr>
               <a:t>33</a:t>
             </a:r>
@@ -26815,7 +26815,7 @@
                 <a:solidFill>
                   <a:srgbClr val="0E8C7E"/>
                 </a:solidFill>
-                <a:latin typeface="Arial"/>
+                <a:latin typeface="Avenir Next"/>
               </a:rPr>
               <a:t>APPENDIX · A3</a:t>
             </a:r>
@@ -26854,7 +26854,7 @@
                 <a:solidFill>
                   <a:srgbClr val="0E1B2A"/>
                 </a:solidFill>
-                <a:latin typeface="Arial"/>
+                <a:latin typeface="Avenir Next"/>
               </a:rPr>
               <a:t>Detailed results, 2021 to 2026</a:t>
             </a:r>
@@ -26893,7 +26893,7 @@
                 <a:solidFill>
                   <a:srgbClr val="6B7787"/>
                 </a:solidFill>
-                <a:latin typeface="Arial"/>
+                <a:latin typeface="Avenir Next"/>
               </a:rPr>
               <a:t>Strategy figures from the walk-forward simulation; benchmarks from index history</a:t>
             </a:r>
@@ -26982,7 +26982,7 @@
                           <a:solidFill>
                             <a:srgbClr val="FFFFFF"/>
                           </a:solidFill>
-                          <a:latin typeface="Arial"/>
+                          <a:latin typeface="Avenir Next"/>
                         </a:rPr>
                         <a:t/>
                       </a:r>
@@ -27005,7 +27005,7 @@
                           <a:solidFill>
                             <a:srgbClr val="FFFFFF"/>
                           </a:solidFill>
-                          <a:latin typeface="Arial"/>
+                          <a:latin typeface="Avenir Next"/>
                         </a:rPr>
                         <a:t>Annual return</a:t>
                       </a:r>
@@ -27028,7 +27028,7 @@
                           <a:solidFill>
                             <a:srgbClr val="FFFFFF"/>
                           </a:solidFill>
-                          <a:latin typeface="Arial"/>
+                          <a:latin typeface="Avenir Next"/>
                         </a:rPr>
                         <a:t>Volatility</a:t>
                       </a:r>
@@ -27051,7 +27051,7 @@
                           <a:solidFill>
                             <a:srgbClr val="FFFFFF"/>
                           </a:solidFill>
-                          <a:latin typeface="Arial"/>
+                          <a:latin typeface="Avenir Next"/>
                         </a:rPr>
                         <a:t>Sharpe</a:t>
                       </a:r>
@@ -27074,7 +27074,7 @@
                           <a:solidFill>
                             <a:srgbClr val="FFFFFF"/>
                           </a:solidFill>
-                          <a:latin typeface="Arial"/>
+                          <a:latin typeface="Avenir Next"/>
                         </a:rPr>
                         <a:t>Max drawdown</a:t>
                       </a:r>
@@ -27097,7 +27097,7 @@
                           <a:solidFill>
                             <a:srgbClr val="FFFFFF"/>
                           </a:solidFill>
-                          <a:latin typeface="Arial"/>
+                          <a:latin typeface="Avenir Next"/>
                         </a:rPr>
                         <a:t>Premium / yr</a:t>
                       </a:r>
@@ -27122,7 +27122,7 @@
                           <a:solidFill>
                             <a:srgbClr val="0E1B2A"/>
                           </a:solidFill>
-                          <a:latin typeface="Arial"/>
+                          <a:latin typeface="Avenir Next"/>
                         </a:rPr>
                         <a:t>S&amp;P 500</a:t>
                       </a:r>
@@ -27145,7 +27145,7 @@
                           <a:solidFill>
                             <a:srgbClr val="1F2A37"/>
                           </a:solidFill>
-                          <a:latin typeface="Arial"/>
+                          <a:latin typeface="Avenir Next"/>
                         </a:rPr>
                         <a:t>+13.3%</a:t>
                       </a:r>
@@ -27168,7 +27168,7 @@
                           <a:solidFill>
                             <a:srgbClr val="1F2A37"/>
                           </a:solidFill>
-                          <a:latin typeface="Arial"/>
+                          <a:latin typeface="Avenir Next"/>
                         </a:rPr>
                         <a:t>16.0%</a:t>
                       </a:r>
@@ -27191,7 +27191,7 @@
                           <a:solidFill>
                             <a:srgbClr val="1F2A37"/>
                           </a:solidFill>
-                          <a:latin typeface="Arial"/>
+                          <a:latin typeface="Avenir Next"/>
                         </a:rPr>
                         <a:t>0.87</a:t>
                       </a:r>
@@ -27214,7 +27214,7 @@
                           <a:solidFill>
                             <a:srgbClr val="1F2A37"/>
                           </a:solidFill>
-                          <a:latin typeface="Arial"/>
+                          <a:latin typeface="Avenir Next"/>
                         </a:rPr>
                         <a:t>−23.9%</a:t>
                       </a:r>
@@ -27237,7 +27237,7 @@
                           <a:solidFill>
                             <a:srgbClr val="1F2A37"/>
                           </a:solidFill>
-                          <a:latin typeface="Arial"/>
+                          <a:latin typeface="Avenir Next"/>
                         </a:rPr>
                         <a:t>—</a:t>
                       </a:r>
@@ -27262,7 +27262,7 @@
                           <a:solidFill>
                             <a:srgbClr val="0E1B2A"/>
                           </a:solidFill>
-                          <a:latin typeface="Arial"/>
+                          <a:latin typeface="Avenir Next"/>
                         </a:rPr>
                         <a:t>S&amp;P 500 BuyWrite (BXMD)</a:t>
                       </a:r>
@@ -27285,7 +27285,7 @@
                           <a:solidFill>
                             <a:srgbClr val="1F2A37"/>
                           </a:solidFill>
-                          <a:latin typeface="Arial"/>
+                          <a:latin typeface="Avenir Next"/>
                         </a:rPr>
                         <a:t>+10.2%</a:t>
                       </a:r>
@@ -27308,7 +27308,7 @@
                           <a:solidFill>
                             <a:srgbClr val="1F2A37"/>
                           </a:solidFill>
-                          <a:latin typeface="Arial"/>
+                          <a:latin typeface="Avenir Next"/>
                         </a:rPr>
                         <a:t>12.0%</a:t>
                       </a:r>
@@ -27331,7 +27331,7 @@
                           <a:solidFill>
                             <a:srgbClr val="1F2A37"/>
                           </a:solidFill>
-                          <a:latin typeface="Arial"/>
+                          <a:latin typeface="Avenir Next"/>
                         </a:rPr>
                         <a:t>0.87</a:t>
                       </a:r>
@@ -27354,7 +27354,7 @@
                           <a:solidFill>
                             <a:srgbClr val="1F2A37"/>
                           </a:solidFill>
-                          <a:latin typeface="Arial"/>
+                          <a:latin typeface="Avenir Next"/>
                         </a:rPr>
                         <a:t>−21.6%</a:t>
                       </a:r>
@@ -27377,7 +27377,7 @@
                           <a:solidFill>
                             <a:srgbClr val="1F2A37"/>
                           </a:solidFill>
-                          <a:latin typeface="Arial"/>
+                          <a:latin typeface="Avenir Next"/>
                         </a:rPr>
                         <a:t>—</a:t>
                       </a:r>
@@ -27402,7 +27402,7 @@
                           <a:solidFill>
                             <a:srgbClr val="0E1B2A"/>
                           </a:solidFill>
-                          <a:latin typeface="Arial"/>
+                          <a:latin typeface="Avenir Next"/>
                         </a:rPr>
                         <a:t>Strategy, stocks only</a:t>
                       </a:r>
@@ -27425,7 +27425,7 @@
                           <a:solidFill>
                             <a:srgbClr val="1F2A37"/>
                           </a:solidFill>
-                          <a:latin typeface="Arial"/>
+                          <a:latin typeface="Avenir Next"/>
                         </a:rPr>
                         <a:t>+10.9%</a:t>
                       </a:r>
@@ -27448,7 +27448,7 @@
                           <a:solidFill>
                             <a:srgbClr val="1F2A37"/>
                           </a:solidFill>
-                          <a:latin typeface="Arial"/>
+                          <a:latin typeface="Avenir Next"/>
                         </a:rPr>
                         <a:t>~20%</a:t>
                       </a:r>
@@ -27471,7 +27471,7 @@
                           <a:solidFill>
                             <a:srgbClr val="1F2A37"/>
                           </a:solidFill>
-                          <a:latin typeface="Arial"/>
+                          <a:latin typeface="Avenir Next"/>
                         </a:rPr>
                         <a:t>0.62</a:t>
                       </a:r>
@@ -27494,7 +27494,7 @@
                           <a:solidFill>
                             <a:srgbClr val="1F2A37"/>
                           </a:solidFill>
-                          <a:latin typeface="Arial"/>
+                          <a:latin typeface="Avenir Next"/>
                         </a:rPr>
                         <a:t>−26%</a:t>
                       </a:r>
@@ -27517,7 +27517,7 @@
                           <a:solidFill>
                             <a:srgbClr val="1F2A37"/>
                           </a:solidFill>
-                          <a:latin typeface="Arial"/>
+                          <a:latin typeface="Avenir Next"/>
                         </a:rPr>
                         <a:t>—</a:t>
                       </a:r>
@@ -27542,7 +27542,7 @@
                           <a:solidFill>
                             <a:srgbClr val="0E1B2A"/>
                           </a:solidFill>
-                          <a:latin typeface="Arial"/>
+                          <a:latin typeface="Avenir Next"/>
                         </a:rPr>
                         <a:t>Strategy + covered calls</a:t>
                       </a:r>
@@ -27565,7 +27565,7 @@
                           <a:solidFill>
                             <a:srgbClr val="0E1B2A"/>
                           </a:solidFill>
-                          <a:latin typeface="Arial"/>
+                          <a:latin typeface="Avenir Next"/>
                         </a:rPr>
                         <a:t>+19.6%</a:t>
                       </a:r>
@@ -27588,7 +27588,7 @@
                           <a:solidFill>
                             <a:srgbClr val="0E1B2A"/>
                           </a:solidFill>
-                          <a:latin typeface="Arial"/>
+                          <a:latin typeface="Avenir Next"/>
                         </a:rPr>
                         <a:t>15.5%</a:t>
                       </a:r>
@@ -27611,7 +27611,7 @@
                           <a:solidFill>
                             <a:srgbClr val="0E1B2A"/>
                           </a:solidFill>
-                          <a:latin typeface="Arial"/>
+                          <a:latin typeface="Avenir Next"/>
                         </a:rPr>
                         <a:t>1.24</a:t>
                       </a:r>
@@ -27634,7 +27634,7 @@
                           <a:solidFill>
                             <a:srgbClr val="0E1B2A"/>
                           </a:solidFill>
-                          <a:latin typeface="Arial"/>
+                          <a:latin typeface="Avenir Next"/>
                         </a:rPr>
                         <a:t>−16.7%</a:t>
                       </a:r>
@@ -27657,7 +27657,7 @@
                           <a:solidFill>
                             <a:srgbClr val="0E1B2A"/>
                           </a:solidFill>
-                          <a:latin typeface="Arial"/>
+                          <a:latin typeface="Avenir Next"/>
                         </a:rPr>
                         <a:t>~25%</a:t>
                       </a:r>
@@ -27682,7 +27682,7 @@
                           <a:solidFill>
                             <a:srgbClr val="0E1B2A"/>
                           </a:solidFill>
-                          <a:latin typeface="Arial"/>
+                          <a:latin typeface="Avenir Next"/>
                         </a:rPr>
                         <a:t>Strategy + put-wheel (optional)</a:t>
                       </a:r>
@@ -27705,7 +27705,7 @@
                           <a:solidFill>
                             <a:srgbClr val="1F2A37"/>
                           </a:solidFill>
-                          <a:latin typeface="Arial"/>
+                          <a:latin typeface="Avenir Next"/>
                         </a:rPr>
                         <a:t>+18.7%</a:t>
                       </a:r>
@@ -27728,7 +27728,7 @@
                           <a:solidFill>
                             <a:srgbClr val="1F2A37"/>
                           </a:solidFill>
-                          <a:latin typeface="Arial"/>
+                          <a:latin typeface="Avenir Next"/>
                         </a:rPr>
                         <a:t>12.9%</a:t>
                       </a:r>
@@ -27751,7 +27751,7 @@
                           <a:solidFill>
                             <a:srgbClr val="1F2A37"/>
                           </a:solidFill>
-                          <a:latin typeface="Arial"/>
+                          <a:latin typeface="Avenir Next"/>
                         </a:rPr>
                         <a:t>1.40</a:t>
                       </a:r>
@@ -27774,7 +27774,7 @@
                           <a:solidFill>
                             <a:srgbClr val="1F2A37"/>
                           </a:solidFill>
-                          <a:latin typeface="Arial"/>
+                          <a:latin typeface="Avenir Next"/>
                         </a:rPr>
                         <a:t>−12.8%</a:t>
                       </a:r>
@@ -27797,7 +27797,7 @@
                           <a:solidFill>
                             <a:srgbClr val="1F2A37"/>
                           </a:solidFill>
-                          <a:latin typeface="Arial"/>
+                          <a:latin typeface="Avenir Next"/>
                         </a:rPr>
                         <a:t>—</a:t>
                       </a:r>
@@ -27846,7 +27846,7 @@
                 <a:solidFill>
                   <a:srgbClr val="6B7787"/>
                 </a:solidFill>
-                <a:latin typeface="Arial"/>
+                <a:latin typeface="Avenir Next"/>
               </a:rPr>
               <a:t>Benchmarks (S&amp;P 500 and BXMD) computed from total-return index history over Sep 2021 to Jun 2026, monthly. Strategy figures are from the walk-forward backtest on a 1x (unlevered) basis. All results are simulated or paper-traded, not live capital.</a:t>
             </a:r>
@@ -27885,7 +27885,7 @@
                 <a:solidFill>
                   <a:srgbClr val="6B7787"/>
                 </a:solidFill>
-                <a:latin typeface="Arial"/>
+                <a:latin typeface="Avenir Next"/>
               </a:rPr>
               <a:t>Systematic Factor Income Fund    ·    confidential</a:t>
             </a:r>
@@ -27924,7 +27924,7 @@
                 <a:solidFill>
                   <a:srgbClr val="6B7787"/>
                 </a:solidFill>
-                <a:latin typeface="Arial"/>
+                <a:latin typeface="Avenir Next"/>
               </a:rPr>
               <a:t>34</a:t>
             </a:r>
@@ -28069,7 +28069,7 @@
                 <a:solidFill>
                   <a:srgbClr val="0E8C7E"/>
                 </a:solidFill>
-                <a:latin typeface="Arial"/>
+                <a:latin typeface="Avenir Next"/>
               </a:rPr>
               <a:t>APPENDIX · A4</a:t>
             </a:r>
@@ -28108,7 +28108,7 @@
                 <a:solidFill>
                   <a:srgbClr val="0E1B2A"/>
                 </a:solidFill>
-                <a:latin typeface="Arial"/>
+                <a:latin typeface="Avenir Next"/>
               </a:rPr>
               <a:t>The volatility premium, measured</a:t>
             </a:r>
@@ -28147,7 +28147,7 @@
                 <a:solidFill>
                   <a:srgbClr val="6B7787"/>
                 </a:solidFill>
-                <a:latin typeface="Arial"/>
+                <a:latin typeface="Avenir Next"/>
               </a:rPr>
               <a:t>The premium the overlay collects is real and persistent</a:t>
             </a:r>
@@ -28322,7 +28322,7 @@
                 <a:solidFill>
                   <a:srgbClr val="0E1B2A"/>
                 </a:solidFill>
-                <a:latin typeface="Arial"/>
+                <a:latin typeface="Avenir Next"/>
               </a:rPr>
               <a:t>+5.2 pts</a:t>
             </a:r>
@@ -28361,7 +28361,7 @@
                 <a:solidFill>
                   <a:srgbClr val="6B7787"/>
                 </a:solidFill>
-                <a:latin typeface="Arial"/>
+                <a:latin typeface="Avenir Next"/>
               </a:rPr>
               <a:t>Implied volatility sold (38.4%)
 over realized (33.2%)</a:t>
@@ -28493,7 +28493,7 @@
                 <a:solidFill>
                   <a:srgbClr val="0E1B2A"/>
                 </a:solidFill>
-                <a:latin typeface="Arial"/>
+                <a:latin typeface="Avenir Next"/>
               </a:rPr>
               <a:t>78%</a:t>
             </a:r>
@@ -28532,7 +28532,7 @@
                 <a:solidFill>
                   <a:srgbClr val="6B7787"/>
                 </a:solidFill>
-                <a:latin typeface="Arial"/>
+                <a:latin typeface="Avenir Next"/>
               </a:rPr>
               <a:t>of months with implied
 above realized volatility</a:t>
@@ -28664,7 +28664,7 @@
                 <a:solidFill>
                   <a:srgbClr val="0E1B2A"/>
                 </a:solidFill>
-                <a:latin typeface="Arial"/>
+                <a:latin typeface="Avenir Next"/>
               </a:rPr>
               <a:t>1.16x</a:t>
             </a:r>
@@ -28703,7 +28703,7 @@
                 <a:solidFill>
                   <a:srgbClr val="6B7787"/>
                 </a:solidFill>
-                <a:latin typeface="Arial"/>
+                <a:latin typeface="Avenir Next"/>
               </a:rPr>
               <a:t>average implied-to-realized
 volatility ratio</a:t>
@@ -28835,7 +28835,7 @@
                 <a:solidFill>
                   <a:srgbClr val="0E1B2A"/>
                 </a:solidFill>
-                <a:latin typeface="Arial"/>
+                <a:latin typeface="Avenir Next"/>
               </a:rPr>
               <a:t>22%</a:t>
             </a:r>
@@ -28874,7 +28874,7 @@
                 <a:solidFill>
                   <a:srgbClr val="6B7787"/>
                 </a:solidFill>
-                <a:latin typeface="Arial"/>
+                <a:latin typeface="Avenir Next"/>
               </a:rPr>
               <a:t>of holdings called away
 (within the 30% target)</a:t>
@@ -28914,7 +28914,7 @@
                 <a:solidFill>
                   <a:srgbClr val="6B7787"/>
                 </a:solidFill>
-                <a:latin typeface="Arial"/>
+                <a:latin typeface="Avenir Next"/>
               </a:rPr>
               <a:t>Most of the premium compensates the risk of occasional large single-stock moves. The 30-delta strike is chosen to cap exactly that risk, which is why the overlay improves returns even after accounting for it.</a:t>
             </a:r>
@@ -28953,7 +28953,7 @@
                 <a:solidFill>
                   <a:srgbClr val="6B7787"/>
                 </a:solidFill>
-                <a:latin typeface="Arial"/>
+                <a:latin typeface="Avenir Next"/>
               </a:rPr>
               <a:t>Systematic Factor Income Fund    ·    confidential</a:t>
             </a:r>
@@ -28992,7 +28992,7 @@
                 <a:solidFill>
                   <a:srgbClr val="6B7787"/>
                 </a:solidFill>
-                <a:latin typeface="Arial"/>
+                <a:latin typeface="Avenir Next"/>
               </a:rPr>
               <a:t>35</a:t>
             </a:r>
@@ -29137,7 +29137,7 @@
                 <a:solidFill>
                   <a:srgbClr val="0E8C7E"/>
                 </a:solidFill>
-                <a:latin typeface="Arial"/>
+                <a:latin typeface="Avenir Next"/>
               </a:rPr>
               <a:t>APPENDIX · A5</a:t>
             </a:r>
@@ -29176,7 +29176,7 @@
                 <a:solidFill>
                   <a:srgbClr val="0E1B2A"/>
                 </a:solidFill>
-                <a:latin typeface="Arial"/>
+                <a:latin typeface="Avenir Next"/>
               </a:rPr>
               <a:t>Key parameters</a:t>
             </a:r>
@@ -29215,7 +29215,7 @@
                 <a:solidFill>
                   <a:srgbClr val="6B7787"/>
                 </a:solidFill>
-                <a:latin typeface="Arial"/>
+                <a:latin typeface="Avenir Next"/>
               </a:rPr>
               <a:t>Every setting lives in one configuration file, not scattered through the code</a:t>
             </a:r>
@@ -29302,7 +29302,7 @@
                           <a:solidFill>
                             <a:srgbClr val="FFFFFF"/>
                           </a:solidFill>
-                          <a:latin typeface="Arial"/>
+                          <a:latin typeface="Avenir Next"/>
                         </a:rPr>
                         <a:t>Setting</a:t>
                       </a:r>
@@ -29325,7 +29325,7 @@
                           <a:solidFill>
                             <a:srgbClr val="FFFFFF"/>
                           </a:solidFill>
-                          <a:latin typeface="Arial"/>
+                          <a:latin typeface="Avenir Next"/>
                         </a:rPr>
                         <a:t>Value</a:t>
                       </a:r>
@@ -29348,7 +29348,7 @@
                           <a:solidFill>
                             <a:srgbClr val="FFFFFF"/>
                           </a:solidFill>
-                          <a:latin typeface="Arial"/>
+                          <a:latin typeface="Avenir Next"/>
                         </a:rPr>
                         <a:t>Setting</a:t>
                       </a:r>
@@ -29371,7 +29371,7 @@
                           <a:solidFill>
                             <a:srgbClr val="FFFFFF"/>
                           </a:solidFill>
-                          <a:latin typeface="Arial"/>
+                          <a:latin typeface="Avenir Next"/>
                         </a:rPr>
                         <a:t>Value</a:t>
                       </a:r>
@@ -29396,7 +29396,7 @@
                           <a:solidFill>
                             <a:srgbClr val="0E1B2A"/>
                           </a:solidFill>
-                          <a:latin typeface="Arial"/>
+                          <a:latin typeface="Avenir Next"/>
                         </a:rPr>
                         <a:t>Universe</a:t>
                       </a:r>
@@ -29419,7 +29419,7 @@
                           <a:solidFill>
                             <a:srgbClr val="1F2A37"/>
                           </a:solidFill>
-                          <a:latin typeface="Arial"/>
+                          <a:latin typeface="Avenir Next"/>
                         </a:rPr>
                         <a:t>liquid US stocks</a:t>
                       </a:r>
@@ -29442,7 +29442,7 @@
                           <a:solidFill>
                             <a:srgbClr val="1F2A37"/>
                           </a:solidFill>
-                          <a:latin typeface="Arial"/>
+                          <a:latin typeface="Avenir Next"/>
                         </a:rPr>
                         <a:t>Max per stock</a:t>
                       </a:r>
@@ -29465,7 +29465,7 @@
                           <a:solidFill>
                             <a:srgbClr val="1F2A37"/>
                           </a:solidFill>
-                          <a:latin typeface="Arial"/>
+                          <a:latin typeface="Avenir Next"/>
                         </a:rPr>
                         <a:t>5%</a:t>
                       </a:r>
@@ -29490,7 +29490,7 @@
                           <a:solidFill>
                             <a:srgbClr val="0E1B2A"/>
                           </a:solidFill>
-                          <a:latin typeface="Arial"/>
+                          <a:latin typeface="Avenir Next"/>
                         </a:rPr>
                         <a:t>Holdings</a:t>
                       </a:r>
@@ -29513,7 +29513,7 @@
                           <a:solidFill>
                             <a:srgbClr val="1F2A37"/>
                           </a:solidFill>
-                          <a:latin typeface="Arial"/>
+                          <a:latin typeface="Avenir Next"/>
                         </a:rPr>
                         <a:t>about 20</a:t>
                       </a:r>
@@ -29536,7 +29536,7 @@
                           <a:solidFill>
                             <a:srgbClr val="1F2A37"/>
                           </a:solidFill>
-                          <a:latin typeface="Arial"/>
+                          <a:latin typeface="Avenir Next"/>
                         </a:rPr>
                         <a:t>Max per sector</a:t>
                       </a:r>
@@ -29559,7 +29559,7 @@
                           <a:solidFill>
                             <a:srgbClr val="1F2A37"/>
                           </a:solidFill>
-                          <a:latin typeface="Arial"/>
+                          <a:latin typeface="Avenir Next"/>
                         </a:rPr>
                         <a:t>30%</a:t>
                       </a:r>
@@ -29584,7 +29584,7 @@
                           <a:solidFill>
                             <a:srgbClr val="0E1B2A"/>
                           </a:solidFill>
-                          <a:latin typeface="Arial"/>
+                          <a:latin typeface="Avenir Next"/>
                         </a:rPr>
                         <a:t>Factor weights</a:t>
                       </a:r>
@@ -29607,7 +29607,7 @@
                           <a:solidFill>
                             <a:srgbClr val="1F2A37"/>
                           </a:solidFill>
-                          <a:latin typeface="Arial"/>
+                          <a:latin typeface="Avenir Next"/>
                         </a:rPr>
                         <a:t>25% each</a:t>
                       </a:r>
@@ -29630,7 +29630,7 @@
                           <a:solidFill>
                             <a:srgbClr val="1F2A37"/>
                           </a:solidFill>
-                          <a:latin typeface="Arial"/>
+                          <a:latin typeface="Avenir Next"/>
                         </a:rPr>
                         <a:t>Invested / cash</a:t>
                       </a:r>
@@ -29653,7 +29653,7 @@
                           <a:solidFill>
                             <a:srgbClr val="1F2A37"/>
                           </a:solidFill>
-                          <a:latin typeface="Arial"/>
+                          <a:latin typeface="Avenir Next"/>
                         </a:rPr>
                         <a:t>95% / 5%</a:t>
                       </a:r>
@@ -29678,7 +29678,7 @@
                           <a:solidFill>
                             <a:srgbClr val="0E1B2A"/>
                           </a:solidFill>
-                          <a:latin typeface="Arial"/>
+                          <a:latin typeface="Avenir Next"/>
                         </a:rPr>
                         <a:t>Momentum window</a:t>
                       </a:r>
@@ -29701,7 +29701,7 @@
                           <a:solidFill>
                             <a:srgbClr val="1F2A37"/>
                           </a:solidFill>
-                          <a:latin typeface="Arial"/>
+                          <a:latin typeface="Avenir Next"/>
                         </a:rPr>
                         <a:t>12 months less 1</a:t>
                       </a:r>
@@ -29724,7 +29724,7 @@
                           <a:solidFill>
                             <a:srgbClr val="1F2A37"/>
                           </a:solidFill>
-                          <a:latin typeface="Arial"/>
+                          <a:latin typeface="Avenir Next"/>
                         </a:rPr>
                         <a:t>Volatility window</a:t>
                       </a:r>
@@ -29747,7 +29747,7 @@
                           <a:solidFill>
                             <a:srgbClr val="1F2A37"/>
                           </a:solidFill>
-                          <a:latin typeface="Arial"/>
+                          <a:latin typeface="Avenir Next"/>
                         </a:rPr>
                         <a:t>12 months</a:t>
                       </a:r>
@@ -29772,7 +29772,7 @@
                           <a:solidFill>
                             <a:srgbClr val="0E1B2A"/>
                           </a:solidFill>
-                          <a:latin typeface="Arial"/>
+                          <a:latin typeface="Avenir Next"/>
                         </a:rPr>
                         <a:t>Call delta target</a:t>
                       </a:r>
@@ -29795,7 +29795,7 @@
                           <a:solidFill>
                             <a:srgbClr val="1F2A37"/>
                           </a:solidFill>
-                          <a:latin typeface="Arial"/>
+                          <a:latin typeface="Avenir Next"/>
                         </a:rPr>
                         <a:t>0.30</a:t>
                       </a:r>
@@ -29818,7 +29818,7 @@
                           <a:solidFill>
                             <a:srgbClr val="1F2A37"/>
                           </a:solidFill>
-                          <a:latin typeface="Arial"/>
+                          <a:latin typeface="Avenir Next"/>
                         </a:rPr>
                         <a:t>Call expiry</a:t>
                       </a:r>
@@ -29841,7 +29841,7 @@
                           <a:solidFill>
                             <a:srgbClr val="1F2A37"/>
                           </a:solidFill>
-                          <a:latin typeface="Arial"/>
+                          <a:latin typeface="Avenir Next"/>
                         </a:rPr>
                         <a:t>30 to 45 days</a:t>
                       </a:r>
@@ -29866,7 +29866,7 @@
                           <a:solidFill>
                             <a:srgbClr val="0E1B2A"/>
                           </a:solidFill>
-                          <a:latin typeface="Arial"/>
+                          <a:latin typeface="Avenir Next"/>
                         </a:rPr>
                         <a:t>Rebalance</a:t>
                       </a:r>
@@ -29889,7 +29889,7 @@
                           <a:solidFill>
                             <a:srgbClr val="1F2A37"/>
                           </a:solidFill>
-                          <a:latin typeface="Arial"/>
+                          <a:latin typeface="Avenir Next"/>
                         </a:rPr>
                         <a:t>monthly</a:t>
                       </a:r>
@@ -29912,7 +29912,7 @@
                           <a:solidFill>
                             <a:srgbClr val="1F2A37"/>
                           </a:solidFill>
-                          <a:latin typeface="Arial"/>
+                          <a:latin typeface="Avenir Next"/>
                         </a:rPr>
                         <a:t>Benchmarks</a:t>
                       </a:r>
@@ -29935,7 +29935,7 @@
                           <a:solidFill>
                             <a:srgbClr val="1F2A37"/>
                           </a:solidFill>
-                          <a:latin typeface="Arial"/>
+                          <a:latin typeface="Avenir Next"/>
                         </a:rPr>
                         <a:t>S&amp;P 500, BXMD</a:t>
                       </a:r>
@@ -29984,7 +29984,7 @@
                 <a:solidFill>
                   <a:srgbClr val="6B7787"/>
                 </a:solidFill>
-                <a:latin typeface="Arial"/>
+                <a:latin typeface="Avenir Next"/>
               </a:rPr>
               <a:t>Systematic Factor Income Fund    ·    confidential</a:t>
             </a:r>
@@ -30023,7 +30023,7 @@
                 <a:solidFill>
                   <a:srgbClr val="6B7787"/>
                 </a:solidFill>
-                <a:latin typeface="Arial"/>
+                <a:latin typeface="Avenir Next"/>
               </a:rPr>
               <a:t>36</a:t>
             </a:r>
@@ -30168,7 +30168,7 @@
                 <a:solidFill>
                   <a:srgbClr val="0E8C7E"/>
                 </a:solidFill>
-                <a:latin typeface="Arial"/>
+                <a:latin typeface="Avenir Next"/>
               </a:rPr>
               <a:t>APPENDIX · A6</a:t>
             </a:r>
@@ -30207,7 +30207,7 @@
                 <a:solidFill>
                   <a:srgbClr val="0E1B2A"/>
                 </a:solidFill>
-                <a:latin typeface="Arial"/>
+                <a:latin typeface="Avenir Next"/>
               </a:rPr>
               <a:t>Glossary</a:t>
             </a:r>
@@ -30290,7 +30290,7 @@
                 <a:solidFill>
                   <a:srgbClr val="0E1B2A"/>
                 </a:solidFill>
-                <a:latin typeface="Arial"/>
+                <a:latin typeface="Avenir Next"/>
               </a:rPr>
               <a:t>Factor</a:t>
             </a:r>
@@ -30329,7 +30329,7 @@
                 <a:solidFill>
                   <a:srgbClr val="6B7787"/>
                 </a:solidFill>
-                <a:latin typeface="Arial"/>
+                <a:latin typeface="Avenir Next"/>
               </a:rPr>
               <a:t>A company trait linked to higher long-run returns</a:t>
             </a:r>
@@ -30368,7 +30368,7 @@
                 <a:solidFill>
                   <a:srgbClr val="0E1B2A"/>
                 </a:solidFill>
-                <a:latin typeface="Arial"/>
+                <a:latin typeface="Avenir Next"/>
               </a:rPr>
               <a:t>z-score</a:t>
             </a:r>
@@ -30407,7 +30407,7 @@
                 <a:solidFill>
                   <a:srgbClr val="6B7787"/>
                 </a:solidFill>
-                <a:latin typeface="Arial"/>
+                <a:latin typeface="Avenir Next"/>
               </a:rPr>
               <a:t>How far a value sits from the average, in standard deviations</a:t>
             </a:r>
@@ -30446,7 +30446,7 @@
                 <a:solidFill>
                   <a:srgbClr val="0E1B2A"/>
                 </a:solidFill>
-                <a:latin typeface="Arial"/>
+                <a:latin typeface="Avenir Next"/>
               </a:rPr>
               <a:t>P/E, P/B</a:t>
             </a:r>
@@ -30485,7 +30485,7 @@
                 <a:solidFill>
                   <a:srgbClr val="6B7787"/>
                 </a:solidFill>
-                <a:latin typeface="Arial"/>
+                <a:latin typeface="Avenir Next"/>
               </a:rPr>
               <a:t>Price vs. earnings, and price vs. net asset value</a:t>
             </a:r>
@@ -30524,7 +30524,7 @@
                 <a:solidFill>
                   <a:srgbClr val="0E1B2A"/>
                 </a:solidFill>
-                <a:latin typeface="Arial"/>
+                <a:latin typeface="Avenir Next"/>
               </a:rPr>
               <a:t>ROE</a:t>
             </a:r>
@@ -30563,7 +30563,7 @@
                 <a:solidFill>
                   <a:srgbClr val="6B7787"/>
                 </a:solidFill>
-                <a:latin typeface="Arial"/>
+                <a:latin typeface="Avenir Next"/>
               </a:rPr>
               <a:t>Profit as a percentage of shareholders' money</a:t>
             </a:r>
@@ -30602,7 +30602,7 @@
                 <a:solidFill>
                   <a:srgbClr val="0E1B2A"/>
                 </a:solidFill>
-                <a:latin typeface="Arial"/>
+                <a:latin typeface="Avenir Next"/>
               </a:rPr>
               <a:t>Volatility</a:t>
             </a:r>
@@ -30641,7 +30641,7 @@
                 <a:solidFill>
                   <a:srgbClr val="6B7787"/>
                 </a:solidFill>
-                <a:latin typeface="Arial"/>
+                <a:latin typeface="Avenir Next"/>
               </a:rPr>
               <a:t>How much a price moves around, a measure of risk</a:t>
             </a:r>
@@ -30680,7 +30680,7 @@
                 <a:solidFill>
                   <a:srgbClr val="0E1B2A"/>
                 </a:solidFill>
-                <a:latin typeface="Arial"/>
+                <a:latin typeface="Avenir Next"/>
               </a:rPr>
               <a:t>Call option</a:t>
             </a:r>
@@ -30719,7 +30719,7 @@
                 <a:solidFill>
                   <a:srgbClr val="6B7787"/>
                 </a:solidFill>
-                <a:latin typeface="Arial"/>
+                <a:latin typeface="Avenir Next"/>
               </a:rPr>
               <a:t>The right to buy a stock at a set price by a set date</a:t>
             </a:r>
@@ -30758,7 +30758,7 @@
                 <a:solidFill>
                   <a:srgbClr val="0E1B2A"/>
                 </a:solidFill>
-                <a:latin typeface="Arial"/>
+                <a:latin typeface="Avenir Next"/>
               </a:rPr>
               <a:t>Premium</a:t>
             </a:r>
@@ -30797,7 +30797,7 @@
                 <a:solidFill>
                   <a:srgbClr val="6B7787"/>
                 </a:solidFill>
-                <a:latin typeface="Arial"/>
+                <a:latin typeface="Avenir Next"/>
               </a:rPr>
               <a:t>The cash received for selling an option</a:t>
             </a:r>
@@ -30836,7 +30836,7 @@
                 <a:solidFill>
                   <a:srgbClr val="0E1B2A"/>
                 </a:solidFill>
-                <a:latin typeface="Arial"/>
+                <a:latin typeface="Avenir Next"/>
               </a:rPr>
               <a:t>Strike</a:t>
             </a:r>
@@ -30875,7 +30875,7 @@
                 <a:solidFill>
                   <a:srgbClr val="6B7787"/>
                 </a:solidFill>
-                <a:latin typeface="Arial"/>
+                <a:latin typeface="Avenir Next"/>
               </a:rPr>
               <a:t>The fixed price at which an option can be exercised</a:t>
             </a:r>
@@ -30914,7 +30914,7 @@
                 <a:solidFill>
                   <a:srgbClr val="0E1B2A"/>
                 </a:solidFill>
-                <a:latin typeface="Arial"/>
+                <a:latin typeface="Avenir Next"/>
               </a:rPr>
               <a:t>Delta</a:t>
             </a:r>
@@ -30953,7 +30953,7 @@
                 <a:solidFill>
                   <a:srgbClr val="6B7787"/>
                 </a:solidFill>
-                <a:latin typeface="Arial"/>
+                <a:latin typeface="Avenir Next"/>
               </a:rPr>
               <a:t>An option's rough chance of being exercised</a:t>
             </a:r>
@@ -30992,7 +30992,7 @@
                 <a:solidFill>
                   <a:srgbClr val="0E1B2A"/>
                 </a:solidFill>
-                <a:latin typeface="Arial"/>
+                <a:latin typeface="Avenir Next"/>
               </a:rPr>
               <a:t>Implied volatility</a:t>
             </a:r>
@@ -31031,7 +31031,7 @@
                 <a:solidFill>
                   <a:srgbClr val="6B7787"/>
                 </a:solidFill>
-                <a:latin typeface="Arial"/>
+                <a:latin typeface="Avenir Next"/>
               </a:rPr>
               <a:t>The price movement the market expects, priced into options</a:t>
             </a:r>
@@ -31070,7 +31070,7 @@
                 <a:solidFill>
                   <a:srgbClr val="0E1B2A"/>
                 </a:solidFill>
-                <a:latin typeface="Arial"/>
+                <a:latin typeface="Avenir Next"/>
               </a:rPr>
               <a:t>Assignment</a:t>
             </a:r>
@@ -31109,7 +31109,7 @@
                 <a:solidFill>
                   <a:srgbClr val="6B7787"/>
                 </a:solidFill>
-                <a:latin typeface="Arial"/>
+                <a:latin typeface="Avenir Next"/>
               </a:rPr>
               <a:t>Being required to sell the stock when a call is exercised</a:t>
             </a:r>
@@ -31148,7 +31148,7 @@
                 <a:solidFill>
                   <a:srgbClr val="0E1B2A"/>
                 </a:solidFill>
-                <a:latin typeface="Arial"/>
+                <a:latin typeface="Avenir Next"/>
               </a:rPr>
               <a:t>Sharpe ratio</a:t>
             </a:r>
@@ -31187,7 +31187,7 @@
                 <a:solidFill>
                   <a:srgbClr val="6B7787"/>
                 </a:solidFill>
-                <a:latin typeface="Arial"/>
+                <a:latin typeface="Avenir Next"/>
               </a:rPr>
               <a:t>Return earned per unit of risk taken</a:t>
             </a:r>
@@ -31226,7 +31226,7 @@
                 <a:solidFill>
                   <a:srgbClr val="6B7787"/>
                 </a:solidFill>
-                <a:latin typeface="Arial"/>
+                <a:latin typeface="Avenir Next"/>
               </a:rPr>
               <a:t>Systematic Factor Income Fund    ·    confidential</a:t>
             </a:r>
@@ -31265,7 +31265,7 @@
                 <a:solidFill>
                   <a:srgbClr val="6B7787"/>
                 </a:solidFill>
-                <a:latin typeface="Arial"/>
+                <a:latin typeface="Avenir Next"/>
               </a:rPr>
               <a:t>37</a:t>
             </a:r>
@@ -31410,7 +31410,7 @@
                 <a:solidFill>
                   <a:srgbClr val="0E8C7E"/>
                 </a:solidFill>
-                <a:latin typeface="Arial"/>
+                <a:latin typeface="Avenir Next"/>
               </a:rPr>
               <a:t>1 · THE OBJECTIVE</a:t>
             </a:r>
@@ -31449,7 +31449,7 @@
                 <a:solidFill>
                   <a:srgbClr val="0E1B2A"/>
                 </a:solidFill>
-                <a:latin typeface="Arial"/>
+                <a:latin typeface="Avenir Next"/>
               </a:rPr>
               <a:t>What it is, and what it is not</a:t>
             </a:r>
@@ -31488,7 +31488,7 @@
                 <a:solidFill>
                   <a:srgbClr val="6B7787"/>
                 </a:solidFill>
-                <a:latin typeface="Arial"/>
+                <a:latin typeface="Avenir Next"/>
               </a:rPr>
               <a:t>Stating the boundaries up front keeps the strategy disciplined</a:t>
             </a:r>
@@ -31571,7 +31571,7 @@
                 <a:solidFill>
                   <a:srgbClr val="0E8C7E"/>
                 </a:solidFill>
-                <a:latin typeface="Arial"/>
+                <a:latin typeface="Avenir Next"/>
               </a:rPr>
               <a:t>WHAT IT IS</a:t>
             </a:r>
@@ -31702,7 +31702,7 @@
                 <a:solidFill>
                   <a:srgbClr val="0E1B2A"/>
                 </a:solidFill>
-                <a:latin typeface="Arial"/>
+                <a:latin typeface="Avenir Next"/>
               </a:rPr>
               <a:t>A systematic factor portfolio</a:t>
             </a:r>
@@ -31741,7 +31741,7 @@
                 <a:solidFill>
                   <a:srgbClr val="6B7787"/>
                 </a:solidFill>
-                <a:latin typeface="Arial"/>
+                <a:latin typeface="Avenir Next"/>
               </a:rPr>
               <a:t>Rules select stocks on proven traits, rebalanced monthly.</a:t>
             </a:r>
@@ -31872,7 +31872,7 @@
                 <a:solidFill>
                   <a:srgbClr val="0E1B2A"/>
                 </a:solidFill>
-                <a:latin typeface="Arial"/>
+                <a:latin typeface="Avenir Next"/>
               </a:rPr>
               <a:t>An options income layer</a:t>
             </a:r>
@@ -31911,7 +31911,7 @@
                 <a:solidFill>
                   <a:srgbClr val="6B7787"/>
                 </a:solidFill>
-                <a:latin typeface="Arial"/>
+                <a:latin typeface="Avenir Next"/>
               </a:rPr>
               <a:t>Covered calls turn holdings into a recurring income stream.</a:t>
             </a:r>
@@ -32042,7 +32042,7 @@
                 <a:solidFill>
                   <a:srgbClr val="0E1B2A"/>
                 </a:solidFill>
-                <a:latin typeface="Arial"/>
+                <a:latin typeface="Avenir Next"/>
               </a:rPr>
               <a:t>Broadly diversified</a:t>
             </a:r>
@@ -32081,7 +32081,7 @@
                 <a:solidFill>
                   <a:srgbClr val="6B7787"/>
                 </a:solidFill>
-                <a:latin typeface="Arial"/>
+                <a:latin typeface="Avenir Next"/>
               </a:rPr>
               <a:t>About 20 stocks, with firm limits on any one name or sector.</a:t>
             </a:r>
@@ -32120,7 +32120,7 @@
                 <a:solidFill>
                   <a:srgbClr val="6B7787"/>
                 </a:solidFill>
-                <a:latin typeface="Arial"/>
+                <a:latin typeface="Avenir Next"/>
               </a:rPr>
               <a:t>WHAT IT IS NOT</a:t>
             </a:r>
@@ -32251,7 +32251,7 @@
                 <a:solidFill>
                   <a:srgbClr val="0E1B2A"/>
                 </a:solidFill>
-                <a:latin typeface="Arial"/>
+                <a:latin typeface="Avenir Next"/>
               </a:rPr>
               <a:t>Not a forecasting model</a:t>
             </a:r>
@@ -32290,7 +32290,7 @@
                 <a:solidFill>
                   <a:srgbClr val="6B7787"/>
                 </a:solidFill>
-                <a:latin typeface="Arial"/>
+                <a:latin typeface="Avenir Next"/>
               </a:rPr>
               <a:t>No black-box prediction of next month's returns.</a:t>
             </a:r>
@@ -32421,7 +32421,7 @@
                 <a:solidFill>
                   <a:srgbClr val="0E1B2A"/>
                 </a:solidFill>
-                <a:latin typeface="Arial"/>
+                <a:latin typeface="Avenir Next"/>
               </a:rPr>
               <a:t>Not market timing</a:t>
             </a:r>
@@ -32460,7 +32460,7 @@
                 <a:solidFill>
                   <a:srgbClr val="6B7787"/>
                 </a:solidFill>
-                <a:latin typeface="Arial"/>
+                <a:latin typeface="Avenir Next"/>
               </a:rPr>
               <a:t>No attempt to call tops or bottoms. The factors carry the defense.</a:t>
             </a:r>
@@ -32591,7 +32591,7 @@
                 <a:solidFill>
                   <a:srgbClr val="0E1B2A"/>
                 </a:solidFill>
-                <a:latin typeface="Arial"/>
+                <a:latin typeface="Avenir Next"/>
               </a:rPr>
               <a:t>Not concentrated bets</a:t>
             </a:r>
@@ -32630,7 +32630,7 @@
                 <a:solidFill>
                   <a:srgbClr val="6B7787"/>
                 </a:solidFill>
-                <a:latin typeface="Arial"/>
+                <a:latin typeface="Avenir Next"/>
               </a:rPr>
               <a:t>No large single-stock positions or thematic gambles.</a:t>
             </a:r>
@@ -32669,7 +32669,7 @@
                 <a:solidFill>
                   <a:srgbClr val="6B7787"/>
                 </a:solidFill>
-                <a:latin typeface="Arial"/>
+                <a:latin typeface="Avenir Next"/>
               </a:rPr>
               <a:t>Systematic Factor Income Fund    ·    confidential</a:t>
             </a:r>
@@ -32708,7 +32708,7 @@
                 <a:solidFill>
                   <a:srgbClr val="6B7787"/>
                 </a:solidFill>
-                <a:latin typeface="Arial"/>
+                <a:latin typeface="Avenir Next"/>
               </a:rPr>
               <a:t>03</a:t>
             </a:r>
@@ -32853,7 +32853,7 @@
                 <a:solidFill>
                   <a:srgbClr val="0E8C7E"/>
                 </a:solidFill>
-                <a:latin typeface="Arial"/>
+                <a:latin typeface="Avenir Next"/>
               </a:rPr>
               <a:t>1 · THE OBJECTIVE</a:t>
             </a:r>
@@ -32892,7 +32892,7 @@
                 <a:solidFill>
                   <a:srgbClr val="0E1B2A"/>
                 </a:solidFill>
-                <a:latin typeface="Arial"/>
+                <a:latin typeface="Avenir Next"/>
               </a:rPr>
               <a:t>Two engines, one portfolio</a:t>
             </a:r>
@@ -32931,7 +32931,7 @@
                 <a:solidFill>
                   <a:srgbClr val="6B7787"/>
                 </a:solidFill>
-                <a:latin typeface="Arial"/>
+                <a:latin typeface="Avenir Next"/>
               </a:rPr>
               <a:t>A stock portfolio decides what we own. An overlay earns income on it.</a:t>
             </a:r>
@@ -33060,7 +33060,7 @@
                 <a:solidFill>
                   <a:srgbClr val="FFFFFF"/>
                 </a:solidFill>
-                <a:latin typeface="Arial"/>
+                <a:latin typeface="Avenir Next"/>
               </a:rPr>
               <a:t>FACTOR STOCK PORTFOLIO</a:t>
             </a:r>
@@ -33099,7 +33099,7 @@
                 <a:solidFill>
                   <a:srgbClr val="C7D2DD"/>
                 </a:solidFill>
-                <a:latin typeface="Arial"/>
+                <a:latin typeface="Avenir Next"/>
               </a:rPr>
               <a:t>About 20 stocks chosen on four
 proven traits, rebalanced monthly</a:t>
@@ -33185,7 +33185,7 @@
                 <a:solidFill>
                   <a:srgbClr val="FFFFFF"/>
                 </a:solidFill>
-                <a:latin typeface="Arial"/>
+                <a:latin typeface="Avenir Next"/>
               </a:rPr>
               <a:t>COVERED-CALL OVERLAY</a:t>
             </a:r>
@@ -33224,7 +33224,7 @@
                 <a:solidFill>
                   <a:srgbClr val="CCEEE9"/>
                 </a:solidFill>
-                <a:latin typeface="Arial"/>
+                <a:latin typeface="Avenir Next"/>
               </a:rPr>
               <a:t>Sell call options on those holdings
 to collect cash premium</a:t>
@@ -33311,7 +33311,7 @@
                 <a:solidFill>
                   <a:srgbClr val="6B7787"/>
                 </a:solidFill>
-                <a:latin typeface="Arial"/>
+                <a:latin typeface="Avenir Next"/>
               </a:rPr>
               <a:t>earns income on</a:t>
             </a:r>
@@ -33350,7 +33350,7 @@
                 <a:solidFill>
                   <a:srgbClr val="1F2A37"/>
                 </a:solidFill>
-                <a:latin typeface="Arial"/>
+                <a:latin typeface="Avenir Next"/>
               </a:rPr>
               <a:t>Total return comes from two sources: </a:t>
             </a:r>
@@ -33359,7 +33359,7 @@
                 <a:solidFill>
                   <a:srgbClr val="1F2A37"/>
                 </a:solidFill>
-                <a:latin typeface="Arial"/>
+                <a:latin typeface="Avenir Next"/>
               </a:rPr>
               <a:t>the stocks we select, and the premium the overlay collects. The overlay also lowers the portfolio's volatility, in exchange for capping gains on any stock that rises sharply.</a:t>
             </a:r>
@@ -33398,7 +33398,7 @@
                 <a:solidFill>
                   <a:srgbClr val="6B7787"/>
                 </a:solidFill>
-                <a:latin typeface="Arial"/>
+                <a:latin typeface="Avenir Next"/>
               </a:rPr>
               <a:t>Systematic Factor Income Fund    ·    confidential</a:t>
             </a:r>
@@ -33437,7 +33437,7 @@
                 <a:solidFill>
                   <a:srgbClr val="6B7787"/>
                 </a:solidFill>
-                <a:latin typeface="Arial"/>
+                <a:latin typeface="Avenir Next"/>
               </a:rPr>
               <a:t>04</a:t>
             </a:r>
@@ -33538,7 +33538,7 @@
                 <a:solidFill>
                   <a:srgbClr val="2A4760"/>
                 </a:solidFill>
-                <a:latin typeface="Arial"/>
+                <a:latin typeface="Avenir Next"/>
               </a:rPr>
               <a:t>02</a:t>
             </a:r>
@@ -33621,7 +33621,7 @@
                 <a:solidFill>
                   <a:srgbClr val="FFFFFF"/>
                 </a:solidFill>
-                <a:latin typeface="Arial"/>
+                <a:latin typeface="Avenir Next"/>
               </a:rPr>
               <a:t>Why this approach</a:t>
             </a:r>
@@ -33660,7 +33660,7 @@
                 <a:solidFill>
                   <a:srgbClr val="C7D2DD"/>
                 </a:solidFill>
-                <a:latin typeface="Arial"/>
+                <a:latin typeface="Avenir Next"/>
               </a:rPr>
               <a:t>Built on durable, well-documented sources of return</a:t>
             </a:r>
@@ -33805,7 +33805,7 @@
                 <a:solidFill>
                   <a:srgbClr val="0E8C7E"/>
                 </a:solidFill>
-                <a:latin typeface="Arial"/>
+                <a:latin typeface="Avenir Next"/>
               </a:rPr>
               <a:t>2 · WHY THIS APPROACH</a:t>
             </a:r>
@@ -33844,7 +33844,7 @@
                 <a:solidFill>
                   <a:srgbClr val="0E1B2A"/>
                 </a:solidFill>
-                <a:latin typeface="Arial"/>
+                <a:latin typeface="Avenir Next"/>
               </a:rPr>
               <a:t>Why proven factors, not prediction</a:t>
             </a:r>
@@ -33883,7 +33883,7 @@
                 <a:solidFill>
                   <a:srgbClr val="6B7787"/>
                 </a:solidFill>
-                <a:latin typeface="Arial"/>
+                <a:latin typeface="Avenir Next"/>
               </a:rPr>
               <a:t>The strategy relies on effects with a long academic and practical record</a:t>
             </a:r>
@@ -33969,7 +33969,7 @@
                 <a:solidFill>
                   <a:srgbClr val="14B8A6"/>
                 </a:solidFill>
-                <a:latin typeface="Arial"/>
+                <a:latin typeface="Avenir Next"/>
               </a:rPr>
               <a:t>▪  </a:t>
             </a:r>
@@ -33978,7 +33978,7 @@
                 <a:solidFill>
                   <a:srgbClr val="1F2A37"/>
                 </a:solidFill>
-                <a:latin typeface="Arial"/>
+                <a:latin typeface="Avenir Next"/>
               </a:rPr>
               <a:t>Predicting short-term returns is the most crowded game in investing. </a:t>
             </a:r>
@@ -33987,7 +33987,7 @@
                 <a:solidFill>
                   <a:srgbClr val="1F2A37"/>
                 </a:solidFill>
-                <a:latin typeface="Arial"/>
+                <a:latin typeface="Avenir Next"/>
               </a:rPr>
               <a:t>Thousands of funds chase the same price signals, and any edge erodes quickly.</a:t>
             </a:r>
@@ -34006,7 +34006,7 @@
                 <a:solidFill>
                   <a:srgbClr val="14B8A6"/>
                 </a:solidFill>
-                <a:latin typeface="Arial"/>
+                <a:latin typeface="Avenir Next"/>
               </a:rPr>
               <a:t>▪  </a:t>
             </a:r>
@@ -34015,7 +34015,7 @@
                 <a:solidFill>
                   <a:srgbClr val="1F2A37"/>
                 </a:solidFill>
-                <a:latin typeface="Arial"/>
+                <a:latin typeface="Avenir Next"/>
               </a:rPr>
               <a:t>Factors are paid for bearing risk, not for finding mistakes. </a:t>
             </a:r>
@@ -34024,7 +34024,7 @@
                 <a:solidFill>
                   <a:srgbClr val="1F2A37"/>
                 </a:solidFill>
-                <a:latin typeface="Arial"/>
+                <a:latin typeface="Avenir Next"/>
               </a:rPr>
               <a:t>That is why they have persisted across decades and across markets, rather than being arbitraged away.</a:t>
             </a:r>
@@ -34043,7 +34043,7 @@
                 <a:solidFill>
                   <a:srgbClr val="14B8A6"/>
                 </a:solidFill>
-                <a:latin typeface="Arial"/>
+                <a:latin typeface="Avenir Next"/>
               </a:rPr>
               <a:t>▪  </a:t>
             </a:r>
@@ -34052,7 +34052,7 @@
                 <a:solidFill>
                   <a:srgbClr val="1F2A37"/>
                 </a:solidFill>
-                <a:latin typeface="Arial"/>
+                <a:latin typeface="Avenir Next"/>
               </a:rPr>
               <a:t>A rules-based portfolio is defensible. </a:t>
             </a:r>
@@ -34061,7 +34061,7 @@
                 <a:solidFill>
                   <a:srgbClr val="1F2A37"/>
                 </a:solidFill>
-                <a:latin typeface="Arial"/>
+                <a:latin typeface="Avenir Next"/>
               </a:rPr>
               <a:t>It can be explained and audited, and it holds up to scrutiny during a weak stretch. A black-box model cannot.</a:t>
             </a:r>
@@ -34080,7 +34080,7 @@
                 <a:solidFill>
                   <a:srgbClr val="14B8A6"/>
                 </a:solidFill>
-                <a:latin typeface="Arial"/>
+                <a:latin typeface="Avenir Next"/>
               </a:rPr>
               <a:t>▪  </a:t>
             </a:r>
@@ -34089,7 +34089,7 @@
                 <a:solidFill>
                   <a:srgbClr val="1F2A37"/>
                 </a:solidFill>
-                <a:latin typeface="Arial"/>
+                <a:latin typeface="Avenir Next"/>
               </a:rPr>
               <a:t>It fits the mandate. </a:t>
             </a:r>
@@ -34098,7 +34098,7 @@
                 <a:solidFill>
                   <a:srgbClr val="1F2A37"/>
                 </a:solidFill>
-                <a:latin typeface="Arial"/>
+                <a:latin typeface="Avenir Next"/>
               </a:rPr>
               <a:t>The goal is durable, risk-adjusted income, which is exactly what factor premia and an options overlay are designed to provide.</a:t>
             </a:r>
@@ -34137,7 +34137,7 @@
                 <a:solidFill>
                   <a:srgbClr val="6B7787"/>
                 </a:solidFill>
-                <a:latin typeface="Arial"/>
+                <a:latin typeface="Avenir Next"/>
               </a:rPr>
               <a:t>Systematic Factor Income Fund    ·    confidential</a:t>
             </a:r>
@@ -34176,7 +34176,7 @@
                 <a:solidFill>
                   <a:srgbClr val="6B7787"/>
                 </a:solidFill>
-                <a:latin typeface="Arial"/>
+                <a:latin typeface="Avenir Next"/>
               </a:rPr>
               <a:t>05</a:t>
             </a:r>
@@ -34321,7 +34321,7 @@
                 <a:solidFill>
                   <a:srgbClr val="0E8C7E"/>
                 </a:solidFill>
-                <a:latin typeface="Arial"/>
+                <a:latin typeface="Avenir Next"/>
               </a:rPr>
               <a:t>2 · WHY THIS APPROACH</a:t>
             </a:r>
@@ -34360,7 +34360,7 @@
                 <a:solidFill>
                   <a:srgbClr val="0E1B2A"/>
                 </a:solidFill>
-                <a:latin typeface="Arial"/>
+                <a:latin typeface="Avenir Next"/>
               </a:rPr>
               <a:t>Why an options income overlay</a:t>
             </a:r>
@@ -34399,7 +34399,7 @@
                 <a:solidFill>
                   <a:srgbClr val="6B7787"/>
                 </a:solidFill>
-                <a:latin typeface="Arial"/>
+                <a:latin typeface="Avenir Next"/>
               </a:rPr>
               <a:t>Options consistently trade richer than the price moves that follow</a:t>
             </a:r>
@@ -34485,7 +34485,7 @@
                 <a:solidFill>
                   <a:srgbClr val="14B8A6"/>
                 </a:solidFill>
-                <a:latin typeface="Arial"/>
+                <a:latin typeface="Avenir Next"/>
               </a:rPr>
               <a:t>▪  </a:t>
             </a:r>
@@ -34494,7 +34494,7 @@
                 <a:solidFill>
                   <a:srgbClr val="1F2A37"/>
                 </a:solidFill>
-                <a:latin typeface="Arial"/>
+                <a:latin typeface="Avenir Next"/>
               </a:rPr>
               <a:t>Implied volatility is the price movement the market expects, </a:t>
             </a:r>
@@ -34503,7 +34503,7 @@
                 <a:solidFill>
                   <a:srgbClr val="1F2A37"/>
                 </a:solidFill>
-                <a:latin typeface="Arial"/>
+                <a:latin typeface="Avenir Next"/>
               </a:rPr>
               <a:t>and it is built into every option's price.</a:t>
             </a:r>
@@ -34522,7 +34522,7 @@
                 <a:solidFill>
                   <a:srgbClr val="14B8A6"/>
                 </a:solidFill>
-                <a:latin typeface="Arial"/>
+                <a:latin typeface="Avenir Next"/>
               </a:rPr>
               <a:t>▪  </a:t>
             </a:r>
@@ -34531,7 +34531,7 @@
                 <a:solidFill>
                   <a:srgbClr val="1F2A37"/>
                 </a:solidFill>
-                <a:latin typeface="Arial"/>
+                <a:latin typeface="Avenir Next"/>
               </a:rPr>
               <a:t>It usually runs higher than the movement that actually occurs. </a:t>
             </a:r>
@@ -34540,7 +34540,7 @@
                 <a:solidFill>
                   <a:srgbClr val="1F2A37"/>
                 </a:solidFill>
-                <a:latin typeface="Arial"/>
+                <a:latin typeface="Avenir Next"/>
               </a:rPr>
               <a:t>Sellers of options are paid for that gap. It is a persistent, well-studied premium.</a:t>
             </a:r>
@@ -34559,7 +34559,7 @@
                 <a:solidFill>
                   <a:srgbClr val="14B8A6"/>
                 </a:solidFill>
-                <a:latin typeface="Arial"/>
+                <a:latin typeface="Avenir Next"/>
               </a:rPr>
               <a:t>▪  </a:t>
             </a:r>
@@ -34568,7 +34568,7 @@
                 <a:solidFill>
                   <a:srgbClr val="1F2A37"/>
                 </a:solidFill>
-                <a:latin typeface="Arial"/>
+                <a:latin typeface="Avenir Next"/>
               </a:rPr>
               <a:t>We collect it on stock we already own. </a:t>
             </a:r>
@@ -34577,7 +34577,7 @@
                 <a:solidFill>
                   <a:srgbClr val="1F2A37"/>
                 </a:solidFill>
-                <a:latin typeface="Arial"/>
+                <a:latin typeface="Avenir Next"/>
               </a:rPr>
               <a:t>Selling calls on our holdings turns that premium into income, with no extra capital tied up.</a:t>
             </a:r>
@@ -34596,7 +34596,7 @@
                 <a:solidFill>
                   <a:srgbClr val="14B8A6"/>
                 </a:solidFill>
-                <a:latin typeface="Arial"/>
+                <a:latin typeface="Avenir Next"/>
               </a:rPr>
               <a:t>▪  </a:t>
             </a:r>
@@ -34605,7 +34605,7 @@
                 <a:solidFill>
                   <a:srgbClr val="1F2A37"/>
                 </a:solidFill>
-                <a:latin typeface="Arial"/>
+                <a:latin typeface="Avenir Next"/>
               </a:rPr>
               <a:t>It also smooths the ride. </a:t>
             </a:r>
@@ -34614,7 +34614,7 @@
                 <a:solidFill>
                   <a:srgbClr val="1F2A37"/>
                 </a:solidFill>
-                <a:latin typeface="Arial"/>
+                <a:latin typeface="Avenir Next"/>
               </a:rPr>
               <a:t>Premium cushions down months and lowers overall volatility, at the cost of capping the occasional very large gain.</a:t>
             </a:r>
@@ -34677,7 +34677,7 @@
                 <a:solidFill>
                   <a:srgbClr val="6B7787"/>
                 </a:solidFill>
-                <a:latin typeface="Arial"/>
+                <a:latin typeface="Avenir Next"/>
               </a:rPr>
               <a:t>Systematic Factor Income Fund    ·    confidential</a:t>
             </a:r>
@@ -34716,7 +34716,7 @@
                 <a:solidFill>
                   <a:srgbClr val="6B7787"/>
                 </a:solidFill>
-                <a:latin typeface="Arial"/>
+                <a:latin typeface="Avenir Next"/>
               </a:rPr>
               <a:t>06</a:t>
             </a:r>

--- a/presentation/Systematic-Factor-Income-Fund.pptx
+++ b/presentation/Systematic-Factor-Income-Fund.pptx
@@ -53,6 +53,7 @@
     <p:sldId id="301" r:id="rId52"/>
     <p:sldId id="302" r:id="rId53"/>
     <p:sldId id="303" r:id="rId54"/>
+    <p:sldId id="304" r:id="rId55"/>
   </p:sldIdLst>
   <p:sldSz cx="12191695" cy="6858000" type="screen4x3"/>
   <p:notesSz cx="6858000" cy="9144000"/>
@@ -13654,7 +13655,7 @@
                 </a:solidFill>
                 <a:latin typeface="Avenir Next"/>
               </a:rPr>
-              <a:t>A small set of clear, automatic rules govern the whole overlay</a:t>
+              <a:t>One simple monthly cycle, repeated against each new set of holdings</a:t>
             </a:r>
           </a:p>
         </p:txBody>
@@ -13703,16 +13704,40 @@
           </a:p>
         </p:txBody>
       </p:sp>
-      <p:sp>
-        <p:nvSpPr>
-          <p:cNvPr id="8" name="TextBox 7"/>
-          <p:cNvSpPr txBox="1"/>
-          <p:nvPr/>
-        </p:nvSpPr>
-        <p:spPr>
-          <a:xfrm>
-            <a:off x="640080" y="2029968"/>
-            <a:ext cx="10908792" cy="4572000"/>
+      <p:pic>
+        <p:nvPicPr>
+          <p:cNvPr id="8" name="Picture 7" descr="lifecycle.png"/>
+          <p:cNvPicPr>
+            <a:picLocks noChangeAspect="1"/>
+          </p:cNvPicPr>
+          <p:nvPr/>
+        </p:nvPicPr>
+        <p:blipFill>
+          <a:blip r:embed="rId2"/>
+          <a:stretch>
+            <a:fillRect/>
+          </a:stretch>
+        </p:blipFill>
+        <p:spPr>
+          <a:xfrm>
+            <a:off x="640080" y="2258568"/>
+            <a:ext cx="10908792" cy="2837796"/>
+          </a:xfrm>
+          <a:prstGeom prst="rect">
+            <a:avLst/>
+          </a:prstGeom>
+        </p:spPr>
+      </p:pic>
+      <p:sp>
+        <p:nvSpPr>
+          <p:cNvPr id="9" name="TextBox 8"/>
+          <p:cNvSpPr txBox="1"/>
+          <p:nvPr/>
+        </p:nvSpPr>
+        <p:spPr>
+          <a:xfrm>
+            <a:off x="640080" y="5458968"/>
+            <a:ext cx="10908792" cy="1097280"/>
           </a:xfrm>
           <a:prstGeom prst="rect">
             <a:avLst/>
@@ -13730,11 +13755,11 @@
                 <a:spcPct val="112000"/>
               </a:lnSpc>
               <a:spcAft>
-                <a:spcPts val="1100"/>
+                <a:spcPts val="800"/>
               </a:spcAft>
             </a:pPr>
             <a:r>
-              <a:rPr sz="1600" b="1">
+              <a:rPr sz="1350" b="1">
                 <a:solidFill>
                   <a:srgbClr val="14B8A6"/>
                 </a:solidFill>
@@ -13743,22 +13768,22 @@
               <a:t>▪  </a:t>
             </a:r>
             <a:r>
-              <a:rPr sz="1600" b="1">
+              <a:rPr sz="1350" b="1">
                 <a:solidFill>
                   <a:srgbClr val="1F2A37"/>
                 </a:solidFill>
                 <a:latin typeface="Avenir Next"/>
               </a:rPr>
-              <a:t>One monthly cycle. </a:t>
-            </a:r>
-            <a:r>
-              <a:rPr sz="1600" b="0">
+              <a:t>Closed early before earnings, then rewritten afterward, </a:t>
+            </a:r>
+            <a:r>
+              <a:rPr sz="1350" b="0">
                 <a:solidFill>
                   <a:srgbClr val="1F2A37"/>
                 </a:solidFill>
                 <a:latin typeface="Avenir Next"/>
               </a:rPr>
-              <a:t>At each monthly rebalance we close every existing call and write fresh ones against the new holdings. Simple, and always aligned to current positions.</a:t>
+              <a:t>because an earnings announcement can cause a large, unpredictable jump.</a:t>
             </a:r>
           </a:p>
           <a:p>
@@ -13767,11 +13792,11 @@
                 <a:spcPct val="112000"/>
               </a:lnSpc>
               <a:spcAft>
-                <a:spcPts val="1100"/>
+                <a:spcPts val="800"/>
               </a:spcAft>
             </a:pPr>
             <a:r>
-              <a:rPr sz="1600" b="1">
+              <a:rPr sz="1350" b="1">
                 <a:solidFill>
                   <a:srgbClr val="14B8A6"/>
                 </a:solidFill>
@@ -13780,103 +13805,29 @@
               <a:t>▪  </a:t>
             </a:r>
             <a:r>
-              <a:rPr sz="1600" b="1">
+              <a:rPr sz="1350" b="1">
                 <a:solidFill>
                   <a:srgbClr val="1F2A37"/>
                 </a:solidFill>
                 <a:latin typeface="Avenir Next"/>
               </a:rPr>
-              <a:t>Closed before earnings. </a:t>
-            </a:r>
-            <a:r>
-              <a:rPr sz="1600" b="0">
+              <a:t>Re-entered only if still wanted. </a:t>
+            </a:r>
+            <a:r>
+              <a:rPr sz="1350" b="0">
                 <a:solidFill>
                   <a:srgbClr val="1F2A37"/>
                 </a:solidFill>
                 <a:latin typeface="Avenir Next"/>
               </a:rPr>
-              <a:t>A company's earnings announcement can cause a large jump. We close any call facing one beforehand, then rewrite afterward.</a:t>
-            </a:r>
-          </a:p>
-          <a:p>
-            <a:pPr>
-              <a:lnSpc>
-                <a:spcPct val="112000"/>
-              </a:lnSpc>
-              <a:spcAft>
-                <a:spcPts val="1100"/>
-              </a:spcAft>
-            </a:pPr>
-            <a:r>
-              <a:rPr sz="1600" b="1">
-                <a:solidFill>
-                  <a:srgbClr val="14B8A6"/>
-                </a:solidFill>
-                <a:latin typeface="Avenir Next"/>
-              </a:rPr>
-              <a:t>▪  </a:t>
-            </a:r>
-            <a:r>
-              <a:rPr sz="1600" b="1">
-                <a:solidFill>
-                  <a:srgbClr val="1F2A37"/>
-                </a:solidFill>
-                <a:latin typeface="Avenir Next"/>
-              </a:rPr>
-              <a:t>Closed before expiry. </a:t>
-            </a:r>
-            <a:r>
-              <a:rPr sz="1600" b="0">
-                <a:solidFill>
-                  <a:srgbClr val="1F2A37"/>
-                </a:solidFill>
-                <a:latin typeface="Avenir Next"/>
-              </a:rPr>
-              <a:t>No option is ever left to settle on its own.</a:t>
-            </a:r>
-          </a:p>
-          <a:p>
-            <a:pPr>
-              <a:lnSpc>
-                <a:spcPct val="112000"/>
-              </a:lnSpc>
-              <a:spcAft>
-                <a:spcPts val="1100"/>
-              </a:spcAft>
-            </a:pPr>
-            <a:r>
-              <a:rPr sz="1600" b="1">
-                <a:solidFill>
-                  <a:srgbClr val="14B8A6"/>
-                </a:solidFill>
-                <a:latin typeface="Avenir Next"/>
-              </a:rPr>
-              <a:t>▪  </a:t>
-            </a:r>
-            <a:r>
-              <a:rPr sz="1600" b="1">
-                <a:solidFill>
-                  <a:srgbClr val="1F2A37"/>
-                </a:solidFill>
-                <a:latin typeface="Avenir Next"/>
-              </a:rPr>
-              <a:t>Re-entered only if still wanted. </a:t>
-            </a:r>
-            <a:r>
-              <a:rPr sz="1600" b="0">
-                <a:solidFill>
-                  <a:srgbClr val="1F2A37"/>
-                </a:solidFill>
-                <a:latin typeface="Avenir Next"/>
-              </a:rPr>
-              <a:t>If a stock is sold via an option, we buy it back only when it still ranks well. We do not chase a stock that has run past the strike.</a:t>
-            </a:r>
-          </a:p>
-        </p:txBody>
-      </p:sp>
-      <p:sp>
-        <p:nvSpPr>
-          <p:cNvPr id="9" name="TextBox 8"/>
+              <a:t>If a stock is sold through an option, it is bought back only when it still ranks well, never chased above the strike.</a:t>
+            </a:r>
+          </a:p>
+        </p:txBody>
+      </p:sp>
+      <p:sp>
+        <p:nvSpPr>
+          <p:cNvPr id="10" name="TextBox 9"/>
           <p:cNvSpPr txBox="1"/>
           <p:nvPr/>
         </p:nvSpPr>
@@ -13915,7 +13866,7 @@
       </p:sp>
       <p:sp>
         <p:nvSpPr>
-          <p:cNvPr id="10" name="TextBox 9"/>
+          <p:cNvPr id="11" name="TextBox 10"/>
           <p:cNvSpPr txBox="1"/>
           <p:nvPr/>
         </p:nvSpPr>
@@ -16241,7 +16192,7 @@
                 </a:solidFill>
                 <a:latin typeface="Avenir Next"/>
               </a:rPr>
-              <a:t>A small, low-cost, auditable set of sources</a:t>
+              <a:t>A small, low-cost, auditable set of inputs feeding the model</a:t>
             </a:r>
           </a:p>
         </p:txBody>
@@ -16290,177 +16241,30 @@
           </a:p>
         </p:txBody>
       </p:sp>
-      <p:sp>
-        <p:nvSpPr>
-          <p:cNvPr id="8" name="TextBox 7"/>
-          <p:cNvSpPr txBox="1"/>
-          <p:nvPr/>
-        </p:nvSpPr>
-        <p:spPr>
-          <a:xfrm>
-            <a:off x="640080" y="2029968"/>
-            <a:ext cx="10908792" cy="4572000"/>
-          </a:xfrm>
-          <a:prstGeom prst="rect">
-            <a:avLst/>
-          </a:prstGeom>
-          <a:noFill/>
-        </p:spPr>
-        <p:txBody>
-          <a:bodyPr wrap="square" lIns="0" rIns="0" tIns="0" bIns="0">
-            <a:spAutoFit/>
-          </a:bodyPr>
-          <a:lstStyle/>
-          <a:p>
-            <a:pPr>
-              <a:lnSpc>
-                <a:spcPct val="112000"/>
-              </a:lnSpc>
-              <a:spcAft>
-                <a:spcPts val="1100"/>
-              </a:spcAft>
-            </a:pPr>
-            <a:r>
-              <a:rPr sz="1600" b="1">
-                <a:solidFill>
-                  <a:srgbClr val="14B8A6"/>
-                </a:solidFill>
-                <a:latin typeface="Avenir Next"/>
-              </a:rPr>
-              <a:t>▪  </a:t>
-            </a:r>
-            <a:r>
-              <a:rPr sz="1600" b="1">
-                <a:solidFill>
-                  <a:srgbClr val="1F2A37"/>
-                </a:solidFill>
-                <a:latin typeface="Avenir Next"/>
-              </a:rPr>
-              <a:t>Alpaca: market data and trading. </a:t>
-            </a:r>
-            <a:r>
-              <a:rPr sz="1600" b="0">
-                <a:solidFill>
-                  <a:srgbClr val="1F2A37"/>
-                </a:solidFill>
-                <a:latin typeface="Avenir Next"/>
-              </a:rPr>
-              <a:t>Daily stock prices, live option quotes, and the brokerage account where orders are placed. Prices are adjusted for splits and dividends.</a:t>
-            </a:r>
-          </a:p>
-          <a:p>
-            <a:pPr>
-              <a:lnSpc>
-                <a:spcPct val="112000"/>
-              </a:lnSpc>
-              <a:spcAft>
-                <a:spcPts val="1100"/>
-              </a:spcAft>
-            </a:pPr>
-            <a:r>
-              <a:rPr sz="1600" b="1">
-                <a:solidFill>
-                  <a:srgbClr val="14B8A6"/>
-                </a:solidFill>
-                <a:latin typeface="Avenir Next"/>
-              </a:rPr>
-              <a:t>▪  </a:t>
-            </a:r>
-            <a:r>
-              <a:rPr sz="1600" b="1">
-                <a:solidFill>
-                  <a:srgbClr val="1F2A37"/>
-                </a:solidFill>
-                <a:latin typeface="Avenir Next"/>
-              </a:rPr>
-              <a:t>SEC filings (EDGAR): company financials. </a:t>
-            </a:r>
-            <a:r>
-              <a:rPr sz="1600" b="0">
-                <a:solidFill>
-                  <a:srgbClr val="1F2A37"/>
-                </a:solidFill>
-                <a:latin typeface="Avenir Next"/>
-              </a:rPr>
-              <a:t>Official quarterly filings, used for the Value and Quality factors. Free, authoritative, and stamped with the real filing date.</a:t>
-            </a:r>
-          </a:p>
-          <a:p>
-            <a:pPr>
-              <a:lnSpc>
-                <a:spcPct val="112000"/>
-              </a:lnSpc>
-              <a:spcAft>
-                <a:spcPts val="1100"/>
-              </a:spcAft>
-            </a:pPr>
-            <a:r>
-              <a:rPr sz="1600" b="1">
-                <a:solidFill>
-                  <a:srgbClr val="14B8A6"/>
-                </a:solidFill>
-                <a:latin typeface="Avenir Next"/>
-              </a:rPr>
-              <a:t>▪  </a:t>
-            </a:r>
-            <a:r>
-              <a:rPr sz="1600" b="1">
-                <a:solidFill>
-                  <a:srgbClr val="1F2A37"/>
-                </a:solidFill>
-                <a:latin typeface="Avenir Next"/>
-              </a:rPr>
-              <a:t>Public factor data: risk modelling. </a:t>
-            </a:r>
-            <a:r>
-              <a:rPr sz="1600" b="0">
-                <a:solidFill>
-                  <a:srgbClr val="1F2A37"/>
-                </a:solidFill>
-                <a:latin typeface="Avenir Next"/>
-              </a:rPr>
-              <a:t>Standard published factor returns, used to model how the holdings move together.</a:t>
-            </a:r>
-          </a:p>
-          <a:p>
-            <a:pPr>
-              <a:lnSpc>
-                <a:spcPct val="112000"/>
-              </a:lnSpc>
-              <a:spcAft>
-                <a:spcPts val="1100"/>
-              </a:spcAft>
-            </a:pPr>
-            <a:r>
-              <a:rPr sz="1600" b="1">
-                <a:solidFill>
-                  <a:srgbClr val="14B8A6"/>
-                </a:solidFill>
-                <a:latin typeface="Avenir Next"/>
-              </a:rPr>
-              <a:t>▪  </a:t>
-            </a:r>
-            <a:r>
-              <a:rPr sz="1600" b="1">
-                <a:solidFill>
-                  <a:srgbClr val="1F2A37"/>
-                </a:solidFill>
-                <a:latin typeface="Avenir Next"/>
-              </a:rPr>
-              <a:t>Stored in two layers. </a:t>
-            </a:r>
-            <a:r>
-              <a:rPr sz="1600" b="0">
-                <a:solidFill>
-                  <a:srgbClr val="1F2A37"/>
-                </a:solidFill>
-                <a:latin typeface="Avenir Next"/>
-              </a:rPr>
-              <a:t>A historical archive for research, and an operational database for live orders, positions, and an audit trail.</a:t>
-            </a:r>
-          </a:p>
-        </p:txBody>
-      </p:sp>
+      <p:pic>
+        <p:nvPicPr>
+          <p:cNvPr id="8" name="Picture 7" descr="data_sources.png"/>
+          <p:cNvPicPr>
+            <a:picLocks noChangeAspect="1"/>
+          </p:cNvPicPr>
+          <p:nvPr/>
+        </p:nvPicPr>
+        <p:blipFill>
+          <a:blip r:embed="rId2"/>
+          <a:stretch>
+            <a:fillRect/>
+          </a:stretch>
+        </p:blipFill>
+        <p:spPr>
+          <a:xfrm>
+            <a:off x="1220805" y="2075688"/>
+            <a:ext cx="9747341" cy="4343400"/>
+          </a:xfrm>
+          <a:prstGeom prst="rect">
+            <a:avLst/>
+          </a:prstGeom>
+        </p:spPr>
+      </p:pic>
       <p:sp>
         <p:nvSpPr>
           <p:cNvPr id="9" name="TextBox 8"/>
@@ -16806,177 +16610,30 @@
           </a:p>
         </p:txBody>
       </p:sp>
-      <p:sp>
-        <p:nvSpPr>
-          <p:cNvPr id="8" name="TextBox 7"/>
-          <p:cNvSpPr txBox="1"/>
-          <p:nvPr/>
-        </p:nvSpPr>
-        <p:spPr>
-          <a:xfrm>
-            <a:off x="640080" y="2029968"/>
-            <a:ext cx="10908792" cy="4572000"/>
-          </a:xfrm>
-          <a:prstGeom prst="rect">
-            <a:avLst/>
-          </a:prstGeom>
-          <a:noFill/>
-        </p:spPr>
-        <p:txBody>
-          <a:bodyPr wrap="square" lIns="0" rIns="0" tIns="0" bIns="0">
-            <a:spAutoFit/>
-          </a:bodyPr>
-          <a:lstStyle/>
-          <a:p>
-            <a:pPr>
-              <a:lnSpc>
-                <a:spcPct val="112000"/>
-              </a:lnSpc>
-              <a:spcAft>
-                <a:spcPts val="1100"/>
-              </a:spcAft>
-            </a:pPr>
-            <a:r>
-              <a:rPr sz="1600" b="1">
-                <a:solidFill>
-                  <a:srgbClr val="14B8A6"/>
-                </a:solidFill>
-                <a:latin typeface="Avenir Next"/>
-              </a:rPr>
-              <a:t>▪  </a:t>
-            </a:r>
-            <a:r>
-              <a:rPr sz="1600" b="1">
-                <a:solidFill>
-                  <a:srgbClr val="1F2A37"/>
-                </a:solidFill>
-                <a:latin typeface="Avenir Next"/>
-              </a:rPr>
-              <a:t>Adjusted for corporate actions. </a:t>
-            </a:r>
-            <a:r>
-              <a:rPr sz="1600" b="0">
-                <a:solidFill>
-                  <a:srgbClr val="1F2A37"/>
-                </a:solidFill>
-                <a:latin typeface="Avenir Next"/>
-              </a:rPr>
-              <a:t>Stock splits and dividends never masquerade as returns.</a:t>
-            </a:r>
-          </a:p>
-          <a:p>
-            <a:pPr>
-              <a:lnSpc>
-                <a:spcPct val="112000"/>
-              </a:lnSpc>
-              <a:spcAft>
-                <a:spcPts val="1100"/>
-              </a:spcAft>
-            </a:pPr>
-            <a:r>
-              <a:rPr sz="1600" b="1">
-                <a:solidFill>
-                  <a:srgbClr val="14B8A6"/>
-                </a:solidFill>
-                <a:latin typeface="Avenir Next"/>
-              </a:rPr>
-              <a:t>▪  </a:t>
-            </a:r>
-            <a:r>
-              <a:rPr sz="1600" b="1">
-                <a:solidFill>
-                  <a:srgbClr val="1F2A37"/>
-                </a:solidFill>
-                <a:latin typeface="Avenir Next"/>
-              </a:rPr>
-              <a:t>Point-in-time. </a:t>
-            </a:r>
-            <a:r>
-              <a:rPr sz="1600" b="0">
-                <a:solidFill>
-                  <a:srgbClr val="1F2A37"/>
-                </a:solidFill>
-                <a:latin typeface="Avenir Next"/>
-              </a:rPr>
-              <a:t>Historical tests use only what was public on each date, so results are not flattered by hindsight.</a:t>
-            </a:r>
-          </a:p>
-          <a:p>
-            <a:pPr>
-              <a:lnSpc>
-                <a:spcPct val="112000"/>
-              </a:lnSpc>
-              <a:spcAft>
-                <a:spcPts val="1100"/>
-              </a:spcAft>
-            </a:pPr>
-            <a:r>
-              <a:rPr sz="1600" b="1">
-                <a:solidFill>
-                  <a:srgbClr val="14B8A6"/>
-                </a:solidFill>
-                <a:latin typeface="Avenir Next"/>
-              </a:rPr>
-              <a:t>▪  </a:t>
-            </a:r>
-            <a:r>
-              <a:rPr sz="1600" b="1">
-                <a:solidFill>
-                  <a:srgbClr val="1F2A37"/>
-                </a:solidFill>
-                <a:latin typeface="Avenir Next"/>
-              </a:rPr>
-              <a:t>Reconciled with the broker every run. </a:t>
-            </a:r>
-            <a:r>
-              <a:rPr sz="1600" b="0">
-                <a:solidFill>
-                  <a:srgbClr val="1F2A37"/>
-                </a:solidFill>
-                <a:latin typeface="Avenir Next"/>
-              </a:rPr>
-              <a:t>The system squares its own records against the actual account before trading, and stops if the broker cannot be reached.</a:t>
-            </a:r>
-          </a:p>
-          <a:p>
-            <a:pPr>
-              <a:lnSpc>
-                <a:spcPct val="112000"/>
-              </a:lnSpc>
-              <a:spcAft>
-                <a:spcPts val="1100"/>
-              </a:spcAft>
-            </a:pPr>
-            <a:r>
-              <a:rPr sz="1600" b="1">
-                <a:solidFill>
-                  <a:srgbClr val="14B8A6"/>
-                </a:solidFill>
-                <a:latin typeface="Avenir Next"/>
-              </a:rPr>
-              <a:t>▪  </a:t>
-            </a:r>
-            <a:r>
-              <a:rPr sz="1600" b="1">
-                <a:solidFill>
-                  <a:srgbClr val="1F2A37"/>
-                </a:solidFill>
-                <a:latin typeface="Avenir Next"/>
-              </a:rPr>
-              <a:t>A clean, traded universe. </a:t>
-            </a:r>
-            <a:r>
-              <a:rPr sz="1600" b="0">
-                <a:solidFill>
-                  <a:srgbClr val="1F2A37"/>
-                </a:solidFill>
-                <a:latin typeface="Avenir Next"/>
-              </a:rPr>
-              <a:t>Only liquid stocks with reliable filings are eligible, which keeps both the data and the options market dependable.</a:t>
-            </a:r>
-          </a:p>
-        </p:txBody>
-      </p:sp>
+      <p:pic>
+        <p:nvPicPr>
+          <p:cNvPr id="8" name="Picture 7" descr="integrity_cards.png"/>
+          <p:cNvPicPr>
+            <a:picLocks noChangeAspect="1"/>
+          </p:cNvPicPr>
+          <p:nvPr/>
+        </p:nvPicPr>
+        <p:blipFill>
+          <a:blip r:embed="rId2"/>
+          <a:stretch>
+            <a:fillRect/>
+          </a:stretch>
+        </p:blipFill>
+        <p:spPr>
+          <a:xfrm>
+            <a:off x="640080" y="2121408"/>
+            <a:ext cx="10908792" cy="4030102"/>
+          </a:xfrm>
+          <a:prstGeom prst="rect">
+            <a:avLst/>
+          </a:prstGeom>
+        </p:spPr>
+      </p:pic>
       <p:sp>
         <p:nvSpPr>
           <p:cNvPr id="9" name="TextBox 8"/>
@@ -18543,7 +18200,7 @@
                 </a:solidFill>
                 <a:latin typeface="Avenir Next"/>
               </a:rPr>
-              <a:t>For a capital-preservation mandate, this is the most important section</a:t>
+              <a:t>For a capital-preservation mandate, this is the most important part</a:t>
             </a:r>
           </a:p>
         </p:txBody>
@@ -18592,177 +18249,30 @@
           </a:p>
         </p:txBody>
       </p:sp>
-      <p:sp>
-        <p:nvSpPr>
-          <p:cNvPr id="8" name="TextBox 7"/>
-          <p:cNvSpPr txBox="1"/>
-          <p:nvPr/>
-        </p:nvSpPr>
-        <p:spPr>
-          <a:xfrm>
-            <a:off x="640080" y="2029968"/>
-            <a:ext cx="10908792" cy="4572000"/>
-          </a:xfrm>
-          <a:prstGeom prst="rect">
-            <a:avLst/>
-          </a:prstGeom>
-          <a:noFill/>
-        </p:spPr>
-        <p:txBody>
-          <a:bodyPr wrap="square" lIns="0" rIns="0" tIns="0" bIns="0">
-            <a:spAutoFit/>
-          </a:bodyPr>
-          <a:lstStyle/>
-          <a:p>
-            <a:pPr>
-              <a:lnSpc>
-                <a:spcPct val="112000"/>
-              </a:lnSpc>
-              <a:spcAft>
-                <a:spcPts val="1100"/>
-              </a:spcAft>
-            </a:pPr>
-            <a:r>
-              <a:rPr sz="1600" b="1">
-                <a:solidFill>
-                  <a:srgbClr val="14B8A6"/>
-                </a:solidFill>
-                <a:latin typeface="Avenir Next"/>
-              </a:rPr>
-              <a:t>▪  </a:t>
-            </a:r>
-            <a:r>
-              <a:rPr sz="1600" b="1">
-                <a:solidFill>
-                  <a:srgbClr val="1F2A37"/>
-                </a:solidFill>
-                <a:latin typeface="Avenir Next"/>
-              </a:rPr>
-              <a:t>A pre-trade review on every cycle. </a:t>
-            </a:r>
-            <a:r>
-              <a:rPr sz="1600" b="0">
-                <a:solidFill>
-                  <a:srgbClr val="1F2A37"/>
-                </a:solidFill>
-                <a:latin typeface="Avenir Next"/>
-              </a:rPr>
-              <a:t>No order is sent if it would breach a limit, and the overlay can never sell a call the portfolio cannot cover.</a:t>
-            </a:r>
-          </a:p>
-          <a:p>
-            <a:pPr>
-              <a:lnSpc>
-                <a:spcPct val="112000"/>
-              </a:lnSpc>
-              <a:spcAft>
-                <a:spcPts val="1100"/>
-              </a:spcAft>
-            </a:pPr>
-            <a:r>
-              <a:rPr sz="1600" b="1">
-                <a:solidFill>
-                  <a:srgbClr val="14B8A6"/>
-                </a:solidFill>
-                <a:latin typeface="Avenir Next"/>
-              </a:rPr>
-              <a:t>▪  </a:t>
-            </a:r>
-            <a:r>
-              <a:rPr sz="1600" b="1">
-                <a:solidFill>
-                  <a:srgbClr val="1F2A37"/>
-                </a:solidFill>
-                <a:latin typeface="Avenir Next"/>
-              </a:rPr>
-              <a:t>Safe to interrupt and re-run. </a:t>
-            </a:r>
-            <a:r>
-              <a:rPr sz="1600" b="0">
-                <a:solidFill>
-                  <a:srgbClr val="1F2A37"/>
-                </a:solidFill>
-                <a:latin typeface="Avenir Next"/>
-              </a:rPr>
-              <a:t>The system can stop and restart mid-rebalance without double-trading, and finishes an interrupted rebalance on the next run.</a:t>
-            </a:r>
-          </a:p>
-          <a:p>
-            <a:pPr>
-              <a:lnSpc>
-                <a:spcPct val="112000"/>
-              </a:lnSpc>
-              <a:spcAft>
-                <a:spcPts val="1100"/>
-              </a:spcAft>
-            </a:pPr>
-            <a:r>
-              <a:rPr sz="1600" b="1">
-                <a:solidFill>
-                  <a:srgbClr val="14B8A6"/>
-                </a:solidFill>
-                <a:latin typeface="Avenir Next"/>
-              </a:rPr>
-              <a:t>▪  </a:t>
-            </a:r>
-            <a:r>
-              <a:rPr sz="1600" b="1">
-                <a:solidFill>
-                  <a:srgbClr val="1F2A37"/>
-                </a:solidFill>
-                <a:latin typeface="Avenir Next"/>
-              </a:rPr>
-              <a:t>An emergency stop. </a:t>
-            </a:r>
-            <a:r>
-              <a:rPr sz="1600" b="0">
-                <a:solidFill>
-                  <a:srgbClr val="1F2A37"/>
-                </a:solidFill>
-                <a:latin typeface="Avenir Next"/>
-              </a:rPr>
-              <a:t>A single command halts trading and cancels open orders, or sells the entire book to cash.</a:t>
-            </a:r>
-          </a:p>
-          <a:p>
-            <a:pPr>
-              <a:lnSpc>
-                <a:spcPct val="112000"/>
-              </a:lnSpc>
-              <a:spcAft>
-                <a:spcPts val="1100"/>
-              </a:spcAft>
-            </a:pPr>
-            <a:r>
-              <a:rPr sz="1600" b="1">
-                <a:solidFill>
-                  <a:srgbClr val="14B8A6"/>
-                </a:solidFill>
-                <a:latin typeface="Avenir Next"/>
-              </a:rPr>
-              <a:t>▪  </a:t>
-            </a:r>
-            <a:r>
-              <a:rPr sz="1600" b="1">
-                <a:solidFill>
-                  <a:srgbClr val="1F2A37"/>
-                </a:solidFill>
-                <a:latin typeface="Avenir Next"/>
-              </a:rPr>
-              <a:t>Everything is recorded. </a:t>
-            </a:r>
-            <a:r>
-              <a:rPr sz="1600" b="0">
-                <a:solidFill>
-                  <a:srgbClr val="1F2A37"/>
-                </a:solidFill>
-                <a:latin typeface="Avenir Next"/>
-              </a:rPr>
-              <a:t>Every score, order, and fill is logged, giving a complete audit trail.</a:t>
-            </a:r>
-          </a:p>
-        </p:txBody>
-      </p:sp>
+      <p:pic>
+        <p:nvPicPr>
+          <p:cNvPr id="8" name="Picture 7" descr="risk_cards.png"/>
+          <p:cNvPicPr>
+            <a:picLocks noChangeAspect="1"/>
+          </p:cNvPicPr>
+          <p:nvPr/>
+        </p:nvPicPr>
+        <p:blipFill>
+          <a:blip r:embed="rId2"/>
+          <a:stretch>
+            <a:fillRect/>
+          </a:stretch>
+        </p:blipFill>
+        <p:spPr>
+          <a:xfrm>
+            <a:off x="640080" y="2121408"/>
+            <a:ext cx="10908792" cy="4030102"/>
+          </a:xfrm>
+          <a:prstGeom prst="rect">
+            <a:avLst/>
+          </a:prstGeom>
+        </p:spPr>
+      </p:pic>
       <p:sp>
         <p:nvSpPr>
           <p:cNvPr id="9" name="TextBox 8"/>
@@ -19059,7 +18569,7 @@
                 </a:solidFill>
                 <a:latin typeface="Avenir Next"/>
               </a:rPr>
-              <a:t>The test is designed to resist the usual criticism of over-fitting</a:t>
+              <a:t>A walk-forward simulation over 2021 to 2026, designed to resist over-fitting</a:t>
             </a:r>
           </a:p>
         </p:txBody>
@@ -19108,180 +18618,72 @@
           </a:p>
         </p:txBody>
       </p:sp>
-      <p:sp>
-        <p:nvSpPr>
-          <p:cNvPr id="8" name="TextBox 7"/>
-          <p:cNvSpPr txBox="1"/>
-          <p:nvPr/>
-        </p:nvSpPr>
-        <p:spPr>
-          <a:xfrm>
-            <a:off x="640080" y="2029968"/>
-            <a:ext cx="10908792" cy="4572000"/>
-          </a:xfrm>
-          <a:prstGeom prst="rect">
-            <a:avLst/>
-          </a:prstGeom>
-          <a:noFill/>
-        </p:spPr>
-        <p:txBody>
-          <a:bodyPr wrap="square" lIns="0" rIns="0" tIns="0" bIns="0">
-            <a:spAutoFit/>
-          </a:bodyPr>
-          <a:lstStyle/>
-          <a:p>
-            <a:pPr>
-              <a:lnSpc>
-                <a:spcPct val="112000"/>
-              </a:lnSpc>
-              <a:spcAft>
-                <a:spcPts val="1100"/>
-              </a:spcAft>
-            </a:pPr>
-            <a:r>
-              <a:rPr sz="1600" b="1">
-                <a:solidFill>
-                  <a:srgbClr val="14B8A6"/>
-                </a:solidFill>
-                <a:latin typeface="Avenir Next"/>
-              </a:rPr>
-              <a:t>▪  </a:t>
-            </a:r>
-            <a:r>
-              <a:rPr sz="1600" b="1">
+      <p:pic>
+        <p:nvPicPr>
+          <p:cNvPr id="8" name="Picture 7" descr="methodology.png"/>
+          <p:cNvPicPr>
+            <a:picLocks noChangeAspect="1"/>
+          </p:cNvPicPr>
+          <p:nvPr/>
+        </p:nvPicPr>
+        <p:blipFill>
+          <a:blip r:embed="rId2"/>
+          <a:stretch>
+            <a:fillRect/>
+          </a:stretch>
+        </p:blipFill>
+        <p:spPr>
+          <a:xfrm>
+            <a:off x="640080" y="2350008"/>
+            <a:ext cx="10908792" cy="2659759"/>
+          </a:xfrm>
+          <a:prstGeom prst="rect">
+            <a:avLst/>
+          </a:prstGeom>
+        </p:spPr>
+      </p:pic>
+      <p:sp>
+        <p:nvSpPr>
+          <p:cNvPr id="9" name="TextBox 8"/>
+          <p:cNvSpPr txBox="1"/>
+          <p:nvPr/>
+        </p:nvSpPr>
+        <p:spPr>
+          <a:xfrm>
+            <a:off x="640080" y="5458968"/>
+            <a:ext cx="10908792" cy="548640"/>
+          </a:xfrm>
+          <a:prstGeom prst="rect">
+            <a:avLst/>
+          </a:prstGeom>
+          <a:noFill/>
+        </p:spPr>
+        <p:txBody>
+          <a:bodyPr wrap="square" anchor="t" lIns="0" rIns="0" tIns="0" bIns="0">
+            <a:spAutoFit/>
+          </a:bodyPr>
+          <a:lstStyle/>
+          <a:p>
+            <a:pPr algn="l">
+              <a:lnSpc>
+                <a:spcPct val="120000"/>
+              </a:lnSpc>
+            </a:pPr>
+            <a:r>
+              <a:rPr sz="1350" b="0">
                 <a:solidFill>
                   <a:srgbClr val="1F2A37"/>
                 </a:solidFill>
                 <a:latin typeface="Avenir Next"/>
               </a:rPr>
-              <a:t>A walk-forward simulation, 2021 to 2026. </a:t>
-            </a:r>
-            <a:r>
-              <a:rPr sz="1600" b="0">
-                <a:solidFill>
-                  <a:srgbClr val="1F2A37"/>
-                </a:solidFill>
-                <a:latin typeface="Avenir Next"/>
-              </a:rPr>
-              <a:t>Each month, the strategy is run on only the information available at the time, exactly as it would run live.</a:t>
-            </a:r>
-          </a:p>
-          <a:p>
-            <a:pPr>
-              <a:lnSpc>
-                <a:spcPct val="112000"/>
-              </a:lnSpc>
-              <a:spcAft>
-                <a:spcPts val="1100"/>
-              </a:spcAft>
-            </a:pPr>
-            <a:r>
-              <a:rPr sz="1600" b="1">
-                <a:solidFill>
-                  <a:srgbClr val="14B8A6"/>
-                </a:solidFill>
-                <a:latin typeface="Avenir Next"/>
-              </a:rPr>
-              <a:t>▪  </a:t>
-            </a:r>
-            <a:r>
-              <a:rPr sz="1600" b="1">
-                <a:solidFill>
-                  <a:srgbClr val="1F2A37"/>
-                </a:solidFill>
-                <a:latin typeface="Avenir Next"/>
-              </a:rPr>
-              <a:t>Realistic trading costs. </a:t>
-            </a:r>
-            <a:r>
-              <a:rPr sz="1600" b="0">
-                <a:solidFill>
-                  <a:srgbClr val="1F2A37"/>
-                </a:solidFill>
-                <a:latin typeface="Avenir Next"/>
-              </a:rPr>
-              <a:t>Every simulated trade is charged a spread cost scaled to how liquid the stock is.</a:t>
-            </a:r>
-          </a:p>
-          <a:p>
-            <a:pPr>
-              <a:lnSpc>
-                <a:spcPct val="112000"/>
-              </a:lnSpc>
-              <a:spcAft>
-                <a:spcPts val="1100"/>
-              </a:spcAft>
-            </a:pPr>
-            <a:r>
-              <a:rPr sz="1600" b="1">
-                <a:solidFill>
-                  <a:srgbClr val="14B8A6"/>
-                </a:solidFill>
-                <a:latin typeface="Avenir Next"/>
-              </a:rPr>
-              <a:t>▪  </a:t>
-            </a:r>
-            <a:r>
-              <a:rPr sz="1600" b="1">
-                <a:solidFill>
-                  <a:srgbClr val="1F2A37"/>
-                </a:solidFill>
-                <a:latin typeface="Avenir Next"/>
-              </a:rPr>
-              <a:t>Real option prices where available. </a:t>
-            </a:r>
-            <a:r>
-              <a:rPr sz="1600" b="0">
-                <a:solidFill>
-                  <a:srgbClr val="1F2A37"/>
-                </a:solidFill>
-                <a:latin typeface="Avenir Next"/>
-              </a:rPr>
-              <a:t>Covered-call premiums use actual historical option prices, not just a model.</a:t>
-            </a:r>
-          </a:p>
-          <a:p>
-            <a:pPr>
-              <a:lnSpc>
-                <a:spcPct val="112000"/>
-              </a:lnSpc>
-              <a:spcAft>
-                <a:spcPts val="1100"/>
-              </a:spcAft>
-            </a:pPr>
-            <a:r>
-              <a:rPr sz="1600" b="1">
-                <a:solidFill>
-                  <a:srgbClr val="14B8A6"/>
-                </a:solidFill>
-                <a:latin typeface="Avenir Next"/>
-              </a:rPr>
-              <a:t>▪  </a:t>
-            </a:r>
-            <a:r>
-              <a:rPr sz="1600" b="1">
-                <a:solidFill>
-                  <a:srgbClr val="1F2A37"/>
-                </a:solidFill>
-                <a:latin typeface="Avenir Next"/>
-              </a:rPr>
-              <a:t>Checked against a public index. </a:t>
-            </a:r>
-            <a:r>
-              <a:rPr sz="1600" b="0">
-                <a:solidFill>
-                  <a:srgbClr val="1F2A37"/>
-                </a:solidFill>
-                <a:latin typeface="Avenir Next"/>
-              </a:rPr>
-              <a:t>The option model reproduces the published CBOE BuyWrite index closely, which validates the mechanics.</a:t>
-            </a:r>
-          </a:p>
-        </p:txBody>
-      </p:sp>
-      <p:sp>
-        <p:nvSpPr>
-          <p:cNvPr id="9" name="TextBox 8"/>
+              <a:t>Each month, the strategy runs on only the information available at the time, exactly as it would run live. The results, and their limitations, follow.</a:t>
+            </a:r>
+          </a:p>
+        </p:txBody>
+      </p:sp>
+      <p:sp>
+        <p:nvSpPr>
+          <p:cNvPr id="10" name="TextBox 9"/>
           <p:cNvSpPr txBox="1"/>
           <p:nvPr/>
         </p:nvSpPr>
@@ -19320,7 +18722,7 @@
       </p:sp>
       <p:sp>
         <p:nvSpPr>
-          <p:cNvPr id="10" name="TextBox 9"/>
+          <p:cNvPr id="11" name="TextBox 10"/>
           <p:cNvSpPr txBox="1"/>
           <p:nvPr/>
         </p:nvSpPr>
@@ -19575,7 +18977,7 @@
                 </a:solidFill>
                 <a:latin typeface="Avenir Next"/>
               </a:rPr>
-              <a:t>Higher risk-adjusted return than the market, with lower volatility and drawdown</a:t>
+              <a:t>The most dependable result is lower risk: smaller swings and shallower losses than the market</a:t>
             </a:r>
           </a:p>
         </p:txBody>
@@ -19774,7 +19176,7 @@
                 </a:solidFill>
                 <a:latin typeface="Avenir Next"/>
               </a:rPr>
-              <a:t>1.24</a:t>
+              <a:t>−16.7%</a:t>
             </a:r>
           </a:p>
         </p:txBody>
@@ -19813,8 +19215,8 @@
                 </a:solidFill>
                 <a:latin typeface="Avenir Next"/>
               </a:rPr>
-              <a:t>Risk-adjusted return (Sharpe),
-vs. 0.87 for the S&amp;P 500</a:t>
+              <a:t>Worst loss (drawdown) in the test,
+vs. −24% for the S&amp;P 500</a:t>
             </a:r>
           </a:p>
         </p:txBody>
@@ -19945,7 +19347,7 @@
                 </a:solidFill>
                 <a:latin typeface="Avenir Next"/>
               </a:rPr>
-              <a:t>−16.7%</a:t>
+              <a:t>15.5%</a:t>
             </a:r>
           </a:p>
         </p:txBody>
@@ -19984,8 +19386,8 @@
                 </a:solidFill>
                 <a:latin typeface="Avenir Next"/>
               </a:rPr>
-              <a:t>Worst peak-to-trough fall,
-vs. −24% for the S&amp;P 500</a:t>
+              <a:t>Volatility, the size of the swings,
+vs. 16% for the S&amp;P 500</a:t>
             </a:r>
           </a:p>
         </p:txBody>
@@ -20116,7 +19518,7 @@
                 </a:solidFill>
                 <a:latin typeface="Avenir Next"/>
               </a:rPr>
-              <a:t>~25% / yr</a:t>
+              <a:t>1.24</a:t>
             </a:r>
           </a:p>
         </p:txBody>
@@ -20155,8 +19557,8 @@
                 </a:solidFill>
                 <a:latin typeface="Avenir Next"/>
               </a:rPr>
-              <a:t>Option premium collected
-as income</a:t>
+              <a:t>Risk-adjusted return in the test,
+vs. 0.87 for the S&amp;P 500</a:t>
             </a:r>
           </a:p>
         </p:txBody>
@@ -20222,7 +19624,7 @@
                 </a:solidFill>
                 <a:latin typeface="Avenir Next"/>
               </a:rPr>
-              <a:t> is the largest peak-to-trough loss. Strategy figures are from the simulation; benchmarks from index history over the same period. Results are simulated and from paper trading, not live capital.</a:t>
+              <a:t> is the largest peak-to-trough loss. Benchmarks are from index history; strategy figures from the simulation. Simulated and paper-traded, not live capital. Limitations on the next slide.</a:t>
             </a:r>
           </a:p>
         </p:txBody>
@@ -20338,7 +19740,7 @@
             <a:avLst/>
           </a:prstGeom>
           <a:solidFill>
-            <a:srgbClr val="0E1B2A"/>
+            <a:srgbClr val="FFFFFF"/>
           </a:solidFill>
           <a:ln>
             <a:noFill/>
@@ -20369,53 +19771,14 @@
       </p:sp>
       <p:sp>
         <p:nvSpPr>
-          <p:cNvPr id="3" name="TextBox 2"/>
-          <p:cNvSpPr txBox="1"/>
-          <p:nvPr/>
-        </p:nvSpPr>
-        <p:spPr>
-          <a:xfrm>
-            <a:off x="548640" y="914400"/>
-            <a:ext cx="6400800" cy="2926080"/>
-          </a:xfrm>
-          <a:prstGeom prst="rect">
-            <a:avLst/>
-          </a:prstGeom>
-          <a:noFill/>
-        </p:spPr>
-        <p:txBody>
-          <a:bodyPr wrap="square" anchor="t" lIns="0" rIns="0" tIns="0" bIns="0">
-            <a:spAutoFit/>
-          </a:bodyPr>
-          <a:lstStyle/>
-          <a:p>
-            <a:pPr algn="l">
-              <a:lnSpc>
-                <a:spcPct val="110000"/>
-              </a:lnSpc>
-            </a:pPr>
-            <a:r>
-              <a:rPr sz="20000" b="1">
-                <a:solidFill>
-                  <a:srgbClr val="2A4760"/>
-                </a:solidFill>
-                <a:latin typeface="Avenir Next"/>
-              </a:rPr>
-              <a:t>08</a:t>
-            </a:r>
-          </a:p>
-        </p:txBody>
-      </p:sp>
-      <p:sp>
-        <p:nvSpPr>
-          <p:cNvPr id="4" name="Rectangle 3"/>
+          <p:cNvPr id="3" name="Rectangle 2"/>
           <p:cNvSpPr/>
           <p:nvPr/>
         </p:nvSpPr>
         <p:spPr>
           <a:xfrm>
-            <a:off x="868680" y="3977639"/>
-            <a:ext cx="2194560" cy="38100"/>
+            <a:off x="640080" y="566928"/>
+            <a:ext cx="310896" cy="100584"/>
           </a:xfrm>
           <a:prstGeom prst="rect">
             <a:avLst/>
@@ -20452,14 +19815,53 @@
       </p:sp>
       <p:sp>
         <p:nvSpPr>
+          <p:cNvPr id="4" name="TextBox 3"/>
+          <p:cNvSpPr txBox="1"/>
+          <p:nvPr/>
+        </p:nvSpPr>
+        <p:spPr>
+          <a:xfrm>
+            <a:off x="1024128" y="502920"/>
+            <a:ext cx="10058400" cy="274320"/>
+          </a:xfrm>
+          <a:prstGeom prst="rect">
+            <a:avLst/>
+          </a:prstGeom>
+          <a:noFill/>
+        </p:spPr>
+        <p:txBody>
+          <a:bodyPr wrap="square" anchor="t" lIns="0" rIns="0" tIns="0" bIns="0">
+            <a:spAutoFit/>
+          </a:bodyPr>
+          <a:lstStyle/>
+          <a:p>
+            <a:pPr algn="l">
+              <a:lnSpc>
+                <a:spcPct val="110000"/>
+              </a:lnSpc>
+            </a:pPr>
+            <a:r>
+              <a:rPr sz="1200" b="1">
+                <a:solidFill>
+                  <a:srgbClr val="0E8C7E"/>
+                </a:solidFill>
+                <a:latin typeface="Avenir Next"/>
+              </a:rPr>
+              <a:t>7 · RESULTS</a:t>
+            </a:r>
+          </a:p>
+        </p:txBody>
+      </p:sp>
+      <p:sp>
+        <p:nvSpPr>
           <p:cNvPr id="5" name="TextBox 4"/>
           <p:cNvSpPr txBox="1"/>
           <p:nvPr/>
         </p:nvSpPr>
         <p:spPr>
           <a:xfrm>
-            <a:off x="822960" y="4206240"/>
-            <a:ext cx="10515600" cy="914400"/>
+            <a:off x="640080" y="841248"/>
+            <a:ext cx="10972800" cy="640080"/>
           </a:xfrm>
           <a:prstGeom prst="rect">
             <a:avLst/>
@@ -20478,13 +19880,13 @@
               </a:lnSpc>
             </a:pPr>
             <a:r>
-              <a:rPr sz="4000" b="1">
-                <a:solidFill>
-                  <a:srgbClr val="FFFFFF"/>
-                </a:solidFill>
-                <a:latin typeface="Avenir Next"/>
-              </a:rPr>
-              <a:t>Operations</a:t>
+              <a:rPr sz="2600" b="1">
+                <a:solidFill>
+                  <a:srgbClr val="0E1B2A"/>
+                </a:solidFill>
+                <a:latin typeface="Avenir Next"/>
+              </a:rPr>
+              <a:t>How to read these results</a:t>
             </a:r>
           </a:p>
         </p:txBody>
@@ -20497,8 +19899,8 @@
         </p:nvSpPr>
         <p:spPr>
           <a:xfrm>
-            <a:off x="868680" y="5212080"/>
-            <a:ext cx="10058400" cy="914400"/>
+            <a:off x="640080" y="1389888"/>
+            <a:ext cx="11247120" cy="457200"/>
           </a:xfrm>
           <a:prstGeom prst="rect">
             <a:avLst/>
@@ -20517,13 +19919,486 @@
               </a:lnSpc>
             </a:pPr>
             <a:r>
-              <a:rPr sz="1600" b="0">
-                <a:solidFill>
-                  <a:srgbClr val="C7D2DD"/>
-                </a:solidFill>
-                <a:latin typeface="Avenir Next"/>
-              </a:rPr>
-              <a:t>A live, monitored system, running on its own</a:t>
+              <a:rPr sz="1500" b="0">
+                <a:solidFill>
+                  <a:srgbClr val="6B7787"/>
+                </a:solidFill>
+                <a:latin typeface="Avenir Next"/>
+              </a:rPr>
+              <a:t>The results are encouraging, but they carry real limitations</a:t>
+            </a:r>
+          </a:p>
+        </p:txBody>
+      </p:sp>
+      <p:sp>
+        <p:nvSpPr>
+          <p:cNvPr id="7" name="Rectangle 6"/>
+          <p:cNvSpPr/>
+          <p:nvPr/>
+        </p:nvSpPr>
+        <p:spPr>
+          <a:xfrm>
+            <a:off x="640080" y="1847088"/>
+            <a:ext cx="10908792" cy="15240"/>
+          </a:xfrm>
+          <a:prstGeom prst="rect">
+            <a:avLst/>
+          </a:prstGeom>
+          <a:solidFill>
+            <a:srgbClr val="E3E8EE"/>
+          </a:solidFill>
+          <a:ln>
+            <a:noFill/>
+          </a:ln>
+          <a:effectLst/>
+        </p:spPr>
+        <p:style>
+          <a:lnRef idx="1">
+            <a:schemeClr val="accent1"/>
+          </a:lnRef>
+          <a:fillRef idx="3">
+            <a:schemeClr val="accent1"/>
+          </a:fillRef>
+          <a:effectRef idx="2">
+            <a:schemeClr val="accent1"/>
+          </a:effectRef>
+          <a:fontRef idx="minor">
+            <a:schemeClr val="lt1"/>
+          </a:fontRef>
+        </p:style>
+        <p:txBody>
+          <a:bodyPr rtlCol="0" anchor="ctr"/>
+          <a:lstStyle/>
+          <a:p>
+            <a:pPr algn="ctr"/>
+          </a:p>
+        </p:txBody>
+      </p:sp>
+      <p:sp>
+        <p:nvSpPr>
+          <p:cNvPr id="8" name="TextBox 7"/>
+          <p:cNvSpPr txBox="1"/>
+          <p:nvPr/>
+        </p:nvSpPr>
+        <p:spPr>
+          <a:xfrm>
+            <a:off x="640080" y="2212848"/>
+            <a:ext cx="5212080" cy="3931920"/>
+          </a:xfrm>
+          <a:prstGeom prst="rect">
+            <a:avLst/>
+          </a:prstGeom>
+          <a:noFill/>
+        </p:spPr>
+        <p:txBody>
+          <a:bodyPr wrap="square" lIns="0" rIns="0" tIns="0" bIns="0">
+            <a:spAutoFit/>
+          </a:bodyPr>
+          <a:lstStyle/>
+          <a:p>
+            <a:pPr>
+              <a:lnSpc>
+                <a:spcPct val="112000"/>
+              </a:lnSpc>
+              <a:spcAft>
+                <a:spcPts val="1800"/>
+              </a:spcAft>
+            </a:pPr>
+            <a:r>
+              <a:rPr sz="1400" b="1">
+                <a:solidFill>
+                  <a:srgbClr val="14B8A6"/>
+                </a:solidFill>
+                <a:latin typeface="Avenir Next"/>
+              </a:rPr>
+              <a:t>▪  </a:t>
+            </a:r>
+            <a:r>
+              <a:rPr sz="1400" b="1">
+                <a:solidFill>
+                  <a:srgbClr val="1F2A37"/>
+                </a:solidFill>
+                <a:latin typeface="Avenir Next"/>
+              </a:rPr>
+              <a:t>Simulated, not live. </a:t>
+            </a:r>
+            <a:r>
+              <a:rPr sz="1400" b="0">
+                <a:solidFill>
+                  <a:srgbClr val="1F2A37"/>
+                </a:solidFill>
+                <a:latin typeface="Avenir Next"/>
+              </a:rPr>
+              <a:t>A historical simulation and paper trading, not a track record, and not a prediction of future returns.</a:t>
+            </a:r>
+          </a:p>
+          <a:p>
+            <a:pPr>
+              <a:lnSpc>
+                <a:spcPct val="112000"/>
+              </a:lnSpc>
+              <a:spcAft>
+                <a:spcPts val="1800"/>
+              </a:spcAft>
+            </a:pPr>
+            <a:r>
+              <a:rPr sz="1400" b="1">
+                <a:solidFill>
+                  <a:srgbClr val="14B8A6"/>
+                </a:solidFill>
+                <a:latin typeface="Avenir Next"/>
+              </a:rPr>
+              <a:t>▪  </a:t>
+            </a:r>
+            <a:r>
+              <a:rPr sz="1400" b="1">
+                <a:solidFill>
+                  <a:srgbClr val="1F2A37"/>
+                </a:solidFill>
+                <a:latin typeface="Avenir Next"/>
+              </a:rPr>
+              <a:t>One favourable period. </a:t>
+            </a:r>
+            <a:r>
+              <a:rPr sz="1400" b="0">
+                <a:solidFill>
+                  <a:srgbClr val="1F2A37"/>
+                </a:solidFill>
+                <a:latin typeface="Avenir Next"/>
+              </a:rPr>
+              <a:t>The 2021 to 2026 window had specific conditions. A sustained bull market would likely show lower relative returns.</a:t>
+            </a:r>
+          </a:p>
+          <a:p>
+            <a:pPr>
+              <a:lnSpc>
+                <a:spcPct val="112000"/>
+              </a:lnSpc>
+              <a:spcAft>
+                <a:spcPts val="1800"/>
+              </a:spcAft>
+            </a:pPr>
+            <a:r>
+              <a:rPr sz="1400" b="1">
+                <a:solidFill>
+                  <a:srgbClr val="14B8A6"/>
+                </a:solidFill>
+                <a:latin typeface="Avenir Next"/>
+              </a:rPr>
+              <a:t>▪  </a:t>
+            </a:r>
+            <a:r>
+              <a:rPr sz="1400" b="1">
+                <a:solidFill>
+                  <a:srgbClr val="1F2A37"/>
+                </a:solidFill>
+                <a:latin typeface="Avenir Next"/>
+              </a:rPr>
+              <a:t>Premium is partly modeled. </a:t>
+            </a:r>
+            <a:r>
+              <a:rPr sz="1400" b="0">
+                <a:solidFill>
+                  <a:srgbClr val="1F2A37"/>
+                </a:solidFill>
+                <a:latin typeface="Avenir Next"/>
+              </a:rPr>
+              <a:t>Where real option prices are unavailable, the premium is estimated, so the overlay's contribution is uncertain.</a:t>
+            </a:r>
+          </a:p>
+        </p:txBody>
+      </p:sp>
+      <p:sp>
+        <p:nvSpPr>
+          <p:cNvPr id="9" name="Rectangle 8"/>
+          <p:cNvSpPr/>
+          <p:nvPr/>
+        </p:nvSpPr>
+        <p:spPr>
+          <a:xfrm>
+            <a:off x="6089904" y="2121408"/>
+            <a:ext cx="15240" cy="3931920"/>
+          </a:xfrm>
+          <a:prstGeom prst="rect">
+            <a:avLst/>
+          </a:prstGeom>
+          <a:solidFill>
+            <a:srgbClr val="E3E8EE"/>
+          </a:solidFill>
+          <a:ln>
+            <a:noFill/>
+          </a:ln>
+          <a:effectLst/>
+        </p:spPr>
+        <p:style>
+          <a:lnRef idx="1">
+            <a:schemeClr val="accent1"/>
+          </a:lnRef>
+          <a:fillRef idx="3">
+            <a:schemeClr val="accent1"/>
+          </a:fillRef>
+          <a:effectRef idx="2">
+            <a:schemeClr val="accent1"/>
+          </a:effectRef>
+          <a:fontRef idx="minor">
+            <a:schemeClr val="lt1"/>
+          </a:fontRef>
+        </p:style>
+        <p:txBody>
+          <a:bodyPr rtlCol="0" anchor="ctr"/>
+          <a:lstStyle/>
+          <a:p>
+            <a:pPr algn="ctr"/>
+          </a:p>
+        </p:txBody>
+      </p:sp>
+      <p:sp>
+        <p:nvSpPr>
+          <p:cNvPr id="10" name="TextBox 9"/>
+          <p:cNvSpPr txBox="1"/>
+          <p:nvPr/>
+        </p:nvSpPr>
+        <p:spPr>
+          <a:xfrm>
+            <a:off x="6355080" y="2212848"/>
+            <a:ext cx="5212080" cy="3931920"/>
+          </a:xfrm>
+          <a:prstGeom prst="rect">
+            <a:avLst/>
+          </a:prstGeom>
+          <a:noFill/>
+        </p:spPr>
+        <p:txBody>
+          <a:bodyPr wrap="square" lIns="0" rIns="0" tIns="0" bIns="0">
+            <a:spAutoFit/>
+          </a:bodyPr>
+          <a:lstStyle/>
+          <a:p>
+            <a:pPr>
+              <a:lnSpc>
+                <a:spcPct val="112000"/>
+              </a:lnSpc>
+              <a:spcAft>
+                <a:spcPts val="1800"/>
+              </a:spcAft>
+            </a:pPr>
+            <a:r>
+              <a:rPr sz="1400" b="1">
+                <a:solidFill>
+                  <a:srgbClr val="14B8A6"/>
+                </a:solidFill>
+                <a:latin typeface="Avenir Next"/>
+              </a:rPr>
+              <a:t>▪  </a:t>
+            </a:r>
+            <a:r>
+              <a:rPr sz="1400" b="1">
+                <a:solidFill>
+                  <a:srgbClr val="1F2A37"/>
+                </a:solidFill>
+                <a:latin typeface="Avenir Next"/>
+              </a:rPr>
+              <a:t>Costs are estimates. </a:t>
+            </a:r>
+            <a:r>
+              <a:rPr sz="1400" b="0">
+                <a:solidFill>
+                  <a:srgbClr val="1F2A37"/>
+                </a:solidFill>
+                <a:latin typeface="Avenir Next"/>
+              </a:rPr>
+              <a:t>Real trading costs, taxes, and slippage may run higher than modeled.</a:t>
+            </a:r>
+          </a:p>
+          <a:p>
+            <a:pPr>
+              <a:lnSpc>
+                <a:spcPct val="112000"/>
+              </a:lnSpc>
+              <a:spcAft>
+                <a:spcPts val="1800"/>
+              </a:spcAft>
+            </a:pPr>
+            <a:r>
+              <a:rPr sz="1400" b="1">
+                <a:solidFill>
+                  <a:srgbClr val="14B8A6"/>
+                </a:solidFill>
+                <a:latin typeface="Avenir Next"/>
+              </a:rPr>
+              <a:t>▪  </a:t>
+            </a:r>
+            <a:r>
+              <a:rPr sz="1400" b="1">
+                <a:solidFill>
+                  <a:srgbClr val="1F2A37"/>
+                </a:solidFill>
+                <a:latin typeface="Avenir Next"/>
+              </a:rPr>
+              <a:t>Mild hindsight in the data. </a:t>
+            </a:r>
+            <a:r>
+              <a:rPr sz="1400" b="0">
+                <a:solidFill>
+                  <a:srgbClr val="1F2A37"/>
+                </a:solidFill>
+                <a:latin typeface="Avenir Next"/>
+              </a:rPr>
+              <a:t>Some company financials are restated over time, making the factor results modestly optimistic.</a:t>
+            </a:r>
+          </a:p>
+          <a:p>
+            <a:pPr>
+              <a:lnSpc>
+                <a:spcPct val="112000"/>
+              </a:lnSpc>
+              <a:spcAft>
+                <a:spcPts val="1800"/>
+              </a:spcAft>
+            </a:pPr>
+            <a:r>
+              <a:rPr sz="1400" b="1">
+                <a:solidFill>
+                  <a:srgbClr val="14B8A6"/>
+                </a:solidFill>
+                <a:latin typeface="Avenir Next"/>
+              </a:rPr>
+              <a:t>▪  </a:t>
+            </a:r>
+            <a:r>
+              <a:rPr sz="1400" b="1">
+                <a:solidFill>
+                  <a:srgbClr val="1F2A37"/>
+                </a:solidFill>
+                <a:latin typeface="Avenir Next"/>
+              </a:rPr>
+              <a:t>Figures are unlevered. </a:t>
+            </a:r>
+            <a:r>
+              <a:rPr sz="1400" b="0">
+                <a:solidFill>
+                  <a:srgbClr val="1F2A37"/>
+                </a:solidFill>
+                <a:latin typeface="Avenir Next"/>
+              </a:rPr>
+              <a:t>Leverage would scale both returns and losses: larger gains, but larger drawdowns.</a:t>
+            </a:r>
+          </a:p>
+        </p:txBody>
+      </p:sp>
+      <p:sp>
+        <p:nvSpPr>
+          <p:cNvPr id="11" name="TextBox 10"/>
+          <p:cNvSpPr txBox="1"/>
+          <p:nvPr/>
+        </p:nvSpPr>
+        <p:spPr>
+          <a:xfrm>
+            <a:off x="640080" y="5943600"/>
+            <a:ext cx="10908792" cy="457200"/>
+          </a:xfrm>
+          <a:prstGeom prst="rect">
+            <a:avLst/>
+          </a:prstGeom>
+          <a:noFill/>
+        </p:spPr>
+        <p:txBody>
+          <a:bodyPr wrap="square" anchor="t" lIns="0" rIns="0" tIns="0" bIns="0">
+            <a:spAutoFit/>
+          </a:bodyPr>
+          <a:lstStyle/>
+          <a:p>
+            <a:pPr algn="l">
+              <a:lnSpc>
+                <a:spcPct val="110000"/>
+              </a:lnSpc>
+            </a:pPr>
+            <a:r>
+              <a:rPr sz="1300" b="1">
+                <a:solidFill>
+                  <a:srgbClr val="0E1B2A"/>
+                </a:solidFill>
+                <a:latin typeface="Avenir Next"/>
+              </a:rPr>
+              <a:t>The real verdict comes from live paper trading on real prices, not from more simulation.</a:t>
+            </a:r>
+          </a:p>
+        </p:txBody>
+      </p:sp>
+      <p:sp>
+        <p:nvSpPr>
+          <p:cNvPr id="12" name="TextBox 11"/>
+          <p:cNvSpPr txBox="1"/>
+          <p:nvPr/>
+        </p:nvSpPr>
+        <p:spPr>
+          <a:xfrm>
+            <a:off x="640080" y="6437376"/>
+            <a:ext cx="7315200" cy="274320"/>
+          </a:xfrm>
+          <a:prstGeom prst="rect">
+            <a:avLst/>
+          </a:prstGeom>
+          <a:noFill/>
+        </p:spPr>
+        <p:txBody>
+          <a:bodyPr wrap="square" anchor="t" lIns="0" rIns="0" tIns="0" bIns="0">
+            <a:spAutoFit/>
+          </a:bodyPr>
+          <a:lstStyle/>
+          <a:p>
+            <a:pPr algn="l">
+              <a:lnSpc>
+                <a:spcPct val="110000"/>
+              </a:lnSpc>
+            </a:pPr>
+            <a:r>
+              <a:rPr sz="900" b="0">
+                <a:solidFill>
+                  <a:srgbClr val="6B7787"/>
+                </a:solidFill>
+                <a:latin typeface="Avenir Next"/>
+              </a:rPr>
+              <a:t>Systematic Factor Income Fund    ·    confidential</a:t>
+            </a:r>
+          </a:p>
+        </p:txBody>
+      </p:sp>
+      <p:sp>
+        <p:nvSpPr>
+          <p:cNvPr id="13" name="TextBox 12"/>
+          <p:cNvSpPr txBox="1"/>
+          <p:nvPr/>
+        </p:nvSpPr>
+        <p:spPr>
+          <a:xfrm>
+            <a:off x="10058400" y="6437376"/>
+            <a:ext cx="1490472" cy="274320"/>
+          </a:xfrm>
+          <a:prstGeom prst="rect">
+            <a:avLst/>
+          </a:prstGeom>
+          <a:noFill/>
+        </p:spPr>
+        <p:txBody>
+          <a:bodyPr wrap="square" anchor="t" lIns="0" rIns="0" tIns="0" bIns="0">
+            <a:spAutoFit/>
+          </a:bodyPr>
+          <a:lstStyle/>
+          <a:p>
+            <a:pPr algn="r">
+              <a:lnSpc>
+                <a:spcPct val="110000"/>
+              </a:lnSpc>
+            </a:pPr>
+            <a:r>
+              <a:rPr sz="900" b="0">
+                <a:solidFill>
+                  <a:srgbClr val="6B7787"/>
+                </a:solidFill>
+                <a:latin typeface="Avenir Next"/>
+              </a:rPr>
+              <a:t>27</a:t>
             </a:r>
           </a:p>
         </p:txBody>
@@ -20561,7 +20436,7 @@
             <a:avLst/>
           </a:prstGeom>
           <a:solidFill>
-            <a:srgbClr val="FFFFFF"/>
+            <a:srgbClr val="0E1B2A"/>
           </a:solidFill>
           <a:ln>
             <a:noFill/>
@@ -20592,14 +20467,53 @@
       </p:sp>
       <p:sp>
         <p:nvSpPr>
-          <p:cNvPr id="3" name="Rectangle 2"/>
+          <p:cNvPr id="3" name="TextBox 2"/>
+          <p:cNvSpPr txBox="1"/>
+          <p:nvPr/>
+        </p:nvSpPr>
+        <p:spPr>
+          <a:xfrm>
+            <a:off x="548640" y="914400"/>
+            <a:ext cx="6400800" cy="2926080"/>
+          </a:xfrm>
+          <a:prstGeom prst="rect">
+            <a:avLst/>
+          </a:prstGeom>
+          <a:noFill/>
+        </p:spPr>
+        <p:txBody>
+          <a:bodyPr wrap="square" anchor="t" lIns="0" rIns="0" tIns="0" bIns="0">
+            <a:spAutoFit/>
+          </a:bodyPr>
+          <a:lstStyle/>
+          <a:p>
+            <a:pPr algn="l">
+              <a:lnSpc>
+                <a:spcPct val="110000"/>
+              </a:lnSpc>
+            </a:pPr>
+            <a:r>
+              <a:rPr sz="20000" b="1">
+                <a:solidFill>
+                  <a:srgbClr val="2A4760"/>
+                </a:solidFill>
+                <a:latin typeface="Avenir Next"/>
+              </a:rPr>
+              <a:t>08</a:t>
+            </a:r>
+          </a:p>
+        </p:txBody>
+      </p:sp>
+      <p:sp>
+        <p:nvSpPr>
+          <p:cNvPr id="4" name="Rectangle 3"/>
           <p:cNvSpPr/>
           <p:nvPr/>
         </p:nvSpPr>
         <p:spPr>
           <a:xfrm>
-            <a:off x="640080" y="566928"/>
-            <a:ext cx="310896" cy="100584"/>
+            <a:off x="868680" y="3977639"/>
+            <a:ext cx="2194560" cy="38100"/>
           </a:xfrm>
           <a:prstGeom prst="rect">
             <a:avLst/>
@@ -20636,14 +20550,14 @@
       </p:sp>
       <p:sp>
         <p:nvSpPr>
-          <p:cNvPr id="4" name="TextBox 3"/>
-          <p:cNvSpPr txBox="1"/>
-          <p:nvPr/>
-        </p:nvSpPr>
-        <p:spPr>
-          <a:xfrm>
-            <a:off x="1024128" y="502920"/>
-            <a:ext cx="10058400" cy="274320"/>
+          <p:cNvPr id="5" name="TextBox 4"/>
+          <p:cNvSpPr txBox="1"/>
+          <p:nvPr/>
+        </p:nvSpPr>
+        <p:spPr>
+          <a:xfrm>
+            <a:off x="822960" y="4206240"/>
+            <a:ext cx="10515600" cy="914400"/>
           </a:xfrm>
           <a:prstGeom prst="rect">
             <a:avLst/>
@@ -20662,27 +20576,27 @@
               </a:lnSpc>
             </a:pPr>
             <a:r>
-              <a:rPr sz="1200" b="1">
-                <a:solidFill>
-                  <a:srgbClr val="0E8C7E"/>
-                </a:solidFill>
-                <a:latin typeface="Avenir Next"/>
-              </a:rPr>
-              <a:t>8 · OPERATIONS</a:t>
-            </a:r>
-          </a:p>
-        </p:txBody>
-      </p:sp>
-      <p:sp>
-        <p:nvSpPr>
-          <p:cNvPr id="5" name="TextBox 4"/>
-          <p:cNvSpPr txBox="1"/>
-          <p:nvPr/>
-        </p:nvSpPr>
-        <p:spPr>
-          <a:xfrm>
-            <a:off x="640080" y="841248"/>
-            <a:ext cx="10972800" cy="640080"/>
+              <a:rPr sz="4000" b="1">
+                <a:solidFill>
+                  <a:srgbClr val="FFFFFF"/>
+                </a:solidFill>
+                <a:latin typeface="Avenir Next"/>
+              </a:rPr>
+              <a:t>Operations</a:t>
+            </a:r>
+          </a:p>
+        </p:txBody>
+      </p:sp>
+      <p:sp>
+        <p:nvSpPr>
+          <p:cNvPr id="6" name="TextBox 5"/>
+          <p:cNvSpPr txBox="1"/>
+          <p:nvPr/>
+        </p:nvSpPr>
+        <p:spPr>
+          <a:xfrm>
+            <a:off x="868680" y="5212080"/>
+            <a:ext cx="10058400" cy="914400"/>
           </a:xfrm>
           <a:prstGeom prst="rect">
             <a:avLst/>
@@ -20701,345 +20615,13 @@
               </a:lnSpc>
             </a:pPr>
             <a:r>
-              <a:rPr sz="2600" b="1">
-                <a:solidFill>
-                  <a:srgbClr val="0E1B2A"/>
-                </a:solidFill>
-                <a:latin typeface="Avenir Next"/>
-              </a:rPr>
-              <a:t>Monitoring: a live dashboard</a:t>
-            </a:r>
-          </a:p>
-        </p:txBody>
-      </p:sp>
-      <p:sp>
-        <p:nvSpPr>
-          <p:cNvPr id="6" name="TextBox 5"/>
-          <p:cNvSpPr txBox="1"/>
-          <p:nvPr/>
-        </p:nvSpPr>
-        <p:spPr>
-          <a:xfrm>
-            <a:off x="640080" y="1389888"/>
-            <a:ext cx="11247120" cy="457200"/>
-          </a:xfrm>
-          <a:prstGeom prst="rect">
-            <a:avLst/>
-          </a:prstGeom>
-          <a:noFill/>
-        </p:spPr>
-        <p:txBody>
-          <a:bodyPr wrap="square" anchor="t" lIns="0" rIns="0" tIns="0" bIns="0">
-            <a:spAutoFit/>
-          </a:bodyPr>
-          <a:lstStyle/>
-          <a:p>
-            <a:pPr algn="l">
-              <a:lnSpc>
-                <a:spcPct val="110000"/>
-              </a:lnSpc>
-            </a:pPr>
-            <a:r>
-              <a:rPr sz="1500" b="0">
-                <a:solidFill>
-                  <a:srgbClr val="6B7787"/>
-                </a:solidFill>
-                <a:latin typeface="Avenir Next"/>
-              </a:rPr>
-              <a:t>A single page gives the full picture at a glance</a:t>
-            </a:r>
-          </a:p>
-        </p:txBody>
-      </p:sp>
-      <p:sp>
-        <p:nvSpPr>
-          <p:cNvPr id="7" name="Rectangle 6"/>
-          <p:cNvSpPr/>
-          <p:nvPr/>
-        </p:nvSpPr>
-        <p:spPr>
-          <a:xfrm>
-            <a:off x="640080" y="1847088"/>
-            <a:ext cx="10908792" cy="15240"/>
-          </a:xfrm>
-          <a:prstGeom prst="rect">
-            <a:avLst/>
-          </a:prstGeom>
-          <a:solidFill>
-            <a:srgbClr val="E3E8EE"/>
-          </a:solidFill>
-          <a:ln>
-            <a:noFill/>
-          </a:ln>
-          <a:effectLst/>
-        </p:spPr>
-        <p:style>
-          <a:lnRef idx="1">
-            <a:schemeClr val="accent1"/>
-          </a:lnRef>
-          <a:fillRef idx="3">
-            <a:schemeClr val="accent1"/>
-          </a:fillRef>
-          <a:effectRef idx="2">
-            <a:schemeClr val="accent1"/>
-          </a:effectRef>
-          <a:fontRef idx="minor">
-            <a:schemeClr val="lt1"/>
-          </a:fontRef>
-        </p:style>
-        <p:txBody>
-          <a:bodyPr rtlCol="0" anchor="ctr"/>
-          <a:lstStyle/>
-          <a:p>
-            <a:pPr algn="ctr"/>
-          </a:p>
-        </p:txBody>
-      </p:sp>
-      <p:sp>
-        <p:nvSpPr>
-          <p:cNvPr id="8" name="TextBox 7"/>
-          <p:cNvSpPr txBox="1"/>
-          <p:nvPr/>
-        </p:nvSpPr>
-        <p:spPr>
-          <a:xfrm>
-            <a:off x="640080" y="2029968"/>
-            <a:ext cx="10908792" cy="4572000"/>
-          </a:xfrm>
-          <a:prstGeom prst="rect">
-            <a:avLst/>
-          </a:prstGeom>
-          <a:noFill/>
-        </p:spPr>
-        <p:txBody>
-          <a:bodyPr wrap="square" lIns="0" rIns="0" tIns="0" bIns="0">
-            <a:spAutoFit/>
-          </a:bodyPr>
-          <a:lstStyle/>
-          <a:p>
-            <a:pPr>
-              <a:lnSpc>
-                <a:spcPct val="112000"/>
-              </a:lnSpc>
-              <a:spcAft>
-                <a:spcPts val="1100"/>
-              </a:spcAft>
-            </a:pPr>
-            <a:r>
-              <a:rPr sz="1600" b="1">
-                <a:solidFill>
-                  <a:srgbClr val="14B8A6"/>
-                </a:solidFill>
-                <a:latin typeface="Avenir Next"/>
-              </a:rPr>
-              <a:t>▪  </a:t>
-            </a:r>
-            <a:r>
-              <a:rPr sz="1600" b="1">
-                <a:solidFill>
-                  <a:srgbClr val="1F2A37"/>
-                </a:solidFill>
-                <a:latin typeface="Avenir Next"/>
-              </a:rPr>
-              <a:t>Overview. </a:t>
-            </a:r>
-            <a:r>
               <a:rPr sz="1600" b="0">
                 <a:solidFill>
-                  <a:srgbClr val="1F2A37"/>
-                </a:solidFill>
-                <a:latin typeface="Avenir Next"/>
-              </a:rPr>
-              <a:t>Account value and cash to the cent, daily profit, and a single health bar covering the engine, the market clock, the next rebalance, and any alerts.</a:t>
-            </a:r>
-          </a:p>
-          <a:p>
-            <a:pPr>
-              <a:lnSpc>
-                <a:spcPct val="112000"/>
-              </a:lnSpc>
-              <a:spcAft>
-                <a:spcPts val="1100"/>
-              </a:spcAft>
-            </a:pPr>
-            <a:r>
-              <a:rPr sz="1600" b="1">
-                <a:solidFill>
-                  <a:srgbClr val="14B8A6"/>
-                </a:solidFill>
-                <a:latin typeface="Avenir Next"/>
-              </a:rPr>
-              <a:t>▪  </a:t>
-            </a:r>
-            <a:r>
-              <a:rPr sz="1600" b="1">
-                <a:solidFill>
-                  <a:srgbClr val="1F2A37"/>
-                </a:solidFill>
-                <a:latin typeface="Avenir Next"/>
-              </a:rPr>
-              <a:t>Portfolio. </a:t>
-            </a:r>
-            <a:r>
-              <a:rPr sz="1600" b="0">
-                <a:solidFill>
-                  <a:srgbClr val="1F2A37"/>
-                </a:solidFill>
-                <a:latin typeface="Avenir Next"/>
-              </a:rPr>
-              <a:t>Holdings against target, sector and concentration breakdowns, the portfolio's factor tilt, the covered calls, and recent activity.</a:t>
-            </a:r>
-          </a:p>
-          <a:p>
-            <a:pPr>
-              <a:lnSpc>
-                <a:spcPct val="112000"/>
-              </a:lnSpc>
-              <a:spcAft>
-                <a:spcPts val="1100"/>
-              </a:spcAft>
-            </a:pPr>
-            <a:r>
-              <a:rPr sz="1600" b="1">
-                <a:solidFill>
-                  <a:srgbClr val="14B8A6"/>
-                </a:solidFill>
-                <a:latin typeface="Avenir Next"/>
-              </a:rPr>
-              <a:t>▪  </a:t>
-            </a:r>
-            <a:r>
-              <a:rPr sz="1600" b="1">
-                <a:solidFill>
-                  <a:srgbClr val="1F2A37"/>
-                </a:solidFill>
-                <a:latin typeface="Avenir Next"/>
-              </a:rPr>
-              <a:t>Performance. </a:t>
-            </a:r>
-            <a:r>
-              <a:rPr sz="1600" b="0">
-                <a:solidFill>
-                  <a:srgbClr val="1F2A37"/>
-                </a:solidFill>
-                <a:latin typeface="Avenir Next"/>
-              </a:rPr>
-              <a:t>Growth against the S&amp;P 500 and the BuyWrite index, risk measures, and a breakdown of trading costs and option premium.</a:t>
-            </a:r>
-          </a:p>
-          <a:p>
-            <a:pPr>
-              <a:lnSpc>
-                <a:spcPct val="112000"/>
-              </a:lnSpc>
-              <a:spcAft>
-                <a:spcPts val="1100"/>
-              </a:spcAft>
-            </a:pPr>
-            <a:r>
-              <a:rPr sz="1600" b="1">
-                <a:solidFill>
-                  <a:srgbClr val="14B8A6"/>
-                </a:solidFill>
-                <a:latin typeface="Avenir Next"/>
-              </a:rPr>
-              <a:t>▪  </a:t>
-            </a:r>
-            <a:r>
-              <a:rPr sz="1600" b="1">
-                <a:solidFill>
-                  <a:srgbClr val="1F2A37"/>
-                </a:solidFill>
-                <a:latin typeface="Avenir Next"/>
-              </a:rPr>
-              <a:t>Always current. </a:t>
-            </a:r>
-            <a:r>
-              <a:rPr sz="1600" b="0">
-                <a:solidFill>
-                  <a:srgbClr val="1F2A37"/>
-                </a:solidFill>
-                <a:latin typeface="Avenir Next"/>
-              </a:rPr>
-              <a:t>The dashboard updates itself from the live account, so it reflects the real state rather than a stale snapshot.</a:t>
-            </a:r>
-          </a:p>
-        </p:txBody>
-      </p:sp>
-      <p:sp>
-        <p:nvSpPr>
-          <p:cNvPr id="9" name="TextBox 8"/>
-          <p:cNvSpPr txBox="1"/>
-          <p:nvPr/>
-        </p:nvSpPr>
-        <p:spPr>
-          <a:xfrm>
-            <a:off x="640080" y="6437376"/>
-            <a:ext cx="7315200" cy="274320"/>
-          </a:xfrm>
-          <a:prstGeom prst="rect">
-            <a:avLst/>
-          </a:prstGeom>
-          <a:noFill/>
-        </p:spPr>
-        <p:txBody>
-          <a:bodyPr wrap="square" anchor="t" lIns="0" rIns="0" tIns="0" bIns="0">
-            <a:spAutoFit/>
-          </a:bodyPr>
-          <a:lstStyle/>
-          <a:p>
-            <a:pPr algn="l">
-              <a:lnSpc>
-                <a:spcPct val="110000"/>
-              </a:lnSpc>
-            </a:pPr>
-            <a:r>
-              <a:rPr sz="900" b="0">
-                <a:solidFill>
-                  <a:srgbClr val="6B7787"/>
-                </a:solidFill>
-                <a:latin typeface="Avenir Next"/>
-              </a:rPr>
-              <a:t>Systematic Factor Income Fund    ·    confidential</a:t>
-            </a:r>
-          </a:p>
-        </p:txBody>
-      </p:sp>
-      <p:sp>
-        <p:nvSpPr>
-          <p:cNvPr id="10" name="TextBox 9"/>
-          <p:cNvSpPr txBox="1"/>
-          <p:nvPr/>
-        </p:nvSpPr>
-        <p:spPr>
-          <a:xfrm>
-            <a:off x="10058400" y="6437376"/>
-            <a:ext cx="1490472" cy="274320"/>
-          </a:xfrm>
-          <a:prstGeom prst="rect">
-            <a:avLst/>
-          </a:prstGeom>
-          <a:noFill/>
-        </p:spPr>
-        <p:txBody>
-          <a:bodyPr wrap="square" anchor="t" lIns="0" rIns="0" tIns="0" bIns="0">
-            <a:spAutoFit/>
-          </a:bodyPr>
-          <a:lstStyle/>
-          <a:p>
-            <a:pPr algn="r">
-              <a:lnSpc>
-                <a:spcPct val="110000"/>
-              </a:lnSpc>
-            </a:pPr>
-            <a:r>
-              <a:rPr sz="900" b="0">
-                <a:solidFill>
-                  <a:srgbClr val="6B7787"/>
-                </a:solidFill>
-                <a:latin typeface="Avenir Next"/>
-              </a:rPr>
-              <a:t>27</a:t>
+                  <a:srgbClr val="C7D2DD"/>
+                </a:solidFill>
+                <a:latin typeface="Avenir Next"/>
+              </a:rPr>
+              <a:t>A live, monitored system, running on its own</a:t>
             </a:r>
           </a:p>
         </p:txBody>
@@ -21223,7 +20805,7 @@
                 </a:solidFill>
                 <a:latin typeface="Avenir Next"/>
               </a:rPr>
-              <a:t>Infrastructure and safeguards</a:t>
+              <a:t>Monitoring: a live dashboard</a:t>
             </a:r>
           </a:p>
         </p:txBody>
@@ -21262,7 +20844,7 @@
                 </a:solidFill>
                 <a:latin typeface="Avenir Next"/>
               </a:rPr>
-              <a:t>Reliable, low-maintenance plumbing</a:t>
+              <a:t>A single page gives the full picture at a glance</a:t>
             </a:r>
           </a:p>
         </p:txBody>
@@ -21357,7 +20939,7 @@
                 </a:solidFill>
                 <a:latin typeface="Avenir Next"/>
               </a:rPr>
-              <a:t>Runs unattended in the cloud. </a:t>
+              <a:t>Overview. </a:t>
             </a:r>
             <a:r>
               <a:rPr sz="1600" b="0">
@@ -21366,7 +20948,7 @@
                 </a:solidFill>
                 <a:latin typeface="Avenir Next"/>
               </a:rPr>
-              <a:t>Hosted on a dedicated server that runs the daily process and the dashboard on a fixed schedule.</a:t>
+              <a:t>Account value and cash to the cent, daily profit, and a single health bar covering the engine, the market clock, the next rebalance, and any alerts.</a:t>
             </a:r>
           </a:p>
           <a:p>
@@ -21394,7 +20976,7 @@
                 </a:solidFill>
                 <a:latin typeface="Avenir Next"/>
               </a:rPr>
-              <a:t>Restart-safe. </a:t>
+              <a:t>Portfolio. </a:t>
             </a:r>
             <a:r>
               <a:rPr sz="1600" b="0">
@@ -21403,7 +20985,7 @@
                 </a:solidFill>
                 <a:latin typeface="Avenir Next"/>
               </a:rPr>
-              <a:t>Every component restarts automatically, with a watchdog that checks the system is alive.</a:t>
+              <a:t>Holdings against target, sector and concentration breakdowns, the portfolio's factor tilt, the covered calls, and recent activity.</a:t>
             </a:r>
           </a:p>
           <a:p>
@@ -21431,7 +21013,7 @@
                 </a:solidFill>
                 <a:latin typeface="Avenir Next"/>
               </a:rPr>
-              <a:t>Backed up nightly. </a:t>
+              <a:t>Performance. </a:t>
             </a:r>
             <a:r>
               <a:rPr sz="1600" b="0">
@@ -21440,7 +21022,7 @@
                 </a:solidFill>
                 <a:latin typeface="Avenir Next"/>
               </a:rPr>
-              <a:t>The operational database is copied to cloud storage each night, with a retention policy.</a:t>
+              <a:t>Growth against the S&amp;P 500 and the BuyWrite index, risk measures, and a breakdown of trading costs and option premium.</a:t>
             </a:r>
           </a:p>
           <a:p>
@@ -21468,7 +21050,7 @@
                 </a:solidFill>
                 <a:latin typeface="Avenir Next"/>
               </a:rPr>
-              <a:t>Alerts by email. </a:t>
+              <a:t>Always current. </a:t>
             </a:r>
             <a:r>
               <a:rPr sz="1600" b="0">
@@ -21477,44 +21059,7 @@
                 </a:solidFill>
                 <a:latin typeface="Avenir Next"/>
               </a:rPr>
-              <a:t>The system emails on the events that matter, such as a failed run or a risk check that blocks a trade.</a:t>
-            </a:r>
-          </a:p>
-          <a:p>
-            <a:pPr>
-              <a:lnSpc>
-                <a:spcPct val="112000"/>
-              </a:lnSpc>
-              <a:spcAft>
-                <a:spcPts val="1100"/>
-              </a:spcAft>
-            </a:pPr>
-            <a:r>
-              <a:rPr sz="1600" b="1">
-                <a:solidFill>
-                  <a:srgbClr val="14B8A6"/>
-                </a:solidFill>
-                <a:latin typeface="Avenir Next"/>
-              </a:rPr>
-              <a:t>▪  </a:t>
-            </a:r>
-            <a:r>
-              <a:rPr sz="1600" b="1">
-                <a:solidFill>
-                  <a:srgbClr val="1F2A37"/>
-                </a:solidFill>
-                <a:latin typeface="Avenir Next"/>
-              </a:rPr>
-              <a:t>Shared securely. </a:t>
-            </a:r>
-            <a:r>
-              <a:rPr sz="1600" b="0">
-                <a:solidFill>
-                  <a:srgbClr val="1F2A37"/>
-                </a:solidFill>
-                <a:latin typeface="Avenir Next"/>
-              </a:rPr>
-              <a:t>The dashboard is viewable read-only behind a password.</a:t>
+              <a:t>The dashboard updates itself from the live account, so it reflects the real state rather than a stale snapshot.</a:t>
             </a:r>
           </a:p>
         </p:txBody>
@@ -21630,7 +21175,7 @@
             <a:avLst/>
           </a:prstGeom>
           <a:solidFill>
-            <a:srgbClr val="0E1B2A"/>
+            <a:srgbClr val="FFFFFF"/>
           </a:solidFill>
           <a:ln>
             <a:noFill/>
@@ -21661,53 +21206,14 @@
       </p:sp>
       <p:sp>
         <p:nvSpPr>
-          <p:cNvPr id="3" name="TextBox 2"/>
-          <p:cNvSpPr txBox="1"/>
-          <p:nvPr/>
-        </p:nvSpPr>
-        <p:spPr>
-          <a:xfrm>
-            <a:off x="548640" y="914400"/>
-            <a:ext cx="6400800" cy="2926080"/>
-          </a:xfrm>
-          <a:prstGeom prst="rect">
-            <a:avLst/>
-          </a:prstGeom>
-          <a:noFill/>
-        </p:spPr>
-        <p:txBody>
-          <a:bodyPr wrap="square" anchor="t" lIns="0" rIns="0" tIns="0" bIns="0">
-            <a:spAutoFit/>
-          </a:bodyPr>
-          <a:lstStyle/>
-          <a:p>
-            <a:pPr algn="l">
-              <a:lnSpc>
-                <a:spcPct val="110000"/>
-              </a:lnSpc>
-            </a:pPr>
-            <a:r>
-              <a:rPr sz="20000" b="1">
-                <a:solidFill>
-                  <a:srgbClr val="2A4760"/>
-                </a:solidFill>
-                <a:latin typeface="Avenir Next"/>
-              </a:rPr>
-              <a:t>09</a:t>
-            </a:r>
-          </a:p>
-        </p:txBody>
-      </p:sp>
-      <p:sp>
-        <p:nvSpPr>
-          <p:cNvPr id="4" name="Rectangle 3"/>
+          <p:cNvPr id="3" name="Rectangle 2"/>
           <p:cNvSpPr/>
           <p:nvPr/>
         </p:nvSpPr>
         <p:spPr>
           <a:xfrm>
-            <a:off x="868680" y="3977639"/>
-            <a:ext cx="2194560" cy="38100"/>
+            <a:off x="640080" y="566928"/>
+            <a:ext cx="310896" cy="100584"/>
           </a:xfrm>
           <a:prstGeom prst="rect">
             <a:avLst/>
@@ -21744,14 +21250,53 @@
       </p:sp>
       <p:sp>
         <p:nvSpPr>
+          <p:cNvPr id="4" name="TextBox 3"/>
+          <p:cNvSpPr txBox="1"/>
+          <p:nvPr/>
+        </p:nvSpPr>
+        <p:spPr>
+          <a:xfrm>
+            <a:off x="1024128" y="502920"/>
+            <a:ext cx="10058400" cy="274320"/>
+          </a:xfrm>
+          <a:prstGeom prst="rect">
+            <a:avLst/>
+          </a:prstGeom>
+          <a:noFill/>
+        </p:spPr>
+        <p:txBody>
+          <a:bodyPr wrap="square" anchor="t" lIns="0" rIns="0" tIns="0" bIns="0">
+            <a:spAutoFit/>
+          </a:bodyPr>
+          <a:lstStyle/>
+          <a:p>
+            <a:pPr algn="l">
+              <a:lnSpc>
+                <a:spcPct val="110000"/>
+              </a:lnSpc>
+            </a:pPr>
+            <a:r>
+              <a:rPr sz="1200" b="1">
+                <a:solidFill>
+                  <a:srgbClr val="0E8C7E"/>
+                </a:solidFill>
+                <a:latin typeface="Avenir Next"/>
+              </a:rPr>
+              <a:t>8 · OPERATIONS</a:t>
+            </a:r>
+          </a:p>
+        </p:txBody>
+      </p:sp>
+      <p:sp>
+        <p:nvSpPr>
           <p:cNvPr id="5" name="TextBox 4"/>
           <p:cNvSpPr txBox="1"/>
           <p:nvPr/>
         </p:nvSpPr>
         <p:spPr>
           <a:xfrm>
-            <a:off x="822960" y="4206240"/>
-            <a:ext cx="10515600" cy="914400"/>
+            <a:off x="640080" y="841248"/>
+            <a:ext cx="10972800" cy="640080"/>
           </a:xfrm>
           <a:prstGeom prst="rect">
             <a:avLst/>
@@ -21770,13 +21315,13 @@
               </a:lnSpc>
             </a:pPr>
             <a:r>
-              <a:rPr sz="4000" b="1">
-                <a:solidFill>
-                  <a:srgbClr val="FFFFFF"/>
-                </a:solidFill>
-                <a:latin typeface="Avenir Next"/>
-              </a:rPr>
-              <a:t>Status and outlook</a:t>
+              <a:rPr sz="2600" b="1">
+                <a:solidFill>
+                  <a:srgbClr val="0E1B2A"/>
+                </a:solidFill>
+                <a:latin typeface="Avenir Next"/>
+              </a:rPr>
+              <a:t>Infrastructure and safeguards</a:t>
             </a:r>
           </a:p>
         </p:txBody>
@@ -21789,8 +21334,8 @@
         </p:nvSpPr>
         <p:spPr>
           <a:xfrm>
-            <a:off x="868680" y="5212080"/>
-            <a:ext cx="10058400" cy="914400"/>
+            <a:off x="640080" y="1389888"/>
+            <a:ext cx="11247120" cy="457200"/>
           </a:xfrm>
           <a:prstGeom prst="rect">
             <a:avLst/>
@@ -21809,13 +21354,343 @@
               </a:lnSpc>
             </a:pPr>
             <a:r>
+              <a:rPr sz="1500" b="0">
+                <a:solidFill>
+                  <a:srgbClr val="6B7787"/>
+                </a:solidFill>
+                <a:latin typeface="Avenir Next"/>
+              </a:rPr>
+              <a:t>Reliable, low-maintenance plumbing</a:t>
+            </a:r>
+          </a:p>
+        </p:txBody>
+      </p:sp>
+      <p:sp>
+        <p:nvSpPr>
+          <p:cNvPr id="7" name="Rectangle 6"/>
+          <p:cNvSpPr/>
+          <p:nvPr/>
+        </p:nvSpPr>
+        <p:spPr>
+          <a:xfrm>
+            <a:off x="640080" y="1847088"/>
+            <a:ext cx="10908792" cy="15240"/>
+          </a:xfrm>
+          <a:prstGeom prst="rect">
+            <a:avLst/>
+          </a:prstGeom>
+          <a:solidFill>
+            <a:srgbClr val="E3E8EE"/>
+          </a:solidFill>
+          <a:ln>
+            <a:noFill/>
+          </a:ln>
+          <a:effectLst/>
+        </p:spPr>
+        <p:style>
+          <a:lnRef idx="1">
+            <a:schemeClr val="accent1"/>
+          </a:lnRef>
+          <a:fillRef idx="3">
+            <a:schemeClr val="accent1"/>
+          </a:fillRef>
+          <a:effectRef idx="2">
+            <a:schemeClr val="accent1"/>
+          </a:effectRef>
+          <a:fontRef idx="minor">
+            <a:schemeClr val="lt1"/>
+          </a:fontRef>
+        </p:style>
+        <p:txBody>
+          <a:bodyPr rtlCol="0" anchor="ctr"/>
+          <a:lstStyle/>
+          <a:p>
+            <a:pPr algn="ctr"/>
+          </a:p>
+        </p:txBody>
+      </p:sp>
+      <p:sp>
+        <p:nvSpPr>
+          <p:cNvPr id="8" name="TextBox 7"/>
+          <p:cNvSpPr txBox="1"/>
+          <p:nvPr/>
+        </p:nvSpPr>
+        <p:spPr>
+          <a:xfrm>
+            <a:off x="640080" y="2029968"/>
+            <a:ext cx="10908792" cy="4572000"/>
+          </a:xfrm>
+          <a:prstGeom prst="rect">
+            <a:avLst/>
+          </a:prstGeom>
+          <a:noFill/>
+        </p:spPr>
+        <p:txBody>
+          <a:bodyPr wrap="square" lIns="0" rIns="0" tIns="0" bIns="0">
+            <a:spAutoFit/>
+          </a:bodyPr>
+          <a:lstStyle/>
+          <a:p>
+            <a:pPr>
+              <a:lnSpc>
+                <a:spcPct val="112000"/>
+              </a:lnSpc>
+              <a:spcAft>
+                <a:spcPts val="1100"/>
+              </a:spcAft>
+            </a:pPr>
+            <a:r>
+              <a:rPr sz="1600" b="1">
+                <a:solidFill>
+                  <a:srgbClr val="14B8A6"/>
+                </a:solidFill>
+                <a:latin typeface="Avenir Next"/>
+              </a:rPr>
+              <a:t>▪  </a:t>
+            </a:r>
+            <a:r>
+              <a:rPr sz="1600" b="1">
+                <a:solidFill>
+                  <a:srgbClr val="1F2A37"/>
+                </a:solidFill>
+                <a:latin typeface="Avenir Next"/>
+              </a:rPr>
+              <a:t>Runs unattended in the cloud. </a:t>
+            </a:r>
+            <a:r>
               <a:rPr sz="1600" b="0">
                 <a:solidFill>
-                  <a:srgbClr val="C7D2DD"/>
-                </a:solidFill>
-                <a:latin typeface="Avenir Next"/>
-              </a:rPr>
-              <a:t>Where the build stands, and what remains before live capital</a:t>
+                  <a:srgbClr val="1F2A37"/>
+                </a:solidFill>
+                <a:latin typeface="Avenir Next"/>
+              </a:rPr>
+              <a:t>Hosted on a dedicated server that runs the daily process and the dashboard on a fixed schedule.</a:t>
+            </a:r>
+          </a:p>
+          <a:p>
+            <a:pPr>
+              <a:lnSpc>
+                <a:spcPct val="112000"/>
+              </a:lnSpc>
+              <a:spcAft>
+                <a:spcPts val="1100"/>
+              </a:spcAft>
+            </a:pPr>
+            <a:r>
+              <a:rPr sz="1600" b="1">
+                <a:solidFill>
+                  <a:srgbClr val="14B8A6"/>
+                </a:solidFill>
+                <a:latin typeface="Avenir Next"/>
+              </a:rPr>
+              <a:t>▪  </a:t>
+            </a:r>
+            <a:r>
+              <a:rPr sz="1600" b="1">
+                <a:solidFill>
+                  <a:srgbClr val="1F2A37"/>
+                </a:solidFill>
+                <a:latin typeface="Avenir Next"/>
+              </a:rPr>
+              <a:t>Restart-safe. </a:t>
+            </a:r>
+            <a:r>
+              <a:rPr sz="1600" b="0">
+                <a:solidFill>
+                  <a:srgbClr val="1F2A37"/>
+                </a:solidFill>
+                <a:latin typeface="Avenir Next"/>
+              </a:rPr>
+              <a:t>Every component restarts automatically, with a watchdog that checks the system is alive.</a:t>
+            </a:r>
+          </a:p>
+          <a:p>
+            <a:pPr>
+              <a:lnSpc>
+                <a:spcPct val="112000"/>
+              </a:lnSpc>
+              <a:spcAft>
+                <a:spcPts val="1100"/>
+              </a:spcAft>
+            </a:pPr>
+            <a:r>
+              <a:rPr sz="1600" b="1">
+                <a:solidFill>
+                  <a:srgbClr val="14B8A6"/>
+                </a:solidFill>
+                <a:latin typeface="Avenir Next"/>
+              </a:rPr>
+              <a:t>▪  </a:t>
+            </a:r>
+            <a:r>
+              <a:rPr sz="1600" b="1">
+                <a:solidFill>
+                  <a:srgbClr val="1F2A37"/>
+                </a:solidFill>
+                <a:latin typeface="Avenir Next"/>
+              </a:rPr>
+              <a:t>Backed up nightly. </a:t>
+            </a:r>
+            <a:r>
+              <a:rPr sz="1600" b="0">
+                <a:solidFill>
+                  <a:srgbClr val="1F2A37"/>
+                </a:solidFill>
+                <a:latin typeface="Avenir Next"/>
+              </a:rPr>
+              <a:t>The operational database is copied to cloud storage each night, with a retention policy.</a:t>
+            </a:r>
+          </a:p>
+          <a:p>
+            <a:pPr>
+              <a:lnSpc>
+                <a:spcPct val="112000"/>
+              </a:lnSpc>
+              <a:spcAft>
+                <a:spcPts val="1100"/>
+              </a:spcAft>
+            </a:pPr>
+            <a:r>
+              <a:rPr sz="1600" b="1">
+                <a:solidFill>
+                  <a:srgbClr val="14B8A6"/>
+                </a:solidFill>
+                <a:latin typeface="Avenir Next"/>
+              </a:rPr>
+              <a:t>▪  </a:t>
+            </a:r>
+            <a:r>
+              <a:rPr sz="1600" b="1">
+                <a:solidFill>
+                  <a:srgbClr val="1F2A37"/>
+                </a:solidFill>
+                <a:latin typeface="Avenir Next"/>
+              </a:rPr>
+              <a:t>Alerts by email. </a:t>
+            </a:r>
+            <a:r>
+              <a:rPr sz="1600" b="0">
+                <a:solidFill>
+                  <a:srgbClr val="1F2A37"/>
+                </a:solidFill>
+                <a:latin typeface="Avenir Next"/>
+              </a:rPr>
+              <a:t>The system emails on the events that matter, such as a failed run or a risk check that blocks a trade.</a:t>
+            </a:r>
+          </a:p>
+          <a:p>
+            <a:pPr>
+              <a:lnSpc>
+                <a:spcPct val="112000"/>
+              </a:lnSpc>
+              <a:spcAft>
+                <a:spcPts val="1100"/>
+              </a:spcAft>
+            </a:pPr>
+            <a:r>
+              <a:rPr sz="1600" b="1">
+                <a:solidFill>
+                  <a:srgbClr val="14B8A6"/>
+                </a:solidFill>
+                <a:latin typeface="Avenir Next"/>
+              </a:rPr>
+              <a:t>▪  </a:t>
+            </a:r>
+            <a:r>
+              <a:rPr sz="1600" b="1">
+                <a:solidFill>
+                  <a:srgbClr val="1F2A37"/>
+                </a:solidFill>
+                <a:latin typeface="Avenir Next"/>
+              </a:rPr>
+              <a:t>Shared securely. </a:t>
+            </a:r>
+            <a:r>
+              <a:rPr sz="1600" b="0">
+                <a:solidFill>
+                  <a:srgbClr val="1F2A37"/>
+                </a:solidFill>
+                <a:latin typeface="Avenir Next"/>
+              </a:rPr>
+              <a:t>The dashboard is viewable read-only behind a password.</a:t>
+            </a:r>
+          </a:p>
+        </p:txBody>
+      </p:sp>
+      <p:sp>
+        <p:nvSpPr>
+          <p:cNvPr id="9" name="TextBox 8"/>
+          <p:cNvSpPr txBox="1"/>
+          <p:nvPr/>
+        </p:nvSpPr>
+        <p:spPr>
+          <a:xfrm>
+            <a:off x="640080" y="6437376"/>
+            <a:ext cx="7315200" cy="274320"/>
+          </a:xfrm>
+          <a:prstGeom prst="rect">
+            <a:avLst/>
+          </a:prstGeom>
+          <a:noFill/>
+        </p:spPr>
+        <p:txBody>
+          <a:bodyPr wrap="square" anchor="t" lIns="0" rIns="0" tIns="0" bIns="0">
+            <a:spAutoFit/>
+          </a:bodyPr>
+          <a:lstStyle/>
+          <a:p>
+            <a:pPr algn="l">
+              <a:lnSpc>
+                <a:spcPct val="110000"/>
+              </a:lnSpc>
+            </a:pPr>
+            <a:r>
+              <a:rPr sz="900" b="0">
+                <a:solidFill>
+                  <a:srgbClr val="6B7787"/>
+                </a:solidFill>
+                <a:latin typeface="Avenir Next"/>
+              </a:rPr>
+              <a:t>Systematic Factor Income Fund    ·    confidential</a:t>
+            </a:r>
+          </a:p>
+        </p:txBody>
+      </p:sp>
+      <p:sp>
+        <p:nvSpPr>
+          <p:cNvPr id="10" name="TextBox 9"/>
+          <p:cNvSpPr txBox="1"/>
+          <p:nvPr/>
+        </p:nvSpPr>
+        <p:spPr>
+          <a:xfrm>
+            <a:off x="10058400" y="6437376"/>
+            <a:ext cx="1490472" cy="274320"/>
+          </a:xfrm>
+          <a:prstGeom prst="rect">
+            <a:avLst/>
+          </a:prstGeom>
+          <a:noFill/>
+        </p:spPr>
+        <p:txBody>
+          <a:bodyPr wrap="square" anchor="t" lIns="0" rIns="0" tIns="0" bIns="0">
+            <a:spAutoFit/>
+          </a:bodyPr>
+          <a:lstStyle/>
+          <a:p>
+            <a:pPr algn="r">
+              <a:lnSpc>
+                <a:spcPct val="110000"/>
+              </a:lnSpc>
+            </a:pPr>
+            <a:r>
+              <a:rPr sz="900" b="0">
+                <a:solidFill>
+                  <a:srgbClr val="6B7787"/>
+                </a:solidFill>
+                <a:latin typeface="Avenir Next"/>
+              </a:rPr>
+              <a:t>29</a:t>
             </a:r>
           </a:p>
         </p:txBody>
@@ -21853,7 +21728,7 @@
             <a:avLst/>
           </a:prstGeom>
           <a:solidFill>
-            <a:srgbClr val="FFFFFF"/>
+            <a:srgbClr val="0E1B2A"/>
           </a:solidFill>
           <a:ln>
             <a:noFill/>
@@ -21884,14 +21759,53 @@
       </p:sp>
       <p:sp>
         <p:nvSpPr>
-          <p:cNvPr id="3" name="Rectangle 2"/>
+          <p:cNvPr id="3" name="TextBox 2"/>
+          <p:cNvSpPr txBox="1"/>
+          <p:nvPr/>
+        </p:nvSpPr>
+        <p:spPr>
+          <a:xfrm>
+            <a:off x="548640" y="914400"/>
+            <a:ext cx="6400800" cy="2926080"/>
+          </a:xfrm>
+          <a:prstGeom prst="rect">
+            <a:avLst/>
+          </a:prstGeom>
+          <a:noFill/>
+        </p:spPr>
+        <p:txBody>
+          <a:bodyPr wrap="square" anchor="t" lIns="0" rIns="0" tIns="0" bIns="0">
+            <a:spAutoFit/>
+          </a:bodyPr>
+          <a:lstStyle/>
+          <a:p>
+            <a:pPr algn="l">
+              <a:lnSpc>
+                <a:spcPct val="110000"/>
+              </a:lnSpc>
+            </a:pPr>
+            <a:r>
+              <a:rPr sz="20000" b="1">
+                <a:solidFill>
+                  <a:srgbClr val="2A4760"/>
+                </a:solidFill>
+                <a:latin typeface="Avenir Next"/>
+              </a:rPr>
+              <a:t>09</a:t>
+            </a:r>
+          </a:p>
+        </p:txBody>
+      </p:sp>
+      <p:sp>
+        <p:nvSpPr>
+          <p:cNvPr id="4" name="Rectangle 3"/>
           <p:cNvSpPr/>
           <p:nvPr/>
         </p:nvSpPr>
         <p:spPr>
           <a:xfrm>
-            <a:off x="640080" y="566928"/>
-            <a:ext cx="310896" cy="100584"/>
+            <a:off x="868680" y="3977639"/>
+            <a:ext cx="2194560" cy="38100"/>
           </a:xfrm>
           <a:prstGeom prst="rect">
             <a:avLst/>
@@ -21928,14 +21842,14 @@
       </p:sp>
       <p:sp>
         <p:nvSpPr>
-          <p:cNvPr id="4" name="TextBox 3"/>
-          <p:cNvSpPr txBox="1"/>
-          <p:nvPr/>
-        </p:nvSpPr>
-        <p:spPr>
-          <a:xfrm>
-            <a:off x="1024128" y="502920"/>
-            <a:ext cx="10058400" cy="274320"/>
+          <p:cNvPr id="5" name="TextBox 4"/>
+          <p:cNvSpPr txBox="1"/>
+          <p:nvPr/>
+        </p:nvSpPr>
+        <p:spPr>
+          <a:xfrm>
+            <a:off x="822960" y="4206240"/>
+            <a:ext cx="10515600" cy="914400"/>
           </a:xfrm>
           <a:prstGeom prst="rect">
             <a:avLst/>
@@ -21954,27 +21868,27 @@
               </a:lnSpc>
             </a:pPr>
             <a:r>
-              <a:rPr sz="1200" b="1">
-                <a:solidFill>
-                  <a:srgbClr val="0E8C7E"/>
-                </a:solidFill>
-                <a:latin typeface="Avenir Next"/>
-              </a:rPr>
-              <a:t>9 · STATUS AND OUTLOOK</a:t>
-            </a:r>
-          </a:p>
-        </p:txBody>
-      </p:sp>
-      <p:sp>
-        <p:nvSpPr>
-          <p:cNvPr id="5" name="TextBox 4"/>
-          <p:cNvSpPr txBox="1"/>
-          <p:nvPr/>
-        </p:nvSpPr>
-        <p:spPr>
-          <a:xfrm>
-            <a:off x="640080" y="841248"/>
-            <a:ext cx="10972800" cy="640080"/>
+              <a:rPr sz="4000" b="1">
+                <a:solidFill>
+                  <a:srgbClr val="FFFFFF"/>
+                </a:solidFill>
+                <a:latin typeface="Avenir Next"/>
+              </a:rPr>
+              <a:t>Status and outlook</a:t>
+            </a:r>
+          </a:p>
+        </p:txBody>
+      </p:sp>
+      <p:sp>
+        <p:nvSpPr>
+          <p:cNvPr id="6" name="TextBox 5"/>
+          <p:cNvSpPr txBox="1"/>
+          <p:nvPr/>
+        </p:nvSpPr>
+        <p:spPr>
+          <a:xfrm>
+            <a:off x="868680" y="5212080"/>
+            <a:ext cx="10058400" cy="914400"/>
           </a:xfrm>
           <a:prstGeom prst="rect">
             <a:avLst/>
@@ -21993,308 +21907,13 @@
               </a:lnSpc>
             </a:pPr>
             <a:r>
-              <a:rPr sz="2600" b="1">
-                <a:solidFill>
-                  <a:srgbClr val="0E1B2A"/>
-                </a:solidFill>
-                <a:latin typeface="Avenir Next"/>
-              </a:rPr>
-              <a:t>Where the build stands today</a:t>
-            </a:r>
-          </a:p>
-        </p:txBody>
-      </p:sp>
-      <p:sp>
-        <p:nvSpPr>
-          <p:cNvPr id="6" name="TextBox 5"/>
-          <p:cNvSpPr txBox="1"/>
-          <p:nvPr/>
-        </p:nvSpPr>
-        <p:spPr>
-          <a:xfrm>
-            <a:off x="640080" y="1389888"/>
-            <a:ext cx="11247120" cy="457200"/>
-          </a:xfrm>
-          <a:prstGeom prst="rect">
-            <a:avLst/>
-          </a:prstGeom>
-          <a:noFill/>
-        </p:spPr>
-        <p:txBody>
-          <a:bodyPr wrap="square" anchor="t" lIns="0" rIns="0" tIns="0" bIns="0">
-            <a:spAutoFit/>
-          </a:bodyPr>
-          <a:lstStyle/>
-          <a:p>
-            <a:pPr algn="l">
-              <a:lnSpc>
-                <a:spcPct val="110000"/>
-              </a:lnSpc>
-            </a:pPr>
-            <a:r>
-              <a:rPr sz="1500" b="0">
-                <a:solidFill>
-                  <a:srgbClr val="6B7787"/>
-                </a:solidFill>
-                <a:latin typeface="Avenir Next"/>
-              </a:rPr>
-              <a:t>Built, tested, and paper-trading, with one verification step ahead</a:t>
-            </a:r>
-          </a:p>
-        </p:txBody>
-      </p:sp>
-      <p:sp>
-        <p:nvSpPr>
-          <p:cNvPr id="7" name="Rectangle 6"/>
-          <p:cNvSpPr/>
-          <p:nvPr/>
-        </p:nvSpPr>
-        <p:spPr>
-          <a:xfrm>
-            <a:off x="640080" y="1847088"/>
-            <a:ext cx="10908792" cy="15240"/>
-          </a:xfrm>
-          <a:prstGeom prst="rect">
-            <a:avLst/>
-          </a:prstGeom>
-          <a:solidFill>
-            <a:srgbClr val="E3E8EE"/>
-          </a:solidFill>
-          <a:ln>
-            <a:noFill/>
-          </a:ln>
-          <a:effectLst/>
-        </p:spPr>
-        <p:style>
-          <a:lnRef idx="1">
-            <a:schemeClr val="accent1"/>
-          </a:lnRef>
-          <a:fillRef idx="3">
-            <a:schemeClr val="accent1"/>
-          </a:fillRef>
-          <a:effectRef idx="2">
-            <a:schemeClr val="accent1"/>
-          </a:effectRef>
-          <a:fontRef idx="minor">
-            <a:schemeClr val="lt1"/>
-          </a:fontRef>
-        </p:style>
-        <p:txBody>
-          <a:bodyPr rtlCol="0" anchor="ctr"/>
-          <a:lstStyle/>
-          <a:p>
-            <a:pPr algn="ctr"/>
-          </a:p>
-        </p:txBody>
-      </p:sp>
-      <p:sp>
-        <p:nvSpPr>
-          <p:cNvPr id="8" name="TextBox 7"/>
-          <p:cNvSpPr txBox="1"/>
-          <p:nvPr/>
-        </p:nvSpPr>
-        <p:spPr>
-          <a:xfrm>
-            <a:off x="640080" y="2029968"/>
-            <a:ext cx="10908792" cy="4572000"/>
-          </a:xfrm>
-          <a:prstGeom prst="rect">
-            <a:avLst/>
-          </a:prstGeom>
-          <a:noFill/>
-        </p:spPr>
-        <p:txBody>
-          <a:bodyPr wrap="square" lIns="0" rIns="0" tIns="0" bIns="0">
-            <a:spAutoFit/>
-          </a:bodyPr>
-          <a:lstStyle/>
-          <a:p>
-            <a:pPr>
-              <a:lnSpc>
-                <a:spcPct val="112000"/>
-              </a:lnSpc>
-              <a:spcAft>
-                <a:spcPts val="1100"/>
-              </a:spcAft>
-            </a:pPr>
-            <a:r>
-              <a:rPr sz="1600" b="1">
-                <a:solidFill>
-                  <a:srgbClr val="14B8A6"/>
-                </a:solidFill>
-                <a:latin typeface="Avenir Next"/>
-              </a:rPr>
-              <a:t>▪  </a:t>
-            </a:r>
-            <a:r>
-              <a:rPr sz="1600" b="1">
-                <a:solidFill>
-                  <a:srgbClr val="1F2A37"/>
-                </a:solidFill>
-                <a:latin typeface="Avenir Next"/>
-              </a:rPr>
-              <a:t>The full strategy is built and tested. </a:t>
-            </a:r>
-            <a:r>
               <a:rPr sz="1600" b="0">
                 <a:solidFill>
-                  <a:srgbClr val="1F2A37"/>
-                </a:solidFill>
-                <a:latin typeface="Avenir Next"/>
-              </a:rPr>
-              <a:t>Data, factor scoring, portfolio construction, the options overlay, execution, and risk controls are all in place.</a:t>
-            </a:r>
-          </a:p>
-          <a:p>
-            <a:pPr>
-              <a:lnSpc>
-                <a:spcPct val="112000"/>
-              </a:lnSpc>
-              <a:spcAft>
-                <a:spcPts val="1100"/>
-              </a:spcAft>
-            </a:pPr>
-            <a:r>
-              <a:rPr sz="1600" b="1">
-                <a:solidFill>
-                  <a:srgbClr val="14B8A6"/>
-                </a:solidFill>
-                <a:latin typeface="Avenir Next"/>
-              </a:rPr>
-              <a:t>▪  </a:t>
-            </a:r>
-            <a:r>
-              <a:rPr sz="1600" b="1">
-                <a:solidFill>
-                  <a:srgbClr val="1F2A37"/>
-                </a:solidFill>
-                <a:latin typeface="Avenir Next"/>
-              </a:rPr>
-              <a:t>It is running on a paper account. </a:t>
-            </a:r>
-            <a:r>
-              <a:rPr sz="1600" b="0">
-                <a:solidFill>
-                  <a:srgbClr val="1F2A37"/>
-                </a:solidFill>
-                <a:latin typeface="Avenir Next"/>
-              </a:rPr>
-              <a:t>The system trades a simulated account with live market data, monitored by the dashboard.</a:t>
-            </a:r>
-          </a:p>
-          <a:p>
-            <a:pPr>
-              <a:lnSpc>
-                <a:spcPct val="112000"/>
-              </a:lnSpc>
-              <a:spcAft>
-                <a:spcPts val="1100"/>
-              </a:spcAft>
-            </a:pPr>
-            <a:r>
-              <a:rPr sz="1600" b="1">
-                <a:solidFill>
-                  <a:srgbClr val="14B8A6"/>
-                </a:solidFill>
-                <a:latin typeface="Avenir Next"/>
-              </a:rPr>
-              <a:t>▪  </a:t>
-            </a:r>
-            <a:r>
-              <a:rPr sz="1600" b="1">
-                <a:solidFill>
-                  <a:srgbClr val="0E8C7E"/>
-                </a:solidFill>
-                <a:latin typeface="Avenir Next"/>
-              </a:rPr>
-              <a:t>The remaining step is live-paper verification. </a:t>
-            </a:r>
-            <a:r>
-              <a:rPr sz="1600" b="0">
-                <a:solidFill>
-                  <a:srgbClr val="0E1B2A"/>
-                </a:solidFill>
-                <a:latin typeface="Avenir Next"/>
-              </a:rPr>
-              <a:t>Confirm the full strategy fills, prices, and behaves correctly on the real account before any discussion of live capital.</a:t>
-            </a:r>
-          </a:p>
-        </p:txBody>
-      </p:sp>
-      <p:sp>
-        <p:nvSpPr>
-          <p:cNvPr id="9" name="TextBox 8"/>
-          <p:cNvSpPr txBox="1"/>
-          <p:nvPr/>
-        </p:nvSpPr>
-        <p:spPr>
-          <a:xfrm>
-            <a:off x="640080" y="6437376"/>
-            <a:ext cx="7315200" cy="274320"/>
-          </a:xfrm>
-          <a:prstGeom prst="rect">
-            <a:avLst/>
-          </a:prstGeom>
-          <a:noFill/>
-        </p:spPr>
-        <p:txBody>
-          <a:bodyPr wrap="square" anchor="t" lIns="0" rIns="0" tIns="0" bIns="0">
-            <a:spAutoFit/>
-          </a:bodyPr>
-          <a:lstStyle/>
-          <a:p>
-            <a:pPr algn="l">
-              <a:lnSpc>
-                <a:spcPct val="110000"/>
-              </a:lnSpc>
-            </a:pPr>
-            <a:r>
-              <a:rPr sz="900" b="0">
-                <a:solidFill>
-                  <a:srgbClr val="6B7787"/>
-                </a:solidFill>
-                <a:latin typeface="Avenir Next"/>
-              </a:rPr>
-              <a:t>Systematic Factor Income Fund    ·    confidential</a:t>
-            </a:r>
-          </a:p>
-        </p:txBody>
-      </p:sp>
-      <p:sp>
-        <p:nvSpPr>
-          <p:cNvPr id="10" name="TextBox 9"/>
-          <p:cNvSpPr txBox="1"/>
-          <p:nvPr/>
-        </p:nvSpPr>
-        <p:spPr>
-          <a:xfrm>
-            <a:off x="10058400" y="6437376"/>
-            <a:ext cx="1490472" cy="274320"/>
-          </a:xfrm>
-          <a:prstGeom prst="rect">
-            <a:avLst/>
-          </a:prstGeom>
-          <a:noFill/>
-        </p:spPr>
-        <p:txBody>
-          <a:bodyPr wrap="square" anchor="t" lIns="0" rIns="0" tIns="0" bIns="0">
-            <a:spAutoFit/>
-          </a:bodyPr>
-          <a:lstStyle/>
-          <a:p>
-            <a:pPr algn="r">
-              <a:lnSpc>
-                <a:spcPct val="110000"/>
-              </a:lnSpc>
-            </a:pPr>
-            <a:r>
-              <a:rPr sz="900" b="0">
-                <a:solidFill>
-                  <a:srgbClr val="6B7787"/>
-                </a:solidFill>
-                <a:latin typeface="Avenir Next"/>
-              </a:rPr>
-              <a:t>29</a:t>
+                  <a:srgbClr val="C7D2DD"/>
+                </a:solidFill>
+                <a:latin typeface="Avenir Next"/>
+              </a:rPr>
+              <a:t>Where the build stands, and what remains before live capital</a:t>
             </a:r>
           </a:p>
         </p:txBody>
@@ -22994,20 +22613,59 @@
                 </a:solidFill>
                 <a:latin typeface="Avenir Next"/>
               </a:rPr>
-              <a:t>Risks and what comes next</a:t>
-            </a:r>
-          </a:p>
-        </p:txBody>
-      </p:sp>
-      <p:sp>
-        <p:nvSpPr>
-          <p:cNvPr id="6" name="Rectangle 5"/>
+              <a:t>Where the build stands today</a:t>
+            </a:r>
+          </a:p>
+        </p:txBody>
+      </p:sp>
+      <p:sp>
+        <p:nvSpPr>
+          <p:cNvPr id="6" name="TextBox 5"/>
+          <p:cNvSpPr txBox="1"/>
+          <p:nvPr/>
+        </p:nvSpPr>
+        <p:spPr>
+          <a:xfrm>
+            <a:off x="640080" y="1389888"/>
+            <a:ext cx="11247120" cy="457200"/>
+          </a:xfrm>
+          <a:prstGeom prst="rect">
+            <a:avLst/>
+          </a:prstGeom>
+          <a:noFill/>
+        </p:spPr>
+        <p:txBody>
+          <a:bodyPr wrap="square" anchor="t" lIns="0" rIns="0" tIns="0" bIns="0">
+            <a:spAutoFit/>
+          </a:bodyPr>
+          <a:lstStyle/>
+          <a:p>
+            <a:pPr algn="l">
+              <a:lnSpc>
+                <a:spcPct val="110000"/>
+              </a:lnSpc>
+            </a:pPr>
+            <a:r>
+              <a:rPr sz="1500" b="0">
+                <a:solidFill>
+                  <a:srgbClr val="6B7787"/>
+                </a:solidFill>
+                <a:latin typeface="Avenir Next"/>
+              </a:rPr>
+              <a:t>Built, tested, and paper-trading, with one verification step ahead</a:t>
+            </a:r>
+          </a:p>
+        </p:txBody>
+      </p:sp>
+      <p:sp>
+        <p:nvSpPr>
+          <p:cNvPr id="7" name="Rectangle 6"/>
           <p:cNvSpPr/>
           <p:nvPr/>
         </p:nvSpPr>
         <p:spPr>
           <a:xfrm>
-            <a:off x="640080" y="1463040"/>
+            <a:off x="640080" y="1847088"/>
             <a:ext cx="10908792" cy="15240"/>
           </a:xfrm>
           <a:prstGeom prst="rect">
@@ -23045,53 +22703,14 @@
       </p:sp>
       <p:sp>
         <p:nvSpPr>
-          <p:cNvPr id="7" name="TextBox 6"/>
-          <p:cNvSpPr txBox="1"/>
-          <p:nvPr/>
-        </p:nvSpPr>
-        <p:spPr>
-          <a:xfrm>
-            <a:off x="640080" y="1691640"/>
-            <a:ext cx="5212080" cy="365760"/>
-          </a:xfrm>
-          <a:prstGeom prst="rect">
-            <a:avLst/>
-          </a:prstGeom>
-          <a:noFill/>
-        </p:spPr>
-        <p:txBody>
-          <a:bodyPr wrap="square" anchor="t" lIns="0" rIns="0" tIns="0" bIns="0">
-            <a:spAutoFit/>
-          </a:bodyPr>
-          <a:lstStyle/>
-          <a:p>
-            <a:pPr algn="l">
-              <a:lnSpc>
-                <a:spcPct val="110000"/>
-              </a:lnSpc>
-            </a:pPr>
-            <a:r>
-              <a:rPr sz="1500" b="1">
-                <a:solidFill>
-                  <a:srgbClr val="0E1B2A"/>
-                </a:solidFill>
-                <a:latin typeface="Avenir Next"/>
-              </a:rPr>
-              <a:t>Risks we monitor</a:t>
-            </a:r>
-          </a:p>
-        </p:txBody>
-      </p:sp>
-      <p:sp>
-        <p:nvSpPr>
           <p:cNvPr id="8" name="TextBox 7"/>
           <p:cNvSpPr txBox="1"/>
           <p:nvPr/>
         </p:nvSpPr>
         <p:spPr>
           <a:xfrm>
-            <a:off x="640080" y="2194560"/>
-            <a:ext cx="5212080" cy="4023360"/>
+            <a:off x="640080" y="2029968"/>
+            <a:ext cx="10908792" cy="4572000"/>
           </a:xfrm>
           <a:prstGeom prst="rect">
             <a:avLst/>
@@ -23113,7 +22732,7 @@
               </a:spcAft>
             </a:pPr>
             <a:r>
-              <a:rPr sz="1400" b="1">
+              <a:rPr sz="1600" b="1">
                 <a:solidFill>
                   <a:srgbClr val="14B8A6"/>
                 </a:solidFill>
@@ -23122,13 +22741,22 @@
               <a:t>▪  </a:t>
             </a:r>
             <a:r>
-              <a:rPr sz="1400" b="1">
+              <a:rPr sz="1600" b="1">
                 <a:solidFill>
                   <a:srgbClr val="1F2A37"/>
                 </a:solidFill>
                 <a:latin typeface="Avenir Next"/>
               </a:rPr>
-              <a:t>Crowding in factors</a:t>
+              <a:t>The full strategy is built and tested. </a:t>
+            </a:r>
+            <a:r>
+              <a:rPr sz="1600" b="0">
+                <a:solidFill>
+                  <a:srgbClr val="1F2A37"/>
+                </a:solidFill>
+                <a:latin typeface="Avenir Next"/>
+              </a:rPr>
+              <a:t>Data, factor scoring, portfolio construction, the options overlay, execution, and risk controls are all in place.</a:t>
             </a:r>
           </a:p>
           <a:p>
@@ -23141,22 +22769,31 @@
               </a:spcAft>
             </a:pPr>
             <a:r>
-              <a:rPr sz="1200" b="0">
-                <a:solidFill>
-                  <a:srgbClr val="6B7787"/>
-                </a:solidFill>
-                <a:latin typeface="Avenir Next"/>
-              </a:rPr>
-              <a:t>        ·  </a:t>
-            </a:r>
-            <a:r>
-              <a:rPr sz="1200" b="0">
-                <a:solidFill>
-                  <a:srgbClr val="6B7787"/>
-                </a:solidFill>
-                <a:latin typeface="Avenir Next"/>
-              </a:rPr>
-              <a:t>tracked by per-factor performance</a:t>
+              <a:rPr sz="1600" b="1">
+                <a:solidFill>
+                  <a:srgbClr val="14B8A6"/>
+                </a:solidFill>
+                <a:latin typeface="Avenir Next"/>
+              </a:rPr>
+              <a:t>▪  </a:t>
+            </a:r>
+            <a:r>
+              <a:rPr sz="1600" b="1">
+                <a:solidFill>
+                  <a:srgbClr val="1F2A37"/>
+                </a:solidFill>
+                <a:latin typeface="Avenir Next"/>
+              </a:rPr>
+              <a:t>It is running on a paper account. </a:t>
+            </a:r>
+            <a:r>
+              <a:rPr sz="1600" b="0">
+                <a:solidFill>
+                  <a:srgbClr val="1F2A37"/>
+                </a:solidFill>
+                <a:latin typeface="Avenir Next"/>
+              </a:rPr>
+              <a:t>The system trades a simulated account with live market data, monitored by the dashboard.</a:t>
             </a:r>
           </a:p>
           <a:p>
@@ -23169,7 +22806,7 @@
               </a:spcAft>
             </a:pPr>
             <a:r>
-              <a:rPr sz="1400" b="1">
+              <a:rPr sz="1600" b="1">
                 <a:solidFill>
                   <a:srgbClr val="14B8A6"/>
                 </a:solidFill>
@@ -23178,490 +22815,29 @@
               <a:t>▪  </a:t>
             </a:r>
             <a:r>
-              <a:rPr sz="1400" b="1">
-                <a:solidFill>
-                  <a:srgbClr val="1F2A37"/>
-                </a:solidFill>
-                <a:latin typeface="Avenir Next"/>
-              </a:rPr>
-              <a:t>Capped upside in strong rallies</a:t>
-            </a:r>
-          </a:p>
-          <a:p>
-            <a:pPr>
-              <a:lnSpc>
-                <a:spcPct val="112000"/>
-              </a:lnSpc>
-              <a:spcAft>
-                <a:spcPts val="1100"/>
-              </a:spcAft>
-            </a:pPr>
-            <a:r>
-              <a:rPr sz="1200" b="0">
-                <a:solidFill>
-                  <a:srgbClr val="6B7787"/>
-                </a:solidFill>
-                <a:latin typeface="Avenir Next"/>
-              </a:rPr>
-              <a:t>        ·  </a:t>
-            </a:r>
-            <a:r>
-              <a:rPr sz="1200" b="0">
-                <a:solidFill>
-                  <a:srgbClr val="6B7787"/>
-                </a:solidFill>
-                <a:latin typeface="Avenir Next"/>
-              </a:rPr>
-              <a:t>the deliberate cost of the overlay</a:t>
-            </a:r>
-          </a:p>
-          <a:p>
-            <a:pPr>
-              <a:lnSpc>
-                <a:spcPct val="112000"/>
-              </a:lnSpc>
-              <a:spcAft>
-                <a:spcPts val="1100"/>
-              </a:spcAft>
-            </a:pPr>
-            <a:r>
-              <a:rPr sz="1400" b="1">
-                <a:solidFill>
-                  <a:srgbClr val="14B8A6"/>
-                </a:solidFill>
-                <a:latin typeface="Avenir Next"/>
-              </a:rPr>
-              <a:t>▪  </a:t>
-            </a:r>
-            <a:r>
-              <a:rPr sz="1400" b="1">
-                <a:solidFill>
-                  <a:srgbClr val="1F2A37"/>
-                </a:solidFill>
-                <a:latin typeface="Avenir Next"/>
-              </a:rPr>
-              <a:t>Data-source reliability</a:t>
-            </a:r>
-          </a:p>
-          <a:p>
-            <a:pPr>
-              <a:lnSpc>
-                <a:spcPct val="112000"/>
-              </a:lnSpc>
-              <a:spcAft>
-                <a:spcPts val="1100"/>
-              </a:spcAft>
-            </a:pPr>
-            <a:r>
-              <a:rPr sz="1200" b="0">
-                <a:solidFill>
-                  <a:srgbClr val="6B7787"/>
-                </a:solidFill>
-                <a:latin typeface="Avenir Next"/>
-              </a:rPr>
-              <a:t>        ·  </a:t>
-            </a:r>
-            <a:r>
-              <a:rPr sz="1200" b="0">
-                <a:solidFill>
-                  <a:srgbClr val="6B7787"/>
-                </a:solidFill>
-                <a:latin typeface="Avenir Next"/>
-              </a:rPr>
-              <a:t>clean universe, reconciled each run</a:t>
-            </a:r>
-          </a:p>
-          <a:p>
-            <a:pPr>
-              <a:lnSpc>
-                <a:spcPct val="112000"/>
-              </a:lnSpc>
-              <a:spcAft>
-                <a:spcPts val="1100"/>
-              </a:spcAft>
-            </a:pPr>
-            <a:r>
-              <a:rPr sz="1400" b="1">
-                <a:solidFill>
-                  <a:srgbClr val="14B8A6"/>
-                </a:solidFill>
-                <a:latin typeface="Avenir Next"/>
-              </a:rPr>
-              <a:t>▪  </a:t>
-            </a:r>
-            <a:r>
-              <a:rPr sz="1400" b="1">
-                <a:solidFill>
-                  <a:srgbClr val="1F2A37"/>
-                </a:solidFill>
-                <a:latin typeface="Avenir Next"/>
-              </a:rPr>
-              <a:t>The gap from test to live</a:t>
-            </a:r>
-          </a:p>
-          <a:p>
-            <a:pPr>
-              <a:lnSpc>
-                <a:spcPct val="112000"/>
-              </a:lnSpc>
-              <a:spcAft>
-                <a:spcPts val="1100"/>
-              </a:spcAft>
-            </a:pPr>
-            <a:r>
-              <a:rPr sz="1200" b="0">
-                <a:solidFill>
-                  <a:srgbClr val="6B7787"/>
-                </a:solidFill>
-                <a:latin typeface="Avenir Next"/>
-              </a:rPr>
-              <a:t>        ·  </a:t>
-            </a:r>
-            <a:r>
-              <a:rPr sz="1200" b="0">
-                <a:solidFill>
-                  <a:srgbClr val="6B7787"/>
-                </a:solidFill>
-                <a:latin typeface="Avenir Next"/>
-              </a:rPr>
-              <a:t>what paper trading is there to close</a:t>
-            </a:r>
-          </a:p>
-        </p:txBody>
-      </p:sp>
-      <p:sp>
-        <p:nvSpPr>
-          <p:cNvPr id="9" name="Rectangle 8"/>
-          <p:cNvSpPr/>
-          <p:nvPr/>
-        </p:nvSpPr>
-        <p:spPr>
-          <a:xfrm>
-            <a:off x="6089904" y="1737360"/>
-            <a:ext cx="15240" cy="4206240"/>
-          </a:xfrm>
-          <a:prstGeom prst="rect">
-            <a:avLst/>
-          </a:prstGeom>
-          <a:solidFill>
-            <a:srgbClr val="E3E8EE"/>
-          </a:solidFill>
-          <a:ln>
-            <a:noFill/>
-          </a:ln>
-          <a:effectLst/>
-        </p:spPr>
-        <p:style>
-          <a:lnRef idx="1">
-            <a:schemeClr val="accent1"/>
-          </a:lnRef>
-          <a:fillRef idx="3">
-            <a:schemeClr val="accent1"/>
-          </a:fillRef>
-          <a:effectRef idx="2">
-            <a:schemeClr val="accent1"/>
-          </a:effectRef>
-          <a:fontRef idx="minor">
-            <a:schemeClr val="lt1"/>
-          </a:fontRef>
-        </p:style>
-        <p:txBody>
-          <a:bodyPr rtlCol="0" anchor="ctr"/>
-          <a:lstStyle/>
-          <a:p>
-            <a:pPr algn="ctr"/>
-          </a:p>
-        </p:txBody>
-      </p:sp>
-      <p:sp>
-        <p:nvSpPr>
-          <p:cNvPr id="10" name="TextBox 9"/>
-          <p:cNvSpPr txBox="1"/>
-          <p:nvPr/>
-        </p:nvSpPr>
-        <p:spPr>
-          <a:xfrm>
-            <a:off x="6355080" y="1691640"/>
-            <a:ext cx="5212080" cy="365760"/>
-          </a:xfrm>
-          <a:prstGeom prst="rect">
-            <a:avLst/>
-          </a:prstGeom>
-          <a:noFill/>
-        </p:spPr>
-        <p:txBody>
-          <a:bodyPr wrap="square" anchor="t" lIns="0" rIns="0" tIns="0" bIns="0">
-            <a:spAutoFit/>
-          </a:bodyPr>
-          <a:lstStyle/>
-          <a:p>
-            <a:pPr algn="l">
-              <a:lnSpc>
-                <a:spcPct val="110000"/>
-              </a:lnSpc>
-            </a:pPr>
-            <a:r>
-              <a:rPr sz="1500" b="1">
+              <a:rPr sz="1600" b="1">
+                <a:solidFill>
+                  <a:srgbClr val="0E8C7E"/>
+                </a:solidFill>
+                <a:latin typeface="Avenir Next"/>
+              </a:rPr>
+              <a:t>The remaining step is live-paper verification. </a:t>
+            </a:r>
+            <a:r>
+              <a:rPr sz="1600" b="0">
                 <a:solidFill>
                   <a:srgbClr val="0E1B2A"/>
                 </a:solidFill>
                 <a:latin typeface="Avenir Next"/>
               </a:rPr>
-              <a:t>What comes next</a:t>
-            </a:r>
-          </a:p>
-        </p:txBody>
-      </p:sp>
-      <p:sp>
-        <p:nvSpPr>
-          <p:cNvPr id="11" name="TextBox 10"/>
-          <p:cNvSpPr txBox="1"/>
-          <p:nvPr/>
-        </p:nvSpPr>
-        <p:spPr>
-          <a:xfrm>
-            <a:off x="6355080" y="2194560"/>
-            <a:ext cx="5212080" cy="4023360"/>
-          </a:xfrm>
-          <a:prstGeom prst="rect">
-            <a:avLst/>
-          </a:prstGeom>
-          <a:noFill/>
-        </p:spPr>
-        <p:txBody>
-          <a:bodyPr wrap="square" lIns="0" rIns="0" tIns="0" bIns="0">
-            <a:spAutoFit/>
-          </a:bodyPr>
-          <a:lstStyle/>
-          <a:p>
-            <a:pPr>
-              <a:lnSpc>
-                <a:spcPct val="112000"/>
-              </a:lnSpc>
-              <a:spcAft>
-                <a:spcPts val="1100"/>
-              </a:spcAft>
-            </a:pPr>
-            <a:r>
-              <a:rPr sz="1400" b="1">
-                <a:solidFill>
-                  <a:srgbClr val="14B8A6"/>
-                </a:solidFill>
-                <a:latin typeface="Avenir Next"/>
-              </a:rPr>
-              <a:t>▪  </a:t>
-            </a:r>
-            <a:r>
-              <a:rPr sz="1400" b="1">
-                <a:solidFill>
-                  <a:srgbClr val="1F2A37"/>
-                </a:solidFill>
-                <a:latin typeface="Avenir Next"/>
-              </a:rPr>
-              <a:t>Live-paper verification</a:t>
-            </a:r>
-          </a:p>
-          <a:p>
-            <a:pPr>
-              <a:lnSpc>
-                <a:spcPct val="112000"/>
-              </a:lnSpc>
-              <a:spcAft>
-                <a:spcPts val="1100"/>
-              </a:spcAft>
-            </a:pPr>
-            <a:r>
-              <a:rPr sz="1200" b="0">
-                <a:solidFill>
-                  <a:srgbClr val="6B7787"/>
-                </a:solidFill>
-                <a:latin typeface="Avenir Next"/>
-              </a:rPr>
-              <a:t>        ·  </a:t>
-            </a:r>
-            <a:r>
-              <a:rPr sz="1200" b="0">
-                <a:solidFill>
-                  <a:srgbClr val="6B7787"/>
-                </a:solidFill>
-                <a:latin typeface="Avenir Next"/>
-              </a:rPr>
-              <a:t>the immediate milestone</a:t>
-            </a:r>
-          </a:p>
-          <a:p>
-            <a:pPr>
-              <a:lnSpc>
-                <a:spcPct val="112000"/>
-              </a:lnSpc>
-              <a:spcAft>
-                <a:spcPts val="1100"/>
-              </a:spcAft>
-            </a:pPr>
-            <a:r>
-              <a:rPr sz="1400" b="1">
-                <a:solidFill>
-                  <a:srgbClr val="14B8A6"/>
-                </a:solidFill>
-                <a:latin typeface="Avenir Next"/>
-              </a:rPr>
-              <a:t>▪  </a:t>
-            </a:r>
-            <a:r>
-              <a:rPr sz="1400" b="1">
-                <a:solidFill>
-                  <a:srgbClr val="1F2A37"/>
-                </a:solidFill>
-                <a:latin typeface="Avenir Next"/>
-              </a:rPr>
-              <a:t>Refine factor weights</a:t>
-            </a:r>
-          </a:p>
-          <a:p>
-            <a:pPr>
-              <a:lnSpc>
-                <a:spcPct val="112000"/>
-              </a:lnSpc>
-              <a:spcAft>
-                <a:spcPts val="1100"/>
-              </a:spcAft>
-            </a:pPr>
-            <a:r>
-              <a:rPr sz="1200" b="0">
-                <a:solidFill>
-                  <a:srgbClr val="6B7787"/>
-                </a:solidFill>
-                <a:latin typeface="Avenir Next"/>
-              </a:rPr>
-              <a:t>        ·  </a:t>
-            </a:r>
-            <a:r>
-              <a:rPr sz="1200" b="0">
-                <a:solidFill>
-                  <a:srgbClr val="6B7787"/>
-                </a:solidFill>
-                <a:latin typeface="Avenir Next"/>
-              </a:rPr>
-              <a:t>after more live evidence</a:t>
-            </a:r>
-          </a:p>
-          <a:p>
-            <a:pPr>
-              <a:lnSpc>
-                <a:spcPct val="112000"/>
-              </a:lnSpc>
-              <a:spcAft>
-                <a:spcPts val="1100"/>
-              </a:spcAft>
-            </a:pPr>
-            <a:r>
-              <a:rPr sz="1400" b="1">
-                <a:solidFill>
-                  <a:srgbClr val="14B8A6"/>
-                </a:solidFill>
-                <a:latin typeface="Avenir Next"/>
-              </a:rPr>
-              <a:t>▪  </a:t>
-            </a:r>
-            <a:r>
-              <a:rPr sz="1400" b="1">
-                <a:solidFill>
-                  <a:srgbClr val="1F2A37"/>
-                </a:solidFill>
-                <a:latin typeface="Avenir Next"/>
-              </a:rPr>
-              <a:t>Broaden the income overlay</a:t>
-            </a:r>
-          </a:p>
-          <a:p>
-            <a:pPr>
-              <a:lnSpc>
-                <a:spcPct val="112000"/>
-              </a:lnSpc>
-              <a:spcAft>
-                <a:spcPts val="1100"/>
-              </a:spcAft>
-            </a:pPr>
-            <a:r>
-              <a:rPr sz="1200" b="0">
-                <a:solidFill>
-                  <a:srgbClr val="6B7787"/>
-                </a:solidFill>
-                <a:latin typeface="Avenir Next"/>
-              </a:rPr>
-              <a:t>        ·  </a:t>
-            </a:r>
-            <a:r>
-              <a:rPr sz="1200" b="0">
-                <a:solidFill>
-                  <a:srgbClr val="6B7787"/>
-                </a:solidFill>
-                <a:latin typeface="Avenir Next"/>
-              </a:rPr>
-              <a:t>more coverage, additional option strategies</a:t>
-            </a:r>
-          </a:p>
-          <a:p>
-            <a:pPr>
-              <a:lnSpc>
-                <a:spcPct val="112000"/>
-              </a:lnSpc>
-              <a:spcAft>
-                <a:spcPts val="1100"/>
-              </a:spcAft>
-            </a:pPr>
-            <a:r>
-              <a:rPr sz="1400" b="1">
-                <a:solidFill>
-                  <a:srgbClr val="14B8A6"/>
-                </a:solidFill>
-                <a:latin typeface="Avenir Next"/>
-              </a:rPr>
-              <a:t>▪  </a:t>
-            </a:r>
-            <a:r>
-              <a:rPr sz="1400" b="1">
-                <a:solidFill>
-                  <a:srgbClr val="1F2A37"/>
-                </a:solidFill>
-                <a:latin typeface="Avenir Next"/>
-              </a:rPr>
-              <a:t>Define the go-live criteria</a:t>
-            </a:r>
-          </a:p>
-          <a:p>
-            <a:pPr>
-              <a:lnSpc>
-                <a:spcPct val="112000"/>
-              </a:lnSpc>
-              <a:spcAft>
-                <a:spcPts val="1100"/>
-              </a:spcAft>
-            </a:pPr>
-            <a:r>
-              <a:rPr sz="1200" b="0">
-                <a:solidFill>
-                  <a:srgbClr val="6B7787"/>
-                </a:solidFill>
-                <a:latin typeface="Avenir Next"/>
-              </a:rPr>
-              <a:t>        ·  </a:t>
-            </a:r>
-            <a:r>
-              <a:rPr sz="1200" b="0">
-                <a:solidFill>
-                  <a:srgbClr val="6B7787"/>
-                </a:solidFill>
-                <a:latin typeface="Avenir Next"/>
-              </a:rPr>
-              <a:t>before any real capital is committed</a:t>
-            </a:r>
-          </a:p>
-        </p:txBody>
-      </p:sp>
-      <p:sp>
-        <p:nvSpPr>
-          <p:cNvPr id="12" name="TextBox 11"/>
+              <a:t>Confirm the full strategy fills, prices, and behaves correctly on the real account before any discussion of live capital.</a:t>
+            </a:r>
+          </a:p>
+        </p:txBody>
+      </p:sp>
+      <p:sp>
+        <p:nvSpPr>
+          <p:cNvPr id="9" name="TextBox 8"/>
           <p:cNvSpPr txBox="1"/>
           <p:nvPr/>
         </p:nvSpPr>
@@ -23700,7 +22876,7 @@
       </p:sp>
       <p:sp>
         <p:nvSpPr>
-          <p:cNvPr id="13" name="TextBox 12"/>
+          <p:cNvPr id="10" name="TextBox 9"/>
           <p:cNvSpPr txBox="1"/>
           <p:nvPr/>
         </p:nvSpPr>
@@ -23770,7 +22946,7 @@
             <a:avLst/>
           </a:prstGeom>
           <a:solidFill>
-            <a:srgbClr val="0E1B2A"/>
+            <a:srgbClr val="FFFFFF"/>
           </a:solidFill>
           <a:ln>
             <a:noFill/>
@@ -23807,8 +22983,8 @@
         </p:nvSpPr>
         <p:spPr>
           <a:xfrm>
-            <a:off x="0" y="0"/>
-            <a:ext cx="201168" cy="6858000"/>
+            <a:off x="640080" y="566928"/>
+            <a:ext cx="310896" cy="100584"/>
           </a:xfrm>
           <a:prstGeom prst="rect">
             <a:avLst/>
@@ -23851,8 +23027,8 @@
         </p:nvSpPr>
         <p:spPr>
           <a:xfrm>
-            <a:off x="822960" y="777240"/>
-            <a:ext cx="10058400" cy="365760"/>
+            <a:off x="1024128" y="502920"/>
+            <a:ext cx="10058400" cy="274320"/>
           </a:xfrm>
           <a:prstGeom prst="rect">
             <a:avLst/>
@@ -23871,33 +23047,72 @@
               </a:lnSpc>
             </a:pPr>
             <a:r>
-              <a:rPr sz="1300" b="1">
-                <a:solidFill>
-                  <a:srgbClr val="14B8A6"/>
-                </a:solidFill>
-                <a:latin typeface="Avenir Next"/>
-              </a:rPr>
-              <a:t>IN SUMMARY</a:t>
-            </a:r>
-          </a:p>
-        </p:txBody>
-      </p:sp>
-      <p:sp>
-        <p:nvSpPr>
-          <p:cNvPr id="5" name="Rectangle 4"/>
+              <a:rPr sz="1200" b="1">
+                <a:solidFill>
+                  <a:srgbClr val="0E8C7E"/>
+                </a:solidFill>
+                <a:latin typeface="Avenir Next"/>
+              </a:rPr>
+              <a:t>9 · STATUS AND OUTLOOK</a:t>
+            </a:r>
+          </a:p>
+        </p:txBody>
+      </p:sp>
+      <p:sp>
+        <p:nvSpPr>
+          <p:cNvPr id="5" name="TextBox 4"/>
+          <p:cNvSpPr txBox="1"/>
+          <p:nvPr/>
+        </p:nvSpPr>
+        <p:spPr>
+          <a:xfrm>
+            <a:off x="640080" y="841248"/>
+            <a:ext cx="10972800" cy="640080"/>
+          </a:xfrm>
+          <a:prstGeom prst="rect">
+            <a:avLst/>
+          </a:prstGeom>
+          <a:noFill/>
+        </p:spPr>
+        <p:txBody>
+          <a:bodyPr wrap="square" anchor="t" lIns="0" rIns="0" tIns="0" bIns="0">
+            <a:spAutoFit/>
+          </a:bodyPr>
+          <a:lstStyle/>
+          <a:p>
+            <a:pPr algn="l">
+              <a:lnSpc>
+                <a:spcPct val="110000"/>
+              </a:lnSpc>
+            </a:pPr>
+            <a:r>
+              <a:rPr sz="2600" b="1">
+                <a:solidFill>
+                  <a:srgbClr val="0E1B2A"/>
+                </a:solidFill>
+                <a:latin typeface="Avenir Next"/>
+              </a:rPr>
+              <a:t>Risks and what comes next</a:t>
+            </a:r>
+          </a:p>
+        </p:txBody>
+      </p:sp>
+      <p:sp>
+        <p:nvSpPr>
+          <p:cNvPr id="6" name="Rectangle 5"/>
           <p:cNvSpPr/>
           <p:nvPr/>
         </p:nvSpPr>
         <p:spPr>
           <a:xfrm>
-            <a:off x="822960" y="1463040"/>
-            <a:ext cx="118872" cy="640080"/>
+            <a:off x="640080" y="1463040"/>
+            <a:ext cx="10908792" cy="15240"/>
           </a:xfrm>
           <a:prstGeom prst="rect">
             <a:avLst/>
           </a:prstGeom>
           <a:solidFill>
-            <a:srgbClr val="14B8A6"/>
+            <a:srgbClr val="E3E8EE"/>
           </a:solidFill>
           <a:ln>
             <a:noFill/>
@@ -23928,14 +23143,14 @@
       </p:sp>
       <p:sp>
         <p:nvSpPr>
-          <p:cNvPr id="6" name="TextBox 5"/>
-          <p:cNvSpPr txBox="1"/>
-          <p:nvPr/>
-        </p:nvSpPr>
-        <p:spPr>
-          <a:xfrm>
-            <a:off x="1143000" y="1417320"/>
-            <a:ext cx="10241280" cy="365760"/>
+          <p:cNvPr id="7" name="TextBox 6"/>
+          <p:cNvSpPr txBox="1"/>
+          <p:nvPr/>
+        </p:nvSpPr>
+        <p:spPr>
+          <a:xfrm>
+            <a:off x="640080" y="1691640"/>
+            <a:ext cx="5212080" cy="365760"/>
           </a:xfrm>
           <a:prstGeom prst="rect">
             <a:avLst/>
@@ -23954,72 +23169,280 @@
               </a:lnSpc>
             </a:pPr>
             <a:r>
-              <a:rPr sz="1800" b="1">
-                <a:solidFill>
-                  <a:srgbClr val="FFFFFF"/>
-                </a:solidFill>
-                <a:latin typeface="Avenir Next"/>
-              </a:rPr>
-              <a:t>A disciplined factor portfolio</a:t>
-            </a:r>
-          </a:p>
-        </p:txBody>
-      </p:sp>
-      <p:sp>
-        <p:nvSpPr>
-          <p:cNvPr id="7" name="TextBox 6"/>
-          <p:cNvSpPr txBox="1"/>
-          <p:nvPr/>
-        </p:nvSpPr>
-        <p:spPr>
-          <a:xfrm>
-            <a:off x="1143000" y="1801368"/>
-            <a:ext cx="10241280" cy="502920"/>
-          </a:xfrm>
-          <a:prstGeom prst="rect">
-            <a:avLst/>
-          </a:prstGeom>
-          <a:noFill/>
-        </p:spPr>
-        <p:txBody>
-          <a:bodyPr wrap="square" anchor="t" lIns="0" rIns="0" tIns="0" bIns="0">
-            <a:spAutoFit/>
-          </a:bodyPr>
-          <a:lstStyle/>
-          <a:p>
-            <a:pPr algn="l">
-              <a:lnSpc>
-                <a:spcPct val="105000"/>
-              </a:lnSpc>
-            </a:pPr>
-            <a:r>
-              <a:rPr sz="1300" b="0">
-                <a:solidFill>
-                  <a:srgbClr val="A9B7C4"/>
-                </a:solidFill>
-                <a:latin typeface="Avenir Next"/>
-              </a:rPr>
-              <a:t>Four proven traits, computed transparently and weighted equally.</a:t>
-            </a:r>
-          </a:p>
-        </p:txBody>
-      </p:sp>
-      <p:sp>
-        <p:nvSpPr>
-          <p:cNvPr id="8" name="Rectangle 7"/>
+              <a:rPr sz="1500" b="1">
+                <a:solidFill>
+                  <a:srgbClr val="0E1B2A"/>
+                </a:solidFill>
+                <a:latin typeface="Avenir Next"/>
+              </a:rPr>
+              <a:t>Risks we monitor</a:t>
+            </a:r>
+          </a:p>
+        </p:txBody>
+      </p:sp>
+      <p:sp>
+        <p:nvSpPr>
+          <p:cNvPr id="8" name="TextBox 7"/>
+          <p:cNvSpPr txBox="1"/>
+          <p:nvPr/>
+        </p:nvSpPr>
+        <p:spPr>
+          <a:xfrm>
+            <a:off x="640080" y="2194560"/>
+            <a:ext cx="5212080" cy="4023360"/>
+          </a:xfrm>
+          <a:prstGeom prst="rect">
+            <a:avLst/>
+          </a:prstGeom>
+          <a:noFill/>
+        </p:spPr>
+        <p:txBody>
+          <a:bodyPr wrap="square" lIns="0" rIns="0" tIns="0" bIns="0">
+            <a:spAutoFit/>
+          </a:bodyPr>
+          <a:lstStyle/>
+          <a:p>
+            <a:pPr>
+              <a:lnSpc>
+                <a:spcPct val="112000"/>
+              </a:lnSpc>
+              <a:spcAft>
+                <a:spcPts val="1100"/>
+              </a:spcAft>
+            </a:pPr>
+            <a:r>
+              <a:rPr sz="1400" b="1">
+                <a:solidFill>
+                  <a:srgbClr val="14B8A6"/>
+                </a:solidFill>
+                <a:latin typeface="Avenir Next"/>
+              </a:rPr>
+              <a:t>▪  </a:t>
+            </a:r>
+            <a:r>
+              <a:rPr sz="1400" b="1">
+                <a:solidFill>
+                  <a:srgbClr val="1F2A37"/>
+                </a:solidFill>
+                <a:latin typeface="Avenir Next"/>
+              </a:rPr>
+              <a:t>Crowding in factors</a:t>
+            </a:r>
+          </a:p>
+          <a:p>
+            <a:pPr>
+              <a:lnSpc>
+                <a:spcPct val="112000"/>
+              </a:lnSpc>
+              <a:spcAft>
+                <a:spcPts val="1100"/>
+              </a:spcAft>
+            </a:pPr>
+            <a:r>
+              <a:rPr sz="1200" b="0">
+                <a:solidFill>
+                  <a:srgbClr val="6B7787"/>
+                </a:solidFill>
+                <a:latin typeface="Avenir Next"/>
+              </a:rPr>
+              <a:t>        ·  </a:t>
+            </a:r>
+            <a:r>
+              <a:rPr sz="1200" b="0">
+                <a:solidFill>
+                  <a:srgbClr val="6B7787"/>
+                </a:solidFill>
+                <a:latin typeface="Avenir Next"/>
+              </a:rPr>
+              <a:t>tracked by per-factor performance</a:t>
+            </a:r>
+          </a:p>
+          <a:p>
+            <a:pPr>
+              <a:lnSpc>
+                <a:spcPct val="112000"/>
+              </a:lnSpc>
+              <a:spcAft>
+                <a:spcPts val="1100"/>
+              </a:spcAft>
+            </a:pPr>
+            <a:r>
+              <a:rPr sz="1400" b="1">
+                <a:solidFill>
+                  <a:srgbClr val="14B8A6"/>
+                </a:solidFill>
+                <a:latin typeface="Avenir Next"/>
+              </a:rPr>
+              <a:t>▪  </a:t>
+            </a:r>
+            <a:r>
+              <a:rPr sz="1400" b="1">
+                <a:solidFill>
+                  <a:srgbClr val="1F2A37"/>
+                </a:solidFill>
+                <a:latin typeface="Avenir Next"/>
+              </a:rPr>
+              <a:t>Capped upside in strong rallies</a:t>
+            </a:r>
+          </a:p>
+          <a:p>
+            <a:pPr>
+              <a:lnSpc>
+                <a:spcPct val="112000"/>
+              </a:lnSpc>
+              <a:spcAft>
+                <a:spcPts val="1100"/>
+              </a:spcAft>
+            </a:pPr>
+            <a:r>
+              <a:rPr sz="1200" b="0">
+                <a:solidFill>
+                  <a:srgbClr val="6B7787"/>
+                </a:solidFill>
+                <a:latin typeface="Avenir Next"/>
+              </a:rPr>
+              <a:t>        ·  </a:t>
+            </a:r>
+            <a:r>
+              <a:rPr sz="1200" b="0">
+                <a:solidFill>
+                  <a:srgbClr val="6B7787"/>
+                </a:solidFill>
+                <a:latin typeface="Avenir Next"/>
+              </a:rPr>
+              <a:t>the deliberate cost of the overlay</a:t>
+            </a:r>
+          </a:p>
+          <a:p>
+            <a:pPr>
+              <a:lnSpc>
+                <a:spcPct val="112000"/>
+              </a:lnSpc>
+              <a:spcAft>
+                <a:spcPts val="1100"/>
+              </a:spcAft>
+            </a:pPr>
+            <a:r>
+              <a:rPr sz="1400" b="1">
+                <a:solidFill>
+                  <a:srgbClr val="14B8A6"/>
+                </a:solidFill>
+                <a:latin typeface="Avenir Next"/>
+              </a:rPr>
+              <a:t>▪  </a:t>
+            </a:r>
+            <a:r>
+              <a:rPr sz="1400" b="1">
+                <a:solidFill>
+                  <a:srgbClr val="1F2A37"/>
+                </a:solidFill>
+                <a:latin typeface="Avenir Next"/>
+              </a:rPr>
+              <a:t>Data-source reliability</a:t>
+            </a:r>
+          </a:p>
+          <a:p>
+            <a:pPr>
+              <a:lnSpc>
+                <a:spcPct val="112000"/>
+              </a:lnSpc>
+              <a:spcAft>
+                <a:spcPts val="1100"/>
+              </a:spcAft>
+            </a:pPr>
+            <a:r>
+              <a:rPr sz="1200" b="0">
+                <a:solidFill>
+                  <a:srgbClr val="6B7787"/>
+                </a:solidFill>
+                <a:latin typeface="Avenir Next"/>
+              </a:rPr>
+              <a:t>        ·  </a:t>
+            </a:r>
+            <a:r>
+              <a:rPr sz="1200" b="0">
+                <a:solidFill>
+                  <a:srgbClr val="6B7787"/>
+                </a:solidFill>
+                <a:latin typeface="Avenir Next"/>
+              </a:rPr>
+              <a:t>clean universe, reconciled each run</a:t>
+            </a:r>
+          </a:p>
+          <a:p>
+            <a:pPr>
+              <a:lnSpc>
+                <a:spcPct val="112000"/>
+              </a:lnSpc>
+              <a:spcAft>
+                <a:spcPts val="1100"/>
+              </a:spcAft>
+            </a:pPr>
+            <a:r>
+              <a:rPr sz="1400" b="1">
+                <a:solidFill>
+                  <a:srgbClr val="14B8A6"/>
+                </a:solidFill>
+                <a:latin typeface="Avenir Next"/>
+              </a:rPr>
+              <a:t>▪  </a:t>
+            </a:r>
+            <a:r>
+              <a:rPr sz="1400" b="1">
+                <a:solidFill>
+                  <a:srgbClr val="1F2A37"/>
+                </a:solidFill>
+                <a:latin typeface="Avenir Next"/>
+              </a:rPr>
+              <a:t>The gap from test to live</a:t>
+            </a:r>
+          </a:p>
+          <a:p>
+            <a:pPr>
+              <a:lnSpc>
+                <a:spcPct val="112000"/>
+              </a:lnSpc>
+              <a:spcAft>
+                <a:spcPts val="1100"/>
+              </a:spcAft>
+            </a:pPr>
+            <a:r>
+              <a:rPr sz="1200" b="0">
+                <a:solidFill>
+                  <a:srgbClr val="6B7787"/>
+                </a:solidFill>
+                <a:latin typeface="Avenir Next"/>
+              </a:rPr>
+              <a:t>        ·  </a:t>
+            </a:r>
+            <a:r>
+              <a:rPr sz="1200" b="0">
+                <a:solidFill>
+                  <a:srgbClr val="6B7787"/>
+                </a:solidFill>
+                <a:latin typeface="Avenir Next"/>
+              </a:rPr>
+              <a:t>what paper trading is there to close</a:t>
+            </a:r>
+          </a:p>
+        </p:txBody>
+      </p:sp>
+      <p:sp>
+        <p:nvSpPr>
+          <p:cNvPr id="9" name="Rectangle 8"/>
           <p:cNvSpPr/>
           <p:nvPr/>
         </p:nvSpPr>
         <p:spPr>
           <a:xfrm>
-            <a:off x="822960" y="2395728"/>
-            <a:ext cx="118872" cy="640080"/>
+            <a:off x="6089904" y="1737360"/>
+            <a:ext cx="15240" cy="4206240"/>
           </a:xfrm>
           <a:prstGeom prst="rect">
             <a:avLst/>
           </a:prstGeom>
           <a:solidFill>
-            <a:srgbClr val="14B8A6"/>
+            <a:srgbClr val="E3E8EE"/>
           </a:solidFill>
           <a:ln>
             <a:noFill/>
@@ -24050,14 +23473,14 @@
       </p:sp>
       <p:sp>
         <p:nvSpPr>
-          <p:cNvPr id="9" name="TextBox 8"/>
-          <p:cNvSpPr txBox="1"/>
-          <p:nvPr/>
-        </p:nvSpPr>
-        <p:spPr>
-          <a:xfrm>
-            <a:off x="1143000" y="2350008"/>
-            <a:ext cx="10241280" cy="365760"/>
+          <p:cNvPr id="10" name="TextBox 9"/>
+          <p:cNvSpPr txBox="1"/>
+          <p:nvPr/>
+        </p:nvSpPr>
+        <p:spPr>
+          <a:xfrm>
+            <a:off x="6355080" y="1691640"/>
+            <a:ext cx="5212080" cy="365760"/>
           </a:xfrm>
           <a:prstGeom prst="rect">
             <a:avLst/>
@@ -24076,425 +23499,267 @@
               </a:lnSpc>
             </a:pPr>
             <a:r>
-              <a:rPr sz="1800" b="1">
-                <a:solidFill>
-                  <a:srgbClr val="FFFFFF"/>
-                </a:solidFill>
-                <a:latin typeface="Avenir Next"/>
-              </a:rPr>
-              <a:t>An income overlay that lowers risk</a:t>
-            </a:r>
-          </a:p>
-        </p:txBody>
-      </p:sp>
-      <p:sp>
-        <p:nvSpPr>
-          <p:cNvPr id="10" name="TextBox 9"/>
-          <p:cNvSpPr txBox="1"/>
-          <p:nvPr/>
-        </p:nvSpPr>
-        <p:spPr>
-          <a:xfrm>
-            <a:off x="1143000" y="2734056"/>
-            <a:ext cx="10241280" cy="502920"/>
-          </a:xfrm>
-          <a:prstGeom prst="rect">
-            <a:avLst/>
-          </a:prstGeom>
-          <a:noFill/>
-        </p:spPr>
-        <p:txBody>
-          <a:bodyPr wrap="square" anchor="t" lIns="0" rIns="0" tIns="0" bIns="0">
-            <a:spAutoFit/>
-          </a:bodyPr>
-          <a:lstStyle/>
-          <a:p>
-            <a:pPr algn="l">
-              <a:lnSpc>
-                <a:spcPct val="105000"/>
-              </a:lnSpc>
-            </a:pPr>
-            <a:r>
-              <a:rPr sz="1300" b="0">
-                <a:solidFill>
-                  <a:srgbClr val="A9B7C4"/>
-                </a:solidFill>
-                <a:latin typeface="Avenir Next"/>
-              </a:rPr>
-              <a:t>Covered calls harvest a persistent premium and smooth the ride.</a:t>
-            </a:r>
-          </a:p>
-        </p:txBody>
-      </p:sp>
-      <p:sp>
-        <p:nvSpPr>
-          <p:cNvPr id="11" name="Rectangle 10"/>
-          <p:cNvSpPr/>
-          <p:nvPr/>
-        </p:nvSpPr>
-        <p:spPr>
-          <a:xfrm>
-            <a:off x="822960" y="3328415"/>
-            <a:ext cx="118872" cy="640080"/>
-          </a:xfrm>
-          <a:prstGeom prst="rect">
-            <a:avLst/>
-          </a:prstGeom>
-          <a:solidFill>
-            <a:srgbClr val="14B8A6"/>
-          </a:solidFill>
-          <a:ln>
-            <a:noFill/>
-          </a:ln>
-          <a:effectLst/>
-        </p:spPr>
-        <p:style>
-          <a:lnRef idx="1">
-            <a:schemeClr val="accent1"/>
-          </a:lnRef>
-          <a:fillRef idx="3">
-            <a:schemeClr val="accent1"/>
-          </a:fillRef>
-          <a:effectRef idx="2">
-            <a:schemeClr val="accent1"/>
-          </a:effectRef>
-          <a:fontRef idx="minor">
-            <a:schemeClr val="lt1"/>
-          </a:fontRef>
-        </p:style>
-        <p:txBody>
-          <a:bodyPr rtlCol="0" anchor="ctr"/>
-          <a:lstStyle/>
-          <a:p>
-            <a:pPr algn="ctr"/>
+              <a:rPr sz="1500" b="1">
+                <a:solidFill>
+                  <a:srgbClr val="0E1B2A"/>
+                </a:solidFill>
+                <a:latin typeface="Avenir Next"/>
+              </a:rPr>
+              <a:t>What comes next</a:t>
+            </a:r>
+          </a:p>
+        </p:txBody>
+      </p:sp>
+      <p:sp>
+        <p:nvSpPr>
+          <p:cNvPr id="11" name="TextBox 10"/>
+          <p:cNvSpPr txBox="1"/>
+          <p:nvPr/>
+        </p:nvSpPr>
+        <p:spPr>
+          <a:xfrm>
+            <a:off x="6355080" y="2194560"/>
+            <a:ext cx="5212080" cy="4023360"/>
+          </a:xfrm>
+          <a:prstGeom prst="rect">
+            <a:avLst/>
+          </a:prstGeom>
+          <a:noFill/>
+        </p:spPr>
+        <p:txBody>
+          <a:bodyPr wrap="square" lIns="0" rIns="0" tIns="0" bIns="0">
+            <a:spAutoFit/>
+          </a:bodyPr>
+          <a:lstStyle/>
+          <a:p>
+            <a:pPr>
+              <a:lnSpc>
+                <a:spcPct val="112000"/>
+              </a:lnSpc>
+              <a:spcAft>
+                <a:spcPts val="1100"/>
+              </a:spcAft>
+            </a:pPr>
+            <a:r>
+              <a:rPr sz="1400" b="1">
+                <a:solidFill>
+                  <a:srgbClr val="14B8A6"/>
+                </a:solidFill>
+                <a:latin typeface="Avenir Next"/>
+              </a:rPr>
+              <a:t>▪  </a:t>
+            </a:r>
+            <a:r>
+              <a:rPr sz="1400" b="1">
+                <a:solidFill>
+                  <a:srgbClr val="1F2A37"/>
+                </a:solidFill>
+                <a:latin typeface="Avenir Next"/>
+              </a:rPr>
+              <a:t>Live-paper verification</a:t>
+            </a:r>
+          </a:p>
+          <a:p>
+            <a:pPr>
+              <a:lnSpc>
+                <a:spcPct val="112000"/>
+              </a:lnSpc>
+              <a:spcAft>
+                <a:spcPts val="1100"/>
+              </a:spcAft>
+            </a:pPr>
+            <a:r>
+              <a:rPr sz="1200" b="0">
+                <a:solidFill>
+                  <a:srgbClr val="6B7787"/>
+                </a:solidFill>
+                <a:latin typeface="Avenir Next"/>
+              </a:rPr>
+              <a:t>        ·  </a:t>
+            </a:r>
+            <a:r>
+              <a:rPr sz="1200" b="0">
+                <a:solidFill>
+                  <a:srgbClr val="6B7787"/>
+                </a:solidFill>
+                <a:latin typeface="Avenir Next"/>
+              </a:rPr>
+              <a:t>the immediate milestone</a:t>
+            </a:r>
+          </a:p>
+          <a:p>
+            <a:pPr>
+              <a:lnSpc>
+                <a:spcPct val="112000"/>
+              </a:lnSpc>
+              <a:spcAft>
+                <a:spcPts val="1100"/>
+              </a:spcAft>
+            </a:pPr>
+            <a:r>
+              <a:rPr sz="1400" b="1">
+                <a:solidFill>
+                  <a:srgbClr val="14B8A6"/>
+                </a:solidFill>
+                <a:latin typeface="Avenir Next"/>
+              </a:rPr>
+              <a:t>▪  </a:t>
+            </a:r>
+            <a:r>
+              <a:rPr sz="1400" b="1">
+                <a:solidFill>
+                  <a:srgbClr val="1F2A37"/>
+                </a:solidFill>
+                <a:latin typeface="Avenir Next"/>
+              </a:rPr>
+              <a:t>Refine factor weights</a:t>
+            </a:r>
+          </a:p>
+          <a:p>
+            <a:pPr>
+              <a:lnSpc>
+                <a:spcPct val="112000"/>
+              </a:lnSpc>
+              <a:spcAft>
+                <a:spcPts val="1100"/>
+              </a:spcAft>
+            </a:pPr>
+            <a:r>
+              <a:rPr sz="1200" b="0">
+                <a:solidFill>
+                  <a:srgbClr val="6B7787"/>
+                </a:solidFill>
+                <a:latin typeface="Avenir Next"/>
+              </a:rPr>
+              <a:t>        ·  </a:t>
+            </a:r>
+            <a:r>
+              <a:rPr sz="1200" b="0">
+                <a:solidFill>
+                  <a:srgbClr val="6B7787"/>
+                </a:solidFill>
+                <a:latin typeface="Avenir Next"/>
+              </a:rPr>
+              <a:t>after more live evidence</a:t>
+            </a:r>
+          </a:p>
+          <a:p>
+            <a:pPr>
+              <a:lnSpc>
+                <a:spcPct val="112000"/>
+              </a:lnSpc>
+              <a:spcAft>
+                <a:spcPts val="1100"/>
+              </a:spcAft>
+            </a:pPr>
+            <a:r>
+              <a:rPr sz="1400" b="1">
+                <a:solidFill>
+                  <a:srgbClr val="14B8A6"/>
+                </a:solidFill>
+                <a:latin typeface="Avenir Next"/>
+              </a:rPr>
+              <a:t>▪  </a:t>
+            </a:r>
+            <a:r>
+              <a:rPr sz="1400" b="1">
+                <a:solidFill>
+                  <a:srgbClr val="1F2A37"/>
+                </a:solidFill>
+                <a:latin typeface="Avenir Next"/>
+              </a:rPr>
+              <a:t>Broaden the income overlay</a:t>
+            </a:r>
+          </a:p>
+          <a:p>
+            <a:pPr>
+              <a:lnSpc>
+                <a:spcPct val="112000"/>
+              </a:lnSpc>
+              <a:spcAft>
+                <a:spcPts val="1100"/>
+              </a:spcAft>
+            </a:pPr>
+            <a:r>
+              <a:rPr sz="1200" b="0">
+                <a:solidFill>
+                  <a:srgbClr val="6B7787"/>
+                </a:solidFill>
+                <a:latin typeface="Avenir Next"/>
+              </a:rPr>
+              <a:t>        ·  </a:t>
+            </a:r>
+            <a:r>
+              <a:rPr sz="1200" b="0">
+                <a:solidFill>
+                  <a:srgbClr val="6B7787"/>
+                </a:solidFill>
+                <a:latin typeface="Avenir Next"/>
+              </a:rPr>
+              <a:t>more coverage, additional option strategies</a:t>
+            </a:r>
+          </a:p>
+          <a:p>
+            <a:pPr>
+              <a:lnSpc>
+                <a:spcPct val="112000"/>
+              </a:lnSpc>
+              <a:spcAft>
+                <a:spcPts val="1100"/>
+              </a:spcAft>
+            </a:pPr>
+            <a:r>
+              <a:rPr sz="1400" b="1">
+                <a:solidFill>
+                  <a:srgbClr val="14B8A6"/>
+                </a:solidFill>
+                <a:latin typeface="Avenir Next"/>
+              </a:rPr>
+              <a:t>▪  </a:t>
+            </a:r>
+            <a:r>
+              <a:rPr sz="1400" b="1">
+                <a:solidFill>
+                  <a:srgbClr val="1F2A37"/>
+                </a:solidFill>
+                <a:latin typeface="Avenir Next"/>
+              </a:rPr>
+              <a:t>Define the go-live criteria</a:t>
+            </a:r>
+          </a:p>
+          <a:p>
+            <a:pPr>
+              <a:lnSpc>
+                <a:spcPct val="112000"/>
+              </a:lnSpc>
+              <a:spcAft>
+                <a:spcPts val="1100"/>
+              </a:spcAft>
+            </a:pPr>
+            <a:r>
+              <a:rPr sz="1200" b="0">
+                <a:solidFill>
+                  <a:srgbClr val="6B7787"/>
+                </a:solidFill>
+                <a:latin typeface="Avenir Next"/>
+              </a:rPr>
+              <a:t>        ·  </a:t>
+            </a:r>
+            <a:r>
+              <a:rPr sz="1200" b="0">
+                <a:solidFill>
+                  <a:srgbClr val="6B7787"/>
+                </a:solidFill>
+                <a:latin typeface="Avenir Next"/>
+              </a:rPr>
+              <a:t>before any real capital is committed</a:t>
+            </a:r>
           </a:p>
         </p:txBody>
       </p:sp>
       <p:sp>
         <p:nvSpPr>
           <p:cNvPr id="12" name="TextBox 11"/>
-          <p:cNvSpPr txBox="1"/>
-          <p:nvPr/>
-        </p:nvSpPr>
-        <p:spPr>
-          <a:xfrm>
-            <a:off x="1143000" y="3282696"/>
-            <a:ext cx="10241280" cy="365760"/>
-          </a:xfrm>
-          <a:prstGeom prst="rect">
-            <a:avLst/>
-          </a:prstGeom>
-          <a:noFill/>
-        </p:spPr>
-        <p:txBody>
-          <a:bodyPr wrap="square" anchor="t" lIns="0" rIns="0" tIns="0" bIns="0">
-            <a:spAutoFit/>
-          </a:bodyPr>
-          <a:lstStyle/>
-          <a:p>
-            <a:pPr algn="l">
-              <a:lnSpc>
-                <a:spcPct val="110000"/>
-              </a:lnSpc>
-            </a:pPr>
-            <a:r>
-              <a:rPr sz="1800" b="1">
-                <a:solidFill>
-                  <a:srgbClr val="FFFFFF"/>
-                </a:solidFill>
-                <a:latin typeface="Avenir Next"/>
-              </a:rPr>
-              <a:t>Built for capital preservation</a:t>
-            </a:r>
-          </a:p>
-        </p:txBody>
-      </p:sp>
-      <p:sp>
-        <p:nvSpPr>
-          <p:cNvPr id="13" name="TextBox 12"/>
-          <p:cNvSpPr txBox="1"/>
-          <p:nvPr/>
-        </p:nvSpPr>
-        <p:spPr>
-          <a:xfrm>
-            <a:off x="1143000" y="3666744"/>
-            <a:ext cx="10241280" cy="502920"/>
-          </a:xfrm>
-          <a:prstGeom prst="rect">
-            <a:avLst/>
-          </a:prstGeom>
-          <a:noFill/>
-        </p:spPr>
-        <p:txBody>
-          <a:bodyPr wrap="square" anchor="t" lIns="0" rIns="0" tIns="0" bIns="0">
-            <a:spAutoFit/>
-          </a:bodyPr>
-          <a:lstStyle/>
-          <a:p>
-            <a:pPr algn="l">
-              <a:lnSpc>
-                <a:spcPct val="105000"/>
-              </a:lnSpc>
-            </a:pPr>
-            <a:r>
-              <a:rPr sz="1300" b="0">
-                <a:solidFill>
-                  <a:srgbClr val="A9B7C4"/>
-                </a:solidFill>
-                <a:latin typeface="Avenir Next"/>
-              </a:rPr>
-              <a:t>Firm diversification limits, a pre-trade risk check, and an emergency stop.</a:t>
-            </a:r>
-          </a:p>
-        </p:txBody>
-      </p:sp>
-      <p:sp>
-        <p:nvSpPr>
-          <p:cNvPr id="14" name="Rectangle 13"/>
-          <p:cNvSpPr/>
-          <p:nvPr/>
-        </p:nvSpPr>
-        <p:spPr>
-          <a:xfrm>
-            <a:off x="822960" y="4261104"/>
-            <a:ext cx="118872" cy="640080"/>
-          </a:xfrm>
-          <a:prstGeom prst="rect">
-            <a:avLst/>
-          </a:prstGeom>
-          <a:solidFill>
-            <a:srgbClr val="14B8A6"/>
-          </a:solidFill>
-          <a:ln>
-            <a:noFill/>
-          </a:ln>
-          <a:effectLst/>
-        </p:spPr>
-        <p:style>
-          <a:lnRef idx="1">
-            <a:schemeClr val="accent1"/>
-          </a:lnRef>
-          <a:fillRef idx="3">
-            <a:schemeClr val="accent1"/>
-          </a:fillRef>
-          <a:effectRef idx="2">
-            <a:schemeClr val="accent1"/>
-          </a:effectRef>
-          <a:fontRef idx="minor">
-            <a:schemeClr val="lt1"/>
-          </a:fontRef>
-        </p:style>
-        <p:txBody>
-          <a:bodyPr rtlCol="0" anchor="ctr"/>
-          <a:lstStyle/>
-          <a:p>
-            <a:pPr algn="ctr"/>
-          </a:p>
-        </p:txBody>
-      </p:sp>
-      <p:sp>
-        <p:nvSpPr>
-          <p:cNvPr id="15" name="TextBox 14"/>
-          <p:cNvSpPr txBox="1"/>
-          <p:nvPr/>
-        </p:nvSpPr>
-        <p:spPr>
-          <a:xfrm>
-            <a:off x="1143000" y="4215384"/>
-            <a:ext cx="10241280" cy="365760"/>
-          </a:xfrm>
-          <a:prstGeom prst="rect">
-            <a:avLst/>
-          </a:prstGeom>
-          <a:noFill/>
-        </p:spPr>
-        <p:txBody>
-          <a:bodyPr wrap="square" anchor="t" lIns="0" rIns="0" tIns="0" bIns="0">
-            <a:spAutoFit/>
-          </a:bodyPr>
-          <a:lstStyle/>
-          <a:p>
-            <a:pPr algn="l">
-              <a:lnSpc>
-                <a:spcPct val="110000"/>
-              </a:lnSpc>
-            </a:pPr>
-            <a:r>
-              <a:rPr sz="1800" b="1">
-                <a:solidFill>
-                  <a:srgbClr val="FFFFFF"/>
-                </a:solidFill>
-                <a:latin typeface="Avenir Next"/>
-              </a:rPr>
-              <a:t>Tested, and honest about its limits</a:t>
-            </a:r>
-          </a:p>
-        </p:txBody>
-      </p:sp>
-      <p:sp>
-        <p:nvSpPr>
-          <p:cNvPr id="16" name="TextBox 15"/>
-          <p:cNvSpPr txBox="1"/>
-          <p:nvPr/>
-        </p:nvSpPr>
-        <p:spPr>
-          <a:xfrm>
-            <a:off x="1143000" y="4599432"/>
-            <a:ext cx="10241280" cy="502920"/>
-          </a:xfrm>
-          <a:prstGeom prst="rect">
-            <a:avLst/>
-          </a:prstGeom>
-          <a:noFill/>
-        </p:spPr>
-        <p:txBody>
-          <a:bodyPr wrap="square" anchor="t" lIns="0" rIns="0" tIns="0" bIns="0">
-            <a:spAutoFit/>
-          </a:bodyPr>
-          <a:lstStyle/>
-          <a:p>
-            <a:pPr algn="l">
-              <a:lnSpc>
-                <a:spcPct val="105000"/>
-              </a:lnSpc>
-            </a:pPr>
-            <a:r>
-              <a:rPr sz="1300" b="0">
-                <a:solidFill>
-                  <a:srgbClr val="A9B7C4"/>
-                </a:solidFill>
-                <a:latin typeface="Avenir Next"/>
-              </a:rPr>
-              <a:t>Strong risk-adjusted returns in a rigorous simulation, with the assumptions stated.</a:t>
-            </a:r>
-          </a:p>
-        </p:txBody>
-      </p:sp>
-      <p:sp>
-        <p:nvSpPr>
-          <p:cNvPr id="17" name="Rectangle 16"/>
-          <p:cNvSpPr/>
-          <p:nvPr/>
-        </p:nvSpPr>
-        <p:spPr>
-          <a:xfrm>
-            <a:off x="822960" y="5193792"/>
-            <a:ext cx="118872" cy="640080"/>
-          </a:xfrm>
-          <a:prstGeom prst="rect">
-            <a:avLst/>
-          </a:prstGeom>
-          <a:solidFill>
-            <a:srgbClr val="14B8A6"/>
-          </a:solidFill>
-          <a:ln>
-            <a:noFill/>
-          </a:ln>
-          <a:effectLst/>
-        </p:spPr>
-        <p:style>
-          <a:lnRef idx="1">
-            <a:schemeClr val="accent1"/>
-          </a:lnRef>
-          <a:fillRef idx="3">
-            <a:schemeClr val="accent1"/>
-          </a:fillRef>
-          <a:effectRef idx="2">
-            <a:schemeClr val="accent1"/>
-          </a:effectRef>
-          <a:fontRef idx="minor">
-            <a:schemeClr val="lt1"/>
-          </a:fontRef>
-        </p:style>
-        <p:txBody>
-          <a:bodyPr rtlCol="0" anchor="ctr"/>
-          <a:lstStyle/>
-          <a:p>
-            <a:pPr algn="ctr"/>
-          </a:p>
-        </p:txBody>
-      </p:sp>
-      <p:sp>
-        <p:nvSpPr>
-          <p:cNvPr id="18" name="TextBox 17"/>
-          <p:cNvSpPr txBox="1"/>
-          <p:nvPr/>
-        </p:nvSpPr>
-        <p:spPr>
-          <a:xfrm>
-            <a:off x="1143000" y="5148072"/>
-            <a:ext cx="10241280" cy="365760"/>
-          </a:xfrm>
-          <a:prstGeom prst="rect">
-            <a:avLst/>
-          </a:prstGeom>
-          <a:noFill/>
-        </p:spPr>
-        <p:txBody>
-          <a:bodyPr wrap="square" anchor="t" lIns="0" rIns="0" tIns="0" bIns="0">
-            <a:spAutoFit/>
-          </a:bodyPr>
-          <a:lstStyle/>
-          <a:p>
-            <a:pPr algn="l">
-              <a:lnSpc>
-                <a:spcPct val="110000"/>
-              </a:lnSpc>
-            </a:pPr>
-            <a:r>
-              <a:rPr sz="1800" b="1">
-                <a:solidFill>
-                  <a:srgbClr val="FFFFFF"/>
-                </a:solidFill>
-                <a:latin typeface="Avenir Next"/>
-              </a:rPr>
-              <a:t>Live and monitored</a:t>
-            </a:r>
-          </a:p>
-        </p:txBody>
-      </p:sp>
-      <p:sp>
-        <p:nvSpPr>
-          <p:cNvPr id="19" name="TextBox 18"/>
-          <p:cNvSpPr txBox="1"/>
-          <p:nvPr/>
-        </p:nvSpPr>
-        <p:spPr>
-          <a:xfrm>
-            <a:off x="1143000" y="5532120"/>
-            <a:ext cx="10241280" cy="502920"/>
-          </a:xfrm>
-          <a:prstGeom prst="rect">
-            <a:avLst/>
-          </a:prstGeom>
-          <a:noFill/>
-        </p:spPr>
-        <p:txBody>
-          <a:bodyPr wrap="square" anchor="t" lIns="0" rIns="0" tIns="0" bIns="0">
-            <a:spAutoFit/>
-          </a:bodyPr>
-          <a:lstStyle/>
-          <a:p>
-            <a:pPr algn="l">
-              <a:lnSpc>
-                <a:spcPct val="105000"/>
-              </a:lnSpc>
-            </a:pPr>
-            <a:r>
-              <a:rPr sz="1300" b="0">
-                <a:solidFill>
-                  <a:srgbClr val="A9B7C4"/>
-                </a:solidFill>
-                <a:latin typeface="Avenir Next"/>
-              </a:rPr>
-              <a:t>Running on a paper account, one verification step from the go-live discussion.</a:t>
-            </a:r>
-          </a:p>
-        </p:txBody>
-      </p:sp>
-      <p:sp>
-        <p:nvSpPr>
-          <p:cNvPr id="20" name="TextBox 19"/>
           <p:cNvSpPr txBox="1"/>
           <p:nvPr/>
         </p:nvSpPr>
@@ -24533,7 +23798,7 @@
       </p:sp>
       <p:sp>
         <p:nvSpPr>
-          <p:cNvPr id="21" name="TextBox 20"/>
+          <p:cNvPr id="13" name="TextBox 12"/>
           <p:cNvSpPr txBox="1"/>
           <p:nvPr/>
         </p:nvSpPr>
@@ -24634,53 +23899,14 @@
       </p:sp>
       <p:sp>
         <p:nvSpPr>
-          <p:cNvPr id="3" name="TextBox 2"/>
-          <p:cNvSpPr txBox="1"/>
-          <p:nvPr/>
-        </p:nvSpPr>
-        <p:spPr>
-          <a:xfrm>
-            <a:off x="548640" y="914400"/>
-            <a:ext cx="6400800" cy="2926080"/>
-          </a:xfrm>
-          <a:prstGeom prst="rect">
-            <a:avLst/>
-          </a:prstGeom>
-          <a:noFill/>
-        </p:spPr>
-        <p:txBody>
-          <a:bodyPr wrap="square" anchor="t" lIns="0" rIns="0" tIns="0" bIns="0">
-            <a:spAutoFit/>
-          </a:bodyPr>
-          <a:lstStyle/>
-          <a:p>
-            <a:pPr algn="l">
-              <a:lnSpc>
-                <a:spcPct val="110000"/>
-              </a:lnSpc>
-            </a:pPr>
-            <a:r>
-              <a:rPr sz="20000" b="1">
-                <a:solidFill>
-                  <a:srgbClr val="2A4760"/>
-                </a:solidFill>
-                <a:latin typeface="Avenir Next"/>
-              </a:rPr>
-              <a:t>10</a:t>
-            </a:r>
-          </a:p>
-        </p:txBody>
-      </p:sp>
-      <p:sp>
-        <p:nvSpPr>
-          <p:cNvPr id="4" name="Rectangle 3"/>
+          <p:cNvPr id="3" name="Rectangle 2"/>
           <p:cNvSpPr/>
           <p:nvPr/>
         </p:nvSpPr>
         <p:spPr>
           <a:xfrm>
-            <a:off x="868680" y="3977639"/>
-            <a:ext cx="2194560" cy="38100"/>
+            <a:off x="0" y="0"/>
+            <a:ext cx="201168" cy="6858000"/>
           </a:xfrm>
           <a:prstGeom prst="rect">
             <a:avLst/>
@@ -24717,14 +23943,14 @@
       </p:sp>
       <p:sp>
         <p:nvSpPr>
-          <p:cNvPr id="5" name="TextBox 4"/>
-          <p:cNvSpPr txBox="1"/>
-          <p:nvPr/>
-        </p:nvSpPr>
-        <p:spPr>
-          <a:xfrm>
-            <a:off x="822960" y="4206240"/>
-            <a:ext cx="10515600" cy="914400"/>
+          <p:cNvPr id="4" name="TextBox 3"/>
+          <p:cNvSpPr txBox="1"/>
+          <p:nvPr/>
+        </p:nvSpPr>
+        <p:spPr>
+          <a:xfrm>
+            <a:off x="822960" y="777240"/>
+            <a:ext cx="10058400" cy="365760"/>
           </a:xfrm>
           <a:prstGeom prst="rect">
             <a:avLst/>
@@ -24743,27 +23969,110 @@
               </a:lnSpc>
             </a:pPr>
             <a:r>
-              <a:rPr sz="4000" b="1">
+              <a:rPr sz="1300" b="1">
+                <a:solidFill>
+                  <a:srgbClr val="14B8A6"/>
+                </a:solidFill>
+                <a:latin typeface="Avenir Next"/>
+              </a:rPr>
+              <a:t>IN SUMMARY</a:t>
+            </a:r>
+          </a:p>
+        </p:txBody>
+      </p:sp>
+      <p:sp>
+        <p:nvSpPr>
+          <p:cNvPr id="5" name="Rectangle 4"/>
+          <p:cNvSpPr/>
+          <p:nvPr/>
+        </p:nvSpPr>
+        <p:spPr>
+          <a:xfrm>
+            <a:off x="822960" y="1463040"/>
+            <a:ext cx="118872" cy="640080"/>
+          </a:xfrm>
+          <a:prstGeom prst="rect">
+            <a:avLst/>
+          </a:prstGeom>
+          <a:solidFill>
+            <a:srgbClr val="14B8A6"/>
+          </a:solidFill>
+          <a:ln>
+            <a:noFill/>
+          </a:ln>
+          <a:effectLst/>
+        </p:spPr>
+        <p:style>
+          <a:lnRef idx="1">
+            <a:schemeClr val="accent1"/>
+          </a:lnRef>
+          <a:fillRef idx="3">
+            <a:schemeClr val="accent1"/>
+          </a:fillRef>
+          <a:effectRef idx="2">
+            <a:schemeClr val="accent1"/>
+          </a:effectRef>
+          <a:fontRef idx="minor">
+            <a:schemeClr val="lt1"/>
+          </a:fontRef>
+        </p:style>
+        <p:txBody>
+          <a:bodyPr rtlCol="0" anchor="ctr"/>
+          <a:lstStyle/>
+          <a:p>
+            <a:pPr algn="ctr"/>
+          </a:p>
+        </p:txBody>
+      </p:sp>
+      <p:sp>
+        <p:nvSpPr>
+          <p:cNvPr id="6" name="TextBox 5"/>
+          <p:cNvSpPr txBox="1"/>
+          <p:nvPr/>
+        </p:nvSpPr>
+        <p:spPr>
+          <a:xfrm>
+            <a:off x="1143000" y="1417320"/>
+            <a:ext cx="10241280" cy="365760"/>
+          </a:xfrm>
+          <a:prstGeom prst="rect">
+            <a:avLst/>
+          </a:prstGeom>
+          <a:noFill/>
+        </p:spPr>
+        <p:txBody>
+          <a:bodyPr wrap="square" anchor="t" lIns="0" rIns="0" tIns="0" bIns="0">
+            <a:spAutoFit/>
+          </a:bodyPr>
+          <a:lstStyle/>
+          <a:p>
+            <a:pPr algn="l">
+              <a:lnSpc>
+                <a:spcPct val="110000"/>
+              </a:lnSpc>
+            </a:pPr>
+            <a:r>
+              <a:rPr sz="1800" b="1">
                 <a:solidFill>
                   <a:srgbClr val="FFFFFF"/>
                 </a:solidFill>
                 <a:latin typeface="Avenir Next"/>
               </a:rPr>
-              <a:t>Appendix</a:t>
-            </a:r>
-          </a:p>
-        </p:txBody>
-      </p:sp>
-      <p:sp>
-        <p:nvSpPr>
-          <p:cNvPr id="6" name="TextBox 5"/>
-          <p:cNvSpPr txBox="1"/>
-          <p:nvPr/>
-        </p:nvSpPr>
-        <p:spPr>
-          <a:xfrm>
-            <a:off x="868680" y="5212080"/>
-            <a:ext cx="10058400" cy="914400"/>
+              <a:t>A disciplined factor portfolio</a:t>
+            </a:r>
+          </a:p>
+        </p:txBody>
+      </p:sp>
+      <p:sp>
+        <p:nvSpPr>
+          <p:cNvPr id="7" name="TextBox 6"/>
+          <p:cNvSpPr txBox="1"/>
+          <p:nvPr/>
+        </p:nvSpPr>
+        <p:spPr>
+          <a:xfrm>
+            <a:off x="1143000" y="1801368"/>
+            <a:ext cx="10241280" cy="502920"/>
           </a:xfrm>
           <a:prstGeom prst="rect">
             <a:avLst/>
@@ -24778,17 +24087,583 @@
           <a:p>
             <a:pPr algn="l">
               <a:lnSpc>
+                <a:spcPct val="105000"/>
+              </a:lnSpc>
+            </a:pPr>
+            <a:r>
+              <a:rPr sz="1300" b="0">
+                <a:solidFill>
+                  <a:srgbClr val="A9B7C4"/>
+                </a:solidFill>
+                <a:latin typeface="Avenir Next"/>
+              </a:rPr>
+              <a:t>Four proven traits, computed transparently and weighted equally.</a:t>
+            </a:r>
+          </a:p>
+        </p:txBody>
+      </p:sp>
+      <p:sp>
+        <p:nvSpPr>
+          <p:cNvPr id="8" name="Rectangle 7"/>
+          <p:cNvSpPr/>
+          <p:nvPr/>
+        </p:nvSpPr>
+        <p:spPr>
+          <a:xfrm>
+            <a:off x="822960" y="2395728"/>
+            <a:ext cx="118872" cy="640080"/>
+          </a:xfrm>
+          <a:prstGeom prst="rect">
+            <a:avLst/>
+          </a:prstGeom>
+          <a:solidFill>
+            <a:srgbClr val="14B8A6"/>
+          </a:solidFill>
+          <a:ln>
+            <a:noFill/>
+          </a:ln>
+          <a:effectLst/>
+        </p:spPr>
+        <p:style>
+          <a:lnRef idx="1">
+            <a:schemeClr val="accent1"/>
+          </a:lnRef>
+          <a:fillRef idx="3">
+            <a:schemeClr val="accent1"/>
+          </a:fillRef>
+          <a:effectRef idx="2">
+            <a:schemeClr val="accent1"/>
+          </a:effectRef>
+          <a:fontRef idx="minor">
+            <a:schemeClr val="lt1"/>
+          </a:fontRef>
+        </p:style>
+        <p:txBody>
+          <a:bodyPr rtlCol="0" anchor="ctr"/>
+          <a:lstStyle/>
+          <a:p>
+            <a:pPr algn="ctr"/>
+          </a:p>
+        </p:txBody>
+      </p:sp>
+      <p:sp>
+        <p:nvSpPr>
+          <p:cNvPr id="9" name="TextBox 8"/>
+          <p:cNvSpPr txBox="1"/>
+          <p:nvPr/>
+        </p:nvSpPr>
+        <p:spPr>
+          <a:xfrm>
+            <a:off x="1143000" y="2350008"/>
+            <a:ext cx="10241280" cy="365760"/>
+          </a:xfrm>
+          <a:prstGeom prst="rect">
+            <a:avLst/>
+          </a:prstGeom>
+          <a:noFill/>
+        </p:spPr>
+        <p:txBody>
+          <a:bodyPr wrap="square" anchor="t" lIns="0" rIns="0" tIns="0" bIns="0">
+            <a:spAutoFit/>
+          </a:bodyPr>
+          <a:lstStyle/>
+          <a:p>
+            <a:pPr algn="l">
+              <a:lnSpc>
                 <a:spcPct val="110000"/>
               </a:lnSpc>
             </a:pPr>
             <a:r>
-              <a:rPr sz="1600" b="0">
-                <a:solidFill>
-                  <a:srgbClr val="C7D2DD"/>
-                </a:solidFill>
-                <a:latin typeface="Avenir Next"/>
-              </a:rPr>
-              <a:t>Formulas, sources, detailed results, and a glossary</a:t>
+              <a:rPr sz="1800" b="1">
+                <a:solidFill>
+                  <a:srgbClr val="FFFFFF"/>
+                </a:solidFill>
+                <a:latin typeface="Avenir Next"/>
+              </a:rPr>
+              <a:t>An income overlay that lowers risk</a:t>
+            </a:r>
+          </a:p>
+        </p:txBody>
+      </p:sp>
+      <p:sp>
+        <p:nvSpPr>
+          <p:cNvPr id="10" name="TextBox 9"/>
+          <p:cNvSpPr txBox="1"/>
+          <p:nvPr/>
+        </p:nvSpPr>
+        <p:spPr>
+          <a:xfrm>
+            <a:off x="1143000" y="2734056"/>
+            <a:ext cx="10241280" cy="502920"/>
+          </a:xfrm>
+          <a:prstGeom prst="rect">
+            <a:avLst/>
+          </a:prstGeom>
+          <a:noFill/>
+        </p:spPr>
+        <p:txBody>
+          <a:bodyPr wrap="square" anchor="t" lIns="0" rIns="0" tIns="0" bIns="0">
+            <a:spAutoFit/>
+          </a:bodyPr>
+          <a:lstStyle/>
+          <a:p>
+            <a:pPr algn="l">
+              <a:lnSpc>
+                <a:spcPct val="105000"/>
+              </a:lnSpc>
+            </a:pPr>
+            <a:r>
+              <a:rPr sz="1300" b="0">
+                <a:solidFill>
+                  <a:srgbClr val="A9B7C4"/>
+                </a:solidFill>
+                <a:latin typeface="Avenir Next"/>
+              </a:rPr>
+              <a:t>Covered calls harvest a persistent premium and smooth the ride.</a:t>
+            </a:r>
+          </a:p>
+        </p:txBody>
+      </p:sp>
+      <p:sp>
+        <p:nvSpPr>
+          <p:cNvPr id="11" name="Rectangle 10"/>
+          <p:cNvSpPr/>
+          <p:nvPr/>
+        </p:nvSpPr>
+        <p:spPr>
+          <a:xfrm>
+            <a:off x="822960" y="3328415"/>
+            <a:ext cx="118872" cy="640080"/>
+          </a:xfrm>
+          <a:prstGeom prst="rect">
+            <a:avLst/>
+          </a:prstGeom>
+          <a:solidFill>
+            <a:srgbClr val="14B8A6"/>
+          </a:solidFill>
+          <a:ln>
+            <a:noFill/>
+          </a:ln>
+          <a:effectLst/>
+        </p:spPr>
+        <p:style>
+          <a:lnRef idx="1">
+            <a:schemeClr val="accent1"/>
+          </a:lnRef>
+          <a:fillRef idx="3">
+            <a:schemeClr val="accent1"/>
+          </a:fillRef>
+          <a:effectRef idx="2">
+            <a:schemeClr val="accent1"/>
+          </a:effectRef>
+          <a:fontRef idx="minor">
+            <a:schemeClr val="lt1"/>
+          </a:fontRef>
+        </p:style>
+        <p:txBody>
+          <a:bodyPr rtlCol="0" anchor="ctr"/>
+          <a:lstStyle/>
+          <a:p>
+            <a:pPr algn="ctr"/>
+          </a:p>
+        </p:txBody>
+      </p:sp>
+      <p:sp>
+        <p:nvSpPr>
+          <p:cNvPr id="12" name="TextBox 11"/>
+          <p:cNvSpPr txBox="1"/>
+          <p:nvPr/>
+        </p:nvSpPr>
+        <p:spPr>
+          <a:xfrm>
+            <a:off x="1143000" y="3282696"/>
+            <a:ext cx="10241280" cy="365760"/>
+          </a:xfrm>
+          <a:prstGeom prst="rect">
+            <a:avLst/>
+          </a:prstGeom>
+          <a:noFill/>
+        </p:spPr>
+        <p:txBody>
+          <a:bodyPr wrap="square" anchor="t" lIns="0" rIns="0" tIns="0" bIns="0">
+            <a:spAutoFit/>
+          </a:bodyPr>
+          <a:lstStyle/>
+          <a:p>
+            <a:pPr algn="l">
+              <a:lnSpc>
+                <a:spcPct val="110000"/>
+              </a:lnSpc>
+            </a:pPr>
+            <a:r>
+              <a:rPr sz="1800" b="1">
+                <a:solidFill>
+                  <a:srgbClr val="FFFFFF"/>
+                </a:solidFill>
+                <a:latin typeface="Avenir Next"/>
+              </a:rPr>
+              <a:t>Built for capital preservation</a:t>
+            </a:r>
+          </a:p>
+        </p:txBody>
+      </p:sp>
+      <p:sp>
+        <p:nvSpPr>
+          <p:cNvPr id="13" name="TextBox 12"/>
+          <p:cNvSpPr txBox="1"/>
+          <p:nvPr/>
+        </p:nvSpPr>
+        <p:spPr>
+          <a:xfrm>
+            <a:off x="1143000" y="3666744"/>
+            <a:ext cx="10241280" cy="502920"/>
+          </a:xfrm>
+          <a:prstGeom prst="rect">
+            <a:avLst/>
+          </a:prstGeom>
+          <a:noFill/>
+        </p:spPr>
+        <p:txBody>
+          <a:bodyPr wrap="square" anchor="t" lIns="0" rIns="0" tIns="0" bIns="0">
+            <a:spAutoFit/>
+          </a:bodyPr>
+          <a:lstStyle/>
+          <a:p>
+            <a:pPr algn="l">
+              <a:lnSpc>
+                <a:spcPct val="105000"/>
+              </a:lnSpc>
+            </a:pPr>
+            <a:r>
+              <a:rPr sz="1300" b="0">
+                <a:solidFill>
+                  <a:srgbClr val="A9B7C4"/>
+                </a:solidFill>
+                <a:latin typeface="Avenir Next"/>
+              </a:rPr>
+              <a:t>Firm diversification limits, a pre-trade risk check, and an emergency stop.</a:t>
+            </a:r>
+          </a:p>
+        </p:txBody>
+      </p:sp>
+      <p:sp>
+        <p:nvSpPr>
+          <p:cNvPr id="14" name="Rectangle 13"/>
+          <p:cNvSpPr/>
+          <p:nvPr/>
+        </p:nvSpPr>
+        <p:spPr>
+          <a:xfrm>
+            <a:off x="822960" y="4261104"/>
+            <a:ext cx="118872" cy="640080"/>
+          </a:xfrm>
+          <a:prstGeom prst="rect">
+            <a:avLst/>
+          </a:prstGeom>
+          <a:solidFill>
+            <a:srgbClr val="14B8A6"/>
+          </a:solidFill>
+          <a:ln>
+            <a:noFill/>
+          </a:ln>
+          <a:effectLst/>
+        </p:spPr>
+        <p:style>
+          <a:lnRef idx="1">
+            <a:schemeClr val="accent1"/>
+          </a:lnRef>
+          <a:fillRef idx="3">
+            <a:schemeClr val="accent1"/>
+          </a:fillRef>
+          <a:effectRef idx="2">
+            <a:schemeClr val="accent1"/>
+          </a:effectRef>
+          <a:fontRef idx="minor">
+            <a:schemeClr val="lt1"/>
+          </a:fontRef>
+        </p:style>
+        <p:txBody>
+          <a:bodyPr rtlCol="0" anchor="ctr"/>
+          <a:lstStyle/>
+          <a:p>
+            <a:pPr algn="ctr"/>
+          </a:p>
+        </p:txBody>
+      </p:sp>
+      <p:sp>
+        <p:nvSpPr>
+          <p:cNvPr id="15" name="TextBox 14"/>
+          <p:cNvSpPr txBox="1"/>
+          <p:nvPr/>
+        </p:nvSpPr>
+        <p:spPr>
+          <a:xfrm>
+            <a:off x="1143000" y="4215384"/>
+            <a:ext cx="10241280" cy="365760"/>
+          </a:xfrm>
+          <a:prstGeom prst="rect">
+            <a:avLst/>
+          </a:prstGeom>
+          <a:noFill/>
+        </p:spPr>
+        <p:txBody>
+          <a:bodyPr wrap="square" anchor="t" lIns="0" rIns="0" tIns="0" bIns="0">
+            <a:spAutoFit/>
+          </a:bodyPr>
+          <a:lstStyle/>
+          <a:p>
+            <a:pPr algn="l">
+              <a:lnSpc>
+                <a:spcPct val="110000"/>
+              </a:lnSpc>
+            </a:pPr>
+            <a:r>
+              <a:rPr sz="1800" b="1">
+                <a:solidFill>
+                  <a:srgbClr val="FFFFFF"/>
+                </a:solidFill>
+                <a:latin typeface="Avenir Next"/>
+              </a:rPr>
+              <a:t>Tested, and honest about its limits</a:t>
+            </a:r>
+          </a:p>
+        </p:txBody>
+      </p:sp>
+      <p:sp>
+        <p:nvSpPr>
+          <p:cNvPr id="16" name="TextBox 15"/>
+          <p:cNvSpPr txBox="1"/>
+          <p:nvPr/>
+        </p:nvSpPr>
+        <p:spPr>
+          <a:xfrm>
+            <a:off x="1143000" y="4599432"/>
+            <a:ext cx="10241280" cy="502920"/>
+          </a:xfrm>
+          <a:prstGeom prst="rect">
+            <a:avLst/>
+          </a:prstGeom>
+          <a:noFill/>
+        </p:spPr>
+        <p:txBody>
+          <a:bodyPr wrap="square" anchor="t" lIns="0" rIns="0" tIns="0" bIns="0">
+            <a:spAutoFit/>
+          </a:bodyPr>
+          <a:lstStyle/>
+          <a:p>
+            <a:pPr algn="l">
+              <a:lnSpc>
+                <a:spcPct val="105000"/>
+              </a:lnSpc>
+            </a:pPr>
+            <a:r>
+              <a:rPr sz="1300" b="0">
+                <a:solidFill>
+                  <a:srgbClr val="A9B7C4"/>
+                </a:solidFill>
+                <a:latin typeface="Avenir Next"/>
+              </a:rPr>
+              <a:t>Strong risk-adjusted returns in a rigorous simulation, with the assumptions stated.</a:t>
+            </a:r>
+          </a:p>
+        </p:txBody>
+      </p:sp>
+      <p:sp>
+        <p:nvSpPr>
+          <p:cNvPr id="17" name="Rectangle 16"/>
+          <p:cNvSpPr/>
+          <p:nvPr/>
+        </p:nvSpPr>
+        <p:spPr>
+          <a:xfrm>
+            <a:off x="822960" y="5193792"/>
+            <a:ext cx="118872" cy="640080"/>
+          </a:xfrm>
+          <a:prstGeom prst="rect">
+            <a:avLst/>
+          </a:prstGeom>
+          <a:solidFill>
+            <a:srgbClr val="14B8A6"/>
+          </a:solidFill>
+          <a:ln>
+            <a:noFill/>
+          </a:ln>
+          <a:effectLst/>
+        </p:spPr>
+        <p:style>
+          <a:lnRef idx="1">
+            <a:schemeClr val="accent1"/>
+          </a:lnRef>
+          <a:fillRef idx="3">
+            <a:schemeClr val="accent1"/>
+          </a:fillRef>
+          <a:effectRef idx="2">
+            <a:schemeClr val="accent1"/>
+          </a:effectRef>
+          <a:fontRef idx="minor">
+            <a:schemeClr val="lt1"/>
+          </a:fontRef>
+        </p:style>
+        <p:txBody>
+          <a:bodyPr rtlCol="0" anchor="ctr"/>
+          <a:lstStyle/>
+          <a:p>
+            <a:pPr algn="ctr"/>
+          </a:p>
+        </p:txBody>
+      </p:sp>
+      <p:sp>
+        <p:nvSpPr>
+          <p:cNvPr id="18" name="TextBox 17"/>
+          <p:cNvSpPr txBox="1"/>
+          <p:nvPr/>
+        </p:nvSpPr>
+        <p:spPr>
+          <a:xfrm>
+            <a:off x="1143000" y="5148072"/>
+            <a:ext cx="10241280" cy="365760"/>
+          </a:xfrm>
+          <a:prstGeom prst="rect">
+            <a:avLst/>
+          </a:prstGeom>
+          <a:noFill/>
+        </p:spPr>
+        <p:txBody>
+          <a:bodyPr wrap="square" anchor="t" lIns="0" rIns="0" tIns="0" bIns="0">
+            <a:spAutoFit/>
+          </a:bodyPr>
+          <a:lstStyle/>
+          <a:p>
+            <a:pPr algn="l">
+              <a:lnSpc>
+                <a:spcPct val="110000"/>
+              </a:lnSpc>
+            </a:pPr>
+            <a:r>
+              <a:rPr sz="1800" b="1">
+                <a:solidFill>
+                  <a:srgbClr val="FFFFFF"/>
+                </a:solidFill>
+                <a:latin typeface="Avenir Next"/>
+              </a:rPr>
+              <a:t>Live and monitored</a:t>
+            </a:r>
+          </a:p>
+        </p:txBody>
+      </p:sp>
+      <p:sp>
+        <p:nvSpPr>
+          <p:cNvPr id="19" name="TextBox 18"/>
+          <p:cNvSpPr txBox="1"/>
+          <p:nvPr/>
+        </p:nvSpPr>
+        <p:spPr>
+          <a:xfrm>
+            <a:off x="1143000" y="5532120"/>
+            <a:ext cx="10241280" cy="502920"/>
+          </a:xfrm>
+          <a:prstGeom prst="rect">
+            <a:avLst/>
+          </a:prstGeom>
+          <a:noFill/>
+        </p:spPr>
+        <p:txBody>
+          <a:bodyPr wrap="square" anchor="t" lIns="0" rIns="0" tIns="0" bIns="0">
+            <a:spAutoFit/>
+          </a:bodyPr>
+          <a:lstStyle/>
+          <a:p>
+            <a:pPr algn="l">
+              <a:lnSpc>
+                <a:spcPct val="105000"/>
+              </a:lnSpc>
+            </a:pPr>
+            <a:r>
+              <a:rPr sz="1300" b="0">
+                <a:solidFill>
+                  <a:srgbClr val="A9B7C4"/>
+                </a:solidFill>
+                <a:latin typeface="Avenir Next"/>
+              </a:rPr>
+              <a:t>Running on a paper account, one verification step from the go-live discussion.</a:t>
+            </a:r>
+          </a:p>
+        </p:txBody>
+      </p:sp>
+      <p:sp>
+        <p:nvSpPr>
+          <p:cNvPr id="20" name="TextBox 19"/>
+          <p:cNvSpPr txBox="1"/>
+          <p:nvPr/>
+        </p:nvSpPr>
+        <p:spPr>
+          <a:xfrm>
+            <a:off x="640080" y="6437376"/>
+            <a:ext cx="7315200" cy="274320"/>
+          </a:xfrm>
+          <a:prstGeom prst="rect">
+            <a:avLst/>
+          </a:prstGeom>
+          <a:noFill/>
+        </p:spPr>
+        <p:txBody>
+          <a:bodyPr wrap="square" anchor="t" lIns="0" rIns="0" tIns="0" bIns="0">
+            <a:spAutoFit/>
+          </a:bodyPr>
+          <a:lstStyle/>
+          <a:p>
+            <a:pPr algn="l">
+              <a:lnSpc>
+                <a:spcPct val="110000"/>
+              </a:lnSpc>
+            </a:pPr>
+            <a:r>
+              <a:rPr sz="900" b="0">
+                <a:solidFill>
+                  <a:srgbClr val="6B7787"/>
+                </a:solidFill>
+                <a:latin typeface="Avenir Next"/>
+              </a:rPr>
+              <a:t>Systematic Factor Income Fund    ·    confidential</a:t>
+            </a:r>
+          </a:p>
+        </p:txBody>
+      </p:sp>
+      <p:sp>
+        <p:nvSpPr>
+          <p:cNvPr id="21" name="TextBox 20"/>
+          <p:cNvSpPr txBox="1"/>
+          <p:nvPr/>
+        </p:nvSpPr>
+        <p:spPr>
+          <a:xfrm>
+            <a:off x="10058400" y="6437376"/>
+            <a:ext cx="1490472" cy="274320"/>
+          </a:xfrm>
+          <a:prstGeom prst="rect">
+            <a:avLst/>
+          </a:prstGeom>
+          <a:noFill/>
+        </p:spPr>
+        <p:txBody>
+          <a:bodyPr wrap="square" anchor="t" lIns="0" rIns="0" tIns="0" bIns="0">
+            <a:spAutoFit/>
+          </a:bodyPr>
+          <a:lstStyle/>
+          <a:p>
+            <a:pPr algn="r">
+              <a:lnSpc>
+                <a:spcPct val="110000"/>
+              </a:lnSpc>
+            </a:pPr>
+            <a:r>
+              <a:rPr sz="900" b="0">
+                <a:solidFill>
+                  <a:srgbClr val="6B7787"/>
+                </a:solidFill>
+                <a:latin typeface="Avenir Next"/>
+              </a:rPr>
+              <a:t>32</a:t>
             </a:r>
           </a:p>
         </p:txBody>
@@ -24826,7 +24701,7 @@
             <a:avLst/>
           </a:prstGeom>
           <a:solidFill>
-            <a:srgbClr val="FFFFFF"/>
+            <a:srgbClr val="0E1B2A"/>
           </a:solidFill>
           <a:ln>
             <a:noFill/>
@@ -24857,14 +24732,53 @@
       </p:sp>
       <p:sp>
         <p:nvSpPr>
-          <p:cNvPr id="3" name="Rectangle 2"/>
+          <p:cNvPr id="3" name="TextBox 2"/>
+          <p:cNvSpPr txBox="1"/>
+          <p:nvPr/>
+        </p:nvSpPr>
+        <p:spPr>
+          <a:xfrm>
+            <a:off x="548640" y="914400"/>
+            <a:ext cx="6400800" cy="2926080"/>
+          </a:xfrm>
+          <a:prstGeom prst="rect">
+            <a:avLst/>
+          </a:prstGeom>
+          <a:noFill/>
+        </p:spPr>
+        <p:txBody>
+          <a:bodyPr wrap="square" anchor="t" lIns="0" rIns="0" tIns="0" bIns="0">
+            <a:spAutoFit/>
+          </a:bodyPr>
+          <a:lstStyle/>
+          <a:p>
+            <a:pPr algn="l">
+              <a:lnSpc>
+                <a:spcPct val="110000"/>
+              </a:lnSpc>
+            </a:pPr>
+            <a:r>
+              <a:rPr sz="20000" b="1">
+                <a:solidFill>
+                  <a:srgbClr val="2A4760"/>
+                </a:solidFill>
+                <a:latin typeface="Avenir Next"/>
+              </a:rPr>
+              <a:t>10</a:t>
+            </a:r>
+          </a:p>
+        </p:txBody>
+      </p:sp>
+      <p:sp>
+        <p:nvSpPr>
+          <p:cNvPr id="4" name="Rectangle 3"/>
           <p:cNvSpPr/>
           <p:nvPr/>
         </p:nvSpPr>
         <p:spPr>
           <a:xfrm>
-            <a:off x="640080" y="566928"/>
-            <a:ext cx="310896" cy="100584"/>
+            <a:off x="868680" y="3977639"/>
+            <a:ext cx="2194560" cy="38100"/>
           </a:xfrm>
           <a:prstGeom prst="rect">
             <a:avLst/>
@@ -24901,14 +24815,14 @@
       </p:sp>
       <p:sp>
         <p:nvSpPr>
-          <p:cNvPr id="4" name="TextBox 3"/>
-          <p:cNvSpPr txBox="1"/>
-          <p:nvPr/>
-        </p:nvSpPr>
-        <p:spPr>
-          <a:xfrm>
-            <a:off x="1024128" y="502920"/>
-            <a:ext cx="10058400" cy="274320"/>
+          <p:cNvPr id="5" name="TextBox 4"/>
+          <p:cNvSpPr txBox="1"/>
+          <p:nvPr/>
+        </p:nvSpPr>
+        <p:spPr>
+          <a:xfrm>
+            <a:off x="822960" y="4206240"/>
+            <a:ext cx="10515600" cy="914400"/>
           </a:xfrm>
           <a:prstGeom prst="rect">
             <a:avLst/>
@@ -24927,27 +24841,27 @@
               </a:lnSpc>
             </a:pPr>
             <a:r>
-              <a:rPr sz="1200" b="1">
-                <a:solidFill>
-                  <a:srgbClr val="0E8C7E"/>
-                </a:solidFill>
-                <a:latin typeface="Avenir Next"/>
-              </a:rPr>
-              <a:t>APPENDIX · A1</a:t>
-            </a:r>
-          </a:p>
-        </p:txBody>
-      </p:sp>
-      <p:sp>
-        <p:nvSpPr>
-          <p:cNvPr id="5" name="TextBox 4"/>
-          <p:cNvSpPr txBox="1"/>
-          <p:nvPr/>
-        </p:nvSpPr>
-        <p:spPr>
-          <a:xfrm>
-            <a:off x="640080" y="841248"/>
-            <a:ext cx="10972800" cy="640080"/>
+              <a:rPr sz="4000" b="1">
+                <a:solidFill>
+                  <a:srgbClr val="FFFFFF"/>
+                </a:solidFill>
+                <a:latin typeface="Avenir Next"/>
+              </a:rPr>
+              <a:t>Appendix</a:t>
+            </a:r>
+          </a:p>
+        </p:txBody>
+      </p:sp>
+      <p:sp>
+        <p:nvSpPr>
+          <p:cNvPr id="6" name="TextBox 5"/>
+          <p:cNvSpPr txBox="1"/>
+          <p:nvPr/>
+        </p:nvSpPr>
+        <p:spPr>
+          <a:xfrm>
+            <a:off x="868680" y="5212080"/>
+            <a:ext cx="10058400" cy="914400"/>
           </a:xfrm>
           <a:prstGeom prst="rect">
             <a:avLst/>
@@ -24966,627 +24880,13 @@
               </a:lnSpc>
             </a:pPr>
             <a:r>
-              <a:rPr sz="2600" b="1">
-                <a:solidFill>
-                  <a:srgbClr val="0E1B2A"/>
-                </a:solidFill>
-                <a:latin typeface="Avenir Next"/>
-              </a:rPr>
-              <a:t>Factor formulas</a:t>
-            </a:r>
-          </a:p>
-        </p:txBody>
-      </p:sp>
-      <p:sp>
-        <p:nvSpPr>
-          <p:cNvPr id="6" name="Rectangle 5"/>
-          <p:cNvSpPr/>
-          <p:nvPr/>
-        </p:nvSpPr>
-        <p:spPr>
-          <a:xfrm>
-            <a:off x="640080" y="1463040"/>
-            <a:ext cx="10908792" cy="15240"/>
-          </a:xfrm>
-          <a:prstGeom prst="rect">
-            <a:avLst/>
-          </a:prstGeom>
-          <a:solidFill>
-            <a:srgbClr val="E3E8EE"/>
-          </a:solidFill>
-          <a:ln>
-            <a:noFill/>
-          </a:ln>
-          <a:effectLst/>
-        </p:spPr>
-        <p:style>
-          <a:lnRef idx="1">
-            <a:schemeClr val="accent1"/>
-          </a:lnRef>
-          <a:fillRef idx="3">
-            <a:schemeClr val="accent1"/>
-          </a:fillRef>
-          <a:effectRef idx="2">
-            <a:schemeClr val="accent1"/>
-          </a:effectRef>
-          <a:fontRef idx="minor">
-            <a:schemeClr val="lt1"/>
-          </a:fontRef>
-        </p:style>
-        <p:txBody>
-          <a:bodyPr rtlCol="0" anchor="ctr"/>
-          <a:lstStyle/>
-          <a:p>
-            <a:pPr algn="ctr"/>
-          </a:p>
-        </p:txBody>
-      </p:sp>
-      <p:sp>
-        <p:nvSpPr>
-          <p:cNvPr id="7" name="Rounded Rectangle 6"/>
-          <p:cNvSpPr/>
-          <p:nvPr/>
-        </p:nvSpPr>
-        <p:spPr>
-          <a:xfrm>
-            <a:off x="640080" y="1783080"/>
-            <a:ext cx="5212080" cy="1554480"/>
-          </a:xfrm>
-          <a:prstGeom prst="roundRect">
-            <a:avLst>
-              <a:gd name="adj" fmla="val 5000"/>
-            </a:avLst>
-          </a:prstGeom>
-          <a:solidFill>
-            <a:srgbClr val="F4F7F9"/>
-          </a:solidFill>
-          <a:ln w="12700">
-            <a:solidFill>
-              <a:srgbClr val="DDE4EA"/>
-            </a:solidFill>
-          </a:ln>
-          <a:effectLst/>
-        </p:spPr>
-        <p:style>
-          <a:lnRef idx="1">
-            <a:schemeClr val="accent1"/>
-          </a:lnRef>
-          <a:fillRef idx="3">
-            <a:schemeClr val="accent1"/>
-          </a:fillRef>
-          <a:effectRef idx="2">
-            <a:schemeClr val="accent1"/>
-          </a:effectRef>
-          <a:fontRef idx="minor">
-            <a:schemeClr val="lt1"/>
-          </a:fontRef>
-        </p:style>
-        <p:txBody>
-          <a:bodyPr rtlCol="0" anchor="ctr"/>
-          <a:lstStyle/>
-          <a:p>
-            <a:pPr algn="ctr"/>
-          </a:p>
-        </p:txBody>
-      </p:sp>
-      <p:sp>
-        <p:nvSpPr>
-          <p:cNvPr id="8" name="TextBox 7"/>
-          <p:cNvSpPr txBox="1"/>
-          <p:nvPr/>
-        </p:nvSpPr>
-        <p:spPr>
-          <a:xfrm>
-            <a:off x="914400" y="1929384"/>
-            <a:ext cx="4663440" cy="274320"/>
-          </a:xfrm>
-          <a:prstGeom prst="rect">
-            <a:avLst/>
-          </a:prstGeom>
-          <a:noFill/>
-        </p:spPr>
-        <p:txBody>
-          <a:bodyPr wrap="square" anchor="t" lIns="0" rIns="0" tIns="0" bIns="0">
-            <a:spAutoFit/>
-          </a:bodyPr>
-          <a:lstStyle/>
-          <a:p>
-            <a:pPr algn="l">
-              <a:lnSpc>
-                <a:spcPct val="110000"/>
-              </a:lnSpc>
-            </a:pPr>
-            <a:r>
-              <a:rPr sz="1100" b="1">
-                <a:solidFill>
-                  <a:srgbClr val="0E8C7E"/>
-                </a:solidFill>
-                <a:latin typeface="Avenir Next"/>
-              </a:rPr>
-              <a:t>VALUE</a:t>
-            </a:r>
-          </a:p>
-        </p:txBody>
-      </p:sp>
-      <p:pic>
-        <p:nvPicPr>
-          <p:cNvPr id="9" name="Picture 8" descr="f_value.png"/>
-          <p:cNvPicPr>
-            <a:picLocks noChangeAspect="1"/>
-          </p:cNvPicPr>
-          <p:nvPr/>
-        </p:nvPicPr>
-        <p:blipFill>
-          <a:blip r:embed="rId2"/>
-          <a:stretch>
-            <a:fillRect/>
-          </a:stretch>
-        </p:blipFill>
-        <p:spPr>
-          <a:xfrm>
-            <a:off x="914400" y="2493152"/>
-            <a:ext cx="4663440" cy="591534"/>
-          </a:xfrm>
-          <a:prstGeom prst="rect">
-            <a:avLst/>
-          </a:prstGeom>
-        </p:spPr>
-      </p:pic>
-      <p:sp>
-        <p:nvSpPr>
-          <p:cNvPr id="10" name="Rounded Rectangle 9"/>
-          <p:cNvSpPr/>
-          <p:nvPr/>
-        </p:nvSpPr>
-        <p:spPr>
-          <a:xfrm>
-            <a:off x="6245352" y="1783080"/>
-            <a:ext cx="5212080" cy="1554480"/>
-          </a:xfrm>
-          <a:prstGeom prst="roundRect">
-            <a:avLst>
-              <a:gd name="adj" fmla="val 5000"/>
-            </a:avLst>
-          </a:prstGeom>
-          <a:solidFill>
-            <a:srgbClr val="F4F7F9"/>
-          </a:solidFill>
-          <a:ln w="12700">
-            <a:solidFill>
-              <a:srgbClr val="DDE4EA"/>
-            </a:solidFill>
-          </a:ln>
-          <a:effectLst/>
-        </p:spPr>
-        <p:style>
-          <a:lnRef idx="1">
-            <a:schemeClr val="accent1"/>
-          </a:lnRef>
-          <a:fillRef idx="3">
-            <a:schemeClr val="accent1"/>
-          </a:fillRef>
-          <a:effectRef idx="2">
-            <a:schemeClr val="accent1"/>
-          </a:effectRef>
-          <a:fontRef idx="minor">
-            <a:schemeClr val="lt1"/>
-          </a:fontRef>
-        </p:style>
-        <p:txBody>
-          <a:bodyPr rtlCol="0" anchor="ctr"/>
-          <a:lstStyle/>
-          <a:p>
-            <a:pPr algn="ctr"/>
-          </a:p>
-        </p:txBody>
-      </p:sp>
-      <p:sp>
-        <p:nvSpPr>
-          <p:cNvPr id="11" name="TextBox 10"/>
-          <p:cNvSpPr txBox="1"/>
-          <p:nvPr/>
-        </p:nvSpPr>
-        <p:spPr>
-          <a:xfrm>
-            <a:off x="6519672" y="1929384"/>
-            <a:ext cx="4663440" cy="274320"/>
-          </a:xfrm>
-          <a:prstGeom prst="rect">
-            <a:avLst/>
-          </a:prstGeom>
-          <a:noFill/>
-        </p:spPr>
-        <p:txBody>
-          <a:bodyPr wrap="square" anchor="t" lIns="0" rIns="0" tIns="0" bIns="0">
-            <a:spAutoFit/>
-          </a:bodyPr>
-          <a:lstStyle/>
-          <a:p>
-            <a:pPr algn="l">
-              <a:lnSpc>
-                <a:spcPct val="110000"/>
-              </a:lnSpc>
-            </a:pPr>
-            <a:r>
-              <a:rPr sz="1100" b="1">
-                <a:solidFill>
-                  <a:srgbClr val="0E8C7E"/>
-                </a:solidFill>
-                <a:latin typeface="Avenir Next"/>
-              </a:rPr>
-              <a:t>MOMENTUM</a:t>
-            </a:r>
-          </a:p>
-        </p:txBody>
-      </p:sp>
-      <p:pic>
-        <p:nvPicPr>
-          <p:cNvPr id="12" name="Picture 11" descr="f_mom.png"/>
-          <p:cNvPicPr>
-            <a:picLocks noChangeAspect="1"/>
-          </p:cNvPicPr>
-          <p:nvPr/>
-        </p:nvPicPr>
-        <p:blipFill>
-          <a:blip r:embed="rId3"/>
-          <a:stretch>
-            <a:fillRect/>
-          </a:stretch>
-        </p:blipFill>
-        <p:spPr>
-          <a:xfrm>
-            <a:off x="6519672" y="2338142"/>
-            <a:ext cx="4663440" cy="901555"/>
-          </a:xfrm>
-          <a:prstGeom prst="rect">
-            <a:avLst/>
-          </a:prstGeom>
-        </p:spPr>
-      </p:pic>
-      <p:sp>
-        <p:nvSpPr>
-          <p:cNvPr id="13" name="Rounded Rectangle 12"/>
-          <p:cNvSpPr/>
-          <p:nvPr/>
-        </p:nvSpPr>
-        <p:spPr>
-          <a:xfrm>
-            <a:off x="640080" y="3566160"/>
-            <a:ext cx="5212080" cy="1554480"/>
-          </a:xfrm>
-          <a:prstGeom prst="roundRect">
-            <a:avLst>
-              <a:gd name="adj" fmla="val 5000"/>
-            </a:avLst>
-          </a:prstGeom>
-          <a:solidFill>
-            <a:srgbClr val="F4F7F9"/>
-          </a:solidFill>
-          <a:ln w="12700">
-            <a:solidFill>
-              <a:srgbClr val="DDE4EA"/>
-            </a:solidFill>
-          </a:ln>
-          <a:effectLst/>
-        </p:spPr>
-        <p:style>
-          <a:lnRef idx="1">
-            <a:schemeClr val="accent1"/>
-          </a:lnRef>
-          <a:fillRef idx="3">
-            <a:schemeClr val="accent1"/>
-          </a:fillRef>
-          <a:effectRef idx="2">
-            <a:schemeClr val="accent1"/>
-          </a:effectRef>
-          <a:fontRef idx="minor">
-            <a:schemeClr val="lt1"/>
-          </a:fontRef>
-        </p:style>
-        <p:txBody>
-          <a:bodyPr rtlCol="0" anchor="ctr"/>
-          <a:lstStyle/>
-          <a:p>
-            <a:pPr algn="ctr"/>
-          </a:p>
-        </p:txBody>
-      </p:sp>
-      <p:sp>
-        <p:nvSpPr>
-          <p:cNvPr id="14" name="TextBox 13"/>
-          <p:cNvSpPr txBox="1"/>
-          <p:nvPr/>
-        </p:nvSpPr>
-        <p:spPr>
-          <a:xfrm>
-            <a:off x="914400" y="3712463"/>
-            <a:ext cx="4663440" cy="274320"/>
-          </a:xfrm>
-          <a:prstGeom prst="rect">
-            <a:avLst/>
-          </a:prstGeom>
-          <a:noFill/>
-        </p:spPr>
-        <p:txBody>
-          <a:bodyPr wrap="square" anchor="t" lIns="0" rIns="0" tIns="0" bIns="0">
-            <a:spAutoFit/>
-          </a:bodyPr>
-          <a:lstStyle/>
-          <a:p>
-            <a:pPr algn="l">
-              <a:lnSpc>
-                <a:spcPct val="110000"/>
-              </a:lnSpc>
-            </a:pPr>
-            <a:r>
-              <a:rPr sz="1100" b="1">
-                <a:solidFill>
-                  <a:srgbClr val="0E8C7E"/>
-                </a:solidFill>
-                <a:latin typeface="Avenir Next"/>
-              </a:rPr>
-              <a:t>QUALITY</a:t>
-            </a:r>
-          </a:p>
-        </p:txBody>
-      </p:sp>
-      <p:pic>
-        <p:nvPicPr>
-          <p:cNvPr id="15" name="Picture 14" descr="f_qual.png"/>
-          <p:cNvPicPr>
-            <a:picLocks noChangeAspect="1"/>
-          </p:cNvPicPr>
-          <p:nvPr/>
-        </p:nvPicPr>
-        <p:blipFill>
-          <a:blip r:embed="rId4"/>
-          <a:stretch>
-            <a:fillRect/>
-          </a:stretch>
-        </p:blipFill>
-        <p:spPr>
-          <a:xfrm>
-            <a:off x="914400" y="4319748"/>
-            <a:ext cx="4663440" cy="504502"/>
-          </a:xfrm>
-          <a:prstGeom prst="rect">
-            <a:avLst/>
-          </a:prstGeom>
-        </p:spPr>
-      </p:pic>
-      <p:sp>
-        <p:nvSpPr>
-          <p:cNvPr id="16" name="Rounded Rectangle 15"/>
-          <p:cNvSpPr/>
-          <p:nvPr/>
-        </p:nvSpPr>
-        <p:spPr>
-          <a:xfrm>
-            <a:off x="6245352" y="3566160"/>
-            <a:ext cx="5212080" cy="1554480"/>
-          </a:xfrm>
-          <a:prstGeom prst="roundRect">
-            <a:avLst>
-              <a:gd name="adj" fmla="val 5000"/>
-            </a:avLst>
-          </a:prstGeom>
-          <a:solidFill>
-            <a:srgbClr val="F4F7F9"/>
-          </a:solidFill>
-          <a:ln w="12700">
-            <a:solidFill>
-              <a:srgbClr val="DDE4EA"/>
-            </a:solidFill>
-          </a:ln>
-          <a:effectLst/>
-        </p:spPr>
-        <p:style>
-          <a:lnRef idx="1">
-            <a:schemeClr val="accent1"/>
-          </a:lnRef>
-          <a:fillRef idx="3">
-            <a:schemeClr val="accent1"/>
-          </a:fillRef>
-          <a:effectRef idx="2">
-            <a:schemeClr val="accent1"/>
-          </a:effectRef>
-          <a:fontRef idx="minor">
-            <a:schemeClr val="lt1"/>
-          </a:fontRef>
-        </p:style>
-        <p:txBody>
-          <a:bodyPr rtlCol="0" anchor="ctr"/>
-          <a:lstStyle/>
-          <a:p>
-            <a:pPr algn="ctr"/>
-          </a:p>
-        </p:txBody>
-      </p:sp>
-      <p:sp>
-        <p:nvSpPr>
-          <p:cNvPr id="17" name="TextBox 16"/>
-          <p:cNvSpPr txBox="1"/>
-          <p:nvPr/>
-        </p:nvSpPr>
-        <p:spPr>
-          <a:xfrm>
-            <a:off x="6519672" y="3712463"/>
-            <a:ext cx="4663440" cy="274320"/>
-          </a:xfrm>
-          <a:prstGeom prst="rect">
-            <a:avLst/>
-          </a:prstGeom>
-          <a:noFill/>
-        </p:spPr>
-        <p:txBody>
-          <a:bodyPr wrap="square" anchor="t" lIns="0" rIns="0" tIns="0" bIns="0">
-            <a:spAutoFit/>
-          </a:bodyPr>
-          <a:lstStyle/>
-          <a:p>
-            <a:pPr algn="l">
-              <a:lnSpc>
-                <a:spcPct val="110000"/>
-              </a:lnSpc>
-            </a:pPr>
-            <a:r>
-              <a:rPr sz="1100" b="1">
-                <a:solidFill>
-                  <a:srgbClr val="0E8C7E"/>
-                </a:solidFill>
-                <a:latin typeface="Avenir Next"/>
-              </a:rPr>
-              <a:t>LOW VOLATILITY</a:t>
-            </a:r>
-          </a:p>
-        </p:txBody>
-      </p:sp>
-      <p:pic>
-        <p:nvPicPr>
-          <p:cNvPr id="18" name="Picture 17" descr="f_lowvol.png"/>
-          <p:cNvPicPr>
-            <a:picLocks noChangeAspect="1"/>
-          </p:cNvPicPr>
-          <p:nvPr/>
-        </p:nvPicPr>
-        <p:blipFill>
-          <a:blip r:embed="rId5"/>
-          <a:stretch>
-            <a:fillRect/>
-          </a:stretch>
-        </p:blipFill>
-        <p:spPr>
-          <a:xfrm>
-            <a:off x="6519672" y="4183615"/>
-            <a:ext cx="4663440" cy="776769"/>
-          </a:xfrm>
-          <a:prstGeom prst="rect">
-            <a:avLst/>
-          </a:prstGeom>
-        </p:spPr>
-      </p:pic>
-      <p:sp>
-        <p:nvSpPr>
-          <p:cNvPr id="19" name="TextBox 18"/>
-          <p:cNvSpPr txBox="1"/>
-          <p:nvPr/>
-        </p:nvSpPr>
-        <p:spPr>
-          <a:xfrm>
-            <a:off x="640080" y="5394959"/>
-            <a:ext cx="10908792" cy="457200"/>
-          </a:xfrm>
-          <a:prstGeom prst="rect">
-            <a:avLst/>
-          </a:prstGeom>
-          <a:noFill/>
-        </p:spPr>
-        <p:txBody>
-          <a:bodyPr wrap="square" anchor="t" lIns="0" rIns="0" tIns="0" bIns="0">
-            <a:spAutoFit/>
-          </a:bodyPr>
-          <a:lstStyle/>
-          <a:p>
-            <a:pPr algn="l">
-              <a:lnSpc>
-                <a:spcPct val="110000"/>
-              </a:lnSpc>
-            </a:pPr>
-            <a:r>
-              <a:rPr sz="1200" b="1">
-                <a:solidFill>
-                  <a:srgbClr val="0E1B2A"/>
-                </a:solidFill>
-                <a:latin typeface="Avenir Next"/>
-              </a:rPr>
-              <a:t>z(·)</a:t>
-            </a:r>
-            <a:r>
-              <a:rPr sz="1200" b="0">
-                <a:solidFill>
-                  <a:srgbClr val="6B7787"/>
-                </a:solidFill>
-                <a:latin typeface="Avenir Next"/>
-              </a:rPr>
-              <a:t> is the standardising score from slide 8; each factor is combined equally into the final score.</a:t>
-            </a:r>
-          </a:p>
-        </p:txBody>
-      </p:sp>
-      <p:sp>
-        <p:nvSpPr>
-          <p:cNvPr id="20" name="TextBox 19"/>
-          <p:cNvSpPr txBox="1"/>
-          <p:nvPr/>
-        </p:nvSpPr>
-        <p:spPr>
-          <a:xfrm>
-            <a:off x="640080" y="6437376"/>
-            <a:ext cx="7315200" cy="274320"/>
-          </a:xfrm>
-          <a:prstGeom prst="rect">
-            <a:avLst/>
-          </a:prstGeom>
-          <a:noFill/>
-        </p:spPr>
-        <p:txBody>
-          <a:bodyPr wrap="square" anchor="t" lIns="0" rIns="0" tIns="0" bIns="0">
-            <a:spAutoFit/>
-          </a:bodyPr>
-          <a:lstStyle/>
-          <a:p>
-            <a:pPr algn="l">
-              <a:lnSpc>
-                <a:spcPct val="110000"/>
-              </a:lnSpc>
-            </a:pPr>
-            <a:r>
-              <a:rPr sz="900" b="0">
-                <a:solidFill>
-                  <a:srgbClr val="6B7787"/>
-                </a:solidFill>
-                <a:latin typeface="Avenir Next"/>
-              </a:rPr>
-              <a:t>Systematic Factor Income Fund    ·    confidential</a:t>
-            </a:r>
-          </a:p>
-        </p:txBody>
-      </p:sp>
-      <p:sp>
-        <p:nvSpPr>
-          <p:cNvPr id="21" name="TextBox 20"/>
-          <p:cNvSpPr txBox="1"/>
-          <p:nvPr/>
-        </p:nvSpPr>
-        <p:spPr>
-          <a:xfrm>
-            <a:off x="10058400" y="6437376"/>
-            <a:ext cx="1490472" cy="274320"/>
-          </a:xfrm>
-          <a:prstGeom prst="rect">
-            <a:avLst/>
-          </a:prstGeom>
-          <a:noFill/>
-        </p:spPr>
-        <p:txBody>
-          <a:bodyPr wrap="square" anchor="t" lIns="0" rIns="0" tIns="0" bIns="0">
-            <a:spAutoFit/>
-          </a:bodyPr>
-          <a:lstStyle/>
-          <a:p>
-            <a:pPr algn="r">
-              <a:lnSpc>
-                <a:spcPct val="110000"/>
-              </a:lnSpc>
-            </a:pPr>
-            <a:r>
-              <a:rPr sz="900" b="0">
-                <a:solidFill>
-                  <a:srgbClr val="6B7787"/>
-                </a:solidFill>
-                <a:latin typeface="Avenir Next"/>
-              </a:rPr>
-              <a:t>32</a:t>
+              <a:rPr sz="1600" b="0">
+                <a:solidFill>
+                  <a:srgbClr val="C7D2DD"/>
+                </a:solidFill>
+                <a:latin typeface="Avenir Next"/>
+              </a:rPr>
+              <a:t>Formulas, sources, detailed results, and a glossary</a:t>
             </a:r>
           </a:p>
         </p:txBody>
@@ -25731,7 +25031,7 @@
                 </a:solidFill>
                 <a:latin typeface="Avenir Next"/>
               </a:rPr>
-              <a:t>APPENDIX · A2</a:t>
+              <a:t>APPENDIX · A1</a:t>
             </a:r>
           </a:p>
         </p:txBody>
@@ -25770,7 +25070,7 @@
                 </a:solidFill>
                 <a:latin typeface="Avenir Next"/>
               </a:rPr>
-              <a:t>Selected research</a:t>
+              <a:t>Factor formulas</a:t>
             </a:r>
           </a:p>
         </p:txBody>
@@ -25821,14 +25121,62 @@
       </p:sp>
       <p:sp>
         <p:nvSpPr>
-          <p:cNvPr id="7" name="TextBox 6"/>
-          <p:cNvSpPr txBox="1"/>
-          <p:nvPr/>
-        </p:nvSpPr>
-        <p:spPr>
-          <a:xfrm>
-            <a:off x="640080" y="1691640"/>
-            <a:ext cx="2194560" cy="365760"/>
+          <p:cNvPr id="7" name="Rounded Rectangle 6"/>
+          <p:cNvSpPr/>
+          <p:nvPr/>
+        </p:nvSpPr>
+        <p:spPr>
+          <a:xfrm>
+            <a:off x="640080" y="1783080"/>
+            <a:ext cx="5212080" cy="1554480"/>
+          </a:xfrm>
+          <a:prstGeom prst="roundRect">
+            <a:avLst>
+              <a:gd name="adj" fmla="val 5000"/>
+            </a:avLst>
+          </a:prstGeom>
+          <a:solidFill>
+            <a:srgbClr val="F4F7F9"/>
+          </a:solidFill>
+          <a:ln w="12700">
+            <a:solidFill>
+              <a:srgbClr val="DDE4EA"/>
+            </a:solidFill>
+          </a:ln>
+          <a:effectLst/>
+        </p:spPr>
+        <p:style>
+          <a:lnRef idx="1">
+            <a:schemeClr val="accent1"/>
+          </a:lnRef>
+          <a:fillRef idx="3">
+            <a:schemeClr val="accent1"/>
+          </a:fillRef>
+          <a:effectRef idx="2">
+            <a:schemeClr val="accent1"/>
+          </a:effectRef>
+          <a:fontRef idx="minor">
+            <a:schemeClr val="lt1"/>
+          </a:fontRef>
+        </p:style>
+        <p:txBody>
+          <a:bodyPr rtlCol="0" anchor="ctr"/>
+          <a:lstStyle/>
+          <a:p>
+            <a:pPr algn="ctr"/>
+          </a:p>
+        </p:txBody>
+      </p:sp>
+      <p:sp>
+        <p:nvSpPr>
+          <p:cNvPr id="8" name="TextBox 7"/>
+          <p:cNvSpPr txBox="1"/>
+          <p:nvPr/>
+        </p:nvSpPr>
+        <p:spPr>
+          <a:xfrm>
+            <a:off x="914400" y="1929384"/>
+            <a:ext cx="4663440" cy="274320"/>
           </a:xfrm>
           <a:prstGeom prst="rect">
             <a:avLst/>
@@ -25847,27 +25195,99 @@
               </a:lnSpc>
             </a:pPr>
             <a:r>
-              <a:rPr sz="1300" b="1">
+              <a:rPr sz="1100" b="1">
                 <a:solidFill>
                   <a:srgbClr val="0E8C7E"/>
                 </a:solidFill>
                 <a:latin typeface="Avenir Next"/>
               </a:rPr>
-              <a:t>Value</a:t>
-            </a:r>
-          </a:p>
-        </p:txBody>
-      </p:sp>
-      <p:sp>
-        <p:nvSpPr>
-          <p:cNvPr id="8" name="TextBox 7"/>
-          <p:cNvSpPr txBox="1"/>
-          <p:nvPr/>
-        </p:nvSpPr>
-        <p:spPr>
-          <a:xfrm>
-            <a:off x="2743200" y="1691640"/>
-            <a:ext cx="8778240" cy="292608"/>
+              <a:t>VALUE</a:t>
+            </a:r>
+          </a:p>
+        </p:txBody>
+      </p:sp>
+      <p:pic>
+        <p:nvPicPr>
+          <p:cNvPr id="9" name="Picture 8" descr="f_value.png"/>
+          <p:cNvPicPr>
+            <a:picLocks noChangeAspect="1"/>
+          </p:cNvPicPr>
+          <p:nvPr/>
+        </p:nvPicPr>
+        <p:blipFill>
+          <a:blip r:embed="rId2"/>
+          <a:stretch>
+            <a:fillRect/>
+          </a:stretch>
+        </p:blipFill>
+        <p:spPr>
+          <a:xfrm>
+            <a:off x="914400" y="2493152"/>
+            <a:ext cx="4663440" cy="591534"/>
+          </a:xfrm>
+          <a:prstGeom prst="rect">
+            <a:avLst/>
+          </a:prstGeom>
+        </p:spPr>
+      </p:pic>
+      <p:sp>
+        <p:nvSpPr>
+          <p:cNvPr id="10" name="Rounded Rectangle 9"/>
+          <p:cNvSpPr/>
+          <p:nvPr/>
+        </p:nvSpPr>
+        <p:spPr>
+          <a:xfrm>
+            <a:off x="6245352" y="1783080"/>
+            <a:ext cx="5212080" cy="1554480"/>
+          </a:xfrm>
+          <a:prstGeom prst="roundRect">
+            <a:avLst>
+              <a:gd name="adj" fmla="val 5000"/>
+            </a:avLst>
+          </a:prstGeom>
+          <a:solidFill>
+            <a:srgbClr val="F4F7F9"/>
+          </a:solidFill>
+          <a:ln w="12700">
+            <a:solidFill>
+              <a:srgbClr val="DDE4EA"/>
+            </a:solidFill>
+          </a:ln>
+          <a:effectLst/>
+        </p:spPr>
+        <p:style>
+          <a:lnRef idx="1">
+            <a:schemeClr val="accent1"/>
+          </a:lnRef>
+          <a:fillRef idx="3">
+            <a:schemeClr val="accent1"/>
+          </a:fillRef>
+          <a:effectRef idx="2">
+            <a:schemeClr val="accent1"/>
+          </a:effectRef>
+          <a:fontRef idx="minor">
+            <a:schemeClr val="lt1"/>
+          </a:fontRef>
+        </p:style>
+        <p:txBody>
+          <a:bodyPr rtlCol="0" anchor="ctr"/>
+          <a:lstStyle/>
+          <a:p>
+            <a:pPr algn="ctr"/>
+          </a:p>
+        </p:txBody>
+      </p:sp>
+      <p:sp>
+        <p:nvSpPr>
+          <p:cNvPr id="11" name="TextBox 10"/>
+          <p:cNvSpPr txBox="1"/>
+          <p:nvPr/>
+        </p:nvSpPr>
+        <p:spPr>
+          <a:xfrm>
+            <a:off x="6519672" y="1929384"/>
+            <a:ext cx="4663440" cy="274320"/>
           </a:xfrm>
           <a:prstGeom prst="rect">
             <a:avLst/>
@@ -25886,27 +25306,99 @@
               </a:lnSpc>
             </a:pPr>
             <a:r>
-              <a:rPr sz="1100" b="0">
-                <a:solidFill>
-                  <a:srgbClr val="1F2A37"/>
-                </a:solidFill>
-                <a:latin typeface="Avenir Next"/>
-              </a:rPr>
-              <a:t>·  Fama &amp; French (1992), The Cross-Section of Expected Stock Returns</a:t>
-            </a:r>
-          </a:p>
-        </p:txBody>
-      </p:sp>
-      <p:sp>
-        <p:nvSpPr>
-          <p:cNvPr id="9" name="TextBox 8"/>
-          <p:cNvSpPr txBox="1"/>
-          <p:nvPr/>
-        </p:nvSpPr>
-        <p:spPr>
-          <a:xfrm>
-            <a:off x="2743200" y="1965960"/>
-            <a:ext cx="8778240" cy="292608"/>
+              <a:rPr sz="1100" b="1">
+                <a:solidFill>
+                  <a:srgbClr val="0E8C7E"/>
+                </a:solidFill>
+                <a:latin typeface="Avenir Next"/>
+              </a:rPr>
+              <a:t>MOMENTUM</a:t>
+            </a:r>
+          </a:p>
+        </p:txBody>
+      </p:sp>
+      <p:pic>
+        <p:nvPicPr>
+          <p:cNvPr id="12" name="Picture 11" descr="f_mom.png"/>
+          <p:cNvPicPr>
+            <a:picLocks noChangeAspect="1"/>
+          </p:cNvPicPr>
+          <p:nvPr/>
+        </p:nvPicPr>
+        <p:blipFill>
+          <a:blip r:embed="rId3"/>
+          <a:stretch>
+            <a:fillRect/>
+          </a:stretch>
+        </p:blipFill>
+        <p:spPr>
+          <a:xfrm>
+            <a:off x="6519672" y="2338142"/>
+            <a:ext cx="4663440" cy="901555"/>
+          </a:xfrm>
+          <a:prstGeom prst="rect">
+            <a:avLst/>
+          </a:prstGeom>
+        </p:spPr>
+      </p:pic>
+      <p:sp>
+        <p:nvSpPr>
+          <p:cNvPr id="13" name="Rounded Rectangle 12"/>
+          <p:cNvSpPr/>
+          <p:nvPr/>
+        </p:nvSpPr>
+        <p:spPr>
+          <a:xfrm>
+            <a:off x="640080" y="3566160"/>
+            <a:ext cx="5212080" cy="1554480"/>
+          </a:xfrm>
+          <a:prstGeom prst="roundRect">
+            <a:avLst>
+              <a:gd name="adj" fmla="val 5000"/>
+            </a:avLst>
+          </a:prstGeom>
+          <a:solidFill>
+            <a:srgbClr val="F4F7F9"/>
+          </a:solidFill>
+          <a:ln w="12700">
+            <a:solidFill>
+              <a:srgbClr val="DDE4EA"/>
+            </a:solidFill>
+          </a:ln>
+          <a:effectLst/>
+        </p:spPr>
+        <p:style>
+          <a:lnRef idx="1">
+            <a:schemeClr val="accent1"/>
+          </a:lnRef>
+          <a:fillRef idx="3">
+            <a:schemeClr val="accent1"/>
+          </a:fillRef>
+          <a:effectRef idx="2">
+            <a:schemeClr val="accent1"/>
+          </a:effectRef>
+          <a:fontRef idx="minor">
+            <a:schemeClr val="lt1"/>
+          </a:fontRef>
+        </p:style>
+        <p:txBody>
+          <a:bodyPr rtlCol="0" anchor="ctr"/>
+          <a:lstStyle/>
+          <a:p>
+            <a:pPr algn="ctr"/>
+          </a:p>
+        </p:txBody>
+      </p:sp>
+      <p:sp>
+        <p:nvSpPr>
+          <p:cNvPr id="14" name="TextBox 13"/>
+          <p:cNvSpPr txBox="1"/>
+          <p:nvPr/>
+        </p:nvSpPr>
+        <p:spPr>
+          <a:xfrm>
+            <a:off x="914400" y="3712463"/>
+            <a:ext cx="4663440" cy="274320"/>
           </a:xfrm>
           <a:prstGeom prst="rect">
             <a:avLst/>
@@ -25925,27 +25417,99 @@
               </a:lnSpc>
             </a:pPr>
             <a:r>
-              <a:rPr sz="1100" b="0">
-                <a:solidFill>
-                  <a:srgbClr val="1F2A37"/>
-                </a:solidFill>
-                <a:latin typeface="Avenir Next"/>
-              </a:rPr>
-              <a:t>·  Fama &amp; French (1993), Common Risk Factors in Stocks and Bonds</a:t>
-            </a:r>
-          </a:p>
-        </p:txBody>
-      </p:sp>
-      <p:sp>
-        <p:nvSpPr>
-          <p:cNvPr id="10" name="TextBox 9"/>
-          <p:cNvSpPr txBox="1"/>
-          <p:nvPr/>
-        </p:nvSpPr>
-        <p:spPr>
-          <a:xfrm>
-            <a:off x="2743200" y="2240280"/>
-            <a:ext cx="8778240" cy="292608"/>
+              <a:rPr sz="1100" b="1">
+                <a:solidFill>
+                  <a:srgbClr val="0E8C7E"/>
+                </a:solidFill>
+                <a:latin typeface="Avenir Next"/>
+              </a:rPr>
+              <a:t>QUALITY</a:t>
+            </a:r>
+          </a:p>
+        </p:txBody>
+      </p:sp>
+      <p:pic>
+        <p:nvPicPr>
+          <p:cNvPr id="15" name="Picture 14" descr="f_qual.png"/>
+          <p:cNvPicPr>
+            <a:picLocks noChangeAspect="1"/>
+          </p:cNvPicPr>
+          <p:nvPr/>
+        </p:nvPicPr>
+        <p:blipFill>
+          <a:blip r:embed="rId4"/>
+          <a:stretch>
+            <a:fillRect/>
+          </a:stretch>
+        </p:blipFill>
+        <p:spPr>
+          <a:xfrm>
+            <a:off x="914400" y="4319748"/>
+            <a:ext cx="4663440" cy="504502"/>
+          </a:xfrm>
+          <a:prstGeom prst="rect">
+            <a:avLst/>
+          </a:prstGeom>
+        </p:spPr>
+      </p:pic>
+      <p:sp>
+        <p:nvSpPr>
+          <p:cNvPr id="16" name="Rounded Rectangle 15"/>
+          <p:cNvSpPr/>
+          <p:nvPr/>
+        </p:nvSpPr>
+        <p:spPr>
+          <a:xfrm>
+            <a:off x="6245352" y="3566160"/>
+            <a:ext cx="5212080" cy="1554480"/>
+          </a:xfrm>
+          <a:prstGeom prst="roundRect">
+            <a:avLst>
+              <a:gd name="adj" fmla="val 5000"/>
+            </a:avLst>
+          </a:prstGeom>
+          <a:solidFill>
+            <a:srgbClr val="F4F7F9"/>
+          </a:solidFill>
+          <a:ln w="12700">
+            <a:solidFill>
+              <a:srgbClr val="DDE4EA"/>
+            </a:solidFill>
+          </a:ln>
+          <a:effectLst/>
+        </p:spPr>
+        <p:style>
+          <a:lnRef idx="1">
+            <a:schemeClr val="accent1"/>
+          </a:lnRef>
+          <a:fillRef idx="3">
+            <a:schemeClr val="accent1"/>
+          </a:fillRef>
+          <a:effectRef idx="2">
+            <a:schemeClr val="accent1"/>
+          </a:effectRef>
+          <a:fontRef idx="minor">
+            <a:schemeClr val="lt1"/>
+          </a:fontRef>
+        </p:style>
+        <p:txBody>
+          <a:bodyPr rtlCol="0" anchor="ctr"/>
+          <a:lstStyle/>
+          <a:p>
+            <a:pPr algn="ctr"/>
+          </a:p>
+        </p:txBody>
+      </p:sp>
+      <p:sp>
+        <p:nvSpPr>
+          <p:cNvPr id="17" name="TextBox 16"/>
+          <p:cNvSpPr txBox="1"/>
+          <p:nvPr/>
+        </p:nvSpPr>
+        <p:spPr>
+          <a:xfrm>
+            <a:off x="6519672" y="3712463"/>
+            <a:ext cx="4663440" cy="274320"/>
           </a:xfrm>
           <a:prstGeom prst="rect">
             <a:avLst/>
@@ -25964,27 +25528,51 @@
               </a:lnSpc>
             </a:pPr>
             <a:r>
-              <a:rPr sz="1100" b="0">
-                <a:solidFill>
-                  <a:srgbClr val="1F2A37"/>
-                </a:solidFill>
-                <a:latin typeface="Avenir Next"/>
-              </a:rPr>
-              <a:t>·  Basu (1977), Investment Performance in Relation to P/E Ratios</a:t>
-            </a:r>
-          </a:p>
-        </p:txBody>
-      </p:sp>
-      <p:sp>
-        <p:nvSpPr>
-          <p:cNvPr id="11" name="TextBox 10"/>
-          <p:cNvSpPr txBox="1"/>
-          <p:nvPr/>
-        </p:nvSpPr>
-        <p:spPr>
-          <a:xfrm>
-            <a:off x="640080" y="2642616"/>
-            <a:ext cx="2194560" cy="365760"/>
+              <a:rPr sz="1100" b="1">
+                <a:solidFill>
+                  <a:srgbClr val="0E8C7E"/>
+                </a:solidFill>
+                <a:latin typeface="Avenir Next"/>
+              </a:rPr>
+              <a:t>LOW VOLATILITY</a:t>
+            </a:r>
+          </a:p>
+        </p:txBody>
+      </p:sp>
+      <p:pic>
+        <p:nvPicPr>
+          <p:cNvPr id="18" name="Picture 17" descr="f_lowvol.png"/>
+          <p:cNvPicPr>
+            <a:picLocks noChangeAspect="1"/>
+          </p:cNvPicPr>
+          <p:nvPr/>
+        </p:nvPicPr>
+        <p:blipFill>
+          <a:blip r:embed="rId5"/>
+          <a:stretch>
+            <a:fillRect/>
+          </a:stretch>
+        </p:blipFill>
+        <p:spPr>
+          <a:xfrm>
+            <a:off x="6519672" y="4183615"/>
+            <a:ext cx="4663440" cy="776769"/>
+          </a:xfrm>
+          <a:prstGeom prst="rect">
+            <a:avLst/>
+          </a:prstGeom>
+        </p:spPr>
+      </p:pic>
+      <p:sp>
+        <p:nvSpPr>
+          <p:cNvPr id="19" name="TextBox 18"/>
+          <p:cNvSpPr txBox="1"/>
+          <p:nvPr/>
+        </p:nvSpPr>
+        <p:spPr>
+          <a:xfrm>
+            <a:off x="640080" y="5394959"/>
+            <a:ext cx="10908792" cy="457200"/>
           </a:xfrm>
           <a:prstGeom prst="rect">
             <a:avLst/>
@@ -26003,325 +25591,22 @@
               </a:lnSpc>
             </a:pPr>
             <a:r>
-              <a:rPr sz="1300" b="1">
-                <a:solidFill>
-                  <a:srgbClr val="0E8C7E"/>
-                </a:solidFill>
-                <a:latin typeface="Avenir Next"/>
-              </a:rPr>
-              <a:t>Momentum</a:t>
-            </a:r>
-          </a:p>
-        </p:txBody>
-      </p:sp>
-      <p:sp>
-        <p:nvSpPr>
-          <p:cNvPr id="12" name="TextBox 11"/>
-          <p:cNvSpPr txBox="1"/>
-          <p:nvPr/>
-        </p:nvSpPr>
-        <p:spPr>
-          <a:xfrm>
-            <a:off x="2743200" y="2642616"/>
-            <a:ext cx="8778240" cy="292608"/>
-          </a:xfrm>
-          <a:prstGeom prst="rect">
-            <a:avLst/>
-          </a:prstGeom>
-          <a:noFill/>
-        </p:spPr>
-        <p:txBody>
-          <a:bodyPr wrap="square" anchor="t" lIns="0" rIns="0" tIns="0" bIns="0">
-            <a:spAutoFit/>
-          </a:bodyPr>
-          <a:lstStyle/>
-          <a:p>
-            <a:pPr algn="l">
-              <a:lnSpc>
-                <a:spcPct val="110000"/>
-              </a:lnSpc>
-            </a:pPr>
-            <a:r>
-              <a:rPr sz="1100" b="0">
-                <a:solidFill>
-                  <a:srgbClr val="1F2A37"/>
-                </a:solidFill>
-                <a:latin typeface="Avenir Next"/>
-              </a:rPr>
-              <a:t>·  Jegadeesh &amp; Titman (1993), Returns to Buying Winners and Selling Losers</a:t>
-            </a:r>
-          </a:p>
-        </p:txBody>
-      </p:sp>
-      <p:sp>
-        <p:nvSpPr>
-          <p:cNvPr id="13" name="TextBox 12"/>
-          <p:cNvSpPr txBox="1"/>
-          <p:nvPr/>
-        </p:nvSpPr>
-        <p:spPr>
-          <a:xfrm>
-            <a:off x="2743200" y="2916936"/>
-            <a:ext cx="8778240" cy="292608"/>
-          </a:xfrm>
-          <a:prstGeom prst="rect">
-            <a:avLst/>
-          </a:prstGeom>
-          <a:noFill/>
-        </p:spPr>
-        <p:txBody>
-          <a:bodyPr wrap="square" anchor="t" lIns="0" rIns="0" tIns="0" bIns="0">
-            <a:spAutoFit/>
-          </a:bodyPr>
-          <a:lstStyle/>
-          <a:p>
-            <a:pPr algn="l">
-              <a:lnSpc>
-                <a:spcPct val="110000"/>
-              </a:lnSpc>
-            </a:pPr>
-            <a:r>
-              <a:rPr sz="1100" b="0">
-                <a:solidFill>
-                  <a:srgbClr val="1F2A37"/>
-                </a:solidFill>
-                <a:latin typeface="Avenir Next"/>
-              </a:rPr>
-              <a:t>·  Carhart (1997), On Persistence in Mutual Fund Performance</a:t>
-            </a:r>
-          </a:p>
-        </p:txBody>
-      </p:sp>
-      <p:sp>
-        <p:nvSpPr>
-          <p:cNvPr id="14" name="TextBox 13"/>
-          <p:cNvSpPr txBox="1"/>
-          <p:nvPr/>
-        </p:nvSpPr>
-        <p:spPr>
-          <a:xfrm>
-            <a:off x="2743200" y="3191256"/>
-            <a:ext cx="8778240" cy="292608"/>
-          </a:xfrm>
-          <a:prstGeom prst="rect">
-            <a:avLst/>
-          </a:prstGeom>
-          <a:noFill/>
-        </p:spPr>
-        <p:txBody>
-          <a:bodyPr wrap="square" anchor="t" lIns="0" rIns="0" tIns="0" bIns="0">
-            <a:spAutoFit/>
-          </a:bodyPr>
-          <a:lstStyle/>
-          <a:p>
-            <a:pPr algn="l">
-              <a:lnSpc>
-                <a:spcPct val="110000"/>
-              </a:lnSpc>
-            </a:pPr>
-            <a:r>
-              <a:rPr sz="1100" b="0">
-                <a:solidFill>
-                  <a:srgbClr val="1F2A37"/>
-                </a:solidFill>
-                <a:latin typeface="Avenir Next"/>
-              </a:rPr>
-              <a:t>·  Asness, Moskowitz &amp; Pedersen (2013), Value and Momentum Everywhere</a:t>
-            </a:r>
-          </a:p>
-        </p:txBody>
-      </p:sp>
-      <p:sp>
-        <p:nvSpPr>
-          <p:cNvPr id="15" name="TextBox 14"/>
-          <p:cNvSpPr txBox="1"/>
-          <p:nvPr/>
-        </p:nvSpPr>
-        <p:spPr>
-          <a:xfrm>
-            <a:off x="640080" y="3593592"/>
-            <a:ext cx="2194560" cy="365760"/>
-          </a:xfrm>
-          <a:prstGeom prst="rect">
-            <a:avLst/>
-          </a:prstGeom>
-          <a:noFill/>
-        </p:spPr>
-        <p:txBody>
-          <a:bodyPr wrap="square" anchor="t" lIns="0" rIns="0" tIns="0" bIns="0">
-            <a:spAutoFit/>
-          </a:bodyPr>
-          <a:lstStyle/>
-          <a:p>
-            <a:pPr algn="l">
-              <a:lnSpc>
-                <a:spcPct val="110000"/>
-              </a:lnSpc>
-            </a:pPr>
-            <a:r>
-              <a:rPr sz="1300" b="1">
-                <a:solidFill>
-                  <a:srgbClr val="0E8C7E"/>
-                </a:solidFill>
-                <a:latin typeface="Avenir Next"/>
-              </a:rPr>
-              <a:t>Quality</a:t>
-            </a:r>
-          </a:p>
-        </p:txBody>
-      </p:sp>
-      <p:sp>
-        <p:nvSpPr>
-          <p:cNvPr id="16" name="TextBox 15"/>
-          <p:cNvSpPr txBox="1"/>
-          <p:nvPr/>
-        </p:nvSpPr>
-        <p:spPr>
-          <a:xfrm>
-            <a:off x="2743200" y="3593592"/>
-            <a:ext cx="8778240" cy="292608"/>
-          </a:xfrm>
-          <a:prstGeom prst="rect">
-            <a:avLst/>
-          </a:prstGeom>
-          <a:noFill/>
-        </p:spPr>
-        <p:txBody>
-          <a:bodyPr wrap="square" anchor="t" lIns="0" rIns="0" tIns="0" bIns="0">
-            <a:spAutoFit/>
-          </a:bodyPr>
-          <a:lstStyle/>
-          <a:p>
-            <a:pPr algn="l">
-              <a:lnSpc>
-                <a:spcPct val="110000"/>
-              </a:lnSpc>
-            </a:pPr>
-            <a:r>
-              <a:rPr sz="1100" b="0">
-                <a:solidFill>
-                  <a:srgbClr val="1F2A37"/>
-                </a:solidFill>
-                <a:latin typeface="Avenir Next"/>
-              </a:rPr>
-              <a:t>·  Novy-Marx (2013), The Gross Profitability Premium</a:t>
-            </a:r>
-          </a:p>
-        </p:txBody>
-      </p:sp>
-      <p:sp>
-        <p:nvSpPr>
-          <p:cNvPr id="17" name="TextBox 16"/>
-          <p:cNvSpPr txBox="1"/>
-          <p:nvPr/>
-        </p:nvSpPr>
-        <p:spPr>
-          <a:xfrm>
-            <a:off x="2743200" y="3867912"/>
-            <a:ext cx="8778240" cy="292608"/>
-          </a:xfrm>
-          <a:prstGeom prst="rect">
-            <a:avLst/>
-          </a:prstGeom>
-          <a:noFill/>
-        </p:spPr>
-        <p:txBody>
-          <a:bodyPr wrap="square" anchor="t" lIns="0" rIns="0" tIns="0" bIns="0">
-            <a:spAutoFit/>
-          </a:bodyPr>
-          <a:lstStyle/>
-          <a:p>
-            <a:pPr algn="l">
-              <a:lnSpc>
-                <a:spcPct val="110000"/>
-              </a:lnSpc>
-            </a:pPr>
-            <a:r>
-              <a:rPr sz="1100" b="0">
-                <a:solidFill>
-                  <a:srgbClr val="1F2A37"/>
-                </a:solidFill>
-                <a:latin typeface="Avenir Next"/>
-              </a:rPr>
-              <a:t>·  Asness, Frazzini &amp; Pedersen (2019), Quality Minus Junk</a:t>
-            </a:r>
-          </a:p>
-        </p:txBody>
-      </p:sp>
-      <p:sp>
-        <p:nvSpPr>
-          <p:cNvPr id="18" name="TextBox 17"/>
-          <p:cNvSpPr txBox="1"/>
-          <p:nvPr/>
-        </p:nvSpPr>
-        <p:spPr>
-          <a:xfrm>
-            <a:off x="2743200" y="4142232"/>
-            <a:ext cx="8778240" cy="292608"/>
-          </a:xfrm>
-          <a:prstGeom prst="rect">
-            <a:avLst/>
-          </a:prstGeom>
-          <a:noFill/>
-        </p:spPr>
-        <p:txBody>
-          <a:bodyPr wrap="square" anchor="t" lIns="0" rIns="0" tIns="0" bIns="0">
-            <a:spAutoFit/>
-          </a:bodyPr>
-          <a:lstStyle/>
-          <a:p>
-            <a:pPr algn="l">
-              <a:lnSpc>
-                <a:spcPct val="110000"/>
-              </a:lnSpc>
-            </a:pPr>
-            <a:r>
-              <a:rPr sz="1100" b="0">
-                <a:solidFill>
-                  <a:srgbClr val="1F2A37"/>
-                </a:solidFill>
-                <a:latin typeface="Avenir Next"/>
-              </a:rPr>
-              <a:t>·  Piotroski (2000), Value Investing and the F-Score</a:t>
-            </a:r>
-          </a:p>
-        </p:txBody>
-      </p:sp>
-      <p:sp>
-        <p:nvSpPr>
-          <p:cNvPr id="19" name="TextBox 18"/>
-          <p:cNvSpPr txBox="1"/>
-          <p:nvPr/>
-        </p:nvSpPr>
-        <p:spPr>
-          <a:xfrm>
-            <a:off x="640080" y="4544568"/>
-            <a:ext cx="2194560" cy="365760"/>
-          </a:xfrm>
-          <a:prstGeom prst="rect">
-            <a:avLst/>
-          </a:prstGeom>
-          <a:noFill/>
-        </p:spPr>
-        <p:txBody>
-          <a:bodyPr wrap="square" anchor="t" lIns="0" rIns="0" tIns="0" bIns="0">
-            <a:spAutoFit/>
-          </a:bodyPr>
-          <a:lstStyle/>
-          <a:p>
-            <a:pPr algn="l">
-              <a:lnSpc>
-                <a:spcPct val="110000"/>
-              </a:lnSpc>
-            </a:pPr>
-            <a:r>
-              <a:rPr sz="1300" b="1">
-                <a:solidFill>
-                  <a:srgbClr val="0E8C7E"/>
-                </a:solidFill>
-                <a:latin typeface="Avenir Next"/>
-              </a:rPr>
-              <a:t>Low volatility</a:t>
+              <a:rPr sz="1200" b="1">
+                <a:solidFill>
+                  <a:srgbClr val="0E1B2A"/>
+                </a:solidFill>
+                <a:latin typeface="Avenir Next"/>
+              </a:rPr>
+              <a:t>z(·)</a:t>
+            </a:r>
+            <a:r>
+              <a:rPr sz="1200" b="0">
+                <a:solidFill>
+                  <a:srgbClr val="6B7787"/>
+                </a:solidFill>
+                <a:latin typeface="Avenir Next"/>
+              </a:rPr>
+              <a:t> is the standardising score from slide 8; each factor is combined equally into the final score.</a:t>
             </a:r>
           </a:p>
         </p:txBody>
@@ -26329,279 +25614,6 @@
       <p:sp>
         <p:nvSpPr>
           <p:cNvPr id="20" name="TextBox 19"/>
-          <p:cNvSpPr txBox="1"/>
-          <p:nvPr/>
-        </p:nvSpPr>
-        <p:spPr>
-          <a:xfrm>
-            <a:off x="2743200" y="4544568"/>
-            <a:ext cx="8778240" cy="292608"/>
-          </a:xfrm>
-          <a:prstGeom prst="rect">
-            <a:avLst/>
-          </a:prstGeom>
-          <a:noFill/>
-        </p:spPr>
-        <p:txBody>
-          <a:bodyPr wrap="square" anchor="t" lIns="0" rIns="0" tIns="0" bIns="0">
-            <a:spAutoFit/>
-          </a:bodyPr>
-          <a:lstStyle/>
-          <a:p>
-            <a:pPr algn="l">
-              <a:lnSpc>
-                <a:spcPct val="110000"/>
-              </a:lnSpc>
-            </a:pPr>
-            <a:r>
-              <a:rPr sz="1100" b="0">
-                <a:solidFill>
-                  <a:srgbClr val="1F2A37"/>
-                </a:solidFill>
-                <a:latin typeface="Avenir Next"/>
-              </a:rPr>
-              <a:t>·  Ang, Hodrick, Xing &amp; Zhang (2006), The Cross-Section of Volatility</a:t>
-            </a:r>
-          </a:p>
-        </p:txBody>
-      </p:sp>
-      <p:sp>
-        <p:nvSpPr>
-          <p:cNvPr id="21" name="TextBox 20"/>
-          <p:cNvSpPr txBox="1"/>
-          <p:nvPr/>
-        </p:nvSpPr>
-        <p:spPr>
-          <a:xfrm>
-            <a:off x="2743200" y="4818888"/>
-            <a:ext cx="8778240" cy="292608"/>
-          </a:xfrm>
-          <a:prstGeom prst="rect">
-            <a:avLst/>
-          </a:prstGeom>
-          <a:noFill/>
-        </p:spPr>
-        <p:txBody>
-          <a:bodyPr wrap="square" anchor="t" lIns="0" rIns="0" tIns="0" bIns="0">
-            <a:spAutoFit/>
-          </a:bodyPr>
-          <a:lstStyle/>
-          <a:p>
-            <a:pPr algn="l">
-              <a:lnSpc>
-                <a:spcPct val="110000"/>
-              </a:lnSpc>
-            </a:pPr>
-            <a:r>
-              <a:rPr sz="1100" b="0">
-                <a:solidFill>
-                  <a:srgbClr val="1F2A37"/>
-                </a:solidFill>
-                <a:latin typeface="Avenir Next"/>
-              </a:rPr>
-              <a:t>·  Frazzini &amp; Pedersen (2014), Betting Against Beta</a:t>
-            </a:r>
-          </a:p>
-        </p:txBody>
-      </p:sp>
-      <p:sp>
-        <p:nvSpPr>
-          <p:cNvPr id="22" name="TextBox 21"/>
-          <p:cNvSpPr txBox="1"/>
-          <p:nvPr/>
-        </p:nvSpPr>
-        <p:spPr>
-          <a:xfrm>
-            <a:off x="2743200" y="5093208"/>
-            <a:ext cx="8778240" cy="292608"/>
-          </a:xfrm>
-          <a:prstGeom prst="rect">
-            <a:avLst/>
-          </a:prstGeom>
-          <a:noFill/>
-        </p:spPr>
-        <p:txBody>
-          <a:bodyPr wrap="square" anchor="t" lIns="0" rIns="0" tIns="0" bIns="0">
-            <a:spAutoFit/>
-          </a:bodyPr>
-          <a:lstStyle/>
-          <a:p>
-            <a:pPr algn="l">
-              <a:lnSpc>
-                <a:spcPct val="110000"/>
-              </a:lnSpc>
-            </a:pPr>
-            <a:r>
-              <a:rPr sz="1100" b="0">
-                <a:solidFill>
-                  <a:srgbClr val="1F2A37"/>
-                </a:solidFill>
-                <a:latin typeface="Avenir Next"/>
-              </a:rPr>
-              <a:t>·  Baker, Bradley &amp; Wurgler (2011), Benchmarks as Limits to Arbitrage</a:t>
-            </a:r>
-          </a:p>
-        </p:txBody>
-      </p:sp>
-      <p:sp>
-        <p:nvSpPr>
-          <p:cNvPr id="23" name="TextBox 22"/>
-          <p:cNvSpPr txBox="1"/>
-          <p:nvPr/>
-        </p:nvSpPr>
-        <p:spPr>
-          <a:xfrm>
-            <a:off x="640080" y="5495544"/>
-            <a:ext cx="2194560" cy="365760"/>
-          </a:xfrm>
-          <a:prstGeom prst="rect">
-            <a:avLst/>
-          </a:prstGeom>
-          <a:noFill/>
-        </p:spPr>
-        <p:txBody>
-          <a:bodyPr wrap="square" anchor="t" lIns="0" rIns="0" tIns="0" bIns="0">
-            <a:spAutoFit/>
-          </a:bodyPr>
-          <a:lstStyle/>
-          <a:p>
-            <a:pPr algn="l">
-              <a:lnSpc>
-                <a:spcPct val="110000"/>
-              </a:lnSpc>
-            </a:pPr>
-            <a:r>
-              <a:rPr sz="1300" b="1">
-                <a:solidFill>
-                  <a:srgbClr val="0E8C7E"/>
-                </a:solidFill>
-                <a:latin typeface="Avenir Next"/>
-              </a:rPr>
-              <a:t>Options premium</a:t>
-            </a:r>
-          </a:p>
-        </p:txBody>
-      </p:sp>
-      <p:sp>
-        <p:nvSpPr>
-          <p:cNvPr id="24" name="TextBox 23"/>
-          <p:cNvSpPr txBox="1"/>
-          <p:nvPr/>
-        </p:nvSpPr>
-        <p:spPr>
-          <a:xfrm>
-            <a:off x="2743200" y="5495544"/>
-            <a:ext cx="8778240" cy="292608"/>
-          </a:xfrm>
-          <a:prstGeom prst="rect">
-            <a:avLst/>
-          </a:prstGeom>
-          <a:noFill/>
-        </p:spPr>
-        <p:txBody>
-          <a:bodyPr wrap="square" anchor="t" lIns="0" rIns="0" tIns="0" bIns="0">
-            <a:spAutoFit/>
-          </a:bodyPr>
-          <a:lstStyle/>
-          <a:p>
-            <a:pPr algn="l">
-              <a:lnSpc>
-                <a:spcPct val="110000"/>
-              </a:lnSpc>
-            </a:pPr>
-            <a:r>
-              <a:rPr sz="1100" b="0">
-                <a:solidFill>
-                  <a:srgbClr val="1F2A37"/>
-                </a:solidFill>
-                <a:latin typeface="Avenir Next"/>
-              </a:rPr>
-              <a:t>·  Whaley (2002), Return and Risk of the CBOE BuyWrite Index</a:t>
-            </a:r>
-          </a:p>
-        </p:txBody>
-      </p:sp>
-      <p:sp>
-        <p:nvSpPr>
-          <p:cNvPr id="25" name="TextBox 24"/>
-          <p:cNvSpPr txBox="1"/>
-          <p:nvPr/>
-        </p:nvSpPr>
-        <p:spPr>
-          <a:xfrm>
-            <a:off x="2743200" y="5769864"/>
-            <a:ext cx="8778240" cy="292608"/>
-          </a:xfrm>
-          <a:prstGeom prst="rect">
-            <a:avLst/>
-          </a:prstGeom>
-          <a:noFill/>
-        </p:spPr>
-        <p:txBody>
-          <a:bodyPr wrap="square" anchor="t" lIns="0" rIns="0" tIns="0" bIns="0">
-            <a:spAutoFit/>
-          </a:bodyPr>
-          <a:lstStyle/>
-          <a:p>
-            <a:pPr algn="l">
-              <a:lnSpc>
-                <a:spcPct val="110000"/>
-              </a:lnSpc>
-            </a:pPr>
-            <a:r>
-              <a:rPr sz="1100" b="0">
-                <a:solidFill>
-                  <a:srgbClr val="1F2A37"/>
-                </a:solidFill>
-                <a:latin typeface="Avenir Next"/>
-              </a:rPr>
-              <a:t>·  Carr &amp; Wu (2009), Variance Risk Premiums</a:t>
-            </a:r>
-          </a:p>
-        </p:txBody>
-      </p:sp>
-      <p:sp>
-        <p:nvSpPr>
-          <p:cNvPr id="26" name="TextBox 25"/>
-          <p:cNvSpPr txBox="1"/>
-          <p:nvPr/>
-        </p:nvSpPr>
-        <p:spPr>
-          <a:xfrm>
-            <a:off x="2743200" y="6044183"/>
-            <a:ext cx="8778240" cy="292608"/>
-          </a:xfrm>
-          <a:prstGeom prst="rect">
-            <a:avLst/>
-          </a:prstGeom>
-          <a:noFill/>
-        </p:spPr>
-        <p:txBody>
-          <a:bodyPr wrap="square" anchor="t" lIns="0" rIns="0" tIns="0" bIns="0">
-            <a:spAutoFit/>
-          </a:bodyPr>
-          <a:lstStyle/>
-          <a:p>
-            <a:pPr algn="l">
-              <a:lnSpc>
-                <a:spcPct val="110000"/>
-              </a:lnSpc>
-            </a:pPr>
-            <a:r>
-              <a:rPr sz="1100" b="0">
-                <a:solidFill>
-                  <a:srgbClr val="1F2A37"/>
-                </a:solidFill>
-                <a:latin typeface="Avenir Next"/>
-              </a:rPr>
-              <a:t>·  Bakshi &amp; Kapadia (2003), Delta-Hedged Gains and the Volatility Premium</a:t>
-            </a:r>
-          </a:p>
-        </p:txBody>
-      </p:sp>
-      <p:sp>
-        <p:nvSpPr>
-          <p:cNvPr id="27" name="TextBox 26"/>
           <p:cNvSpPr txBox="1"/>
           <p:nvPr/>
         </p:nvSpPr>
@@ -26640,7 +25652,7 @@
       </p:sp>
       <p:sp>
         <p:nvSpPr>
-          <p:cNvPr id="28" name="TextBox 27"/>
+          <p:cNvPr id="21" name="TextBox 20"/>
           <p:cNvSpPr txBox="1"/>
           <p:nvPr/>
         </p:nvSpPr>
@@ -26686,6 +25698,1092 @@
 </file>
 
 <file path=ppt/slides/slide45.xml><?xml version="1.0" encoding="utf-8"?>
+<p:sld xmlns:a="http://schemas.openxmlformats.org/drawingml/2006/main" xmlns:p="http://schemas.openxmlformats.org/presentationml/2006/main" xmlns:r="http://schemas.openxmlformats.org/officeDocument/2006/relationships">
+  <p:cSld>
+    <p:spTree>
+      <p:nvGrpSpPr>
+        <p:cNvPr id="1" name=""/>
+        <p:cNvGrpSpPr/>
+        <p:nvPr/>
+      </p:nvGrpSpPr>
+      <p:grpSpPr/>
+      <p:sp>
+        <p:nvSpPr>
+          <p:cNvPr id="2" name="Rectangle 1"/>
+          <p:cNvSpPr/>
+          <p:nvPr/>
+        </p:nvSpPr>
+        <p:spPr>
+          <a:xfrm>
+            <a:off x="0" y="0"/>
+            <a:ext cx="12191695" cy="6858000"/>
+          </a:xfrm>
+          <a:prstGeom prst="rect">
+            <a:avLst/>
+          </a:prstGeom>
+          <a:solidFill>
+            <a:srgbClr val="FFFFFF"/>
+          </a:solidFill>
+          <a:ln>
+            <a:noFill/>
+          </a:ln>
+          <a:effectLst/>
+        </p:spPr>
+        <p:style>
+          <a:lnRef idx="1">
+            <a:schemeClr val="accent1"/>
+          </a:lnRef>
+          <a:fillRef idx="3">
+            <a:schemeClr val="accent1"/>
+          </a:fillRef>
+          <a:effectRef idx="2">
+            <a:schemeClr val="accent1"/>
+          </a:effectRef>
+          <a:fontRef idx="minor">
+            <a:schemeClr val="lt1"/>
+          </a:fontRef>
+        </p:style>
+        <p:txBody>
+          <a:bodyPr rtlCol="0" anchor="ctr"/>
+          <a:lstStyle/>
+          <a:p>
+            <a:pPr algn="ctr"/>
+          </a:p>
+        </p:txBody>
+      </p:sp>
+      <p:sp>
+        <p:nvSpPr>
+          <p:cNvPr id="3" name="Rectangle 2"/>
+          <p:cNvSpPr/>
+          <p:nvPr/>
+        </p:nvSpPr>
+        <p:spPr>
+          <a:xfrm>
+            <a:off x="640080" y="566928"/>
+            <a:ext cx="310896" cy="100584"/>
+          </a:xfrm>
+          <a:prstGeom prst="rect">
+            <a:avLst/>
+          </a:prstGeom>
+          <a:solidFill>
+            <a:srgbClr val="14B8A6"/>
+          </a:solidFill>
+          <a:ln>
+            <a:noFill/>
+          </a:ln>
+          <a:effectLst/>
+        </p:spPr>
+        <p:style>
+          <a:lnRef idx="1">
+            <a:schemeClr val="accent1"/>
+          </a:lnRef>
+          <a:fillRef idx="3">
+            <a:schemeClr val="accent1"/>
+          </a:fillRef>
+          <a:effectRef idx="2">
+            <a:schemeClr val="accent1"/>
+          </a:effectRef>
+          <a:fontRef idx="minor">
+            <a:schemeClr val="lt1"/>
+          </a:fontRef>
+        </p:style>
+        <p:txBody>
+          <a:bodyPr rtlCol="0" anchor="ctr"/>
+          <a:lstStyle/>
+          <a:p>
+            <a:pPr algn="ctr"/>
+          </a:p>
+        </p:txBody>
+      </p:sp>
+      <p:sp>
+        <p:nvSpPr>
+          <p:cNvPr id="4" name="TextBox 3"/>
+          <p:cNvSpPr txBox="1"/>
+          <p:nvPr/>
+        </p:nvSpPr>
+        <p:spPr>
+          <a:xfrm>
+            <a:off x="1024128" y="502920"/>
+            <a:ext cx="10058400" cy="274320"/>
+          </a:xfrm>
+          <a:prstGeom prst="rect">
+            <a:avLst/>
+          </a:prstGeom>
+          <a:noFill/>
+        </p:spPr>
+        <p:txBody>
+          <a:bodyPr wrap="square" anchor="t" lIns="0" rIns="0" tIns="0" bIns="0">
+            <a:spAutoFit/>
+          </a:bodyPr>
+          <a:lstStyle/>
+          <a:p>
+            <a:pPr algn="l">
+              <a:lnSpc>
+                <a:spcPct val="110000"/>
+              </a:lnSpc>
+            </a:pPr>
+            <a:r>
+              <a:rPr sz="1200" b="1">
+                <a:solidFill>
+                  <a:srgbClr val="0E8C7E"/>
+                </a:solidFill>
+                <a:latin typeface="Avenir Next"/>
+              </a:rPr>
+              <a:t>APPENDIX · A2</a:t>
+            </a:r>
+          </a:p>
+        </p:txBody>
+      </p:sp>
+      <p:sp>
+        <p:nvSpPr>
+          <p:cNvPr id="5" name="TextBox 4"/>
+          <p:cNvSpPr txBox="1"/>
+          <p:nvPr/>
+        </p:nvSpPr>
+        <p:spPr>
+          <a:xfrm>
+            <a:off x="640080" y="841248"/>
+            <a:ext cx="10972800" cy="640080"/>
+          </a:xfrm>
+          <a:prstGeom prst="rect">
+            <a:avLst/>
+          </a:prstGeom>
+          <a:noFill/>
+        </p:spPr>
+        <p:txBody>
+          <a:bodyPr wrap="square" anchor="t" lIns="0" rIns="0" tIns="0" bIns="0">
+            <a:spAutoFit/>
+          </a:bodyPr>
+          <a:lstStyle/>
+          <a:p>
+            <a:pPr algn="l">
+              <a:lnSpc>
+                <a:spcPct val="110000"/>
+              </a:lnSpc>
+            </a:pPr>
+            <a:r>
+              <a:rPr sz="2600" b="1">
+                <a:solidFill>
+                  <a:srgbClr val="0E1B2A"/>
+                </a:solidFill>
+                <a:latin typeface="Avenir Next"/>
+              </a:rPr>
+              <a:t>Selected research</a:t>
+            </a:r>
+          </a:p>
+        </p:txBody>
+      </p:sp>
+      <p:sp>
+        <p:nvSpPr>
+          <p:cNvPr id="6" name="Rectangle 5"/>
+          <p:cNvSpPr/>
+          <p:nvPr/>
+        </p:nvSpPr>
+        <p:spPr>
+          <a:xfrm>
+            <a:off x="640080" y="1463040"/>
+            <a:ext cx="10908792" cy="15240"/>
+          </a:xfrm>
+          <a:prstGeom prst="rect">
+            <a:avLst/>
+          </a:prstGeom>
+          <a:solidFill>
+            <a:srgbClr val="E3E8EE"/>
+          </a:solidFill>
+          <a:ln>
+            <a:noFill/>
+          </a:ln>
+          <a:effectLst/>
+        </p:spPr>
+        <p:style>
+          <a:lnRef idx="1">
+            <a:schemeClr val="accent1"/>
+          </a:lnRef>
+          <a:fillRef idx="3">
+            <a:schemeClr val="accent1"/>
+          </a:fillRef>
+          <a:effectRef idx="2">
+            <a:schemeClr val="accent1"/>
+          </a:effectRef>
+          <a:fontRef idx="minor">
+            <a:schemeClr val="lt1"/>
+          </a:fontRef>
+        </p:style>
+        <p:txBody>
+          <a:bodyPr rtlCol="0" anchor="ctr"/>
+          <a:lstStyle/>
+          <a:p>
+            <a:pPr algn="ctr"/>
+          </a:p>
+        </p:txBody>
+      </p:sp>
+      <p:sp>
+        <p:nvSpPr>
+          <p:cNvPr id="7" name="TextBox 6"/>
+          <p:cNvSpPr txBox="1"/>
+          <p:nvPr/>
+        </p:nvSpPr>
+        <p:spPr>
+          <a:xfrm>
+            <a:off x="640080" y="1691640"/>
+            <a:ext cx="2194560" cy="365760"/>
+          </a:xfrm>
+          <a:prstGeom prst="rect">
+            <a:avLst/>
+          </a:prstGeom>
+          <a:noFill/>
+        </p:spPr>
+        <p:txBody>
+          <a:bodyPr wrap="square" anchor="t" lIns="0" rIns="0" tIns="0" bIns="0">
+            <a:spAutoFit/>
+          </a:bodyPr>
+          <a:lstStyle/>
+          <a:p>
+            <a:pPr algn="l">
+              <a:lnSpc>
+                <a:spcPct val="110000"/>
+              </a:lnSpc>
+            </a:pPr>
+            <a:r>
+              <a:rPr sz="1300" b="1">
+                <a:solidFill>
+                  <a:srgbClr val="0E8C7E"/>
+                </a:solidFill>
+                <a:latin typeface="Avenir Next"/>
+              </a:rPr>
+              <a:t>Value</a:t>
+            </a:r>
+          </a:p>
+        </p:txBody>
+      </p:sp>
+      <p:sp>
+        <p:nvSpPr>
+          <p:cNvPr id="8" name="TextBox 7"/>
+          <p:cNvSpPr txBox="1"/>
+          <p:nvPr/>
+        </p:nvSpPr>
+        <p:spPr>
+          <a:xfrm>
+            <a:off x="2743200" y="1691640"/>
+            <a:ext cx="8778240" cy="292608"/>
+          </a:xfrm>
+          <a:prstGeom prst="rect">
+            <a:avLst/>
+          </a:prstGeom>
+          <a:noFill/>
+        </p:spPr>
+        <p:txBody>
+          <a:bodyPr wrap="square" anchor="t" lIns="0" rIns="0" tIns="0" bIns="0">
+            <a:spAutoFit/>
+          </a:bodyPr>
+          <a:lstStyle/>
+          <a:p>
+            <a:pPr algn="l">
+              <a:lnSpc>
+                <a:spcPct val="110000"/>
+              </a:lnSpc>
+            </a:pPr>
+            <a:r>
+              <a:rPr sz="1100" b="0">
+                <a:solidFill>
+                  <a:srgbClr val="1F2A37"/>
+                </a:solidFill>
+                <a:latin typeface="Avenir Next"/>
+              </a:rPr>
+              <a:t>·  Fama &amp; French (1992), The Cross-Section of Expected Stock Returns</a:t>
+            </a:r>
+          </a:p>
+        </p:txBody>
+      </p:sp>
+      <p:sp>
+        <p:nvSpPr>
+          <p:cNvPr id="9" name="TextBox 8"/>
+          <p:cNvSpPr txBox="1"/>
+          <p:nvPr/>
+        </p:nvSpPr>
+        <p:spPr>
+          <a:xfrm>
+            <a:off x="2743200" y="1965960"/>
+            <a:ext cx="8778240" cy="292608"/>
+          </a:xfrm>
+          <a:prstGeom prst="rect">
+            <a:avLst/>
+          </a:prstGeom>
+          <a:noFill/>
+        </p:spPr>
+        <p:txBody>
+          <a:bodyPr wrap="square" anchor="t" lIns="0" rIns="0" tIns="0" bIns="0">
+            <a:spAutoFit/>
+          </a:bodyPr>
+          <a:lstStyle/>
+          <a:p>
+            <a:pPr algn="l">
+              <a:lnSpc>
+                <a:spcPct val="110000"/>
+              </a:lnSpc>
+            </a:pPr>
+            <a:r>
+              <a:rPr sz="1100" b="0">
+                <a:solidFill>
+                  <a:srgbClr val="1F2A37"/>
+                </a:solidFill>
+                <a:latin typeface="Avenir Next"/>
+              </a:rPr>
+              <a:t>·  Fama &amp; French (1993), Common Risk Factors in Stocks and Bonds</a:t>
+            </a:r>
+          </a:p>
+        </p:txBody>
+      </p:sp>
+      <p:sp>
+        <p:nvSpPr>
+          <p:cNvPr id="10" name="TextBox 9"/>
+          <p:cNvSpPr txBox="1"/>
+          <p:nvPr/>
+        </p:nvSpPr>
+        <p:spPr>
+          <a:xfrm>
+            <a:off x="2743200" y="2240280"/>
+            <a:ext cx="8778240" cy="292608"/>
+          </a:xfrm>
+          <a:prstGeom prst="rect">
+            <a:avLst/>
+          </a:prstGeom>
+          <a:noFill/>
+        </p:spPr>
+        <p:txBody>
+          <a:bodyPr wrap="square" anchor="t" lIns="0" rIns="0" tIns="0" bIns="0">
+            <a:spAutoFit/>
+          </a:bodyPr>
+          <a:lstStyle/>
+          <a:p>
+            <a:pPr algn="l">
+              <a:lnSpc>
+                <a:spcPct val="110000"/>
+              </a:lnSpc>
+            </a:pPr>
+            <a:r>
+              <a:rPr sz="1100" b="0">
+                <a:solidFill>
+                  <a:srgbClr val="1F2A37"/>
+                </a:solidFill>
+                <a:latin typeface="Avenir Next"/>
+              </a:rPr>
+              <a:t>·  Basu (1977), Investment Performance in Relation to P/E Ratios</a:t>
+            </a:r>
+          </a:p>
+        </p:txBody>
+      </p:sp>
+      <p:sp>
+        <p:nvSpPr>
+          <p:cNvPr id="11" name="TextBox 10"/>
+          <p:cNvSpPr txBox="1"/>
+          <p:nvPr/>
+        </p:nvSpPr>
+        <p:spPr>
+          <a:xfrm>
+            <a:off x="640080" y="2642616"/>
+            <a:ext cx="2194560" cy="365760"/>
+          </a:xfrm>
+          <a:prstGeom prst="rect">
+            <a:avLst/>
+          </a:prstGeom>
+          <a:noFill/>
+        </p:spPr>
+        <p:txBody>
+          <a:bodyPr wrap="square" anchor="t" lIns="0" rIns="0" tIns="0" bIns="0">
+            <a:spAutoFit/>
+          </a:bodyPr>
+          <a:lstStyle/>
+          <a:p>
+            <a:pPr algn="l">
+              <a:lnSpc>
+                <a:spcPct val="110000"/>
+              </a:lnSpc>
+            </a:pPr>
+            <a:r>
+              <a:rPr sz="1300" b="1">
+                <a:solidFill>
+                  <a:srgbClr val="0E8C7E"/>
+                </a:solidFill>
+                <a:latin typeface="Avenir Next"/>
+              </a:rPr>
+              <a:t>Momentum</a:t>
+            </a:r>
+          </a:p>
+        </p:txBody>
+      </p:sp>
+      <p:sp>
+        <p:nvSpPr>
+          <p:cNvPr id="12" name="TextBox 11"/>
+          <p:cNvSpPr txBox="1"/>
+          <p:nvPr/>
+        </p:nvSpPr>
+        <p:spPr>
+          <a:xfrm>
+            <a:off x="2743200" y="2642616"/>
+            <a:ext cx="8778240" cy="292608"/>
+          </a:xfrm>
+          <a:prstGeom prst="rect">
+            <a:avLst/>
+          </a:prstGeom>
+          <a:noFill/>
+        </p:spPr>
+        <p:txBody>
+          <a:bodyPr wrap="square" anchor="t" lIns="0" rIns="0" tIns="0" bIns="0">
+            <a:spAutoFit/>
+          </a:bodyPr>
+          <a:lstStyle/>
+          <a:p>
+            <a:pPr algn="l">
+              <a:lnSpc>
+                <a:spcPct val="110000"/>
+              </a:lnSpc>
+            </a:pPr>
+            <a:r>
+              <a:rPr sz="1100" b="0">
+                <a:solidFill>
+                  <a:srgbClr val="1F2A37"/>
+                </a:solidFill>
+                <a:latin typeface="Avenir Next"/>
+              </a:rPr>
+              <a:t>·  Jegadeesh &amp; Titman (1993), Returns to Buying Winners and Selling Losers</a:t>
+            </a:r>
+          </a:p>
+        </p:txBody>
+      </p:sp>
+      <p:sp>
+        <p:nvSpPr>
+          <p:cNvPr id="13" name="TextBox 12"/>
+          <p:cNvSpPr txBox="1"/>
+          <p:nvPr/>
+        </p:nvSpPr>
+        <p:spPr>
+          <a:xfrm>
+            <a:off x="2743200" y="2916936"/>
+            <a:ext cx="8778240" cy="292608"/>
+          </a:xfrm>
+          <a:prstGeom prst="rect">
+            <a:avLst/>
+          </a:prstGeom>
+          <a:noFill/>
+        </p:spPr>
+        <p:txBody>
+          <a:bodyPr wrap="square" anchor="t" lIns="0" rIns="0" tIns="0" bIns="0">
+            <a:spAutoFit/>
+          </a:bodyPr>
+          <a:lstStyle/>
+          <a:p>
+            <a:pPr algn="l">
+              <a:lnSpc>
+                <a:spcPct val="110000"/>
+              </a:lnSpc>
+            </a:pPr>
+            <a:r>
+              <a:rPr sz="1100" b="0">
+                <a:solidFill>
+                  <a:srgbClr val="1F2A37"/>
+                </a:solidFill>
+                <a:latin typeface="Avenir Next"/>
+              </a:rPr>
+              <a:t>·  Carhart (1997), On Persistence in Mutual Fund Performance</a:t>
+            </a:r>
+          </a:p>
+        </p:txBody>
+      </p:sp>
+      <p:sp>
+        <p:nvSpPr>
+          <p:cNvPr id="14" name="TextBox 13"/>
+          <p:cNvSpPr txBox="1"/>
+          <p:nvPr/>
+        </p:nvSpPr>
+        <p:spPr>
+          <a:xfrm>
+            <a:off x="2743200" y="3191256"/>
+            <a:ext cx="8778240" cy="292608"/>
+          </a:xfrm>
+          <a:prstGeom prst="rect">
+            <a:avLst/>
+          </a:prstGeom>
+          <a:noFill/>
+        </p:spPr>
+        <p:txBody>
+          <a:bodyPr wrap="square" anchor="t" lIns="0" rIns="0" tIns="0" bIns="0">
+            <a:spAutoFit/>
+          </a:bodyPr>
+          <a:lstStyle/>
+          <a:p>
+            <a:pPr algn="l">
+              <a:lnSpc>
+                <a:spcPct val="110000"/>
+              </a:lnSpc>
+            </a:pPr>
+            <a:r>
+              <a:rPr sz="1100" b="0">
+                <a:solidFill>
+                  <a:srgbClr val="1F2A37"/>
+                </a:solidFill>
+                <a:latin typeface="Avenir Next"/>
+              </a:rPr>
+              <a:t>·  Asness, Moskowitz &amp; Pedersen (2013), Value and Momentum Everywhere</a:t>
+            </a:r>
+          </a:p>
+        </p:txBody>
+      </p:sp>
+      <p:sp>
+        <p:nvSpPr>
+          <p:cNvPr id="15" name="TextBox 14"/>
+          <p:cNvSpPr txBox="1"/>
+          <p:nvPr/>
+        </p:nvSpPr>
+        <p:spPr>
+          <a:xfrm>
+            <a:off x="640080" y="3593592"/>
+            <a:ext cx="2194560" cy="365760"/>
+          </a:xfrm>
+          <a:prstGeom prst="rect">
+            <a:avLst/>
+          </a:prstGeom>
+          <a:noFill/>
+        </p:spPr>
+        <p:txBody>
+          <a:bodyPr wrap="square" anchor="t" lIns="0" rIns="0" tIns="0" bIns="0">
+            <a:spAutoFit/>
+          </a:bodyPr>
+          <a:lstStyle/>
+          <a:p>
+            <a:pPr algn="l">
+              <a:lnSpc>
+                <a:spcPct val="110000"/>
+              </a:lnSpc>
+            </a:pPr>
+            <a:r>
+              <a:rPr sz="1300" b="1">
+                <a:solidFill>
+                  <a:srgbClr val="0E8C7E"/>
+                </a:solidFill>
+                <a:latin typeface="Avenir Next"/>
+              </a:rPr>
+              <a:t>Quality</a:t>
+            </a:r>
+          </a:p>
+        </p:txBody>
+      </p:sp>
+      <p:sp>
+        <p:nvSpPr>
+          <p:cNvPr id="16" name="TextBox 15"/>
+          <p:cNvSpPr txBox="1"/>
+          <p:nvPr/>
+        </p:nvSpPr>
+        <p:spPr>
+          <a:xfrm>
+            <a:off x="2743200" y="3593592"/>
+            <a:ext cx="8778240" cy="292608"/>
+          </a:xfrm>
+          <a:prstGeom prst="rect">
+            <a:avLst/>
+          </a:prstGeom>
+          <a:noFill/>
+        </p:spPr>
+        <p:txBody>
+          <a:bodyPr wrap="square" anchor="t" lIns="0" rIns="0" tIns="0" bIns="0">
+            <a:spAutoFit/>
+          </a:bodyPr>
+          <a:lstStyle/>
+          <a:p>
+            <a:pPr algn="l">
+              <a:lnSpc>
+                <a:spcPct val="110000"/>
+              </a:lnSpc>
+            </a:pPr>
+            <a:r>
+              <a:rPr sz="1100" b="0">
+                <a:solidFill>
+                  <a:srgbClr val="1F2A37"/>
+                </a:solidFill>
+                <a:latin typeface="Avenir Next"/>
+              </a:rPr>
+              <a:t>·  Novy-Marx (2013), The Gross Profitability Premium</a:t>
+            </a:r>
+          </a:p>
+        </p:txBody>
+      </p:sp>
+      <p:sp>
+        <p:nvSpPr>
+          <p:cNvPr id="17" name="TextBox 16"/>
+          <p:cNvSpPr txBox="1"/>
+          <p:nvPr/>
+        </p:nvSpPr>
+        <p:spPr>
+          <a:xfrm>
+            <a:off x="2743200" y="3867912"/>
+            <a:ext cx="8778240" cy="292608"/>
+          </a:xfrm>
+          <a:prstGeom prst="rect">
+            <a:avLst/>
+          </a:prstGeom>
+          <a:noFill/>
+        </p:spPr>
+        <p:txBody>
+          <a:bodyPr wrap="square" anchor="t" lIns="0" rIns="0" tIns="0" bIns="0">
+            <a:spAutoFit/>
+          </a:bodyPr>
+          <a:lstStyle/>
+          <a:p>
+            <a:pPr algn="l">
+              <a:lnSpc>
+                <a:spcPct val="110000"/>
+              </a:lnSpc>
+            </a:pPr>
+            <a:r>
+              <a:rPr sz="1100" b="0">
+                <a:solidFill>
+                  <a:srgbClr val="1F2A37"/>
+                </a:solidFill>
+                <a:latin typeface="Avenir Next"/>
+              </a:rPr>
+              <a:t>·  Asness, Frazzini &amp; Pedersen (2019), Quality Minus Junk</a:t>
+            </a:r>
+          </a:p>
+        </p:txBody>
+      </p:sp>
+      <p:sp>
+        <p:nvSpPr>
+          <p:cNvPr id="18" name="TextBox 17"/>
+          <p:cNvSpPr txBox="1"/>
+          <p:nvPr/>
+        </p:nvSpPr>
+        <p:spPr>
+          <a:xfrm>
+            <a:off x="2743200" y="4142232"/>
+            <a:ext cx="8778240" cy="292608"/>
+          </a:xfrm>
+          <a:prstGeom prst="rect">
+            <a:avLst/>
+          </a:prstGeom>
+          <a:noFill/>
+        </p:spPr>
+        <p:txBody>
+          <a:bodyPr wrap="square" anchor="t" lIns="0" rIns="0" tIns="0" bIns="0">
+            <a:spAutoFit/>
+          </a:bodyPr>
+          <a:lstStyle/>
+          <a:p>
+            <a:pPr algn="l">
+              <a:lnSpc>
+                <a:spcPct val="110000"/>
+              </a:lnSpc>
+            </a:pPr>
+            <a:r>
+              <a:rPr sz="1100" b="0">
+                <a:solidFill>
+                  <a:srgbClr val="1F2A37"/>
+                </a:solidFill>
+                <a:latin typeface="Avenir Next"/>
+              </a:rPr>
+              <a:t>·  Piotroski (2000), Value Investing and the F-Score</a:t>
+            </a:r>
+          </a:p>
+        </p:txBody>
+      </p:sp>
+      <p:sp>
+        <p:nvSpPr>
+          <p:cNvPr id="19" name="TextBox 18"/>
+          <p:cNvSpPr txBox="1"/>
+          <p:nvPr/>
+        </p:nvSpPr>
+        <p:spPr>
+          <a:xfrm>
+            <a:off x="640080" y="4544568"/>
+            <a:ext cx="2194560" cy="365760"/>
+          </a:xfrm>
+          <a:prstGeom prst="rect">
+            <a:avLst/>
+          </a:prstGeom>
+          <a:noFill/>
+        </p:spPr>
+        <p:txBody>
+          <a:bodyPr wrap="square" anchor="t" lIns="0" rIns="0" tIns="0" bIns="0">
+            <a:spAutoFit/>
+          </a:bodyPr>
+          <a:lstStyle/>
+          <a:p>
+            <a:pPr algn="l">
+              <a:lnSpc>
+                <a:spcPct val="110000"/>
+              </a:lnSpc>
+            </a:pPr>
+            <a:r>
+              <a:rPr sz="1300" b="1">
+                <a:solidFill>
+                  <a:srgbClr val="0E8C7E"/>
+                </a:solidFill>
+                <a:latin typeface="Avenir Next"/>
+              </a:rPr>
+              <a:t>Low volatility</a:t>
+            </a:r>
+          </a:p>
+        </p:txBody>
+      </p:sp>
+      <p:sp>
+        <p:nvSpPr>
+          <p:cNvPr id="20" name="TextBox 19"/>
+          <p:cNvSpPr txBox="1"/>
+          <p:nvPr/>
+        </p:nvSpPr>
+        <p:spPr>
+          <a:xfrm>
+            <a:off x="2743200" y="4544568"/>
+            <a:ext cx="8778240" cy="292608"/>
+          </a:xfrm>
+          <a:prstGeom prst="rect">
+            <a:avLst/>
+          </a:prstGeom>
+          <a:noFill/>
+        </p:spPr>
+        <p:txBody>
+          <a:bodyPr wrap="square" anchor="t" lIns="0" rIns="0" tIns="0" bIns="0">
+            <a:spAutoFit/>
+          </a:bodyPr>
+          <a:lstStyle/>
+          <a:p>
+            <a:pPr algn="l">
+              <a:lnSpc>
+                <a:spcPct val="110000"/>
+              </a:lnSpc>
+            </a:pPr>
+            <a:r>
+              <a:rPr sz="1100" b="0">
+                <a:solidFill>
+                  <a:srgbClr val="1F2A37"/>
+                </a:solidFill>
+                <a:latin typeface="Avenir Next"/>
+              </a:rPr>
+              <a:t>·  Ang, Hodrick, Xing &amp; Zhang (2006), The Cross-Section of Volatility</a:t>
+            </a:r>
+          </a:p>
+        </p:txBody>
+      </p:sp>
+      <p:sp>
+        <p:nvSpPr>
+          <p:cNvPr id="21" name="TextBox 20"/>
+          <p:cNvSpPr txBox="1"/>
+          <p:nvPr/>
+        </p:nvSpPr>
+        <p:spPr>
+          <a:xfrm>
+            <a:off x="2743200" y="4818888"/>
+            <a:ext cx="8778240" cy="292608"/>
+          </a:xfrm>
+          <a:prstGeom prst="rect">
+            <a:avLst/>
+          </a:prstGeom>
+          <a:noFill/>
+        </p:spPr>
+        <p:txBody>
+          <a:bodyPr wrap="square" anchor="t" lIns="0" rIns="0" tIns="0" bIns="0">
+            <a:spAutoFit/>
+          </a:bodyPr>
+          <a:lstStyle/>
+          <a:p>
+            <a:pPr algn="l">
+              <a:lnSpc>
+                <a:spcPct val="110000"/>
+              </a:lnSpc>
+            </a:pPr>
+            <a:r>
+              <a:rPr sz="1100" b="0">
+                <a:solidFill>
+                  <a:srgbClr val="1F2A37"/>
+                </a:solidFill>
+                <a:latin typeface="Avenir Next"/>
+              </a:rPr>
+              <a:t>·  Frazzini &amp; Pedersen (2014), Betting Against Beta</a:t>
+            </a:r>
+          </a:p>
+        </p:txBody>
+      </p:sp>
+      <p:sp>
+        <p:nvSpPr>
+          <p:cNvPr id="22" name="TextBox 21"/>
+          <p:cNvSpPr txBox="1"/>
+          <p:nvPr/>
+        </p:nvSpPr>
+        <p:spPr>
+          <a:xfrm>
+            <a:off x="2743200" y="5093208"/>
+            <a:ext cx="8778240" cy="292608"/>
+          </a:xfrm>
+          <a:prstGeom prst="rect">
+            <a:avLst/>
+          </a:prstGeom>
+          <a:noFill/>
+        </p:spPr>
+        <p:txBody>
+          <a:bodyPr wrap="square" anchor="t" lIns="0" rIns="0" tIns="0" bIns="0">
+            <a:spAutoFit/>
+          </a:bodyPr>
+          <a:lstStyle/>
+          <a:p>
+            <a:pPr algn="l">
+              <a:lnSpc>
+                <a:spcPct val="110000"/>
+              </a:lnSpc>
+            </a:pPr>
+            <a:r>
+              <a:rPr sz="1100" b="0">
+                <a:solidFill>
+                  <a:srgbClr val="1F2A37"/>
+                </a:solidFill>
+                <a:latin typeface="Avenir Next"/>
+              </a:rPr>
+              <a:t>·  Baker, Bradley &amp; Wurgler (2011), Benchmarks as Limits to Arbitrage</a:t>
+            </a:r>
+          </a:p>
+        </p:txBody>
+      </p:sp>
+      <p:sp>
+        <p:nvSpPr>
+          <p:cNvPr id="23" name="TextBox 22"/>
+          <p:cNvSpPr txBox="1"/>
+          <p:nvPr/>
+        </p:nvSpPr>
+        <p:spPr>
+          <a:xfrm>
+            <a:off x="640080" y="5495544"/>
+            <a:ext cx="2194560" cy="365760"/>
+          </a:xfrm>
+          <a:prstGeom prst="rect">
+            <a:avLst/>
+          </a:prstGeom>
+          <a:noFill/>
+        </p:spPr>
+        <p:txBody>
+          <a:bodyPr wrap="square" anchor="t" lIns="0" rIns="0" tIns="0" bIns="0">
+            <a:spAutoFit/>
+          </a:bodyPr>
+          <a:lstStyle/>
+          <a:p>
+            <a:pPr algn="l">
+              <a:lnSpc>
+                <a:spcPct val="110000"/>
+              </a:lnSpc>
+            </a:pPr>
+            <a:r>
+              <a:rPr sz="1300" b="1">
+                <a:solidFill>
+                  <a:srgbClr val="0E8C7E"/>
+                </a:solidFill>
+                <a:latin typeface="Avenir Next"/>
+              </a:rPr>
+              <a:t>Options premium</a:t>
+            </a:r>
+          </a:p>
+        </p:txBody>
+      </p:sp>
+      <p:sp>
+        <p:nvSpPr>
+          <p:cNvPr id="24" name="TextBox 23"/>
+          <p:cNvSpPr txBox="1"/>
+          <p:nvPr/>
+        </p:nvSpPr>
+        <p:spPr>
+          <a:xfrm>
+            <a:off x="2743200" y="5495544"/>
+            <a:ext cx="8778240" cy="292608"/>
+          </a:xfrm>
+          <a:prstGeom prst="rect">
+            <a:avLst/>
+          </a:prstGeom>
+          <a:noFill/>
+        </p:spPr>
+        <p:txBody>
+          <a:bodyPr wrap="square" anchor="t" lIns="0" rIns="0" tIns="0" bIns="0">
+            <a:spAutoFit/>
+          </a:bodyPr>
+          <a:lstStyle/>
+          <a:p>
+            <a:pPr algn="l">
+              <a:lnSpc>
+                <a:spcPct val="110000"/>
+              </a:lnSpc>
+            </a:pPr>
+            <a:r>
+              <a:rPr sz="1100" b="0">
+                <a:solidFill>
+                  <a:srgbClr val="1F2A37"/>
+                </a:solidFill>
+                <a:latin typeface="Avenir Next"/>
+              </a:rPr>
+              <a:t>·  Whaley (2002), Return and Risk of the CBOE BuyWrite Index</a:t>
+            </a:r>
+          </a:p>
+        </p:txBody>
+      </p:sp>
+      <p:sp>
+        <p:nvSpPr>
+          <p:cNvPr id="25" name="TextBox 24"/>
+          <p:cNvSpPr txBox="1"/>
+          <p:nvPr/>
+        </p:nvSpPr>
+        <p:spPr>
+          <a:xfrm>
+            <a:off x="2743200" y="5769864"/>
+            <a:ext cx="8778240" cy="292608"/>
+          </a:xfrm>
+          <a:prstGeom prst="rect">
+            <a:avLst/>
+          </a:prstGeom>
+          <a:noFill/>
+        </p:spPr>
+        <p:txBody>
+          <a:bodyPr wrap="square" anchor="t" lIns="0" rIns="0" tIns="0" bIns="0">
+            <a:spAutoFit/>
+          </a:bodyPr>
+          <a:lstStyle/>
+          <a:p>
+            <a:pPr algn="l">
+              <a:lnSpc>
+                <a:spcPct val="110000"/>
+              </a:lnSpc>
+            </a:pPr>
+            <a:r>
+              <a:rPr sz="1100" b="0">
+                <a:solidFill>
+                  <a:srgbClr val="1F2A37"/>
+                </a:solidFill>
+                <a:latin typeface="Avenir Next"/>
+              </a:rPr>
+              <a:t>·  Carr &amp; Wu (2009), Variance Risk Premiums</a:t>
+            </a:r>
+          </a:p>
+        </p:txBody>
+      </p:sp>
+      <p:sp>
+        <p:nvSpPr>
+          <p:cNvPr id="26" name="TextBox 25"/>
+          <p:cNvSpPr txBox="1"/>
+          <p:nvPr/>
+        </p:nvSpPr>
+        <p:spPr>
+          <a:xfrm>
+            <a:off x="2743200" y="6044183"/>
+            <a:ext cx="8778240" cy="292608"/>
+          </a:xfrm>
+          <a:prstGeom prst="rect">
+            <a:avLst/>
+          </a:prstGeom>
+          <a:noFill/>
+        </p:spPr>
+        <p:txBody>
+          <a:bodyPr wrap="square" anchor="t" lIns="0" rIns="0" tIns="0" bIns="0">
+            <a:spAutoFit/>
+          </a:bodyPr>
+          <a:lstStyle/>
+          <a:p>
+            <a:pPr algn="l">
+              <a:lnSpc>
+                <a:spcPct val="110000"/>
+              </a:lnSpc>
+            </a:pPr>
+            <a:r>
+              <a:rPr sz="1100" b="0">
+                <a:solidFill>
+                  <a:srgbClr val="1F2A37"/>
+                </a:solidFill>
+                <a:latin typeface="Avenir Next"/>
+              </a:rPr>
+              <a:t>·  Bakshi &amp; Kapadia (2003), Delta-Hedged Gains and the Volatility Premium</a:t>
+            </a:r>
+          </a:p>
+        </p:txBody>
+      </p:sp>
+      <p:sp>
+        <p:nvSpPr>
+          <p:cNvPr id="27" name="TextBox 26"/>
+          <p:cNvSpPr txBox="1"/>
+          <p:nvPr/>
+        </p:nvSpPr>
+        <p:spPr>
+          <a:xfrm>
+            <a:off x="640080" y="6437376"/>
+            <a:ext cx="7315200" cy="274320"/>
+          </a:xfrm>
+          <a:prstGeom prst="rect">
+            <a:avLst/>
+          </a:prstGeom>
+          <a:noFill/>
+        </p:spPr>
+        <p:txBody>
+          <a:bodyPr wrap="square" anchor="t" lIns="0" rIns="0" tIns="0" bIns="0">
+            <a:spAutoFit/>
+          </a:bodyPr>
+          <a:lstStyle/>
+          <a:p>
+            <a:pPr algn="l">
+              <a:lnSpc>
+                <a:spcPct val="110000"/>
+              </a:lnSpc>
+            </a:pPr>
+            <a:r>
+              <a:rPr sz="900" b="0">
+                <a:solidFill>
+                  <a:srgbClr val="6B7787"/>
+                </a:solidFill>
+                <a:latin typeface="Avenir Next"/>
+              </a:rPr>
+              <a:t>Systematic Factor Income Fund    ·    confidential</a:t>
+            </a:r>
+          </a:p>
+        </p:txBody>
+      </p:sp>
+      <p:sp>
+        <p:nvSpPr>
+          <p:cNvPr id="28" name="TextBox 27"/>
+          <p:cNvSpPr txBox="1"/>
+          <p:nvPr/>
+        </p:nvSpPr>
+        <p:spPr>
+          <a:xfrm>
+            <a:off x="10058400" y="6437376"/>
+            <a:ext cx="1490472" cy="274320"/>
+          </a:xfrm>
+          <a:prstGeom prst="rect">
+            <a:avLst/>
+          </a:prstGeom>
+          <a:noFill/>
+        </p:spPr>
+        <p:txBody>
+          <a:bodyPr wrap="square" anchor="t" lIns="0" rIns="0" tIns="0" bIns="0">
+            <a:spAutoFit/>
+          </a:bodyPr>
+          <a:lstStyle/>
+          <a:p>
+            <a:pPr algn="r">
+              <a:lnSpc>
+                <a:spcPct val="110000"/>
+              </a:lnSpc>
+            </a:pPr>
+            <a:r>
+              <a:rPr sz="900" b="0">
+                <a:solidFill>
+                  <a:srgbClr val="6B7787"/>
+                </a:solidFill>
+                <a:latin typeface="Avenir Next"/>
+              </a:rPr>
+              <a:t>34</a:t>
+            </a:r>
+          </a:p>
+        </p:txBody>
+      </p:sp>
+    </p:spTree>
+  </p:cSld>
+  <p:clrMapOvr>
+    <a:masterClrMapping/>
+  </p:clrMapOvr>
+</p:sld>
+</file>
+
+<file path=ppt/slides/slide46.xml><?xml version="1.0" encoding="utf-8"?>
 <p:sld xmlns:a="http://schemas.openxmlformats.org/drawingml/2006/main" xmlns:p="http://schemas.openxmlformats.org/presentationml/2006/main" xmlns:r="http://schemas.openxmlformats.org/officeDocument/2006/relationships">
   <p:cSld>
     <p:spTree>
@@ -27926,7 +28024,7 @@
                 </a:solidFill>
                 <a:latin typeface="Avenir Next"/>
               </a:rPr>
-              <a:t>34</a:t>
+              <a:t>35</a:t>
             </a:r>
           </a:p>
         </p:txBody>
@@ -27939,7 +28037,7 @@
 </p:sld>
 </file>
 
-<file path=ppt/slides/slide46.xml><?xml version="1.0" encoding="utf-8"?>
+<file path=ppt/slides/slide47.xml><?xml version="1.0" encoding="utf-8"?>
 <p:sld xmlns:a="http://schemas.openxmlformats.org/drawingml/2006/main" xmlns:p="http://schemas.openxmlformats.org/presentationml/2006/main" xmlns:r="http://schemas.openxmlformats.org/officeDocument/2006/relationships">
   <p:cSld>
     <p:spTree>
@@ -28994,7 +29092,7 @@
                 </a:solidFill>
                 <a:latin typeface="Avenir Next"/>
               </a:rPr>
-              <a:t>35</a:t>
+              <a:t>36</a:t>
             </a:r>
           </a:p>
         </p:txBody>
@@ -29007,7 +29105,7 @@
 </p:sld>
 </file>
 
-<file path=ppt/slides/slide47.xml><?xml version="1.0" encoding="utf-8"?>
+<file path=ppt/slides/slide48.xml><?xml version="1.0" encoding="utf-8"?>
 <p:sld xmlns:a="http://schemas.openxmlformats.org/drawingml/2006/main" xmlns:p="http://schemas.openxmlformats.org/presentationml/2006/main" xmlns:r="http://schemas.openxmlformats.org/officeDocument/2006/relationships">
   <p:cSld>
     <p:spTree>
@@ -30025,7 +30123,7 @@
                 </a:solidFill>
                 <a:latin typeface="Avenir Next"/>
               </a:rPr>
-              <a:t>36</a:t>
+              <a:t>37</a:t>
             </a:r>
           </a:p>
         </p:txBody>
@@ -30038,7 +30136,7 @@
 </p:sld>
 </file>
 
-<file path=ppt/slides/slide48.xml><?xml version="1.0" encoding="utf-8"?>
+<file path=ppt/slides/slide49.xml><?xml version="1.0" encoding="utf-8"?>
 <p:sld xmlns:a="http://schemas.openxmlformats.org/drawingml/2006/main" xmlns:p="http://schemas.openxmlformats.org/presentationml/2006/main" xmlns:r="http://schemas.openxmlformats.org/officeDocument/2006/relationships">
   <p:cSld>
     <p:spTree>
@@ -31267,7 +31365,7 @@
                 </a:solidFill>
                 <a:latin typeface="Avenir Next"/>
               </a:rPr>
-              <a:t>37</a:t>
+              <a:t>38</a:t>
             </a:r>
           </a:p>
         </p:txBody>

--- a/presentation/Systematic-Factor-Income-Fund.pptx
+++ b/presentation/Systematic-Factor-Income-Fund.pptx
@@ -3226,95 +3226,60 @@
       </p:sp>
       <p:sp>
         <p:nvSpPr>
-          <p:cNvPr id="4" name="TextBox 3"/>
-          <p:cNvSpPr txBox="1"/>
-          <p:nvPr/>
-        </p:nvSpPr>
-        <p:spPr>
-          <a:xfrm>
-            <a:off x="822960" y="868680"/>
-            <a:ext cx="9144000" cy="365760"/>
-          </a:xfrm>
-          <a:prstGeom prst="rect">
-            <a:avLst/>
-          </a:prstGeom>
-          <a:noFill/>
-        </p:spPr>
-        <p:txBody>
-          <a:bodyPr wrap="square" anchor="t" lIns="0" rIns="0" tIns="0" bIns="0">
-            <a:spAutoFit/>
-          </a:bodyPr>
-          <a:lstStyle/>
-          <a:p>
-            <a:pPr algn="l">
-              <a:lnSpc>
-                <a:spcPct val="110000"/>
-              </a:lnSpc>
-            </a:pPr>
-            <a:r>
-              <a:rPr sz="1300" b="1">
-                <a:solidFill>
-                  <a:srgbClr val="14B8A6"/>
-                </a:solidFill>
-                <a:latin typeface="Avenir Next"/>
-              </a:rPr>
-              <a:t>PROPRIETARY INVESTMENT STRATEGY</a:t>
-            </a:r>
-          </a:p>
-        </p:txBody>
-      </p:sp>
-      <p:sp>
-        <p:nvSpPr>
-          <p:cNvPr id="5" name="TextBox 4"/>
-          <p:cNvSpPr txBox="1"/>
-          <p:nvPr/>
-        </p:nvSpPr>
-        <p:spPr>
-          <a:xfrm>
-            <a:off x="777240" y="2103120"/>
-            <a:ext cx="10881360" cy="1828800"/>
-          </a:xfrm>
-          <a:prstGeom prst="rect">
-            <a:avLst/>
-          </a:prstGeom>
-          <a:noFill/>
-        </p:spPr>
-        <p:txBody>
-          <a:bodyPr wrap="square" anchor="t" lIns="0" rIns="0" tIns="0" bIns="0">
-            <a:spAutoFit/>
-          </a:bodyPr>
-          <a:lstStyle/>
-          <a:p>
-            <a:pPr algn="l">
-              <a:lnSpc>
-                <a:spcPct val="102000"/>
-              </a:lnSpc>
-            </a:pPr>
-            <a:r>
-              <a:rPr sz="5200" b="1">
-                <a:solidFill>
-                  <a:srgbClr val="FFFFFF"/>
-                </a:solidFill>
-                <a:latin typeface="Avenir Next"/>
-              </a:rPr>
-              <a:t>Systematic Factor
-Income Fund</a:t>
-            </a:r>
-          </a:p>
-        </p:txBody>
-      </p:sp>
-      <p:sp>
-        <p:nvSpPr>
-          <p:cNvPr id="6" name="Rectangle 5"/>
+          <p:cNvPr id="4" name="Oval 3"/>
           <p:cNvSpPr/>
           <p:nvPr/>
         </p:nvSpPr>
         <p:spPr>
           <a:xfrm>
-            <a:off x="822960" y="4160520"/>
-            <a:ext cx="2377440" cy="31750"/>
-          </a:xfrm>
-          <a:prstGeom prst="rect">
+            <a:off x="10515600" y="841248"/>
+            <a:ext cx="155448" cy="155448"/>
+          </a:xfrm>
+          <a:prstGeom prst="ellipse">
+            <a:avLst/>
+          </a:prstGeom>
+          <a:solidFill>
+            <a:srgbClr val="3A4C63"/>
+          </a:solidFill>
+          <a:ln>
+            <a:noFill/>
+          </a:ln>
+          <a:effectLst/>
+        </p:spPr>
+        <p:style>
+          <a:lnRef idx="1">
+            <a:schemeClr val="accent1"/>
+          </a:lnRef>
+          <a:fillRef idx="3">
+            <a:schemeClr val="accent1"/>
+          </a:fillRef>
+          <a:effectRef idx="2">
+            <a:schemeClr val="accent1"/>
+          </a:effectRef>
+          <a:fontRef idx="minor">
+            <a:schemeClr val="lt1"/>
+          </a:fontRef>
+        </p:style>
+        <p:txBody>
+          <a:bodyPr rtlCol="0" anchor="ctr"/>
+          <a:lstStyle/>
+          <a:p>
+            <a:pPr algn="ctr"/>
+          </a:p>
+        </p:txBody>
+      </p:sp>
+      <p:sp>
+        <p:nvSpPr>
+          <p:cNvPr id="5" name="Oval 4"/>
+          <p:cNvSpPr/>
+          <p:nvPr/>
+        </p:nvSpPr>
+        <p:spPr>
+          <a:xfrm>
+            <a:off x="10780776" y="841248"/>
+            <a:ext cx="155448" cy="155448"/>
+          </a:xfrm>
+          <a:prstGeom prst="ellipse">
             <a:avLst/>
           </a:prstGeom>
           <a:solidFill>
@@ -3349,7 +3314,438 @@
       </p:sp>
       <p:sp>
         <p:nvSpPr>
-          <p:cNvPr id="7" name="TextBox 6"/>
+          <p:cNvPr id="6" name="Oval 5"/>
+          <p:cNvSpPr/>
+          <p:nvPr/>
+        </p:nvSpPr>
+        <p:spPr>
+          <a:xfrm>
+            <a:off x="11045952" y="841248"/>
+            <a:ext cx="155448" cy="155448"/>
+          </a:xfrm>
+          <a:prstGeom prst="ellipse">
+            <a:avLst/>
+          </a:prstGeom>
+          <a:solidFill>
+            <a:srgbClr val="3A4C63"/>
+          </a:solidFill>
+          <a:ln>
+            <a:noFill/>
+          </a:ln>
+          <a:effectLst/>
+        </p:spPr>
+        <p:style>
+          <a:lnRef idx="1">
+            <a:schemeClr val="accent1"/>
+          </a:lnRef>
+          <a:fillRef idx="3">
+            <a:schemeClr val="accent1"/>
+          </a:fillRef>
+          <a:effectRef idx="2">
+            <a:schemeClr val="accent1"/>
+          </a:effectRef>
+          <a:fontRef idx="minor">
+            <a:schemeClr val="lt1"/>
+          </a:fontRef>
+        </p:style>
+        <p:txBody>
+          <a:bodyPr rtlCol="0" anchor="ctr"/>
+          <a:lstStyle/>
+          <a:p>
+            <a:pPr algn="ctr"/>
+          </a:p>
+        </p:txBody>
+      </p:sp>
+      <p:sp>
+        <p:nvSpPr>
+          <p:cNvPr id="7" name="Oval 6"/>
+          <p:cNvSpPr/>
+          <p:nvPr/>
+        </p:nvSpPr>
+        <p:spPr>
+          <a:xfrm>
+            <a:off x="10515600" y="1106424"/>
+            <a:ext cx="155448" cy="155448"/>
+          </a:xfrm>
+          <a:prstGeom prst="ellipse">
+            <a:avLst/>
+          </a:prstGeom>
+          <a:solidFill>
+            <a:srgbClr val="3A4C63"/>
+          </a:solidFill>
+          <a:ln>
+            <a:noFill/>
+          </a:ln>
+          <a:effectLst/>
+        </p:spPr>
+        <p:style>
+          <a:lnRef idx="1">
+            <a:schemeClr val="accent1"/>
+          </a:lnRef>
+          <a:fillRef idx="3">
+            <a:schemeClr val="accent1"/>
+          </a:fillRef>
+          <a:effectRef idx="2">
+            <a:schemeClr val="accent1"/>
+          </a:effectRef>
+          <a:fontRef idx="minor">
+            <a:schemeClr val="lt1"/>
+          </a:fontRef>
+        </p:style>
+        <p:txBody>
+          <a:bodyPr rtlCol="0" anchor="ctr"/>
+          <a:lstStyle/>
+          <a:p>
+            <a:pPr algn="ctr"/>
+          </a:p>
+        </p:txBody>
+      </p:sp>
+      <p:sp>
+        <p:nvSpPr>
+          <p:cNvPr id="8" name="Oval 7"/>
+          <p:cNvSpPr/>
+          <p:nvPr/>
+        </p:nvSpPr>
+        <p:spPr>
+          <a:xfrm>
+            <a:off x="10780776" y="1106424"/>
+            <a:ext cx="155448" cy="155448"/>
+          </a:xfrm>
+          <a:prstGeom prst="ellipse">
+            <a:avLst/>
+          </a:prstGeom>
+          <a:solidFill>
+            <a:srgbClr val="14B8A6"/>
+          </a:solidFill>
+          <a:ln>
+            <a:noFill/>
+          </a:ln>
+          <a:effectLst/>
+        </p:spPr>
+        <p:style>
+          <a:lnRef idx="1">
+            <a:schemeClr val="accent1"/>
+          </a:lnRef>
+          <a:fillRef idx="3">
+            <a:schemeClr val="accent1"/>
+          </a:fillRef>
+          <a:effectRef idx="2">
+            <a:schemeClr val="accent1"/>
+          </a:effectRef>
+          <a:fontRef idx="minor">
+            <a:schemeClr val="lt1"/>
+          </a:fontRef>
+        </p:style>
+        <p:txBody>
+          <a:bodyPr rtlCol="0" anchor="ctr"/>
+          <a:lstStyle/>
+          <a:p>
+            <a:pPr algn="ctr"/>
+          </a:p>
+        </p:txBody>
+      </p:sp>
+      <p:sp>
+        <p:nvSpPr>
+          <p:cNvPr id="9" name="Oval 8"/>
+          <p:cNvSpPr/>
+          <p:nvPr/>
+        </p:nvSpPr>
+        <p:spPr>
+          <a:xfrm>
+            <a:off x="11045952" y="1106424"/>
+            <a:ext cx="155448" cy="155448"/>
+          </a:xfrm>
+          <a:prstGeom prst="ellipse">
+            <a:avLst/>
+          </a:prstGeom>
+          <a:solidFill>
+            <a:srgbClr val="3A4C63"/>
+          </a:solidFill>
+          <a:ln>
+            <a:noFill/>
+          </a:ln>
+          <a:effectLst/>
+        </p:spPr>
+        <p:style>
+          <a:lnRef idx="1">
+            <a:schemeClr val="accent1"/>
+          </a:lnRef>
+          <a:fillRef idx="3">
+            <a:schemeClr val="accent1"/>
+          </a:fillRef>
+          <a:effectRef idx="2">
+            <a:schemeClr val="accent1"/>
+          </a:effectRef>
+          <a:fontRef idx="minor">
+            <a:schemeClr val="lt1"/>
+          </a:fontRef>
+        </p:style>
+        <p:txBody>
+          <a:bodyPr rtlCol="0" anchor="ctr"/>
+          <a:lstStyle/>
+          <a:p>
+            <a:pPr algn="ctr"/>
+          </a:p>
+        </p:txBody>
+      </p:sp>
+      <p:sp>
+        <p:nvSpPr>
+          <p:cNvPr id="10" name="Oval 9"/>
+          <p:cNvSpPr/>
+          <p:nvPr/>
+        </p:nvSpPr>
+        <p:spPr>
+          <a:xfrm>
+            <a:off x="10515600" y="1371600"/>
+            <a:ext cx="155448" cy="155448"/>
+          </a:xfrm>
+          <a:prstGeom prst="ellipse">
+            <a:avLst/>
+          </a:prstGeom>
+          <a:solidFill>
+            <a:srgbClr val="3A4C63"/>
+          </a:solidFill>
+          <a:ln>
+            <a:noFill/>
+          </a:ln>
+          <a:effectLst/>
+        </p:spPr>
+        <p:style>
+          <a:lnRef idx="1">
+            <a:schemeClr val="accent1"/>
+          </a:lnRef>
+          <a:fillRef idx="3">
+            <a:schemeClr val="accent1"/>
+          </a:fillRef>
+          <a:effectRef idx="2">
+            <a:schemeClr val="accent1"/>
+          </a:effectRef>
+          <a:fontRef idx="minor">
+            <a:schemeClr val="lt1"/>
+          </a:fontRef>
+        </p:style>
+        <p:txBody>
+          <a:bodyPr rtlCol="0" anchor="ctr"/>
+          <a:lstStyle/>
+          <a:p>
+            <a:pPr algn="ctr"/>
+          </a:p>
+        </p:txBody>
+      </p:sp>
+      <p:sp>
+        <p:nvSpPr>
+          <p:cNvPr id="11" name="Oval 10"/>
+          <p:cNvSpPr/>
+          <p:nvPr/>
+        </p:nvSpPr>
+        <p:spPr>
+          <a:xfrm>
+            <a:off x="10780776" y="1371600"/>
+            <a:ext cx="155448" cy="155448"/>
+          </a:xfrm>
+          <a:prstGeom prst="ellipse">
+            <a:avLst/>
+          </a:prstGeom>
+          <a:solidFill>
+            <a:srgbClr val="14B8A6"/>
+          </a:solidFill>
+          <a:ln>
+            <a:noFill/>
+          </a:ln>
+          <a:effectLst/>
+        </p:spPr>
+        <p:style>
+          <a:lnRef idx="1">
+            <a:schemeClr val="accent1"/>
+          </a:lnRef>
+          <a:fillRef idx="3">
+            <a:schemeClr val="accent1"/>
+          </a:fillRef>
+          <a:effectRef idx="2">
+            <a:schemeClr val="accent1"/>
+          </a:effectRef>
+          <a:fontRef idx="minor">
+            <a:schemeClr val="lt1"/>
+          </a:fontRef>
+        </p:style>
+        <p:txBody>
+          <a:bodyPr rtlCol="0" anchor="ctr"/>
+          <a:lstStyle/>
+          <a:p>
+            <a:pPr algn="ctr"/>
+          </a:p>
+        </p:txBody>
+      </p:sp>
+      <p:sp>
+        <p:nvSpPr>
+          <p:cNvPr id="12" name="Oval 11"/>
+          <p:cNvSpPr/>
+          <p:nvPr/>
+        </p:nvSpPr>
+        <p:spPr>
+          <a:xfrm>
+            <a:off x="11045952" y="1371600"/>
+            <a:ext cx="155448" cy="155448"/>
+          </a:xfrm>
+          <a:prstGeom prst="ellipse">
+            <a:avLst/>
+          </a:prstGeom>
+          <a:solidFill>
+            <a:srgbClr val="3A4C63"/>
+          </a:solidFill>
+          <a:ln>
+            <a:noFill/>
+          </a:ln>
+          <a:effectLst/>
+        </p:spPr>
+        <p:style>
+          <a:lnRef idx="1">
+            <a:schemeClr val="accent1"/>
+          </a:lnRef>
+          <a:fillRef idx="3">
+            <a:schemeClr val="accent1"/>
+          </a:fillRef>
+          <a:effectRef idx="2">
+            <a:schemeClr val="accent1"/>
+          </a:effectRef>
+          <a:fontRef idx="minor">
+            <a:schemeClr val="lt1"/>
+          </a:fontRef>
+        </p:style>
+        <p:txBody>
+          <a:bodyPr rtlCol="0" anchor="ctr"/>
+          <a:lstStyle/>
+          <a:p>
+            <a:pPr algn="ctr"/>
+          </a:p>
+        </p:txBody>
+      </p:sp>
+      <p:sp>
+        <p:nvSpPr>
+          <p:cNvPr id="13" name="TextBox 12"/>
+          <p:cNvSpPr txBox="1"/>
+          <p:nvPr/>
+        </p:nvSpPr>
+        <p:spPr>
+          <a:xfrm>
+            <a:off x="822960" y="868680"/>
+            <a:ext cx="9144000" cy="365760"/>
+          </a:xfrm>
+          <a:prstGeom prst="rect">
+            <a:avLst/>
+          </a:prstGeom>
+          <a:noFill/>
+        </p:spPr>
+        <p:txBody>
+          <a:bodyPr wrap="square" anchor="t" lIns="0" rIns="0" tIns="0" bIns="0">
+            <a:spAutoFit/>
+          </a:bodyPr>
+          <a:lstStyle/>
+          <a:p>
+            <a:pPr algn="l">
+              <a:lnSpc>
+                <a:spcPct val="110000"/>
+              </a:lnSpc>
+            </a:pPr>
+            <a:r>
+              <a:rPr sz="1300" b="1">
+                <a:solidFill>
+                  <a:srgbClr val="14B8A6"/>
+                </a:solidFill>
+                <a:latin typeface="Avenir Next"/>
+              </a:rPr>
+              <a:t>PROPRIETARY INVESTMENT STRATEGY</a:t>
+            </a:r>
+          </a:p>
+        </p:txBody>
+      </p:sp>
+      <p:sp>
+        <p:nvSpPr>
+          <p:cNvPr id="14" name="TextBox 13"/>
+          <p:cNvSpPr txBox="1"/>
+          <p:nvPr/>
+        </p:nvSpPr>
+        <p:spPr>
+          <a:xfrm>
+            <a:off x="777240" y="2103120"/>
+            <a:ext cx="10881360" cy="1828800"/>
+          </a:xfrm>
+          <a:prstGeom prst="rect">
+            <a:avLst/>
+          </a:prstGeom>
+          <a:noFill/>
+        </p:spPr>
+        <p:txBody>
+          <a:bodyPr wrap="square" anchor="t" lIns="0" rIns="0" tIns="0" bIns="0">
+            <a:spAutoFit/>
+          </a:bodyPr>
+          <a:lstStyle/>
+          <a:p>
+            <a:pPr algn="l">
+              <a:lnSpc>
+                <a:spcPct val="102000"/>
+              </a:lnSpc>
+            </a:pPr>
+            <a:r>
+              <a:rPr sz="5200" b="1">
+                <a:solidFill>
+                  <a:srgbClr val="FFFFFF"/>
+                </a:solidFill>
+                <a:latin typeface="Avenir Next"/>
+              </a:rPr>
+              <a:t>Systematic Factor
+Income Fund</a:t>
+            </a:r>
+          </a:p>
+        </p:txBody>
+      </p:sp>
+      <p:sp>
+        <p:nvSpPr>
+          <p:cNvPr id="15" name="Rectangle 14"/>
+          <p:cNvSpPr/>
+          <p:nvPr/>
+        </p:nvSpPr>
+        <p:spPr>
+          <a:xfrm>
+            <a:off x="822960" y="4160520"/>
+            <a:ext cx="2377440" cy="31750"/>
+          </a:xfrm>
+          <a:prstGeom prst="rect">
+            <a:avLst/>
+          </a:prstGeom>
+          <a:solidFill>
+            <a:srgbClr val="14B8A6"/>
+          </a:solidFill>
+          <a:ln>
+            <a:noFill/>
+          </a:ln>
+          <a:effectLst/>
+        </p:spPr>
+        <p:style>
+          <a:lnRef idx="1">
+            <a:schemeClr val="accent1"/>
+          </a:lnRef>
+          <a:fillRef idx="3">
+            <a:schemeClr val="accent1"/>
+          </a:fillRef>
+          <a:effectRef idx="2">
+            <a:schemeClr val="accent1"/>
+          </a:effectRef>
+          <a:fontRef idx="minor">
+            <a:schemeClr val="lt1"/>
+          </a:fontRef>
+        </p:style>
+        <p:txBody>
+          <a:bodyPr rtlCol="0" anchor="ctr"/>
+          <a:lstStyle/>
+          <a:p>
+            <a:pPr algn="ctr"/>
+          </a:p>
+        </p:txBody>
+      </p:sp>
+      <p:sp>
+        <p:nvSpPr>
+          <p:cNvPr id="16" name="TextBox 15"/>
           <p:cNvSpPr txBox="1"/>
           <p:nvPr/>
         </p:nvSpPr>
@@ -3388,7 +3784,7 @@
       </p:sp>
       <p:sp>
         <p:nvSpPr>
-          <p:cNvPr id="8" name="TextBox 7"/>
+          <p:cNvPr id="17" name="TextBox 16"/>
           <p:cNvSpPr txBox="1"/>
           <p:nvPr/>
         </p:nvSpPr>
@@ -3498,55 +3894,60 @@
       </p:sp>
       <p:sp>
         <p:nvSpPr>
-          <p:cNvPr id="3" name="TextBox 2"/>
-          <p:cNvSpPr txBox="1"/>
-          <p:nvPr/>
-        </p:nvSpPr>
-        <p:spPr>
-          <a:xfrm>
-            <a:off x="548640" y="914400"/>
-            <a:ext cx="6400800" cy="2926080"/>
-          </a:xfrm>
-          <a:prstGeom prst="rect">
-            <a:avLst/>
-          </a:prstGeom>
-          <a:noFill/>
-        </p:spPr>
-        <p:txBody>
-          <a:bodyPr wrap="square" anchor="t" lIns="0" rIns="0" tIns="0" bIns="0">
-            <a:spAutoFit/>
-          </a:bodyPr>
-          <a:lstStyle/>
-          <a:p>
-            <a:pPr algn="l">
-              <a:lnSpc>
-                <a:spcPct val="110000"/>
-              </a:lnSpc>
-            </a:pPr>
-            <a:r>
-              <a:rPr sz="20000" b="1">
-                <a:solidFill>
-                  <a:srgbClr val="2A4760"/>
-                </a:solidFill>
-                <a:latin typeface="Avenir Next"/>
-              </a:rPr>
-              <a:t>03</a:t>
-            </a:r>
-          </a:p>
-        </p:txBody>
-      </p:sp>
-      <p:sp>
-        <p:nvSpPr>
-          <p:cNvPr id="4" name="Rectangle 3"/>
+          <p:cNvPr id="3" name="Oval 2"/>
           <p:cNvSpPr/>
           <p:nvPr/>
         </p:nvSpPr>
         <p:spPr>
           <a:xfrm>
-            <a:off x="868680" y="3977639"/>
-            <a:ext cx="2194560" cy="38100"/>
-          </a:xfrm>
-          <a:prstGeom prst="rect">
+            <a:off x="10972800" y="566928"/>
+            <a:ext cx="137160" cy="137160"/>
+          </a:xfrm>
+          <a:prstGeom prst="ellipse">
+            <a:avLst/>
+          </a:prstGeom>
+          <a:solidFill>
+            <a:srgbClr val="3A4C63"/>
+          </a:solidFill>
+          <a:ln>
+            <a:noFill/>
+          </a:ln>
+          <a:effectLst/>
+        </p:spPr>
+        <p:style>
+          <a:lnRef idx="1">
+            <a:schemeClr val="accent1"/>
+          </a:lnRef>
+          <a:fillRef idx="3">
+            <a:schemeClr val="accent1"/>
+          </a:fillRef>
+          <a:effectRef idx="2">
+            <a:schemeClr val="accent1"/>
+          </a:effectRef>
+          <a:fontRef idx="minor">
+            <a:schemeClr val="lt1"/>
+          </a:fontRef>
+        </p:style>
+        <p:txBody>
+          <a:bodyPr rtlCol="0" anchor="ctr"/>
+          <a:lstStyle/>
+          <a:p>
+            <a:pPr algn="ctr"/>
+          </a:p>
+        </p:txBody>
+      </p:sp>
+      <p:sp>
+        <p:nvSpPr>
+          <p:cNvPr id="4" name="Oval 3"/>
+          <p:cNvSpPr/>
+          <p:nvPr/>
+        </p:nvSpPr>
+        <p:spPr>
+          <a:xfrm>
+            <a:off x="11210544" y="566928"/>
+            <a:ext cx="137160" cy="137160"/>
+          </a:xfrm>
+          <a:prstGeom prst="ellipse">
             <a:avLst/>
           </a:prstGeom>
           <a:solidFill>
@@ -3581,7 +3982,398 @@
       </p:sp>
       <p:sp>
         <p:nvSpPr>
-          <p:cNvPr id="5" name="TextBox 4"/>
+          <p:cNvPr id="5" name="Oval 4"/>
+          <p:cNvSpPr/>
+          <p:nvPr/>
+        </p:nvSpPr>
+        <p:spPr>
+          <a:xfrm>
+            <a:off x="11448288" y="566928"/>
+            <a:ext cx="137160" cy="137160"/>
+          </a:xfrm>
+          <a:prstGeom prst="ellipse">
+            <a:avLst/>
+          </a:prstGeom>
+          <a:solidFill>
+            <a:srgbClr val="3A4C63"/>
+          </a:solidFill>
+          <a:ln>
+            <a:noFill/>
+          </a:ln>
+          <a:effectLst/>
+        </p:spPr>
+        <p:style>
+          <a:lnRef idx="1">
+            <a:schemeClr val="accent1"/>
+          </a:lnRef>
+          <a:fillRef idx="3">
+            <a:schemeClr val="accent1"/>
+          </a:fillRef>
+          <a:effectRef idx="2">
+            <a:schemeClr val="accent1"/>
+          </a:effectRef>
+          <a:fontRef idx="minor">
+            <a:schemeClr val="lt1"/>
+          </a:fontRef>
+        </p:style>
+        <p:txBody>
+          <a:bodyPr rtlCol="0" anchor="ctr"/>
+          <a:lstStyle/>
+          <a:p>
+            <a:pPr algn="ctr"/>
+          </a:p>
+        </p:txBody>
+      </p:sp>
+      <p:sp>
+        <p:nvSpPr>
+          <p:cNvPr id="6" name="Oval 5"/>
+          <p:cNvSpPr/>
+          <p:nvPr/>
+        </p:nvSpPr>
+        <p:spPr>
+          <a:xfrm>
+            <a:off x="10972800" y="804672"/>
+            <a:ext cx="137160" cy="137160"/>
+          </a:xfrm>
+          <a:prstGeom prst="ellipse">
+            <a:avLst/>
+          </a:prstGeom>
+          <a:solidFill>
+            <a:srgbClr val="3A4C63"/>
+          </a:solidFill>
+          <a:ln>
+            <a:noFill/>
+          </a:ln>
+          <a:effectLst/>
+        </p:spPr>
+        <p:style>
+          <a:lnRef idx="1">
+            <a:schemeClr val="accent1"/>
+          </a:lnRef>
+          <a:fillRef idx="3">
+            <a:schemeClr val="accent1"/>
+          </a:fillRef>
+          <a:effectRef idx="2">
+            <a:schemeClr val="accent1"/>
+          </a:effectRef>
+          <a:fontRef idx="minor">
+            <a:schemeClr val="lt1"/>
+          </a:fontRef>
+        </p:style>
+        <p:txBody>
+          <a:bodyPr rtlCol="0" anchor="ctr"/>
+          <a:lstStyle/>
+          <a:p>
+            <a:pPr algn="ctr"/>
+          </a:p>
+        </p:txBody>
+      </p:sp>
+      <p:sp>
+        <p:nvSpPr>
+          <p:cNvPr id="7" name="Oval 6"/>
+          <p:cNvSpPr/>
+          <p:nvPr/>
+        </p:nvSpPr>
+        <p:spPr>
+          <a:xfrm>
+            <a:off x="11210544" y="804672"/>
+            <a:ext cx="137160" cy="137160"/>
+          </a:xfrm>
+          <a:prstGeom prst="ellipse">
+            <a:avLst/>
+          </a:prstGeom>
+          <a:solidFill>
+            <a:srgbClr val="14B8A6"/>
+          </a:solidFill>
+          <a:ln>
+            <a:noFill/>
+          </a:ln>
+          <a:effectLst/>
+        </p:spPr>
+        <p:style>
+          <a:lnRef idx="1">
+            <a:schemeClr val="accent1"/>
+          </a:lnRef>
+          <a:fillRef idx="3">
+            <a:schemeClr val="accent1"/>
+          </a:fillRef>
+          <a:effectRef idx="2">
+            <a:schemeClr val="accent1"/>
+          </a:effectRef>
+          <a:fontRef idx="minor">
+            <a:schemeClr val="lt1"/>
+          </a:fontRef>
+        </p:style>
+        <p:txBody>
+          <a:bodyPr rtlCol="0" anchor="ctr"/>
+          <a:lstStyle/>
+          <a:p>
+            <a:pPr algn="ctr"/>
+          </a:p>
+        </p:txBody>
+      </p:sp>
+      <p:sp>
+        <p:nvSpPr>
+          <p:cNvPr id="8" name="Oval 7"/>
+          <p:cNvSpPr/>
+          <p:nvPr/>
+        </p:nvSpPr>
+        <p:spPr>
+          <a:xfrm>
+            <a:off x="11448288" y="804672"/>
+            <a:ext cx="137160" cy="137160"/>
+          </a:xfrm>
+          <a:prstGeom prst="ellipse">
+            <a:avLst/>
+          </a:prstGeom>
+          <a:solidFill>
+            <a:srgbClr val="3A4C63"/>
+          </a:solidFill>
+          <a:ln>
+            <a:noFill/>
+          </a:ln>
+          <a:effectLst/>
+        </p:spPr>
+        <p:style>
+          <a:lnRef idx="1">
+            <a:schemeClr val="accent1"/>
+          </a:lnRef>
+          <a:fillRef idx="3">
+            <a:schemeClr val="accent1"/>
+          </a:fillRef>
+          <a:effectRef idx="2">
+            <a:schemeClr val="accent1"/>
+          </a:effectRef>
+          <a:fontRef idx="minor">
+            <a:schemeClr val="lt1"/>
+          </a:fontRef>
+        </p:style>
+        <p:txBody>
+          <a:bodyPr rtlCol="0" anchor="ctr"/>
+          <a:lstStyle/>
+          <a:p>
+            <a:pPr algn="ctr"/>
+          </a:p>
+        </p:txBody>
+      </p:sp>
+      <p:sp>
+        <p:nvSpPr>
+          <p:cNvPr id="9" name="Oval 8"/>
+          <p:cNvSpPr/>
+          <p:nvPr/>
+        </p:nvSpPr>
+        <p:spPr>
+          <a:xfrm>
+            <a:off x="10972800" y="1042416"/>
+            <a:ext cx="137160" cy="137160"/>
+          </a:xfrm>
+          <a:prstGeom prst="ellipse">
+            <a:avLst/>
+          </a:prstGeom>
+          <a:solidFill>
+            <a:srgbClr val="3A4C63"/>
+          </a:solidFill>
+          <a:ln>
+            <a:noFill/>
+          </a:ln>
+          <a:effectLst/>
+        </p:spPr>
+        <p:style>
+          <a:lnRef idx="1">
+            <a:schemeClr val="accent1"/>
+          </a:lnRef>
+          <a:fillRef idx="3">
+            <a:schemeClr val="accent1"/>
+          </a:fillRef>
+          <a:effectRef idx="2">
+            <a:schemeClr val="accent1"/>
+          </a:effectRef>
+          <a:fontRef idx="minor">
+            <a:schemeClr val="lt1"/>
+          </a:fontRef>
+        </p:style>
+        <p:txBody>
+          <a:bodyPr rtlCol="0" anchor="ctr"/>
+          <a:lstStyle/>
+          <a:p>
+            <a:pPr algn="ctr"/>
+          </a:p>
+        </p:txBody>
+      </p:sp>
+      <p:sp>
+        <p:nvSpPr>
+          <p:cNvPr id="10" name="Oval 9"/>
+          <p:cNvSpPr/>
+          <p:nvPr/>
+        </p:nvSpPr>
+        <p:spPr>
+          <a:xfrm>
+            <a:off x="11210544" y="1042416"/>
+            <a:ext cx="137160" cy="137160"/>
+          </a:xfrm>
+          <a:prstGeom prst="ellipse">
+            <a:avLst/>
+          </a:prstGeom>
+          <a:solidFill>
+            <a:srgbClr val="14B8A6"/>
+          </a:solidFill>
+          <a:ln>
+            <a:noFill/>
+          </a:ln>
+          <a:effectLst/>
+        </p:spPr>
+        <p:style>
+          <a:lnRef idx="1">
+            <a:schemeClr val="accent1"/>
+          </a:lnRef>
+          <a:fillRef idx="3">
+            <a:schemeClr val="accent1"/>
+          </a:fillRef>
+          <a:effectRef idx="2">
+            <a:schemeClr val="accent1"/>
+          </a:effectRef>
+          <a:fontRef idx="minor">
+            <a:schemeClr val="lt1"/>
+          </a:fontRef>
+        </p:style>
+        <p:txBody>
+          <a:bodyPr rtlCol="0" anchor="ctr"/>
+          <a:lstStyle/>
+          <a:p>
+            <a:pPr algn="ctr"/>
+          </a:p>
+        </p:txBody>
+      </p:sp>
+      <p:sp>
+        <p:nvSpPr>
+          <p:cNvPr id="11" name="Oval 10"/>
+          <p:cNvSpPr/>
+          <p:nvPr/>
+        </p:nvSpPr>
+        <p:spPr>
+          <a:xfrm>
+            <a:off x="11448288" y="1042416"/>
+            <a:ext cx="137160" cy="137160"/>
+          </a:xfrm>
+          <a:prstGeom prst="ellipse">
+            <a:avLst/>
+          </a:prstGeom>
+          <a:solidFill>
+            <a:srgbClr val="3A4C63"/>
+          </a:solidFill>
+          <a:ln>
+            <a:noFill/>
+          </a:ln>
+          <a:effectLst/>
+        </p:spPr>
+        <p:style>
+          <a:lnRef idx="1">
+            <a:schemeClr val="accent1"/>
+          </a:lnRef>
+          <a:fillRef idx="3">
+            <a:schemeClr val="accent1"/>
+          </a:fillRef>
+          <a:effectRef idx="2">
+            <a:schemeClr val="accent1"/>
+          </a:effectRef>
+          <a:fontRef idx="minor">
+            <a:schemeClr val="lt1"/>
+          </a:fontRef>
+        </p:style>
+        <p:txBody>
+          <a:bodyPr rtlCol="0" anchor="ctr"/>
+          <a:lstStyle/>
+          <a:p>
+            <a:pPr algn="ctr"/>
+          </a:p>
+        </p:txBody>
+      </p:sp>
+      <p:sp>
+        <p:nvSpPr>
+          <p:cNvPr id="12" name="TextBox 11"/>
+          <p:cNvSpPr txBox="1"/>
+          <p:nvPr/>
+        </p:nvSpPr>
+        <p:spPr>
+          <a:xfrm>
+            <a:off x="548640" y="914400"/>
+            <a:ext cx="6400800" cy="2926080"/>
+          </a:xfrm>
+          <a:prstGeom prst="rect">
+            <a:avLst/>
+          </a:prstGeom>
+          <a:noFill/>
+        </p:spPr>
+        <p:txBody>
+          <a:bodyPr wrap="square" anchor="t" lIns="0" rIns="0" tIns="0" bIns="0">
+            <a:spAutoFit/>
+          </a:bodyPr>
+          <a:lstStyle/>
+          <a:p>
+            <a:pPr algn="l">
+              <a:lnSpc>
+                <a:spcPct val="110000"/>
+              </a:lnSpc>
+            </a:pPr>
+            <a:r>
+              <a:rPr sz="20000" b="1">
+                <a:solidFill>
+                  <a:srgbClr val="2A4760"/>
+                </a:solidFill>
+                <a:latin typeface="Avenir Next"/>
+              </a:rPr>
+              <a:t>03</a:t>
+            </a:r>
+          </a:p>
+        </p:txBody>
+      </p:sp>
+      <p:sp>
+        <p:nvSpPr>
+          <p:cNvPr id="13" name="Rectangle 12"/>
+          <p:cNvSpPr/>
+          <p:nvPr/>
+        </p:nvSpPr>
+        <p:spPr>
+          <a:xfrm>
+            <a:off x="868680" y="3977639"/>
+            <a:ext cx="2194560" cy="38100"/>
+          </a:xfrm>
+          <a:prstGeom prst="rect">
+            <a:avLst/>
+          </a:prstGeom>
+          <a:solidFill>
+            <a:srgbClr val="14B8A6"/>
+          </a:solidFill>
+          <a:ln>
+            <a:noFill/>
+          </a:ln>
+          <a:effectLst/>
+        </p:spPr>
+        <p:style>
+          <a:lnRef idx="1">
+            <a:schemeClr val="accent1"/>
+          </a:lnRef>
+          <a:fillRef idx="3">
+            <a:schemeClr val="accent1"/>
+          </a:fillRef>
+          <a:effectRef idx="2">
+            <a:schemeClr val="accent1"/>
+          </a:effectRef>
+          <a:fontRef idx="minor">
+            <a:schemeClr val="lt1"/>
+          </a:fontRef>
+        </p:style>
+        <p:txBody>
+          <a:bodyPr rtlCol="0" anchor="ctr"/>
+          <a:lstStyle/>
+          <a:p>
+            <a:pPr algn="ctr"/>
+          </a:p>
+        </p:txBody>
+      </p:sp>
+      <p:sp>
+        <p:nvSpPr>
+          <p:cNvPr id="14" name="TextBox 13"/>
           <p:cNvSpPr txBox="1"/>
           <p:nvPr/>
         </p:nvSpPr>
@@ -3620,7 +4412,7 @@
       </p:sp>
       <p:sp>
         <p:nvSpPr>
-          <p:cNvPr id="6" name="TextBox 5"/>
+          <p:cNvPr id="15" name="TextBox 14"/>
           <p:cNvSpPr txBox="1"/>
           <p:nvPr/>
         </p:nvSpPr>
@@ -8869,55 +9661,60 @@
       </p:sp>
       <p:sp>
         <p:nvSpPr>
-          <p:cNvPr id="3" name="TextBox 2"/>
-          <p:cNvSpPr txBox="1"/>
-          <p:nvPr/>
-        </p:nvSpPr>
-        <p:spPr>
-          <a:xfrm>
-            <a:off x="548640" y="914400"/>
-            <a:ext cx="6400800" cy="2926080"/>
-          </a:xfrm>
-          <a:prstGeom prst="rect">
-            <a:avLst/>
-          </a:prstGeom>
-          <a:noFill/>
-        </p:spPr>
-        <p:txBody>
-          <a:bodyPr wrap="square" anchor="t" lIns="0" rIns="0" tIns="0" bIns="0">
-            <a:spAutoFit/>
-          </a:bodyPr>
-          <a:lstStyle/>
-          <a:p>
-            <a:pPr algn="l">
-              <a:lnSpc>
-                <a:spcPct val="110000"/>
-              </a:lnSpc>
-            </a:pPr>
-            <a:r>
-              <a:rPr sz="20000" b="1">
-                <a:solidFill>
-                  <a:srgbClr val="2A4760"/>
-                </a:solidFill>
-                <a:latin typeface="Avenir Next"/>
-              </a:rPr>
-              <a:t>04</a:t>
-            </a:r>
-          </a:p>
-        </p:txBody>
-      </p:sp>
-      <p:sp>
-        <p:nvSpPr>
-          <p:cNvPr id="4" name="Rectangle 3"/>
+          <p:cNvPr id="3" name="Oval 2"/>
           <p:cNvSpPr/>
           <p:nvPr/>
         </p:nvSpPr>
         <p:spPr>
           <a:xfrm>
-            <a:off x="868680" y="3977639"/>
-            <a:ext cx="2194560" cy="38100"/>
-          </a:xfrm>
-          <a:prstGeom prst="rect">
+            <a:off x="10972800" y="566928"/>
+            <a:ext cx="137160" cy="137160"/>
+          </a:xfrm>
+          <a:prstGeom prst="ellipse">
+            <a:avLst/>
+          </a:prstGeom>
+          <a:solidFill>
+            <a:srgbClr val="3A4C63"/>
+          </a:solidFill>
+          <a:ln>
+            <a:noFill/>
+          </a:ln>
+          <a:effectLst/>
+        </p:spPr>
+        <p:style>
+          <a:lnRef idx="1">
+            <a:schemeClr val="accent1"/>
+          </a:lnRef>
+          <a:fillRef idx="3">
+            <a:schemeClr val="accent1"/>
+          </a:fillRef>
+          <a:effectRef idx="2">
+            <a:schemeClr val="accent1"/>
+          </a:effectRef>
+          <a:fontRef idx="minor">
+            <a:schemeClr val="lt1"/>
+          </a:fontRef>
+        </p:style>
+        <p:txBody>
+          <a:bodyPr rtlCol="0" anchor="ctr"/>
+          <a:lstStyle/>
+          <a:p>
+            <a:pPr algn="ctr"/>
+          </a:p>
+        </p:txBody>
+      </p:sp>
+      <p:sp>
+        <p:nvSpPr>
+          <p:cNvPr id="4" name="Oval 3"/>
+          <p:cNvSpPr/>
+          <p:nvPr/>
+        </p:nvSpPr>
+        <p:spPr>
+          <a:xfrm>
+            <a:off x="11210544" y="566928"/>
+            <a:ext cx="137160" cy="137160"/>
+          </a:xfrm>
+          <a:prstGeom prst="ellipse">
             <a:avLst/>
           </a:prstGeom>
           <a:solidFill>
@@ -8952,7 +9749,398 @@
       </p:sp>
       <p:sp>
         <p:nvSpPr>
-          <p:cNvPr id="5" name="TextBox 4"/>
+          <p:cNvPr id="5" name="Oval 4"/>
+          <p:cNvSpPr/>
+          <p:nvPr/>
+        </p:nvSpPr>
+        <p:spPr>
+          <a:xfrm>
+            <a:off x="11448288" y="566928"/>
+            <a:ext cx="137160" cy="137160"/>
+          </a:xfrm>
+          <a:prstGeom prst="ellipse">
+            <a:avLst/>
+          </a:prstGeom>
+          <a:solidFill>
+            <a:srgbClr val="3A4C63"/>
+          </a:solidFill>
+          <a:ln>
+            <a:noFill/>
+          </a:ln>
+          <a:effectLst/>
+        </p:spPr>
+        <p:style>
+          <a:lnRef idx="1">
+            <a:schemeClr val="accent1"/>
+          </a:lnRef>
+          <a:fillRef idx="3">
+            <a:schemeClr val="accent1"/>
+          </a:fillRef>
+          <a:effectRef idx="2">
+            <a:schemeClr val="accent1"/>
+          </a:effectRef>
+          <a:fontRef idx="minor">
+            <a:schemeClr val="lt1"/>
+          </a:fontRef>
+        </p:style>
+        <p:txBody>
+          <a:bodyPr rtlCol="0" anchor="ctr"/>
+          <a:lstStyle/>
+          <a:p>
+            <a:pPr algn="ctr"/>
+          </a:p>
+        </p:txBody>
+      </p:sp>
+      <p:sp>
+        <p:nvSpPr>
+          <p:cNvPr id="6" name="Oval 5"/>
+          <p:cNvSpPr/>
+          <p:nvPr/>
+        </p:nvSpPr>
+        <p:spPr>
+          <a:xfrm>
+            <a:off x="10972800" y="804672"/>
+            <a:ext cx="137160" cy="137160"/>
+          </a:xfrm>
+          <a:prstGeom prst="ellipse">
+            <a:avLst/>
+          </a:prstGeom>
+          <a:solidFill>
+            <a:srgbClr val="3A4C63"/>
+          </a:solidFill>
+          <a:ln>
+            <a:noFill/>
+          </a:ln>
+          <a:effectLst/>
+        </p:spPr>
+        <p:style>
+          <a:lnRef idx="1">
+            <a:schemeClr val="accent1"/>
+          </a:lnRef>
+          <a:fillRef idx="3">
+            <a:schemeClr val="accent1"/>
+          </a:fillRef>
+          <a:effectRef idx="2">
+            <a:schemeClr val="accent1"/>
+          </a:effectRef>
+          <a:fontRef idx="minor">
+            <a:schemeClr val="lt1"/>
+          </a:fontRef>
+        </p:style>
+        <p:txBody>
+          <a:bodyPr rtlCol="0" anchor="ctr"/>
+          <a:lstStyle/>
+          <a:p>
+            <a:pPr algn="ctr"/>
+          </a:p>
+        </p:txBody>
+      </p:sp>
+      <p:sp>
+        <p:nvSpPr>
+          <p:cNvPr id="7" name="Oval 6"/>
+          <p:cNvSpPr/>
+          <p:nvPr/>
+        </p:nvSpPr>
+        <p:spPr>
+          <a:xfrm>
+            <a:off x="11210544" y="804672"/>
+            <a:ext cx="137160" cy="137160"/>
+          </a:xfrm>
+          <a:prstGeom prst="ellipse">
+            <a:avLst/>
+          </a:prstGeom>
+          <a:solidFill>
+            <a:srgbClr val="14B8A6"/>
+          </a:solidFill>
+          <a:ln>
+            <a:noFill/>
+          </a:ln>
+          <a:effectLst/>
+        </p:spPr>
+        <p:style>
+          <a:lnRef idx="1">
+            <a:schemeClr val="accent1"/>
+          </a:lnRef>
+          <a:fillRef idx="3">
+            <a:schemeClr val="accent1"/>
+          </a:fillRef>
+          <a:effectRef idx="2">
+            <a:schemeClr val="accent1"/>
+          </a:effectRef>
+          <a:fontRef idx="minor">
+            <a:schemeClr val="lt1"/>
+          </a:fontRef>
+        </p:style>
+        <p:txBody>
+          <a:bodyPr rtlCol="0" anchor="ctr"/>
+          <a:lstStyle/>
+          <a:p>
+            <a:pPr algn="ctr"/>
+          </a:p>
+        </p:txBody>
+      </p:sp>
+      <p:sp>
+        <p:nvSpPr>
+          <p:cNvPr id="8" name="Oval 7"/>
+          <p:cNvSpPr/>
+          <p:nvPr/>
+        </p:nvSpPr>
+        <p:spPr>
+          <a:xfrm>
+            <a:off x="11448288" y="804672"/>
+            <a:ext cx="137160" cy="137160"/>
+          </a:xfrm>
+          <a:prstGeom prst="ellipse">
+            <a:avLst/>
+          </a:prstGeom>
+          <a:solidFill>
+            <a:srgbClr val="3A4C63"/>
+          </a:solidFill>
+          <a:ln>
+            <a:noFill/>
+          </a:ln>
+          <a:effectLst/>
+        </p:spPr>
+        <p:style>
+          <a:lnRef idx="1">
+            <a:schemeClr val="accent1"/>
+          </a:lnRef>
+          <a:fillRef idx="3">
+            <a:schemeClr val="accent1"/>
+          </a:fillRef>
+          <a:effectRef idx="2">
+            <a:schemeClr val="accent1"/>
+          </a:effectRef>
+          <a:fontRef idx="minor">
+            <a:schemeClr val="lt1"/>
+          </a:fontRef>
+        </p:style>
+        <p:txBody>
+          <a:bodyPr rtlCol="0" anchor="ctr"/>
+          <a:lstStyle/>
+          <a:p>
+            <a:pPr algn="ctr"/>
+          </a:p>
+        </p:txBody>
+      </p:sp>
+      <p:sp>
+        <p:nvSpPr>
+          <p:cNvPr id="9" name="Oval 8"/>
+          <p:cNvSpPr/>
+          <p:nvPr/>
+        </p:nvSpPr>
+        <p:spPr>
+          <a:xfrm>
+            <a:off x="10972800" y="1042416"/>
+            <a:ext cx="137160" cy="137160"/>
+          </a:xfrm>
+          <a:prstGeom prst="ellipse">
+            <a:avLst/>
+          </a:prstGeom>
+          <a:solidFill>
+            <a:srgbClr val="3A4C63"/>
+          </a:solidFill>
+          <a:ln>
+            <a:noFill/>
+          </a:ln>
+          <a:effectLst/>
+        </p:spPr>
+        <p:style>
+          <a:lnRef idx="1">
+            <a:schemeClr val="accent1"/>
+          </a:lnRef>
+          <a:fillRef idx="3">
+            <a:schemeClr val="accent1"/>
+          </a:fillRef>
+          <a:effectRef idx="2">
+            <a:schemeClr val="accent1"/>
+          </a:effectRef>
+          <a:fontRef idx="minor">
+            <a:schemeClr val="lt1"/>
+          </a:fontRef>
+        </p:style>
+        <p:txBody>
+          <a:bodyPr rtlCol="0" anchor="ctr"/>
+          <a:lstStyle/>
+          <a:p>
+            <a:pPr algn="ctr"/>
+          </a:p>
+        </p:txBody>
+      </p:sp>
+      <p:sp>
+        <p:nvSpPr>
+          <p:cNvPr id="10" name="Oval 9"/>
+          <p:cNvSpPr/>
+          <p:nvPr/>
+        </p:nvSpPr>
+        <p:spPr>
+          <a:xfrm>
+            <a:off x="11210544" y="1042416"/>
+            <a:ext cx="137160" cy="137160"/>
+          </a:xfrm>
+          <a:prstGeom prst="ellipse">
+            <a:avLst/>
+          </a:prstGeom>
+          <a:solidFill>
+            <a:srgbClr val="14B8A6"/>
+          </a:solidFill>
+          <a:ln>
+            <a:noFill/>
+          </a:ln>
+          <a:effectLst/>
+        </p:spPr>
+        <p:style>
+          <a:lnRef idx="1">
+            <a:schemeClr val="accent1"/>
+          </a:lnRef>
+          <a:fillRef idx="3">
+            <a:schemeClr val="accent1"/>
+          </a:fillRef>
+          <a:effectRef idx="2">
+            <a:schemeClr val="accent1"/>
+          </a:effectRef>
+          <a:fontRef idx="minor">
+            <a:schemeClr val="lt1"/>
+          </a:fontRef>
+        </p:style>
+        <p:txBody>
+          <a:bodyPr rtlCol="0" anchor="ctr"/>
+          <a:lstStyle/>
+          <a:p>
+            <a:pPr algn="ctr"/>
+          </a:p>
+        </p:txBody>
+      </p:sp>
+      <p:sp>
+        <p:nvSpPr>
+          <p:cNvPr id="11" name="Oval 10"/>
+          <p:cNvSpPr/>
+          <p:nvPr/>
+        </p:nvSpPr>
+        <p:spPr>
+          <a:xfrm>
+            <a:off x="11448288" y="1042416"/>
+            <a:ext cx="137160" cy="137160"/>
+          </a:xfrm>
+          <a:prstGeom prst="ellipse">
+            <a:avLst/>
+          </a:prstGeom>
+          <a:solidFill>
+            <a:srgbClr val="3A4C63"/>
+          </a:solidFill>
+          <a:ln>
+            <a:noFill/>
+          </a:ln>
+          <a:effectLst/>
+        </p:spPr>
+        <p:style>
+          <a:lnRef idx="1">
+            <a:schemeClr val="accent1"/>
+          </a:lnRef>
+          <a:fillRef idx="3">
+            <a:schemeClr val="accent1"/>
+          </a:fillRef>
+          <a:effectRef idx="2">
+            <a:schemeClr val="accent1"/>
+          </a:effectRef>
+          <a:fontRef idx="minor">
+            <a:schemeClr val="lt1"/>
+          </a:fontRef>
+        </p:style>
+        <p:txBody>
+          <a:bodyPr rtlCol="0" anchor="ctr"/>
+          <a:lstStyle/>
+          <a:p>
+            <a:pPr algn="ctr"/>
+          </a:p>
+        </p:txBody>
+      </p:sp>
+      <p:sp>
+        <p:nvSpPr>
+          <p:cNvPr id="12" name="TextBox 11"/>
+          <p:cNvSpPr txBox="1"/>
+          <p:nvPr/>
+        </p:nvSpPr>
+        <p:spPr>
+          <a:xfrm>
+            <a:off x="548640" y="914400"/>
+            <a:ext cx="6400800" cy="2926080"/>
+          </a:xfrm>
+          <a:prstGeom prst="rect">
+            <a:avLst/>
+          </a:prstGeom>
+          <a:noFill/>
+        </p:spPr>
+        <p:txBody>
+          <a:bodyPr wrap="square" anchor="t" lIns="0" rIns="0" tIns="0" bIns="0">
+            <a:spAutoFit/>
+          </a:bodyPr>
+          <a:lstStyle/>
+          <a:p>
+            <a:pPr algn="l">
+              <a:lnSpc>
+                <a:spcPct val="110000"/>
+              </a:lnSpc>
+            </a:pPr>
+            <a:r>
+              <a:rPr sz="20000" b="1">
+                <a:solidFill>
+                  <a:srgbClr val="2A4760"/>
+                </a:solidFill>
+                <a:latin typeface="Avenir Next"/>
+              </a:rPr>
+              <a:t>04</a:t>
+            </a:r>
+          </a:p>
+        </p:txBody>
+      </p:sp>
+      <p:sp>
+        <p:nvSpPr>
+          <p:cNvPr id="13" name="Rectangle 12"/>
+          <p:cNvSpPr/>
+          <p:nvPr/>
+        </p:nvSpPr>
+        <p:spPr>
+          <a:xfrm>
+            <a:off x="868680" y="3977639"/>
+            <a:ext cx="2194560" cy="38100"/>
+          </a:xfrm>
+          <a:prstGeom prst="rect">
+            <a:avLst/>
+          </a:prstGeom>
+          <a:solidFill>
+            <a:srgbClr val="14B8A6"/>
+          </a:solidFill>
+          <a:ln>
+            <a:noFill/>
+          </a:ln>
+          <a:effectLst/>
+        </p:spPr>
+        <p:style>
+          <a:lnRef idx="1">
+            <a:schemeClr val="accent1"/>
+          </a:lnRef>
+          <a:fillRef idx="3">
+            <a:schemeClr val="accent1"/>
+          </a:fillRef>
+          <a:effectRef idx="2">
+            <a:schemeClr val="accent1"/>
+          </a:effectRef>
+          <a:fontRef idx="minor">
+            <a:schemeClr val="lt1"/>
+          </a:fontRef>
+        </p:style>
+        <p:txBody>
+          <a:bodyPr rtlCol="0" anchor="ctr"/>
+          <a:lstStyle/>
+          <a:p>
+            <a:pPr algn="ctr"/>
+          </a:p>
+        </p:txBody>
+      </p:sp>
+      <p:sp>
+        <p:nvSpPr>
+          <p:cNvPr id="14" name="TextBox 13"/>
           <p:cNvSpPr txBox="1"/>
           <p:nvPr/>
         </p:nvSpPr>
@@ -8991,7 +10179,7 @@
       </p:sp>
       <p:sp>
         <p:nvSpPr>
-          <p:cNvPr id="6" name="TextBox 5"/>
+          <p:cNvPr id="15" name="TextBox 14"/>
           <p:cNvSpPr txBox="1"/>
           <p:nvPr/>
         </p:nvSpPr>
@@ -12222,55 +13410,60 @@
       </p:sp>
       <p:sp>
         <p:nvSpPr>
-          <p:cNvPr id="3" name="TextBox 2"/>
-          <p:cNvSpPr txBox="1"/>
-          <p:nvPr/>
-        </p:nvSpPr>
-        <p:spPr>
-          <a:xfrm>
-            <a:off x="548640" y="914400"/>
-            <a:ext cx="6400800" cy="2926080"/>
-          </a:xfrm>
-          <a:prstGeom prst="rect">
-            <a:avLst/>
-          </a:prstGeom>
-          <a:noFill/>
-        </p:spPr>
-        <p:txBody>
-          <a:bodyPr wrap="square" anchor="t" lIns="0" rIns="0" tIns="0" bIns="0">
-            <a:spAutoFit/>
-          </a:bodyPr>
-          <a:lstStyle/>
-          <a:p>
-            <a:pPr algn="l">
-              <a:lnSpc>
-                <a:spcPct val="110000"/>
-              </a:lnSpc>
-            </a:pPr>
-            <a:r>
-              <a:rPr sz="20000" b="1">
-                <a:solidFill>
-                  <a:srgbClr val="2A4760"/>
-                </a:solidFill>
-                <a:latin typeface="Avenir Next"/>
-              </a:rPr>
-              <a:t>05</a:t>
-            </a:r>
-          </a:p>
-        </p:txBody>
-      </p:sp>
-      <p:sp>
-        <p:nvSpPr>
-          <p:cNvPr id="4" name="Rectangle 3"/>
+          <p:cNvPr id="3" name="Oval 2"/>
           <p:cNvSpPr/>
           <p:nvPr/>
         </p:nvSpPr>
         <p:spPr>
           <a:xfrm>
-            <a:off x="868680" y="3977639"/>
-            <a:ext cx="2194560" cy="38100"/>
-          </a:xfrm>
-          <a:prstGeom prst="rect">
+            <a:off x="10972800" y="566928"/>
+            <a:ext cx="137160" cy="137160"/>
+          </a:xfrm>
+          <a:prstGeom prst="ellipse">
+            <a:avLst/>
+          </a:prstGeom>
+          <a:solidFill>
+            <a:srgbClr val="3A4C63"/>
+          </a:solidFill>
+          <a:ln>
+            <a:noFill/>
+          </a:ln>
+          <a:effectLst/>
+        </p:spPr>
+        <p:style>
+          <a:lnRef idx="1">
+            <a:schemeClr val="accent1"/>
+          </a:lnRef>
+          <a:fillRef idx="3">
+            <a:schemeClr val="accent1"/>
+          </a:fillRef>
+          <a:effectRef idx="2">
+            <a:schemeClr val="accent1"/>
+          </a:effectRef>
+          <a:fontRef idx="minor">
+            <a:schemeClr val="lt1"/>
+          </a:fontRef>
+        </p:style>
+        <p:txBody>
+          <a:bodyPr rtlCol="0" anchor="ctr"/>
+          <a:lstStyle/>
+          <a:p>
+            <a:pPr algn="ctr"/>
+          </a:p>
+        </p:txBody>
+      </p:sp>
+      <p:sp>
+        <p:nvSpPr>
+          <p:cNvPr id="4" name="Oval 3"/>
+          <p:cNvSpPr/>
+          <p:nvPr/>
+        </p:nvSpPr>
+        <p:spPr>
+          <a:xfrm>
+            <a:off x="11210544" y="566928"/>
+            <a:ext cx="137160" cy="137160"/>
+          </a:xfrm>
+          <a:prstGeom prst="ellipse">
             <a:avLst/>
           </a:prstGeom>
           <a:solidFill>
@@ -12305,7 +13498,398 @@
       </p:sp>
       <p:sp>
         <p:nvSpPr>
-          <p:cNvPr id="5" name="TextBox 4"/>
+          <p:cNvPr id="5" name="Oval 4"/>
+          <p:cNvSpPr/>
+          <p:nvPr/>
+        </p:nvSpPr>
+        <p:spPr>
+          <a:xfrm>
+            <a:off x="11448288" y="566928"/>
+            <a:ext cx="137160" cy="137160"/>
+          </a:xfrm>
+          <a:prstGeom prst="ellipse">
+            <a:avLst/>
+          </a:prstGeom>
+          <a:solidFill>
+            <a:srgbClr val="3A4C63"/>
+          </a:solidFill>
+          <a:ln>
+            <a:noFill/>
+          </a:ln>
+          <a:effectLst/>
+        </p:spPr>
+        <p:style>
+          <a:lnRef idx="1">
+            <a:schemeClr val="accent1"/>
+          </a:lnRef>
+          <a:fillRef idx="3">
+            <a:schemeClr val="accent1"/>
+          </a:fillRef>
+          <a:effectRef idx="2">
+            <a:schemeClr val="accent1"/>
+          </a:effectRef>
+          <a:fontRef idx="minor">
+            <a:schemeClr val="lt1"/>
+          </a:fontRef>
+        </p:style>
+        <p:txBody>
+          <a:bodyPr rtlCol="0" anchor="ctr"/>
+          <a:lstStyle/>
+          <a:p>
+            <a:pPr algn="ctr"/>
+          </a:p>
+        </p:txBody>
+      </p:sp>
+      <p:sp>
+        <p:nvSpPr>
+          <p:cNvPr id="6" name="Oval 5"/>
+          <p:cNvSpPr/>
+          <p:nvPr/>
+        </p:nvSpPr>
+        <p:spPr>
+          <a:xfrm>
+            <a:off x="10972800" y="804672"/>
+            <a:ext cx="137160" cy="137160"/>
+          </a:xfrm>
+          <a:prstGeom prst="ellipse">
+            <a:avLst/>
+          </a:prstGeom>
+          <a:solidFill>
+            <a:srgbClr val="3A4C63"/>
+          </a:solidFill>
+          <a:ln>
+            <a:noFill/>
+          </a:ln>
+          <a:effectLst/>
+        </p:spPr>
+        <p:style>
+          <a:lnRef idx="1">
+            <a:schemeClr val="accent1"/>
+          </a:lnRef>
+          <a:fillRef idx="3">
+            <a:schemeClr val="accent1"/>
+          </a:fillRef>
+          <a:effectRef idx="2">
+            <a:schemeClr val="accent1"/>
+          </a:effectRef>
+          <a:fontRef idx="minor">
+            <a:schemeClr val="lt1"/>
+          </a:fontRef>
+        </p:style>
+        <p:txBody>
+          <a:bodyPr rtlCol="0" anchor="ctr"/>
+          <a:lstStyle/>
+          <a:p>
+            <a:pPr algn="ctr"/>
+          </a:p>
+        </p:txBody>
+      </p:sp>
+      <p:sp>
+        <p:nvSpPr>
+          <p:cNvPr id="7" name="Oval 6"/>
+          <p:cNvSpPr/>
+          <p:nvPr/>
+        </p:nvSpPr>
+        <p:spPr>
+          <a:xfrm>
+            <a:off x="11210544" y="804672"/>
+            <a:ext cx="137160" cy="137160"/>
+          </a:xfrm>
+          <a:prstGeom prst="ellipse">
+            <a:avLst/>
+          </a:prstGeom>
+          <a:solidFill>
+            <a:srgbClr val="14B8A6"/>
+          </a:solidFill>
+          <a:ln>
+            <a:noFill/>
+          </a:ln>
+          <a:effectLst/>
+        </p:spPr>
+        <p:style>
+          <a:lnRef idx="1">
+            <a:schemeClr val="accent1"/>
+          </a:lnRef>
+          <a:fillRef idx="3">
+            <a:schemeClr val="accent1"/>
+          </a:fillRef>
+          <a:effectRef idx="2">
+            <a:schemeClr val="accent1"/>
+          </a:effectRef>
+          <a:fontRef idx="minor">
+            <a:schemeClr val="lt1"/>
+          </a:fontRef>
+        </p:style>
+        <p:txBody>
+          <a:bodyPr rtlCol="0" anchor="ctr"/>
+          <a:lstStyle/>
+          <a:p>
+            <a:pPr algn="ctr"/>
+          </a:p>
+        </p:txBody>
+      </p:sp>
+      <p:sp>
+        <p:nvSpPr>
+          <p:cNvPr id="8" name="Oval 7"/>
+          <p:cNvSpPr/>
+          <p:nvPr/>
+        </p:nvSpPr>
+        <p:spPr>
+          <a:xfrm>
+            <a:off x="11448288" y="804672"/>
+            <a:ext cx="137160" cy="137160"/>
+          </a:xfrm>
+          <a:prstGeom prst="ellipse">
+            <a:avLst/>
+          </a:prstGeom>
+          <a:solidFill>
+            <a:srgbClr val="3A4C63"/>
+          </a:solidFill>
+          <a:ln>
+            <a:noFill/>
+          </a:ln>
+          <a:effectLst/>
+        </p:spPr>
+        <p:style>
+          <a:lnRef idx="1">
+            <a:schemeClr val="accent1"/>
+          </a:lnRef>
+          <a:fillRef idx="3">
+            <a:schemeClr val="accent1"/>
+          </a:fillRef>
+          <a:effectRef idx="2">
+            <a:schemeClr val="accent1"/>
+          </a:effectRef>
+          <a:fontRef idx="minor">
+            <a:schemeClr val="lt1"/>
+          </a:fontRef>
+        </p:style>
+        <p:txBody>
+          <a:bodyPr rtlCol="0" anchor="ctr"/>
+          <a:lstStyle/>
+          <a:p>
+            <a:pPr algn="ctr"/>
+          </a:p>
+        </p:txBody>
+      </p:sp>
+      <p:sp>
+        <p:nvSpPr>
+          <p:cNvPr id="9" name="Oval 8"/>
+          <p:cNvSpPr/>
+          <p:nvPr/>
+        </p:nvSpPr>
+        <p:spPr>
+          <a:xfrm>
+            <a:off x="10972800" y="1042416"/>
+            <a:ext cx="137160" cy="137160"/>
+          </a:xfrm>
+          <a:prstGeom prst="ellipse">
+            <a:avLst/>
+          </a:prstGeom>
+          <a:solidFill>
+            <a:srgbClr val="3A4C63"/>
+          </a:solidFill>
+          <a:ln>
+            <a:noFill/>
+          </a:ln>
+          <a:effectLst/>
+        </p:spPr>
+        <p:style>
+          <a:lnRef idx="1">
+            <a:schemeClr val="accent1"/>
+          </a:lnRef>
+          <a:fillRef idx="3">
+            <a:schemeClr val="accent1"/>
+          </a:fillRef>
+          <a:effectRef idx="2">
+            <a:schemeClr val="accent1"/>
+          </a:effectRef>
+          <a:fontRef idx="minor">
+            <a:schemeClr val="lt1"/>
+          </a:fontRef>
+        </p:style>
+        <p:txBody>
+          <a:bodyPr rtlCol="0" anchor="ctr"/>
+          <a:lstStyle/>
+          <a:p>
+            <a:pPr algn="ctr"/>
+          </a:p>
+        </p:txBody>
+      </p:sp>
+      <p:sp>
+        <p:nvSpPr>
+          <p:cNvPr id="10" name="Oval 9"/>
+          <p:cNvSpPr/>
+          <p:nvPr/>
+        </p:nvSpPr>
+        <p:spPr>
+          <a:xfrm>
+            <a:off x="11210544" y="1042416"/>
+            <a:ext cx="137160" cy="137160"/>
+          </a:xfrm>
+          <a:prstGeom prst="ellipse">
+            <a:avLst/>
+          </a:prstGeom>
+          <a:solidFill>
+            <a:srgbClr val="14B8A6"/>
+          </a:solidFill>
+          <a:ln>
+            <a:noFill/>
+          </a:ln>
+          <a:effectLst/>
+        </p:spPr>
+        <p:style>
+          <a:lnRef idx="1">
+            <a:schemeClr val="accent1"/>
+          </a:lnRef>
+          <a:fillRef idx="3">
+            <a:schemeClr val="accent1"/>
+          </a:fillRef>
+          <a:effectRef idx="2">
+            <a:schemeClr val="accent1"/>
+          </a:effectRef>
+          <a:fontRef idx="minor">
+            <a:schemeClr val="lt1"/>
+          </a:fontRef>
+        </p:style>
+        <p:txBody>
+          <a:bodyPr rtlCol="0" anchor="ctr"/>
+          <a:lstStyle/>
+          <a:p>
+            <a:pPr algn="ctr"/>
+          </a:p>
+        </p:txBody>
+      </p:sp>
+      <p:sp>
+        <p:nvSpPr>
+          <p:cNvPr id="11" name="Oval 10"/>
+          <p:cNvSpPr/>
+          <p:nvPr/>
+        </p:nvSpPr>
+        <p:spPr>
+          <a:xfrm>
+            <a:off x="11448288" y="1042416"/>
+            <a:ext cx="137160" cy="137160"/>
+          </a:xfrm>
+          <a:prstGeom prst="ellipse">
+            <a:avLst/>
+          </a:prstGeom>
+          <a:solidFill>
+            <a:srgbClr val="3A4C63"/>
+          </a:solidFill>
+          <a:ln>
+            <a:noFill/>
+          </a:ln>
+          <a:effectLst/>
+        </p:spPr>
+        <p:style>
+          <a:lnRef idx="1">
+            <a:schemeClr val="accent1"/>
+          </a:lnRef>
+          <a:fillRef idx="3">
+            <a:schemeClr val="accent1"/>
+          </a:fillRef>
+          <a:effectRef idx="2">
+            <a:schemeClr val="accent1"/>
+          </a:effectRef>
+          <a:fontRef idx="minor">
+            <a:schemeClr val="lt1"/>
+          </a:fontRef>
+        </p:style>
+        <p:txBody>
+          <a:bodyPr rtlCol="0" anchor="ctr"/>
+          <a:lstStyle/>
+          <a:p>
+            <a:pPr algn="ctr"/>
+          </a:p>
+        </p:txBody>
+      </p:sp>
+      <p:sp>
+        <p:nvSpPr>
+          <p:cNvPr id="12" name="TextBox 11"/>
+          <p:cNvSpPr txBox="1"/>
+          <p:nvPr/>
+        </p:nvSpPr>
+        <p:spPr>
+          <a:xfrm>
+            <a:off x="548640" y="914400"/>
+            <a:ext cx="6400800" cy="2926080"/>
+          </a:xfrm>
+          <a:prstGeom prst="rect">
+            <a:avLst/>
+          </a:prstGeom>
+          <a:noFill/>
+        </p:spPr>
+        <p:txBody>
+          <a:bodyPr wrap="square" anchor="t" lIns="0" rIns="0" tIns="0" bIns="0">
+            <a:spAutoFit/>
+          </a:bodyPr>
+          <a:lstStyle/>
+          <a:p>
+            <a:pPr algn="l">
+              <a:lnSpc>
+                <a:spcPct val="110000"/>
+              </a:lnSpc>
+            </a:pPr>
+            <a:r>
+              <a:rPr sz="20000" b="1">
+                <a:solidFill>
+                  <a:srgbClr val="2A4760"/>
+                </a:solidFill>
+                <a:latin typeface="Avenir Next"/>
+              </a:rPr>
+              <a:t>05</a:t>
+            </a:r>
+          </a:p>
+        </p:txBody>
+      </p:sp>
+      <p:sp>
+        <p:nvSpPr>
+          <p:cNvPr id="13" name="Rectangle 12"/>
+          <p:cNvSpPr/>
+          <p:nvPr/>
+        </p:nvSpPr>
+        <p:spPr>
+          <a:xfrm>
+            <a:off x="868680" y="3977639"/>
+            <a:ext cx="2194560" cy="38100"/>
+          </a:xfrm>
+          <a:prstGeom prst="rect">
+            <a:avLst/>
+          </a:prstGeom>
+          <a:solidFill>
+            <a:srgbClr val="14B8A6"/>
+          </a:solidFill>
+          <a:ln>
+            <a:noFill/>
+          </a:ln>
+          <a:effectLst/>
+        </p:spPr>
+        <p:style>
+          <a:lnRef idx="1">
+            <a:schemeClr val="accent1"/>
+          </a:lnRef>
+          <a:fillRef idx="3">
+            <a:schemeClr val="accent1"/>
+          </a:fillRef>
+          <a:effectRef idx="2">
+            <a:schemeClr val="accent1"/>
+          </a:effectRef>
+          <a:fontRef idx="minor">
+            <a:schemeClr val="lt1"/>
+          </a:fontRef>
+        </p:style>
+        <p:txBody>
+          <a:bodyPr rtlCol="0" anchor="ctr"/>
+          <a:lstStyle/>
+          <a:p>
+            <a:pPr algn="ctr"/>
+          </a:p>
+        </p:txBody>
+      </p:sp>
+      <p:sp>
+        <p:nvSpPr>
+          <p:cNvPr id="14" name="TextBox 13"/>
           <p:cNvSpPr txBox="1"/>
           <p:nvPr/>
         </p:nvSpPr>
@@ -12344,7 +13928,7 @@
       </p:sp>
       <p:sp>
         <p:nvSpPr>
-          <p:cNvPr id="6" name="TextBox 5"/>
+          <p:cNvPr id="15" name="TextBox 14"/>
           <p:cNvSpPr txBox="1"/>
           <p:nvPr/>
         </p:nvSpPr>
@@ -14446,55 +16030,60 @@
       </p:sp>
       <p:sp>
         <p:nvSpPr>
-          <p:cNvPr id="3" name="TextBox 2"/>
-          <p:cNvSpPr txBox="1"/>
-          <p:nvPr/>
-        </p:nvSpPr>
-        <p:spPr>
-          <a:xfrm>
-            <a:off x="548640" y="914400"/>
-            <a:ext cx="6400800" cy="2926080"/>
-          </a:xfrm>
-          <a:prstGeom prst="rect">
-            <a:avLst/>
-          </a:prstGeom>
-          <a:noFill/>
-        </p:spPr>
-        <p:txBody>
-          <a:bodyPr wrap="square" anchor="t" lIns="0" rIns="0" tIns="0" bIns="0">
-            <a:spAutoFit/>
-          </a:bodyPr>
-          <a:lstStyle/>
-          <a:p>
-            <a:pPr algn="l">
-              <a:lnSpc>
-                <a:spcPct val="110000"/>
-              </a:lnSpc>
-            </a:pPr>
-            <a:r>
-              <a:rPr sz="20000" b="1">
-                <a:solidFill>
-                  <a:srgbClr val="2A4760"/>
-                </a:solidFill>
-                <a:latin typeface="Avenir Next"/>
-              </a:rPr>
-              <a:t>06</a:t>
-            </a:r>
-          </a:p>
-        </p:txBody>
-      </p:sp>
-      <p:sp>
-        <p:nvSpPr>
-          <p:cNvPr id="4" name="Rectangle 3"/>
+          <p:cNvPr id="3" name="Oval 2"/>
           <p:cNvSpPr/>
           <p:nvPr/>
         </p:nvSpPr>
         <p:spPr>
           <a:xfrm>
-            <a:off x="868680" y="3977639"/>
-            <a:ext cx="2194560" cy="38100"/>
-          </a:xfrm>
-          <a:prstGeom prst="rect">
+            <a:off x="10972800" y="566928"/>
+            <a:ext cx="137160" cy="137160"/>
+          </a:xfrm>
+          <a:prstGeom prst="ellipse">
+            <a:avLst/>
+          </a:prstGeom>
+          <a:solidFill>
+            <a:srgbClr val="3A4C63"/>
+          </a:solidFill>
+          <a:ln>
+            <a:noFill/>
+          </a:ln>
+          <a:effectLst/>
+        </p:spPr>
+        <p:style>
+          <a:lnRef idx="1">
+            <a:schemeClr val="accent1"/>
+          </a:lnRef>
+          <a:fillRef idx="3">
+            <a:schemeClr val="accent1"/>
+          </a:fillRef>
+          <a:effectRef idx="2">
+            <a:schemeClr val="accent1"/>
+          </a:effectRef>
+          <a:fontRef idx="minor">
+            <a:schemeClr val="lt1"/>
+          </a:fontRef>
+        </p:style>
+        <p:txBody>
+          <a:bodyPr rtlCol="0" anchor="ctr"/>
+          <a:lstStyle/>
+          <a:p>
+            <a:pPr algn="ctr"/>
+          </a:p>
+        </p:txBody>
+      </p:sp>
+      <p:sp>
+        <p:nvSpPr>
+          <p:cNvPr id="4" name="Oval 3"/>
+          <p:cNvSpPr/>
+          <p:nvPr/>
+        </p:nvSpPr>
+        <p:spPr>
+          <a:xfrm>
+            <a:off x="11210544" y="566928"/>
+            <a:ext cx="137160" cy="137160"/>
+          </a:xfrm>
+          <a:prstGeom prst="ellipse">
             <a:avLst/>
           </a:prstGeom>
           <a:solidFill>
@@ -14529,7 +16118,398 @@
       </p:sp>
       <p:sp>
         <p:nvSpPr>
-          <p:cNvPr id="5" name="TextBox 4"/>
+          <p:cNvPr id="5" name="Oval 4"/>
+          <p:cNvSpPr/>
+          <p:nvPr/>
+        </p:nvSpPr>
+        <p:spPr>
+          <a:xfrm>
+            <a:off x="11448288" y="566928"/>
+            <a:ext cx="137160" cy="137160"/>
+          </a:xfrm>
+          <a:prstGeom prst="ellipse">
+            <a:avLst/>
+          </a:prstGeom>
+          <a:solidFill>
+            <a:srgbClr val="3A4C63"/>
+          </a:solidFill>
+          <a:ln>
+            <a:noFill/>
+          </a:ln>
+          <a:effectLst/>
+        </p:spPr>
+        <p:style>
+          <a:lnRef idx="1">
+            <a:schemeClr val="accent1"/>
+          </a:lnRef>
+          <a:fillRef idx="3">
+            <a:schemeClr val="accent1"/>
+          </a:fillRef>
+          <a:effectRef idx="2">
+            <a:schemeClr val="accent1"/>
+          </a:effectRef>
+          <a:fontRef idx="minor">
+            <a:schemeClr val="lt1"/>
+          </a:fontRef>
+        </p:style>
+        <p:txBody>
+          <a:bodyPr rtlCol="0" anchor="ctr"/>
+          <a:lstStyle/>
+          <a:p>
+            <a:pPr algn="ctr"/>
+          </a:p>
+        </p:txBody>
+      </p:sp>
+      <p:sp>
+        <p:nvSpPr>
+          <p:cNvPr id="6" name="Oval 5"/>
+          <p:cNvSpPr/>
+          <p:nvPr/>
+        </p:nvSpPr>
+        <p:spPr>
+          <a:xfrm>
+            <a:off x="10972800" y="804672"/>
+            <a:ext cx="137160" cy="137160"/>
+          </a:xfrm>
+          <a:prstGeom prst="ellipse">
+            <a:avLst/>
+          </a:prstGeom>
+          <a:solidFill>
+            <a:srgbClr val="3A4C63"/>
+          </a:solidFill>
+          <a:ln>
+            <a:noFill/>
+          </a:ln>
+          <a:effectLst/>
+        </p:spPr>
+        <p:style>
+          <a:lnRef idx="1">
+            <a:schemeClr val="accent1"/>
+          </a:lnRef>
+          <a:fillRef idx="3">
+            <a:schemeClr val="accent1"/>
+          </a:fillRef>
+          <a:effectRef idx="2">
+            <a:schemeClr val="accent1"/>
+          </a:effectRef>
+          <a:fontRef idx="minor">
+            <a:schemeClr val="lt1"/>
+          </a:fontRef>
+        </p:style>
+        <p:txBody>
+          <a:bodyPr rtlCol="0" anchor="ctr"/>
+          <a:lstStyle/>
+          <a:p>
+            <a:pPr algn="ctr"/>
+          </a:p>
+        </p:txBody>
+      </p:sp>
+      <p:sp>
+        <p:nvSpPr>
+          <p:cNvPr id="7" name="Oval 6"/>
+          <p:cNvSpPr/>
+          <p:nvPr/>
+        </p:nvSpPr>
+        <p:spPr>
+          <a:xfrm>
+            <a:off x="11210544" y="804672"/>
+            <a:ext cx="137160" cy="137160"/>
+          </a:xfrm>
+          <a:prstGeom prst="ellipse">
+            <a:avLst/>
+          </a:prstGeom>
+          <a:solidFill>
+            <a:srgbClr val="14B8A6"/>
+          </a:solidFill>
+          <a:ln>
+            <a:noFill/>
+          </a:ln>
+          <a:effectLst/>
+        </p:spPr>
+        <p:style>
+          <a:lnRef idx="1">
+            <a:schemeClr val="accent1"/>
+          </a:lnRef>
+          <a:fillRef idx="3">
+            <a:schemeClr val="accent1"/>
+          </a:fillRef>
+          <a:effectRef idx="2">
+            <a:schemeClr val="accent1"/>
+          </a:effectRef>
+          <a:fontRef idx="minor">
+            <a:schemeClr val="lt1"/>
+          </a:fontRef>
+        </p:style>
+        <p:txBody>
+          <a:bodyPr rtlCol="0" anchor="ctr"/>
+          <a:lstStyle/>
+          <a:p>
+            <a:pPr algn="ctr"/>
+          </a:p>
+        </p:txBody>
+      </p:sp>
+      <p:sp>
+        <p:nvSpPr>
+          <p:cNvPr id="8" name="Oval 7"/>
+          <p:cNvSpPr/>
+          <p:nvPr/>
+        </p:nvSpPr>
+        <p:spPr>
+          <a:xfrm>
+            <a:off x="11448288" y="804672"/>
+            <a:ext cx="137160" cy="137160"/>
+          </a:xfrm>
+          <a:prstGeom prst="ellipse">
+            <a:avLst/>
+          </a:prstGeom>
+          <a:solidFill>
+            <a:srgbClr val="3A4C63"/>
+          </a:solidFill>
+          <a:ln>
+            <a:noFill/>
+          </a:ln>
+          <a:effectLst/>
+        </p:spPr>
+        <p:style>
+          <a:lnRef idx="1">
+            <a:schemeClr val="accent1"/>
+          </a:lnRef>
+          <a:fillRef idx="3">
+            <a:schemeClr val="accent1"/>
+          </a:fillRef>
+          <a:effectRef idx="2">
+            <a:schemeClr val="accent1"/>
+          </a:effectRef>
+          <a:fontRef idx="minor">
+            <a:schemeClr val="lt1"/>
+          </a:fontRef>
+        </p:style>
+        <p:txBody>
+          <a:bodyPr rtlCol="0" anchor="ctr"/>
+          <a:lstStyle/>
+          <a:p>
+            <a:pPr algn="ctr"/>
+          </a:p>
+        </p:txBody>
+      </p:sp>
+      <p:sp>
+        <p:nvSpPr>
+          <p:cNvPr id="9" name="Oval 8"/>
+          <p:cNvSpPr/>
+          <p:nvPr/>
+        </p:nvSpPr>
+        <p:spPr>
+          <a:xfrm>
+            <a:off x="10972800" y="1042416"/>
+            <a:ext cx="137160" cy="137160"/>
+          </a:xfrm>
+          <a:prstGeom prst="ellipse">
+            <a:avLst/>
+          </a:prstGeom>
+          <a:solidFill>
+            <a:srgbClr val="3A4C63"/>
+          </a:solidFill>
+          <a:ln>
+            <a:noFill/>
+          </a:ln>
+          <a:effectLst/>
+        </p:spPr>
+        <p:style>
+          <a:lnRef idx="1">
+            <a:schemeClr val="accent1"/>
+          </a:lnRef>
+          <a:fillRef idx="3">
+            <a:schemeClr val="accent1"/>
+          </a:fillRef>
+          <a:effectRef idx="2">
+            <a:schemeClr val="accent1"/>
+          </a:effectRef>
+          <a:fontRef idx="minor">
+            <a:schemeClr val="lt1"/>
+          </a:fontRef>
+        </p:style>
+        <p:txBody>
+          <a:bodyPr rtlCol="0" anchor="ctr"/>
+          <a:lstStyle/>
+          <a:p>
+            <a:pPr algn="ctr"/>
+          </a:p>
+        </p:txBody>
+      </p:sp>
+      <p:sp>
+        <p:nvSpPr>
+          <p:cNvPr id="10" name="Oval 9"/>
+          <p:cNvSpPr/>
+          <p:nvPr/>
+        </p:nvSpPr>
+        <p:spPr>
+          <a:xfrm>
+            <a:off x="11210544" y="1042416"/>
+            <a:ext cx="137160" cy="137160"/>
+          </a:xfrm>
+          <a:prstGeom prst="ellipse">
+            <a:avLst/>
+          </a:prstGeom>
+          <a:solidFill>
+            <a:srgbClr val="14B8A6"/>
+          </a:solidFill>
+          <a:ln>
+            <a:noFill/>
+          </a:ln>
+          <a:effectLst/>
+        </p:spPr>
+        <p:style>
+          <a:lnRef idx="1">
+            <a:schemeClr val="accent1"/>
+          </a:lnRef>
+          <a:fillRef idx="3">
+            <a:schemeClr val="accent1"/>
+          </a:fillRef>
+          <a:effectRef idx="2">
+            <a:schemeClr val="accent1"/>
+          </a:effectRef>
+          <a:fontRef idx="minor">
+            <a:schemeClr val="lt1"/>
+          </a:fontRef>
+        </p:style>
+        <p:txBody>
+          <a:bodyPr rtlCol="0" anchor="ctr"/>
+          <a:lstStyle/>
+          <a:p>
+            <a:pPr algn="ctr"/>
+          </a:p>
+        </p:txBody>
+      </p:sp>
+      <p:sp>
+        <p:nvSpPr>
+          <p:cNvPr id="11" name="Oval 10"/>
+          <p:cNvSpPr/>
+          <p:nvPr/>
+        </p:nvSpPr>
+        <p:spPr>
+          <a:xfrm>
+            <a:off x="11448288" y="1042416"/>
+            <a:ext cx="137160" cy="137160"/>
+          </a:xfrm>
+          <a:prstGeom prst="ellipse">
+            <a:avLst/>
+          </a:prstGeom>
+          <a:solidFill>
+            <a:srgbClr val="3A4C63"/>
+          </a:solidFill>
+          <a:ln>
+            <a:noFill/>
+          </a:ln>
+          <a:effectLst/>
+        </p:spPr>
+        <p:style>
+          <a:lnRef idx="1">
+            <a:schemeClr val="accent1"/>
+          </a:lnRef>
+          <a:fillRef idx="3">
+            <a:schemeClr val="accent1"/>
+          </a:fillRef>
+          <a:effectRef idx="2">
+            <a:schemeClr val="accent1"/>
+          </a:effectRef>
+          <a:fontRef idx="minor">
+            <a:schemeClr val="lt1"/>
+          </a:fontRef>
+        </p:style>
+        <p:txBody>
+          <a:bodyPr rtlCol="0" anchor="ctr"/>
+          <a:lstStyle/>
+          <a:p>
+            <a:pPr algn="ctr"/>
+          </a:p>
+        </p:txBody>
+      </p:sp>
+      <p:sp>
+        <p:nvSpPr>
+          <p:cNvPr id="12" name="TextBox 11"/>
+          <p:cNvSpPr txBox="1"/>
+          <p:nvPr/>
+        </p:nvSpPr>
+        <p:spPr>
+          <a:xfrm>
+            <a:off x="548640" y="914400"/>
+            <a:ext cx="6400800" cy="2926080"/>
+          </a:xfrm>
+          <a:prstGeom prst="rect">
+            <a:avLst/>
+          </a:prstGeom>
+          <a:noFill/>
+        </p:spPr>
+        <p:txBody>
+          <a:bodyPr wrap="square" anchor="t" lIns="0" rIns="0" tIns="0" bIns="0">
+            <a:spAutoFit/>
+          </a:bodyPr>
+          <a:lstStyle/>
+          <a:p>
+            <a:pPr algn="l">
+              <a:lnSpc>
+                <a:spcPct val="110000"/>
+              </a:lnSpc>
+            </a:pPr>
+            <a:r>
+              <a:rPr sz="20000" b="1">
+                <a:solidFill>
+                  <a:srgbClr val="2A4760"/>
+                </a:solidFill>
+                <a:latin typeface="Avenir Next"/>
+              </a:rPr>
+              <a:t>06</a:t>
+            </a:r>
+          </a:p>
+        </p:txBody>
+      </p:sp>
+      <p:sp>
+        <p:nvSpPr>
+          <p:cNvPr id="13" name="Rectangle 12"/>
+          <p:cNvSpPr/>
+          <p:nvPr/>
+        </p:nvSpPr>
+        <p:spPr>
+          <a:xfrm>
+            <a:off x="868680" y="3977639"/>
+            <a:ext cx="2194560" cy="38100"/>
+          </a:xfrm>
+          <a:prstGeom prst="rect">
+            <a:avLst/>
+          </a:prstGeom>
+          <a:solidFill>
+            <a:srgbClr val="14B8A6"/>
+          </a:solidFill>
+          <a:ln>
+            <a:noFill/>
+          </a:ln>
+          <a:effectLst/>
+        </p:spPr>
+        <p:style>
+          <a:lnRef idx="1">
+            <a:schemeClr val="accent1"/>
+          </a:lnRef>
+          <a:fillRef idx="3">
+            <a:schemeClr val="accent1"/>
+          </a:fillRef>
+          <a:effectRef idx="2">
+            <a:schemeClr val="accent1"/>
+          </a:effectRef>
+          <a:fontRef idx="minor">
+            <a:schemeClr val="lt1"/>
+          </a:fontRef>
+        </p:style>
+        <p:txBody>
+          <a:bodyPr rtlCol="0" anchor="ctr"/>
+          <a:lstStyle/>
+          <a:p>
+            <a:pPr algn="ctr"/>
+          </a:p>
+        </p:txBody>
+      </p:sp>
+      <p:sp>
+        <p:nvSpPr>
+          <p:cNvPr id="14" name="TextBox 13"/>
           <p:cNvSpPr txBox="1"/>
           <p:nvPr/>
         </p:nvSpPr>
@@ -14568,7 +16548,7 @@
       </p:sp>
       <p:sp>
         <p:nvSpPr>
-          <p:cNvPr id="6" name="TextBox 5"/>
+          <p:cNvPr id="15" name="TextBox 14"/>
           <p:cNvSpPr txBox="1"/>
           <p:nvPr/>
         </p:nvSpPr>
@@ -16776,55 +18756,60 @@
       </p:sp>
       <p:sp>
         <p:nvSpPr>
-          <p:cNvPr id="3" name="TextBox 2"/>
-          <p:cNvSpPr txBox="1"/>
-          <p:nvPr/>
-        </p:nvSpPr>
-        <p:spPr>
-          <a:xfrm>
-            <a:off x="548640" y="914400"/>
-            <a:ext cx="6400800" cy="2926080"/>
-          </a:xfrm>
-          <a:prstGeom prst="rect">
-            <a:avLst/>
-          </a:prstGeom>
-          <a:noFill/>
-        </p:spPr>
-        <p:txBody>
-          <a:bodyPr wrap="square" anchor="t" lIns="0" rIns="0" tIns="0" bIns="0">
-            <a:spAutoFit/>
-          </a:bodyPr>
-          <a:lstStyle/>
-          <a:p>
-            <a:pPr algn="l">
-              <a:lnSpc>
-                <a:spcPct val="110000"/>
-              </a:lnSpc>
-            </a:pPr>
-            <a:r>
-              <a:rPr sz="20000" b="1">
-                <a:solidFill>
-                  <a:srgbClr val="2A4760"/>
-                </a:solidFill>
-                <a:latin typeface="Avenir Next"/>
-              </a:rPr>
-              <a:t>01</a:t>
-            </a:r>
-          </a:p>
-        </p:txBody>
-      </p:sp>
-      <p:sp>
-        <p:nvSpPr>
-          <p:cNvPr id="4" name="Rectangle 3"/>
+          <p:cNvPr id="3" name="Oval 2"/>
           <p:cNvSpPr/>
           <p:nvPr/>
         </p:nvSpPr>
         <p:spPr>
           <a:xfrm>
-            <a:off x="868680" y="3977639"/>
-            <a:ext cx="2194560" cy="38100"/>
-          </a:xfrm>
-          <a:prstGeom prst="rect">
+            <a:off x="10972800" y="566928"/>
+            <a:ext cx="137160" cy="137160"/>
+          </a:xfrm>
+          <a:prstGeom prst="ellipse">
+            <a:avLst/>
+          </a:prstGeom>
+          <a:solidFill>
+            <a:srgbClr val="3A4C63"/>
+          </a:solidFill>
+          <a:ln>
+            <a:noFill/>
+          </a:ln>
+          <a:effectLst/>
+        </p:spPr>
+        <p:style>
+          <a:lnRef idx="1">
+            <a:schemeClr val="accent1"/>
+          </a:lnRef>
+          <a:fillRef idx="3">
+            <a:schemeClr val="accent1"/>
+          </a:fillRef>
+          <a:effectRef idx="2">
+            <a:schemeClr val="accent1"/>
+          </a:effectRef>
+          <a:fontRef idx="minor">
+            <a:schemeClr val="lt1"/>
+          </a:fontRef>
+        </p:style>
+        <p:txBody>
+          <a:bodyPr rtlCol="0" anchor="ctr"/>
+          <a:lstStyle/>
+          <a:p>
+            <a:pPr algn="ctr"/>
+          </a:p>
+        </p:txBody>
+      </p:sp>
+      <p:sp>
+        <p:nvSpPr>
+          <p:cNvPr id="4" name="Oval 3"/>
+          <p:cNvSpPr/>
+          <p:nvPr/>
+        </p:nvSpPr>
+        <p:spPr>
+          <a:xfrm>
+            <a:off x="11210544" y="566928"/>
+            <a:ext cx="137160" cy="137160"/>
+          </a:xfrm>
+          <a:prstGeom prst="ellipse">
             <a:avLst/>
           </a:prstGeom>
           <a:solidFill>
@@ -16859,7 +18844,398 @@
       </p:sp>
       <p:sp>
         <p:nvSpPr>
-          <p:cNvPr id="5" name="TextBox 4"/>
+          <p:cNvPr id="5" name="Oval 4"/>
+          <p:cNvSpPr/>
+          <p:nvPr/>
+        </p:nvSpPr>
+        <p:spPr>
+          <a:xfrm>
+            <a:off x="11448288" y="566928"/>
+            <a:ext cx="137160" cy="137160"/>
+          </a:xfrm>
+          <a:prstGeom prst="ellipse">
+            <a:avLst/>
+          </a:prstGeom>
+          <a:solidFill>
+            <a:srgbClr val="3A4C63"/>
+          </a:solidFill>
+          <a:ln>
+            <a:noFill/>
+          </a:ln>
+          <a:effectLst/>
+        </p:spPr>
+        <p:style>
+          <a:lnRef idx="1">
+            <a:schemeClr val="accent1"/>
+          </a:lnRef>
+          <a:fillRef idx="3">
+            <a:schemeClr val="accent1"/>
+          </a:fillRef>
+          <a:effectRef idx="2">
+            <a:schemeClr val="accent1"/>
+          </a:effectRef>
+          <a:fontRef idx="minor">
+            <a:schemeClr val="lt1"/>
+          </a:fontRef>
+        </p:style>
+        <p:txBody>
+          <a:bodyPr rtlCol="0" anchor="ctr"/>
+          <a:lstStyle/>
+          <a:p>
+            <a:pPr algn="ctr"/>
+          </a:p>
+        </p:txBody>
+      </p:sp>
+      <p:sp>
+        <p:nvSpPr>
+          <p:cNvPr id="6" name="Oval 5"/>
+          <p:cNvSpPr/>
+          <p:nvPr/>
+        </p:nvSpPr>
+        <p:spPr>
+          <a:xfrm>
+            <a:off x="10972800" y="804672"/>
+            <a:ext cx="137160" cy="137160"/>
+          </a:xfrm>
+          <a:prstGeom prst="ellipse">
+            <a:avLst/>
+          </a:prstGeom>
+          <a:solidFill>
+            <a:srgbClr val="3A4C63"/>
+          </a:solidFill>
+          <a:ln>
+            <a:noFill/>
+          </a:ln>
+          <a:effectLst/>
+        </p:spPr>
+        <p:style>
+          <a:lnRef idx="1">
+            <a:schemeClr val="accent1"/>
+          </a:lnRef>
+          <a:fillRef idx="3">
+            <a:schemeClr val="accent1"/>
+          </a:fillRef>
+          <a:effectRef idx="2">
+            <a:schemeClr val="accent1"/>
+          </a:effectRef>
+          <a:fontRef idx="minor">
+            <a:schemeClr val="lt1"/>
+          </a:fontRef>
+        </p:style>
+        <p:txBody>
+          <a:bodyPr rtlCol="0" anchor="ctr"/>
+          <a:lstStyle/>
+          <a:p>
+            <a:pPr algn="ctr"/>
+          </a:p>
+        </p:txBody>
+      </p:sp>
+      <p:sp>
+        <p:nvSpPr>
+          <p:cNvPr id="7" name="Oval 6"/>
+          <p:cNvSpPr/>
+          <p:nvPr/>
+        </p:nvSpPr>
+        <p:spPr>
+          <a:xfrm>
+            <a:off x="11210544" y="804672"/>
+            <a:ext cx="137160" cy="137160"/>
+          </a:xfrm>
+          <a:prstGeom prst="ellipse">
+            <a:avLst/>
+          </a:prstGeom>
+          <a:solidFill>
+            <a:srgbClr val="14B8A6"/>
+          </a:solidFill>
+          <a:ln>
+            <a:noFill/>
+          </a:ln>
+          <a:effectLst/>
+        </p:spPr>
+        <p:style>
+          <a:lnRef idx="1">
+            <a:schemeClr val="accent1"/>
+          </a:lnRef>
+          <a:fillRef idx="3">
+            <a:schemeClr val="accent1"/>
+          </a:fillRef>
+          <a:effectRef idx="2">
+            <a:schemeClr val="accent1"/>
+          </a:effectRef>
+          <a:fontRef idx="minor">
+            <a:schemeClr val="lt1"/>
+          </a:fontRef>
+        </p:style>
+        <p:txBody>
+          <a:bodyPr rtlCol="0" anchor="ctr"/>
+          <a:lstStyle/>
+          <a:p>
+            <a:pPr algn="ctr"/>
+          </a:p>
+        </p:txBody>
+      </p:sp>
+      <p:sp>
+        <p:nvSpPr>
+          <p:cNvPr id="8" name="Oval 7"/>
+          <p:cNvSpPr/>
+          <p:nvPr/>
+        </p:nvSpPr>
+        <p:spPr>
+          <a:xfrm>
+            <a:off x="11448288" y="804672"/>
+            <a:ext cx="137160" cy="137160"/>
+          </a:xfrm>
+          <a:prstGeom prst="ellipse">
+            <a:avLst/>
+          </a:prstGeom>
+          <a:solidFill>
+            <a:srgbClr val="3A4C63"/>
+          </a:solidFill>
+          <a:ln>
+            <a:noFill/>
+          </a:ln>
+          <a:effectLst/>
+        </p:spPr>
+        <p:style>
+          <a:lnRef idx="1">
+            <a:schemeClr val="accent1"/>
+          </a:lnRef>
+          <a:fillRef idx="3">
+            <a:schemeClr val="accent1"/>
+          </a:fillRef>
+          <a:effectRef idx="2">
+            <a:schemeClr val="accent1"/>
+          </a:effectRef>
+          <a:fontRef idx="minor">
+            <a:schemeClr val="lt1"/>
+          </a:fontRef>
+        </p:style>
+        <p:txBody>
+          <a:bodyPr rtlCol="0" anchor="ctr"/>
+          <a:lstStyle/>
+          <a:p>
+            <a:pPr algn="ctr"/>
+          </a:p>
+        </p:txBody>
+      </p:sp>
+      <p:sp>
+        <p:nvSpPr>
+          <p:cNvPr id="9" name="Oval 8"/>
+          <p:cNvSpPr/>
+          <p:nvPr/>
+        </p:nvSpPr>
+        <p:spPr>
+          <a:xfrm>
+            <a:off x="10972800" y="1042416"/>
+            <a:ext cx="137160" cy="137160"/>
+          </a:xfrm>
+          <a:prstGeom prst="ellipse">
+            <a:avLst/>
+          </a:prstGeom>
+          <a:solidFill>
+            <a:srgbClr val="3A4C63"/>
+          </a:solidFill>
+          <a:ln>
+            <a:noFill/>
+          </a:ln>
+          <a:effectLst/>
+        </p:spPr>
+        <p:style>
+          <a:lnRef idx="1">
+            <a:schemeClr val="accent1"/>
+          </a:lnRef>
+          <a:fillRef idx="3">
+            <a:schemeClr val="accent1"/>
+          </a:fillRef>
+          <a:effectRef idx="2">
+            <a:schemeClr val="accent1"/>
+          </a:effectRef>
+          <a:fontRef idx="minor">
+            <a:schemeClr val="lt1"/>
+          </a:fontRef>
+        </p:style>
+        <p:txBody>
+          <a:bodyPr rtlCol="0" anchor="ctr"/>
+          <a:lstStyle/>
+          <a:p>
+            <a:pPr algn="ctr"/>
+          </a:p>
+        </p:txBody>
+      </p:sp>
+      <p:sp>
+        <p:nvSpPr>
+          <p:cNvPr id="10" name="Oval 9"/>
+          <p:cNvSpPr/>
+          <p:nvPr/>
+        </p:nvSpPr>
+        <p:spPr>
+          <a:xfrm>
+            <a:off x="11210544" y="1042416"/>
+            <a:ext cx="137160" cy="137160"/>
+          </a:xfrm>
+          <a:prstGeom prst="ellipse">
+            <a:avLst/>
+          </a:prstGeom>
+          <a:solidFill>
+            <a:srgbClr val="14B8A6"/>
+          </a:solidFill>
+          <a:ln>
+            <a:noFill/>
+          </a:ln>
+          <a:effectLst/>
+        </p:spPr>
+        <p:style>
+          <a:lnRef idx="1">
+            <a:schemeClr val="accent1"/>
+          </a:lnRef>
+          <a:fillRef idx="3">
+            <a:schemeClr val="accent1"/>
+          </a:fillRef>
+          <a:effectRef idx="2">
+            <a:schemeClr val="accent1"/>
+          </a:effectRef>
+          <a:fontRef idx="minor">
+            <a:schemeClr val="lt1"/>
+          </a:fontRef>
+        </p:style>
+        <p:txBody>
+          <a:bodyPr rtlCol="0" anchor="ctr"/>
+          <a:lstStyle/>
+          <a:p>
+            <a:pPr algn="ctr"/>
+          </a:p>
+        </p:txBody>
+      </p:sp>
+      <p:sp>
+        <p:nvSpPr>
+          <p:cNvPr id="11" name="Oval 10"/>
+          <p:cNvSpPr/>
+          <p:nvPr/>
+        </p:nvSpPr>
+        <p:spPr>
+          <a:xfrm>
+            <a:off x="11448288" y="1042416"/>
+            <a:ext cx="137160" cy="137160"/>
+          </a:xfrm>
+          <a:prstGeom prst="ellipse">
+            <a:avLst/>
+          </a:prstGeom>
+          <a:solidFill>
+            <a:srgbClr val="3A4C63"/>
+          </a:solidFill>
+          <a:ln>
+            <a:noFill/>
+          </a:ln>
+          <a:effectLst/>
+        </p:spPr>
+        <p:style>
+          <a:lnRef idx="1">
+            <a:schemeClr val="accent1"/>
+          </a:lnRef>
+          <a:fillRef idx="3">
+            <a:schemeClr val="accent1"/>
+          </a:fillRef>
+          <a:effectRef idx="2">
+            <a:schemeClr val="accent1"/>
+          </a:effectRef>
+          <a:fontRef idx="minor">
+            <a:schemeClr val="lt1"/>
+          </a:fontRef>
+        </p:style>
+        <p:txBody>
+          <a:bodyPr rtlCol="0" anchor="ctr"/>
+          <a:lstStyle/>
+          <a:p>
+            <a:pPr algn="ctr"/>
+          </a:p>
+        </p:txBody>
+      </p:sp>
+      <p:sp>
+        <p:nvSpPr>
+          <p:cNvPr id="12" name="TextBox 11"/>
+          <p:cNvSpPr txBox="1"/>
+          <p:nvPr/>
+        </p:nvSpPr>
+        <p:spPr>
+          <a:xfrm>
+            <a:off x="548640" y="914400"/>
+            <a:ext cx="6400800" cy="2926080"/>
+          </a:xfrm>
+          <a:prstGeom prst="rect">
+            <a:avLst/>
+          </a:prstGeom>
+          <a:noFill/>
+        </p:spPr>
+        <p:txBody>
+          <a:bodyPr wrap="square" anchor="t" lIns="0" rIns="0" tIns="0" bIns="0">
+            <a:spAutoFit/>
+          </a:bodyPr>
+          <a:lstStyle/>
+          <a:p>
+            <a:pPr algn="l">
+              <a:lnSpc>
+                <a:spcPct val="110000"/>
+              </a:lnSpc>
+            </a:pPr>
+            <a:r>
+              <a:rPr sz="20000" b="1">
+                <a:solidFill>
+                  <a:srgbClr val="2A4760"/>
+                </a:solidFill>
+                <a:latin typeface="Avenir Next"/>
+              </a:rPr>
+              <a:t>01</a:t>
+            </a:r>
+          </a:p>
+        </p:txBody>
+      </p:sp>
+      <p:sp>
+        <p:nvSpPr>
+          <p:cNvPr id="13" name="Rectangle 12"/>
+          <p:cNvSpPr/>
+          <p:nvPr/>
+        </p:nvSpPr>
+        <p:spPr>
+          <a:xfrm>
+            <a:off x="868680" y="3977639"/>
+            <a:ext cx="2194560" cy="38100"/>
+          </a:xfrm>
+          <a:prstGeom prst="rect">
+            <a:avLst/>
+          </a:prstGeom>
+          <a:solidFill>
+            <a:srgbClr val="14B8A6"/>
+          </a:solidFill>
+          <a:ln>
+            <a:noFill/>
+          </a:ln>
+          <a:effectLst/>
+        </p:spPr>
+        <p:style>
+          <a:lnRef idx="1">
+            <a:schemeClr val="accent1"/>
+          </a:lnRef>
+          <a:fillRef idx="3">
+            <a:schemeClr val="accent1"/>
+          </a:fillRef>
+          <a:effectRef idx="2">
+            <a:schemeClr val="accent1"/>
+          </a:effectRef>
+          <a:fontRef idx="minor">
+            <a:schemeClr val="lt1"/>
+          </a:fontRef>
+        </p:style>
+        <p:txBody>
+          <a:bodyPr rtlCol="0" anchor="ctr"/>
+          <a:lstStyle/>
+          <a:p>
+            <a:pPr algn="ctr"/>
+          </a:p>
+        </p:txBody>
+      </p:sp>
+      <p:sp>
+        <p:nvSpPr>
+          <p:cNvPr id="14" name="TextBox 13"/>
           <p:cNvSpPr txBox="1"/>
           <p:nvPr/>
         </p:nvSpPr>
@@ -16898,7 +19274,7 @@
       </p:sp>
       <p:sp>
         <p:nvSpPr>
-          <p:cNvPr id="6" name="TextBox 5"/>
+          <p:cNvPr id="15" name="TextBox 14"/>
           <p:cNvSpPr txBox="1"/>
           <p:nvPr/>
         </p:nvSpPr>
@@ -16999,55 +19375,60 @@
       </p:sp>
       <p:sp>
         <p:nvSpPr>
-          <p:cNvPr id="3" name="TextBox 2"/>
-          <p:cNvSpPr txBox="1"/>
-          <p:nvPr/>
-        </p:nvSpPr>
-        <p:spPr>
-          <a:xfrm>
-            <a:off x="548640" y="914400"/>
-            <a:ext cx="6400800" cy="2926080"/>
-          </a:xfrm>
-          <a:prstGeom prst="rect">
-            <a:avLst/>
-          </a:prstGeom>
-          <a:noFill/>
-        </p:spPr>
-        <p:txBody>
-          <a:bodyPr wrap="square" anchor="t" lIns="0" rIns="0" tIns="0" bIns="0">
-            <a:spAutoFit/>
-          </a:bodyPr>
-          <a:lstStyle/>
-          <a:p>
-            <a:pPr algn="l">
-              <a:lnSpc>
-                <a:spcPct val="110000"/>
-              </a:lnSpc>
-            </a:pPr>
-            <a:r>
-              <a:rPr sz="20000" b="1">
-                <a:solidFill>
-                  <a:srgbClr val="2A4760"/>
-                </a:solidFill>
-                <a:latin typeface="Avenir Next"/>
-              </a:rPr>
-              <a:t>07</a:t>
-            </a:r>
-          </a:p>
-        </p:txBody>
-      </p:sp>
-      <p:sp>
-        <p:nvSpPr>
-          <p:cNvPr id="4" name="Rectangle 3"/>
+          <p:cNvPr id="3" name="Oval 2"/>
           <p:cNvSpPr/>
           <p:nvPr/>
         </p:nvSpPr>
         <p:spPr>
           <a:xfrm>
-            <a:off x="868680" y="3977639"/>
-            <a:ext cx="2194560" cy="38100"/>
-          </a:xfrm>
-          <a:prstGeom prst="rect">
+            <a:off x="10972800" y="566928"/>
+            <a:ext cx="137160" cy="137160"/>
+          </a:xfrm>
+          <a:prstGeom prst="ellipse">
+            <a:avLst/>
+          </a:prstGeom>
+          <a:solidFill>
+            <a:srgbClr val="3A4C63"/>
+          </a:solidFill>
+          <a:ln>
+            <a:noFill/>
+          </a:ln>
+          <a:effectLst/>
+        </p:spPr>
+        <p:style>
+          <a:lnRef idx="1">
+            <a:schemeClr val="accent1"/>
+          </a:lnRef>
+          <a:fillRef idx="3">
+            <a:schemeClr val="accent1"/>
+          </a:fillRef>
+          <a:effectRef idx="2">
+            <a:schemeClr val="accent1"/>
+          </a:effectRef>
+          <a:fontRef idx="minor">
+            <a:schemeClr val="lt1"/>
+          </a:fontRef>
+        </p:style>
+        <p:txBody>
+          <a:bodyPr rtlCol="0" anchor="ctr"/>
+          <a:lstStyle/>
+          <a:p>
+            <a:pPr algn="ctr"/>
+          </a:p>
+        </p:txBody>
+      </p:sp>
+      <p:sp>
+        <p:nvSpPr>
+          <p:cNvPr id="4" name="Oval 3"/>
+          <p:cNvSpPr/>
+          <p:nvPr/>
+        </p:nvSpPr>
+        <p:spPr>
+          <a:xfrm>
+            <a:off x="11210544" y="566928"/>
+            <a:ext cx="137160" cy="137160"/>
+          </a:xfrm>
+          <a:prstGeom prst="ellipse">
             <a:avLst/>
           </a:prstGeom>
           <a:solidFill>
@@ -17082,7 +19463,398 @@
       </p:sp>
       <p:sp>
         <p:nvSpPr>
-          <p:cNvPr id="5" name="TextBox 4"/>
+          <p:cNvPr id="5" name="Oval 4"/>
+          <p:cNvSpPr/>
+          <p:nvPr/>
+        </p:nvSpPr>
+        <p:spPr>
+          <a:xfrm>
+            <a:off x="11448288" y="566928"/>
+            <a:ext cx="137160" cy="137160"/>
+          </a:xfrm>
+          <a:prstGeom prst="ellipse">
+            <a:avLst/>
+          </a:prstGeom>
+          <a:solidFill>
+            <a:srgbClr val="3A4C63"/>
+          </a:solidFill>
+          <a:ln>
+            <a:noFill/>
+          </a:ln>
+          <a:effectLst/>
+        </p:spPr>
+        <p:style>
+          <a:lnRef idx="1">
+            <a:schemeClr val="accent1"/>
+          </a:lnRef>
+          <a:fillRef idx="3">
+            <a:schemeClr val="accent1"/>
+          </a:fillRef>
+          <a:effectRef idx="2">
+            <a:schemeClr val="accent1"/>
+          </a:effectRef>
+          <a:fontRef idx="minor">
+            <a:schemeClr val="lt1"/>
+          </a:fontRef>
+        </p:style>
+        <p:txBody>
+          <a:bodyPr rtlCol="0" anchor="ctr"/>
+          <a:lstStyle/>
+          <a:p>
+            <a:pPr algn="ctr"/>
+          </a:p>
+        </p:txBody>
+      </p:sp>
+      <p:sp>
+        <p:nvSpPr>
+          <p:cNvPr id="6" name="Oval 5"/>
+          <p:cNvSpPr/>
+          <p:nvPr/>
+        </p:nvSpPr>
+        <p:spPr>
+          <a:xfrm>
+            <a:off x="10972800" y="804672"/>
+            <a:ext cx="137160" cy="137160"/>
+          </a:xfrm>
+          <a:prstGeom prst="ellipse">
+            <a:avLst/>
+          </a:prstGeom>
+          <a:solidFill>
+            <a:srgbClr val="3A4C63"/>
+          </a:solidFill>
+          <a:ln>
+            <a:noFill/>
+          </a:ln>
+          <a:effectLst/>
+        </p:spPr>
+        <p:style>
+          <a:lnRef idx="1">
+            <a:schemeClr val="accent1"/>
+          </a:lnRef>
+          <a:fillRef idx="3">
+            <a:schemeClr val="accent1"/>
+          </a:fillRef>
+          <a:effectRef idx="2">
+            <a:schemeClr val="accent1"/>
+          </a:effectRef>
+          <a:fontRef idx="minor">
+            <a:schemeClr val="lt1"/>
+          </a:fontRef>
+        </p:style>
+        <p:txBody>
+          <a:bodyPr rtlCol="0" anchor="ctr"/>
+          <a:lstStyle/>
+          <a:p>
+            <a:pPr algn="ctr"/>
+          </a:p>
+        </p:txBody>
+      </p:sp>
+      <p:sp>
+        <p:nvSpPr>
+          <p:cNvPr id="7" name="Oval 6"/>
+          <p:cNvSpPr/>
+          <p:nvPr/>
+        </p:nvSpPr>
+        <p:spPr>
+          <a:xfrm>
+            <a:off x="11210544" y="804672"/>
+            <a:ext cx="137160" cy="137160"/>
+          </a:xfrm>
+          <a:prstGeom prst="ellipse">
+            <a:avLst/>
+          </a:prstGeom>
+          <a:solidFill>
+            <a:srgbClr val="14B8A6"/>
+          </a:solidFill>
+          <a:ln>
+            <a:noFill/>
+          </a:ln>
+          <a:effectLst/>
+        </p:spPr>
+        <p:style>
+          <a:lnRef idx="1">
+            <a:schemeClr val="accent1"/>
+          </a:lnRef>
+          <a:fillRef idx="3">
+            <a:schemeClr val="accent1"/>
+          </a:fillRef>
+          <a:effectRef idx="2">
+            <a:schemeClr val="accent1"/>
+          </a:effectRef>
+          <a:fontRef idx="minor">
+            <a:schemeClr val="lt1"/>
+          </a:fontRef>
+        </p:style>
+        <p:txBody>
+          <a:bodyPr rtlCol="0" anchor="ctr"/>
+          <a:lstStyle/>
+          <a:p>
+            <a:pPr algn="ctr"/>
+          </a:p>
+        </p:txBody>
+      </p:sp>
+      <p:sp>
+        <p:nvSpPr>
+          <p:cNvPr id="8" name="Oval 7"/>
+          <p:cNvSpPr/>
+          <p:nvPr/>
+        </p:nvSpPr>
+        <p:spPr>
+          <a:xfrm>
+            <a:off x="11448288" y="804672"/>
+            <a:ext cx="137160" cy="137160"/>
+          </a:xfrm>
+          <a:prstGeom prst="ellipse">
+            <a:avLst/>
+          </a:prstGeom>
+          <a:solidFill>
+            <a:srgbClr val="3A4C63"/>
+          </a:solidFill>
+          <a:ln>
+            <a:noFill/>
+          </a:ln>
+          <a:effectLst/>
+        </p:spPr>
+        <p:style>
+          <a:lnRef idx="1">
+            <a:schemeClr val="accent1"/>
+          </a:lnRef>
+          <a:fillRef idx="3">
+            <a:schemeClr val="accent1"/>
+          </a:fillRef>
+          <a:effectRef idx="2">
+            <a:schemeClr val="accent1"/>
+          </a:effectRef>
+          <a:fontRef idx="minor">
+            <a:schemeClr val="lt1"/>
+          </a:fontRef>
+        </p:style>
+        <p:txBody>
+          <a:bodyPr rtlCol="0" anchor="ctr"/>
+          <a:lstStyle/>
+          <a:p>
+            <a:pPr algn="ctr"/>
+          </a:p>
+        </p:txBody>
+      </p:sp>
+      <p:sp>
+        <p:nvSpPr>
+          <p:cNvPr id="9" name="Oval 8"/>
+          <p:cNvSpPr/>
+          <p:nvPr/>
+        </p:nvSpPr>
+        <p:spPr>
+          <a:xfrm>
+            <a:off x="10972800" y="1042416"/>
+            <a:ext cx="137160" cy="137160"/>
+          </a:xfrm>
+          <a:prstGeom prst="ellipse">
+            <a:avLst/>
+          </a:prstGeom>
+          <a:solidFill>
+            <a:srgbClr val="3A4C63"/>
+          </a:solidFill>
+          <a:ln>
+            <a:noFill/>
+          </a:ln>
+          <a:effectLst/>
+        </p:spPr>
+        <p:style>
+          <a:lnRef idx="1">
+            <a:schemeClr val="accent1"/>
+          </a:lnRef>
+          <a:fillRef idx="3">
+            <a:schemeClr val="accent1"/>
+          </a:fillRef>
+          <a:effectRef idx="2">
+            <a:schemeClr val="accent1"/>
+          </a:effectRef>
+          <a:fontRef idx="minor">
+            <a:schemeClr val="lt1"/>
+          </a:fontRef>
+        </p:style>
+        <p:txBody>
+          <a:bodyPr rtlCol="0" anchor="ctr"/>
+          <a:lstStyle/>
+          <a:p>
+            <a:pPr algn="ctr"/>
+          </a:p>
+        </p:txBody>
+      </p:sp>
+      <p:sp>
+        <p:nvSpPr>
+          <p:cNvPr id="10" name="Oval 9"/>
+          <p:cNvSpPr/>
+          <p:nvPr/>
+        </p:nvSpPr>
+        <p:spPr>
+          <a:xfrm>
+            <a:off x="11210544" y="1042416"/>
+            <a:ext cx="137160" cy="137160"/>
+          </a:xfrm>
+          <a:prstGeom prst="ellipse">
+            <a:avLst/>
+          </a:prstGeom>
+          <a:solidFill>
+            <a:srgbClr val="14B8A6"/>
+          </a:solidFill>
+          <a:ln>
+            <a:noFill/>
+          </a:ln>
+          <a:effectLst/>
+        </p:spPr>
+        <p:style>
+          <a:lnRef idx="1">
+            <a:schemeClr val="accent1"/>
+          </a:lnRef>
+          <a:fillRef idx="3">
+            <a:schemeClr val="accent1"/>
+          </a:fillRef>
+          <a:effectRef idx="2">
+            <a:schemeClr val="accent1"/>
+          </a:effectRef>
+          <a:fontRef idx="minor">
+            <a:schemeClr val="lt1"/>
+          </a:fontRef>
+        </p:style>
+        <p:txBody>
+          <a:bodyPr rtlCol="0" anchor="ctr"/>
+          <a:lstStyle/>
+          <a:p>
+            <a:pPr algn="ctr"/>
+          </a:p>
+        </p:txBody>
+      </p:sp>
+      <p:sp>
+        <p:nvSpPr>
+          <p:cNvPr id="11" name="Oval 10"/>
+          <p:cNvSpPr/>
+          <p:nvPr/>
+        </p:nvSpPr>
+        <p:spPr>
+          <a:xfrm>
+            <a:off x="11448288" y="1042416"/>
+            <a:ext cx="137160" cy="137160"/>
+          </a:xfrm>
+          <a:prstGeom prst="ellipse">
+            <a:avLst/>
+          </a:prstGeom>
+          <a:solidFill>
+            <a:srgbClr val="3A4C63"/>
+          </a:solidFill>
+          <a:ln>
+            <a:noFill/>
+          </a:ln>
+          <a:effectLst/>
+        </p:spPr>
+        <p:style>
+          <a:lnRef idx="1">
+            <a:schemeClr val="accent1"/>
+          </a:lnRef>
+          <a:fillRef idx="3">
+            <a:schemeClr val="accent1"/>
+          </a:fillRef>
+          <a:effectRef idx="2">
+            <a:schemeClr val="accent1"/>
+          </a:effectRef>
+          <a:fontRef idx="minor">
+            <a:schemeClr val="lt1"/>
+          </a:fontRef>
+        </p:style>
+        <p:txBody>
+          <a:bodyPr rtlCol="0" anchor="ctr"/>
+          <a:lstStyle/>
+          <a:p>
+            <a:pPr algn="ctr"/>
+          </a:p>
+        </p:txBody>
+      </p:sp>
+      <p:sp>
+        <p:nvSpPr>
+          <p:cNvPr id="12" name="TextBox 11"/>
+          <p:cNvSpPr txBox="1"/>
+          <p:nvPr/>
+        </p:nvSpPr>
+        <p:spPr>
+          <a:xfrm>
+            <a:off x="548640" y="914400"/>
+            <a:ext cx="6400800" cy="2926080"/>
+          </a:xfrm>
+          <a:prstGeom prst="rect">
+            <a:avLst/>
+          </a:prstGeom>
+          <a:noFill/>
+        </p:spPr>
+        <p:txBody>
+          <a:bodyPr wrap="square" anchor="t" lIns="0" rIns="0" tIns="0" bIns="0">
+            <a:spAutoFit/>
+          </a:bodyPr>
+          <a:lstStyle/>
+          <a:p>
+            <a:pPr algn="l">
+              <a:lnSpc>
+                <a:spcPct val="110000"/>
+              </a:lnSpc>
+            </a:pPr>
+            <a:r>
+              <a:rPr sz="20000" b="1">
+                <a:solidFill>
+                  <a:srgbClr val="2A4760"/>
+                </a:solidFill>
+                <a:latin typeface="Avenir Next"/>
+              </a:rPr>
+              <a:t>07</a:t>
+            </a:r>
+          </a:p>
+        </p:txBody>
+      </p:sp>
+      <p:sp>
+        <p:nvSpPr>
+          <p:cNvPr id="13" name="Rectangle 12"/>
+          <p:cNvSpPr/>
+          <p:nvPr/>
+        </p:nvSpPr>
+        <p:spPr>
+          <a:xfrm>
+            <a:off x="868680" y="3977639"/>
+            <a:ext cx="2194560" cy="38100"/>
+          </a:xfrm>
+          <a:prstGeom prst="rect">
+            <a:avLst/>
+          </a:prstGeom>
+          <a:solidFill>
+            <a:srgbClr val="14B8A6"/>
+          </a:solidFill>
+          <a:ln>
+            <a:noFill/>
+          </a:ln>
+          <a:effectLst/>
+        </p:spPr>
+        <p:style>
+          <a:lnRef idx="1">
+            <a:schemeClr val="accent1"/>
+          </a:lnRef>
+          <a:fillRef idx="3">
+            <a:schemeClr val="accent1"/>
+          </a:fillRef>
+          <a:effectRef idx="2">
+            <a:schemeClr val="accent1"/>
+          </a:effectRef>
+          <a:fontRef idx="minor">
+            <a:schemeClr val="lt1"/>
+          </a:fontRef>
+        </p:style>
+        <p:txBody>
+          <a:bodyPr rtlCol="0" anchor="ctr"/>
+          <a:lstStyle/>
+          <a:p>
+            <a:pPr algn="ctr"/>
+          </a:p>
+        </p:txBody>
+      </p:sp>
+      <p:sp>
+        <p:nvSpPr>
+          <p:cNvPr id="14" name="TextBox 13"/>
           <p:cNvSpPr txBox="1"/>
           <p:nvPr/>
         </p:nvSpPr>
@@ -17121,7 +19893,7 @@
       </p:sp>
       <p:sp>
         <p:nvSpPr>
-          <p:cNvPr id="6" name="TextBox 5"/>
+          <p:cNvPr id="15" name="TextBox 14"/>
           <p:cNvSpPr txBox="1"/>
           <p:nvPr/>
         </p:nvSpPr>
@@ -20467,55 +23239,60 @@
       </p:sp>
       <p:sp>
         <p:nvSpPr>
-          <p:cNvPr id="3" name="TextBox 2"/>
-          <p:cNvSpPr txBox="1"/>
-          <p:nvPr/>
-        </p:nvSpPr>
-        <p:spPr>
-          <a:xfrm>
-            <a:off x="548640" y="914400"/>
-            <a:ext cx="6400800" cy="2926080"/>
-          </a:xfrm>
-          <a:prstGeom prst="rect">
-            <a:avLst/>
-          </a:prstGeom>
-          <a:noFill/>
-        </p:spPr>
-        <p:txBody>
-          <a:bodyPr wrap="square" anchor="t" lIns="0" rIns="0" tIns="0" bIns="0">
-            <a:spAutoFit/>
-          </a:bodyPr>
-          <a:lstStyle/>
-          <a:p>
-            <a:pPr algn="l">
-              <a:lnSpc>
-                <a:spcPct val="110000"/>
-              </a:lnSpc>
-            </a:pPr>
-            <a:r>
-              <a:rPr sz="20000" b="1">
-                <a:solidFill>
-                  <a:srgbClr val="2A4760"/>
-                </a:solidFill>
-                <a:latin typeface="Avenir Next"/>
-              </a:rPr>
-              <a:t>08</a:t>
-            </a:r>
-          </a:p>
-        </p:txBody>
-      </p:sp>
-      <p:sp>
-        <p:nvSpPr>
-          <p:cNvPr id="4" name="Rectangle 3"/>
+          <p:cNvPr id="3" name="Oval 2"/>
           <p:cNvSpPr/>
           <p:nvPr/>
         </p:nvSpPr>
         <p:spPr>
           <a:xfrm>
-            <a:off x="868680" y="3977639"/>
-            <a:ext cx="2194560" cy="38100"/>
-          </a:xfrm>
-          <a:prstGeom prst="rect">
+            <a:off x="10972800" y="566928"/>
+            <a:ext cx="137160" cy="137160"/>
+          </a:xfrm>
+          <a:prstGeom prst="ellipse">
+            <a:avLst/>
+          </a:prstGeom>
+          <a:solidFill>
+            <a:srgbClr val="3A4C63"/>
+          </a:solidFill>
+          <a:ln>
+            <a:noFill/>
+          </a:ln>
+          <a:effectLst/>
+        </p:spPr>
+        <p:style>
+          <a:lnRef idx="1">
+            <a:schemeClr val="accent1"/>
+          </a:lnRef>
+          <a:fillRef idx="3">
+            <a:schemeClr val="accent1"/>
+          </a:fillRef>
+          <a:effectRef idx="2">
+            <a:schemeClr val="accent1"/>
+          </a:effectRef>
+          <a:fontRef idx="minor">
+            <a:schemeClr val="lt1"/>
+          </a:fontRef>
+        </p:style>
+        <p:txBody>
+          <a:bodyPr rtlCol="0" anchor="ctr"/>
+          <a:lstStyle/>
+          <a:p>
+            <a:pPr algn="ctr"/>
+          </a:p>
+        </p:txBody>
+      </p:sp>
+      <p:sp>
+        <p:nvSpPr>
+          <p:cNvPr id="4" name="Oval 3"/>
+          <p:cNvSpPr/>
+          <p:nvPr/>
+        </p:nvSpPr>
+        <p:spPr>
+          <a:xfrm>
+            <a:off x="11210544" y="566928"/>
+            <a:ext cx="137160" cy="137160"/>
+          </a:xfrm>
+          <a:prstGeom prst="ellipse">
             <a:avLst/>
           </a:prstGeom>
           <a:solidFill>
@@ -20550,7 +23327,398 @@
       </p:sp>
       <p:sp>
         <p:nvSpPr>
-          <p:cNvPr id="5" name="TextBox 4"/>
+          <p:cNvPr id="5" name="Oval 4"/>
+          <p:cNvSpPr/>
+          <p:nvPr/>
+        </p:nvSpPr>
+        <p:spPr>
+          <a:xfrm>
+            <a:off x="11448288" y="566928"/>
+            <a:ext cx="137160" cy="137160"/>
+          </a:xfrm>
+          <a:prstGeom prst="ellipse">
+            <a:avLst/>
+          </a:prstGeom>
+          <a:solidFill>
+            <a:srgbClr val="3A4C63"/>
+          </a:solidFill>
+          <a:ln>
+            <a:noFill/>
+          </a:ln>
+          <a:effectLst/>
+        </p:spPr>
+        <p:style>
+          <a:lnRef idx="1">
+            <a:schemeClr val="accent1"/>
+          </a:lnRef>
+          <a:fillRef idx="3">
+            <a:schemeClr val="accent1"/>
+          </a:fillRef>
+          <a:effectRef idx="2">
+            <a:schemeClr val="accent1"/>
+          </a:effectRef>
+          <a:fontRef idx="minor">
+            <a:schemeClr val="lt1"/>
+          </a:fontRef>
+        </p:style>
+        <p:txBody>
+          <a:bodyPr rtlCol="0" anchor="ctr"/>
+          <a:lstStyle/>
+          <a:p>
+            <a:pPr algn="ctr"/>
+          </a:p>
+        </p:txBody>
+      </p:sp>
+      <p:sp>
+        <p:nvSpPr>
+          <p:cNvPr id="6" name="Oval 5"/>
+          <p:cNvSpPr/>
+          <p:nvPr/>
+        </p:nvSpPr>
+        <p:spPr>
+          <a:xfrm>
+            <a:off x="10972800" y="804672"/>
+            <a:ext cx="137160" cy="137160"/>
+          </a:xfrm>
+          <a:prstGeom prst="ellipse">
+            <a:avLst/>
+          </a:prstGeom>
+          <a:solidFill>
+            <a:srgbClr val="3A4C63"/>
+          </a:solidFill>
+          <a:ln>
+            <a:noFill/>
+          </a:ln>
+          <a:effectLst/>
+        </p:spPr>
+        <p:style>
+          <a:lnRef idx="1">
+            <a:schemeClr val="accent1"/>
+          </a:lnRef>
+          <a:fillRef idx="3">
+            <a:schemeClr val="accent1"/>
+          </a:fillRef>
+          <a:effectRef idx="2">
+            <a:schemeClr val="accent1"/>
+          </a:effectRef>
+          <a:fontRef idx="minor">
+            <a:schemeClr val="lt1"/>
+          </a:fontRef>
+        </p:style>
+        <p:txBody>
+          <a:bodyPr rtlCol="0" anchor="ctr"/>
+          <a:lstStyle/>
+          <a:p>
+            <a:pPr algn="ctr"/>
+          </a:p>
+        </p:txBody>
+      </p:sp>
+      <p:sp>
+        <p:nvSpPr>
+          <p:cNvPr id="7" name="Oval 6"/>
+          <p:cNvSpPr/>
+          <p:nvPr/>
+        </p:nvSpPr>
+        <p:spPr>
+          <a:xfrm>
+            <a:off x="11210544" y="804672"/>
+            <a:ext cx="137160" cy="137160"/>
+          </a:xfrm>
+          <a:prstGeom prst="ellipse">
+            <a:avLst/>
+          </a:prstGeom>
+          <a:solidFill>
+            <a:srgbClr val="14B8A6"/>
+          </a:solidFill>
+          <a:ln>
+            <a:noFill/>
+          </a:ln>
+          <a:effectLst/>
+        </p:spPr>
+        <p:style>
+          <a:lnRef idx="1">
+            <a:schemeClr val="accent1"/>
+          </a:lnRef>
+          <a:fillRef idx="3">
+            <a:schemeClr val="accent1"/>
+          </a:fillRef>
+          <a:effectRef idx="2">
+            <a:schemeClr val="accent1"/>
+          </a:effectRef>
+          <a:fontRef idx="minor">
+            <a:schemeClr val="lt1"/>
+          </a:fontRef>
+        </p:style>
+        <p:txBody>
+          <a:bodyPr rtlCol="0" anchor="ctr"/>
+          <a:lstStyle/>
+          <a:p>
+            <a:pPr algn="ctr"/>
+          </a:p>
+        </p:txBody>
+      </p:sp>
+      <p:sp>
+        <p:nvSpPr>
+          <p:cNvPr id="8" name="Oval 7"/>
+          <p:cNvSpPr/>
+          <p:nvPr/>
+        </p:nvSpPr>
+        <p:spPr>
+          <a:xfrm>
+            <a:off x="11448288" y="804672"/>
+            <a:ext cx="137160" cy="137160"/>
+          </a:xfrm>
+          <a:prstGeom prst="ellipse">
+            <a:avLst/>
+          </a:prstGeom>
+          <a:solidFill>
+            <a:srgbClr val="3A4C63"/>
+          </a:solidFill>
+          <a:ln>
+            <a:noFill/>
+          </a:ln>
+          <a:effectLst/>
+        </p:spPr>
+        <p:style>
+          <a:lnRef idx="1">
+            <a:schemeClr val="accent1"/>
+          </a:lnRef>
+          <a:fillRef idx="3">
+            <a:schemeClr val="accent1"/>
+          </a:fillRef>
+          <a:effectRef idx="2">
+            <a:schemeClr val="accent1"/>
+          </a:effectRef>
+          <a:fontRef idx="minor">
+            <a:schemeClr val="lt1"/>
+          </a:fontRef>
+        </p:style>
+        <p:txBody>
+          <a:bodyPr rtlCol="0" anchor="ctr"/>
+          <a:lstStyle/>
+          <a:p>
+            <a:pPr algn="ctr"/>
+          </a:p>
+        </p:txBody>
+      </p:sp>
+      <p:sp>
+        <p:nvSpPr>
+          <p:cNvPr id="9" name="Oval 8"/>
+          <p:cNvSpPr/>
+          <p:nvPr/>
+        </p:nvSpPr>
+        <p:spPr>
+          <a:xfrm>
+            <a:off x="10972800" y="1042416"/>
+            <a:ext cx="137160" cy="137160"/>
+          </a:xfrm>
+          <a:prstGeom prst="ellipse">
+            <a:avLst/>
+          </a:prstGeom>
+          <a:solidFill>
+            <a:srgbClr val="3A4C63"/>
+          </a:solidFill>
+          <a:ln>
+            <a:noFill/>
+          </a:ln>
+          <a:effectLst/>
+        </p:spPr>
+        <p:style>
+          <a:lnRef idx="1">
+            <a:schemeClr val="accent1"/>
+          </a:lnRef>
+          <a:fillRef idx="3">
+            <a:schemeClr val="accent1"/>
+          </a:fillRef>
+          <a:effectRef idx="2">
+            <a:schemeClr val="accent1"/>
+          </a:effectRef>
+          <a:fontRef idx="minor">
+            <a:schemeClr val="lt1"/>
+          </a:fontRef>
+        </p:style>
+        <p:txBody>
+          <a:bodyPr rtlCol="0" anchor="ctr"/>
+          <a:lstStyle/>
+          <a:p>
+            <a:pPr algn="ctr"/>
+          </a:p>
+        </p:txBody>
+      </p:sp>
+      <p:sp>
+        <p:nvSpPr>
+          <p:cNvPr id="10" name="Oval 9"/>
+          <p:cNvSpPr/>
+          <p:nvPr/>
+        </p:nvSpPr>
+        <p:spPr>
+          <a:xfrm>
+            <a:off x="11210544" y="1042416"/>
+            <a:ext cx="137160" cy="137160"/>
+          </a:xfrm>
+          <a:prstGeom prst="ellipse">
+            <a:avLst/>
+          </a:prstGeom>
+          <a:solidFill>
+            <a:srgbClr val="14B8A6"/>
+          </a:solidFill>
+          <a:ln>
+            <a:noFill/>
+          </a:ln>
+          <a:effectLst/>
+        </p:spPr>
+        <p:style>
+          <a:lnRef idx="1">
+            <a:schemeClr val="accent1"/>
+          </a:lnRef>
+          <a:fillRef idx="3">
+            <a:schemeClr val="accent1"/>
+          </a:fillRef>
+          <a:effectRef idx="2">
+            <a:schemeClr val="accent1"/>
+          </a:effectRef>
+          <a:fontRef idx="minor">
+            <a:schemeClr val="lt1"/>
+          </a:fontRef>
+        </p:style>
+        <p:txBody>
+          <a:bodyPr rtlCol="0" anchor="ctr"/>
+          <a:lstStyle/>
+          <a:p>
+            <a:pPr algn="ctr"/>
+          </a:p>
+        </p:txBody>
+      </p:sp>
+      <p:sp>
+        <p:nvSpPr>
+          <p:cNvPr id="11" name="Oval 10"/>
+          <p:cNvSpPr/>
+          <p:nvPr/>
+        </p:nvSpPr>
+        <p:spPr>
+          <a:xfrm>
+            <a:off x="11448288" y="1042416"/>
+            <a:ext cx="137160" cy="137160"/>
+          </a:xfrm>
+          <a:prstGeom prst="ellipse">
+            <a:avLst/>
+          </a:prstGeom>
+          <a:solidFill>
+            <a:srgbClr val="3A4C63"/>
+          </a:solidFill>
+          <a:ln>
+            <a:noFill/>
+          </a:ln>
+          <a:effectLst/>
+        </p:spPr>
+        <p:style>
+          <a:lnRef idx="1">
+            <a:schemeClr val="accent1"/>
+          </a:lnRef>
+          <a:fillRef idx="3">
+            <a:schemeClr val="accent1"/>
+          </a:fillRef>
+          <a:effectRef idx="2">
+            <a:schemeClr val="accent1"/>
+          </a:effectRef>
+          <a:fontRef idx="minor">
+            <a:schemeClr val="lt1"/>
+          </a:fontRef>
+        </p:style>
+        <p:txBody>
+          <a:bodyPr rtlCol="0" anchor="ctr"/>
+          <a:lstStyle/>
+          <a:p>
+            <a:pPr algn="ctr"/>
+          </a:p>
+        </p:txBody>
+      </p:sp>
+      <p:sp>
+        <p:nvSpPr>
+          <p:cNvPr id="12" name="TextBox 11"/>
+          <p:cNvSpPr txBox="1"/>
+          <p:nvPr/>
+        </p:nvSpPr>
+        <p:spPr>
+          <a:xfrm>
+            <a:off x="548640" y="914400"/>
+            <a:ext cx="6400800" cy="2926080"/>
+          </a:xfrm>
+          <a:prstGeom prst="rect">
+            <a:avLst/>
+          </a:prstGeom>
+          <a:noFill/>
+        </p:spPr>
+        <p:txBody>
+          <a:bodyPr wrap="square" anchor="t" lIns="0" rIns="0" tIns="0" bIns="0">
+            <a:spAutoFit/>
+          </a:bodyPr>
+          <a:lstStyle/>
+          <a:p>
+            <a:pPr algn="l">
+              <a:lnSpc>
+                <a:spcPct val="110000"/>
+              </a:lnSpc>
+            </a:pPr>
+            <a:r>
+              <a:rPr sz="20000" b="1">
+                <a:solidFill>
+                  <a:srgbClr val="2A4760"/>
+                </a:solidFill>
+                <a:latin typeface="Avenir Next"/>
+              </a:rPr>
+              <a:t>08</a:t>
+            </a:r>
+          </a:p>
+        </p:txBody>
+      </p:sp>
+      <p:sp>
+        <p:nvSpPr>
+          <p:cNvPr id="13" name="Rectangle 12"/>
+          <p:cNvSpPr/>
+          <p:nvPr/>
+        </p:nvSpPr>
+        <p:spPr>
+          <a:xfrm>
+            <a:off x="868680" y="3977639"/>
+            <a:ext cx="2194560" cy="38100"/>
+          </a:xfrm>
+          <a:prstGeom prst="rect">
+            <a:avLst/>
+          </a:prstGeom>
+          <a:solidFill>
+            <a:srgbClr val="14B8A6"/>
+          </a:solidFill>
+          <a:ln>
+            <a:noFill/>
+          </a:ln>
+          <a:effectLst/>
+        </p:spPr>
+        <p:style>
+          <a:lnRef idx="1">
+            <a:schemeClr val="accent1"/>
+          </a:lnRef>
+          <a:fillRef idx="3">
+            <a:schemeClr val="accent1"/>
+          </a:fillRef>
+          <a:effectRef idx="2">
+            <a:schemeClr val="accent1"/>
+          </a:effectRef>
+          <a:fontRef idx="minor">
+            <a:schemeClr val="lt1"/>
+          </a:fontRef>
+        </p:style>
+        <p:txBody>
+          <a:bodyPr rtlCol="0" anchor="ctr"/>
+          <a:lstStyle/>
+          <a:p>
+            <a:pPr algn="ctr"/>
+          </a:p>
+        </p:txBody>
+      </p:sp>
+      <p:sp>
+        <p:nvSpPr>
+          <p:cNvPr id="14" name="TextBox 13"/>
           <p:cNvSpPr txBox="1"/>
           <p:nvPr/>
         </p:nvSpPr>
@@ -20589,7 +23757,7 @@
       </p:sp>
       <p:sp>
         <p:nvSpPr>
-          <p:cNvPr id="6" name="TextBox 5"/>
+          <p:cNvPr id="15" name="TextBox 14"/>
           <p:cNvSpPr txBox="1"/>
           <p:nvPr/>
         </p:nvSpPr>
@@ -20844,7 +24012,7 @@
                 </a:solidFill>
                 <a:latin typeface="Avenir Next"/>
               </a:rPr>
-              <a:t>A single page gives the full picture at a glance</a:t>
+              <a:t>One page, four tabs, updating itself from the live account</a:t>
             </a:r>
           </a:p>
         </p:txBody>
@@ -20893,180 +24061,81 @@
           </a:p>
         </p:txBody>
       </p:sp>
-      <p:sp>
-        <p:nvSpPr>
-          <p:cNvPr id="8" name="TextBox 7"/>
-          <p:cNvSpPr txBox="1"/>
-          <p:nvPr/>
-        </p:nvSpPr>
-        <p:spPr>
-          <a:xfrm>
-            <a:off x="640080" y="2029968"/>
-            <a:ext cx="10908792" cy="4572000"/>
-          </a:xfrm>
-          <a:prstGeom prst="rect">
-            <a:avLst/>
-          </a:prstGeom>
-          <a:noFill/>
-        </p:spPr>
-        <p:txBody>
-          <a:bodyPr wrap="square" lIns="0" rIns="0" tIns="0" bIns="0">
-            <a:spAutoFit/>
-          </a:bodyPr>
-          <a:lstStyle/>
-          <a:p>
-            <a:pPr>
-              <a:lnSpc>
-                <a:spcPct val="112000"/>
-              </a:lnSpc>
-              <a:spcAft>
-                <a:spcPts val="1100"/>
-              </a:spcAft>
-            </a:pPr>
-            <a:r>
-              <a:rPr sz="1600" b="1">
-                <a:solidFill>
-                  <a:srgbClr val="14B8A6"/>
-                </a:solidFill>
-                <a:latin typeface="Avenir Next"/>
-              </a:rPr>
-              <a:t>▪  </a:t>
-            </a:r>
-            <a:r>
-              <a:rPr sz="1600" b="1">
+      <p:pic>
+        <p:nvPicPr>
+          <p:cNvPr id="8" name="Picture 7" descr="dashboard.png"/>
+          <p:cNvPicPr>
+            <a:picLocks noChangeAspect="1"/>
+          </p:cNvPicPr>
+          <p:nvPr/>
+        </p:nvPicPr>
+        <p:blipFill>
+          <a:blip r:embed="rId2"/>
+          <a:stretch>
+            <a:fillRect/>
+          </a:stretch>
+        </p:blipFill>
+        <p:spPr>
+          <a:xfrm>
+            <a:off x="1109651" y="2121408"/>
+            <a:ext cx="9969649" cy="4023360"/>
+          </a:xfrm>
+          <a:prstGeom prst="rect">
+            <a:avLst/>
+          </a:prstGeom>
+        </p:spPr>
+      </p:pic>
+      <p:sp>
+        <p:nvSpPr>
+          <p:cNvPr id="9" name="TextBox 8"/>
+          <p:cNvSpPr txBox="1"/>
+          <p:nvPr/>
+        </p:nvSpPr>
+        <p:spPr>
+          <a:xfrm>
+            <a:off x="640080" y="6190488"/>
+            <a:ext cx="10908792" cy="457200"/>
+          </a:xfrm>
+          <a:prstGeom prst="rect">
+            <a:avLst/>
+          </a:prstGeom>
+          <a:noFill/>
+        </p:spPr>
+        <p:txBody>
+          <a:bodyPr wrap="square" anchor="t" lIns="0" rIns="0" tIns="0" bIns="0">
+            <a:spAutoFit/>
+          </a:bodyPr>
+          <a:lstStyle/>
+          <a:p>
+            <a:pPr algn="l">
+              <a:lnSpc>
+                <a:spcPct val="110000"/>
+              </a:lnSpc>
+            </a:pPr>
+            <a:r>
+              <a:rPr sz="1200" b="1">
                 <a:solidFill>
                   <a:srgbClr val="1F2A37"/>
                 </a:solidFill>
                 <a:latin typeface="Avenir Next"/>
               </a:rPr>
-              <a:t>Overview. </a:t>
-            </a:r>
-            <a:r>
-              <a:rPr sz="1600" b="0">
-                <a:solidFill>
-                  <a:srgbClr val="1F2A37"/>
-                </a:solidFill>
-                <a:latin typeface="Avenir Next"/>
-              </a:rPr>
-              <a:t>Account value and cash to the cent, daily profit, and a single health bar covering the engine, the market clock, the next rebalance, and any alerts.</a:t>
-            </a:r>
-          </a:p>
-          <a:p>
-            <a:pPr>
-              <a:lnSpc>
-                <a:spcPct val="112000"/>
-              </a:lnSpc>
-              <a:spcAft>
-                <a:spcPts val="1100"/>
-              </a:spcAft>
-            </a:pPr>
-            <a:r>
-              <a:rPr sz="1600" b="1">
-                <a:solidFill>
-                  <a:srgbClr val="14B8A6"/>
-                </a:solidFill>
-                <a:latin typeface="Avenir Next"/>
-              </a:rPr>
-              <a:t>▪  </a:t>
-            </a:r>
-            <a:r>
-              <a:rPr sz="1600" b="1">
-                <a:solidFill>
-                  <a:srgbClr val="1F2A37"/>
-                </a:solidFill>
-                <a:latin typeface="Avenir Next"/>
-              </a:rPr>
-              <a:t>Portfolio. </a:t>
-            </a:r>
-            <a:r>
-              <a:rPr sz="1600" b="0">
-                <a:solidFill>
-                  <a:srgbClr val="1F2A37"/>
-                </a:solidFill>
-                <a:latin typeface="Avenir Next"/>
-              </a:rPr>
-              <a:t>Holdings against target, sector and concentration breakdowns, the portfolio's factor tilt, the covered calls, and recent activity.</a:t>
-            </a:r>
-          </a:p>
-          <a:p>
-            <a:pPr>
-              <a:lnSpc>
-                <a:spcPct val="112000"/>
-              </a:lnSpc>
-              <a:spcAft>
-                <a:spcPts val="1100"/>
-              </a:spcAft>
-            </a:pPr>
-            <a:r>
-              <a:rPr sz="1600" b="1">
-                <a:solidFill>
-                  <a:srgbClr val="14B8A6"/>
-                </a:solidFill>
-                <a:latin typeface="Avenir Next"/>
-              </a:rPr>
-              <a:t>▪  </a:t>
-            </a:r>
-            <a:r>
-              <a:rPr sz="1600" b="1">
-                <a:solidFill>
-                  <a:srgbClr val="1F2A37"/>
-                </a:solidFill>
-                <a:latin typeface="Avenir Next"/>
-              </a:rPr>
-              <a:t>Performance. </a:t>
-            </a:r>
-            <a:r>
-              <a:rPr sz="1600" b="0">
-                <a:solidFill>
-                  <a:srgbClr val="1F2A37"/>
-                </a:solidFill>
-                <a:latin typeface="Avenir Next"/>
-              </a:rPr>
-              <a:t>Growth against the S&amp;P 500 and the BuyWrite index, risk measures, and a breakdown of trading costs and option premium.</a:t>
-            </a:r>
-          </a:p>
-          <a:p>
-            <a:pPr>
-              <a:lnSpc>
-                <a:spcPct val="112000"/>
-              </a:lnSpc>
-              <a:spcAft>
-                <a:spcPts val="1100"/>
-              </a:spcAft>
-            </a:pPr>
-            <a:r>
-              <a:rPr sz="1600" b="1">
-                <a:solidFill>
-                  <a:srgbClr val="14B8A6"/>
-                </a:solidFill>
-                <a:latin typeface="Avenir Next"/>
-              </a:rPr>
-              <a:t>▪  </a:t>
-            </a:r>
-            <a:r>
-              <a:rPr sz="1600" b="1">
-                <a:solidFill>
-                  <a:srgbClr val="1F2A37"/>
-                </a:solidFill>
-                <a:latin typeface="Avenir Next"/>
-              </a:rPr>
-              <a:t>Always current. </a:t>
-            </a:r>
-            <a:r>
-              <a:rPr sz="1600" b="0">
-                <a:solidFill>
-                  <a:srgbClr val="1F2A37"/>
-                </a:solidFill>
-                <a:latin typeface="Avenir Next"/>
-              </a:rPr>
-              <a:t>The dashboard updates itself from the live account, so it reflects the real state rather than a stale snapshot.</a:t>
-            </a:r>
-          </a:p>
-        </p:txBody>
-      </p:sp>
-      <p:sp>
-        <p:nvSpPr>
-          <p:cNvPr id="9" name="TextBox 8"/>
+              <a:t>Overview · Portfolio · Performance · Backtest</a:t>
+            </a:r>
+            <a:r>
+              <a:rPr sz="1200" b="0">
+                <a:solidFill>
+                  <a:srgbClr val="6B7787"/>
+                </a:solidFill>
+                <a:latin typeface="Avenir Next"/>
+              </a:rPr>
+              <a:t>    account value, holdings vs. target, factor tilt, growth vs. benchmarks, risk, and execution costs. Served read-only behind a password.</a:t>
+            </a:r>
+          </a:p>
+        </p:txBody>
+      </p:sp>
+      <p:sp>
+        <p:nvSpPr>
+          <p:cNvPr id="10" name="TextBox 9"/>
           <p:cNvSpPr txBox="1"/>
           <p:nvPr/>
         </p:nvSpPr>
@@ -21105,7 +24174,7 @@
       </p:sp>
       <p:sp>
         <p:nvSpPr>
-          <p:cNvPr id="10" name="TextBox 9"/>
+          <p:cNvPr id="11" name="TextBox 10"/>
           <p:cNvSpPr txBox="1"/>
           <p:nvPr/>
         </p:nvSpPr>
@@ -21759,55 +24828,60 @@
       </p:sp>
       <p:sp>
         <p:nvSpPr>
-          <p:cNvPr id="3" name="TextBox 2"/>
-          <p:cNvSpPr txBox="1"/>
-          <p:nvPr/>
-        </p:nvSpPr>
-        <p:spPr>
-          <a:xfrm>
-            <a:off x="548640" y="914400"/>
-            <a:ext cx="6400800" cy="2926080"/>
-          </a:xfrm>
-          <a:prstGeom prst="rect">
-            <a:avLst/>
-          </a:prstGeom>
-          <a:noFill/>
-        </p:spPr>
-        <p:txBody>
-          <a:bodyPr wrap="square" anchor="t" lIns="0" rIns="0" tIns="0" bIns="0">
-            <a:spAutoFit/>
-          </a:bodyPr>
-          <a:lstStyle/>
-          <a:p>
-            <a:pPr algn="l">
-              <a:lnSpc>
-                <a:spcPct val="110000"/>
-              </a:lnSpc>
-            </a:pPr>
-            <a:r>
-              <a:rPr sz="20000" b="1">
-                <a:solidFill>
-                  <a:srgbClr val="2A4760"/>
-                </a:solidFill>
-                <a:latin typeface="Avenir Next"/>
-              </a:rPr>
-              <a:t>09</a:t>
-            </a:r>
-          </a:p>
-        </p:txBody>
-      </p:sp>
-      <p:sp>
-        <p:nvSpPr>
-          <p:cNvPr id="4" name="Rectangle 3"/>
+          <p:cNvPr id="3" name="Oval 2"/>
           <p:cNvSpPr/>
           <p:nvPr/>
         </p:nvSpPr>
         <p:spPr>
           <a:xfrm>
-            <a:off x="868680" y="3977639"/>
-            <a:ext cx="2194560" cy="38100"/>
-          </a:xfrm>
-          <a:prstGeom prst="rect">
+            <a:off x="10972800" y="566928"/>
+            <a:ext cx="137160" cy="137160"/>
+          </a:xfrm>
+          <a:prstGeom prst="ellipse">
+            <a:avLst/>
+          </a:prstGeom>
+          <a:solidFill>
+            <a:srgbClr val="3A4C63"/>
+          </a:solidFill>
+          <a:ln>
+            <a:noFill/>
+          </a:ln>
+          <a:effectLst/>
+        </p:spPr>
+        <p:style>
+          <a:lnRef idx="1">
+            <a:schemeClr val="accent1"/>
+          </a:lnRef>
+          <a:fillRef idx="3">
+            <a:schemeClr val="accent1"/>
+          </a:fillRef>
+          <a:effectRef idx="2">
+            <a:schemeClr val="accent1"/>
+          </a:effectRef>
+          <a:fontRef idx="minor">
+            <a:schemeClr val="lt1"/>
+          </a:fontRef>
+        </p:style>
+        <p:txBody>
+          <a:bodyPr rtlCol="0" anchor="ctr"/>
+          <a:lstStyle/>
+          <a:p>
+            <a:pPr algn="ctr"/>
+          </a:p>
+        </p:txBody>
+      </p:sp>
+      <p:sp>
+        <p:nvSpPr>
+          <p:cNvPr id="4" name="Oval 3"/>
+          <p:cNvSpPr/>
+          <p:nvPr/>
+        </p:nvSpPr>
+        <p:spPr>
+          <a:xfrm>
+            <a:off x="11210544" y="566928"/>
+            <a:ext cx="137160" cy="137160"/>
+          </a:xfrm>
+          <a:prstGeom prst="ellipse">
             <a:avLst/>
           </a:prstGeom>
           <a:solidFill>
@@ -21842,7 +24916,398 @@
       </p:sp>
       <p:sp>
         <p:nvSpPr>
-          <p:cNvPr id="5" name="TextBox 4"/>
+          <p:cNvPr id="5" name="Oval 4"/>
+          <p:cNvSpPr/>
+          <p:nvPr/>
+        </p:nvSpPr>
+        <p:spPr>
+          <a:xfrm>
+            <a:off x="11448288" y="566928"/>
+            <a:ext cx="137160" cy="137160"/>
+          </a:xfrm>
+          <a:prstGeom prst="ellipse">
+            <a:avLst/>
+          </a:prstGeom>
+          <a:solidFill>
+            <a:srgbClr val="3A4C63"/>
+          </a:solidFill>
+          <a:ln>
+            <a:noFill/>
+          </a:ln>
+          <a:effectLst/>
+        </p:spPr>
+        <p:style>
+          <a:lnRef idx="1">
+            <a:schemeClr val="accent1"/>
+          </a:lnRef>
+          <a:fillRef idx="3">
+            <a:schemeClr val="accent1"/>
+          </a:fillRef>
+          <a:effectRef idx="2">
+            <a:schemeClr val="accent1"/>
+          </a:effectRef>
+          <a:fontRef idx="minor">
+            <a:schemeClr val="lt1"/>
+          </a:fontRef>
+        </p:style>
+        <p:txBody>
+          <a:bodyPr rtlCol="0" anchor="ctr"/>
+          <a:lstStyle/>
+          <a:p>
+            <a:pPr algn="ctr"/>
+          </a:p>
+        </p:txBody>
+      </p:sp>
+      <p:sp>
+        <p:nvSpPr>
+          <p:cNvPr id="6" name="Oval 5"/>
+          <p:cNvSpPr/>
+          <p:nvPr/>
+        </p:nvSpPr>
+        <p:spPr>
+          <a:xfrm>
+            <a:off x="10972800" y="804672"/>
+            <a:ext cx="137160" cy="137160"/>
+          </a:xfrm>
+          <a:prstGeom prst="ellipse">
+            <a:avLst/>
+          </a:prstGeom>
+          <a:solidFill>
+            <a:srgbClr val="3A4C63"/>
+          </a:solidFill>
+          <a:ln>
+            <a:noFill/>
+          </a:ln>
+          <a:effectLst/>
+        </p:spPr>
+        <p:style>
+          <a:lnRef idx="1">
+            <a:schemeClr val="accent1"/>
+          </a:lnRef>
+          <a:fillRef idx="3">
+            <a:schemeClr val="accent1"/>
+          </a:fillRef>
+          <a:effectRef idx="2">
+            <a:schemeClr val="accent1"/>
+          </a:effectRef>
+          <a:fontRef idx="minor">
+            <a:schemeClr val="lt1"/>
+          </a:fontRef>
+        </p:style>
+        <p:txBody>
+          <a:bodyPr rtlCol="0" anchor="ctr"/>
+          <a:lstStyle/>
+          <a:p>
+            <a:pPr algn="ctr"/>
+          </a:p>
+        </p:txBody>
+      </p:sp>
+      <p:sp>
+        <p:nvSpPr>
+          <p:cNvPr id="7" name="Oval 6"/>
+          <p:cNvSpPr/>
+          <p:nvPr/>
+        </p:nvSpPr>
+        <p:spPr>
+          <a:xfrm>
+            <a:off x="11210544" y="804672"/>
+            <a:ext cx="137160" cy="137160"/>
+          </a:xfrm>
+          <a:prstGeom prst="ellipse">
+            <a:avLst/>
+          </a:prstGeom>
+          <a:solidFill>
+            <a:srgbClr val="14B8A6"/>
+          </a:solidFill>
+          <a:ln>
+            <a:noFill/>
+          </a:ln>
+          <a:effectLst/>
+        </p:spPr>
+        <p:style>
+          <a:lnRef idx="1">
+            <a:schemeClr val="accent1"/>
+          </a:lnRef>
+          <a:fillRef idx="3">
+            <a:schemeClr val="accent1"/>
+          </a:fillRef>
+          <a:effectRef idx="2">
+            <a:schemeClr val="accent1"/>
+          </a:effectRef>
+          <a:fontRef idx="minor">
+            <a:schemeClr val="lt1"/>
+          </a:fontRef>
+        </p:style>
+        <p:txBody>
+          <a:bodyPr rtlCol="0" anchor="ctr"/>
+          <a:lstStyle/>
+          <a:p>
+            <a:pPr algn="ctr"/>
+          </a:p>
+        </p:txBody>
+      </p:sp>
+      <p:sp>
+        <p:nvSpPr>
+          <p:cNvPr id="8" name="Oval 7"/>
+          <p:cNvSpPr/>
+          <p:nvPr/>
+        </p:nvSpPr>
+        <p:spPr>
+          <a:xfrm>
+            <a:off x="11448288" y="804672"/>
+            <a:ext cx="137160" cy="137160"/>
+          </a:xfrm>
+          <a:prstGeom prst="ellipse">
+            <a:avLst/>
+          </a:prstGeom>
+          <a:solidFill>
+            <a:srgbClr val="3A4C63"/>
+          </a:solidFill>
+          <a:ln>
+            <a:noFill/>
+          </a:ln>
+          <a:effectLst/>
+        </p:spPr>
+        <p:style>
+          <a:lnRef idx="1">
+            <a:schemeClr val="accent1"/>
+          </a:lnRef>
+          <a:fillRef idx="3">
+            <a:schemeClr val="accent1"/>
+          </a:fillRef>
+          <a:effectRef idx="2">
+            <a:schemeClr val="accent1"/>
+          </a:effectRef>
+          <a:fontRef idx="minor">
+            <a:schemeClr val="lt1"/>
+          </a:fontRef>
+        </p:style>
+        <p:txBody>
+          <a:bodyPr rtlCol="0" anchor="ctr"/>
+          <a:lstStyle/>
+          <a:p>
+            <a:pPr algn="ctr"/>
+          </a:p>
+        </p:txBody>
+      </p:sp>
+      <p:sp>
+        <p:nvSpPr>
+          <p:cNvPr id="9" name="Oval 8"/>
+          <p:cNvSpPr/>
+          <p:nvPr/>
+        </p:nvSpPr>
+        <p:spPr>
+          <a:xfrm>
+            <a:off x="10972800" y="1042416"/>
+            <a:ext cx="137160" cy="137160"/>
+          </a:xfrm>
+          <a:prstGeom prst="ellipse">
+            <a:avLst/>
+          </a:prstGeom>
+          <a:solidFill>
+            <a:srgbClr val="3A4C63"/>
+          </a:solidFill>
+          <a:ln>
+            <a:noFill/>
+          </a:ln>
+          <a:effectLst/>
+        </p:spPr>
+        <p:style>
+          <a:lnRef idx="1">
+            <a:schemeClr val="accent1"/>
+          </a:lnRef>
+          <a:fillRef idx="3">
+            <a:schemeClr val="accent1"/>
+          </a:fillRef>
+          <a:effectRef idx="2">
+            <a:schemeClr val="accent1"/>
+          </a:effectRef>
+          <a:fontRef idx="minor">
+            <a:schemeClr val="lt1"/>
+          </a:fontRef>
+        </p:style>
+        <p:txBody>
+          <a:bodyPr rtlCol="0" anchor="ctr"/>
+          <a:lstStyle/>
+          <a:p>
+            <a:pPr algn="ctr"/>
+          </a:p>
+        </p:txBody>
+      </p:sp>
+      <p:sp>
+        <p:nvSpPr>
+          <p:cNvPr id="10" name="Oval 9"/>
+          <p:cNvSpPr/>
+          <p:nvPr/>
+        </p:nvSpPr>
+        <p:spPr>
+          <a:xfrm>
+            <a:off x="11210544" y="1042416"/>
+            <a:ext cx="137160" cy="137160"/>
+          </a:xfrm>
+          <a:prstGeom prst="ellipse">
+            <a:avLst/>
+          </a:prstGeom>
+          <a:solidFill>
+            <a:srgbClr val="14B8A6"/>
+          </a:solidFill>
+          <a:ln>
+            <a:noFill/>
+          </a:ln>
+          <a:effectLst/>
+        </p:spPr>
+        <p:style>
+          <a:lnRef idx="1">
+            <a:schemeClr val="accent1"/>
+          </a:lnRef>
+          <a:fillRef idx="3">
+            <a:schemeClr val="accent1"/>
+          </a:fillRef>
+          <a:effectRef idx="2">
+            <a:schemeClr val="accent1"/>
+          </a:effectRef>
+          <a:fontRef idx="minor">
+            <a:schemeClr val="lt1"/>
+          </a:fontRef>
+        </p:style>
+        <p:txBody>
+          <a:bodyPr rtlCol="0" anchor="ctr"/>
+          <a:lstStyle/>
+          <a:p>
+            <a:pPr algn="ctr"/>
+          </a:p>
+        </p:txBody>
+      </p:sp>
+      <p:sp>
+        <p:nvSpPr>
+          <p:cNvPr id="11" name="Oval 10"/>
+          <p:cNvSpPr/>
+          <p:nvPr/>
+        </p:nvSpPr>
+        <p:spPr>
+          <a:xfrm>
+            <a:off x="11448288" y="1042416"/>
+            <a:ext cx="137160" cy="137160"/>
+          </a:xfrm>
+          <a:prstGeom prst="ellipse">
+            <a:avLst/>
+          </a:prstGeom>
+          <a:solidFill>
+            <a:srgbClr val="3A4C63"/>
+          </a:solidFill>
+          <a:ln>
+            <a:noFill/>
+          </a:ln>
+          <a:effectLst/>
+        </p:spPr>
+        <p:style>
+          <a:lnRef idx="1">
+            <a:schemeClr val="accent1"/>
+          </a:lnRef>
+          <a:fillRef idx="3">
+            <a:schemeClr val="accent1"/>
+          </a:fillRef>
+          <a:effectRef idx="2">
+            <a:schemeClr val="accent1"/>
+          </a:effectRef>
+          <a:fontRef idx="minor">
+            <a:schemeClr val="lt1"/>
+          </a:fontRef>
+        </p:style>
+        <p:txBody>
+          <a:bodyPr rtlCol="0" anchor="ctr"/>
+          <a:lstStyle/>
+          <a:p>
+            <a:pPr algn="ctr"/>
+          </a:p>
+        </p:txBody>
+      </p:sp>
+      <p:sp>
+        <p:nvSpPr>
+          <p:cNvPr id="12" name="TextBox 11"/>
+          <p:cNvSpPr txBox="1"/>
+          <p:nvPr/>
+        </p:nvSpPr>
+        <p:spPr>
+          <a:xfrm>
+            <a:off x="548640" y="914400"/>
+            <a:ext cx="6400800" cy="2926080"/>
+          </a:xfrm>
+          <a:prstGeom prst="rect">
+            <a:avLst/>
+          </a:prstGeom>
+          <a:noFill/>
+        </p:spPr>
+        <p:txBody>
+          <a:bodyPr wrap="square" anchor="t" lIns="0" rIns="0" tIns="0" bIns="0">
+            <a:spAutoFit/>
+          </a:bodyPr>
+          <a:lstStyle/>
+          <a:p>
+            <a:pPr algn="l">
+              <a:lnSpc>
+                <a:spcPct val="110000"/>
+              </a:lnSpc>
+            </a:pPr>
+            <a:r>
+              <a:rPr sz="20000" b="1">
+                <a:solidFill>
+                  <a:srgbClr val="2A4760"/>
+                </a:solidFill>
+                <a:latin typeface="Avenir Next"/>
+              </a:rPr>
+              <a:t>09</a:t>
+            </a:r>
+          </a:p>
+        </p:txBody>
+      </p:sp>
+      <p:sp>
+        <p:nvSpPr>
+          <p:cNvPr id="13" name="Rectangle 12"/>
+          <p:cNvSpPr/>
+          <p:nvPr/>
+        </p:nvSpPr>
+        <p:spPr>
+          <a:xfrm>
+            <a:off x="868680" y="3977639"/>
+            <a:ext cx="2194560" cy="38100"/>
+          </a:xfrm>
+          <a:prstGeom prst="rect">
+            <a:avLst/>
+          </a:prstGeom>
+          <a:solidFill>
+            <a:srgbClr val="14B8A6"/>
+          </a:solidFill>
+          <a:ln>
+            <a:noFill/>
+          </a:ln>
+          <a:effectLst/>
+        </p:spPr>
+        <p:style>
+          <a:lnRef idx="1">
+            <a:schemeClr val="accent1"/>
+          </a:lnRef>
+          <a:fillRef idx="3">
+            <a:schemeClr val="accent1"/>
+          </a:fillRef>
+          <a:effectRef idx="2">
+            <a:schemeClr val="accent1"/>
+          </a:effectRef>
+          <a:fontRef idx="minor">
+            <a:schemeClr val="lt1"/>
+          </a:fontRef>
+        </p:style>
+        <p:txBody>
+          <a:bodyPr rtlCol="0" anchor="ctr"/>
+          <a:lstStyle/>
+          <a:p>
+            <a:pPr algn="ctr"/>
+          </a:p>
+        </p:txBody>
+      </p:sp>
+      <p:sp>
+        <p:nvSpPr>
+          <p:cNvPr id="14" name="TextBox 13"/>
           <p:cNvSpPr txBox="1"/>
           <p:nvPr/>
         </p:nvSpPr>
@@ -21881,7 +25346,7 @@
       </p:sp>
       <p:sp>
         <p:nvSpPr>
-          <p:cNvPr id="6" name="TextBox 5"/>
+          <p:cNvPr id="15" name="TextBox 14"/>
           <p:cNvSpPr txBox="1"/>
           <p:nvPr/>
         </p:nvSpPr>
@@ -23943,55 +27408,60 @@
       </p:sp>
       <p:sp>
         <p:nvSpPr>
-          <p:cNvPr id="4" name="TextBox 3"/>
-          <p:cNvSpPr txBox="1"/>
-          <p:nvPr/>
-        </p:nvSpPr>
-        <p:spPr>
-          <a:xfrm>
-            <a:off x="822960" y="777240"/>
-            <a:ext cx="10058400" cy="365760"/>
-          </a:xfrm>
-          <a:prstGeom prst="rect">
-            <a:avLst/>
-          </a:prstGeom>
-          <a:noFill/>
-        </p:spPr>
-        <p:txBody>
-          <a:bodyPr wrap="square" anchor="t" lIns="0" rIns="0" tIns="0" bIns="0">
-            <a:spAutoFit/>
-          </a:bodyPr>
-          <a:lstStyle/>
-          <a:p>
-            <a:pPr algn="l">
-              <a:lnSpc>
-                <a:spcPct val="110000"/>
-              </a:lnSpc>
-            </a:pPr>
-            <a:r>
-              <a:rPr sz="1300" b="1">
-                <a:solidFill>
-                  <a:srgbClr val="14B8A6"/>
-                </a:solidFill>
-                <a:latin typeface="Avenir Next"/>
-              </a:rPr>
-              <a:t>IN SUMMARY</a:t>
-            </a:r>
-          </a:p>
-        </p:txBody>
-      </p:sp>
-      <p:sp>
-        <p:nvSpPr>
-          <p:cNvPr id="5" name="Rectangle 4"/>
+          <p:cNvPr id="4" name="Oval 3"/>
           <p:cNvSpPr/>
           <p:nvPr/>
         </p:nvSpPr>
         <p:spPr>
           <a:xfrm>
-            <a:off x="822960" y="1463040"/>
-            <a:ext cx="118872" cy="640080"/>
-          </a:xfrm>
-          <a:prstGeom prst="rect">
+            <a:off x="10972800" y="777240"/>
+            <a:ext cx="137160" cy="137160"/>
+          </a:xfrm>
+          <a:prstGeom prst="ellipse">
+            <a:avLst/>
+          </a:prstGeom>
+          <a:solidFill>
+            <a:srgbClr val="3A4C63"/>
+          </a:solidFill>
+          <a:ln>
+            <a:noFill/>
+          </a:ln>
+          <a:effectLst/>
+        </p:spPr>
+        <p:style>
+          <a:lnRef idx="1">
+            <a:schemeClr val="accent1"/>
+          </a:lnRef>
+          <a:fillRef idx="3">
+            <a:schemeClr val="accent1"/>
+          </a:fillRef>
+          <a:effectRef idx="2">
+            <a:schemeClr val="accent1"/>
+          </a:effectRef>
+          <a:fontRef idx="minor">
+            <a:schemeClr val="lt1"/>
+          </a:fontRef>
+        </p:style>
+        <p:txBody>
+          <a:bodyPr rtlCol="0" anchor="ctr"/>
+          <a:lstStyle/>
+          <a:p>
+            <a:pPr algn="ctr"/>
+          </a:p>
+        </p:txBody>
+      </p:sp>
+      <p:sp>
+        <p:nvSpPr>
+          <p:cNvPr id="5" name="Oval 4"/>
+          <p:cNvSpPr/>
+          <p:nvPr/>
+        </p:nvSpPr>
+        <p:spPr>
+          <a:xfrm>
+            <a:off x="11210544" y="777240"/>
+            <a:ext cx="137160" cy="137160"/>
+          </a:xfrm>
+          <a:prstGeom prst="ellipse">
             <a:avLst/>
           </a:prstGeom>
           <a:solidFill>
@@ -24026,94 +27496,104 @@
       </p:sp>
       <p:sp>
         <p:nvSpPr>
-          <p:cNvPr id="6" name="TextBox 5"/>
-          <p:cNvSpPr txBox="1"/>
-          <p:nvPr/>
-        </p:nvSpPr>
-        <p:spPr>
-          <a:xfrm>
-            <a:off x="1143000" y="1417320"/>
-            <a:ext cx="10241280" cy="365760"/>
-          </a:xfrm>
-          <a:prstGeom prst="rect">
-            <a:avLst/>
-          </a:prstGeom>
-          <a:noFill/>
-        </p:spPr>
-        <p:txBody>
-          <a:bodyPr wrap="square" anchor="t" lIns="0" rIns="0" tIns="0" bIns="0">
-            <a:spAutoFit/>
-          </a:bodyPr>
-          <a:lstStyle/>
-          <a:p>
-            <a:pPr algn="l">
-              <a:lnSpc>
-                <a:spcPct val="110000"/>
-              </a:lnSpc>
-            </a:pPr>
-            <a:r>
-              <a:rPr sz="1800" b="1">
-                <a:solidFill>
-                  <a:srgbClr val="FFFFFF"/>
-                </a:solidFill>
-                <a:latin typeface="Avenir Next"/>
-              </a:rPr>
-              <a:t>A disciplined factor portfolio</a:t>
-            </a:r>
-          </a:p>
-        </p:txBody>
-      </p:sp>
-      <p:sp>
-        <p:nvSpPr>
-          <p:cNvPr id="7" name="TextBox 6"/>
-          <p:cNvSpPr txBox="1"/>
-          <p:nvPr/>
-        </p:nvSpPr>
-        <p:spPr>
-          <a:xfrm>
-            <a:off x="1143000" y="1801368"/>
-            <a:ext cx="10241280" cy="502920"/>
-          </a:xfrm>
-          <a:prstGeom prst="rect">
-            <a:avLst/>
-          </a:prstGeom>
-          <a:noFill/>
-        </p:spPr>
-        <p:txBody>
-          <a:bodyPr wrap="square" anchor="t" lIns="0" rIns="0" tIns="0" bIns="0">
-            <a:spAutoFit/>
-          </a:bodyPr>
-          <a:lstStyle/>
-          <a:p>
-            <a:pPr algn="l">
-              <a:lnSpc>
-                <a:spcPct val="105000"/>
-              </a:lnSpc>
-            </a:pPr>
-            <a:r>
-              <a:rPr sz="1300" b="0">
-                <a:solidFill>
-                  <a:srgbClr val="A9B7C4"/>
-                </a:solidFill>
-                <a:latin typeface="Avenir Next"/>
-              </a:rPr>
-              <a:t>Four proven traits, computed transparently and weighted equally.</a:t>
-            </a:r>
-          </a:p>
-        </p:txBody>
-      </p:sp>
-      <p:sp>
-        <p:nvSpPr>
-          <p:cNvPr id="8" name="Rectangle 7"/>
+          <p:cNvPr id="6" name="Oval 5"/>
           <p:cNvSpPr/>
           <p:nvPr/>
         </p:nvSpPr>
         <p:spPr>
           <a:xfrm>
-            <a:off x="822960" y="2395728"/>
-            <a:ext cx="118872" cy="640080"/>
-          </a:xfrm>
-          <a:prstGeom prst="rect">
+            <a:off x="11448288" y="777240"/>
+            <a:ext cx="137160" cy="137160"/>
+          </a:xfrm>
+          <a:prstGeom prst="ellipse">
+            <a:avLst/>
+          </a:prstGeom>
+          <a:solidFill>
+            <a:srgbClr val="3A4C63"/>
+          </a:solidFill>
+          <a:ln>
+            <a:noFill/>
+          </a:ln>
+          <a:effectLst/>
+        </p:spPr>
+        <p:style>
+          <a:lnRef idx="1">
+            <a:schemeClr val="accent1"/>
+          </a:lnRef>
+          <a:fillRef idx="3">
+            <a:schemeClr val="accent1"/>
+          </a:fillRef>
+          <a:effectRef idx="2">
+            <a:schemeClr val="accent1"/>
+          </a:effectRef>
+          <a:fontRef idx="minor">
+            <a:schemeClr val="lt1"/>
+          </a:fontRef>
+        </p:style>
+        <p:txBody>
+          <a:bodyPr rtlCol="0" anchor="ctr"/>
+          <a:lstStyle/>
+          <a:p>
+            <a:pPr algn="ctr"/>
+          </a:p>
+        </p:txBody>
+      </p:sp>
+      <p:sp>
+        <p:nvSpPr>
+          <p:cNvPr id="7" name="Oval 6"/>
+          <p:cNvSpPr/>
+          <p:nvPr/>
+        </p:nvSpPr>
+        <p:spPr>
+          <a:xfrm>
+            <a:off x="10972800" y="1014983"/>
+            <a:ext cx="137160" cy="137160"/>
+          </a:xfrm>
+          <a:prstGeom prst="ellipse">
+            <a:avLst/>
+          </a:prstGeom>
+          <a:solidFill>
+            <a:srgbClr val="3A4C63"/>
+          </a:solidFill>
+          <a:ln>
+            <a:noFill/>
+          </a:ln>
+          <a:effectLst/>
+        </p:spPr>
+        <p:style>
+          <a:lnRef idx="1">
+            <a:schemeClr val="accent1"/>
+          </a:lnRef>
+          <a:fillRef idx="3">
+            <a:schemeClr val="accent1"/>
+          </a:fillRef>
+          <a:effectRef idx="2">
+            <a:schemeClr val="accent1"/>
+          </a:effectRef>
+          <a:fontRef idx="minor">
+            <a:schemeClr val="lt1"/>
+          </a:fontRef>
+        </p:style>
+        <p:txBody>
+          <a:bodyPr rtlCol="0" anchor="ctr"/>
+          <a:lstStyle/>
+          <a:p>
+            <a:pPr algn="ctr"/>
+          </a:p>
+        </p:txBody>
+      </p:sp>
+      <p:sp>
+        <p:nvSpPr>
+          <p:cNvPr id="8" name="Oval 7"/>
+          <p:cNvSpPr/>
+          <p:nvPr/>
+        </p:nvSpPr>
+        <p:spPr>
+          <a:xfrm>
+            <a:off x="11210544" y="1014983"/>
+            <a:ext cx="137160" cy="137160"/>
+          </a:xfrm>
+          <a:prstGeom prst="ellipse">
             <a:avLst/>
           </a:prstGeom>
           <a:solidFill>
@@ -24148,94 +27628,104 @@
       </p:sp>
       <p:sp>
         <p:nvSpPr>
-          <p:cNvPr id="9" name="TextBox 8"/>
-          <p:cNvSpPr txBox="1"/>
-          <p:nvPr/>
-        </p:nvSpPr>
-        <p:spPr>
-          <a:xfrm>
-            <a:off x="1143000" y="2350008"/>
-            <a:ext cx="10241280" cy="365760"/>
-          </a:xfrm>
-          <a:prstGeom prst="rect">
-            <a:avLst/>
-          </a:prstGeom>
-          <a:noFill/>
-        </p:spPr>
-        <p:txBody>
-          <a:bodyPr wrap="square" anchor="t" lIns="0" rIns="0" tIns="0" bIns="0">
-            <a:spAutoFit/>
-          </a:bodyPr>
-          <a:lstStyle/>
-          <a:p>
-            <a:pPr algn="l">
-              <a:lnSpc>
-                <a:spcPct val="110000"/>
-              </a:lnSpc>
-            </a:pPr>
-            <a:r>
-              <a:rPr sz="1800" b="1">
-                <a:solidFill>
-                  <a:srgbClr val="FFFFFF"/>
-                </a:solidFill>
-                <a:latin typeface="Avenir Next"/>
-              </a:rPr>
-              <a:t>An income overlay that lowers risk</a:t>
-            </a:r>
-          </a:p>
-        </p:txBody>
-      </p:sp>
-      <p:sp>
-        <p:nvSpPr>
-          <p:cNvPr id="10" name="TextBox 9"/>
-          <p:cNvSpPr txBox="1"/>
-          <p:nvPr/>
-        </p:nvSpPr>
-        <p:spPr>
-          <a:xfrm>
-            <a:off x="1143000" y="2734056"/>
-            <a:ext cx="10241280" cy="502920"/>
-          </a:xfrm>
-          <a:prstGeom prst="rect">
-            <a:avLst/>
-          </a:prstGeom>
-          <a:noFill/>
-        </p:spPr>
-        <p:txBody>
-          <a:bodyPr wrap="square" anchor="t" lIns="0" rIns="0" tIns="0" bIns="0">
-            <a:spAutoFit/>
-          </a:bodyPr>
-          <a:lstStyle/>
-          <a:p>
-            <a:pPr algn="l">
-              <a:lnSpc>
-                <a:spcPct val="105000"/>
-              </a:lnSpc>
-            </a:pPr>
-            <a:r>
-              <a:rPr sz="1300" b="0">
-                <a:solidFill>
-                  <a:srgbClr val="A9B7C4"/>
-                </a:solidFill>
-                <a:latin typeface="Avenir Next"/>
-              </a:rPr>
-              <a:t>Covered calls harvest a persistent premium and smooth the ride.</a:t>
-            </a:r>
-          </a:p>
-        </p:txBody>
-      </p:sp>
-      <p:sp>
-        <p:nvSpPr>
-          <p:cNvPr id="11" name="Rectangle 10"/>
+          <p:cNvPr id="9" name="Oval 8"/>
           <p:cNvSpPr/>
           <p:nvPr/>
         </p:nvSpPr>
         <p:spPr>
           <a:xfrm>
-            <a:off x="822960" y="3328415"/>
-            <a:ext cx="118872" cy="640080"/>
-          </a:xfrm>
-          <a:prstGeom prst="rect">
+            <a:off x="11448288" y="1014983"/>
+            <a:ext cx="137160" cy="137160"/>
+          </a:xfrm>
+          <a:prstGeom prst="ellipse">
+            <a:avLst/>
+          </a:prstGeom>
+          <a:solidFill>
+            <a:srgbClr val="3A4C63"/>
+          </a:solidFill>
+          <a:ln>
+            <a:noFill/>
+          </a:ln>
+          <a:effectLst/>
+        </p:spPr>
+        <p:style>
+          <a:lnRef idx="1">
+            <a:schemeClr val="accent1"/>
+          </a:lnRef>
+          <a:fillRef idx="3">
+            <a:schemeClr val="accent1"/>
+          </a:fillRef>
+          <a:effectRef idx="2">
+            <a:schemeClr val="accent1"/>
+          </a:effectRef>
+          <a:fontRef idx="minor">
+            <a:schemeClr val="lt1"/>
+          </a:fontRef>
+        </p:style>
+        <p:txBody>
+          <a:bodyPr rtlCol="0" anchor="ctr"/>
+          <a:lstStyle/>
+          <a:p>
+            <a:pPr algn="ctr"/>
+          </a:p>
+        </p:txBody>
+      </p:sp>
+      <p:sp>
+        <p:nvSpPr>
+          <p:cNvPr id="10" name="Oval 9"/>
+          <p:cNvSpPr/>
+          <p:nvPr/>
+        </p:nvSpPr>
+        <p:spPr>
+          <a:xfrm>
+            <a:off x="10972800" y="1252728"/>
+            <a:ext cx="137160" cy="137160"/>
+          </a:xfrm>
+          <a:prstGeom prst="ellipse">
+            <a:avLst/>
+          </a:prstGeom>
+          <a:solidFill>
+            <a:srgbClr val="3A4C63"/>
+          </a:solidFill>
+          <a:ln>
+            <a:noFill/>
+          </a:ln>
+          <a:effectLst/>
+        </p:spPr>
+        <p:style>
+          <a:lnRef idx="1">
+            <a:schemeClr val="accent1"/>
+          </a:lnRef>
+          <a:fillRef idx="3">
+            <a:schemeClr val="accent1"/>
+          </a:fillRef>
+          <a:effectRef idx="2">
+            <a:schemeClr val="accent1"/>
+          </a:effectRef>
+          <a:fontRef idx="minor">
+            <a:schemeClr val="lt1"/>
+          </a:fontRef>
+        </p:style>
+        <p:txBody>
+          <a:bodyPr rtlCol="0" anchor="ctr"/>
+          <a:lstStyle/>
+          <a:p>
+            <a:pPr algn="ctr"/>
+          </a:p>
+        </p:txBody>
+      </p:sp>
+      <p:sp>
+        <p:nvSpPr>
+          <p:cNvPr id="11" name="Oval 10"/>
+          <p:cNvSpPr/>
+          <p:nvPr/>
+        </p:nvSpPr>
+        <p:spPr>
+          <a:xfrm>
+            <a:off x="11210544" y="1252728"/>
+            <a:ext cx="137160" cy="137160"/>
+          </a:xfrm>
+          <a:prstGeom prst="ellipse">
             <a:avLst/>
           </a:prstGeom>
           <a:solidFill>
@@ -24270,14 +27760,58 @@
       </p:sp>
       <p:sp>
         <p:nvSpPr>
-          <p:cNvPr id="12" name="TextBox 11"/>
-          <p:cNvSpPr txBox="1"/>
-          <p:nvPr/>
-        </p:nvSpPr>
-        <p:spPr>
-          <a:xfrm>
-            <a:off x="1143000" y="3282696"/>
-            <a:ext cx="10241280" cy="365760"/>
+          <p:cNvPr id="12" name="Oval 11"/>
+          <p:cNvSpPr/>
+          <p:nvPr/>
+        </p:nvSpPr>
+        <p:spPr>
+          <a:xfrm>
+            <a:off x="11448288" y="1252728"/>
+            <a:ext cx="137160" cy="137160"/>
+          </a:xfrm>
+          <a:prstGeom prst="ellipse">
+            <a:avLst/>
+          </a:prstGeom>
+          <a:solidFill>
+            <a:srgbClr val="3A4C63"/>
+          </a:solidFill>
+          <a:ln>
+            <a:noFill/>
+          </a:ln>
+          <a:effectLst/>
+        </p:spPr>
+        <p:style>
+          <a:lnRef idx="1">
+            <a:schemeClr val="accent1"/>
+          </a:lnRef>
+          <a:fillRef idx="3">
+            <a:schemeClr val="accent1"/>
+          </a:fillRef>
+          <a:effectRef idx="2">
+            <a:schemeClr val="accent1"/>
+          </a:effectRef>
+          <a:fontRef idx="minor">
+            <a:schemeClr val="lt1"/>
+          </a:fontRef>
+        </p:style>
+        <p:txBody>
+          <a:bodyPr rtlCol="0" anchor="ctr"/>
+          <a:lstStyle/>
+          <a:p>
+            <a:pPr algn="ctr"/>
+          </a:p>
+        </p:txBody>
+      </p:sp>
+      <p:sp>
+        <p:nvSpPr>
+          <p:cNvPr id="13" name="TextBox 12"/>
+          <p:cNvSpPr txBox="1"/>
+          <p:nvPr/>
+        </p:nvSpPr>
+        <p:spPr>
+          <a:xfrm>
+            <a:off x="822960" y="777240"/>
+            <a:ext cx="10058400" cy="365760"/>
           </a:xfrm>
           <a:prstGeom prst="rect">
             <a:avLst/>
@@ -24296,52 +27830,13 @@
               </a:lnSpc>
             </a:pPr>
             <a:r>
-              <a:rPr sz="1800" b="1">
-                <a:solidFill>
-                  <a:srgbClr val="FFFFFF"/>
-                </a:solidFill>
-                <a:latin typeface="Avenir Next"/>
-              </a:rPr>
-              <a:t>Built for capital preservation</a:t>
-            </a:r>
-          </a:p>
-        </p:txBody>
-      </p:sp>
-      <p:sp>
-        <p:nvSpPr>
-          <p:cNvPr id="13" name="TextBox 12"/>
-          <p:cNvSpPr txBox="1"/>
-          <p:nvPr/>
-        </p:nvSpPr>
-        <p:spPr>
-          <a:xfrm>
-            <a:off x="1143000" y="3666744"/>
-            <a:ext cx="10241280" cy="502920"/>
-          </a:xfrm>
-          <a:prstGeom prst="rect">
-            <a:avLst/>
-          </a:prstGeom>
-          <a:noFill/>
-        </p:spPr>
-        <p:txBody>
-          <a:bodyPr wrap="square" anchor="t" lIns="0" rIns="0" tIns="0" bIns="0">
-            <a:spAutoFit/>
-          </a:bodyPr>
-          <a:lstStyle/>
-          <a:p>
-            <a:pPr algn="l">
-              <a:lnSpc>
-                <a:spcPct val="105000"/>
-              </a:lnSpc>
-            </a:pPr>
-            <a:r>
-              <a:rPr sz="1300" b="0">
-                <a:solidFill>
-                  <a:srgbClr val="A9B7C4"/>
-                </a:solidFill>
-                <a:latin typeface="Avenir Next"/>
-              </a:rPr>
-              <a:t>Firm diversification limits, a pre-trade risk check, and an emergency stop.</a:t>
+              <a:rPr sz="1300" b="1">
+                <a:solidFill>
+                  <a:srgbClr val="14B8A6"/>
+                </a:solidFill>
+                <a:latin typeface="Avenir Next"/>
+              </a:rPr>
+              <a:t>IN SUMMARY</a:t>
             </a:r>
           </a:p>
         </p:txBody>
@@ -24354,7 +27849,7 @@
         </p:nvSpPr>
         <p:spPr>
           <a:xfrm>
-            <a:off x="822960" y="4261104"/>
+            <a:off x="822960" y="1463040"/>
             <a:ext cx="118872" cy="640080"/>
           </a:xfrm>
           <a:prstGeom prst="rect">
@@ -24398,7 +27893,7 @@
         </p:nvSpPr>
         <p:spPr>
           <a:xfrm>
-            <a:off x="1143000" y="4215384"/>
+            <a:off x="1143000" y="1417320"/>
             <a:ext cx="10241280" cy="365760"/>
           </a:xfrm>
           <a:prstGeom prst="rect">
@@ -24424,7 +27919,7 @@
                 </a:solidFill>
                 <a:latin typeface="Avenir Next"/>
               </a:rPr>
-              <a:t>Tested, and honest about its limits</a:t>
+              <a:t>A disciplined factor portfolio</a:t>
             </a:r>
           </a:p>
         </p:txBody>
@@ -24437,7 +27932,7 @@
         </p:nvSpPr>
         <p:spPr>
           <a:xfrm>
-            <a:off x="1143000" y="4599432"/>
+            <a:off x="1143000" y="1801368"/>
             <a:ext cx="10241280" cy="502920"/>
           </a:xfrm>
           <a:prstGeom prst="rect">
@@ -24463,7 +27958,7 @@
                 </a:solidFill>
                 <a:latin typeface="Avenir Next"/>
               </a:rPr>
-              <a:t>Strong risk-adjusted returns in a rigorous simulation, with the assumptions stated.</a:t>
+              <a:t>Four proven traits, computed transparently and weighted equally.</a:t>
             </a:r>
           </a:p>
         </p:txBody>
@@ -24476,7 +27971,7 @@
         </p:nvSpPr>
         <p:spPr>
           <a:xfrm>
-            <a:off x="822960" y="5193792"/>
+            <a:off x="822960" y="2395728"/>
             <a:ext cx="118872" cy="640080"/>
           </a:xfrm>
           <a:prstGeom prst="rect">
@@ -24520,6 +28015,372 @@
         </p:nvSpPr>
         <p:spPr>
           <a:xfrm>
+            <a:off x="1143000" y="2350008"/>
+            <a:ext cx="10241280" cy="365760"/>
+          </a:xfrm>
+          <a:prstGeom prst="rect">
+            <a:avLst/>
+          </a:prstGeom>
+          <a:noFill/>
+        </p:spPr>
+        <p:txBody>
+          <a:bodyPr wrap="square" anchor="t" lIns="0" rIns="0" tIns="0" bIns="0">
+            <a:spAutoFit/>
+          </a:bodyPr>
+          <a:lstStyle/>
+          <a:p>
+            <a:pPr algn="l">
+              <a:lnSpc>
+                <a:spcPct val="110000"/>
+              </a:lnSpc>
+            </a:pPr>
+            <a:r>
+              <a:rPr sz="1800" b="1">
+                <a:solidFill>
+                  <a:srgbClr val="FFFFFF"/>
+                </a:solidFill>
+                <a:latin typeface="Avenir Next"/>
+              </a:rPr>
+              <a:t>An income overlay that lowers risk</a:t>
+            </a:r>
+          </a:p>
+        </p:txBody>
+      </p:sp>
+      <p:sp>
+        <p:nvSpPr>
+          <p:cNvPr id="19" name="TextBox 18"/>
+          <p:cNvSpPr txBox="1"/>
+          <p:nvPr/>
+        </p:nvSpPr>
+        <p:spPr>
+          <a:xfrm>
+            <a:off x="1143000" y="2734056"/>
+            <a:ext cx="10241280" cy="502920"/>
+          </a:xfrm>
+          <a:prstGeom prst="rect">
+            <a:avLst/>
+          </a:prstGeom>
+          <a:noFill/>
+        </p:spPr>
+        <p:txBody>
+          <a:bodyPr wrap="square" anchor="t" lIns="0" rIns="0" tIns="0" bIns="0">
+            <a:spAutoFit/>
+          </a:bodyPr>
+          <a:lstStyle/>
+          <a:p>
+            <a:pPr algn="l">
+              <a:lnSpc>
+                <a:spcPct val="105000"/>
+              </a:lnSpc>
+            </a:pPr>
+            <a:r>
+              <a:rPr sz="1300" b="0">
+                <a:solidFill>
+                  <a:srgbClr val="A9B7C4"/>
+                </a:solidFill>
+                <a:latin typeface="Avenir Next"/>
+              </a:rPr>
+              <a:t>Covered calls harvest a persistent premium and smooth the ride.</a:t>
+            </a:r>
+          </a:p>
+        </p:txBody>
+      </p:sp>
+      <p:sp>
+        <p:nvSpPr>
+          <p:cNvPr id="20" name="Rectangle 19"/>
+          <p:cNvSpPr/>
+          <p:nvPr/>
+        </p:nvSpPr>
+        <p:spPr>
+          <a:xfrm>
+            <a:off x="822960" y="3328415"/>
+            <a:ext cx="118872" cy="640080"/>
+          </a:xfrm>
+          <a:prstGeom prst="rect">
+            <a:avLst/>
+          </a:prstGeom>
+          <a:solidFill>
+            <a:srgbClr val="14B8A6"/>
+          </a:solidFill>
+          <a:ln>
+            <a:noFill/>
+          </a:ln>
+          <a:effectLst/>
+        </p:spPr>
+        <p:style>
+          <a:lnRef idx="1">
+            <a:schemeClr val="accent1"/>
+          </a:lnRef>
+          <a:fillRef idx="3">
+            <a:schemeClr val="accent1"/>
+          </a:fillRef>
+          <a:effectRef idx="2">
+            <a:schemeClr val="accent1"/>
+          </a:effectRef>
+          <a:fontRef idx="minor">
+            <a:schemeClr val="lt1"/>
+          </a:fontRef>
+        </p:style>
+        <p:txBody>
+          <a:bodyPr rtlCol="0" anchor="ctr"/>
+          <a:lstStyle/>
+          <a:p>
+            <a:pPr algn="ctr"/>
+          </a:p>
+        </p:txBody>
+      </p:sp>
+      <p:sp>
+        <p:nvSpPr>
+          <p:cNvPr id="21" name="TextBox 20"/>
+          <p:cNvSpPr txBox="1"/>
+          <p:nvPr/>
+        </p:nvSpPr>
+        <p:spPr>
+          <a:xfrm>
+            <a:off x="1143000" y="3282696"/>
+            <a:ext cx="10241280" cy="365760"/>
+          </a:xfrm>
+          <a:prstGeom prst="rect">
+            <a:avLst/>
+          </a:prstGeom>
+          <a:noFill/>
+        </p:spPr>
+        <p:txBody>
+          <a:bodyPr wrap="square" anchor="t" lIns="0" rIns="0" tIns="0" bIns="0">
+            <a:spAutoFit/>
+          </a:bodyPr>
+          <a:lstStyle/>
+          <a:p>
+            <a:pPr algn="l">
+              <a:lnSpc>
+                <a:spcPct val="110000"/>
+              </a:lnSpc>
+            </a:pPr>
+            <a:r>
+              <a:rPr sz="1800" b="1">
+                <a:solidFill>
+                  <a:srgbClr val="FFFFFF"/>
+                </a:solidFill>
+                <a:latin typeface="Avenir Next"/>
+              </a:rPr>
+              <a:t>Built for capital preservation</a:t>
+            </a:r>
+          </a:p>
+        </p:txBody>
+      </p:sp>
+      <p:sp>
+        <p:nvSpPr>
+          <p:cNvPr id="22" name="TextBox 21"/>
+          <p:cNvSpPr txBox="1"/>
+          <p:nvPr/>
+        </p:nvSpPr>
+        <p:spPr>
+          <a:xfrm>
+            <a:off x="1143000" y="3666744"/>
+            <a:ext cx="10241280" cy="502920"/>
+          </a:xfrm>
+          <a:prstGeom prst="rect">
+            <a:avLst/>
+          </a:prstGeom>
+          <a:noFill/>
+        </p:spPr>
+        <p:txBody>
+          <a:bodyPr wrap="square" anchor="t" lIns="0" rIns="0" tIns="0" bIns="0">
+            <a:spAutoFit/>
+          </a:bodyPr>
+          <a:lstStyle/>
+          <a:p>
+            <a:pPr algn="l">
+              <a:lnSpc>
+                <a:spcPct val="105000"/>
+              </a:lnSpc>
+            </a:pPr>
+            <a:r>
+              <a:rPr sz="1300" b="0">
+                <a:solidFill>
+                  <a:srgbClr val="A9B7C4"/>
+                </a:solidFill>
+                <a:latin typeface="Avenir Next"/>
+              </a:rPr>
+              <a:t>Firm diversification limits, a pre-trade risk check, and an emergency stop.</a:t>
+            </a:r>
+          </a:p>
+        </p:txBody>
+      </p:sp>
+      <p:sp>
+        <p:nvSpPr>
+          <p:cNvPr id="23" name="Rectangle 22"/>
+          <p:cNvSpPr/>
+          <p:nvPr/>
+        </p:nvSpPr>
+        <p:spPr>
+          <a:xfrm>
+            <a:off x="822960" y="4261104"/>
+            <a:ext cx="118872" cy="640080"/>
+          </a:xfrm>
+          <a:prstGeom prst="rect">
+            <a:avLst/>
+          </a:prstGeom>
+          <a:solidFill>
+            <a:srgbClr val="14B8A6"/>
+          </a:solidFill>
+          <a:ln>
+            <a:noFill/>
+          </a:ln>
+          <a:effectLst/>
+        </p:spPr>
+        <p:style>
+          <a:lnRef idx="1">
+            <a:schemeClr val="accent1"/>
+          </a:lnRef>
+          <a:fillRef idx="3">
+            <a:schemeClr val="accent1"/>
+          </a:fillRef>
+          <a:effectRef idx="2">
+            <a:schemeClr val="accent1"/>
+          </a:effectRef>
+          <a:fontRef idx="minor">
+            <a:schemeClr val="lt1"/>
+          </a:fontRef>
+        </p:style>
+        <p:txBody>
+          <a:bodyPr rtlCol="0" anchor="ctr"/>
+          <a:lstStyle/>
+          <a:p>
+            <a:pPr algn="ctr"/>
+          </a:p>
+        </p:txBody>
+      </p:sp>
+      <p:sp>
+        <p:nvSpPr>
+          <p:cNvPr id="24" name="TextBox 23"/>
+          <p:cNvSpPr txBox="1"/>
+          <p:nvPr/>
+        </p:nvSpPr>
+        <p:spPr>
+          <a:xfrm>
+            <a:off x="1143000" y="4215384"/>
+            <a:ext cx="10241280" cy="365760"/>
+          </a:xfrm>
+          <a:prstGeom prst="rect">
+            <a:avLst/>
+          </a:prstGeom>
+          <a:noFill/>
+        </p:spPr>
+        <p:txBody>
+          <a:bodyPr wrap="square" anchor="t" lIns="0" rIns="0" tIns="0" bIns="0">
+            <a:spAutoFit/>
+          </a:bodyPr>
+          <a:lstStyle/>
+          <a:p>
+            <a:pPr algn="l">
+              <a:lnSpc>
+                <a:spcPct val="110000"/>
+              </a:lnSpc>
+            </a:pPr>
+            <a:r>
+              <a:rPr sz="1800" b="1">
+                <a:solidFill>
+                  <a:srgbClr val="FFFFFF"/>
+                </a:solidFill>
+                <a:latin typeface="Avenir Next"/>
+              </a:rPr>
+              <a:t>Tested, and honest about its limits</a:t>
+            </a:r>
+          </a:p>
+        </p:txBody>
+      </p:sp>
+      <p:sp>
+        <p:nvSpPr>
+          <p:cNvPr id="25" name="TextBox 24"/>
+          <p:cNvSpPr txBox="1"/>
+          <p:nvPr/>
+        </p:nvSpPr>
+        <p:spPr>
+          <a:xfrm>
+            <a:off x="1143000" y="4599432"/>
+            <a:ext cx="10241280" cy="502920"/>
+          </a:xfrm>
+          <a:prstGeom prst="rect">
+            <a:avLst/>
+          </a:prstGeom>
+          <a:noFill/>
+        </p:spPr>
+        <p:txBody>
+          <a:bodyPr wrap="square" anchor="t" lIns="0" rIns="0" tIns="0" bIns="0">
+            <a:spAutoFit/>
+          </a:bodyPr>
+          <a:lstStyle/>
+          <a:p>
+            <a:pPr algn="l">
+              <a:lnSpc>
+                <a:spcPct val="105000"/>
+              </a:lnSpc>
+            </a:pPr>
+            <a:r>
+              <a:rPr sz="1300" b="0">
+                <a:solidFill>
+                  <a:srgbClr val="A9B7C4"/>
+                </a:solidFill>
+                <a:latin typeface="Avenir Next"/>
+              </a:rPr>
+              <a:t>Strong risk-adjusted returns in a rigorous simulation, with the assumptions stated.</a:t>
+            </a:r>
+          </a:p>
+        </p:txBody>
+      </p:sp>
+      <p:sp>
+        <p:nvSpPr>
+          <p:cNvPr id="26" name="Rectangle 25"/>
+          <p:cNvSpPr/>
+          <p:nvPr/>
+        </p:nvSpPr>
+        <p:spPr>
+          <a:xfrm>
+            <a:off x="822960" y="5193792"/>
+            <a:ext cx="118872" cy="640080"/>
+          </a:xfrm>
+          <a:prstGeom prst="rect">
+            <a:avLst/>
+          </a:prstGeom>
+          <a:solidFill>
+            <a:srgbClr val="14B8A6"/>
+          </a:solidFill>
+          <a:ln>
+            <a:noFill/>
+          </a:ln>
+          <a:effectLst/>
+        </p:spPr>
+        <p:style>
+          <a:lnRef idx="1">
+            <a:schemeClr val="accent1"/>
+          </a:lnRef>
+          <a:fillRef idx="3">
+            <a:schemeClr val="accent1"/>
+          </a:fillRef>
+          <a:effectRef idx="2">
+            <a:schemeClr val="accent1"/>
+          </a:effectRef>
+          <a:fontRef idx="minor">
+            <a:schemeClr val="lt1"/>
+          </a:fontRef>
+        </p:style>
+        <p:txBody>
+          <a:bodyPr rtlCol="0" anchor="ctr"/>
+          <a:lstStyle/>
+          <a:p>
+            <a:pPr algn="ctr"/>
+          </a:p>
+        </p:txBody>
+      </p:sp>
+      <p:sp>
+        <p:nvSpPr>
+          <p:cNvPr id="27" name="TextBox 26"/>
+          <p:cNvSpPr txBox="1"/>
+          <p:nvPr/>
+        </p:nvSpPr>
+        <p:spPr>
+          <a:xfrm>
             <a:off x="1143000" y="5148072"/>
             <a:ext cx="10241280" cy="365760"/>
           </a:xfrm>
@@ -24553,7 +28414,7 @@
       </p:sp>
       <p:sp>
         <p:nvSpPr>
-          <p:cNvPr id="19" name="TextBox 18"/>
+          <p:cNvPr id="28" name="TextBox 27"/>
           <p:cNvSpPr txBox="1"/>
           <p:nvPr/>
         </p:nvSpPr>
@@ -24592,7 +28453,7 @@
       </p:sp>
       <p:sp>
         <p:nvSpPr>
-          <p:cNvPr id="20" name="TextBox 19"/>
+          <p:cNvPr id="29" name="TextBox 28"/>
           <p:cNvSpPr txBox="1"/>
           <p:nvPr/>
         </p:nvSpPr>
@@ -24631,7 +28492,7 @@
       </p:sp>
       <p:sp>
         <p:nvSpPr>
-          <p:cNvPr id="21" name="TextBox 20"/>
+          <p:cNvPr id="30" name="TextBox 29"/>
           <p:cNvSpPr txBox="1"/>
           <p:nvPr/>
         </p:nvSpPr>
@@ -24732,55 +28593,60 @@
       </p:sp>
       <p:sp>
         <p:nvSpPr>
-          <p:cNvPr id="3" name="TextBox 2"/>
-          <p:cNvSpPr txBox="1"/>
-          <p:nvPr/>
-        </p:nvSpPr>
-        <p:spPr>
-          <a:xfrm>
-            <a:off x="548640" y="914400"/>
-            <a:ext cx="6400800" cy="2926080"/>
-          </a:xfrm>
-          <a:prstGeom prst="rect">
-            <a:avLst/>
-          </a:prstGeom>
-          <a:noFill/>
-        </p:spPr>
-        <p:txBody>
-          <a:bodyPr wrap="square" anchor="t" lIns="0" rIns="0" tIns="0" bIns="0">
-            <a:spAutoFit/>
-          </a:bodyPr>
-          <a:lstStyle/>
-          <a:p>
-            <a:pPr algn="l">
-              <a:lnSpc>
-                <a:spcPct val="110000"/>
-              </a:lnSpc>
-            </a:pPr>
-            <a:r>
-              <a:rPr sz="20000" b="1">
-                <a:solidFill>
-                  <a:srgbClr val="2A4760"/>
-                </a:solidFill>
-                <a:latin typeface="Avenir Next"/>
-              </a:rPr>
-              <a:t>10</a:t>
-            </a:r>
-          </a:p>
-        </p:txBody>
-      </p:sp>
-      <p:sp>
-        <p:nvSpPr>
-          <p:cNvPr id="4" name="Rectangle 3"/>
+          <p:cNvPr id="3" name="Oval 2"/>
           <p:cNvSpPr/>
           <p:nvPr/>
         </p:nvSpPr>
         <p:spPr>
           <a:xfrm>
-            <a:off x="868680" y="3977639"/>
-            <a:ext cx="2194560" cy="38100"/>
-          </a:xfrm>
-          <a:prstGeom prst="rect">
+            <a:off x="10972800" y="566928"/>
+            <a:ext cx="137160" cy="137160"/>
+          </a:xfrm>
+          <a:prstGeom prst="ellipse">
+            <a:avLst/>
+          </a:prstGeom>
+          <a:solidFill>
+            <a:srgbClr val="3A4C63"/>
+          </a:solidFill>
+          <a:ln>
+            <a:noFill/>
+          </a:ln>
+          <a:effectLst/>
+        </p:spPr>
+        <p:style>
+          <a:lnRef idx="1">
+            <a:schemeClr val="accent1"/>
+          </a:lnRef>
+          <a:fillRef idx="3">
+            <a:schemeClr val="accent1"/>
+          </a:fillRef>
+          <a:effectRef idx="2">
+            <a:schemeClr val="accent1"/>
+          </a:effectRef>
+          <a:fontRef idx="minor">
+            <a:schemeClr val="lt1"/>
+          </a:fontRef>
+        </p:style>
+        <p:txBody>
+          <a:bodyPr rtlCol="0" anchor="ctr"/>
+          <a:lstStyle/>
+          <a:p>
+            <a:pPr algn="ctr"/>
+          </a:p>
+        </p:txBody>
+      </p:sp>
+      <p:sp>
+        <p:nvSpPr>
+          <p:cNvPr id="4" name="Oval 3"/>
+          <p:cNvSpPr/>
+          <p:nvPr/>
+        </p:nvSpPr>
+        <p:spPr>
+          <a:xfrm>
+            <a:off x="11210544" y="566928"/>
+            <a:ext cx="137160" cy="137160"/>
+          </a:xfrm>
+          <a:prstGeom prst="ellipse">
             <a:avLst/>
           </a:prstGeom>
           <a:solidFill>
@@ -24815,7 +28681,398 @@
       </p:sp>
       <p:sp>
         <p:nvSpPr>
-          <p:cNvPr id="5" name="TextBox 4"/>
+          <p:cNvPr id="5" name="Oval 4"/>
+          <p:cNvSpPr/>
+          <p:nvPr/>
+        </p:nvSpPr>
+        <p:spPr>
+          <a:xfrm>
+            <a:off x="11448288" y="566928"/>
+            <a:ext cx="137160" cy="137160"/>
+          </a:xfrm>
+          <a:prstGeom prst="ellipse">
+            <a:avLst/>
+          </a:prstGeom>
+          <a:solidFill>
+            <a:srgbClr val="3A4C63"/>
+          </a:solidFill>
+          <a:ln>
+            <a:noFill/>
+          </a:ln>
+          <a:effectLst/>
+        </p:spPr>
+        <p:style>
+          <a:lnRef idx="1">
+            <a:schemeClr val="accent1"/>
+          </a:lnRef>
+          <a:fillRef idx="3">
+            <a:schemeClr val="accent1"/>
+          </a:fillRef>
+          <a:effectRef idx="2">
+            <a:schemeClr val="accent1"/>
+          </a:effectRef>
+          <a:fontRef idx="minor">
+            <a:schemeClr val="lt1"/>
+          </a:fontRef>
+        </p:style>
+        <p:txBody>
+          <a:bodyPr rtlCol="0" anchor="ctr"/>
+          <a:lstStyle/>
+          <a:p>
+            <a:pPr algn="ctr"/>
+          </a:p>
+        </p:txBody>
+      </p:sp>
+      <p:sp>
+        <p:nvSpPr>
+          <p:cNvPr id="6" name="Oval 5"/>
+          <p:cNvSpPr/>
+          <p:nvPr/>
+        </p:nvSpPr>
+        <p:spPr>
+          <a:xfrm>
+            <a:off x="10972800" y="804672"/>
+            <a:ext cx="137160" cy="137160"/>
+          </a:xfrm>
+          <a:prstGeom prst="ellipse">
+            <a:avLst/>
+          </a:prstGeom>
+          <a:solidFill>
+            <a:srgbClr val="3A4C63"/>
+          </a:solidFill>
+          <a:ln>
+            <a:noFill/>
+          </a:ln>
+          <a:effectLst/>
+        </p:spPr>
+        <p:style>
+          <a:lnRef idx="1">
+            <a:schemeClr val="accent1"/>
+          </a:lnRef>
+          <a:fillRef idx="3">
+            <a:schemeClr val="accent1"/>
+          </a:fillRef>
+          <a:effectRef idx="2">
+            <a:schemeClr val="accent1"/>
+          </a:effectRef>
+          <a:fontRef idx="minor">
+            <a:schemeClr val="lt1"/>
+          </a:fontRef>
+        </p:style>
+        <p:txBody>
+          <a:bodyPr rtlCol="0" anchor="ctr"/>
+          <a:lstStyle/>
+          <a:p>
+            <a:pPr algn="ctr"/>
+          </a:p>
+        </p:txBody>
+      </p:sp>
+      <p:sp>
+        <p:nvSpPr>
+          <p:cNvPr id="7" name="Oval 6"/>
+          <p:cNvSpPr/>
+          <p:nvPr/>
+        </p:nvSpPr>
+        <p:spPr>
+          <a:xfrm>
+            <a:off x="11210544" y="804672"/>
+            <a:ext cx="137160" cy="137160"/>
+          </a:xfrm>
+          <a:prstGeom prst="ellipse">
+            <a:avLst/>
+          </a:prstGeom>
+          <a:solidFill>
+            <a:srgbClr val="14B8A6"/>
+          </a:solidFill>
+          <a:ln>
+            <a:noFill/>
+          </a:ln>
+          <a:effectLst/>
+        </p:spPr>
+        <p:style>
+          <a:lnRef idx="1">
+            <a:schemeClr val="accent1"/>
+          </a:lnRef>
+          <a:fillRef idx="3">
+            <a:schemeClr val="accent1"/>
+          </a:fillRef>
+          <a:effectRef idx="2">
+            <a:schemeClr val="accent1"/>
+          </a:effectRef>
+          <a:fontRef idx="minor">
+            <a:schemeClr val="lt1"/>
+          </a:fontRef>
+        </p:style>
+        <p:txBody>
+          <a:bodyPr rtlCol="0" anchor="ctr"/>
+          <a:lstStyle/>
+          <a:p>
+            <a:pPr algn="ctr"/>
+          </a:p>
+        </p:txBody>
+      </p:sp>
+      <p:sp>
+        <p:nvSpPr>
+          <p:cNvPr id="8" name="Oval 7"/>
+          <p:cNvSpPr/>
+          <p:nvPr/>
+        </p:nvSpPr>
+        <p:spPr>
+          <a:xfrm>
+            <a:off x="11448288" y="804672"/>
+            <a:ext cx="137160" cy="137160"/>
+          </a:xfrm>
+          <a:prstGeom prst="ellipse">
+            <a:avLst/>
+          </a:prstGeom>
+          <a:solidFill>
+            <a:srgbClr val="3A4C63"/>
+          </a:solidFill>
+          <a:ln>
+            <a:noFill/>
+          </a:ln>
+          <a:effectLst/>
+        </p:spPr>
+        <p:style>
+          <a:lnRef idx="1">
+            <a:schemeClr val="accent1"/>
+          </a:lnRef>
+          <a:fillRef idx="3">
+            <a:schemeClr val="accent1"/>
+          </a:fillRef>
+          <a:effectRef idx="2">
+            <a:schemeClr val="accent1"/>
+          </a:effectRef>
+          <a:fontRef idx="minor">
+            <a:schemeClr val="lt1"/>
+          </a:fontRef>
+        </p:style>
+        <p:txBody>
+          <a:bodyPr rtlCol="0" anchor="ctr"/>
+          <a:lstStyle/>
+          <a:p>
+            <a:pPr algn="ctr"/>
+          </a:p>
+        </p:txBody>
+      </p:sp>
+      <p:sp>
+        <p:nvSpPr>
+          <p:cNvPr id="9" name="Oval 8"/>
+          <p:cNvSpPr/>
+          <p:nvPr/>
+        </p:nvSpPr>
+        <p:spPr>
+          <a:xfrm>
+            <a:off x="10972800" y="1042416"/>
+            <a:ext cx="137160" cy="137160"/>
+          </a:xfrm>
+          <a:prstGeom prst="ellipse">
+            <a:avLst/>
+          </a:prstGeom>
+          <a:solidFill>
+            <a:srgbClr val="3A4C63"/>
+          </a:solidFill>
+          <a:ln>
+            <a:noFill/>
+          </a:ln>
+          <a:effectLst/>
+        </p:spPr>
+        <p:style>
+          <a:lnRef idx="1">
+            <a:schemeClr val="accent1"/>
+          </a:lnRef>
+          <a:fillRef idx="3">
+            <a:schemeClr val="accent1"/>
+          </a:fillRef>
+          <a:effectRef idx="2">
+            <a:schemeClr val="accent1"/>
+          </a:effectRef>
+          <a:fontRef idx="minor">
+            <a:schemeClr val="lt1"/>
+          </a:fontRef>
+        </p:style>
+        <p:txBody>
+          <a:bodyPr rtlCol="0" anchor="ctr"/>
+          <a:lstStyle/>
+          <a:p>
+            <a:pPr algn="ctr"/>
+          </a:p>
+        </p:txBody>
+      </p:sp>
+      <p:sp>
+        <p:nvSpPr>
+          <p:cNvPr id="10" name="Oval 9"/>
+          <p:cNvSpPr/>
+          <p:nvPr/>
+        </p:nvSpPr>
+        <p:spPr>
+          <a:xfrm>
+            <a:off x="11210544" y="1042416"/>
+            <a:ext cx="137160" cy="137160"/>
+          </a:xfrm>
+          <a:prstGeom prst="ellipse">
+            <a:avLst/>
+          </a:prstGeom>
+          <a:solidFill>
+            <a:srgbClr val="14B8A6"/>
+          </a:solidFill>
+          <a:ln>
+            <a:noFill/>
+          </a:ln>
+          <a:effectLst/>
+        </p:spPr>
+        <p:style>
+          <a:lnRef idx="1">
+            <a:schemeClr val="accent1"/>
+          </a:lnRef>
+          <a:fillRef idx="3">
+            <a:schemeClr val="accent1"/>
+          </a:fillRef>
+          <a:effectRef idx="2">
+            <a:schemeClr val="accent1"/>
+          </a:effectRef>
+          <a:fontRef idx="minor">
+            <a:schemeClr val="lt1"/>
+          </a:fontRef>
+        </p:style>
+        <p:txBody>
+          <a:bodyPr rtlCol="0" anchor="ctr"/>
+          <a:lstStyle/>
+          <a:p>
+            <a:pPr algn="ctr"/>
+          </a:p>
+        </p:txBody>
+      </p:sp>
+      <p:sp>
+        <p:nvSpPr>
+          <p:cNvPr id="11" name="Oval 10"/>
+          <p:cNvSpPr/>
+          <p:nvPr/>
+        </p:nvSpPr>
+        <p:spPr>
+          <a:xfrm>
+            <a:off x="11448288" y="1042416"/>
+            <a:ext cx="137160" cy="137160"/>
+          </a:xfrm>
+          <a:prstGeom prst="ellipse">
+            <a:avLst/>
+          </a:prstGeom>
+          <a:solidFill>
+            <a:srgbClr val="3A4C63"/>
+          </a:solidFill>
+          <a:ln>
+            <a:noFill/>
+          </a:ln>
+          <a:effectLst/>
+        </p:spPr>
+        <p:style>
+          <a:lnRef idx="1">
+            <a:schemeClr val="accent1"/>
+          </a:lnRef>
+          <a:fillRef idx="3">
+            <a:schemeClr val="accent1"/>
+          </a:fillRef>
+          <a:effectRef idx="2">
+            <a:schemeClr val="accent1"/>
+          </a:effectRef>
+          <a:fontRef idx="minor">
+            <a:schemeClr val="lt1"/>
+          </a:fontRef>
+        </p:style>
+        <p:txBody>
+          <a:bodyPr rtlCol="0" anchor="ctr"/>
+          <a:lstStyle/>
+          <a:p>
+            <a:pPr algn="ctr"/>
+          </a:p>
+        </p:txBody>
+      </p:sp>
+      <p:sp>
+        <p:nvSpPr>
+          <p:cNvPr id="12" name="TextBox 11"/>
+          <p:cNvSpPr txBox="1"/>
+          <p:nvPr/>
+        </p:nvSpPr>
+        <p:spPr>
+          <a:xfrm>
+            <a:off x="548640" y="914400"/>
+            <a:ext cx="6400800" cy="2926080"/>
+          </a:xfrm>
+          <a:prstGeom prst="rect">
+            <a:avLst/>
+          </a:prstGeom>
+          <a:noFill/>
+        </p:spPr>
+        <p:txBody>
+          <a:bodyPr wrap="square" anchor="t" lIns="0" rIns="0" tIns="0" bIns="0">
+            <a:spAutoFit/>
+          </a:bodyPr>
+          <a:lstStyle/>
+          <a:p>
+            <a:pPr algn="l">
+              <a:lnSpc>
+                <a:spcPct val="110000"/>
+              </a:lnSpc>
+            </a:pPr>
+            <a:r>
+              <a:rPr sz="20000" b="1">
+                <a:solidFill>
+                  <a:srgbClr val="2A4760"/>
+                </a:solidFill>
+                <a:latin typeface="Avenir Next"/>
+              </a:rPr>
+              <a:t>10</a:t>
+            </a:r>
+          </a:p>
+        </p:txBody>
+      </p:sp>
+      <p:sp>
+        <p:nvSpPr>
+          <p:cNvPr id="13" name="Rectangle 12"/>
+          <p:cNvSpPr/>
+          <p:nvPr/>
+        </p:nvSpPr>
+        <p:spPr>
+          <a:xfrm>
+            <a:off x="868680" y="3977639"/>
+            <a:ext cx="2194560" cy="38100"/>
+          </a:xfrm>
+          <a:prstGeom prst="rect">
+            <a:avLst/>
+          </a:prstGeom>
+          <a:solidFill>
+            <a:srgbClr val="14B8A6"/>
+          </a:solidFill>
+          <a:ln>
+            <a:noFill/>
+          </a:ln>
+          <a:effectLst/>
+        </p:spPr>
+        <p:style>
+          <a:lnRef idx="1">
+            <a:schemeClr val="accent1"/>
+          </a:lnRef>
+          <a:fillRef idx="3">
+            <a:schemeClr val="accent1"/>
+          </a:fillRef>
+          <a:effectRef idx="2">
+            <a:schemeClr val="accent1"/>
+          </a:effectRef>
+          <a:fontRef idx="minor">
+            <a:schemeClr val="lt1"/>
+          </a:fontRef>
+        </p:style>
+        <p:txBody>
+          <a:bodyPr rtlCol="0" anchor="ctr"/>
+          <a:lstStyle/>
+          <a:p>
+            <a:pPr algn="ctr"/>
+          </a:p>
+        </p:txBody>
+      </p:sp>
+      <p:sp>
+        <p:nvSpPr>
+          <p:cNvPr id="14" name="TextBox 13"/>
           <p:cNvSpPr txBox="1"/>
           <p:nvPr/>
         </p:nvSpPr>
@@ -24854,7 +29111,7 @@
       </p:sp>
       <p:sp>
         <p:nvSpPr>
-          <p:cNvPr id="6" name="TextBox 5"/>
+          <p:cNvPr id="15" name="TextBox 14"/>
           <p:cNvSpPr txBox="1"/>
           <p:nvPr/>
         </p:nvSpPr>
@@ -33606,55 +37863,60 @@
       </p:sp>
       <p:sp>
         <p:nvSpPr>
-          <p:cNvPr id="3" name="TextBox 2"/>
-          <p:cNvSpPr txBox="1"/>
-          <p:nvPr/>
-        </p:nvSpPr>
-        <p:spPr>
-          <a:xfrm>
-            <a:off x="548640" y="914400"/>
-            <a:ext cx="6400800" cy="2926080"/>
-          </a:xfrm>
-          <a:prstGeom prst="rect">
-            <a:avLst/>
-          </a:prstGeom>
-          <a:noFill/>
-        </p:spPr>
-        <p:txBody>
-          <a:bodyPr wrap="square" anchor="t" lIns="0" rIns="0" tIns="0" bIns="0">
-            <a:spAutoFit/>
-          </a:bodyPr>
-          <a:lstStyle/>
-          <a:p>
-            <a:pPr algn="l">
-              <a:lnSpc>
-                <a:spcPct val="110000"/>
-              </a:lnSpc>
-            </a:pPr>
-            <a:r>
-              <a:rPr sz="20000" b="1">
-                <a:solidFill>
-                  <a:srgbClr val="2A4760"/>
-                </a:solidFill>
-                <a:latin typeface="Avenir Next"/>
-              </a:rPr>
-              <a:t>02</a:t>
-            </a:r>
-          </a:p>
-        </p:txBody>
-      </p:sp>
-      <p:sp>
-        <p:nvSpPr>
-          <p:cNvPr id="4" name="Rectangle 3"/>
+          <p:cNvPr id="3" name="Oval 2"/>
           <p:cNvSpPr/>
           <p:nvPr/>
         </p:nvSpPr>
         <p:spPr>
           <a:xfrm>
-            <a:off x="868680" y="3977639"/>
-            <a:ext cx="2194560" cy="38100"/>
-          </a:xfrm>
-          <a:prstGeom prst="rect">
+            <a:off x="10972800" y="566928"/>
+            <a:ext cx="137160" cy="137160"/>
+          </a:xfrm>
+          <a:prstGeom prst="ellipse">
+            <a:avLst/>
+          </a:prstGeom>
+          <a:solidFill>
+            <a:srgbClr val="3A4C63"/>
+          </a:solidFill>
+          <a:ln>
+            <a:noFill/>
+          </a:ln>
+          <a:effectLst/>
+        </p:spPr>
+        <p:style>
+          <a:lnRef idx="1">
+            <a:schemeClr val="accent1"/>
+          </a:lnRef>
+          <a:fillRef idx="3">
+            <a:schemeClr val="accent1"/>
+          </a:fillRef>
+          <a:effectRef idx="2">
+            <a:schemeClr val="accent1"/>
+          </a:effectRef>
+          <a:fontRef idx="minor">
+            <a:schemeClr val="lt1"/>
+          </a:fontRef>
+        </p:style>
+        <p:txBody>
+          <a:bodyPr rtlCol="0" anchor="ctr"/>
+          <a:lstStyle/>
+          <a:p>
+            <a:pPr algn="ctr"/>
+          </a:p>
+        </p:txBody>
+      </p:sp>
+      <p:sp>
+        <p:nvSpPr>
+          <p:cNvPr id="4" name="Oval 3"/>
+          <p:cNvSpPr/>
+          <p:nvPr/>
+        </p:nvSpPr>
+        <p:spPr>
+          <a:xfrm>
+            <a:off x="11210544" y="566928"/>
+            <a:ext cx="137160" cy="137160"/>
+          </a:xfrm>
+          <a:prstGeom prst="ellipse">
             <a:avLst/>
           </a:prstGeom>
           <a:solidFill>
@@ -33689,7 +37951,398 @@
       </p:sp>
       <p:sp>
         <p:nvSpPr>
-          <p:cNvPr id="5" name="TextBox 4"/>
+          <p:cNvPr id="5" name="Oval 4"/>
+          <p:cNvSpPr/>
+          <p:nvPr/>
+        </p:nvSpPr>
+        <p:spPr>
+          <a:xfrm>
+            <a:off x="11448288" y="566928"/>
+            <a:ext cx="137160" cy="137160"/>
+          </a:xfrm>
+          <a:prstGeom prst="ellipse">
+            <a:avLst/>
+          </a:prstGeom>
+          <a:solidFill>
+            <a:srgbClr val="3A4C63"/>
+          </a:solidFill>
+          <a:ln>
+            <a:noFill/>
+          </a:ln>
+          <a:effectLst/>
+        </p:spPr>
+        <p:style>
+          <a:lnRef idx="1">
+            <a:schemeClr val="accent1"/>
+          </a:lnRef>
+          <a:fillRef idx="3">
+            <a:schemeClr val="accent1"/>
+          </a:fillRef>
+          <a:effectRef idx="2">
+            <a:schemeClr val="accent1"/>
+          </a:effectRef>
+          <a:fontRef idx="minor">
+            <a:schemeClr val="lt1"/>
+          </a:fontRef>
+        </p:style>
+        <p:txBody>
+          <a:bodyPr rtlCol="0" anchor="ctr"/>
+          <a:lstStyle/>
+          <a:p>
+            <a:pPr algn="ctr"/>
+          </a:p>
+        </p:txBody>
+      </p:sp>
+      <p:sp>
+        <p:nvSpPr>
+          <p:cNvPr id="6" name="Oval 5"/>
+          <p:cNvSpPr/>
+          <p:nvPr/>
+        </p:nvSpPr>
+        <p:spPr>
+          <a:xfrm>
+            <a:off x="10972800" y="804672"/>
+            <a:ext cx="137160" cy="137160"/>
+          </a:xfrm>
+          <a:prstGeom prst="ellipse">
+            <a:avLst/>
+          </a:prstGeom>
+          <a:solidFill>
+            <a:srgbClr val="3A4C63"/>
+          </a:solidFill>
+          <a:ln>
+            <a:noFill/>
+          </a:ln>
+          <a:effectLst/>
+        </p:spPr>
+        <p:style>
+          <a:lnRef idx="1">
+            <a:schemeClr val="accent1"/>
+          </a:lnRef>
+          <a:fillRef idx="3">
+            <a:schemeClr val="accent1"/>
+          </a:fillRef>
+          <a:effectRef idx="2">
+            <a:schemeClr val="accent1"/>
+          </a:effectRef>
+          <a:fontRef idx="minor">
+            <a:schemeClr val="lt1"/>
+          </a:fontRef>
+        </p:style>
+        <p:txBody>
+          <a:bodyPr rtlCol="0" anchor="ctr"/>
+          <a:lstStyle/>
+          <a:p>
+            <a:pPr algn="ctr"/>
+          </a:p>
+        </p:txBody>
+      </p:sp>
+      <p:sp>
+        <p:nvSpPr>
+          <p:cNvPr id="7" name="Oval 6"/>
+          <p:cNvSpPr/>
+          <p:nvPr/>
+        </p:nvSpPr>
+        <p:spPr>
+          <a:xfrm>
+            <a:off x="11210544" y="804672"/>
+            <a:ext cx="137160" cy="137160"/>
+          </a:xfrm>
+          <a:prstGeom prst="ellipse">
+            <a:avLst/>
+          </a:prstGeom>
+          <a:solidFill>
+            <a:srgbClr val="14B8A6"/>
+          </a:solidFill>
+          <a:ln>
+            <a:noFill/>
+          </a:ln>
+          <a:effectLst/>
+        </p:spPr>
+        <p:style>
+          <a:lnRef idx="1">
+            <a:schemeClr val="accent1"/>
+          </a:lnRef>
+          <a:fillRef idx="3">
+            <a:schemeClr val="accent1"/>
+          </a:fillRef>
+          <a:effectRef idx="2">
+            <a:schemeClr val="accent1"/>
+          </a:effectRef>
+          <a:fontRef idx="minor">
+            <a:schemeClr val="lt1"/>
+          </a:fontRef>
+        </p:style>
+        <p:txBody>
+          <a:bodyPr rtlCol="0" anchor="ctr"/>
+          <a:lstStyle/>
+          <a:p>
+            <a:pPr algn="ctr"/>
+          </a:p>
+        </p:txBody>
+      </p:sp>
+      <p:sp>
+        <p:nvSpPr>
+          <p:cNvPr id="8" name="Oval 7"/>
+          <p:cNvSpPr/>
+          <p:nvPr/>
+        </p:nvSpPr>
+        <p:spPr>
+          <a:xfrm>
+            <a:off x="11448288" y="804672"/>
+            <a:ext cx="137160" cy="137160"/>
+          </a:xfrm>
+          <a:prstGeom prst="ellipse">
+            <a:avLst/>
+          </a:prstGeom>
+          <a:solidFill>
+            <a:srgbClr val="3A4C63"/>
+          </a:solidFill>
+          <a:ln>
+            <a:noFill/>
+          </a:ln>
+          <a:effectLst/>
+        </p:spPr>
+        <p:style>
+          <a:lnRef idx="1">
+            <a:schemeClr val="accent1"/>
+          </a:lnRef>
+          <a:fillRef idx="3">
+            <a:schemeClr val="accent1"/>
+          </a:fillRef>
+          <a:effectRef idx="2">
+            <a:schemeClr val="accent1"/>
+          </a:effectRef>
+          <a:fontRef idx="minor">
+            <a:schemeClr val="lt1"/>
+          </a:fontRef>
+        </p:style>
+        <p:txBody>
+          <a:bodyPr rtlCol="0" anchor="ctr"/>
+          <a:lstStyle/>
+          <a:p>
+            <a:pPr algn="ctr"/>
+          </a:p>
+        </p:txBody>
+      </p:sp>
+      <p:sp>
+        <p:nvSpPr>
+          <p:cNvPr id="9" name="Oval 8"/>
+          <p:cNvSpPr/>
+          <p:nvPr/>
+        </p:nvSpPr>
+        <p:spPr>
+          <a:xfrm>
+            <a:off x="10972800" y="1042416"/>
+            <a:ext cx="137160" cy="137160"/>
+          </a:xfrm>
+          <a:prstGeom prst="ellipse">
+            <a:avLst/>
+          </a:prstGeom>
+          <a:solidFill>
+            <a:srgbClr val="3A4C63"/>
+          </a:solidFill>
+          <a:ln>
+            <a:noFill/>
+          </a:ln>
+          <a:effectLst/>
+        </p:spPr>
+        <p:style>
+          <a:lnRef idx="1">
+            <a:schemeClr val="accent1"/>
+          </a:lnRef>
+          <a:fillRef idx="3">
+            <a:schemeClr val="accent1"/>
+          </a:fillRef>
+          <a:effectRef idx="2">
+            <a:schemeClr val="accent1"/>
+          </a:effectRef>
+          <a:fontRef idx="minor">
+            <a:schemeClr val="lt1"/>
+          </a:fontRef>
+        </p:style>
+        <p:txBody>
+          <a:bodyPr rtlCol="0" anchor="ctr"/>
+          <a:lstStyle/>
+          <a:p>
+            <a:pPr algn="ctr"/>
+          </a:p>
+        </p:txBody>
+      </p:sp>
+      <p:sp>
+        <p:nvSpPr>
+          <p:cNvPr id="10" name="Oval 9"/>
+          <p:cNvSpPr/>
+          <p:nvPr/>
+        </p:nvSpPr>
+        <p:spPr>
+          <a:xfrm>
+            <a:off x="11210544" y="1042416"/>
+            <a:ext cx="137160" cy="137160"/>
+          </a:xfrm>
+          <a:prstGeom prst="ellipse">
+            <a:avLst/>
+          </a:prstGeom>
+          <a:solidFill>
+            <a:srgbClr val="14B8A6"/>
+          </a:solidFill>
+          <a:ln>
+            <a:noFill/>
+          </a:ln>
+          <a:effectLst/>
+        </p:spPr>
+        <p:style>
+          <a:lnRef idx="1">
+            <a:schemeClr val="accent1"/>
+          </a:lnRef>
+          <a:fillRef idx="3">
+            <a:schemeClr val="accent1"/>
+          </a:fillRef>
+          <a:effectRef idx="2">
+            <a:schemeClr val="accent1"/>
+          </a:effectRef>
+          <a:fontRef idx="minor">
+            <a:schemeClr val="lt1"/>
+          </a:fontRef>
+        </p:style>
+        <p:txBody>
+          <a:bodyPr rtlCol="0" anchor="ctr"/>
+          <a:lstStyle/>
+          <a:p>
+            <a:pPr algn="ctr"/>
+          </a:p>
+        </p:txBody>
+      </p:sp>
+      <p:sp>
+        <p:nvSpPr>
+          <p:cNvPr id="11" name="Oval 10"/>
+          <p:cNvSpPr/>
+          <p:nvPr/>
+        </p:nvSpPr>
+        <p:spPr>
+          <a:xfrm>
+            <a:off x="11448288" y="1042416"/>
+            <a:ext cx="137160" cy="137160"/>
+          </a:xfrm>
+          <a:prstGeom prst="ellipse">
+            <a:avLst/>
+          </a:prstGeom>
+          <a:solidFill>
+            <a:srgbClr val="3A4C63"/>
+          </a:solidFill>
+          <a:ln>
+            <a:noFill/>
+          </a:ln>
+          <a:effectLst/>
+        </p:spPr>
+        <p:style>
+          <a:lnRef idx="1">
+            <a:schemeClr val="accent1"/>
+          </a:lnRef>
+          <a:fillRef idx="3">
+            <a:schemeClr val="accent1"/>
+          </a:fillRef>
+          <a:effectRef idx="2">
+            <a:schemeClr val="accent1"/>
+          </a:effectRef>
+          <a:fontRef idx="minor">
+            <a:schemeClr val="lt1"/>
+          </a:fontRef>
+        </p:style>
+        <p:txBody>
+          <a:bodyPr rtlCol="0" anchor="ctr"/>
+          <a:lstStyle/>
+          <a:p>
+            <a:pPr algn="ctr"/>
+          </a:p>
+        </p:txBody>
+      </p:sp>
+      <p:sp>
+        <p:nvSpPr>
+          <p:cNvPr id="12" name="TextBox 11"/>
+          <p:cNvSpPr txBox="1"/>
+          <p:nvPr/>
+        </p:nvSpPr>
+        <p:spPr>
+          <a:xfrm>
+            <a:off x="548640" y="914400"/>
+            <a:ext cx="6400800" cy="2926080"/>
+          </a:xfrm>
+          <a:prstGeom prst="rect">
+            <a:avLst/>
+          </a:prstGeom>
+          <a:noFill/>
+        </p:spPr>
+        <p:txBody>
+          <a:bodyPr wrap="square" anchor="t" lIns="0" rIns="0" tIns="0" bIns="0">
+            <a:spAutoFit/>
+          </a:bodyPr>
+          <a:lstStyle/>
+          <a:p>
+            <a:pPr algn="l">
+              <a:lnSpc>
+                <a:spcPct val="110000"/>
+              </a:lnSpc>
+            </a:pPr>
+            <a:r>
+              <a:rPr sz="20000" b="1">
+                <a:solidFill>
+                  <a:srgbClr val="2A4760"/>
+                </a:solidFill>
+                <a:latin typeface="Avenir Next"/>
+              </a:rPr>
+              <a:t>02</a:t>
+            </a:r>
+          </a:p>
+        </p:txBody>
+      </p:sp>
+      <p:sp>
+        <p:nvSpPr>
+          <p:cNvPr id="13" name="Rectangle 12"/>
+          <p:cNvSpPr/>
+          <p:nvPr/>
+        </p:nvSpPr>
+        <p:spPr>
+          <a:xfrm>
+            <a:off x="868680" y="3977639"/>
+            <a:ext cx="2194560" cy="38100"/>
+          </a:xfrm>
+          <a:prstGeom prst="rect">
+            <a:avLst/>
+          </a:prstGeom>
+          <a:solidFill>
+            <a:srgbClr val="14B8A6"/>
+          </a:solidFill>
+          <a:ln>
+            <a:noFill/>
+          </a:ln>
+          <a:effectLst/>
+        </p:spPr>
+        <p:style>
+          <a:lnRef idx="1">
+            <a:schemeClr val="accent1"/>
+          </a:lnRef>
+          <a:fillRef idx="3">
+            <a:schemeClr val="accent1"/>
+          </a:fillRef>
+          <a:effectRef idx="2">
+            <a:schemeClr val="accent1"/>
+          </a:effectRef>
+          <a:fontRef idx="minor">
+            <a:schemeClr val="lt1"/>
+          </a:fontRef>
+        </p:style>
+        <p:txBody>
+          <a:bodyPr rtlCol="0" anchor="ctr"/>
+          <a:lstStyle/>
+          <a:p>
+            <a:pPr algn="ctr"/>
+          </a:p>
+        </p:txBody>
+      </p:sp>
+      <p:sp>
+        <p:nvSpPr>
+          <p:cNvPr id="14" name="TextBox 13"/>
           <p:cNvSpPr txBox="1"/>
           <p:nvPr/>
         </p:nvSpPr>
@@ -33728,7 +38381,7 @@
       </p:sp>
       <p:sp>
         <p:nvSpPr>
-          <p:cNvPr id="6" name="TextBox 5"/>
+          <p:cNvPr id="15" name="TextBox 14"/>
           <p:cNvSpPr txBox="1"/>
           <p:nvPr/>
         </p:nvSpPr>

--- a/presentation/Systematic-Factor-Income-Fund.pptx
+++ b/presentation/Systematic-Factor-Income-Fund.pptx
@@ -6103,8 +6103,8 @@
         </p:nvSpPr>
         <p:spPr>
           <a:xfrm>
-            <a:off x="640080" y="4224528"/>
-            <a:ext cx="5486400" cy="1234440"/>
+            <a:off x="640080" y="4087368"/>
+            <a:ext cx="5486400" cy="1600200"/>
           </a:xfrm>
           <a:prstGeom prst="roundRect">
             <a:avLst>
@@ -6151,7 +6151,7 @@
         </p:nvSpPr>
         <p:spPr>
           <a:xfrm>
-            <a:off x="914400" y="4370832"/>
+            <a:off x="914400" y="4233672"/>
             <a:ext cx="4937760" cy="274320"/>
           </a:xfrm>
           <a:prstGeom prst="rect">
@@ -6198,8 +6198,8 @@
         </p:blipFill>
         <p:spPr>
           <a:xfrm>
-            <a:off x="2568497" y="4681728"/>
-            <a:ext cx="1629565" cy="777240"/>
+            <a:off x="2683525" y="4507992"/>
+            <a:ext cx="1399509" cy="667512"/>
           </a:xfrm>
           <a:prstGeom prst="rect">
             <a:avLst/>
@@ -6208,33 +6208,77 @@
       </p:pic>
       <p:sp>
         <p:nvSpPr>
-          <p:cNvPr id="12" name="TextBox 11"/>
-          <p:cNvSpPr txBox="1"/>
-          <p:nvPr/>
-        </p:nvSpPr>
-        <p:spPr>
-          <a:xfrm>
-            <a:off x="868680" y="5641848"/>
-            <a:ext cx="5303520" cy="457200"/>
-          </a:xfrm>
-          <a:prstGeom prst="rect">
-            <a:avLst/>
-          </a:prstGeom>
-          <a:noFill/>
-        </p:spPr>
-        <p:txBody>
-          <a:bodyPr wrap="square" anchor="t" lIns="0" rIns="0" tIns="0" bIns="0">
-            <a:spAutoFit/>
-          </a:bodyPr>
-          <a:lstStyle/>
-          <a:p>
-            <a:pPr algn="l">
+          <p:cNvPr id="12" name="Rectangle 11"/>
+          <p:cNvSpPr/>
+          <p:nvPr/>
+        </p:nvSpPr>
+        <p:spPr>
+          <a:xfrm>
+            <a:off x="1143000" y="5193792"/>
+            <a:ext cx="4480560" cy="12700"/>
+          </a:xfrm>
+          <a:prstGeom prst="rect">
+            <a:avLst/>
+          </a:prstGeom>
+          <a:solidFill>
+            <a:srgbClr val="DDE4EA"/>
+          </a:solidFill>
+          <a:ln>
+            <a:noFill/>
+          </a:ln>
+          <a:effectLst/>
+        </p:spPr>
+        <p:style>
+          <a:lnRef idx="1">
+            <a:schemeClr val="accent1"/>
+          </a:lnRef>
+          <a:fillRef idx="3">
+            <a:schemeClr val="accent1"/>
+          </a:fillRef>
+          <a:effectRef idx="2">
+            <a:schemeClr val="accent1"/>
+          </a:effectRef>
+          <a:fontRef idx="minor">
+            <a:schemeClr val="lt1"/>
+          </a:fontRef>
+        </p:style>
+        <p:txBody>
+          <a:bodyPr rtlCol="0" anchor="ctr"/>
+          <a:lstStyle/>
+          <a:p>
+            <a:pPr algn="ctr"/>
+          </a:p>
+        </p:txBody>
+      </p:sp>
+      <p:sp>
+        <p:nvSpPr>
+          <p:cNvPr id="13" name="TextBox 12"/>
+          <p:cNvSpPr txBox="1"/>
+          <p:nvPr/>
+        </p:nvSpPr>
+        <p:spPr>
+          <a:xfrm>
+            <a:off x="1005840" y="5266944"/>
+            <a:ext cx="4754880" cy="384048"/>
+          </a:xfrm>
+          <a:prstGeom prst="rect">
+            <a:avLst/>
+          </a:prstGeom>
+          <a:noFill/>
+        </p:spPr>
+        <p:txBody>
+          <a:bodyPr wrap="square" anchor="ctr" lIns="0" rIns="0" tIns="0" bIns="0">
+            <a:spAutoFit/>
+          </a:bodyPr>
+          <a:lstStyle/>
+          <a:p>
+            <a:pPr algn="ctr">
               <a:lnSpc>
                 <a:spcPct val="110000"/>
               </a:lnSpc>
             </a:pPr>
             <a:r>
-              <a:rPr sz="1250" b="1">
+              <a:rPr sz="1150" b="1">
                 <a:solidFill>
                   <a:srgbClr val="0E1B2A"/>
                 </a:solidFill>
@@ -6243,16 +6287,16 @@
               <a:t>x</a:t>
             </a:r>
             <a:r>
-              <a:rPr sz="1250" b="0">
+              <a:rPr sz="1150" b="0">
                 <a:solidFill>
                   <a:srgbClr val="6B7787"/>
                 </a:solidFill>
                 <a:latin typeface="Avenir Next"/>
               </a:rPr>
-              <a:t> the company's value    </a:t>
-            </a:r>
-            <a:r>
-              <a:rPr sz="1250" b="1">
+              <a:t>  company value     </a:t>
+            </a:r>
+            <a:r>
+              <a:rPr sz="1150" b="1">
                 <a:solidFill>
                   <a:srgbClr val="0E1B2A"/>
                 </a:solidFill>
@@ -6261,16 +6305,16 @@
               <a:t>μ</a:t>
             </a:r>
             <a:r>
-              <a:rPr sz="1250" b="0">
+              <a:rPr sz="1150" b="0">
                 <a:solidFill>
                   <a:srgbClr val="6B7787"/>
                 </a:solidFill>
                 <a:latin typeface="Avenir Next"/>
               </a:rPr>
-              <a:t> the average    </a:t>
-            </a:r>
-            <a:r>
-              <a:rPr sz="1250" b="1">
+              <a:t>  the average     </a:t>
+            </a:r>
+            <a:r>
+              <a:rPr sz="1150" b="1">
                 <a:solidFill>
                   <a:srgbClr val="0E1B2A"/>
                 </a:solidFill>
@@ -6279,20 +6323,20 @@
               <a:t>σ</a:t>
             </a:r>
             <a:r>
-              <a:rPr sz="1250" b="0">
+              <a:rPr sz="1150" b="0">
                 <a:solidFill>
                   <a:srgbClr val="6B7787"/>
                 </a:solidFill>
                 <a:latin typeface="Avenir Next"/>
               </a:rPr>
-              <a:t> standard deviation</a:t>
+              <a:t>  standard deviation</a:t>
             </a:r>
           </a:p>
         </p:txBody>
       </p:sp>
       <p:pic>
         <p:nvPicPr>
-          <p:cNvPr id="13" name="Picture 12" descr="bell.png"/>
+          <p:cNvPr id="14" name="Picture 13" descr="bell.png"/>
           <p:cNvPicPr>
             <a:picLocks noChangeAspect="1"/>
           </p:cNvPicPr>
@@ -6316,7 +6360,7 @@
       </p:pic>
       <p:sp>
         <p:nvSpPr>
-          <p:cNvPr id="14" name="TextBox 13"/>
+          <p:cNvPr id="15" name="TextBox 14"/>
           <p:cNvSpPr txBox="1"/>
           <p:nvPr/>
         </p:nvSpPr>
@@ -6355,7 +6399,7 @@
       </p:sp>
       <p:sp>
         <p:nvSpPr>
-          <p:cNvPr id="15" name="TextBox 14"/>
+          <p:cNvPr id="16" name="TextBox 15"/>
           <p:cNvSpPr txBox="1"/>
           <p:nvPr/>
         </p:nvSpPr>
@@ -6801,8 +6845,8 @@
         </p:nvSpPr>
         <p:spPr>
           <a:xfrm>
-            <a:off x="640080" y="4572000"/>
-            <a:ext cx="10908792" cy="1417320"/>
+            <a:off x="640080" y="4389120"/>
+            <a:ext cx="10908792" cy="1600200"/>
           </a:xfrm>
           <a:prstGeom prst="roundRect">
             <a:avLst>
@@ -6849,7 +6893,7 @@
         </p:nvSpPr>
         <p:spPr>
           <a:xfrm>
-            <a:off x="914400" y="4718304"/>
+            <a:off x="914400" y="4535424"/>
             <a:ext cx="10360152" cy="274320"/>
           </a:xfrm>
           <a:prstGeom prst="rect">
@@ -6896,41 +6940,145 @@
         </p:blipFill>
         <p:spPr>
           <a:xfrm>
-            <a:off x="4292281" y="5029200"/>
-            <a:ext cx="3604390" cy="457199"/>
+            <a:off x="3463265" y="4809744"/>
+            <a:ext cx="5262421" cy="667512"/>
           </a:xfrm>
           <a:prstGeom prst="rect">
             <a:avLst/>
           </a:prstGeom>
         </p:spPr>
       </p:pic>
-      <p:pic>
-        <p:nvPicPr>
-          <p:cNvPr id="12" name="Picture 11" descr="f_value_w.png"/>
-          <p:cNvPicPr>
-            <a:picLocks noChangeAspect="1"/>
-          </p:cNvPicPr>
-          <p:nvPr/>
-        </p:nvPicPr>
-        <p:blipFill>
-          <a:blip r:embed="rId3"/>
-          <a:stretch>
-            <a:fillRect/>
-          </a:stretch>
-        </p:blipFill>
-        <p:spPr>
-          <a:xfrm>
-            <a:off x="5033312" y="5422392"/>
-            <a:ext cx="2122327" cy="457200"/>
-          </a:xfrm>
-          <a:prstGeom prst="rect">
-            <a:avLst/>
-          </a:prstGeom>
-        </p:spPr>
-      </p:pic>
+      <p:sp>
+        <p:nvSpPr>
+          <p:cNvPr id="12" name="Rectangle 11"/>
+          <p:cNvSpPr/>
+          <p:nvPr/>
+        </p:nvSpPr>
+        <p:spPr>
+          <a:xfrm>
+            <a:off x="1143000" y="5495544"/>
+            <a:ext cx="9902952" cy="12700"/>
+          </a:xfrm>
+          <a:prstGeom prst="rect">
+            <a:avLst/>
+          </a:prstGeom>
+          <a:solidFill>
+            <a:srgbClr val="DDE4EA"/>
+          </a:solidFill>
+          <a:ln>
+            <a:noFill/>
+          </a:ln>
+          <a:effectLst/>
+        </p:spPr>
+        <p:style>
+          <a:lnRef idx="1">
+            <a:schemeClr val="accent1"/>
+          </a:lnRef>
+          <a:fillRef idx="3">
+            <a:schemeClr val="accent1"/>
+          </a:fillRef>
+          <a:effectRef idx="2">
+            <a:schemeClr val="accent1"/>
+          </a:effectRef>
+          <a:fontRef idx="minor">
+            <a:schemeClr val="lt1"/>
+          </a:fontRef>
+        </p:style>
+        <p:txBody>
+          <a:bodyPr rtlCol="0" anchor="ctr"/>
+          <a:lstStyle/>
+          <a:p>
+            <a:pPr algn="ctr"/>
+          </a:p>
+        </p:txBody>
+      </p:sp>
       <p:sp>
         <p:nvSpPr>
           <p:cNvPr id="13" name="TextBox 12"/>
+          <p:cNvSpPr txBox="1"/>
+          <p:nvPr/>
+        </p:nvSpPr>
+        <p:spPr>
+          <a:xfrm>
+            <a:off x="1005840" y="5568696"/>
+            <a:ext cx="10177272" cy="384048"/>
+          </a:xfrm>
+          <a:prstGeom prst="rect">
+            <a:avLst/>
+          </a:prstGeom>
+          <a:noFill/>
+        </p:spPr>
+        <p:txBody>
+          <a:bodyPr wrap="square" anchor="ctr" lIns="0" rIns="0" tIns="0" bIns="0">
+            <a:spAutoFit/>
+          </a:bodyPr>
+          <a:lstStyle/>
+          <a:p>
+            <a:pPr algn="ctr">
+              <a:lnSpc>
+                <a:spcPct val="110000"/>
+              </a:lnSpc>
+            </a:pPr>
+            <a:r>
+              <a:rPr sz="1150" b="1">
+                <a:solidFill>
+                  <a:srgbClr val="0E1B2A"/>
+                </a:solidFill>
+                <a:latin typeface="Avenir Next"/>
+              </a:rPr>
+              <a:t>E/P</a:t>
+            </a:r>
+            <a:r>
+              <a:rPr sz="1150" b="0">
+                <a:solidFill>
+                  <a:srgbClr val="6B7787"/>
+                </a:solidFill>
+                <a:latin typeface="Avenir Next"/>
+              </a:rPr>
+              <a:t>  earnings yield = 1 ÷ (P/E)         </a:t>
+            </a:r>
+            <a:r>
+              <a:rPr sz="1150" b="1">
+                <a:solidFill>
+                  <a:srgbClr val="0E1B2A"/>
+                </a:solidFill>
+                <a:latin typeface="Avenir Next"/>
+              </a:rPr>
+              <a:t>B/P</a:t>
+            </a:r>
+            <a:r>
+              <a:rPr sz="1150" b="0">
+                <a:solidFill>
+                  <a:srgbClr val="6B7787"/>
+                </a:solidFill>
+                <a:latin typeface="Avenir Next"/>
+              </a:rPr>
+              <a:t>  book yield = 1 ÷ (P/B)         </a:t>
+            </a:r>
+            <a:r>
+              <a:rPr sz="1150" b="1">
+                <a:solidFill>
+                  <a:srgbClr val="0E1B2A"/>
+                </a:solidFill>
+                <a:latin typeface="Avenir Next"/>
+              </a:rPr>
+              <a:t>z</a:t>
+            </a:r>
+            <a:r>
+              <a:rPr sz="1150" b="0">
+                <a:solidFill>
+                  <a:srgbClr val="6B7787"/>
+                </a:solidFill>
+                <a:latin typeface="Avenir Next"/>
+              </a:rPr>
+              <a:t>  standardised score</a:t>
+            </a:r>
+          </a:p>
+        </p:txBody>
+      </p:sp>
+      <p:sp>
+        <p:nvSpPr>
+          <p:cNvPr id="14" name="TextBox 13"/>
           <p:cNvSpPr txBox="1"/>
           <p:nvPr/>
         </p:nvSpPr>
@@ -6978,7 +7126,7 @@
       </p:sp>
       <p:sp>
         <p:nvSpPr>
-          <p:cNvPr id="14" name="TextBox 13"/>
+          <p:cNvPr id="15" name="TextBox 14"/>
           <p:cNvSpPr txBox="1"/>
           <p:nvPr/>
         </p:nvSpPr>
@@ -7017,7 +7165,7 @@
       </p:sp>
       <p:sp>
         <p:nvSpPr>
-          <p:cNvPr id="15" name="TextBox 14"/>
+          <p:cNvPr id="16" name="TextBox 15"/>
           <p:cNvSpPr txBox="1"/>
           <p:nvPr/>
         </p:nvSpPr>
@@ -7463,8 +7611,8 @@
         </p:nvSpPr>
         <p:spPr>
           <a:xfrm>
-            <a:off x="640080" y="4709160"/>
-            <a:ext cx="10908792" cy="1280160"/>
+            <a:off x="640080" y="4389120"/>
+            <a:ext cx="10908792" cy="1600200"/>
           </a:xfrm>
           <a:prstGeom prst="roundRect">
             <a:avLst>
@@ -7511,7 +7659,7 @@
         </p:nvSpPr>
         <p:spPr>
           <a:xfrm>
-            <a:off x="914400" y="4855464"/>
+            <a:off x="914400" y="4535424"/>
             <a:ext cx="10360152" cy="274320"/>
           </a:xfrm>
           <a:prstGeom prst="rect">
@@ -7558,8 +7706,8 @@
         </p:blipFill>
         <p:spPr>
           <a:xfrm>
-            <a:off x="3966029" y="5166360"/>
-            <a:ext cx="4256893" cy="822960"/>
+            <a:off x="4368069" y="4809744"/>
+            <a:ext cx="3452813" cy="667512"/>
           </a:xfrm>
           <a:prstGeom prst="rect">
             <a:avLst/>
@@ -7568,7 +7716,153 @@
       </p:pic>
       <p:sp>
         <p:nvSpPr>
-          <p:cNvPr id="12" name="TextBox 11"/>
+          <p:cNvPr id="12" name="Rectangle 11"/>
+          <p:cNvSpPr/>
+          <p:nvPr/>
+        </p:nvSpPr>
+        <p:spPr>
+          <a:xfrm>
+            <a:off x="1143000" y="5495544"/>
+            <a:ext cx="9902952" cy="12700"/>
+          </a:xfrm>
+          <a:prstGeom prst="rect">
+            <a:avLst/>
+          </a:prstGeom>
+          <a:solidFill>
+            <a:srgbClr val="DDE4EA"/>
+          </a:solidFill>
+          <a:ln>
+            <a:noFill/>
+          </a:ln>
+          <a:effectLst/>
+        </p:spPr>
+        <p:style>
+          <a:lnRef idx="1">
+            <a:schemeClr val="accent1"/>
+          </a:lnRef>
+          <a:fillRef idx="3">
+            <a:schemeClr val="accent1"/>
+          </a:fillRef>
+          <a:effectRef idx="2">
+            <a:schemeClr val="accent1"/>
+          </a:effectRef>
+          <a:fontRef idx="minor">
+            <a:schemeClr val="lt1"/>
+          </a:fontRef>
+        </p:style>
+        <p:txBody>
+          <a:bodyPr rtlCol="0" anchor="ctr"/>
+          <a:lstStyle/>
+          <a:p>
+            <a:pPr algn="ctr"/>
+          </a:p>
+        </p:txBody>
+      </p:sp>
+      <p:sp>
+        <p:nvSpPr>
+          <p:cNvPr id="13" name="TextBox 12"/>
+          <p:cNvSpPr txBox="1"/>
+          <p:nvPr/>
+        </p:nvSpPr>
+        <p:spPr>
+          <a:xfrm>
+            <a:off x="1005840" y="5568696"/>
+            <a:ext cx="10177272" cy="384048"/>
+          </a:xfrm>
+          <a:prstGeom prst="rect">
+            <a:avLst/>
+          </a:prstGeom>
+          <a:noFill/>
+        </p:spPr>
+        <p:txBody>
+          <a:bodyPr wrap="square" anchor="ctr" lIns="0" rIns="0" tIns="0" bIns="0">
+            <a:spAutoFit/>
+          </a:bodyPr>
+          <a:lstStyle/>
+          <a:p>
+            <a:pPr algn="ctr">
+              <a:lnSpc>
+                <a:spcPct val="110000"/>
+              </a:lnSpc>
+            </a:pPr>
+            <a:r>
+              <a:rPr sz="1150" b="1">
+                <a:solidFill>
+                  <a:srgbClr val="0E1B2A"/>
+                </a:solidFill>
+                <a:latin typeface="Avenir Next"/>
+              </a:rPr>
+              <a:t>P</a:t>
+            </a:r>
+            <a:r>
+              <a:rPr sz="1150" b="0">
+                <a:solidFill>
+                  <a:srgbClr val="6B7787"/>
+                </a:solidFill>
+                <a:latin typeface="Avenir Next"/>
+              </a:rPr>
+              <a:t>  share price        </a:t>
+            </a:r>
+            <a:r>
+              <a:rPr sz="1150" b="1">
+                <a:solidFill>
+                  <a:srgbClr val="0E1B2A"/>
+                </a:solidFill>
+                <a:latin typeface="Avenir Next"/>
+              </a:rPr>
+              <a:t>t−21</a:t>
+            </a:r>
+            <a:r>
+              <a:rPr sz="1150" b="0">
+                <a:solidFill>
+                  <a:srgbClr val="6B7787"/>
+                </a:solidFill>
+                <a:latin typeface="Avenir Next"/>
+              </a:rPr>
+              <a:t>  ≈ 1 month ago        </a:t>
+            </a:r>
+            <a:r>
+              <a:rPr sz="1150" b="1">
+                <a:solidFill>
+                  <a:srgbClr val="0E1B2A"/>
+                </a:solidFill>
+                <a:latin typeface="Avenir Next"/>
+              </a:rPr>
+              <a:t>t−252</a:t>
+            </a:r>
+            <a:r>
+              <a:rPr sz="1150" b="0">
+                <a:solidFill>
+                  <a:srgbClr val="6B7787"/>
+                </a:solidFill>
+                <a:latin typeface="Avenir Next"/>
+              </a:rPr>
+              <a:t>  ≈ 1 year ago        </a:t>
+            </a:r>
+            <a:r>
+              <a:rPr sz="1150" b="1">
+                <a:solidFill>
+                  <a:srgbClr val="0E1B2A"/>
+                </a:solidFill>
+                <a:latin typeface="Avenir Next"/>
+              </a:rPr>
+              <a:t>z</a:t>
+            </a:r>
+            <a:r>
+              <a:rPr sz="1150" b="0">
+                <a:solidFill>
+                  <a:srgbClr val="6B7787"/>
+                </a:solidFill>
+                <a:latin typeface="Avenir Next"/>
+              </a:rPr>
+              <a:t>  standardised score</a:t>
+            </a:r>
+          </a:p>
+        </p:txBody>
+      </p:sp>
+      <p:sp>
+        <p:nvSpPr>
+          <p:cNvPr id="14" name="TextBox 13"/>
           <p:cNvSpPr txBox="1"/>
           <p:nvPr/>
         </p:nvSpPr>
@@ -7616,7 +7910,7 @@
       </p:sp>
       <p:sp>
         <p:nvSpPr>
-          <p:cNvPr id="13" name="TextBox 12"/>
+          <p:cNvPr id="15" name="TextBox 14"/>
           <p:cNvSpPr txBox="1"/>
           <p:nvPr/>
         </p:nvSpPr>
@@ -7655,7 +7949,7 @@
       </p:sp>
       <p:sp>
         <p:nvSpPr>
-          <p:cNvPr id="14" name="TextBox 13"/>
+          <p:cNvPr id="16" name="TextBox 15"/>
           <p:cNvSpPr txBox="1"/>
           <p:nvPr/>
         </p:nvSpPr>
@@ -8101,8 +8395,8 @@
         </p:nvSpPr>
         <p:spPr>
           <a:xfrm>
-            <a:off x="640080" y="4709160"/>
-            <a:ext cx="10908792" cy="1280160"/>
+            <a:off x="640080" y="4389120"/>
+            <a:ext cx="10908792" cy="1600200"/>
           </a:xfrm>
           <a:prstGeom prst="roundRect">
             <a:avLst>
@@ -8149,7 +8443,7 @@
         </p:nvSpPr>
         <p:spPr>
           <a:xfrm>
-            <a:off x="914400" y="4855464"/>
+            <a:off x="914400" y="4535424"/>
             <a:ext cx="10360152" cy="274320"/>
           </a:xfrm>
           <a:prstGeom prst="rect">
@@ -8196,8 +8490,8 @@
         </p:blipFill>
         <p:spPr>
           <a:xfrm>
-            <a:off x="2290905" y="5166360"/>
-            <a:ext cx="7607142" cy="822960"/>
+            <a:off x="3009357" y="4809744"/>
+            <a:ext cx="6170238" cy="667512"/>
           </a:xfrm>
           <a:prstGeom prst="rect">
             <a:avLst/>
@@ -8206,7 +8500,135 @@
       </p:pic>
       <p:sp>
         <p:nvSpPr>
-          <p:cNvPr id="12" name="TextBox 11"/>
+          <p:cNvPr id="12" name="Rectangle 11"/>
+          <p:cNvSpPr/>
+          <p:nvPr/>
+        </p:nvSpPr>
+        <p:spPr>
+          <a:xfrm>
+            <a:off x="1143000" y="5495544"/>
+            <a:ext cx="9902952" cy="12700"/>
+          </a:xfrm>
+          <a:prstGeom prst="rect">
+            <a:avLst/>
+          </a:prstGeom>
+          <a:solidFill>
+            <a:srgbClr val="DDE4EA"/>
+          </a:solidFill>
+          <a:ln>
+            <a:noFill/>
+          </a:ln>
+          <a:effectLst/>
+        </p:spPr>
+        <p:style>
+          <a:lnRef idx="1">
+            <a:schemeClr val="accent1"/>
+          </a:lnRef>
+          <a:fillRef idx="3">
+            <a:schemeClr val="accent1"/>
+          </a:fillRef>
+          <a:effectRef idx="2">
+            <a:schemeClr val="accent1"/>
+          </a:effectRef>
+          <a:fontRef idx="minor">
+            <a:schemeClr val="lt1"/>
+          </a:fontRef>
+        </p:style>
+        <p:txBody>
+          <a:bodyPr rtlCol="0" anchor="ctr"/>
+          <a:lstStyle/>
+          <a:p>
+            <a:pPr algn="ctr"/>
+          </a:p>
+        </p:txBody>
+      </p:sp>
+      <p:sp>
+        <p:nvSpPr>
+          <p:cNvPr id="13" name="TextBox 12"/>
+          <p:cNvSpPr txBox="1"/>
+          <p:nvPr/>
+        </p:nvSpPr>
+        <p:spPr>
+          <a:xfrm>
+            <a:off x="1005840" y="5568696"/>
+            <a:ext cx="10177272" cy="384048"/>
+          </a:xfrm>
+          <a:prstGeom prst="rect">
+            <a:avLst/>
+          </a:prstGeom>
+          <a:noFill/>
+        </p:spPr>
+        <p:txBody>
+          <a:bodyPr wrap="square" anchor="ctr" lIns="0" rIns="0" tIns="0" bIns="0">
+            <a:spAutoFit/>
+          </a:bodyPr>
+          <a:lstStyle/>
+          <a:p>
+            <a:pPr algn="ctr">
+              <a:lnSpc>
+                <a:spcPct val="110000"/>
+              </a:lnSpc>
+            </a:pPr>
+            <a:r>
+              <a:rPr sz="1150" b="1">
+                <a:solidFill>
+                  <a:srgbClr val="0E1B2A"/>
+                </a:solidFill>
+                <a:latin typeface="Avenir Next"/>
+              </a:rPr>
+              <a:t>ROE</a:t>
+            </a:r>
+            <a:r>
+              <a:rPr sz="1150" b="0">
+                <a:solidFill>
+                  <a:srgbClr val="6B7787"/>
+                </a:solidFill>
+                <a:latin typeface="Avenir Next"/>
+              </a:rPr>
+              <a:t>  return on equity         </a:t>
+            </a:r>
+            <a:r>
+              <a:rPr sz="1150" b="1">
+                <a:solidFill>
+                  <a:srgbClr val="0E1B2A"/>
+                </a:solidFill>
+                <a:latin typeface="Avenir Next"/>
+              </a:rPr>
+              <a:t>margin</a:t>
+            </a:r>
+            <a:r>
+              <a:rPr sz="1150" b="0">
+                <a:solidFill>
+                  <a:srgbClr val="6B7787"/>
+                </a:solidFill>
+                <a:latin typeface="Avenir Next"/>
+              </a:rPr>
+              <a:t>  gross margin         </a:t>
+            </a:r>
+            <a:r>
+              <a:rPr sz="1150" b="1">
+                <a:solidFill>
+                  <a:srgbClr val="0E1B2A"/>
+                </a:solidFill>
+                <a:latin typeface="Avenir Next"/>
+              </a:rPr>
+              <a:t>z</a:t>
+            </a:r>
+            <a:r>
+              <a:rPr sz="1150" b="0">
+                <a:solidFill>
+                  <a:srgbClr val="6B7787"/>
+                </a:solidFill>
+                <a:latin typeface="Avenir Next"/>
+              </a:rPr>
+              <a:t>  standardised score</a:t>
+            </a:r>
+          </a:p>
+        </p:txBody>
+      </p:sp>
+      <p:sp>
+        <p:nvSpPr>
+          <p:cNvPr id="14" name="TextBox 13"/>
           <p:cNvSpPr txBox="1"/>
           <p:nvPr/>
         </p:nvSpPr>
@@ -8254,7 +8676,7 @@
       </p:sp>
       <p:sp>
         <p:nvSpPr>
-          <p:cNvPr id="13" name="TextBox 12"/>
+          <p:cNvPr id="15" name="TextBox 14"/>
           <p:cNvSpPr txBox="1"/>
           <p:nvPr/>
         </p:nvSpPr>
@@ -8293,7 +8715,7 @@
       </p:sp>
       <p:sp>
         <p:nvSpPr>
-          <p:cNvPr id="14" name="TextBox 13"/>
+          <p:cNvPr id="16" name="TextBox 15"/>
           <p:cNvSpPr txBox="1"/>
           <p:nvPr/>
         </p:nvSpPr>
@@ -8739,8 +9161,8 @@
         </p:nvSpPr>
         <p:spPr>
           <a:xfrm>
-            <a:off x="640080" y="4709160"/>
-            <a:ext cx="10908792" cy="1280160"/>
+            <a:off x="640080" y="4389120"/>
+            <a:ext cx="10908792" cy="1600200"/>
           </a:xfrm>
           <a:prstGeom prst="roundRect">
             <a:avLst>
@@ -8787,7 +9209,7 @@
         </p:nvSpPr>
         <p:spPr>
           <a:xfrm>
-            <a:off x="914400" y="4855464"/>
+            <a:off x="914400" y="4535424"/>
             <a:ext cx="10360152" cy="274320"/>
           </a:xfrm>
           <a:prstGeom prst="rect">
@@ -8834,8 +9256,8 @@
         </p:blipFill>
         <p:spPr>
           <a:xfrm>
-            <a:off x="3624100" y="5166360"/>
-            <a:ext cx="4940752" cy="822960"/>
+            <a:off x="4090726" y="4809744"/>
+            <a:ext cx="4007499" cy="667512"/>
           </a:xfrm>
           <a:prstGeom prst="rect">
             <a:avLst/>
@@ -8844,7 +9266,117 @@
       </p:pic>
       <p:sp>
         <p:nvSpPr>
-          <p:cNvPr id="12" name="TextBox 11"/>
+          <p:cNvPr id="12" name="Rectangle 11"/>
+          <p:cNvSpPr/>
+          <p:nvPr/>
+        </p:nvSpPr>
+        <p:spPr>
+          <a:xfrm>
+            <a:off x="1143000" y="5495544"/>
+            <a:ext cx="9902952" cy="12700"/>
+          </a:xfrm>
+          <a:prstGeom prst="rect">
+            <a:avLst/>
+          </a:prstGeom>
+          <a:solidFill>
+            <a:srgbClr val="DDE4EA"/>
+          </a:solidFill>
+          <a:ln>
+            <a:noFill/>
+          </a:ln>
+          <a:effectLst/>
+        </p:spPr>
+        <p:style>
+          <a:lnRef idx="1">
+            <a:schemeClr val="accent1"/>
+          </a:lnRef>
+          <a:fillRef idx="3">
+            <a:schemeClr val="accent1"/>
+          </a:fillRef>
+          <a:effectRef idx="2">
+            <a:schemeClr val="accent1"/>
+          </a:effectRef>
+          <a:fontRef idx="minor">
+            <a:schemeClr val="lt1"/>
+          </a:fontRef>
+        </p:style>
+        <p:txBody>
+          <a:bodyPr rtlCol="0" anchor="ctr"/>
+          <a:lstStyle/>
+          <a:p>
+            <a:pPr algn="ctr"/>
+          </a:p>
+        </p:txBody>
+      </p:sp>
+      <p:sp>
+        <p:nvSpPr>
+          <p:cNvPr id="13" name="TextBox 12"/>
+          <p:cNvSpPr txBox="1"/>
+          <p:nvPr/>
+        </p:nvSpPr>
+        <p:spPr>
+          <a:xfrm>
+            <a:off x="1005840" y="5568696"/>
+            <a:ext cx="10177272" cy="384048"/>
+          </a:xfrm>
+          <a:prstGeom prst="rect">
+            <a:avLst/>
+          </a:prstGeom>
+          <a:noFill/>
+        </p:spPr>
+        <p:txBody>
+          <a:bodyPr wrap="square" anchor="ctr" lIns="0" rIns="0" tIns="0" bIns="0">
+            <a:spAutoFit/>
+          </a:bodyPr>
+          <a:lstStyle/>
+          <a:p>
+            <a:pPr algn="ctr">
+              <a:lnSpc>
+                <a:spcPct val="110000"/>
+              </a:lnSpc>
+            </a:pPr>
+            <a:r>
+              <a:rPr sz="1150" b="1">
+                <a:solidFill>
+                  <a:srgbClr val="0E1B2A"/>
+                </a:solidFill>
+                <a:latin typeface="Avenir Next"/>
+              </a:rPr>
+              <a:t>σ</a:t>
+            </a:r>
+            <a:r>
+              <a:rPr sz="1150" b="0">
+                <a:solidFill>
+                  <a:srgbClr val="6B7787"/>
+                </a:solidFill>
+                <a:latin typeface="Avenir Next"/>
+              </a:rPr>
+              <a:t>  volatility = the size of daily price swings         </a:t>
+            </a:r>
+            <a:r>
+              <a:rPr sz="1150" b="1">
+                <a:solidFill>
+                  <a:srgbClr val="0E1B2A"/>
+                </a:solidFill>
+                <a:latin typeface="Avenir Next"/>
+              </a:rPr>
+              <a:t>z</a:t>
+            </a:r>
+            <a:r>
+              <a:rPr sz="1150" b="0">
+                <a:solidFill>
+                  <a:srgbClr val="6B7787"/>
+                </a:solidFill>
+                <a:latin typeface="Avenir Next"/>
+              </a:rPr>
+              <a:t>  standardised score</a:t>
+            </a:r>
+          </a:p>
+        </p:txBody>
+      </p:sp>
+      <p:sp>
+        <p:nvSpPr>
+          <p:cNvPr id="14" name="TextBox 13"/>
           <p:cNvSpPr txBox="1"/>
           <p:nvPr/>
         </p:nvSpPr>
@@ -8892,7 +9424,7 @@
       </p:sp>
       <p:sp>
         <p:nvSpPr>
-          <p:cNvPr id="13" name="TextBox 12"/>
+          <p:cNvPr id="15" name="TextBox 14"/>
           <p:cNvSpPr txBox="1"/>
           <p:nvPr/>
         </p:nvSpPr>
@@ -8931,7 +9463,7 @@
       </p:sp>
       <p:sp>
         <p:nvSpPr>
-          <p:cNvPr id="14" name="TextBox 13"/>
+          <p:cNvPr id="16" name="TextBox 15"/>
           <p:cNvSpPr txBox="1"/>
           <p:nvPr/>
         </p:nvSpPr>
@@ -9378,7 +9910,7 @@
         <p:spPr>
           <a:xfrm>
             <a:off x="6492240" y="2670048"/>
-            <a:ext cx="5029200" cy="1371600"/>
+            <a:ext cx="5029200" cy="1554480"/>
           </a:xfrm>
           <a:prstGeom prst="roundRect">
             <a:avLst>
@@ -9472,8 +10004,8 @@
         </p:blipFill>
         <p:spPr>
           <a:xfrm>
-            <a:off x="6766559" y="3141002"/>
-            <a:ext cx="4480560" cy="886891"/>
+            <a:off x="7436200" y="3090672"/>
+            <a:ext cx="3141280" cy="621792"/>
           </a:xfrm>
           <a:prstGeom prst="rect">
             <a:avLst/>
@@ -9482,13 +10014,105 @@
       </p:pic>
       <p:sp>
         <p:nvSpPr>
-          <p:cNvPr id="12" name="TextBox 11"/>
-          <p:cNvSpPr txBox="1"/>
-          <p:nvPr/>
-        </p:nvSpPr>
-        <p:spPr>
-          <a:xfrm>
-            <a:off x="6492240" y="4270248"/>
+          <p:cNvPr id="12" name="Rectangle 11"/>
+          <p:cNvSpPr/>
+          <p:nvPr/>
+        </p:nvSpPr>
+        <p:spPr>
+          <a:xfrm>
+            <a:off x="6995159" y="3730752"/>
+            <a:ext cx="4023360" cy="12700"/>
+          </a:xfrm>
+          <a:prstGeom prst="rect">
+            <a:avLst/>
+          </a:prstGeom>
+          <a:solidFill>
+            <a:srgbClr val="DDE4EA"/>
+          </a:solidFill>
+          <a:ln>
+            <a:noFill/>
+          </a:ln>
+          <a:effectLst/>
+        </p:spPr>
+        <p:style>
+          <a:lnRef idx="1">
+            <a:schemeClr val="accent1"/>
+          </a:lnRef>
+          <a:fillRef idx="3">
+            <a:schemeClr val="accent1"/>
+          </a:fillRef>
+          <a:effectRef idx="2">
+            <a:schemeClr val="accent1"/>
+          </a:effectRef>
+          <a:fontRef idx="minor">
+            <a:schemeClr val="lt1"/>
+          </a:fontRef>
+        </p:style>
+        <p:txBody>
+          <a:bodyPr rtlCol="0" anchor="ctr"/>
+          <a:lstStyle/>
+          <a:p>
+            <a:pPr algn="ctr"/>
+          </a:p>
+        </p:txBody>
+      </p:sp>
+      <p:sp>
+        <p:nvSpPr>
+          <p:cNvPr id="13" name="TextBox 12"/>
+          <p:cNvSpPr txBox="1"/>
+          <p:nvPr/>
+        </p:nvSpPr>
+        <p:spPr>
+          <a:xfrm>
+            <a:off x="6858000" y="3803904"/>
+            <a:ext cx="4297680" cy="384048"/>
+          </a:xfrm>
+          <a:prstGeom prst="rect">
+            <a:avLst/>
+          </a:prstGeom>
+          <a:noFill/>
+        </p:spPr>
+        <p:txBody>
+          <a:bodyPr wrap="square" anchor="ctr" lIns="0" rIns="0" tIns="0" bIns="0">
+            <a:spAutoFit/>
+          </a:bodyPr>
+          <a:lstStyle/>
+          <a:p>
+            <a:pPr algn="ctr">
+              <a:lnSpc>
+                <a:spcPct val="110000"/>
+              </a:lnSpc>
+            </a:pPr>
+            <a:r>
+              <a:rPr sz="1150" b="1">
+                <a:solidFill>
+                  <a:srgbClr val="0E1B2A"/>
+                </a:solidFill>
+                <a:latin typeface="Avenir Next"/>
+              </a:rPr>
+              <a:t>Q, V, M, L</a:t>
+            </a:r>
+            <a:r>
+              <a:rPr sz="1150" b="0">
+                <a:solidFill>
+                  <a:srgbClr val="6B7787"/>
+                </a:solidFill>
+                <a:latin typeface="Avenir Next"/>
+              </a:rPr>
+              <a:t>  the four factor scores</a:t>
+            </a:r>
+          </a:p>
+        </p:txBody>
+      </p:sp>
+      <p:sp>
+        <p:nvSpPr>
+          <p:cNvPr id="14" name="TextBox 13"/>
+          <p:cNvSpPr txBox="1"/>
+          <p:nvPr/>
+        </p:nvSpPr>
+        <p:spPr>
+          <a:xfrm>
+            <a:off x="6492240" y="4407408"/>
             <a:ext cx="5029200" cy="548640"/>
           </a:xfrm>
           <a:prstGeom prst="rect">
@@ -9514,14 +10138,14 @@
                 </a:solidFill>
                 <a:latin typeface="Avenir Next"/>
               </a:rPr>
-              <a:t>Q, V, M, L are the four factor scores. The highest combined scores become the portfolio.</a:t>
-            </a:r>
-          </a:p>
-        </p:txBody>
-      </p:sp>
-      <p:sp>
-        <p:nvSpPr>
-          <p:cNvPr id="13" name="TextBox 12"/>
+              <a:t>The highest combined scores become the portfolio.</a:t>
+            </a:r>
+          </a:p>
+        </p:txBody>
+      </p:sp>
+      <p:sp>
+        <p:nvSpPr>
+          <p:cNvPr id="15" name="TextBox 14"/>
           <p:cNvSpPr txBox="1"/>
           <p:nvPr/>
         </p:nvSpPr>
@@ -9560,7 +10184,7 @@
       </p:sp>
       <p:sp>
         <p:nvSpPr>
-          <p:cNvPr id="14" name="TextBox 13"/>
+          <p:cNvPr id="16" name="TextBox 15"/>
           <p:cNvSpPr txBox="1"/>
           <p:nvPr/>
         </p:nvSpPr>
@@ -10626,7 +11250,7 @@
         <p:spPr>
           <a:xfrm>
             <a:off x="6492240" y="2624328"/>
-            <a:ext cx="5029200" cy="1234440"/>
+            <a:ext cx="5029200" cy="1554480"/>
           </a:xfrm>
           <a:prstGeom prst="roundRect">
             <a:avLst>
@@ -10720,8 +11344,8 @@
         </p:blipFill>
         <p:spPr>
           <a:xfrm>
-            <a:off x="7648094" y="3081528"/>
-            <a:ext cx="2717489" cy="777240"/>
+            <a:off x="7919844" y="3044952"/>
+            <a:ext cx="2173991" cy="621792"/>
           </a:xfrm>
           <a:prstGeom prst="rect">
             <a:avLst/>
@@ -10730,13 +11354,123 @@
       </p:pic>
       <p:sp>
         <p:nvSpPr>
-          <p:cNvPr id="12" name="TextBox 11"/>
-          <p:cNvSpPr txBox="1"/>
-          <p:nvPr/>
-        </p:nvSpPr>
-        <p:spPr>
-          <a:xfrm>
-            <a:off x="6492240" y="4087368"/>
+          <p:cNvPr id="12" name="Rectangle 11"/>
+          <p:cNvSpPr/>
+          <p:nvPr/>
+        </p:nvSpPr>
+        <p:spPr>
+          <a:xfrm>
+            <a:off x="6995159" y="3685032"/>
+            <a:ext cx="4023360" cy="12700"/>
+          </a:xfrm>
+          <a:prstGeom prst="rect">
+            <a:avLst/>
+          </a:prstGeom>
+          <a:solidFill>
+            <a:srgbClr val="DDE4EA"/>
+          </a:solidFill>
+          <a:ln>
+            <a:noFill/>
+          </a:ln>
+          <a:effectLst/>
+        </p:spPr>
+        <p:style>
+          <a:lnRef idx="1">
+            <a:schemeClr val="accent1"/>
+          </a:lnRef>
+          <a:fillRef idx="3">
+            <a:schemeClr val="accent1"/>
+          </a:fillRef>
+          <a:effectRef idx="2">
+            <a:schemeClr val="accent1"/>
+          </a:effectRef>
+          <a:fontRef idx="minor">
+            <a:schemeClr val="lt1"/>
+          </a:fontRef>
+        </p:style>
+        <p:txBody>
+          <a:bodyPr rtlCol="0" anchor="ctr"/>
+          <a:lstStyle/>
+          <a:p>
+            <a:pPr algn="ctr"/>
+          </a:p>
+        </p:txBody>
+      </p:sp>
+      <p:sp>
+        <p:nvSpPr>
+          <p:cNvPr id="13" name="TextBox 12"/>
+          <p:cNvSpPr txBox="1"/>
+          <p:nvPr/>
+        </p:nvSpPr>
+        <p:spPr>
+          <a:xfrm>
+            <a:off x="6858000" y="3758184"/>
+            <a:ext cx="4297680" cy="384048"/>
+          </a:xfrm>
+          <a:prstGeom prst="rect">
+            <a:avLst/>
+          </a:prstGeom>
+          <a:noFill/>
+        </p:spPr>
+        <p:txBody>
+          <a:bodyPr wrap="square" anchor="ctr" lIns="0" rIns="0" tIns="0" bIns="0">
+            <a:spAutoFit/>
+          </a:bodyPr>
+          <a:lstStyle/>
+          <a:p>
+            <a:pPr algn="ctr">
+              <a:lnSpc>
+                <a:spcPct val="110000"/>
+              </a:lnSpc>
+            </a:pPr>
+            <a:r>
+              <a:rPr sz="1150" b="1">
+                <a:solidFill>
+                  <a:srgbClr val="0E1B2A"/>
+                </a:solidFill>
+                <a:latin typeface="Avenir Next"/>
+              </a:rPr>
+              <a:t>w</a:t>
+            </a:r>
+            <a:r>
+              <a:rPr sz="1150" b="0">
+                <a:solidFill>
+                  <a:srgbClr val="6B7787"/>
+                </a:solidFill>
+                <a:latin typeface="Avenir Next"/>
+              </a:rPr>
+              <a:t>  each stock's weight       </a:t>
+            </a:r>
+            <a:r>
+              <a:rPr sz="1150" b="1">
+                <a:solidFill>
+                  <a:srgbClr val="0E1B2A"/>
+                </a:solidFill>
+                <a:latin typeface="Avenir Next"/>
+              </a:rPr>
+              <a:t>score</a:t>
+            </a:r>
+            <a:r>
+              <a:rPr sz="1150" b="0">
+                <a:solidFill>
+                  <a:srgbClr val="6B7787"/>
+                </a:solidFill>
+                <a:latin typeface="Avenir Next"/>
+              </a:rPr>
+              <a:t>  its combined factor score</a:t>
+            </a:r>
+          </a:p>
+        </p:txBody>
+      </p:sp>
+      <p:sp>
+        <p:nvSpPr>
+          <p:cNvPr id="14" name="TextBox 13"/>
+          <p:cNvSpPr txBox="1"/>
+          <p:nvPr/>
+        </p:nvSpPr>
+        <p:spPr>
+          <a:xfrm>
+            <a:off x="6492240" y="4361688"/>
             <a:ext cx="5029200" cy="640080"/>
           </a:xfrm>
           <a:prstGeom prst="rect">
@@ -10762,14 +11496,14 @@
                 </a:solidFill>
                 <a:latin typeface="Avenir Next"/>
               </a:rPr>
-              <a:t>w is each stock's weight; score is its combined factor score. Read: choose weights that put the most money in the best-scoring names.</a:t>
-            </a:r>
-          </a:p>
-        </p:txBody>
-      </p:sp>
-      <p:sp>
-        <p:nvSpPr>
-          <p:cNvPr id="13" name="TextBox 12"/>
+              <a:t>In plain terms: put the most money in the best-scoring names, within the limits.</a:t>
+            </a:r>
+          </a:p>
+        </p:txBody>
+      </p:sp>
+      <p:sp>
+        <p:nvSpPr>
+          <p:cNvPr id="15" name="TextBox 14"/>
           <p:cNvSpPr txBox="1"/>
           <p:nvPr/>
         </p:nvSpPr>
@@ -10808,7 +11542,7 @@
       </p:sp>
       <p:sp>
         <p:nvSpPr>
-          <p:cNvPr id="14" name="TextBox 13"/>
+          <p:cNvPr id="16" name="TextBox 15"/>
           <p:cNvSpPr txBox="1"/>
           <p:nvPr/>
         </p:nvSpPr>
@@ -15304,8 +16038,8 @@
         </p:blipFill>
         <p:spPr>
           <a:xfrm>
-            <a:off x="640080" y="2258568"/>
-            <a:ext cx="10908792" cy="2837796"/>
+            <a:off x="821273" y="2258568"/>
+            <a:ext cx="10546405" cy="2926080"/>
           </a:xfrm>
           <a:prstGeom prst="rect">
             <a:avLst/>
@@ -29479,8 +30213,8 @@
         </p:blipFill>
         <p:spPr>
           <a:xfrm>
-            <a:off x="914400" y="2493152"/>
-            <a:ext cx="4663440" cy="591534"/>
+            <a:off x="1005840" y="2459031"/>
+            <a:ext cx="4480560" cy="568336"/>
           </a:xfrm>
           <a:prstGeom prst="rect">
             <a:avLst/>
@@ -29590,8 +30324,8 @@
         </p:blipFill>
         <p:spPr>
           <a:xfrm>
-            <a:off x="6519672" y="2338142"/>
-            <a:ext cx="4663440" cy="901555"/>
+            <a:off x="6611112" y="2310099"/>
+            <a:ext cx="4480560" cy="866200"/>
           </a:xfrm>
           <a:prstGeom prst="rect">
             <a:avLst/>
@@ -29701,8 +30435,8 @@
         </p:blipFill>
         <p:spPr>
           <a:xfrm>
-            <a:off x="914400" y="4319748"/>
-            <a:ext cx="4663440" cy="504502"/>
+            <a:off x="1005840" y="4283920"/>
+            <a:ext cx="4480560" cy="484718"/>
           </a:xfrm>
           <a:prstGeom prst="rect">
             <a:avLst/>
@@ -29812,8 +30546,8 @@
         </p:blipFill>
         <p:spPr>
           <a:xfrm>
-            <a:off x="6519672" y="4183615"/>
-            <a:ext cx="4663440" cy="776769"/>
+            <a:off x="6611112" y="4153126"/>
+            <a:ext cx="4480560" cy="746307"/>
           </a:xfrm>
           <a:prstGeom prst="rect">
             <a:avLst/>
@@ -29828,8 +30562,8 @@
         </p:nvSpPr>
         <p:spPr>
           <a:xfrm>
-            <a:off x="640080" y="5394959"/>
-            <a:ext cx="10908792" cy="457200"/>
+            <a:off x="640080" y="5349240"/>
+            <a:ext cx="10908792" cy="548640"/>
           </a:xfrm>
           <a:prstGeom prst="rect">
             <a:avLst/>
@@ -29848,7 +30582,7 @@
               </a:lnSpc>
             </a:pPr>
             <a:r>
-              <a:rPr sz="1200" b="1">
+              <a:rPr sz="1150" b="1">
                 <a:solidFill>
                   <a:srgbClr val="0E1B2A"/>
                 </a:solidFill>
@@ -29857,13 +30591,85 @@
               <a:t>z(·)</a:t>
             </a:r>
             <a:r>
-              <a:rPr sz="1200" b="0">
+              <a:rPr sz="1150" b="0">
                 <a:solidFill>
                   <a:srgbClr val="6B7787"/>
                 </a:solidFill>
                 <a:latin typeface="Avenir Next"/>
               </a:rPr>
-              <a:t> is the standardising score from slide 8; each factor is combined equally into the final score.</a:t>
+              <a:t>  standardised score        </a:t>
+            </a:r>
+            <a:r>
+              <a:rPr sz="1150" b="1">
+                <a:solidFill>
+                  <a:srgbClr val="0E1B2A"/>
+                </a:solidFill>
+                <a:latin typeface="Avenir Next"/>
+              </a:rPr>
+              <a:t>E/P, B/P</a:t>
+            </a:r>
+            <a:r>
+              <a:rPr sz="1150" b="0">
+                <a:solidFill>
+                  <a:srgbClr val="6B7787"/>
+                </a:solidFill>
+                <a:latin typeface="Avenir Next"/>
+              </a:rPr>
+              <a:t>  earnings &amp; book yield        </a:t>
+            </a:r>
+            <a:r>
+              <a:rPr sz="1150" b="1">
+                <a:solidFill>
+                  <a:srgbClr val="0E1B2A"/>
+                </a:solidFill>
+                <a:latin typeface="Avenir Next"/>
+              </a:rPr>
+              <a:t>ROE</a:t>
+            </a:r>
+            <a:r>
+              <a:rPr sz="1150" b="0">
+                <a:solidFill>
+                  <a:srgbClr val="6B7787"/>
+                </a:solidFill>
+                <a:latin typeface="Avenir Next"/>
+              </a:rPr>
+              <a:t>  return on equity        </a:t>
+            </a:r>
+            <a:r>
+              <a:rPr sz="1150" b="1">
+                <a:solidFill>
+                  <a:srgbClr val="0E1B2A"/>
+                </a:solidFill>
+                <a:latin typeface="Avenir Next"/>
+              </a:rPr>
+              <a:t>margin</a:t>
+            </a:r>
+            <a:r>
+              <a:rPr sz="1150" b="0">
+                <a:solidFill>
+                  <a:srgbClr val="6B7787"/>
+                </a:solidFill>
+                <a:latin typeface="Avenir Next"/>
+              </a:rPr>
+              <a:t>  gross margin        </a:t>
+            </a:r>
+            <a:r>
+              <a:rPr sz="1150" b="1">
+                <a:solidFill>
+                  <a:srgbClr val="0E1B2A"/>
+                </a:solidFill>
+                <a:latin typeface="Avenir Next"/>
+              </a:rPr>
+              <a:t>σ</a:t>
+            </a:r>
+            <a:r>
+              <a:rPr sz="1150" b="0">
+                <a:solidFill>
+                  <a:srgbClr val="6B7787"/>
+                </a:solidFill>
+                <a:latin typeface="Avenir Next"/>
+              </a:rPr>
+              <a:t>  volatility</a:t>
             </a:r>
           </a:p>
         </p:txBody>
